--- a/skill-final-v1.pptx
+++ b/skill-final-v1.pptx
@@ -37193,7 +37193,7 @@
                 <a:ea typeface="微软雅黑"/>
                 <a:cs typeface="微软雅黑"/>
               </a:rPr>
-              <a:t>SkillHub 生态画像：Top1000 里，开发类拿走 21.8% 下载，付费标签仅 0.9%</a:t>
+              <a:t>SkillHub 生态画像：全站付费 10%、API Key 19%，分类比头部更均衡</a:t>
             </a:r>
           </a:p>
         </p:txBody>
@@ -37234,7 +37234,7 @@
                 <a:ea typeface="微软雅黑"/>
                 <a:cs typeface="微软雅黑"/>
               </a:rPr>
-              <a:t>生态画像：Top1000 下载头部</a:t>
+              <a:t>生态画像：来源/消费看 Top1000，分类/付费看全站</a:t>
             </a:r>
           </a:p>
         </p:txBody>
@@ -37921,7 +37921,7 @@
                 <a:ea typeface="微软雅黑"/>
                 <a:cs typeface="微软雅黑"/>
               </a:rPr>
-              <a:t>分类：开发类少而重，AI Agent 多而散</a:t>
+              <a:t>分类：全站结构更均衡，商业/专业/AI/开发居前</a:t>
             </a:r>
           </a:p>
         </p:txBody>
@@ -37962,7 +37962,7 @@
                 <a:ea typeface="微软雅黑"/>
                 <a:cs typeface="微软雅黑"/>
               </a:rPr>
-              <a:t>数量占比 / 下载占比</a:t>
+              <a:t>全站 200,403 条 · 条数占比</a:t>
             </a:r>
           </a:p>
         </p:txBody>
@@ -38003,7 +38003,7 @@
                 <a:ea typeface="微软雅黑"/>
                 <a:cs typeface="微软雅黑"/>
               </a:rPr>
-              <a:t>开发编程</a:t>
+              <a:t>商业运营</a:t>
             </a:r>
           </a:p>
         </p:txBody>
@@ -38063,7 +38063,7 @@
         <p:spPr>
           <a:xfrm>
             <a:off x="7376160" y="1481328"/>
-            <a:ext cx="638922" cy="68580"/>
+            <a:ext cx="1402080" cy="68580"/>
           </a:xfrm>
           <a:prstGeom prst="roundRect">
             <a:avLst>
@@ -38109,7 +38109,7 @@
         <p:spPr>
           <a:xfrm>
             <a:off x="8900160" y="1453896"/>
-            <a:ext cx="1341120" cy="137160"/>
+            <a:ext cx="731520" cy="137160"/>
           </a:xfrm>
           <a:prstGeom prst="rect">
             <a:avLst/>
@@ -38136,7 +38136,7 @@
                 <a:ea typeface="微软雅黑"/>
                 <a:cs typeface="微软雅黑"/>
               </a:rPr>
-              <a:t>7.2% / 21.8%</a:t>
+              <a:t>15.2%</a:t>
             </a:r>
           </a:p>
         </p:txBody>
@@ -38177,7 +38177,7 @@
                 <a:ea typeface="微软雅黑"/>
                 <a:cs typeface="微软雅黑"/>
               </a:rPr>
-              <a:t>AI Agent</a:t>
+              <a:t>专业服务</a:t>
             </a:r>
           </a:p>
         </p:txBody>
@@ -38237,7 +38237,7 @@
         <p:spPr>
           <a:xfrm>
             <a:off x="7376160" y="1687068"/>
-            <a:ext cx="1402080" cy="68580"/>
+            <a:ext cx="1070008" cy="68580"/>
           </a:xfrm>
           <a:prstGeom prst="roundRect">
             <a:avLst>
@@ -38283,7 +38283,7 @@
         <p:spPr>
           <a:xfrm>
             <a:off x="8900160" y="1659636"/>
-            <a:ext cx="1341120" cy="137160"/>
+            <a:ext cx="731520" cy="137160"/>
           </a:xfrm>
           <a:prstGeom prst="rect">
             <a:avLst/>
@@ -38310,7 +38310,7 @@
                 <a:ea typeface="微软雅黑"/>
                 <a:cs typeface="微软雅黑"/>
               </a:rPr>
-              <a:t>15.8% / 15.4%</a:t>
+              <a:t>11.6%</a:t>
             </a:r>
           </a:p>
         </p:txBody>
@@ -38351,7 +38351,7 @@
                 <a:ea typeface="微软雅黑"/>
                 <a:cs typeface="微软雅黑"/>
               </a:rPr>
-              <a:t>办公效率</a:t>
+              <a:t>AI Agent</a:t>
             </a:r>
           </a:p>
         </p:txBody>
@@ -38411,7 +38411,7 @@
         <p:spPr>
           <a:xfrm>
             <a:off x="7376160" y="1892808"/>
-            <a:ext cx="1126988" cy="68580"/>
+            <a:ext cx="1033111" cy="68580"/>
           </a:xfrm>
           <a:prstGeom prst="roundRect">
             <a:avLst>
@@ -38457,7 +38457,7 @@
         <p:spPr>
           <a:xfrm>
             <a:off x="8900160" y="1865376"/>
-            <a:ext cx="1341120" cy="137160"/>
+            <a:ext cx="731520" cy="137160"/>
           </a:xfrm>
           <a:prstGeom prst="rect">
             <a:avLst/>
@@ -38484,7 +38484,7 @@
                 <a:ea typeface="微软雅黑"/>
                 <a:cs typeface="微软雅黑"/>
               </a:rPr>
-              <a:t>12.7% / 10.4%</a:t>
+              <a:t>11.2%</a:t>
             </a:r>
           </a:p>
         </p:txBody>
@@ -38525,7 +38525,7 @@
                 <a:ea typeface="微软雅黑"/>
                 <a:cs typeface="微软雅黑"/>
               </a:rPr>
-              <a:t>知识管理</a:t>
+              <a:t>开发编程</a:t>
             </a:r>
           </a:p>
         </p:txBody>
@@ -38585,7 +38585,7 @@
         <p:spPr>
           <a:xfrm>
             <a:off x="7376160" y="2098548"/>
-            <a:ext cx="603426" cy="68580"/>
+            <a:ext cx="977766" cy="68580"/>
           </a:xfrm>
           <a:prstGeom prst="roundRect">
             <a:avLst>
@@ -38631,7 +38631,7 @@
         <p:spPr>
           <a:xfrm>
             <a:off x="8900160" y="2071116"/>
-            <a:ext cx="1341120" cy="137160"/>
+            <a:ext cx="731520" cy="137160"/>
           </a:xfrm>
           <a:prstGeom prst="rect">
             <a:avLst/>
@@ -38658,7 +38658,7 @@
                 <a:ea typeface="微软雅黑"/>
                 <a:cs typeface="微软雅黑"/>
               </a:rPr>
-              <a:t>6.8% / 9.5%</a:t>
+              <a:t>10.6%</a:t>
             </a:r>
           </a:p>
         </p:txBody>
@@ -38759,7 +38759,7 @@
         <p:spPr>
           <a:xfrm>
             <a:off x="7376160" y="2304288"/>
-            <a:ext cx="1047123" cy="68580"/>
+            <a:ext cx="867075" cy="68580"/>
           </a:xfrm>
           <a:prstGeom prst="roundRect">
             <a:avLst>
@@ -38805,7 +38805,7 @@
         <p:spPr>
           <a:xfrm>
             <a:off x="8900160" y="2276856"/>
-            <a:ext cx="1341120" cy="137160"/>
+            <a:ext cx="731520" cy="137160"/>
           </a:xfrm>
           <a:prstGeom prst="rect">
             <a:avLst/>
@@ -38832,7 +38832,7 @@
                 <a:ea typeface="微软雅黑"/>
                 <a:cs typeface="微软雅黑"/>
               </a:rPr>
-              <a:t>11.8% / 9.2%</a:t>
+              <a:t>9.4%</a:t>
             </a:r>
           </a:p>
         </p:txBody>
@@ -38933,7 +38933,7 @@
         <p:spPr>
           <a:xfrm>
             <a:off x="7376160" y="2510028"/>
-            <a:ext cx="1091492" cy="68580"/>
+            <a:ext cx="682591" cy="68580"/>
           </a:xfrm>
           <a:prstGeom prst="roundRect">
             <a:avLst>
@@ -38979,7 +38979,7 @@
         <p:spPr>
           <a:xfrm>
             <a:off x="8900160" y="2482596"/>
-            <a:ext cx="1341120" cy="137160"/>
+            <a:ext cx="731520" cy="137160"/>
           </a:xfrm>
           <a:prstGeom prst="rect">
             <a:avLst/>
@@ -39006,7 +39006,7 @@
                 <a:ea typeface="微软雅黑"/>
                 <a:cs typeface="微软雅黑"/>
               </a:rPr>
-              <a:t>12.3% / 8.1%</a:t>
+              <a:t>7.4%</a:t>
             </a:r>
           </a:p>
         </p:txBody>
@@ -39047,7 +39047,7 @@
                 <a:ea typeface="微软雅黑"/>
                 <a:cs typeface="微软雅黑"/>
               </a:rPr>
-              <a:t>开发类只占 7.2% 供给，却拿走 21.8% 下载；AI Agent 供给最多，下载占比略低。</a:t>
+              <a:t>其余 6 类合计 34.7%；12 个内容分类基本覆盖全站（10 条未挂类目）。</a:t>
             </a:r>
           </a:p>
         </p:txBody>
@@ -39088,7 +39088,7 @@
                 <a:ea typeface="微软雅黑"/>
                 <a:cs typeface="微软雅黑"/>
               </a:rPr>
-              <a:t>其余 6 类合计：33.4% 供给 / 25.6% 下载。</a:t>
+              <a:t>对比 Top1000：AI Agent 15.8%、开发 7.2%，头部结构与全站不同。</a:t>
             </a:r>
           </a:p>
         </p:txBody>
@@ -39129,7 +39129,7 @@
                 <a:ea typeface="微软雅黑"/>
                 <a:cs typeface="微软雅黑"/>
               </a:rPr>
-              <a:t>付费与 API Key：API Key 已三成，付费仍在边缘</a:t>
+              <a:t>付费与 API Key：全站 10.0% / 19.3%，头部结构相反</a:t>
             </a:r>
           </a:p>
         </p:txBody>
@@ -39170,7 +39170,7 @@
                 <a:ea typeface="微软雅黑"/>
                 <a:cs typeface="微软雅黑"/>
               </a:rPr>
-              <a:t>Top1000 条 · 条数占比 / 下载占比</a:t>
+              <a:t>全站 200,403 条 · 条数占比</a:t>
             </a:r>
           </a:p>
         </p:txBody>
@@ -39211,7 +39211,7 @@
                 <a:ea typeface="微软雅黑"/>
                 <a:cs typeface="微软雅黑"/>
               </a:rPr>
-              <a:t>0.9%</a:t>
+              <a:t>10.0%</a:t>
             </a:r>
           </a:p>
         </p:txBody>
@@ -39252,7 +39252,7 @@
                 <a:ea typeface="微软雅黑"/>
                 <a:cs typeface="微软雅黑"/>
               </a:rPr>
-              <a:t>PaySkill（9 条）</a:t>
+              <a:t>Pay Skill（20,125 条）</a:t>
             </a:r>
           </a:p>
         </p:txBody>
@@ -39293,7 +39293,7 @@
                 <a:ea typeface="微软雅黑"/>
                 <a:cs typeface="微软雅黑"/>
               </a:rPr>
-              <a:t>30.7%</a:t>
+              <a:t>19.3%</a:t>
             </a:r>
           </a:p>
         </p:txBody>
@@ -39334,7 +39334,7 @@
                 <a:ea typeface="微软雅黑"/>
                 <a:cs typeface="微软雅黑"/>
               </a:rPr>
-              <a:t>API Key（307 条）</a:t>
+              <a:t>API Key（38,646 条）</a:t>
             </a:r>
           </a:p>
         </p:txBody>
@@ -39348,7 +39348,7 @@
         <p:spPr>
           <a:xfrm>
             <a:off x="426720" y="4491990"/>
-            <a:ext cx="5364480" cy="514350"/>
+            <a:ext cx="5364480" cy="582930"/>
           </a:xfrm>
           <a:prstGeom prst="rect">
             <a:avLst/>
@@ -39375,8 +39375,8 @@
                 <a:ea typeface="微软雅黑"/>
                 <a:cs typeface="微软雅黑"/>
               </a:rPr>
-              <a:t>付费下载占比 0.8%；API Key 下载占比 21.6%；付费且 API Key 仅 1 条；
-Pay Skill 分类在 Top1000 为 0 条。付费标签按 pricing_type=paid/alipay 统计。</a:t>
+              <a:t>付费标签 17,123（8.5%）、支付宝 2,901（1.4%）；Pay Skill 且 API Key 331 条。
+Top1000：付费 0.9%、API Key 30.7%；Pay Skill 是多标签分类，不计入左侧 12 类。</a:t>
             </a:r>
           </a:p>
         </p:txBody>
@@ -39786,7 +39786,7 @@
                 <a:ea typeface="微软雅黑"/>
                 <a:cs typeface="微软雅黑"/>
               </a:rPr>
-              <a:t>读法：ClawHub 撑数量，社区撑下载，开发类最重；付费仍在边缘，API Key 已是三成供给。</a:t>
+              <a:t>读法：全站付费 10%、API Key 19%，但头部下载集中在编程；Top1000 付费标签只有 0.9%。</a:t>
             </a:r>
           </a:p>
         </p:txBody>

--- a/skill-final-v1.pptx
+++ b/skill-final-v1.pptx
@@ -37193,7 +37193,7 @@
                 <a:ea typeface="微软雅黑"/>
                 <a:cs typeface="微软雅黑"/>
               </a:rPr>
-              <a:t>SkillHub 生态画像：全站付费 10%、API Key 19%，分类比头部更均衡</a:t>
+              <a:t>SkillHub 生态画像：Top5000 里，个人 24.9%、企业 12.7%、镜像 62.4%</a:t>
             </a:r>
           </a:p>
         </p:txBody>
@@ -37206,8 +37206,8 @@
         </p:nvSpPr>
         <p:spPr>
           <a:xfrm>
-            <a:off x="426720" y="754380"/>
-            <a:ext cx="4876800" cy="178308"/>
+            <a:off x="426720" y="740664"/>
+            <a:ext cx="10972800" cy="164592"/>
           </a:xfrm>
           <a:prstGeom prst="rect">
             <a:avLst/>
@@ -37226,15 +37226,15 @@
               </a:lnSpc>
             </a:pPr>
             <a:r>
-              <a:rPr sz="1200" b="1">
-                <a:solidFill>
-                  <a:srgbClr val="1A1A1C"/>
-                </a:solidFill>
-                <a:latin typeface="微软雅黑"/>
-                <a:ea typeface="微软雅黑"/>
-                <a:cs typeface="微软雅黑"/>
-              </a:rPr>
-              <a:t>生态画像：来源/消费看 Top1000，分类/付费看全站</a:t>
+              <a:rPr sz="1000" b="0">
+                <a:solidFill>
+                  <a:srgbClr val="5B616B"/>
+                </a:solidFill>
+                <a:latin typeface="微软雅黑"/>
+                <a:ea typeface="微软雅黑"/>
+                <a:cs typeface="微软雅黑"/>
+              </a:rPr>
+              <a:t>镜像撑数量，个人下载份额最高，企业单条最强；全站付费 10%，头部只有 1%。</a:t>
             </a:r>
           </a:p>
         </p:txBody>
@@ -37247,7 +37247,7 @@
         </p:nvSpPr>
         <p:spPr>
           <a:xfrm>
-            <a:off x="426720" y="1028700"/>
+            <a:off x="426720" y="994409"/>
             <a:ext cx="5364480" cy="164592"/>
           </a:xfrm>
           <a:prstGeom prst="rect">
@@ -37275,7 +37275,7 @@
                 <a:ea typeface="微软雅黑"/>
                 <a:cs typeface="微软雅黑"/>
               </a:rPr>
-              <a:t>谁在供给：ClawHub 数量最多，社区拿走最多下载</a:t>
+              <a:t>三种上架方：镜像最多，个人最重，企业最强</a:t>
             </a:r>
           </a:p>
         </p:txBody>
@@ -37288,7 +37288,7 @@
         </p:nvSpPr>
         <p:spPr>
           <a:xfrm>
-            <a:off x="426720" y="1193292"/>
+            <a:off x="426720" y="1152144"/>
             <a:ext cx="5364480" cy="137160"/>
           </a:xfrm>
           <a:prstGeom prst="rect">
@@ -37316,7 +37316,7 @@
                 <a:ea typeface="微软雅黑"/>
                 <a:cs typeface="微软雅黑"/>
               </a:rPr>
-              <a:t>Top1000 条 · 数量占比 / 下载占比</a:t>
+              <a:t>Top5000 条 · 数量 / 下载</a:t>
             </a:r>
           </a:p>
         </p:txBody>
@@ -37329,7 +37329,7 @@
         </p:nvSpPr>
         <p:spPr>
           <a:xfrm>
-            <a:off x="426720" y="1453896"/>
+            <a:off x="426720" y="1371600"/>
             <a:ext cx="1036320" cy="137160"/>
           </a:xfrm>
           <a:prstGeom prst="rect">
@@ -37357,7 +37357,7 @@
                 <a:ea typeface="微软雅黑"/>
                 <a:cs typeface="微软雅黑"/>
               </a:rPr>
-              <a:t>ClawHub</a:t>
+              <a:t>个人 / 社区</a:t>
             </a:r>
           </a:p>
         </p:txBody>
@@ -37370,8 +37370,8 @@
         </p:nvSpPr>
         <p:spPr>
           <a:xfrm>
-            <a:off x="1524000" y="1481328"/>
-            <a:ext cx="2072640" cy="75438"/>
+            <a:off x="1524000" y="1399032"/>
+            <a:ext cx="1828800" cy="68580"/>
           </a:xfrm>
           <a:prstGeom prst="roundRect">
             <a:avLst>
@@ -37416,8 +37416,8 @@
         </p:nvSpPr>
         <p:spPr>
           <a:xfrm>
-            <a:off x="1524000" y="1481328"/>
-            <a:ext cx="2072640" cy="75438"/>
+            <a:off x="1524000" y="1399032"/>
+            <a:ext cx="729761" cy="68580"/>
           </a:xfrm>
           <a:prstGeom prst="roundRect">
             <a:avLst>
@@ -37425,7 +37425,7 @@
             </a:avLst>
           </a:prstGeom>
           <a:solidFill>
-            <a:srgbClr val="9AA1AA"/>
+            <a:srgbClr val="B5333B"/>
           </a:solidFill>
           <a:ln>
             <a:noFill/>
@@ -37462,8 +37462,8 @@
         </p:nvSpPr>
         <p:spPr>
           <a:xfrm>
-            <a:off x="3779520" y="1453896"/>
-            <a:ext cx="2011680" cy="137160"/>
+            <a:off x="3560064" y="1371600"/>
+            <a:ext cx="1950720" cy="137160"/>
           </a:xfrm>
           <a:prstGeom prst="rect">
             <a:avLst/>
@@ -37482,7 +37482,7 @@
               </a:lnSpc>
             </a:pPr>
             <a:r>
-              <a:rPr sz="900" b="0">
+              <a:rPr sz="850" b="0">
                 <a:solidFill>
                   <a:srgbClr val="1A1A1C"/>
                 </a:solidFill>
@@ -37490,7 +37490,7 @@
                 <a:ea typeface="微软雅黑"/>
                 <a:cs typeface="微软雅黑"/>
               </a:rPr>
-              <a:t>44.7% / 27.0%</a:t>
+              <a:t>24.9% / 39.8%</a:t>
             </a:r>
           </a:p>
         </p:txBody>
@@ -37503,7 +37503,7 @@
         </p:nvSpPr>
         <p:spPr>
           <a:xfrm>
-            <a:off x="426720" y="1728216"/>
+            <a:off x="426720" y="1577340"/>
             <a:ext cx="1036320" cy="137160"/>
           </a:xfrm>
           <a:prstGeom prst="rect">
@@ -37531,7 +37531,7 @@
                 <a:ea typeface="微软雅黑"/>
                 <a:cs typeface="微软雅黑"/>
               </a:rPr>
-              <a:t>社区</a:t>
+              <a:t>企业</a:t>
             </a:r>
           </a:p>
         </p:txBody>
@@ -37544,8 +37544,8 @@
         </p:nvSpPr>
         <p:spPr>
           <a:xfrm>
-            <a:off x="1524000" y="1755648"/>
-            <a:ext cx="2072640" cy="75438"/>
+            <a:off x="1524000" y="1604772"/>
+            <a:ext cx="1828800" cy="68580"/>
           </a:xfrm>
           <a:prstGeom prst="roundRect">
             <a:avLst>
@@ -37590,8 +37590,8 @@
         </p:nvSpPr>
         <p:spPr>
           <a:xfrm>
-            <a:off x="1524000" y="1755648"/>
-            <a:ext cx="1414217" cy="75438"/>
+            <a:off x="1524000" y="1604772"/>
+            <a:ext cx="372207" cy="68580"/>
           </a:xfrm>
           <a:prstGeom prst="roundRect">
             <a:avLst>
@@ -37599,7 +37599,7 @@
             </a:avLst>
           </a:prstGeom>
           <a:solidFill>
-            <a:srgbClr val="B5333B"/>
+            <a:srgbClr val="566472"/>
           </a:solidFill>
           <a:ln>
             <a:noFill/>
@@ -37636,8 +37636,8 @@
         </p:nvSpPr>
         <p:spPr>
           <a:xfrm>
-            <a:off x="3779520" y="1728216"/>
-            <a:ext cx="2011680" cy="137160"/>
+            <a:off x="3560064" y="1577340"/>
+            <a:ext cx="1950720" cy="137160"/>
           </a:xfrm>
           <a:prstGeom prst="rect">
             <a:avLst/>
@@ -37656,7 +37656,7 @@
               </a:lnSpc>
             </a:pPr>
             <a:r>
-              <a:rPr sz="900" b="0">
+              <a:rPr sz="850" b="0">
                 <a:solidFill>
                   <a:srgbClr val="1A1A1C"/>
                 </a:solidFill>
@@ -37664,7 +37664,7 @@
                 <a:ea typeface="微软雅黑"/>
                 <a:cs typeface="微软雅黑"/>
               </a:rPr>
-              <a:t>30.5% / 44.2%</a:t>
+              <a:t>12.7% / 24.7%</a:t>
             </a:r>
           </a:p>
         </p:txBody>
@@ -37677,7 +37677,7 @@
         </p:nvSpPr>
         <p:spPr>
           <a:xfrm>
-            <a:off x="426720" y="2002536"/>
+            <a:off x="426720" y="1783080"/>
             <a:ext cx="1036320" cy="137160"/>
           </a:xfrm>
           <a:prstGeom prst="rect">
@@ -37705,7 +37705,7 @@
                 <a:ea typeface="微软雅黑"/>
                 <a:cs typeface="微软雅黑"/>
               </a:rPr>
-              <a:t>企业</a:t>
+              <a:t>镜像 ClawHub</a:t>
             </a:r>
           </a:p>
         </p:txBody>
@@ -37718,8 +37718,8 @@
         </p:nvSpPr>
         <p:spPr>
           <a:xfrm>
-            <a:off x="1524000" y="2029968"/>
-            <a:ext cx="2072640" cy="75438"/>
+            <a:off x="1524000" y="1810512"/>
+            <a:ext cx="1828800" cy="68580"/>
           </a:xfrm>
           <a:prstGeom prst="roundRect">
             <a:avLst>
@@ -37764,8 +37764,8 @@
         </p:nvSpPr>
         <p:spPr>
           <a:xfrm>
-            <a:off x="1524000" y="2029968"/>
-            <a:ext cx="1149921" cy="75438"/>
+            <a:off x="1524000" y="1810512"/>
+            <a:ext cx="1828800" cy="68580"/>
           </a:xfrm>
           <a:prstGeom prst="roundRect">
             <a:avLst>
@@ -37773,7 +37773,7 @@
             </a:avLst>
           </a:prstGeom>
           <a:solidFill>
-            <a:srgbClr val="9AA1AA"/>
+            <a:srgbClr val="CFD4DA"/>
           </a:solidFill>
           <a:ln>
             <a:noFill/>
@@ -37810,8 +37810,8 @@
         </p:nvSpPr>
         <p:spPr>
           <a:xfrm>
-            <a:off x="3779520" y="2002536"/>
-            <a:ext cx="2011680" cy="137160"/>
+            <a:off x="3560064" y="1783080"/>
+            <a:ext cx="1950720" cy="137160"/>
           </a:xfrm>
           <a:prstGeom prst="rect">
             <a:avLst/>
@@ -37830,7 +37830,7 @@
               </a:lnSpc>
             </a:pPr>
             <a:r>
-              <a:rPr sz="900" b="0">
+              <a:rPr sz="850" b="0">
                 <a:solidFill>
                   <a:srgbClr val="1A1A1C"/>
                 </a:solidFill>
@@ -37838,7 +37838,7 @@
                 <a:ea typeface="微软雅黑"/>
                 <a:cs typeface="微软雅黑"/>
               </a:rPr>
-              <a:t>24.8% / 28.8%</a:t>
+              <a:t>62.4% / 35.5%</a:t>
             </a:r>
           </a:p>
         </p:txBody>
@@ -37851,8 +37851,8 @@
         </p:nvSpPr>
         <p:spPr>
           <a:xfrm>
-            <a:off x="426720" y="2331720"/>
-            <a:ext cx="5364480" cy="342900"/>
+            <a:off x="426720" y="2023110"/>
+            <a:ext cx="5364480" cy="329184"/>
           </a:xfrm>
           <a:prstGeom prst="rect">
             <a:avLst/>
@@ -37867,7 +37867,7 @@
           <a:p>
             <a:pPr algn="l">
               <a:lnSpc>
-                <a:spcPct val="115000"/>
+                <a:spcPct val="110000"/>
               </a:lnSpc>
             </a:pPr>
             <a:r>
@@ -37879,8 +37879,8 @@
                 <a:ea typeface="微软雅黑"/>
                 <a:cs typeface="微软雅黑"/>
               </a:rPr>
-              <a:t>社区 = 个人/社区作者；ClawHub = 外部同步；企业 = 认证企业。
-Top1000 里 ClawHub 条数最多，但下载份额低于社区。</a:t>
+              <a:t>个人条数少、下载高；镜像条数最多；企业单条最强见右图。
+个人 1,245 条 / 企业 633 条 / 镜像 3,122 条。</a:t>
             </a:r>
           </a:p>
         </p:txBody>
@@ -37893,7 +37893,7 @@
         </p:nvSpPr>
         <p:spPr>
           <a:xfrm>
-            <a:off x="6217920" y="1028700"/>
+            <a:off x="6217920" y="994409"/>
             <a:ext cx="5364480" cy="164592"/>
           </a:xfrm>
           <a:prstGeom prst="rect">
@@ -37921,7 +37921,7 @@
                 <a:ea typeface="微软雅黑"/>
                 <a:cs typeface="微软雅黑"/>
               </a:rPr>
-              <a:t>分类：全站结构更均衡，商业/专业/AI/开发居前</a:t>
+              <a:t>分类：全站商业 / 专业 / AI / 开发居前</a:t>
             </a:r>
           </a:p>
         </p:txBody>
@@ -37934,7 +37934,7 @@
         </p:nvSpPr>
         <p:spPr>
           <a:xfrm>
-            <a:off x="6217920" y="1193292"/>
+            <a:off x="6217920" y="1152144"/>
             <a:ext cx="5364480" cy="137160"/>
           </a:xfrm>
           <a:prstGeom prst="rect">
@@ -37975,8 +37975,8 @@
         </p:nvSpPr>
         <p:spPr>
           <a:xfrm>
-            <a:off x="6217920" y="1453896"/>
-            <a:ext cx="1097280" cy="137160"/>
+            <a:off x="6217920" y="1357884"/>
+            <a:ext cx="1036320" cy="137160"/>
           </a:xfrm>
           <a:prstGeom prst="rect">
             <a:avLst/>
@@ -38016,8 +38016,8 @@
         </p:nvSpPr>
         <p:spPr>
           <a:xfrm>
-            <a:off x="7376160" y="1481328"/>
-            <a:ext cx="1402080" cy="68580"/>
+            <a:off x="7315200" y="1385316"/>
+            <a:ext cx="1341120" cy="61721"/>
           </a:xfrm>
           <a:prstGeom prst="roundRect">
             <a:avLst>
@@ -38062,8 +38062,8 @@
         </p:nvSpPr>
         <p:spPr>
           <a:xfrm>
-            <a:off x="7376160" y="1481328"/>
-            <a:ext cx="1402080" cy="68580"/>
+            <a:off x="7315200" y="1385316"/>
+            <a:ext cx="1341120" cy="61721"/>
           </a:xfrm>
           <a:prstGeom prst="roundRect">
             <a:avLst>
@@ -38108,7 +38108,7 @@
         </p:nvSpPr>
         <p:spPr>
           <a:xfrm>
-            <a:off x="8900160" y="1453896"/>
+            <a:off x="8778240" y="1357884"/>
             <a:ext cx="731520" cy="137160"/>
           </a:xfrm>
           <a:prstGeom prst="rect">
@@ -38149,8 +38149,8 @@
         </p:nvSpPr>
         <p:spPr>
           <a:xfrm>
-            <a:off x="6217920" y="1659636"/>
-            <a:ext cx="1097280" cy="137160"/>
+            <a:off x="6217920" y="1508760"/>
+            <a:ext cx="1036320" cy="137160"/>
           </a:xfrm>
           <a:prstGeom prst="rect">
             <a:avLst/>
@@ -38190,8 +38190,8 @@
         </p:nvSpPr>
         <p:spPr>
           <a:xfrm>
-            <a:off x="7376160" y="1687068"/>
-            <a:ext cx="1402080" cy="68580"/>
+            <a:off x="7315200" y="1536192"/>
+            <a:ext cx="1341120" cy="61721"/>
           </a:xfrm>
           <a:prstGeom prst="roundRect">
             <a:avLst>
@@ -38236,8 +38236,8 @@
         </p:nvSpPr>
         <p:spPr>
           <a:xfrm>
-            <a:off x="7376160" y="1687068"/>
-            <a:ext cx="1070008" cy="68580"/>
+            <a:off x="7315200" y="1536192"/>
+            <a:ext cx="1023486" cy="61721"/>
           </a:xfrm>
           <a:prstGeom prst="roundRect">
             <a:avLst>
@@ -38282,7 +38282,7 @@
         </p:nvSpPr>
         <p:spPr>
           <a:xfrm>
-            <a:off x="8900160" y="1659636"/>
+            <a:off x="8778240" y="1508760"/>
             <a:ext cx="731520" cy="137160"/>
           </a:xfrm>
           <a:prstGeom prst="rect">
@@ -38323,8 +38323,8 @@
         </p:nvSpPr>
         <p:spPr>
           <a:xfrm>
-            <a:off x="6217920" y="1865376"/>
-            <a:ext cx="1097280" cy="137160"/>
+            <a:off x="6217920" y="1659636"/>
+            <a:ext cx="1036320" cy="137160"/>
           </a:xfrm>
           <a:prstGeom prst="rect">
             <a:avLst/>
@@ -38364,8 +38364,8 @@
         </p:nvSpPr>
         <p:spPr>
           <a:xfrm>
-            <a:off x="7376160" y="1892808"/>
-            <a:ext cx="1402080" cy="68580"/>
+            <a:off x="7315200" y="1687068"/>
+            <a:ext cx="1341120" cy="61721"/>
           </a:xfrm>
           <a:prstGeom prst="roundRect">
             <a:avLst>
@@ -38410,8 +38410,8 @@
         </p:nvSpPr>
         <p:spPr>
           <a:xfrm>
-            <a:off x="7376160" y="1892808"/>
-            <a:ext cx="1033111" cy="68580"/>
+            <a:off x="7315200" y="1687068"/>
+            <a:ext cx="988193" cy="61721"/>
           </a:xfrm>
           <a:prstGeom prst="roundRect">
             <a:avLst>
@@ -38456,7 +38456,7 @@
         </p:nvSpPr>
         <p:spPr>
           <a:xfrm>
-            <a:off x="8900160" y="1865376"/>
+            <a:off x="8778240" y="1659636"/>
             <a:ext cx="731520" cy="137160"/>
           </a:xfrm>
           <a:prstGeom prst="rect">
@@ -38497,8 +38497,8 @@
         </p:nvSpPr>
         <p:spPr>
           <a:xfrm>
-            <a:off x="6217920" y="2071116"/>
-            <a:ext cx="1097280" cy="137160"/>
+            <a:off x="6217920" y="1810512"/>
+            <a:ext cx="1036320" cy="137160"/>
           </a:xfrm>
           <a:prstGeom prst="rect">
             <a:avLst/>
@@ -38538,8 +38538,8 @@
         </p:nvSpPr>
         <p:spPr>
           <a:xfrm>
-            <a:off x="7376160" y="2098548"/>
-            <a:ext cx="1402080" cy="68580"/>
+            <a:off x="7315200" y="1837944"/>
+            <a:ext cx="1341120" cy="61721"/>
           </a:xfrm>
           <a:prstGeom prst="roundRect">
             <a:avLst>
@@ -38584,8 +38584,8 @@
         </p:nvSpPr>
         <p:spPr>
           <a:xfrm>
-            <a:off x="7376160" y="2098548"/>
-            <a:ext cx="977766" cy="68580"/>
+            <a:off x="7315200" y="1837944"/>
+            <a:ext cx="935254" cy="61721"/>
           </a:xfrm>
           <a:prstGeom prst="roundRect">
             <a:avLst>
@@ -38630,7 +38630,7 @@
         </p:nvSpPr>
         <p:spPr>
           <a:xfrm>
-            <a:off x="8900160" y="2071116"/>
+            <a:off x="8778240" y="1810512"/>
             <a:ext cx="731520" cy="137160"/>
           </a:xfrm>
           <a:prstGeom prst="rect">
@@ -38671,8 +38671,8 @@
         </p:nvSpPr>
         <p:spPr>
           <a:xfrm>
-            <a:off x="6217920" y="2276856"/>
-            <a:ext cx="1097280" cy="137160"/>
+            <a:off x="6217920" y="1961388"/>
+            <a:ext cx="1036320" cy="137160"/>
           </a:xfrm>
           <a:prstGeom prst="rect">
             <a:avLst/>
@@ -38712,8 +38712,8 @@
         </p:nvSpPr>
         <p:spPr>
           <a:xfrm>
-            <a:off x="7376160" y="2304288"/>
-            <a:ext cx="1402080" cy="68580"/>
+            <a:off x="7315200" y="1988820"/>
+            <a:ext cx="1341120" cy="61721"/>
           </a:xfrm>
           <a:prstGeom prst="roundRect">
             <a:avLst>
@@ -38758,8 +38758,8 @@
         </p:nvSpPr>
         <p:spPr>
           <a:xfrm>
-            <a:off x="7376160" y="2304288"/>
-            <a:ext cx="867075" cy="68580"/>
+            <a:off x="7315200" y="1988820"/>
+            <a:ext cx="829376" cy="61721"/>
           </a:xfrm>
           <a:prstGeom prst="roundRect">
             <a:avLst>
@@ -38804,7 +38804,7 @@
         </p:nvSpPr>
         <p:spPr>
           <a:xfrm>
-            <a:off x="8900160" y="2276856"/>
+            <a:off x="8778240" y="1961388"/>
             <a:ext cx="731520" cy="137160"/>
           </a:xfrm>
           <a:prstGeom prst="rect">
@@ -38845,8 +38845,8 @@
         </p:nvSpPr>
         <p:spPr>
           <a:xfrm>
-            <a:off x="6217920" y="2482596"/>
-            <a:ext cx="1097280" cy="137160"/>
+            <a:off x="6217920" y="2112264"/>
+            <a:ext cx="1036320" cy="137160"/>
           </a:xfrm>
           <a:prstGeom prst="rect">
             <a:avLst/>
@@ -38886,8 +38886,8 @@
         </p:nvSpPr>
         <p:spPr>
           <a:xfrm>
-            <a:off x="7376160" y="2510028"/>
-            <a:ext cx="1402080" cy="68580"/>
+            <a:off x="7315200" y="2139696"/>
+            <a:ext cx="1341120" cy="61721"/>
           </a:xfrm>
           <a:prstGeom prst="roundRect">
             <a:avLst>
@@ -38932,8 +38932,8 @@
         </p:nvSpPr>
         <p:spPr>
           <a:xfrm>
-            <a:off x="7376160" y="2510028"/>
-            <a:ext cx="682591" cy="68580"/>
+            <a:off x="7315200" y="2139696"/>
+            <a:ext cx="652913" cy="61721"/>
           </a:xfrm>
           <a:prstGeom prst="roundRect">
             <a:avLst>
@@ -38978,7 +38978,7 @@
         </p:nvSpPr>
         <p:spPr>
           <a:xfrm>
-            <a:off x="8900160" y="2482596"/>
+            <a:off x="8778240" y="2112264"/>
             <a:ext cx="731520" cy="137160"/>
           </a:xfrm>
           <a:prstGeom prst="rect">
@@ -39019,8 +39019,8 @@
         </p:nvSpPr>
         <p:spPr>
           <a:xfrm>
-            <a:off x="6217920" y="2777490"/>
-            <a:ext cx="5364480" cy="150876"/>
+            <a:off x="6217920" y="2276856"/>
+            <a:ext cx="5364480" cy="240030"/>
           </a:xfrm>
           <a:prstGeom prst="rect">
             <a:avLst/>
@@ -39047,7 +39047,7 @@
                 <a:ea typeface="微软雅黑"/>
                 <a:cs typeface="微软雅黑"/>
               </a:rPr>
-              <a:t>其余 6 类合计 34.7%；12 个内容分类基本覆盖全站（10 条未挂类目）。</a:t>
+              <a:t>其余 6 类 34.7%；12 个内容分类覆盖全站；Pay Skill 10.0% 为多标签，另计。</a:t>
             </a:r>
           </a:p>
         </p:txBody>
@@ -39060,8 +39060,8 @@
         </p:nvSpPr>
         <p:spPr>
           <a:xfrm>
-            <a:off x="6217920" y="2962656"/>
-            <a:ext cx="5364480" cy="137160"/>
+            <a:off x="426720" y="2640330"/>
+            <a:ext cx="5364480" cy="164592"/>
           </a:xfrm>
           <a:prstGeom prst="rect">
             <a:avLst/>
@@ -39080,15 +39080,15 @@
               </a:lnSpc>
             </a:pPr>
             <a:r>
-              <a:rPr sz="850" b="0">
-                <a:solidFill>
-                  <a:srgbClr val="8B8E94"/>
-                </a:solidFill>
-                <a:latin typeface="微软雅黑"/>
-                <a:ea typeface="微软雅黑"/>
-                <a:cs typeface="微软雅黑"/>
-              </a:rPr>
-              <a:t>对比 Top1000：AI Agent 15.8%、开发 7.2%，头部结构与全站不同。</a:t>
+              <a:rPr sz="1050" b="1">
+                <a:solidFill>
+                  <a:srgbClr val="1A1A1C"/>
+                </a:solidFill>
+                <a:latin typeface="微软雅黑"/>
+                <a:ea typeface="微软雅黑"/>
+                <a:cs typeface="微软雅黑"/>
+              </a:rPr>
+              <a:t>消费集中度：Top10 24.2%，Top100 48.9%</a:t>
             </a:r>
           </a:p>
         </p:txBody>
@@ -39101,8 +39101,8 @@
         </p:nvSpPr>
         <p:spPr>
           <a:xfrm>
-            <a:off x="426720" y="3566160"/>
-            <a:ext cx="5364480" cy="164592"/>
+            <a:off x="426720" y="2798064"/>
+            <a:ext cx="5364480" cy="137160"/>
           </a:xfrm>
           <a:prstGeom prst="rect">
             <a:avLst/>
@@ -39121,15 +39121,15 @@
               </a:lnSpc>
             </a:pPr>
             <a:r>
-              <a:rPr sz="1050" b="1">
-                <a:solidFill>
-                  <a:srgbClr val="1A1A1C"/>
-                </a:solidFill>
-                <a:latin typeface="微软雅黑"/>
-                <a:ea typeface="微软雅黑"/>
-                <a:cs typeface="微软雅黑"/>
-              </a:rPr>
-              <a:t>付费与 API Key：全站 10.0% / 19.3%，头部结构相反</a:t>
+              <a:rPr sz="850" b="0">
+                <a:solidFill>
+                  <a:srgbClr val="8B8E94"/>
+                </a:solidFill>
+                <a:latin typeface="微软雅黑"/>
+                <a:ea typeface="微软雅黑"/>
+                <a:cs typeface="微软雅黑"/>
+              </a:rPr>
+              <a:t>Top5000 总下载 1.35 亿 · 中位 7,521</a:t>
             </a:r>
           </a:p>
         </p:txBody>
@@ -39142,8 +39142,8 @@
         </p:nvSpPr>
         <p:spPr>
           <a:xfrm>
-            <a:off x="426720" y="3730752"/>
-            <a:ext cx="5364480" cy="137160"/>
+            <a:off x="426720" y="3017520"/>
+            <a:ext cx="1463040" cy="233172"/>
           </a:xfrm>
           <a:prstGeom prst="rect">
             <a:avLst/>
@@ -39162,15 +39162,15 @@
               </a:lnSpc>
             </a:pPr>
             <a:r>
-              <a:rPr sz="850" b="0">
-                <a:solidFill>
-                  <a:srgbClr val="8B8E94"/>
-                </a:solidFill>
-                <a:latin typeface="微软雅黑"/>
-                <a:ea typeface="微软雅黑"/>
-                <a:cs typeface="微软雅黑"/>
-              </a:rPr>
-              <a:t>全站 200,403 条 · 条数占比</a:t>
+              <a:rPr sz="1600" b="1">
+                <a:solidFill>
+                  <a:srgbClr val="B5333B"/>
+                </a:solidFill>
+                <a:latin typeface="微软雅黑"/>
+                <a:ea typeface="微软雅黑"/>
+                <a:cs typeface="微软雅黑"/>
+              </a:rPr>
+              <a:t>3.9%</a:t>
             </a:r>
           </a:p>
         </p:txBody>
@@ -39183,8 +39183,8 @@
         </p:nvSpPr>
         <p:spPr>
           <a:xfrm>
-            <a:off x="426720" y="3963923"/>
-            <a:ext cx="1402080" cy="274320"/>
+            <a:off x="426720" y="3223260"/>
+            <a:ext cx="1828800" cy="137160"/>
           </a:xfrm>
           <a:prstGeom prst="rect">
             <a:avLst/>
@@ -39203,15 +39203,15 @@
               </a:lnSpc>
             </a:pPr>
             <a:r>
-              <a:rPr sz="1800" b="1">
-                <a:solidFill>
-                  <a:srgbClr val="B5333B"/>
-                </a:solidFill>
-                <a:latin typeface="微软雅黑"/>
-                <a:ea typeface="微软雅黑"/>
-                <a:cs typeface="微软雅黑"/>
-              </a:rPr>
-              <a:t>10.0%</a:t>
+              <a:rPr sz="850" b="0">
+                <a:solidFill>
+                  <a:srgbClr val="5B616B"/>
+                </a:solidFill>
+                <a:latin typeface="微软雅黑"/>
+                <a:ea typeface="微软雅黑"/>
+                <a:cs typeface="微软雅黑"/>
+              </a:rPr>
+              <a:t>Top1 占比</a:t>
             </a:r>
           </a:p>
         </p:txBody>
@@ -39224,8 +39224,8 @@
         </p:nvSpPr>
         <p:spPr>
           <a:xfrm>
-            <a:off x="426720" y="4217670"/>
-            <a:ext cx="1828800" cy="137160"/>
+            <a:off x="3108960" y="3017520"/>
+            <a:ext cx="1463040" cy="233172"/>
           </a:xfrm>
           <a:prstGeom prst="rect">
             <a:avLst/>
@@ -39244,15 +39244,15 @@
               </a:lnSpc>
             </a:pPr>
             <a:r>
-              <a:rPr sz="850" b="0">
-                <a:solidFill>
-                  <a:srgbClr val="5B616B"/>
-                </a:solidFill>
-                <a:latin typeface="微软雅黑"/>
-                <a:ea typeface="微软雅黑"/>
-                <a:cs typeface="微软雅黑"/>
-              </a:rPr>
-              <a:t>Pay Skill（20,125 条）</a:t>
+              <a:rPr sz="1600" b="1">
+                <a:solidFill>
+                  <a:srgbClr val="B5333B"/>
+                </a:solidFill>
+                <a:latin typeface="微软雅黑"/>
+                <a:ea typeface="微软雅黑"/>
+                <a:cs typeface="微软雅黑"/>
+              </a:rPr>
+              <a:t>24.2%</a:t>
             </a:r>
           </a:p>
         </p:txBody>
@@ -39265,8 +39265,8 @@
         </p:nvSpPr>
         <p:spPr>
           <a:xfrm>
-            <a:off x="2926080" y="3963923"/>
-            <a:ext cx="1402080" cy="274320"/>
+            <a:off x="3108960" y="3223260"/>
+            <a:ext cx="1828800" cy="137160"/>
           </a:xfrm>
           <a:prstGeom prst="rect">
             <a:avLst/>
@@ -39285,15 +39285,15 @@
               </a:lnSpc>
             </a:pPr>
             <a:r>
-              <a:rPr sz="1800" b="1">
-                <a:solidFill>
-                  <a:srgbClr val="B5333B"/>
-                </a:solidFill>
-                <a:latin typeface="微软雅黑"/>
-                <a:ea typeface="微软雅黑"/>
-                <a:cs typeface="微软雅黑"/>
-              </a:rPr>
-              <a:t>19.3%</a:t>
+              <a:rPr sz="850" b="0">
+                <a:solidFill>
+                  <a:srgbClr val="5B616B"/>
+                </a:solidFill>
+                <a:latin typeface="微软雅黑"/>
+                <a:ea typeface="微软雅黑"/>
+                <a:cs typeface="微软雅黑"/>
+              </a:rPr>
+              <a:t>Top10 占比</a:t>
             </a:r>
           </a:p>
         </p:txBody>
@@ -39306,8 +39306,8 @@
         </p:nvSpPr>
         <p:spPr>
           <a:xfrm>
-            <a:off x="2926080" y="4217670"/>
-            <a:ext cx="1828800" cy="137160"/>
+            <a:off x="426720" y="3429000"/>
+            <a:ext cx="1463040" cy="233172"/>
           </a:xfrm>
           <a:prstGeom prst="rect">
             <a:avLst/>
@@ -39326,15 +39326,15 @@
               </a:lnSpc>
             </a:pPr>
             <a:r>
-              <a:rPr sz="850" b="0">
-                <a:solidFill>
-                  <a:srgbClr val="5B616B"/>
-                </a:solidFill>
-                <a:latin typeface="微软雅黑"/>
-                <a:ea typeface="微软雅黑"/>
-                <a:cs typeface="微软雅黑"/>
-              </a:rPr>
-              <a:t>API Key（38,646 条）</a:t>
+              <a:rPr sz="1600" b="1">
+                <a:solidFill>
+                  <a:srgbClr val="B5333B"/>
+                </a:solidFill>
+                <a:latin typeface="微软雅黑"/>
+                <a:ea typeface="微软雅黑"/>
+                <a:cs typeface="微软雅黑"/>
+              </a:rPr>
+              <a:t>48.9%</a:t>
             </a:r>
           </a:p>
         </p:txBody>
@@ -39347,50 +39347,8 @@
         </p:nvSpPr>
         <p:spPr>
           <a:xfrm>
-            <a:off x="426720" y="4491990"/>
-            <a:ext cx="5364480" cy="582930"/>
-          </a:xfrm>
-          <a:prstGeom prst="rect">
-            <a:avLst/>
-          </a:prstGeom>
-          <a:noFill/>
-        </p:spPr>
-        <p:txBody>
-          <a:bodyPr wrap="square" lIns="0" rIns="0" tIns="0" bIns="0" anchor="t">
-            <a:spAutoFit/>
-          </a:bodyPr>
-          <a:lstStyle/>
-          <a:p>
-            <a:pPr algn="l">
-              <a:lnSpc>
-                <a:spcPct val="115000"/>
-              </a:lnSpc>
-            </a:pPr>
-            <a:r>
-              <a:rPr sz="850" b="0">
-                <a:solidFill>
-                  <a:srgbClr val="8B8E94"/>
-                </a:solidFill>
-                <a:latin typeface="微软雅黑"/>
-                <a:ea typeface="微软雅黑"/>
-                <a:cs typeface="微软雅黑"/>
-              </a:rPr>
-              <a:t>付费标签 17,123（8.5%）、支付宝 2,901（1.4%）；Pay Skill 且 API Key 331 条。
-Top1000：付费 0.9%、API Key 30.7%；Pay Skill 是多标签分类，不计入左侧 12 类。</a:t>
-            </a:r>
-          </a:p>
-        </p:txBody>
-      </p:sp>
-      <p:sp>
-        <p:nvSpPr>
-          <p:cNvPr id="54" name="TextBox 53"/>
-          <p:cNvSpPr txBox="1"/>
-          <p:nvPr/>
-        </p:nvSpPr>
-        <p:spPr>
-          <a:xfrm>
-            <a:off x="6217920" y="3566160"/>
-            <a:ext cx="5364480" cy="164592"/>
+            <a:off x="426720" y="3634740"/>
+            <a:ext cx="1828800" cy="137160"/>
           </a:xfrm>
           <a:prstGeom prst="rect">
             <a:avLst/>
@@ -39409,29 +39367,29 @@
               </a:lnSpc>
             </a:pPr>
             <a:r>
-              <a:rPr sz="1050" b="1">
-                <a:solidFill>
-                  <a:srgbClr val="1A1A1C"/>
-                </a:solidFill>
-                <a:latin typeface="微软雅黑"/>
-                <a:ea typeface="微软雅黑"/>
-                <a:cs typeface="微软雅黑"/>
-              </a:rPr>
-              <a:t>消费集中度：Top10 拿走 31.3%，Top100 拿走 63.3%</a:t>
-            </a:r>
-          </a:p>
-        </p:txBody>
-      </p:sp>
-      <p:sp>
-        <p:nvSpPr>
-          <p:cNvPr id="55" name="TextBox 54"/>
-          <p:cNvSpPr txBox="1"/>
-          <p:nvPr/>
-        </p:nvSpPr>
-        <p:spPr>
-          <a:xfrm>
-            <a:off x="6217920" y="3730752"/>
-            <a:ext cx="5364480" cy="137160"/>
+              <a:rPr sz="850" b="0">
+                <a:solidFill>
+                  <a:srgbClr val="5B616B"/>
+                </a:solidFill>
+                <a:latin typeface="微软雅黑"/>
+                <a:ea typeface="微软雅黑"/>
+                <a:cs typeface="微软雅黑"/>
+              </a:rPr>
+              <a:t>Top100 占比</a:t>
+            </a:r>
+          </a:p>
+        </p:txBody>
+      </p:sp>
+      <p:sp>
+        <p:nvSpPr>
+          <p:cNvPr id="54" name="TextBox 53"/>
+          <p:cNvSpPr txBox="1"/>
+          <p:nvPr/>
+        </p:nvSpPr>
+        <p:spPr>
+          <a:xfrm>
+            <a:off x="3108960" y="3429000"/>
+            <a:ext cx="1463040" cy="233172"/>
           </a:xfrm>
           <a:prstGeom prst="rect">
             <a:avLst/>
@@ -39450,29 +39408,29 @@
               </a:lnSpc>
             </a:pPr>
             <a:r>
-              <a:rPr sz="850" b="0">
-                <a:solidFill>
-                  <a:srgbClr val="8B8E94"/>
-                </a:solidFill>
-                <a:latin typeface="微软雅黑"/>
-                <a:ea typeface="微软雅黑"/>
-                <a:cs typeface="微软雅黑"/>
-              </a:rPr>
-              <a:t>Top1000 总下载约 1.04 亿；中位 32,907</a:t>
-            </a:r>
-          </a:p>
-        </p:txBody>
-      </p:sp>
-      <p:sp>
-        <p:nvSpPr>
-          <p:cNvPr id="56" name="TextBox 55"/>
-          <p:cNvSpPr txBox="1"/>
-          <p:nvPr/>
-        </p:nvSpPr>
-        <p:spPr>
-          <a:xfrm>
-            <a:off x="6217920" y="3963923"/>
-            <a:ext cx="1584960" cy="274320"/>
+              <a:rPr sz="1600" b="1">
+                <a:solidFill>
+                  <a:srgbClr val="B5333B"/>
+                </a:solidFill>
+                <a:latin typeface="微软雅黑"/>
+                <a:ea typeface="微软雅黑"/>
+                <a:cs typeface="微软雅黑"/>
+              </a:rPr>
+              <a:t>77.3%</a:t>
+            </a:r>
+          </a:p>
+        </p:txBody>
+      </p:sp>
+      <p:sp>
+        <p:nvSpPr>
+          <p:cNvPr id="55" name="TextBox 54"/>
+          <p:cNvSpPr txBox="1"/>
+          <p:nvPr/>
+        </p:nvSpPr>
+        <p:spPr>
+          <a:xfrm>
+            <a:off x="3108960" y="3634740"/>
+            <a:ext cx="1828800" cy="137160"/>
           </a:xfrm>
           <a:prstGeom prst="rect">
             <a:avLst/>
@@ -39491,29 +39449,29 @@
               </a:lnSpc>
             </a:pPr>
             <a:r>
-              <a:rPr sz="1800" b="1">
-                <a:solidFill>
-                  <a:srgbClr val="B5333B"/>
-                </a:solidFill>
-                <a:latin typeface="微软雅黑"/>
-                <a:ea typeface="微软雅黑"/>
-                <a:cs typeface="微软雅黑"/>
-              </a:rPr>
-              <a:t>31.3%</a:t>
-            </a:r>
-          </a:p>
-        </p:txBody>
-      </p:sp>
-      <p:sp>
-        <p:nvSpPr>
-          <p:cNvPr id="57" name="TextBox 56"/>
-          <p:cNvSpPr txBox="1"/>
-          <p:nvPr/>
-        </p:nvSpPr>
-        <p:spPr>
-          <a:xfrm>
-            <a:off x="6217920" y="4217670"/>
-            <a:ext cx="1584960" cy="233172"/>
+              <a:rPr sz="850" b="0">
+                <a:solidFill>
+                  <a:srgbClr val="5B616B"/>
+                </a:solidFill>
+                <a:latin typeface="微软雅黑"/>
+                <a:ea typeface="微软雅黑"/>
+                <a:cs typeface="微软雅黑"/>
+              </a:rPr>
+              <a:t>Top1000 占比</a:t>
+            </a:r>
+          </a:p>
+        </p:txBody>
+      </p:sp>
+      <p:sp>
+        <p:nvSpPr>
+          <p:cNvPr id="56" name="TextBox 55"/>
+          <p:cNvSpPr txBox="1"/>
+          <p:nvPr/>
+        </p:nvSpPr>
+        <p:spPr>
+          <a:xfrm>
+            <a:off x="426720" y="3874769"/>
+            <a:ext cx="5364480" cy="274320"/>
           </a:xfrm>
           <a:prstGeom prst="rect">
             <a:avLst/>
@@ -39534,27 +39492,27 @@
             <a:r>
               <a:rPr sz="850" b="0">
                 <a:solidFill>
-                  <a:srgbClr val="5B616B"/>
-                </a:solidFill>
-                <a:latin typeface="微软雅黑"/>
-                <a:ea typeface="微软雅黑"/>
-                <a:cs typeface="微软雅黑"/>
-              </a:rPr>
-              <a:t>Top10 下载占比</a:t>
-            </a:r>
-          </a:p>
-        </p:txBody>
-      </p:sp>
-      <p:sp>
-        <p:nvSpPr>
-          <p:cNvPr id="58" name="TextBox 57"/>
-          <p:cNvSpPr txBox="1"/>
-          <p:nvPr/>
-        </p:nvSpPr>
-        <p:spPr>
-          <a:xfrm>
-            <a:off x="7985760" y="3963923"/>
-            <a:ext cx="1584960" cy="274320"/>
+                  <a:srgbClr val="8B8E94"/>
+                </a:solidFill>
+                <a:latin typeface="微软雅黑"/>
+                <a:ea typeface="微软雅黑"/>
+                <a:cs typeface="微软雅黑"/>
+              </a:rPr>
+              <a:t>Top5000 中 1,519 条 installs=0；下载含 CLI / 镜像，不等于使用。</a:t>
+            </a:r>
+          </a:p>
+        </p:txBody>
+      </p:sp>
+      <p:sp>
+        <p:nvSpPr>
+          <p:cNvPr id="57" name="TextBox 56"/>
+          <p:cNvSpPr txBox="1"/>
+          <p:nvPr/>
+        </p:nvSpPr>
+        <p:spPr>
+          <a:xfrm>
+            <a:off x="6217920" y="2640330"/>
+            <a:ext cx="5364480" cy="164592"/>
           </a:xfrm>
           <a:prstGeom prst="rect">
             <a:avLst/>
@@ -39573,15 +39531,56 @@
               </a:lnSpc>
             </a:pPr>
             <a:r>
-              <a:rPr sz="1800" b="1">
-                <a:solidFill>
-                  <a:srgbClr val="B5333B"/>
-                </a:solidFill>
-                <a:latin typeface="微软雅黑"/>
-                <a:ea typeface="微软雅黑"/>
-                <a:cs typeface="微软雅黑"/>
-              </a:rPr>
-              <a:t>63.3%</a:t>
+              <a:rPr sz="1050" b="1">
+                <a:solidFill>
+                  <a:srgbClr val="1A1A1C"/>
+                </a:solidFill>
+                <a:latin typeface="微软雅黑"/>
+                <a:ea typeface="微软雅黑"/>
+                <a:cs typeface="微软雅黑"/>
+              </a:rPr>
+              <a:t>谁被下载：企业 &gt; 个人 &gt; 镜像</a:t>
+            </a:r>
+          </a:p>
+        </p:txBody>
+      </p:sp>
+      <p:sp>
+        <p:nvSpPr>
+          <p:cNvPr id="58" name="TextBox 57"/>
+          <p:cNvSpPr txBox="1"/>
+          <p:nvPr/>
+        </p:nvSpPr>
+        <p:spPr>
+          <a:xfrm>
+            <a:off x="6217920" y="2798064"/>
+            <a:ext cx="5364480" cy="137160"/>
+          </a:xfrm>
+          <a:prstGeom prst="rect">
+            <a:avLst/>
+          </a:prstGeom>
+          <a:noFill/>
+        </p:spPr>
+        <p:txBody>
+          <a:bodyPr wrap="square" lIns="0" rIns="0" tIns="0" bIns="0" anchor="t">
+            <a:spAutoFit/>
+          </a:bodyPr>
+          <a:lstStyle/>
+          <a:p>
+            <a:pPr algn="l">
+              <a:lnSpc>
+                <a:spcPct val="100000"/>
+              </a:lnSpc>
+            </a:pPr>
+            <a:r>
+              <a:rPr sz="850" b="0">
+                <a:solidFill>
+                  <a:srgbClr val="8B8E94"/>
+                </a:solidFill>
+                <a:latin typeface="微软雅黑"/>
+                <a:ea typeface="微软雅黑"/>
+                <a:cs typeface="微软雅黑"/>
+              </a:rPr>
+              <a:t>Top5000 · 单条中位下载</a:t>
             </a:r>
           </a:p>
         </p:txBody>
@@ -39594,8 +39593,530 @@
         </p:nvSpPr>
         <p:spPr>
           <a:xfrm>
-            <a:off x="7985760" y="4217670"/>
-            <a:ext cx="1584960" cy="233172"/>
+            <a:off x="6217920" y="3051810"/>
+            <a:ext cx="1158240" cy="137160"/>
+          </a:xfrm>
+          <a:prstGeom prst="rect">
+            <a:avLst/>
+          </a:prstGeom>
+          <a:noFill/>
+        </p:spPr>
+        <p:txBody>
+          <a:bodyPr wrap="square" lIns="0" rIns="0" tIns="0" bIns="0" anchor="t">
+            <a:spAutoFit/>
+          </a:bodyPr>
+          <a:lstStyle/>
+          <a:p>
+            <a:pPr algn="l">
+              <a:lnSpc>
+                <a:spcPct val="100000"/>
+              </a:lnSpc>
+            </a:pPr>
+            <a:r>
+              <a:rPr sz="950" b="0">
+                <a:solidFill>
+                  <a:srgbClr val="5B616B"/>
+                </a:solidFill>
+                <a:latin typeface="微软雅黑"/>
+                <a:ea typeface="微软雅黑"/>
+                <a:cs typeface="微软雅黑"/>
+              </a:rPr>
+              <a:t>企业</a:t>
+            </a:r>
+          </a:p>
+        </p:txBody>
+      </p:sp>
+      <p:sp>
+        <p:nvSpPr>
+          <p:cNvPr id="60" name="Rounded Rectangle 59"/>
+          <p:cNvSpPr/>
+          <p:nvPr/>
+        </p:nvSpPr>
+        <p:spPr>
+          <a:xfrm>
+            <a:off x="7498080" y="3079242"/>
+            <a:ext cx="1463040" cy="75438"/>
+          </a:xfrm>
+          <a:prstGeom prst="roundRect">
+            <a:avLst>
+              <a:gd name="adj" fmla="val 40000"/>
+            </a:avLst>
+          </a:prstGeom>
+          <a:solidFill>
+            <a:srgbClr val="EDEFF2"/>
+          </a:solidFill>
+          <a:ln>
+            <a:noFill/>
+          </a:ln>
+          <a:effectLst/>
+        </p:spPr>
+        <p:style>
+          <a:lnRef idx="1">
+            <a:schemeClr val="accent1"/>
+          </a:lnRef>
+          <a:fillRef idx="3">
+            <a:schemeClr val="accent1"/>
+          </a:fillRef>
+          <a:effectRef idx="2">
+            <a:schemeClr val="accent1"/>
+          </a:effectRef>
+          <a:fontRef idx="minor">
+            <a:schemeClr val="lt1"/>
+          </a:fontRef>
+        </p:style>
+        <p:txBody>
+          <a:bodyPr rtlCol="0" anchor="ctr"/>
+          <a:lstStyle/>
+          <a:p>
+            <a:pPr algn="ctr"/>
+          </a:p>
+        </p:txBody>
+      </p:sp>
+      <p:sp>
+        <p:nvSpPr>
+          <p:cNvPr id="61" name="Rounded Rectangle 60"/>
+          <p:cNvSpPr/>
+          <p:nvPr/>
+        </p:nvSpPr>
+        <p:spPr>
+          <a:xfrm>
+            <a:off x="7498080" y="3079242"/>
+            <a:ext cx="1463040" cy="75438"/>
+          </a:xfrm>
+          <a:prstGeom prst="roundRect">
+            <a:avLst>
+              <a:gd name="adj" fmla="val 40000"/>
+            </a:avLst>
+          </a:prstGeom>
+          <a:solidFill>
+            <a:srgbClr val="B5333B"/>
+          </a:solidFill>
+          <a:ln>
+            <a:noFill/>
+          </a:ln>
+          <a:effectLst/>
+        </p:spPr>
+        <p:style>
+          <a:lnRef idx="1">
+            <a:schemeClr val="accent1"/>
+          </a:lnRef>
+          <a:fillRef idx="3">
+            <a:schemeClr val="accent1"/>
+          </a:fillRef>
+          <a:effectRef idx="2">
+            <a:schemeClr val="accent1"/>
+          </a:effectRef>
+          <a:fontRef idx="minor">
+            <a:schemeClr val="lt1"/>
+          </a:fontRef>
+        </p:style>
+        <p:txBody>
+          <a:bodyPr rtlCol="0" anchor="ctr"/>
+          <a:lstStyle/>
+          <a:p>
+            <a:pPr algn="ctr"/>
+          </a:p>
+        </p:txBody>
+      </p:sp>
+      <p:sp>
+        <p:nvSpPr>
+          <p:cNvPr id="62" name="TextBox 61"/>
+          <p:cNvSpPr txBox="1"/>
+          <p:nvPr/>
+        </p:nvSpPr>
+        <p:spPr>
+          <a:xfrm>
+            <a:off x="9083040" y="3051810"/>
+            <a:ext cx="2255520" cy="137160"/>
+          </a:xfrm>
+          <a:prstGeom prst="rect">
+            <a:avLst/>
+          </a:prstGeom>
+          <a:noFill/>
+        </p:spPr>
+        <p:txBody>
+          <a:bodyPr wrap="square" lIns="0" rIns="0" tIns="0" bIns="0" anchor="t">
+            <a:spAutoFit/>
+          </a:bodyPr>
+          <a:lstStyle/>
+          <a:p>
+            <a:pPr algn="l">
+              <a:lnSpc>
+                <a:spcPct val="100000"/>
+              </a:lnSpc>
+            </a:pPr>
+            <a:r>
+              <a:rPr sz="850" b="0">
+                <a:solidFill>
+                  <a:srgbClr val="1A1A1C"/>
+                </a:solidFill>
+                <a:latin typeface="微软雅黑"/>
+                <a:ea typeface="微软雅黑"/>
+                <a:cs typeface="微软雅黑"/>
+              </a:rPr>
+              <a:t>12,725 / 633 条</a:t>
+            </a:r>
+          </a:p>
+        </p:txBody>
+      </p:sp>
+      <p:sp>
+        <p:nvSpPr>
+          <p:cNvPr id="63" name="TextBox 62"/>
+          <p:cNvSpPr txBox="1"/>
+          <p:nvPr/>
+        </p:nvSpPr>
+        <p:spPr>
+          <a:xfrm>
+            <a:off x="6217920" y="3429000"/>
+            <a:ext cx="1158240" cy="137160"/>
+          </a:xfrm>
+          <a:prstGeom prst="rect">
+            <a:avLst/>
+          </a:prstGeom>
+          <a:noFill/>
+        </p:spPr>
+        <p:txBody>
+          <a:bodyPr wrap="square" lIns="0" rIns="0" tIns="0" bIns="0" anchor="t">
+            <a:spAutoFit/>
+          </a:bodyPr>
+          <a:lstStyle/>
+          <a:p>
+            <a:pPr algn="l">
+              <a:lnSpc>
+                <a:spcPct val="100000"/>
+              </a:lnSpc>
+            </a:pPr>
+            <a:r>
+              <a:rPr sz="950" b="0">
+                <a:solidFill>
+                  <a:srgbClr val="5B616B"/>
+                </a:solidFill>
+                <a:latin typeface="微软雅黑"/>
+                <a:ea typeface="微软雅黑"/>
+                <a:cs typeface="微软雅黑"/>
+              </a:rPr>
+              <a:t>个人 / 社区</a:t>
+            </a:r>
+          </a:p>
+        </p:txBody>
+      </p:sp>
+      <p:sp>
+        <p:nvSpPr>
+          <p:cNvPr id="64" name="Rounded Rectangle 63"/>
+          <p:cNvSpPr/>
+          <p:nvPr/>
+        </p:nvSpPr>
+        <p:spPr>
+          <a:xfrm>
+            <a:off x="7498080" y="3456432"/>
+            <a:ext cx="1463040" cy="75438"/>
+          </a:xfrm>
+          <a:prstGeom prst="roundRect">
+            <a:avLst>
+              <a:gd name="adj" fmla="val 40000"/>
+            </a:avLst>
+          </a:prstGeom>
+          <a:solidFill>
+            <a:srgbClr val="EDEFF2"/>
+          </a:solidFill>
+          <a:ln>
+            <a:noFill/>
+          </a:ln>
+          <a:effectLst/>
+        </p:spPr>
+        <p:style>
+          <a:lnRef idx="1">
+            <a:schemeClr val="accent1"/>
+          </a:lnRef>
+          <a:fillRef idx="3">
+            <a:schemeClr val="accent1"/>
+          </a:fillRef>
+          <a:effectRef idx="2">
+            <a:schemeClr val="accent1"/>
+          </a:effectRef>
+          <a:fontRef idx="minor">
+            <a:schemeClr val="lt1"/>
+          </a:fontRef>
+        </p:style>
+        <p:txBody>
+          <a:bodyPr rtlCol="0" anchor="ctr"/>
+          <a:lstStyle/>
+          <a:p>
+            <a:pPr algn="ctr"/>
+          </a:p>
+        </p:txBody>
+      </p:sp>
+      <p:sp>
+        <p:nvSpPr>
+          <p:cNvPr id="65" name="Rounded Rectangle 64"/>
+          <p:cNvSpPr/>
+          <p:nvPr/>
+        </p:nvSpPr>
+        <p:spPr>
+          <a:xfrm>
+            <a:off x="7498080" y="3456432"/>
+            <a:ext cx="1003720" cy="75438"/>
+          </a:xfrm>
+          <a:prstGeom prst="roundRect">
+            <a:avLst>
+              <a:gd name="adj" fmla="val 40000"/>
+            </a:avLst>
+          </a:prstGeom>
+          <a:solidFill>
+            <a:srgbClr val="566472"/>
+          </a:solidFill>
+          <a:ln>
+            <a:noFill/>
+          </a:ln>
+          <a:effectLst/>
+        </p:spPr>
+        <p:style>
+          <a:lnRef idx="1">
+            <a:schemeClr val="accent1"/>
+          </a:lnRef>
+          <a:fillRef idx="3">
+            <a:schemeClr val="accent1"/>
+          </a:fillRef>
+          <a:effectRef idx="2">
+            <a:schemeClr val="accent1"/>
+          </a:effectRef>
+          <a:fontRef idx="minor">
+            <a:schemeClr val="lt1"/>
+          </a:fontRef>
+        </p:style>
+        <p:txBody>
+          <a:bodyPr rtlCol="0" anchor="ctr"/>
+          <a:lstStyle/>
+          <a:p>
+            <a:pPr algn="ctr"/>
+          </a:p>
+        </p:txBody>
+      </p:sp>
+      <p:sp>
+        <p:nvSpPr>
+          <p:cNvPr id="66" name="TextBox 65"/>
+          <p:cNvSpPr txBox="1"/>
+          <p:nvPr/>
+        </p:nvSpPr>
+        <p:spPr>
+          <a:xfrm>
+            <a:off x="9083040" y="3429000"/>
+            <a:ext cx="2255520" cy="137160"/>
+          </a:xfrm>
+          <a:prstGeom prst="rect">
+            <a:avLst/>
+          </a:prstGeom>
+          <a:noFill/>
+        </p:spPr>
+        <p:txBody>
+          <a:bodyPr wrap="square" lIns="0" rIns="0" tIns="0" bIns="0" anchor="t">
+            <a:spAutoFit/>
+          </a:bodyPr>
+          <a:lstStyle/>
+          <a:p>
+            <a:pPr algn="l">
+              <a:lnSpc>
+                <a:spcPct val="100000"/>
+              </a:lnSpc>
+            </a:pPr>
+            <a:r>
+              <a:rPr sz="850" b="0">
+                <a:solidFill>
+                  <a:srgbClr val="1A1A1C"/>
+                </a:solidFill>
+                <a:latin typeface="微软雅黑"/>
+                <a:ea typeface="微软雅黑"/>
+                <a:cs typeface="微软雅黑"/>
+              </a:rPr>
+              <a:t>8,730 / 1245 条</a:t>
+            </a:r>
+          </a:p>
+        </p:txBody>
+      </p:sp>
+      <p:sp>
+        <p:nvSpPr>
+          <p:cNvPr id="67" name="TextBox 66"/>
+          <p:cNvSpPr txBox="1"/>
+          <p:nvPr/>
+        </p:nvSpPr>
+        <p:spPr>
+          <a:xfrm>
+            <a:off x="6217920" y="3806190"/>
+            <a:ext cx="1158240" cy="137160"/>
+          </a:xfrm>
+          <a:prstGeom prst="rect">
+            <a:avLst/>
+          </a:prstGeom>
+          <a:noFill/>
+        </p:spPr>
+        <p:txBody>
+          <a:bodyPr wrap="square" lIns="0" rIns="0" tIns="0" bIns="0" anchor="t">
+            <a:spAutoFit/>
+          </a:bodyPr>
+          <a:lstStyle/>
+          <a:p>
+            <a:pPr algn="l">
+              <a:lnSpc>
+                <a:spcPct val="100000"/>
+              </a:lnSpc>
+            </a:pPr>
+            <a:r>
+              <a:rPr sz="950" b="0">
+                <a:solidFill>
+                  <a:srgbClr val="5B616B"/>
+                </a:solidFill>
+                <a:latin typeface="微软雅黑"/>
+                <a:ea typeface="微软雅黑"/>
+                <a:cs typeface="微软雅黑"/>
+              </a:rPr>
+              <a:t>镜像 ClawHub</a:t>
+            </a:r>
+          </a:p>
+        </p:txBody>
+      </p:sp>
+      <p:sp>
+        <p:nvSpPr>
+          <p:cNvPr id="68" name="Rounded Rectangle 67"/>
+          <p:cNvSpPr/>
+          <p:nvPr/>
+        </p:nvSpPr>
+        <p:spPr>
+          <a:xfrm>
+            <a:off x="7498080" y="3833622"/>
+            <a:ext cx="1463040" cy="75438"/>
+          </a:xfrm>
+          <a:prstGeom prst="roundRect">
+            <a:avLst>
+              <a:gd name="adj" fmla="val 40000"/>
+            </a:avLst>
+          </a:prstGeom>
+          <a:solidFill>
+            <a:srgbClr val="EDEFF2"/>
+          </a:solidFill>
+          <a:ln>
+            <a:noFill/>
+          </a:ln>
+          <a:effectLst/>
+        </p:spPr>
+        <p:style>
+          <a:lnRef idx="1">
+            <a:schemeClr val="accent1"/>
+          </a:lnRef>
+          <a:fillRef idx="3">
+            <a:schemeClr val="accent1"/>
+          </a:fillRef>
+          <a:effectRef idx="2">
+            <a:schemeClr val="accent1"/>
+          </a:effectRef>
+          <a:fontRef idx="minor">
+            <a:schemeClr val="lt1"/>
+          </a:fontRef>
+        </p:style>
+        <p:txBody>
+          <a:bodyPr rtlCol="0" anchor="ctr"/>
+          <a:lstStyle/>
+          <a:p>
+            <a:pPr algn="ctr"/>
+          </a:p>
+        </p:txBody>
+      </p:sp>
+      <p:sp>
+        <p:nvSpPr>
+          <p:cNvPr id="69" name="Rounded Rectangle 68"/>
+          <p:cNvSpPr/>
+          <p:nvPr/>
+        </p:nvSpPr>
+        <p:spPr>
+          <a:xfrm>
+            <a:off x="7498080" y="3833622"/>
+            <a:ext cx="776762" cy="75438"/>
+          </a:xfrm>
+          <a:prstGeom prst="roundRect">
+            <a:avLst>
+              <a:gd name="adj" fmla="val 40000"/>
+            </a:avLst>
+          </a:prstGeom>
+          <a:solidFill>
+            <a:srgbClr val="CFD4DA"/>
+          </a:solidFill>
+          <a:ln>
+            <a:noFill/>
+          </a:ln>
+          <a:effectLst/>
+        </p:spPr>
+        <p:style>
+          <a:lnRef idx="1">
+            <a:schemeClr val="accent1"/>
+          </a:lnRef>
+          <a:fillRef idx="3">
+            <a:schemeClr val="accent1"/>
+          </a:fillRef>
+          <a:effectRef idx="2">
+            <a:schemeClr val="accent1"/>
+          </a:effectRef>
+          <a:fontRef idx="minor">
+            <a:schemeClr val="lt1"/>
+          </a:fontRef>
+        </p:style>
+        <p:txBody>
+          <a:bodyPr rtlCol="0" anchor="ctr"/>
+          <a:lstStyle/>
+          <a:p>
+            <a:pPr algn="ctr"/>
+          </a:p>
+        </p:txBody>
+      </p:sp>
+      <p:sp>
+        <p:nvSpPr>
+          <p:cNvPr id="70" name="TextBox 69"/>
+          <p:cNvSpPr txBox="1"/>
+          <p:nvPr/>
+        </p:nvSpPr>
+        <p:spPr>
+          <a:xfrm>
+            <a:off x="9083040" y="3806190"/>
+            <a:ext cx="2255520" cy="137160"/>
+          </a:xfrm>
+          <a:prstGeom prst="rect">
+            <a:avLst/>
+          </a:prstGeom>
+          <a:noFill/>
+        </p:spPr>
+        <p:txBody>
+          <a:bodyPr wrap="square" lIns="0" rIns="0" tIns="0" bIns="0" anchor="t">
+            <a:spAutoFit/>
+          </a:bodyPr>
+          <a:lstStyle/>
+          <a:p>
+            <a:pPr algn="l">
+              <a:lnSpc>
+                <a:spcPct val="100000"/>
+              </a:lnSpc>
+            </a:pPr>
+            <a:r>
+              <a:rPr sz="850" b="0">
+                <a:solidFill>
+                  <a:srgbClr val="1A1A1C"/>
+                </a:solidFill>
+                <a:latin typeface="微软雅黑"/>
+                <a:ea typeface="微软雅黑"/>
+                <a:cs typeface="微软雅黑"/>
+              </a:rPr>
+              <a:t>6,756 / 3122 条</a:t>
+            </a:r>
+          </a:p>
+        </p:txBody>
+      </p:sp>
+      <p:sp>
+        <p:nvSpPr>
+          <p:cNvPr id="71" name="TextBox 70"/>
+          <p:cNvSpPr txBox="1"/>
+          <p:nvPr/>
+        </p:nvSpPr>
+        <p:spPr>
+          <a:xfrm>
+            <a:off x="6217920" y="4046220"/>
+            <a:ext cx="5364480" cy="219456"/>
           </a:xfrm>
           <a:prstGeom prst="rect">
             <a:avLst/>
@@ -39616,27 +40137,27 @@
             <a:r>
               <a:rPr sz="850" b="0">
                 <a:solidFill>
-                  <a:srgbClr val="5B616B"/>
-                </a:solidFill>
-                <a:latin typeface="微软雅黑"/>
-                <a:ea typeface="微软雅黑"/>
-                <a:cs typeface="微软雅黑"/>
-              </a:rPr>
-              <a:t>Top100 下载占比</a:t>
-            </a:r>
-          </a:p>
-        </p:txBody>
-      </p:sp>
-      <p:sp>
-        <p:nvSpPr>
-          <p:cNvPr id="60" name="TextBox 59"/>
-          <p:cNvSpPr txBox="1"/>
-          <p:nvPr/>
-        </p:nvSpPr>
-        <p:spPr>
-          <a:xfrm>
-            <a:off x="9753600" y="3963923"/>
-            <a:ext cx="1584960" cy="274320"/>
+                  <a:srgbClr val="8B8E94"/>
+                </a:solidFill>
+                <a:latin typeface="微软雅黑"/>
+                <a:ea typeface="微软雅黑"/>
+                <a:cs typeface="微软雅黑"/>
+              </a:rPr>
+              <a:t>Top5000 整体中位 7,521；企业单条最高，个人高于镜像。2,883 个上架方，Top10 占 37.9% 下载。</a:t>
+            </a:r>
+          </a:p>
+        </p:txBody>
+      </p:sp>
+      <p:sp>
+        <p:nvSpPr>
+          <p:cNvPr id="72" name="TextBox 71"/>
+          <p:cNvSpPr txBox="1"/>
+          <p:nvPr/>
+        </p:nvSpPr>
+        <p:spPr>
+          <a:xfrm>
+            <a:off x="426720" y="4354830"/>
+            <a:ext cx="10972800" cy="164592"/>
           </a:xfrm>
           <a:prstGeom prst="rect">
             <a:avLst/>
@@ -39655,29 +40176,29 @@
               </a:lnSpc>
             </a:pPr>
             <a:r>
-              <a:rPr sz="1800" b="1">
-                <a:solidFill>
-                  <a:srgbClr val="B5333B"/>
-                </a:solidFill>
-                <a:latin typeface="微软雅黑"/>
-                <a:ea typeface="微软雅黑"/>
-                <a:cs typeface="微软雅黑"/>
-              </a:rPr>
-              <a:t>443</a:t>
-            </a:r>
-          </a:p>
-        </p:txBody>
-      </p:sp>
-      <p:sp>
-        <p:nvSpPr>
-          <p:cNvPr id="61" name="TextBox 60"/>
-          <p:cNvSpPr txBox="1"/>
-          <p:nvPr/>
-        </p:nvSpPr>
-        <p:spPr>
-          <a:xfrm>
-            <a:off x="9753600" y="4217670"/>
-            <a:ext cx="1584960" cy="233172"/>
+              <a:rPr sz="1050" b="1">
+                <a:solidFill>
+                  <a:srgbClr val="1A1A1C"/>
+                </a:solidFill>
+                <a:latin typeface="微软雅黑"/>
+                <a:ea typeface="微软雅黑"/>
+                <a:cs typeface="微软雅黑"/>
+              </a:rPr>
+              <a:t>付费与 API Key：全站 10.0% / 19.3%，Top5000 付费仅 1.0%</a:t>
+            </a:r>
+          </a:p>
+        </p:txBody>
+      </p:sp>
+      <p:sp>
+        <p:nvSpPr>
+          <p:cNvPr id="73" name="TextBox 72"/>
+          <p:cNvSpPr txBox="1"/>
+          <p:nvPr/>
+        </p:nvSpPr>
+        <p:spPr>
+          <a:xfrm>
+            <a:off x="426720" y="4512564"/>
+            <a:ext cx="10972800" cy="137160"/>
           </a:xfrm>
           <a:prstGeom prst="rect">
             <a:avLst/>
@@ -39692,33 +40213,197 @@
           <a:p>
             <a:pPr algn="l">
               <a:lnSpc>
-                <a:spcPct val="105000"/>
+                <a:spcPct val="100000"/>
               </a:lnSpc>
             </a:pPr>
             <a:r>
               <a:rPr sz="850" b="0">
                 <a:solidFill>
+                  <a:srgbClr val="8B8E94"/>
+                </a:solidFill>
+                <a:latin typeface="微软雅黑"/>
+                <a:ea typeface="微软雅黑"/>
+                <a:cs typeface="微软雅黑"/>
+              </a:rPr>
+              <a:t>全站 200,403 条；Pay Skill 20,125、API Key 38,646</a:t>
+            </a:r>
+          </a:p>
+        </p:txBody>
+      </p:sp>
+      <p:sp>
+        <p:nvSpPr>
+          <p:cNvPr id="74" name="TextBox 73"/>
+          <p:cNvSpPr txBox="1"/>
+          <p:nvPr/>
+        </p:nvSpPr>
+        <p:spPr>
+          <a:xfrm>
+            <a:off x="426720" y="4677156"/>
+            <a:ext cx="1097280" cy="246887"/>
+          </a:xfrm>
+          <a:prstGeom prst="rect">
+            <a:avLst/>
+          </a:prstGeom>
+          <a:noFill/>
+        </p:spPr>
+        <p:txBody>
+          <a:bodyPr wrap="square" lIns="0" rIns="0" tIns="0" bIns="0" anchor="t">
+            <a:spAutoFit/>
+          </a:bodyPr>
+          <a:lstStyle/>
+          <a:p>
+            <a:pPr algn="l">
+              <a:lnSpc>
+                <a:spcPct val="100000"/>
+              </a:lnSpc>
+            </a:pPr>
+            <a:r>
+              <a:rPr sz="1600" b="1">
+                <a:solidFill>
+                  <a:srgbClr val="B5333B"/>
+                </a:solidFill>
+                <a:latin typeface="微软雅黑"/>
+                <a:ea typeface="微软雅黑"/>
+                <a:cs typeface="微软雅黑"/>
+              </a:rPr>
+              <a:t>10.0%</a:t>
+            </a:r>
+          </a:p>
+        </p:txBody>
+      </p:sp>
+      <p:sp>
+        <p:nvSpPr>
+          <p:cNvPr id="75" name="TextBox 74"/>
+          <p:cNvSpPr txBox="1"/>
+          <p:nvPr/>
+        </p:nvSpPr>
+        <p:spPr>
+          <a:xfrm>
+            <a:off x="426720" y="4910328"/>
+            <a:ext cx="1584960" cy="137160"/>
+          </a:xfrm>
+          <a:prstGeom prst="rect">
+            <a:avLst/>
+          </a:prstGeom>
+          <a:noFill/>
+        </p:spPr>
+        <p:txBody>
+          <a:bodyPr wrap="square" lIns="0" rIns="0" tIns="0" bIns="0" anchor="t">
+            <a:spAutoFit/>
+          </a:bodyPr>
+          <a:lstStyle/>
+          <a:p>
+            <a:pPr algn="l">
+              <a:lnSpc>
+                <a:spcPct val="100000"/>
+              </a:lnSpc>
+            </a:pPr>
+            <a:r>
+              <a:rPr sz="850" b="0">
+                <a:solidFill>
                   <a:srgbClr val="5B616B"/>
                 </a:solidFill>
                 <a:latin typeface="微软雅黑"/>
                 <a:ea typeface="微软雅黑"/>
                 <a:cs typeface="微软雅黑"/>
               </a:rPr>
-              <a:t>installs=0 的条数</a:t>
-            </a:r>
-          </a:p>
-        </p:txBody>
-      </p:sp>
-      <p:sp>
-        <p:nvSpPr>
-          <p:cNvPr id="62" name="TextBox 61"/>
-          <p:cNvSpPr txBox="1"/>
-          <p:nvPr/>
-        </p:nvSpPr>
-        <p:spPr>
-          <a:xfrm>
-            <a:off x="6217920" y="4560570"/>
-            <a:ext cx="5364480" cy="411480"/>
+              <a:t>Pay Skill</a:t>
+            </a:r>
+          </a:p>
+        </p:txBody>
+      </p:sp>
+      <p:sp>
+        <p:nvSpPr>
+          <p:cNvPr id="76" name="TextBox 75"/>
+          <p:cNvSpPr txBox="1"/>
+          <p:nvPr/>
+        </p:nvSpPr>
+        <p:spPr>
+          <a:xfrm>
+            <a:off x="2194560" y="4677156"/>
+            <a:ext cx="1097280" cy="246887"/>
+          </a:xfrm>
+          <a:prstGeom prst="rect">
+            <a:avLst/>
+          </a:prstGeom>
+          <a:noFill/>
+        </p:spPr>
+        <p:txBody>
+          <a:bodyPr wrap="square" lIns="0" rIns="0" tIns="0" bIns="0" anchor="t">
+            <a:spAutoFit/>
+          </a:bodyPr>
+          <a:lstStyle/>
+          <a:p>
+            <a:pPr algn="l">
+              <a:lnSpc>
+                <a:spcPct val="100000"/>
+              </a:lnSpc>
+            </a:pPr>
+            <a:r>
+              <a:rPr sz="1600" b="1">
+                <a:solidFill>
+                  <a:srgbClr val="B5333B"/>
+                </a:solidFill>
+                <a:latin typeface="微软雅黑"/>
+                <a:ea typeface="微软雅黑"/>
+                <a:cs typeface="微软雅黑"/>
+              </a:rPr>
+              <a:t>19.3%</a:t>
+            </a:r>
+          </a:p>
+        </p:txBody>
+      </p:sp>
+      <p:sp>
+        <p:nvSpPr>
+          <p:cNvPr id="77" name="TextBox 76"/>
+          <p:cNvSpPr txBox="1"/>
+          <p:nvPr/>
+        </p:nvSpPr>
+        <p:spPr>
+          <a:xfrm>
+            <a:off x="2194560" y="4910328"/>
+            <a:ext cx="1584960" cy="137160"/>
+          </a:xfrm>
+          <a:prstGeom prst="rect">
+            <a:avLst/>
+          </a:prstGeom>
+          <a:noFill/>
+        </p:spPr>
+        <p:txBody>
+          <a:bodyPr wrap="square" lIns="0" rIns="0" tIns="0" bIns="0" anchor="t">
+            <a:spAutoFit/>
+          </a:bodyPr>
+          <a:lstStyle/>
+          <a:p>
+            <a:pPr algn="l">
+              <a:lnSpc>
+                <a:spcPct val="100000"/>
+              </a:lnSpc>
+            </a:pPr>
+            <a:r>
+              <a:rPr sz="850" b="0">
+                <a:solidFill>
+                  <a:srgbClr val="5B616B"/>
+                </a:solidFill>
+                <a:latin typeface="微软雅黑"/>
+                <a:ea typeface="微软雅黑"/>
+                <a:cs typeface="微软雅黑"/>
+              </a:rPr>
+              <a:t>API Key</a:t>
+            </a:r>
+          </a:p>
+        </p:txBody>
+      </p:sp>
+      <p:sp>
+        <p:nvSpPr>
+          <p:cNvPr id="78" name="TextBox 77"/>
+          <p:cNvSpPr txBox="1"/>
+          <p:nvPr/>
+        </p:nvSpPr>
+        <p:spPr>
+          <a:xfrm>
+            <a:off x="4267200" y="4677156"/>
+            <a:ext cx="7315200" cy="411480"/>
           </a:xfrm>
           <a:prstGeom prst="rect">
             <a:avLst/>
@@ -39745,20 +40430,21 @@
                 <a:ea typeface="微软雅黑"/>
                 <a:cs typeface="微软雅黑"/>
               </a:rPr>
-              <a:t>Top1 占 5.0%，Top3 占 14.7%；下载含 CLI/镜像拉取，不等于安装或使用。</a:t>
-            </a:r>
-          </a:p>
-        </p:txBody>
-      </p:sp>
-      <p:sp>
-        <p:nvSpPr>
-          <p:cNvPr id="63" name="TextBox 62"/>
-          <p:cNvSpPr txBox="1"/>
-          <p:nvPr/>
-        </p:nvSpPr>
-        <p:spPr>
-          <a:xfrm>
-            <a:off x="426720" y="5863590"/>
+              <a:t>付费标签 17,123（8.5%）、支付宝 2,901（1.4%）；Pay Skill 且 API Key 331 条。
+Top5000：付费 1.0%（50 条）、API Key 28.8%；Pay Skill 分类 0 条。</a:t>
+            </a:r>
+          </a:p>
+        </p:txBody>
+      </p:sp>
+      <p:sp>
+        <p:nvSpPr>
+          <p:cNvPr id="79" name="TextBox 78"/>
+          <p:cNvSpPr txBox="1"/>
+          <p:nvPr/>
+        </p:nvSpPr>
+        <p:spPr>
+          <a:xfrm>
+            <a:off x="426720" y="5795010"/>
             <a:ext cx="11338560" cy="192024"/>
           </a:xfrm>
           <a:prstGeom prst="rect">
@@ -39786,7 +40472,7 @@
                 <a:ea typeface="微软雅黑"/>
                 <a:cs typeface="微软雅黑"/>
               </a:rPr>
-              <a:t>读法：全站付费 10%、API Key 19%，但头部下载集中在编程；Top1000 付费标签只有 0.9%。</a:t>
+              <a:t>读法：Top5000 由 2,883 个上架方供给，Top10 拿走 37.9% 下载；全站付费 10%，但头部只有 1%。</a:t>
             </a:r>
           </a:p>
         </p:txBody>

--- a/skill-final-v1.pptx
+++ b/skill-final-v1.pptx
@@ -37193,7 +37193,7 @@
                 <a:ea typeface="微软雅黑"/>
                 <a:cs typeface="微软雅黑"/>
               </a:rPr>
-              <a:t>SkillHub 生态画像：Top5000 里，个人 24.9%、企业 12.7%、镜像 62.4%</a:t>
+              <a:t>SkillHub 生态画像：全站社区 68.4%、ClawHub 31.6%，企业是交叉标签</a:t>
             </a:r>
           </a:p>
         </p:txBody>
@@ -37234,7 +37234,7 @@
                 <a:ea typeface="微软雅黑"/>
                 <a:cs typeface="微软雅黑"/>
               </a:rPr>
-              <a:t>镜像撑数量，个人下载份额最高，企业单条最强；全站付费 10%，头部只有 1%。</a:t>
+              <a:t>全站社区 + ClawHub 覆盖全站，企业 34.9% 叠加；Top5000 里个人下载份额最高，企业单条最强。</a:t>
             </a:r>
           </a:p>
         </p:txBody>
@@ -37275,7 +37275,7 @@
                 <a:ea typeface="微软雅黑"/>
                 <a:cs typeface="微软雅黑"/>
               </a:rPr>
-              <a:t>三种上架方：镜像最多，个人最重，企业最强</a:t>
+              <a:t>谁在供给：社区 13.7 万，ClawHub 6.3 万，企业 7.0 万</a:t>
             </a:r>
           </a:p>
         </p:txBody>
@@ -37316,7 +37316,7 @@
                 <a:ea typeface="微软雅黑"/>
                 <a:cs typeface="微软雅黑"/>
               </a:rPr>
-              <a:t>Top5000 条 · 数量 / 下载</a:t>
+              <a:t>全站 200,419 条 · 来源计数（可重叠）</a:t>
             </a:r>
           </a:p>
         </p:txBody>
@@ -37330,7 +37330,7 @@
         <p:spPr>
           <a:xfrm>
             <a:off x="426720" y="1371600"/>
-            <a:ext cx="1036320" cy="137160"/>
+            <a:ext cx="1158240" cy="137160"/>
           </a:xfrm>
           <a:prstGeom prst="rect">
             <a:avLst/>
@@ -37357,7 +37357,7 @@
                 <a:ea typeface="微软雅黑"/>
                 <a:cs typeface="微软雅黑"/>
               </a:rPr>
-              <a:t>个人 / 社区</a:t>
+              <a:t>社区</a:t>
             </a:r>
           </a:p>
         </p:txBody>
@@ -37370,8 +37370,8 @@
         </p:nvSpPr>
         <p:spPr>
           <a:xfrm>
-            <a:off x="1524000" y="1399032"/>
-            <a:ext cx="1828800" cy="68580"/>
+            <a:off x="1609344" y="1399032"/>
+            <a:ext cx="1767839" cy="68580"/>
           </a:xfrm>
           <a:prstGeom prst="roundRect">
             <a:avLst>
@@ -37416,8 +37416,8 @@
         </p:nvSpPr>
         <p:spPr>
           <a:xfrm>
-            <a:off x="1524000" y="1399032"/>
-            <a:ext cx="729761" cy="68580"/>
+            <a:off x="1609344" y="1399032"/>
+            <a:ext cx="1767839" cy="68580"/>
           </a:xfrm>
           <a:prstGeom prst="roundRect">
             <a:avLst>
@@ -37462,8 +37462,8 @@
         </p:nvSpPr>
         <p:spPr>
           <a:xfrm>
-            <a:off x="3560064" y="1371600"/>
-            <a:ext cx="1950720" cy="137160"/>
+            <a:off x="3511295" y="1371600"/>
+            <a:ext cx="2011680" cy="137160"/>
           </a:xfrm>
           <a:prstGeom prst="rect">
             <a:avLst/>
@@ -37490,7 +37490,7 @@
                 <a:ea typeface="微软雅黑"/>
                 <a:cs typeface="微软雅黑"/>
               </a:rPr>
-              <a:t>24.9% / 39.8%</a:t>
+              <a:t>137,017 / 68.4%</a:t>
             </a:r>
           </a:p>
         </p:txBody>
@@ -37504,7 +37504,7 @@
         <p:spPr>
           <a:xfrm>
             <a:off x="426720" y="1577340"/>
-            <a:ext cx="1036320" cy="137160"/>
+            <a:ext cx="1158240" cy="137160"/>
           </a:xfrm>
           <a:prstGeom prst="rect">
             <a:avLst/>
@@ -37531,7 +37531,7 @@
                 <a:ea typeface="微软雅黑"/>
                 <a:cs typeface="微软雅黑"/>
               </a:rPr>
-              <a:t>企业</a:t>
+              <a:t>ClawHub</a:t>
             </a:r>
           </a:p>
         </p:txBody>
@@ -37544,8 +37544,8 @@
         </p:nvSpPr>
         <p:spPr>
           <a:xfrm>
-            <a:off x="1524000" y="1604772"/>
-            <a:ext cx="1828800" cy="68580"/>
+            <a:off x="1609344" y="1604772"/>
+            <a:ext cx="1767839" cy="68580"/>
           </a:xfrm>
           <a:prstGeom prst="roundRect">
             <a:avLst>
@@ -37590,8 +37590,8 @@
         </p:nvSpPr>
         <p:spPr>
           <a:xfrm>
-            <a:off x="1524000" y="1604772"/>
-            <a:ext cx="372207" cy="68580"/>
+            <a:off x="1609344" y="1604772"/>
+            <a:ext cx="816721" cy="68580"/>
           </a:xfrm>
           <a:prstGeom prst="roundRect">
             <a:avLst>
@@ -37636,8 +37636,8 @@
         </p:nvSpPr>
         <p:spPr>
           <a:xfrm>
-            <a:off x="3560064" y="1577340"/>
-            <a:ext cx="1950720" cy="137160"/>
+            <a:off x="3511295" y="1577340"/>
+            <a:ext cx="2011680" cy="137160"/>
           </a:xfrm>
           <a:prstGeom prst="rect">
             <a:avLst/>
@@ -37664,7 +37664,7 @@
                 <a:ea typeface="微软雅黑"/>
                 <a:cs typeface="微软雅黑"/>
               </a:rPr>
-              <a:t>12.7% / 24.7%</a:t>
+              <a:t>63,402 / 31.6%</a:t>
             </a:r>
           </a:p>
         </p:txBody>
@@ -37678,7 +37678,7 @@
         <p:spPr>
           <a:xfrm>
             <a:off x="426720" y="1783080"/>
-            <a:ext cx="1036320" cy="137160"/>
+            <a:ext cx="1158240" cy="137160"/>
           </a:xfrm>
           <a:prstGeom prst="rect">
             <a:avLst/>
@@ -37705,7 +37705,7 @@
                 <a:ea typeface="微软雅黑"/>
                 <a:cs typeface="微软雅黑"/>
               </a:rPr>
-              <a:t>镜像 ClawHub</a:t>
+              <a:t>企业（交叉）</a:t>
             </a:r>
           </a:p>
         </p:txBody>
@@ -37718,8 +37718,8 @@
         </p:nvSpPr>
         <p:spPr>
           <a:xfrm>
-            <a:off x="1524000" y="1810512"/>
-            <a:ext cx="1828800" cy="68580"/>
+            <a:off x="1609344" y="1810512"/>
+            <a:ext cx="1767839" cy="68580"/>
           </a:xfrm>
           <a:prstGeom prst="roundRect">
             <a:avLst>
@@ -37764,8 +37764,8 @@
         </p:nvSpPr>
         <p:spPr>
           <a:xfrm>
-            <a:off x="1524000" y="1810512"/>
-            <a:ext cx="1828800" cy="68580"/>
+            <a:off x="1609344" y="1810512"/>
+            <a:ext cx="902011" cy="68580"/>
           </a:xfrm>
           <a:prstGeom prst="roundRect">
             <a:avLst>
@@ -37810,8 +37810,8 @@
         </p:nvSpPr>
         <p:spPr>
           <a:xfrm>
-            <a:off x="3560064" y="1783080"/>
-            <a:ext cx="1950720" cy="137160"/>
+            <a:off x="3511295" y="1783080"/>
+            <a:ext cx="2011680" cy="137160"/>
           </a:xfrm>
           <a:prstGeom prst="rect">
             <a:avLst/>
@@ -37838,7 +37838,7 @@
                 <a:ea typeface="微软雅黑"/>
                 <a:cs typeface="微软雅黑"/>
               </a:rPr>
-              <a:t>62.4% / 35.5%</a:t>
+              <a:t>69,938 / 34.9%</a:t>
             </a:r>
           </a:p>
         </p:txBody>
@@ -37879,8 +37879,8 @@
                 <a:ea typeface="微软雅黑"/>
                 <a:cs typeface="微软雅黑"/>
               </a:rPr>
-              <a:t>个人条数少、下载高；镜像条数最多；企业单条最强见右图。
-个人 1,245 条 / 企业 633 条 / 镜像 3,122 条。</a:t>
+              <a:t>社区 + ClawHub = 200,419，正好覆盖全站；
+企业是叠加在两者上的交叉标签，三者不能相加。</a:t>
             </a:r>
           </a:p>
         </p:txBody>
@@ -40472,7 +40472,7 @@
                 <a:ea typeface="微软雅黑"/>
                 <a:cs typeface="微软雅黑"/>
               </a:rPr>
-              <a:t>读法：Top5000 由 2,883 个上架方供给，Top10 拿走 37.9% 下载；全站付费 10%，但头部只有 1%。</a:t>
+              <a:t>读法：全站社区 + ClawHub 覆盖全站，企业 34.9% 是叠加；Top5000 里企业单条最强，付费只有 1%。</a:t>
             </a:r>
           </a:p>
         </p:txBody>

--- a/skill-final-v1.pptx
+++ b/skill-final-v1.pptx
@@ -32800,8 +32800,8 @@
         </p:nvSpPr>
         <p:spPr>
           <a:xfrm>
-            <a:off x="8400288" y="1824228"/>
-            <a:ext cx="3291840" cy="137160"/>
+            <a:off x="426720" y="1748790"/>
+            <a:ext cx="7315200" cy="150876"/>
           </a:xfrm>
           <a:prstGeom prst="rect">
             <a:avLst/>
@@ -32820,15 +32820,15 @@
               </a:lnSpc>
             </a:pPr>
             <a:r>
-              <a:rPr sz="800" b="0">
-                <a:solidFill>
-                  <a:srgbClr val="8B8E94"/>
-                </a:solidFill>
-                <a:latin typeface="微软雅黑"/>
-                <a:ea typeface="微软雅黑"/>
-                <a:cs typeface="微软雅黑"/>
-              </a:rPr>
-              <a:t>实测：iic/fun-denoise 5.3k 浏览 / 782 下载</a:t>
+              <a:rPr sz="1050" b="1">
+                <a:solidFill>
+                  <a:srgbClr val="B5333B"/>
+                </a:solidFill>
+                <a:latin typeface="微软雅黑"/>
+                <a:ea typeface="微软雅黑"/>
+                <a:cs typeface="微软雅黑"/>
+              </a:rPr>
+              <a:t>生态画像：4 项对比</a:t>
             </a:r>
           </a:p>
         </p:txBody>
@@ -32841,8 +32841,8 @@
         </p:nvSpPr>
         <p:spPr>
           <a:xfrm>
-            <a:off x="426720" y="2139696"/>
-            <a:ext cx="4876800" cy="178308"/>
+            <a:off x="426720" y="2057400"/>
+            <a:ext cx="5364480" cy="150876"/>
           </a:xfrm>
           <a:prstGeom prst="rect">
             <a:avLst/>
@@ -32861,7 +32861,7 @@
               </a:lnSpc>
             </a:pPr>
             <a:r>
-              <a:rPr sz="1200" b="1">
+              <a:rPr sz="1050" b="1">
                 <a:solidFill>
                   <a:srgbClr val="1A1A1C"/>
                 </a:solidFill>
@@ -32869,7 +32869,7 @@
                 <a:ea typeface="微软雅黑"/>
                 <a:cs typeface="微软雅黑"/>
               </a:rPr>
-              <a:t>生态画像：4 项对比</a:t>
+              <a:t>供给：97.5% 标源 GitHub</a:t>
             </a:r>
           </a:p>
         </p:txBody>
@@ -32882,8 +32882,8 @@
         </p:nvSpPr>
         <p:spPr>
           <a:xfrm>
-            <a:off x="426720" y="2366010"/>
-            <a:ext cx="5608320" cy="178308"/>
+            <a:off x="426720" y="2228850"/>
+            <a:ext cx="5364480" cy="102870"/>
           </a:xfrm>
           <a:prstGeom prst="rect">
             <a:avLst/>
@@ -32902,15 +32902,15 @@
               </a:lnSpc>
             </a:pPr>
             <a:r>
-              <a:rPr sz="1100" b="1">
-                <a:solidFill>
-                  <a:srgbClr val="1A1A1C"/>
-                </a:solidFill>
-                <a:latin typeface="微软雅黑"/>
-                <a:ea typeface="微软雅黑"/>
-                <a:cs typeface="微软雅黑"/>
-              </a:rPr>
-              <a:t>供给：数量很大，原创很薄</a:t>
+              <a:rPr sz="780" b="0">
+                <a:solidFill>
+                  <a:srgbClr val="8B8E94"/>
+                </a:solidFill>
+                <a:latin typeface="微软雅黑"/>
+                <a:ea typeface="微软雅黑"/>
+                <a:cs typeface="微软雅黑"/>
+              </a:rPr>
+              <a:t>全站 83,552；已分类 81,973（98.1%）</a:t>
             </a:r>
           </a:p>
         </p:txBody>
@@ -32923,8 +32923,8 @@
         </p:nvSpPr>
         <p:spPr>
           <a:xfrm>
-            <a:off x="426720" y="2640330"/>
-            <a:ext cx="1219200" cy="137160"/>
+            <a:off x="426720" y="2324862"/>
+            <a:ext cx="1524000" cy="102870"/>
           </a:xfrm>
           <a:prstGeom prst="rect">
             <a:avLst/>
@@ -32943,15 +32943,15 @@
               </a:lnSpc>
             </a:pPr>
             <a:r>
-              <a:rPr sz="950" b="0">
-                <a:solidFill>
-                  <a:srgbClr val="5B616B"/>
-                </a:solidFill>
-                <a:latin typeface="微软雅黑"/>
-                <a:ea typeface="微软雅黑"/>
-                <a:cs typeface="微软雅黑"/>
-              </a:rPr>
-              <a:t>平台官方</a:t>
+              <a:rPr sz="880" b="0">
+                <a:solidFill>
+                  <a:srgbClr val="1A1A1C"/>
+                </a:solidFill>
+                <a:latin typeface="微软雅黑"/>
+                <a:ea typeface="微软雅黑"/>
+                <a:cs typeface="微软雅黑"/>
+              </a:rPr>
+              <a:t>GitHub</a:t>
             </a:r>
           </a:p>
         </p:txBody>
@@ -32964,8 +32964,8 @@
         </p:nvSpPr>
         <p:spPr>
           <a:xfrm>
-            <a:off x="1706880" y="2667762"/>
-            <a:ext cx="1950720" cy="75438"/>
+            <a:off x="2072640" y="2345436"/>
+            <a:ext cx="2072640" cy="51435"/>
           </a:xfrm>
           <a:prstGeom prst="roundRect">
             <a:avLst>
@@ -33010,8 +33010,8 @@
         </p:nvSpPr>
         <p:spPr>
           <a:xfrm>
-            <a:off x="1706880" y="2667762"/>
-            <a:ext cx="7872" cy="75438"/>
+            <a:off x="2072640" y="2345436"/>
+            <a:ext cx="2020824" cy="51435"/>
           </a:xfrm>
           <a:prstGeom prst="roundRect">
             <a:avLst>
@@ -33056,8 +33056,8 @@
         </p:nvSpPr>
         <p:spPr>
           <a:xfrm>
-            <a:off x="3779520" y="2640330"/>
-            <a:ext cx="2011680" cy="137160"/>
+            <a:off x="4267200" y="2324862"/>
+            <a:ext cx="1463040" cy="102870"/>
           </a:xfrm>
           <a:prstGeom prst="rect">
             <a:avLst/>
@@ -33076,15 +33076,15 @@
               </a:lnSpc>
             </a:pPr>
             <a:r>
-              <a:rPr sz="900" b="0">
-                <a:solidFill>
-                  <a:srgbClr val="1A1A1C"/>
-                </a:solidFill>
-                <a:latin typeface="微软雅黑"/>
-                <a:ea typeface="微软雅黑"/>
-                <a:cs typeface="微软雅黑"/>
-              </a:rPr>
-              <a:t>337 / 0.4%</a:t>
+              <a:rPr sz="810" b="0">
+                <a:solidFill>
+                  <a:srgbClr val="5B616B"/>
+                </a:solidFill>
+                <a:latin typeface="微软雅黑"/>
+                <a:ea typeface="微软雅黑"/>
+                <a:cs typeface="微软雅黑"/>
+              </a:rPr>
+              <a:t>79,945 / 97.5%</a:t>
             </a:r>
           </a:p>
         </p:txBody>
@@ -33097,8 +33097,8 @@
         </p:nvSpPr>
         <p:spPr>
           <a:xfrm>
-            <a:off x="426720" y="2859786"/>
-            <a:ext cx="1219200" cy="137160"/>
+            <a:off x="426720" y="2462022"/>
+            <a:ext cx="1524000" cy="102870"/>
           </a:xfrm>
           <a:prstGeom prst="rect">
             <a:avLst/>
@@ -33117,15 +33117,15 @@
               </a:lnSpc>
             </a:pPr>
             <a:r>
-              <a:rPr sz="950" b="0">
-                <a:solidFill>
-                  <a:srgbClr val="5B616B"/>
-                </a:solidFill>
-                <a:latin typeface="微软雅黑"/>
-                <a:ea typeface="微软雅黑"/>
-                <a:cs typeface="微软雅黑"/>
-              </a:rPr>
-              <a:t>品牌 / 垂直</a:t>
+              <a:rPr sz="880" b="0">
+                <a:solidFill>
+                  <a:srgbClr val="1A1A1C"/>
+                </a:solidFill>
+                <a:latin typeface="微软雅黑"/>
+                <a:ea typeface="微软雅黑"/>
+                <a:cs typeface="微软雅黑"/>
+              </a:rPr>
+              <a:t>其他 Skill 市场</a:t>
             </a:r>
           </a:p>
         </p:txBody>
@@ -33138,8 +33138,8 @@
         </p:nvSpPr>
         <p:spPr>
           <a:xfrm>
-            <a:off x="1706880" y="2887218"/>
-            <a:ext cx="1950720" cy="75438"/>
+            <a:off x="2072640" y="2482596"/>
+            <a:ext cx="2072640" cy="51435"/>
           </a:xfrm>
           <a:prstGeom prst="roundRect">
             <a:avLst>
@@ -33184,8 +33184,8 @@
         </p:nvSpPr>
         <p:spPr>
           <a:xfrm>
-            <a:off x="1706880" y="2887218"/>
-            <a:ext cx="12847" cy="75438"/>
+            <a:off x="2072640" y="2482596"/>
+            <a:ext cx="36576" cy="51435"/>
           </a:xfrm>
           <a:prstGeom prst="roundRect">
             <a:avLst>
@@ -33193,7 +33193,7 @@
             </a:avLst>
           </a:prstGeom>
           <a:solidFill>
-            <a:srgbClr val="566472"/>
+            <a:srgbClr val="D98A8F"/>
           </a:solidFill>
           <a:ln>
             <a:noFill/>
@@ -33230,8 +33230,8 @@
         </p:nvSpPr>
         <p:spPr>
           <a:xfrm>
-            <a:off x="3779520" y="2859786"/>
-            <a:ext cx="2011680" cy="137160"/>
+            <a:off x="4267200" y="2462022"/>
+            <a:ext cx="1463040" cy="102870"/>
           </a:xfrm>
           <a:prstGeom prst="rect">
             <a:avLst/>
@@ -33250,15 +33250,15 @@
               </a:lnSpc>
             </a:pPr>
             <a:r>
-              <a:rPr sz="900" b="0">
-                <a:solidFill>
-                  <a:srgbClr val="1A1A1C"/>
-                </a:solidFill>
-                <a:latin typeface="微软雅黑"/>
-                <a:ea typeface="微软雅黑"/>
-                <a:cs typeface="微软雅黑"/>
-              </a:rPr>
-              <a:t>550 / &lt;1%</a:t>
+              <a:rPr sz="810" b="0">
+                <a:solidFill>
+                  <a:srgbClr val="5B616B"/>
+                </a:solidFill>
+                <a:latin typeface="微软雅黑"/>
+                <a:ea typeface="微软雅黑"/>
+                <a:cs typeface="微软雅黑"/>
+              </a:rPr>
+              <a:t>248 / 0.3%</a:t>
             </a:r>
           </a:p>
         </p:txBody>
@@ -33271,8 +33271,8 @@
         </p:nvSpPr>
         <p:spPr>
           <a:xfrm>
-            <a:off x="426720" y="3079242"/>
-            <a:ext cx="1219200" cy="137160"/>
+            <a:off x="426720" y="2599182"/>
+            <a:ext cx="1524000" cy="102870"/>
           </a:xfrm>
           <a:prstGeom prst="rect">
             <a:avLst/>
@@ -33291,15 +33291,15 @@
               </a:lnSpc>
             </a:pPr>
             <a:r>
-              <a:rPr sz="950" b="0">
-                <a:solidFill>
-                  <a:srgbClr val="5B616B"/>
-                </a:solidFill>
-                <a:latin typeface="微软雅黑"/>
-                <a:ea typeface="微软雅黑"/>
-                <a:cs typeface="微软雅黑"/>
-              </a:rPr>
-              <a:t>聚合 / 镜像</a:t>
+              <a:rPr sz="880" b="0">
+                <a:solidFill>
+                  <a:srgbClr val="1A1A1C"/>
+                </a:solidFill>
+                <a:latin typeface="微软雅黑"/>
+                <a:ea typeface="微软雅黑"/>
+                <a:cs typeface="微软雅黑"/>
+              </a:rPr>
+              <a:t>外部网站</a:t>
             </a:r>
           </a:p>
         </p:txBody>
@@ -33312,8 +33312,8 @@
         </p:nvSpPr>
         <p:spPr>
           <a:xfrm>
-            <a:off x="1706880" y="3106674"/>
-            <a:ext cx="1950720" cy="75438"/>
+            <a:off x="2072640" y="2619756"/>
+            <a:ext cx="2072640" cy="51435"/>
           </a:xfrm>
           <a:prstGeom prst="roundRect">
             <a:avLst>
@@ -33358,8 +33358,8 @@
         </p:nvSpPr>
         <p:spPr>
           <a:xfrm>
-            <a:off x="1706880" y="3106674"/>
-            <a:ext cx="602859" cy="75438"/>
+            <a:off x="2072640" y="2619756"/>
+            <a:ext cx="36576" cy="51435"/>
           </a:xfrm>
           <a:prstGeom prst="roundRect">
             <a:avLst>
@@ -33367,7 +33367,7 @@
             </a:avLst>
           </a:prstGeom>
           <a:solidFill>
-            <a:srgbClr val="9AA1AA"/>
+            <a:srgbClr val="6B7785"/>
           </a:solidFill>
           <a:ln>
             <a:noFill/>
@@ -33404,8 +33404,8 @@
         </p:nvSpPr>
         <p:spPr>
           <a:xfrm>
-            <a:off x="3779520" y="3079242"/>
-            <a:ext cx="2011680" cy="137160"/>
+            <a:off x="4267200" y="2599182"/>
+            <a:ext cx="1463040" cy="102870"/>
           </a:xfrm>
           <a:prstGeom prst="rect">
             <a:avLst/>
@@ -33424,15 +33424,15 @@
               </a:lnSpc>
             </a:pPr>
             <a:r>
-              <a:rPr sz="900" b="0">
-                <a:solidFill>
-                  <a:srgbClr val="1A1A1C"/>
-                </a:solidFill>
-                <a:latin typeface="微软雅黑"/>
-                <a:ea typeface="微软雅黑"/>
-                <a:cs typeface="微软雅黑"/>
-              </a:rPr>
-              <a:t>25,808 / 30.9%</a:t>
+              <a:rPr sz="810" b="0">
+                <a:solidFill>
+                  <a:srgbClr val="5B616B"/>
+                </a:solidFill>
+                <a:latin typeface="微软雅黑"/>
+                <a:ea typeface="微软雅黑"/>
+                <a:cs typeface="微软雅黑"/>
+              </a:rPr>
+              <a:t>329 / 0.4%</a:t>
             </a:r>
           </a:p>
         </p:txBody>
@@ -33445,8 +33445,8 @@
         </p:nvSpPr>
         <p:spPr>
           <a:xfrm>
-            <a:off x="426720" y="3298698"/>
-            <a:ext cx="1219200" cy="137160"/>
+            <a:off x="426720" y="2736342"/>
+            <a:ext cx="1524000" cy="102870"/>
           </a:xfrm>
           <a:prstGeom prst="rect">
             <a:avLst/>
@@ -33465,15 +33465,15 @@
               </a:lnSpc>
             </a:pPr>
             <a:r>
-              <a:rPr sz="950" b="0">
-                <a:solidFill>
-                  <a:srgbClr val="5B616B"/>
-                </a:solidFill>
-                <a:latin typeface="微软雅黑"/>
-                <a:ea typeface="微软雅黑"/>
-                <a:cs typeface="微软雅黑"/>
-              </a:rPr>
-              <a:t>社区长尾</a:t>
+              <a:rPr sz="880" b="0">
+                <a:solidFill>
+                  <a:srgbClr val="1A1A1C"/>
+                </a:solidFill>
+                <a:latin typeface="微软雅黑"/>
+                <a:ea typeface="微软雅黑"/>
+                <a:cs typeface="微软雅黑"/>
+              </a:rPr>
+              <a:t>个人上传</a:t>
             </a:r>
           </a:p>
         </p:txBody>
@@ -33486,8 +33486,8 @@
         </p:nvSpPr>
         <p:spPr>
           <a:xfrm>
-            <a:off x="1706880" y="3326130"/>
-            <a:ext cx="1950720" cy="75438"/>
+            <a:off x="2072640" y="2756916"/>
+            <a:ext cx="2072640" cy="51435"/>
           </a:xfrm>
           <a:prstGeom prst="roundRect">
             <a:avLst>
@@ -33532,8 +33532,8 @@
         </p:nvSpPr>
         <p:spPr>
           <a:xfrm>
-            <a:off x="1706880" y="3326130"/>
-            <a:ext cx="1327140" cy="75438"/>
+            <a:off x="2072640" y="2756916"/>
+            <a:ext cx="37307" cy="51435"/>
           </a:xfrm>
           <a:prstGeom prst="roundRect">
             <a:avLst>
@@ -33541,7 +33541,7 @@
             </a:avLst>
           </a:prstGeom>
           <a:solidFill>
-            <a:srgbClr val="CFD4DA"/>
+            <a:srgbClr val="8B8E94"/>
           </a:solidFill>
           <a:ln>
             <a:noFill/>
@@ -33578,8 +33578,8 @@
         </p:nvSpPr>
         <p:spPr>
           <a:xfrm>
-            <a:off x="3779520" y="3298698"/>
-            <a:ext cx="2011680" cy="137160"/>
+            <a:off x="4267200" y="2736342"/>
+            <a:ext cx="1463040" cy="102870"/>
           </a:xfrm>
           <a:prstGeom prst="rect">
             <a:avLst/>
@@ -33598,15 +33598,15 @@
               </a:lnSpc>
             </a:pPr>
             <a:r>
-              <a:rPr sz="900" b="0">
-                <a:solidFill>
-                  <a:srgbClr val="1A1A1C"/>
-                </a:solidFill>
-                <a:latin typeface="微软雅黑"/>
-                <a:ea typeface="微软雅黑"/>
-                <a:cs typeface="微软雅黑"/>
-              </a:rPr>
-              <a:t>56,814 / 68.0%</a:t>
+              <a:rPr sz="810" b="0">
+                <a:solidFill>
+                  <a:srgbClr val="5B616B"/>
+                </a:solidFill>
+                <a:latin typeface="微软雅黑"/>
+                <a:ea typeface="微软雅黑"/>
+                <a:cs typeface="微软雅黑"/>
+              </a:rPr>
+              <a:t>1,451 / 1.8%</a:t>
             </a:r>
           </a:p>
         </p:txBody>
@@ -33619,49 +33619,8 @@
         </p:nvSpPr>
         <p:spPr>
           <a:xfrm>
-            <a:off x="426720" y="3531870"/>
-            <a:ext cx="5608320" cy="233172"/>
-          </a:xfrm>
-          <a:prstGeom prst="rect">
-            <a:avLst/>
-          </a:prstGeom>
-          <a:noFill/>
-        </p:spPr>
-        <p:txBody>
-          <a:bodyPr wrap="square" lIns="0" rIns="0" tIns="0" bIns="0" anchor="t">
-            <a:spAutoFit/>
-          </a:bodyPr>
-          <a:lstStyle/>
-          <a:p>
-            <a:pPr algn="l">
-              <a:lnSpc>
-                <a:spcPct val="105000"/>
-              </a:lnSpc>
-            </a:pPr>
-            <a:r>
-              <a:rPr sz="850" b="0">
-                <a:solidFill>
-                  <a:srgbClr val="8B8E94"/>
-                </a:solidFill>
-                <a:latin typeface="微软雅黑"/>
-                <a:ea typeface="微软雅黑"/>
-                <a:cs typeface="微软雅黑"/>
-              </a:rPr>
-              <a:t>官方 337 条；垂直约 550；镜像 25,808 条；其余约 5.68 万（按总数估算）。</a:t>
-            </a:r>
-          </a:p>
-        </p:txBody>
-      </p:sp>
-      <p:sp>
-        <p:nvSpPr>
-          <p:cNvPr id="38" name="TextBox 37"/>
-          <p:cNvSpPr txBox="1"/>
-          <p:nvPr/>
-        </p:nvSpPr>
-        <p:spPr>
-          <a:xfrm>
-            <a:off x="6339840" y="2366010"/>
-            <a:ext cx="5364480" cy="178308"/>
+            <a:off x="426720" y="2880360"/>
+            <a:ext cx="5364480" cy="192024"/>
           </a:xfrm>
           <a:prstGeom prst="rect">
             <a:avLst/>
@@ -33680,29 +33639,29 @@
               </a:lnSpc>
             </a:pPr>
             <a:r>
-              <a:rPr sz="1100" b="1">
-                <a:solidFill>
-                  <a:srgbClr val="1A1A1C"/>
-                </a:solidFill>
-                <a:latin typeface="微软雅黑"/>
-                <a:ea typeface="微软雅黑"/>
-                <a:cs typeface="微软雅黑"/>
-              </a:rPr>
-              <a:t>消费：上架即沉默</a:t>
-            </a:r>
-          </a:p>
-        </p:txBody>
-      </p:sp>
-      <p:sp>
-        <p:nvSpPr>
-          <p:cNvPr id="39" name="TextBox 38"/>
-          <p:cNvSpPr txBox="1"/>
-          <p:nvPr/>
-        </p:nvSpPr>
-        <p:spPr>
-          <a:xfrm>
-            <a:off x="6339840" y="2640330"/>
-            <a:ext cx="1584960" cy="274320"/>
+              <a:rPr sz="760" b="0">
+                <a:solidFill>
+                  <a:srgbClr val="8B8E94"/>
+                </a:solidFill>
+                <a:latin typeface="微软雅黑"/>
+                <a:ea typeface="微软雅黑"/>
+                <a:cs typeface="微软雅黑"/>
+              </a:rPr>
+              <a:t>个人上传=无/无效标源近似；其余三类合计 2.5%。</a:t>
+            </a:r>
+          </a:p>
+        </p:txBody>
+      </p:sp>
+      <p:sp>
+        <p:nvSpPr>
+          <p:cNvPr id="38" name="TextBox 37"/>
+          <p:cNvSpPr txBox="1"/>
+          <p:nvPr/>
+        </p:nvSpPr>
+        <p:spPr>
+          <a:xfrm>
+            <a:off x="6339840" y="2057400"/>
+            <a:ext cx="5425440" cy="150876"/>
           </a:xfrm>
           <a:prstGeom prst="rect">
             <a:avLst/>
@@ -33721,70 +33680,29 @@
               </a:lnSpc>
             </a:pPr>
             <a:r>
-              <a:rPr sz="1800" b="1">
-                <a:solidFill>
-                  <a:srgbClr val="B5333B"/>
-                </a:solidFill>
-                <a:latin typeface="微软雅黑"/>
-                <a:ea typeface="微软雅黑"/>
-                <a:cs typeface="微软雅黑"/>
-              </a:rPr>
-              <a:t>158</a:t>
-            </a:r>
-          </a:p>
-        </p:txBody>
-      </p:sp>
-      <p:sp>
-        <p:nvSpPr>
-          <p:cNvPr id="40" name="TextBox 39"/>
-          <p:cNvSpPr txBox="1"/>
-          <p:nvPr/>
-        </p:nvSpPr>
-        <p:spPr>
-          <a:xfrm>
-            <a:off x="6339840" y="2914650"/>
-            <a:ext cx="1584960" cy="233172"/>
-          </a:xfrm>
-          <a:prstGeom prst="rect">
-            <a:avLst/>
-          </a:prstGeom>
-          <a:noFill/>
-        </p:spPr>
-        <p:txBody>
-          <a:bodyPr wrap="square" lIns="0" rIns="0" tIns="0" bIns="0" anchor="t">
-            <a:spAutoFit/>
-          </a:bodyPr>
-          <a:lstStyle/>
-          <a:p>
-            <a:pPr algn="l">
-              <a:lnSpc>
-                <a:spcPct val="105000"/>
-              </a:lnSpc>
-            </a:pPr>
-            <a:r>
-              <a:rPr sz="850" b="0">
-                <a:solidFill>
-                  <a:srgbClr val="5B616B"/>
-                </a:solidFill>
-                <a:latin typeface="微软雅黑"/>
-                <a:ea typeface="微软雅黑"/>
-                <a:cs typeface="微软雅黑"/>
-              </a:rPr>
-              <a:t>中位下载（样本 2,400）</a:t>
-            </a:r>
-          </a:p>
-        </p:txBody>
-      </p:sp>
-      <p:sp>
-        <p:nvSpPr>
-          <p:cNvPr id="41" name="TextBox 40"/>
-          <p:cNvSpPr txBox="1"/>
-          <p:nvPr/>
-        </p:nvSpPr>
-        <p:spPr>
-          <a:xfrm>
-            <a:off x="8107680" y="2640330"/>
-            <a:ext cx="1584960" cy="274320"/>
+              <a:rPr sz="1050" b="1">
+                <a:solidFill>
+                  <a:srgbClr val="1A1A1C"/>
+                </a:solidFill>
+                <a:latin typeface="微软雅黑"/>
+                <a:ea typeface="微软雅黑"/>
+                <a:cs typeface="微软雅黑"/>
+              </a:rPr>
+              <a:t>月度上架：3 月占 89.2%，平台批量导入</a:t>
+            </a:r>
+          </a:p>
+        </p:txBody>
+      </p:sp>
+      <p:sp>
+        <p:nvSpPr>
+          <p:cNvPr id="39" name="TextBox 38"/>
+          <p:cNvSpPr txBox="1"/>
+          <p:nvPr/>
+        </p:nvSpPr>
+        <p:spPr>
+          <a:xfrm>
+            <a:off x="6339840" y="2228850"/>
+            <a:ext cx="5425440" cy="102870"/>
           </a:xfrm>
           <a:prstGeom prst="rect">
             <a:avLst/>
@@ -33803,70 +33721,29 @@
               </a:lnSpc>
             </a:pPr>
             <a:r>
-              <a:rPr sz="1800" b="1">
-                <a:solidFill>
-                  <a:srgbClr val="B5333B"/>
-                </a:solidFill>
-                <a:latin typeface="微软雅黑"/>
-                <a:ea typeface="微软雅黑"/>
-                <a:cs typeface="微软雅黑"/>
-              </a:rPr>
-              <a:t>65.9%</a:t>
-            </a:r>
-          </a:p>
-        </p:txBody>
-      </p:sp>
-      <p:sp>
-        <p:nvSpPr>
-          <p:cNvPr id="42" name="TextBox 41"/>
-          <p:cNvSpPr txBox="1"/>
-          <p:nvPr/>
-        </p:nvSpPr>
-        <p:spPr>
-          <a:xfrm>
-            <a:off x="8107680" y="2914650"/>
-            <a:ext cx="1584960" cy="233172"/>
-          </a:xfrm>
-          <a:prstGeom prst="rect">
-            <a:avLst/>
-          </a:prstGeom>
-          <a:noFill/>
-        </p:spPr>
-        <p:txBody>
-          <a:bodyPr wrap="square" lIns="0" rIns="0" tIns="0" bIns="0" anchor="t">
-            <a:spAutoFit/>
-          </a:bodyPr>
-          <a:lstStyle/>
-          <a:p>
-            <a:pPr algn="l">
-              <a:lnSpc>
-                <a:spcPct val="105000"/>
-              </a:lnSpc>
-            </a:pPr>
-            <a:r>
-              <a:rPr sz="850" b="0">
-                <a:solidFill>
-                  <a:srgbClr val="5B616B"/>
-                </a:solidFill>
-                <a:latin typeface="微软雅黑"/>
-                <a:ea typeface="微软雅黑"/>
-                <a:cs typeface="微软雅黑"/>
-              </a:rPr>
-              <a:t>Top1% 技能拿走下载</a:t>
-            </a:r>
-          </a:p>
-        </p:txBody>
-      </p:sp>
-      <p:sp>
-        <p:nvSpPr>
-          <p:cNvPr id="43" name="TextBox 42"/>
-          <p:cNvSpPr txBox="1"/>
-          <p:nvPr/>
-        </p:nvSpPr>
-        <p:spPr>
-          <a:xfrm>
-            <a:off x="9875520" y="2640330"/>
-            <a:ext cx="1584960" cy="274320"/>
+              <a:rPr sz="780" b="0">
+                <a:solidFill>
+                  <a:srgbClr val="8B8E94"/>
+                </a:solidFill>
+                <a:latin typeface="微软雅黑"/>
+                <a:ea typeface="微软雅黑"/>
+                <a:cs typeface="微软雅黑"/>
+              </a:rPr>
+              <a:t>按 GmtCreate 归月 · 2026-03 至 2026-10</a:t>
+            </a:r>
+          </a:p>
+        </p:txBody>
+      </p:sp>
+      <p:sp>
+        <p:nvSpPr>
+          <p:cNvPr id="40" name="TextBox 39"/>
+          <p:cNvSpPr txBox="1"/>
+          <p:nvPr/>
+        </p:nvSpPr>
+        <p:spPr>
+          <a:xfrm>
+            <a:off x="6339840" y="2297430"/>
+            <a:ext cx="1584960" cy="246887"/>
           </a:xfrm>
           <a:prstGeom prst="rect">
             <a:avLst/>
@@ -33885,7 +33762,7 @@
               </a:lnSpc>
             </a:pPr>
             <a:r>
-              <a:rPr sz="1800" b="1">
+              <a:rPr sz="1600" b="1">
                 <a:solidFill>
                   <a:srgbClr val="B5333B"/>
                 </a:solidFill>
@@ -33893,103 +33770,21 @@
                 <a:ea typeface="微软雅黑"/>
                 <a:cs typeface="微软雅黑"/>
               </a:rPr>
-              <a:t>3.5×</a:t>
-            </a:r>
-          </a:p>
-        </p:txBody>
-      </p:sp>
-      <p:sp>
-        <p:nvSpPr>
-          <p:cNvPr id="44" name="TextBox 43"/>
-          <p:cNvSpPr txBox="1"/>
-          <p:nvPr/>
-        </p:nvSpPr>
-        <p:spPr>
-          <a:xfrm>
-            <a:off x="9875520" y="2914650"/>
-            <a:ext cx="1584960" cy="233172"/>
-          </a:xfrm>
-          <a:prstGeom prst="rect">
-            <a:avLst/>
-          </a:prstGeom>
-          <a:noFill/>
-        </p:spPr>
-        <p:txBody>
-          <a:bodyPr wrap="square" lIns="0" rIns="0" tIns="0" bIns="0" anchor="t">
-            <a:spAutoFit/>
-          </a:bodyPr>
-          <a:lstStyle/>
-          <a:p>
-            <a:pPr algn="l">
-              <a:lnSpc>
-                <a:spcPct val="105000"/>
-              </a:lnSpc>
-            </a:pPr>
-            <a:r>
-              <a:rPr sz="850" b="0">
-                <a:solidFill>
-                  <a:srgbClr val="5B616B"/>
-                </a:solidFill>
-                <a:latin typeface="微软雅黑"/>
-                <a:ea typeface="微软雅黑"/>
-                <a:cs typeface="微软雅黑"/>
-              </a:rPr>
-              <a:t>品牌/垂直中位 vs 长尾</a:t>
-            </a:r>
-          </a:p>
-        </p:txBody>
-      </p:sp>
-      <p:sp>
-        <p:nvSpPr>
-          <p:cNvPr id="45" name="TextBox 44"/>
-          <p:cNvSpPr txBox="1"/>
-          <p:nvPr/>
-        </p:nvSpPr>
-        <p:spPr>
-          <a:xfrm>
-            <a:off x="6339840" y="3429000"/>
-            <a:ext cx="5364480" cy="274320"/>
-          </a:xfrm>
-          <a:prstGeom prst="rect">
-            <a:avLst/>
-          </a:prstGeom>
-          <a:noFill/>
-        </p:spPr>
-        <p:txBody>
-          <a:bodyPr wrap="square" lIns="0" rIns="0" tIns="0" bIns="0" anchor="t">
-            <a:spAutoFit/>
-          </a:bodyPr>
-          <a:lstStyle/>
-          <a:p>
-            <a:pPr algn="l">
-              <a:lnSpc>
-                <a:spcPct val="105000"/>
-              </a:lnSpc>
-            </a:pPr>
-            <a:r>
-              <a:rPr sz="850" b="0">
-                <a:solidFill>
-                  <a:srgbClr val="8B8E94"/>
-                </a:solidFill>
-                <a:latin typeface="微软雅黑"/>
-                <a:ea typeface="微软雅黑"/>
-                <a:cs typeface="微软雅黑"/>
-              </a:rPr>
-              <a:t>下载含 CLI / 镜像拉取，不等于用户数；样本偏向推荐位，真实中位更低。</a:t>
-            </a:r>
-          </a:p>
-        </p:txBody>
-      </p:sp>
-      <p:sp>
-        <p:nvSpPr>
-          <p:cNvPr id="46" name="TextBox 45"/>
-          <p:cNvSpPr txBox="1"/>
-          <p:nvPr/>
-        </p:nvSpPr>
-        <p:spPr>
-          <a:xfrm>
-            <a:off x="426720" y="4149090"/>
-            <a:ext cx="5608320" cy="178308"/>
+              <a:t>89.2%</a:t>
+            </a:r>
+          </a:p>
+        </p:txBody>
+      </p:sp>
+      <p:sp>
+        <p:nvSpPr>
+          <p:cNvPr id="41" name="TextBox 40"/>
+          <p:cNvSpPr txBox="1"/>
+          <p:nvPr/>
+        </p:nvSpPr>
+        <p:spPr>
+          <a:xfrm>
+            <a:off x="6339840" y="2606040"/>
+            <a:ext cx="1584960" cy="102870"/>
           </a:xfrm>
           <a:prstGeom prst="rect">
             <a:avLst/>
@@ -34008,29 +33803,29 @@
               </a:lnSpc>
             </a:pPr>
             <a:r>
-              <a:rPr sz="1100" b="1">
-                <a:solidFill>
-                  <a:srgbClr val="1A1A1C"/>
-                </a:solidFill>
-                <a:latin typeface="微软雅黑"/>
-                <a:ea typeface="微软雅黑"/>
-                <a:cs typeface="微软雅黑"/>
-              </a:rPr>
-              <a:t>类目：Top3 占 66.3%</a:t>
-            </a:r>
-          </a:p>
-        </p:txBody>
-      </p:sp>
-      <p:sp>
-        <p:nvSpPr>
-          <p:cNvPr id="47" name="TextBox 46"/>
-          <p:cNvSpPr txBox="1"/>
-          <p:nvPr/>
-        </p:nvSpPr>
-        <p:spPr>
-          <a:xfrm>
-            <a:off x="426720" y="4320540"/>
-            <a:ext cx="5608320" cy="137160"/>
+              <a:rPr sz="760" b="0">
+                <a:solidFill>
+                  <a:srgbClr val="5B616B"/>
+                </a:solidFill>
+                <a:latin typeface="微软雅黑"/>
+                <a:ea typeface="微软雅黑"/>
+                <a:cs typeface="微软雅黑"/>
+              </a:rPr>
+              <a:t>2026-03 单月占比</a:t>
+            </a:r>
+          </a:p>
+        </p:txBody>
+      </p:sp>
+      <p:sp>
+        <p:nvSpPr>
+          <p:cNvPr id="42" name="TextBox 41"/>
+          <p:cNvSpPr txBox="1"/>
+          <p:nvPr/>
+        </p:nvSpPr>
+        <p:spPr>
+          <a:xfrm>
+            <a:off x="6339840" y="2688336"/>
+            <a:ext cx="1584960" cy="150876"/>
           </a:xfrm>
           <a:prstGeom prst="rect">
             <a:avLst/>
@@ -34049,29 +33844,29 @@
               </a:lnSpc>
             </a:pPr>
             <a:r>
-              <a:rPr sz="850" b="0">
-                <a:solidFill>
-                  <a:srgbClr val="8B8E94"/>
-                </a:solidFill>
-                <a:latin typeface="微软雅黑"/>
-                <a:ea typeface="微软雅黑"/>
-                <a:cs typeface="微软雅黑"/>
-              </a:rPr>
-              <a:t>10 个一级类目；35 个二级类目里 24 个是 0 条</a:t>
-            </a:r>
-          </a:p>
-        </p:txBody>
-      </p:sp>
-      <p:sp>
-        <p:nvSpPr>
-          <p:cNvPr id="48" name="TextBox 47"/>
-          <p:cNvSpPr txBox="1"/>
-          <p:nvPr/>
-        </p:nvSpPr>
-        <p:spPr>
-          <a:xfrm>
-            <a:off x="426720" y="4491990"/>
-            <a:ext cx="1219200" cy="137160"/>
+              <a:rPr sz="1050" b="1">
+                <a:solidFill>
+                  <a:srgbClr val="1A1A1C"/>
+                </a:solidFill>
+                <a:latin typeface="微软雅黑"/>
+                <a:ea typeface="微软雅黑"/>
+                <a:cs typeface="微软雅黑"/>
+              </a:rPr>
+              <a:t>73,098</a:t>
+            </a:r>
+          </a:p>
+        </p:txBody>
+      </p:sp>
+      <p:sp>
+        <p:nvSpPr>
+          <p:cNvPr id="43" name="TextBox 42"/>
+          <p:cNvSpPr txBox="1"/>
+          <p:nvPr/>
+        </p:nvSpPr>
+        <p:spPr>
+          <a:xfrm>
+            <a:off x="6339840" y="2839212"/>
+            <a:ext cx="1584960" cy="89154"/>
           </a:xfrm>
           <a:prstGeom prst="rect">
             <a:avLst/>
@@ -34090,7 +33885,7 @@
               </a:lnSpc>
             </a:pPr>
             <a:r>
-              <a:rPr sz="900" b="0">
+              <a:rPr sz="760" b="0">
                 <a:solidFill>
                   <a:srgbClr val="5B616B"/>
                 </a:solidFill>
@@ -34098,21 +33893,21 @@
                 <a:ea typeface="微软雅黑"/>
                 <a:cs typeface="微软雅黑"/>
               </a:rPr>
-              <a:t>开发工具</a:t>
-            </a:r>
-          </a:p>
-        </p:txBody>
-      </p:sp>
-      <p:sp>
-        <p:nvSpPr>
-          <p:cNvPr id="49" name="Rounded Rectangle 48"/>
+              <a:t>3 月上架</a:t>
+            </a:r>
+          </a:p>
+        </p:txBody>
+      </p:sp>
+      <p:sp>
+        <p:nvSpPr>
+          <p:cNvPr id="44" name="Rounded Rectangle 43"/>
           <p:cNvSpPr/>
           <p:nvPr/>
         </p:nvSpPr>
         <p:spPr>
           <a:xfrm>
-            <a:off x="1706880" y="4519422"/>
-            <a:ext cx="2316480" cy="68580"/>
+            <a:off x="8193024" y="2571750"/>
+            <a:ext cx="268224" cy="363474"/>
           </a:xfrm>
           <a:prstGeom prst="roundRect">
             <a:avLst>
@@ -34120,7 +33915,7 @@
             </a:avLst>
           </a:prstGeom>
           <a:solidFill>
-            <a:srgbClr val="EDEFF2"/>
+            <a:srgbClr val="B5333B"/>
           </a:solidFill>
           <a:ln>
             <a:noFill/>
@@ -34151,14 +33946,96 @@
       </p:sp>
       <p:sp>
         <p:nvSpPr>
-          <p:cNvPr id="50" name="Rounded Rectangle 49"/>
+          <p:cNvPr id="45" name="TextBox 44"/>
+          <p:cNvSpPr txBox="1"/>
+          <p:nvPr/>
+        </p:nvSpPr>
+        <p:spPr>
+          <a:xfrm>
+            <a:off x="8168640" y="2955798"/>
+            <a:ext cx="390144" cy="82296"/>
+          </a:xfrm>
+          <a:prstGeom prst="rect">
+            <a:avLst/>
+          </a:prstGeom>
+          <a:noFill/>
+        </p:spPr>
+        <p:txBody>
+          <a:bodyPr wrap="square" lIns="0" rIns="0" tIns="0" bIns="0" anchor="t">
+            <a:spAutoFit/>
+          </a:bodyPr>
+          <a:lstStyle/>
+          <a:p>
+            <a:pPr algn="ctr">
+              <a:lnSpc>
+                <a:spcPct val="100000"/>
+              </a:lnSpc>
+            </a:pPr>
+            <a:r>
+              <a:rPr sz="700" b="0">
+                <a:solidFill>
+                  <a:srgbClr val="5B616B"/>
+                </a:solidFill>
+                <a:latin typeface="微软雅黑"/>
+                <a:ea typeface="微软雅黑"/>
+                <a:cs typeface="微软雅黑"/>
+              </a:rPr>
+              <a:t>3月</a:t>
+            </a:r>
+          </a:p>
+        </p:txBody>
+      </p:sp>
+      <p:sp>
+        <p:nvSpPr>
+          <p:cNvPr id="46" name="TextBox 45"/>
+          <p:cNvSpPr txBox="1"/>
+          <p:nvPr/>
+        </p:nvSpPr>
+        <p:spPr>
+          <a:xfrm>
+            <a:off x="8071104" y="2475738"/>
+            <a:ext cx="585216" cy="82296"/>
+          </a:xfrm>
+          <a:prstGeom prst="rect">
+            <a:avLst/>
+          </a:prstGeom>
+          <a:noFill/>
+        </p:spPr>
+        <p:txBody>
+          <a:bodyPr wrap="square" lIns="0" rIns="0" tIns="0" bIns="0" anchor="t">
+            <a:spAutoFit/>
+          </a:bodyPr>
+          <a:lstStyle/>
+          <a:p>
+            <a:pPr algn="ctr">
+              <a:lnSpc>
+                <a:spcPct val="100000"/>
+              </a:lnSpc>
+            </a:pPr>
+            <a:r>
+              <a:rPr sz="700" b="1">
+                <a:solidFill>
+                  <a:srgbClr val="B5333B"/>
+                </a:solidFill>
+                <a:latin typeface="微软雅黑"/>
+                <a:ea typeface="微软雅黑"/>
+                <a:cs typeface="微软雅黑"/>
+              </a:rPr>
+              <a:t>73,098</a:t>
+            </a:r>
+          </a:p>
+        </p:txBody>
+      </p:sp>
+      <p:sp>
+        <p:nvSpPr>
+          <p:cNvPr id="47" name="Rounded Rectangle 46"/>
           <p:cNvSpPr/>
           <p:nvPr/>
         </p:nvSpPr>
         <p:spPr>
           <a:xfrm>
-            <a:off x="1706880" y="4519422"/>
-            <a:ext cx="2316480" cy="68580"/>
+            <a:off x="8583168" y="2921508"/>
+            <a:ext cx="268224" cy="13716"/>
           </a:xfrm>
           <a:prstGeom prst="roundRect">
             <a:avLst>
@@ -34166,7 +34043,7 @@
             </a:avLst>
           </a:prstGeom>
           <a:solidFill>
-            <a:srgbClr val="B5333B"/>
+            <a:srgbClr val="D98A8F"/>
           </a:solidFill>
           <a:ln>
             <a:noFill/>
@@ -34197,14 +34074,14 @@
       </p:sp>
       <p:sp>
         <p:nvSpPr>
-          <p:cNvPr id="51" name="TextBox 50"/>
-          <p:cNvSpPr txBox="1"/>
-          <p:nvPr/>
-        </p:nvSpPr>
-        <p:spPr>
-          <a:xfrm>
-            <a:off x="4206240" y="4491990"/>
-            <a:ext cx="975360" cy="137160"/>
+          <p:cNvPr id="48" name="TextBox 47"/>
+          <p:cNvSpPr txBox="1"/>
+          <p:nvPr/>
+        </p:nvSpPr>
+        <p:spPr>
+          <a:xfrm>
+            <a:off x="8558784" y="2955798"/>
+            <a:ext cx="390144" cy="82296"/>
           </a:xfrm>
           <a:prstGeom prst="rect">
             <a:avLst/>
@@ -34217,54 +34094,13 @@
           </a:bodyPr>
           <a:lstStyle/>
           <a:p>
-            <a:pPr algn="l">
+            <a:pPr algn="ctr">
               <a:lnSpc>
                 <a:spcPct val="100000"/>
               </a:lnSpc>
             </a:pPr>
             <a:r>
-              <a:rPr sz="850" b="0">
-                <a:solidFill>
-                  <a:srgbClr val="1A1A1C"/>
-                </a:solidFill>
-                <a:latin typeface="微软雅黑"/>
-                <a:ea typeface="微软雅黑"/>
-                <a:cs typeface="微软雅黑"/>
-              </a:rPr>
-              <a:t>27,928</a:t>
-            </a:r>
-          </a:p>
-        </p:txBody>
-      </p:sp>
-      <p:sp>
-        <p:nvSpPr>
-          <p:cNvPr id="52" name="TextBox 51"/>
-          <p:cNvSpPr txBox="1"/>
-          <p:nvPr/>
-        </p:nvSpPr>
-        <p:spPr>
-          <a:xfrm>
-            <a:off x="426720" y="4670298"/>
-            <a:ext cx="1219200" cy="137160"/>
-          </a:xfrm>
-          <a:prstGeom prst="rect">
-            <a:avLst/>
-          </a:prstGeom>
-          <a:noFill/>
-        </p:spPr>
-        <p:txBody>
-          <a:bodyPr wrap="square" lIns="0" rIns="0" tIns="0" bIns="0" anchor="t">
-            <a:spAutoFit/>
-          </a:bodyPr>
-          <a:lstStyle/>
-          <a:p>
-            <a:pPr algn="l">
-              <a:lnSpc>
-                <a:spcPct val="100000"/>
-              </a:lnSpc>
-            </a:pPr>
-            <a:r>
-              <a:rPr sz="900" b="0">
+              <a:rPr sz="700" b="0">
                 <a:solidFill>
                   <a:srgbClr val="5B616B"/>
                 </a:solidFill>
@@ -34272,21 +34108,21 @@
                 <a:ea typeface="微软雅黑"/>
                 <a:cs typeface="微软雅黑"/>
               </a:rPr>
-              <a:t>代码质检</a:t>
-            </a:r>
-          </a:p>
-        </p:txBody>
-      </p:sp>
-      <p:sp>
-        <p:nvSpPr>
-          <p:cNvPr id="53" name="Rounded Rectangle 52"/>
+              <a:t>4月</a:t>
+            </a:r>
+          </a:p>
+        </p:txBody>
+      </p:sp>
+      <p:sp>
+        <p:nvSpPr>
+          <p:cNvPr id="49" name="Rounded Rectangle 48"/>
           <p:cNvSpPr/>
           <p:nvPr/>
         </p:nvSpPr>
         <p:spPr>
           <a:xfrm>
-            <a:off x="1706880" y="4697730"/>
-            <a:ext cx="2316480" cy="68580"/>
+            <a:off x="8973312" y="2921508"/>
+            <a:ext cx="268224" cy="13716"/>
           </a:xfrm>
           <a:prstGeom prst="roundRect">
             <a:avLst>
@@ -34294,7 +34130,7 @@
             </a:avLst>
           </a:prstGeom>
           <a:solidFill>
-            <a:srgbClr val="EDEFF2"/>
+            <a:srgbClr val="D98A8F"/>
           </a:solidFill>
           <a:ln>
             <a:noFill/>
@@ -34325,14 +34161,55 @@
       </p:sp>
       <p:sp>
         <p:nvSpPr>
-          <p:cNvPr id="54" name="Rounded Rectangle 53"/>
+          <p:cNvPr id="50" name="TextBox 49"/>
+          <p:cNvSpPr txBox="1"/>
+          <p:nvPr/>
+        </p:nvSpPr>
+        <p:spPr>
+          <a:xfrm>
+            <a:off x="8948928" y="2955798"/>
+            <a:ext cx="390144" cy="82296"/>
+          </a:xfrm>
+          <a:prstGeom prst="rect">
+            <a:avLst/>
+          </a:prstGeom>
+          <a:noFill/>
+        </p:spPr>
+        <p:txBody>
+          <a:bodyPr wrap="square" lIns="0" rIns="0" tIns="0" bIns="0" anchor="t">
+            <a:spAutoFit/>
+          </a:bodyPr>
+          <a:lstStyle/>
+          <a:p>
+            <a:pPr algn="ctr">
+              <a:lnSpc>
+                <a:spcPct val="100000"/>
+              </a:lnSpc>
+            </a:pPr>
+            <a:r>
+              <a:rPr sz="700" b="0">
+                <a:solidFill>
+                  <a:srgbClr val="5B616B"/>
+                </a:solidFill>
+                <a:latin typeface="微软雅黑"/>
+                <a:ea typeface="微软雅黑"/>
+                <a:cs typeface="微软雅黑"/>
+              </a:rPr>
+              <a:t>5月</a:t>
+            </a:r>
+          </a:p>
+        </p:txBody>
+      </p:sp>
+      <p:sp>
+        <p:nvSpPr>
+          <p:cNvPr id="51" name="Rounded Rectangle 50"/>
           <p:cNvSpPr/>
           <p:nvPr/>
         </p:nvSpPr>
         <p:spPr>
           <a:xfrm>
-            <a:off x="1706880" y="4697730"/>
-            <a:ext cx="1397950" cy="68580"/>
+            <a:off x="9363456" y="2921508"/>
+            <a:ext cx="268224" cy="13716"/>
           </a:xfrm>
           <a:prstGeom prst="roundRect">
             <a:avLst>
@@ -34340,7 +34217,7 @@
             </a:avLst>
           </a:prstGeom>
           <a:solidFill>
-            <a:srgbClr val="C97A80"/>
+            <a:srgbClr val="D98A8F"/>
           </a:solidFill>
           <a:ln>
             <a:noFill/>
@@ -34371,14 +34248,14 @@
       </p:sp>
       <p:sp>
         <p:nvSpPr>
-          <p:cNvPr id="55" name="TextBox 54"/>
-          <p:cNvSpPr txBox="1"/>
-          <p:nvPr/>
-        </p:nvSpPr>
-        <p:spPr>
-          <a:xfrm>
-            <a:off x="4206240" y="4670298"/>
-            <a:ext cx="975360" cy="137160"/>
+          <p:cNvPr id="52" name="TextBox 51"/>
+          <p:cNvSpPr txBox="1"/>
+          <p:nvPr/>
+        </p:nvSpPr>
+        <p:spPr>
+          <a:xfrm>
+            <a:off x="9339072" y="2955798"/>
+            <a:ext cx="390144" cy="82296"/>
           </a:xfrm>
           <a:prstGeom prst="rect">
             <a:avLst/>
@@ -34391,54 +34268,13 @@
           </a:bodyPr>
           <a:lstStyle/>
           <a:p>
-            <a:pPr algn="l">
+            <a:pPr algn="ctr">
               <a:lnSpc>
                 <a:spcPct val="100000"/>
               </a:lnSpc>
             </a:pPr>
             <a:r>
-              <a:rPr sz="850" b="0">
-                <a:solidFill>
-                  <a:srgbClr val="1A1A1C"/>
-                </a:solidFill>
-                <a:latin typeface="微软雅黑"/>
-                <a:ea typeface="微软雅黑"/>
-                <a:cs typeface="微软雅黑"/>
-              </a:rPr>
-              <a:t>16,854</a:t>
-            </a:r>
-          </a:p>
-        </p:txBody>
-      </p:sp>
-      <p:sp>
-        <p:nvSpPr>
-          <p:cNvPr id="56" name="TextBox 55"/>
-          <p:cNvSpPr txBox="1"/>
-          <p:nvPr/>
-        </p:nvSpPr>
-        <p:spPr>
-          <a:xfrm>
-            <a:off x="426720" y="4848606"/>
-            <a:ext cx="1219200" cy="137160"/>
-          </a:xfrm>
-          <a:prstGeom prst="rect">
-            <a:avLst/>
-          </a:prstGeom>
-          <a:noFill/>
-        </p:spPr>
-        <p:txBody>
-          <a:bodyPr wrap="square" lIns="0" rIns="0" tIns="0" bIns="0" anchor="t">
-            <a:spAutoFit/>
-          </a:bodyPr>
-          <a:lstStyle/>
-          <a:p>
-            <a:pPr algn="l">
-              <a:lnSpc>
-                <a:spcPct val="100000"/>
-              </a:lnSpc>
-            </a:pPr>
-            <a:r>
-              <a:rPr sz="900" b="0">
+              <a:rPr sz="700" b="0">
                 <a:solidFill>
                   <a:srgbClr val="5B616B"/>
                 </a:solidFill>
@@ -34446,21 +34282,21 @@
                 <a:ea typeface="微软雅黑"/>
                 <a:cs typeface="微软雅黑"/>
               </a:rPr>
-              <a:t>媒体处理</a:t>
-            </a:r>
-          </a:p>
-        </p:txBody>
-      </p:sp>
-      <p:sp>
-        <p:nvSpPr>
-          <p:cNvPr id="57" name="Rounded Rectangle 56"/>
+              <a:t>6月</a:t>
+            </a:r>
+          </a:p>
+        </p:txBody>
+      </p:sp>
+      <p:sp>
+        <p:nvSpPr>
+          <p:cNvPr id="53" name="Rounded Rectangle 52"/>
           <p:cNvSpPr/>
           <p:nvPr/>
         </p:nvSpPr>
         <p:spPr>
           <a:xfrm>
-            <a:off x="1706880" y="4876038"/>
-            <a:ext cx="2316480" cy="68580"/>
+            <a:off x="9753600" y="2921508"/>
+            <a:ext cx="268224" cy="13716"/>
           </a:xfrm>
           <a:prstGeom prst="roundRect">
             <a:avLst>
@@ -34468,7 +34304,7 @@
             </a:avLst>
           </a:prstGeom>
           <a:solidFill>
-            <a:srgbClr val="EDEFF2"/>
+            <a:srgbClr val="D98A8F"/>
           </a:solidFill>
           <a:ln>
             <a:noFill/>
@@ -34499,14 +34335,55 @@
       </p:sp>
       <p:sp>
         <p:nvSpPr>
-          <p:cNvPr id="58" name="Rounded Rectangle 57"/>
+          <p:cNvPr id="54" name="TextBox 53"/>
+          <p:cNvSpPr txBox="1"/>
+          <p:nvPr/>
+        </p:nvSpPr>
+        <p:spPr>
+          <a:xfrm>
+            <a:off x="9729216" y="2955798"/>
+            <a:ext cx="390144" cy="82296"/>
+          </a:xfrm>
+          <a:prstGeom prst="rect">
+            <a:avLst/>
+          </a:prstGeom>
+          <a:noFill/>
+        </p:spPr>
+        <p:txBody>
+          <a:bodyPr wrap="square" lIns="0" rIns="0" tIns="0" bIns="0" anchor="t">
+            <a:spAutoFit/>
+          </a:bodyPr>
+          <a:lstStyle/>
+          <a:p>
+            <a:pPr algn="ctr">
+              <a:lnSpc>
+                <a:spcPct val="100000"/>
+              </a:lnSpc>
+            </a:pPr>
+            <a:r>
+              <a:rPr sz="700" b="0">
+                <a:solidFill>
+                  <a:srgbClr val="5B616B"/>
+                </a:solidFill>
+                <a:latin typeface="微软雅黑"/>
+                <a:ea typeface="微软雅黑"/>
+                <a:cs typeface="微软雅黑"/>
+              </a:rPr>
+              <a:t>7月</a:t>
+            </a:r>
+          </a:p>
+        </p:txBody>
+      </p:sp>
+      <p:sp>
+        <p:nvSpPr>
+          <p:cNvPr id="55" name="Rounded Rectangle 54"/>
           <p:cNvSpPr/>
           <p:nvPr/>
         </p:nvSpPr>
         <p:spPr>
           <a:xfrm>
-            <a:off x="1706880" y="4876038"/>
-            <a:ext cx="876642" cy="68580"/>
+            <a:off x="10143744" y="2917924"/>
+            <a:ext cx="268224" cy="17299"/>
           </a:xfrm>
           <a:prstGeom prst="roundRect">
             <a:avLst>
@@ -34514,7 +34391,7 @@
             </a:avLst>
           </a:prstGeom>
           <a:solidFill>
-            <a:srgbClr val="C97A80"/>
+            <a:srgbClr val="D98A8F"/>
           </a:solidFill>
           <a:ln>
             <a:noFill/>
@@ -34545,14 +34422,14 @@
       </p:sp>
       <p:sp>
         <p:nvSpPr>
-          <p:cNvPr id="59" name="TextBox 58"/>
-          <p:cNvSpPr txBox="1"/>
-          <p:nvPr/>
-        </p:nvSpPr>
-        <p:spPr>
-          <a:xfrm>
-            <a:off x="4206240" y="4848606"/>
-            <a:ext cx="975360" cy="137160"/>
+          <p:cNvPr id="56" name="TextBox 55"/>
+          <p:cNvSpPr txBox="1"/>
+          <p:nvPr/>
+        </p:nvSpPr>
+        <p:spPr>
+          <a:xfrm>
+            <a:off x="10119360" y="2955798"/>
+            <a:ext cx="390144" cy="82296"/>
           </a:xfrm>
           <a:prstGeom prst="rect">
             <a:avLst/>
@@ -34565,35 +34442,35 @@
           </a:bodyPr>
           <a:lstStyle/>
           <a:p>
-            <a:pPr algn="l">
+            <a:pPr algn="ctr">
               <a:lnSpc>
                 <a:spcPct val="100000"/>
               </a:lnSpc>
             </a:pPr>
             <a:r>
-              <a:rPr sz="850" b="0">
-                <a:solidFill>
-                  <a:srgbClr val="1A1A1C"/>
-                </a:solidFill>
-                <a:latin typeface="微软雅黑"/>
-                <a:ea typeface="微软雅黑"/>
-                <a:cs typeface="微软雅黑"/>
-              </a:rPr>
-              <a:t>10,569</a:t>
-            </a:r>
-          </a:p>
-        </p:txBody>
-      </p:sp>
-      <p:sp>
-        <p:nvSpPr>
-          <p:cNvPr id="60" name="TextBox 59"/>
-          <p:cNvSpPr txBox="1"/>
-          <p:nvPr/>
-        </p:nvSpPr>
-        <p:spPr>
-          <a:xfrm>
-            <a:off x="426720" y="5026914"/>
-            <a:ext cx="1219200" cy="137160"/>
+              <a:rPr sz="700" b="0">
+                <a:solidFill>
+                  <a:srgbClr val="5B616B"/>
+                </a:solidFill>
+                <a:latin typeface="微软雅黑"/>
+                <a:ea typeface="微软雅黑"/>
+                <a:cs typeface="微软雅黑"/>
+              </a:rPr>
+              <a:t>8月</a:t>
+            </a:r>
+          </a:p>
+        </p:txBody>
+      </p:sp>
+      <p:sp>
+        <p:nvSpPr>
+          <p:cNvPr id="57" name="TextBox 56"/>
+          <p:cNvSpPr txBox="1"/>
+          <p:nvPr/>
+        </p:nvSpPr>
+        <p:spPr>
+          <a:xfrm>
+            <a:off x="10021824" y="2821912"/>
+            <a:ext cx="585216" cy="82296"/>
           </a:xfrm>
           <a:prstGeom prst="rect">
             <a:avLst/>
@@ -34606,13 +34483,13 @@
           </a:bodyPr>
           <a:lstStyle/>
           <a:p>
-            <a:pPr algn="l">
+            <a:pPr algn="ctr">
               <a:lnSpc>
                 <a:spcPct val="100000"/>
               </a:lnSpc>
             </a:pPr>
             <a:r>
-              <a:rPr sz="900" b="0">
+              <a:rPr sz="700" b="1">
                 <a:solidFill>
                   <a:srgbClr val="5B616B"/>
                 </a:solidFill>
@@ -34620,21 +34497,21 @@
                 <a:ea typeface="微软雅黑"/>
                 <a:cs typeface="微软雅黑"/>
               </a:rPr>
-              <a:t>前端开发</a:t>
-            </a:r>
-          </a:p>
-        </p:txBody>
-      </p:sp>
-      <p:sp>
-        <p:nvSpPr>
-          <p:cNvPr id="61" name="Rounded Rectangle 60"/>
+              <a:t>3,479</a:t>
+            </a:r>
+          </a:p>
+        </p:txBody>
+      </p:sp>
+      <p:sp>
+        <p:nvSpPr>
+          <p:cNvPr id="58" name="Rounded Rectangle 57"/>
           <p:cNvSpPr/>
           <p:nvPr/>
         </p:nvSpPr>
         <p:spPr>
           <a:xfrm>
-            <a:off x="1706880" y="5054346"/>
-            <a:ext cx="2316480" cy="68580"/>
+            <a:off x="10533888" y="2919222"/>
+            <a:ext cx="268224" cy="16001"/>
           </a:xfrm>
           <a:prstGeom prst="roundRect">
             <a:avLst>
@@ -34642,7 +34519,7 @@
             </a:avLst>
           </a:prstGeom>
           <a:solidFill>
-            <a:srgbClr val="EDEFF2"/>
+            <a:srgbClr val="D98A8F"/>
           </a:solidFill>
           <a:ln>
             <a:noFill/>
@@ -34673,14 +34550,96 @@
       </p:sp>
       <p:sp>
         <p:nvSpPr>
-          <p:cNvPr id="62" name="Rounded Rectangle 61"/>
+          <p:cNvPr id="59" name="TextBox 58"/>
+          <p:cNvSpPr txBox="1"/>
+          <p:nvPr/>
+        </p:nvSpPr>
+        <p:spPr>
+          <a:xfrm>
+            <a:off x="10509504" y="2955798"/>
+            <a:ext cx="390144" cy="82296"/>
+          </a:xfrm>
+          <a:prstGeom prst="rect">
+            <a:avLst/>
+          </a:prstGeom>
+          <a:noFill/>
+        </p:spPr>
+        <p:txBody>
+          <a:bodyPr wrap="square" lIns="0" rIns="0" tIns="0" bIns="0" anchor="t">
+            <a:spAutoFit/>
+          </a:bodyPr>
+          <a:lstStyle/>
+          <a:p>
+            <a:pPr algn="ctr">
+              <a:lnSpc>
+                <a:spcPct val="100000"/>
+              </a:lnSpc>
+            </a:pPr>
+            <a:r>
+              <a:rPr sz="700" b="0">
+                <a:solidFill>
+                  <a:srgbClr val="5B616B"/>
+                </a:solidFill>
+                <a:latin typeface="微软雅黑"/>
+                <a:ea typeface="微软雅黑"/>
+                <a:cs typeface="微软雅黑"/>
+              </a:rPr>
+              <a:t>9月</a:t>
+            </a:r>
+          </a:p>
+        </p:txBody>
+      </p:sp>
+      <p:sp>
+        <p:nvSpPr>
+          <p:cNvPr id="60" name="TextBox 59"/>
+          <p:cNvSpPr txBox="1"/>
+          <p:nvPr/>
+        </p:nvSpPr>
+        <p:spPr>
+          <a:xfrm>
+            <a:off x="10411968" y="2823210"/>
+            <a:ext cx="585216" cy="82296"/>
+          </a:xfrm>
+          <a:prstGeom prst="rect">
+            <a:avLst/>
+          </a:prstGeom>
+          <a:noFill/>
+        </p:spPr>
+        <p:txBody>
+          <a:bodyPr wrap="square" lIns="0" rIns="0" tIns="0" bIns="0" anchor="t">
+            <a:spAutoFit/>
+          </a:bodyPr>
+          <a:lstStyle/>
+          <a:p>
+            <a:pPr algn="ctr">
+              <a:lnSpc>
+                <a:spcPct val="100000"/>
+              </a:lnSpc>
+            </a:pPr>
+            <a:r>
+              <a:rPr sz="700" b="1">
+                <a:solidFill>
+                  <a:srgbClr val="5B616B"/>
+                </a:solidFill>
+                <a:latin typeface="微软雅黑"/>
+                <a:ea typeface="微软雅黑"/>
+                <a:cs typeface="微软雅黑"/>
+              </a:rPr>
+              <a:t>3,218</a:t>
+            </a:r>
+          </a:p>
+        </p:txBody>
+      </p:sp>
+      <p:sp>
+        <p:nvSpPr>
+          <p:cNvPr id="61" name="Rounded Rectangle 60"/>
           <p:cNvSpPr/>
           <p:nvPr/>
         </p:nvSpPr>
         <p:spPr>
           <a:xfrm>
-            <a:off x="1706880" y="5054346"/>
-            <a:ext cx="554568" cy="68580"/>
+            <a:off x="10924032" y="2921508"/>
+            <a:ext cx="268224" cy="13716"/>
           </a:xfrm>
           <a:prstGeom prst="roundRect">
             <a:avLst>
@@ -34688,7 +34647,7 @@
             </a:avLst>
           </a:prstGeom>
           <a:solidFill>
-            <a:srgbClr val="C97A80"/>
+            <a:srgbClr val="D98A8F"/>
           </a:solidFill>
           <a:ln>
             <a:noFill/>
@@ -34719,14 +34678,55 @@
       </p:sp>
       <p:sp>
         <p:nvSpPr>
+          <p:cNvPr id="62" name="TextBox 61"/>
+          <p:cNvSpPr txBox="1"/>
+          <p:nvPr/>
+        </p:nvSpPr>
+        <p:spPr>
+          <a:xfrm>
+            <a:off x="10899648" y="2955798"/>
+            <a:ext cx="390144" cy="82296"/>
+          </a:xfrm>
+          <a:prstGeom prst="rect">
+            <a:avLst/>
+          </a:prstGeom>
+          <a:noFill/>
+        </p:spPr>
+        <p:txBody>
+          <a:bodyPr wrap="square" lIns="0" rIns="0" tIns="0" bIns="0" anchor="t">
+            <a:spAutoFit/>
+          </a:bodyPr>
+          <a:lstStyle/>
+          <a:p>
+            <a:pPr algn="ctr">
+              <a:lnSpc>
+                <a:spcPct val="100000"/>
+              </a:lnSpc>
+            </a:pPr>
+            <a:r>
+              <a:rPr sz="700" b="0">
+                <a:solidFill>
+                  <a:srgbClr val="5B616B"/>
+                </a:solidFill>
+                <a:latin typeface="微软雅黑"/>
+                <a:ea typeface="微软雅黑"/>
+                <a:cs typeface="微软雅黑"/>
+              </a:rPr>
+              <a:t>10月</a:t>
+            </a:r>
+          </a:p>
+        </p:txBody>
+      </p:sp>
+      <p:sp>
+        <p:nvSpPr>
           <p:cNvPr id="63" name="TextBox 62"/>
           <p:cNvSpPr txBox="1"/>
           <p:nvPr/>
         </p:nvSpPr>
         <p:spPr>
           <a:xfrm>
-            <a:off x="4206240" y="5026914"/>
-            <a:ext cx="975360" cy="137160"/>
+            <a:off x="6339840" y="3038094"/>
+            <a:ext cx="5425440" cy="164592"/>
           </a:xfrm>
           <a:prstGeom prst="rect">
             <a:avLst/>
@@ -34745,15 +34745,15 @@
               </a:lnSpc>
             </a:pPr>
             <a:r>
-              <a:rPr sz="850" b="0">
-                <a:solidFill>
-                  <a:srgbClr val="1A1A1C"/>
-                </a:solidFill>
-                <a:latin typeface="微软雅黑"/>
-                <a:ea typeface="微软雅黑"/>
-                <a:cs typeface="微软雅黑"/>
-              </a:rPr>
-              <a:t>6,686</a:t>
+              <a:rPr sz="760" b="0">
+                <a:solidFill>
+                  <a:srgbClr val="8B8E94"/>
+                </a:solidFill>
+                <a:latin typeface="微软雅黑"/>
+                <a:ea typeface="微软雅黑"/>
+                <a:cs typeface="微软雅黑"/>
+              </a:rPr>
+              <a:t>3 月 73,098 条；前两账号占 45.7%；前 3 月 97.3%。批量导入，不是自然上架。</a:t>
             </a:r>
           </a:p>
         </p:txBody>
@@ -34766,8 +34766,8 @@
         </p:nvSpPr>
         <p:spPr>
           <a:xfrm>
-            <a:off x="426720" y="5205222"/>
-            <a:ext cx="1219200" cy="137160"/>
+            <a:off x="426720" y="3257550"/>
+            <a:ext cx="7315200" cy="150876"/>
           </a:xfrm>
           <a:prstGeom prst="rect">
             <a:avLst/>
@@ -34786,29 +34786,70 @@
               </a:lnSpc>
             </a:pPr>
             <a:r>
-              <a:rPr sz="900" b="0">
-                <a:solidFill>
-                  <a:srgbClr val="5B616B"/>
-                </a:solidFill>
-                <a:latin typeface="微软雅黑"/>
-                <a:ea typeface="微软雅黑"/>
-                <a:cs typeface="微软雅黑"/>
-              </a:rPr>
-              <a:t>云效工具</a:t>
-            </a:r>
-          </a:p>
-        </p:txBody>
-      </p:sp>
-      <p:sp>
-        <p:nvSpPr>
-          <p:cNvPr id="65" name="Rounded Rectangle 64"/>
+              <a:rPr sz="1050" b="1">
+                <a:solidFill>
+                  <a:srgbClr val="1A1A1C"/>
+                </a:solidFill>
+                <a:latin typeface="微软雅黑"/>
+                <a:ea typeface="微软雅黑"/>
+                <a:cs typeface="微软雅黑"/>
+              </a:rPr>
+              <a:t>类目：Top3 占 66.2%，Top5 占 80.9%</a:t>
+            </a:r>
+          </a:p>
+        </p:txBody>
+      </p:sp>
+      <p:sp>
+        <p:nvSpPr>
+          <p:cNvPr id="65" name="TextBox 64"/>
+          <p:cNvSpPr txBox="1"/>
+          <p:nvPr/>
+        </p:nvSpPr>
+        <p:spPr>
+          <a:xfrm>
+            <a:off x="426720" y="3429000"/>
+            <a:ext cx="8534400" cy="102870"/>
+          </a:xfrm>
+          <a:prstGeom prst="rect">
+            <a:avLst/>
+          </a:prstGeom>
+          <a:noFill/>
+        </p:spPr>
+        <p:txBody>
+          <a:bodyPr wrap="square" lIns="0" rIns="0" tIns="0" bIns="0" anchor="t">
+            <a:spAutoFit/>
+          </a:bodyPr>
+          <a:lstStyle/>
+          <a:p>
+            <a:pPr algn="l">
+              <a:lnSpc>
+                <a:spcPct val="100000"/>
+              </a:lnSpc>
+            </a:pPr>
+            <a:r>
+              <a:rPr sz="780" b="0">
+                <a:solidFill>
+                  <a:srgbClr val="8B8E94"/>
+                </a:solidFill>
+                <a:latin typeface="微软雅黑"/>
+                <a:ea typeface="微软雅黑"/>
+                <a:cs typeface="微软雅黑"/>
+              </a:rPr>
+              <a:t>10 个一级类目；35 个二级类目里 24 个是 0 条</a:t>
+            </a:r>
+          </a:p>
+        </p:txBody>
+      </p:sp>
+      <p:sp>
+        <p:nvSpPr>
+          <p:cNvPr id="66" name="Rounded Rectangle 65"/>
           <p:cNvSpPr/>
           <p:nvPr/>
         </p:nvSpPr>
         <p:spPr>
           <a:xfrm>
-            <a:off x="1706880" y="5232654"/>
-            <a:ext cx="2316480" cy="68580"/>
+            <a:off x="426720" y="3566160"/>
+            <a:ext cx="3666968" cy="123443"/>
           </a:xfrm>
           <a:prstGeom prst="roundRect">
             <a:avLst>
@@ -34816,7 +34857,7 @@
             </a:avLst>
           </a:prstGeom>
           <a:solidFill>
-            <a:srgbClr val="EDEFF2"/>
+            <a:srgbClr val="B5333B"/>
           </a:solidFill>
           <a:ln>
             <a:noFill/>
@@ -34847,14 +34888,14 @@
       </p:sp>
       <p:sp>
         <p:nvSpPr>
-          <p:cNvPr id="66" name="Rounded Rectangle 65"/>
+          <p:cNvPr id="67" name="Rounded Rectangle 66"/>
           <p:cNvSpPr/>
           <p:nvPr/>
         </p:nvSpPr>
         <p:spPr>
           <a:xfrm>
-            <a:off x="1706880" y="5232654"/>
-            <a:ext cx="459845" cy="68580"/>
+            <a:off x="4093688" y="3566160"/>
+            <a:ext cx="2213024" cy="123443"/>
           </a:xfrm>
           <a:prstGeom prst="roundRect">
             <a:avLst>
@@ -34862,7 +34903,7 @@
             </a:avLst>
           </a:prstGeom>
           <a:solidFill>
-            <a:srgbClr val="C97A80"/>
+            <a:srgbClr val="B5333B"/>
           </a:solidFill>
           <a:ln>
             <a:noFill/>
@@ -34893,178 +34934,14 @@
       </p:sp>
       <p:sp>
         <p:nvSpPr>
-          <p:cNvPr id="67" name="TextBox 66"/>
-          <p:cNvSpPr txBox="1"/>
-          <p:nvPr/>
-        </p:nvSpPr>
-        <p:spPr>
-          <a:xfrm>
-            <a:off x="4206240" y="5205222"/>
-            <a:ext cx="975360" cy="137160"/>
-          </a:xfrm>
-          <a:prstGeom prst="rect">
-            <a:avLst/>
-          </a:prstGeom>
-          <a:noFill/>
-        </p:spPr>
-        <p:txBody>
-          <a:bodyPr wrap="square" lIns="0" rIns="0" tIns="0" bIns="0" anchor="t">
-            <a:spAutoFit/>
-          </a:bodyPr>
-          <a:lstStyle/>
-          <a:p>
-            <a:pPr algn="l">
-              <a:lnSpc>
-                <a:spcPct val="100000"/>
-              </a:lnSpc>
-            </a:pPr>
-            <a:r>
-              <a:rPr sz="850" b="0">
-                <a:solidFill>
-                  <a:srgbClr val="1A1A1C"/>
-                </a:solidFill>
-                <a:latin typeface="微软雅黑"/>
-                <a:ea typeface="微软雅黑"/>
-                <a:cs typeface="微软雅黑"/>
-              </a:rPr>
-              <a:t>5,544</a:t>
-            </a:r>
-          </a:p>
-        </p:txBody>
-      </p:sp>
-      <p:sp>
-        <p:nvSpPr>
-          <p:cNvPr id="68" name="TextBox 67"/>
-          <p:cNvSpPr txBox="1"/>
-          <p:nvPr/>
-        </p:nvSpPr>
-        <p:spPr>
-          <a:xfrm>
-            <a:off x="426720" y="5417820"/>
-            <a:ext cx="5608320" cy="137160"/>
-          </a:xfrm>
-          <a:prstGeom prst="rect">
-            <a:avLst/>
-          </a:prstGeom>
-          <a:noFill/>
-        </p:spPr>
-        <p:txBody>
-          <a:bodyPr wrap="square" lIns="0" rIns="0" tIns="0" bIns="0" anchor="t">
-            <a:spAutoFit/>
-          </a:bodyPr>
-          <a:lstStyle/>
-          <a:p>
-            <a:pPr algn="l">
-              <a:lnSpc>
-                <a:spcPct val="100000"/>
-              </a:lnSpc>
-            </a:pPr>
-            <a:r>
-              <a:rPr sz="850" b="0">
-                <a:solidFill>
-                  <a:srgbClr val="8B8E94"/>
-                </a:solidFill>
-                <a:latin typeface="微软雅黑"/>
-                <a:ea typeface="微软雅黑"/>
-                <a:cs typeface="微软雅黑"/>
-              </a:rPr>
-              <a:t>开发工具 + 代码质检 + 媒体处理 = 55,351 条</a:t>
-            </a:r>
-          </a:p>
-        </p:txBody>
-      </p:sp>
-      <p:sp>
-        <p:nvSpPr>
-          <p:cNvPr id="69" name="TextBox 68"/>
-          <p:cNvSpPr txBox="1"/>
-          <p:nvPr/>
-        </p:nvSpPr>
-        <p:spPr>
-          <a:xfrm>
-            <a:off x="6339840" y="4149090"/>
-            <a:ext cx="5608320" cy="178308"/>
-          </a:xfrm>
-          <a:prstGeom prst="rect">
-            <a:avLst/>
-          </a:prstGeom>
-          <a:noFill/>
-        </p:spPr>
-        <p:txBody>
-          <a:bodyPr wrap="square" lIns="0" rIns="0" tIns="0" bIns="0" anchor="t">
-            <a:spAutoFit/>
-          </a:bodyPr>
-          <a:lstStyle/>
-          <a:p>
-            <a:pPr algn="l">
-              <a:lnSpc>
-                <a:spcPct val="100000"/>
-              </a:lnSpc>
-            </a:pPr>
-            <a:r>
-              <a:rPr sz="1100" b="1">
-                <a:solidFill>
-                  <a:srgbClr val="1A1A1C"/>
-                </a:solidFill>
-                <a:latin typeface="微软雅黑"/>
-                <a:ea typeface="微软雅黑"/>
-                <a:cs typeface="微软雅黑"/>
-              </a:rPr>
-              <a:t>谁被下载：品牌 &gt; 官方 &gt; 长尾 &gt; 镜像</a:t>
-            </a:r>
-          </a:p>
-        </p:txBody>
-      </p:sp>
-      <p:sp>
-        <p:nvSpPr>
-          <p:cNvPr id="70" name="TextBox 69"/>
-          <p:cNvSpPr txBox="1"/>
-          <p:nvPr/>
-        </p:nvSpPr>
-        <p:spPr>
-          <a:xfrm>
-            <a:off x="6339840" y="4423410"/>
-            <a:ext cx="1219200" cy="137160"/>
-          </a:xfrm>
-          <a:prstGeom prst="rect">
-            <a:avLst/>
-          </a:prstGeom>
-          <a:noFill/>
-        </p:spPr>
-        <p:txBody>
-          <a:bodyPr wrap="square" lIns="0" rIns="0" tIns="0" bIns="0" anchor="t">
-            <a:spAutoFit/>
-          </a:bodyPr>
-          <a:lstStyle/>
-          <a:p>
-            <a:pPr algn="l">
-              <a:lnSpc>
-                <a:spcPct val="100000"/>
-              </a:lnSpc>
-            </a:pPr>
-            <a:r>
-              <a:rPr sz="900" b="0">
-                <a:solidFill>
-                  <a:srgbClr val="5B616B"/>
-                </a:solidFill>
-                <a:latin typeface="微软雅黑"/>
-                <a:ea typeface="微软雅黑"/>
-                <a:cs typeface="微软雅黑"/>
-              </a:rPr>
-              <a:t>品牌 / 垂直</a:t>
-            </a:r>
-          </a:p>
-        </p:txBody>
-      </p:sp>
-      <p:sp>
-        <p:nvSpPr>
-          <p:cNvPr id="71" name="Rounded Rectangle 70"/>
+          <p:cNvPr id="68" name="Rounded Rectangle 67"/>
           <p:cNvSpPr/>
           <p:nvPr/>
         </p:nvSpPr>
         <p:spPr>
           <a:xfrm>
-            <a:off x="7802880" y="4450842"/>
-            <a:ext cx="1828800" cy="75438"/>
+            <a:off x="6306712" y="3566160"/>
+            <a:ext cx="1388147" cy="123443"/>
           </a:xfrm>
           <a:prstGeom prst="roundRect">
             <a:avLst>
@@ -35072,7 +34949,7 @@
             </a:avLst>
           </a:prstGeom>
           <a:solidFill>
-            <a:srgbClr val="EDEFF2"/>
+            <a:srgbClr val="B5333B"/>
           </a:solidFill>
           <a:ln>
             <a:noFill/>
@@ -35103,14 +34980,14 @@
       </p:sp>
       <p:sp>
         <p:nvSpPr>
-          <p:cNvPr id="72" name="Rounded Rectangle 71"/>
+          <p:cNvPr id="69" name="Rounded Rectangle 68"/>
           <p:cNvSpPr/>
           <p:nvPr/>
         </p:nvSpPr>
         <p:spPr>
           <a:xfrm>
-            <a:off x="7802880" y="4450842"/>
-            <a:ext cx="1828800" cy="75438"/>
+            <a:off x="7694860" y="3566160"/>
+            <a:ext cx="878328" cy="123443"/>
           </a:xfrm>
           <a:prstGeom prst="roundRect">
             <a:avLst>
@@ -35118,7 +34995,7 @@
             </a:avLst>
           </a:prstGeom>
           <a:solidFill>
-            <a:srgbClr val="B5333B"/>
+            <a:srgbClr val="D98A8F"/>
           </a:solidFill>
           <a:ln>
             <a:noFill/>
@@ -35149,96 +35026,14 @@
       </p:sp>
       <p:sp>
         <p:nvSpPr>
-          <p:cNvPr id="73" name="TextBox 72"/>
-          <p:cNvSpPr txBox="1"/>
-          <p:nvPr/>
-        </p:nvSpPr>
-        <p:spPr>
-          <a:xfrm>
-            <a:off x="9814560" y="4423410"/>
-            <a:ext cx="731520" cy="137160"/>
-          </a:xfrm>
-          <a:prstGeom prst="rect">
-            <a:avLst/>
-          </a:prstGeom>
-          <a:noFill/>
-        </p:spPr>
-        <p:txBody>
-          <a:bodyPr wrap="square" lIns="0" rIns="0" tIns="0" bIns="0" anchor="t">
-            <a:spAutoFit/>
-          </a:bodyPr>
-          <a:lstStyle/>
-          <a:p>
-            <a:pPr algn="l">
-              <a:lnSpc>
-                <a:spcPct val="100000"/>
-              </a:lnSpc>
-            </a:pPr>
-            <a:r>
-              <a:rPr sz="850" b="0">
-                <a:solidFill>
-                  <a:srgbClr val="1A1A1C"/>
-                </a:solidFill>
-                <a:latin typeface="微软雅黑"/>
-                <a:ea typeface="微软雅黑"/>
-                <a:cs typeface="微软雅黑"/>
-              </a:rPr>
-              <a:t>516</a:t>
-            </a:r>
-          </a:p>
-        </p:txBody>
-      </p:sp>
-      <p:sp>
-        <p:nvSpPr>
-          <p:cNvPr id="74" name="TextBox 73"/>
-          <p:cNvSpPr txBox="1"/>
-          <p:nvPr/>
-        </p:nvSpPr>
-        <p:spPr>
-          <a:xfrm>
-            <a:off x="6339840" y="4642866"/>
-            <a:ext cx="1219200" cy="137160"/>
-          </a:xfrm>
-          <a:prstGeom prst="rect">
-            <a:avLst/>
-          </a:prstGeom>
-          <a:noFill/>
-        </p:spPr>
-        <p:txBody>
-          <a:bodyPr wrap="square" lIns="0" rIns="0" tIns="0" bIns="0" anchor="t">
-            <a:spAutoFit/>
-          </a:bodyPr>
-          <a:lstStyle/>
-          <a:p>
-            <a:pPr algn="l">
-              <a:lnSpc>
-                <a:spcPct val="100000"/>
-              </a:lnSpc>
-            </a:pPr>
-            <a:r>
-              <a:rPr sz="900" b="0">
-                <a:solidFill>
-                  <a:srgbClr val="5B616B"/>
-                </a:solidFill>
-                <a:latin typeface="微软雅黑"/>
-                <a:ea typeface="微软雅黑"/>
-                <a:cs typeface="微软雅黑"/>
-              </a:rPr>
-              <a:t>平台官方</a:t>
-            </a:r>
-          </a:p>
-        </p:txBody>
-      </p:sp>
-      <p:sp>
-        <p:nvSpPr>
-          <p:cNvPr id="75" name="Rounded Rectangle 74"/>
+          <p:cNvPr id="70" name="Rounded Rectangle 69"/>
           <p:cNvSpPr/>
           <p:nvPr/>
         </p:nvSpPr>
         <p:spPr>
           <a:xfrm>
-            <a:off x="7802880" y="4670298"/>
-            <a:ext cx="1828800" cy="75438"/>
+            <a:off x="8573188" y="3566160"/>
+            <a:ext cx="728481" cy="123443"/>
           </a:xfrm>
           <a:prstGeom prst="roundRect">
             <a:avLst>
@@ -35246,7 +35041,7 @@
             </a:avLst>
           </a:prstGeom>
           <a:solidFill>
-            <a:srgbClr val="EDEFF2"/>
+            <a:srgbClr val="D98A8F"/>
           </a:solidFill>
           <a:ln>
             <a:noFill/>
@@ -35277,14 +35072,14 @@
       </p:sp>
       <p:sp>
         <p:nvSpPr>
-          <p:cNvPr id="76" name="Rounded Rectangle 75"/>
+          <p:cNvPr id="71" name="Rounded Rectangle 70"/>
           <p:cNvSpPr/>
           <p:nvPr/>
         </p:nvSpPr>
         <p:spPr>
           <a:xfrm>
-            <a:off x="7802880" y="4670298"/>
-            <a:ext cx="1325525" cy="75438"/>
+            <a:off x="9301670" y="3566160"/>
+            <a:ext cx="2097849" cy="123443"/>
           </a:xfrm>
           <a:prstGeom prst="roundRect">
             <a:avLst>
@@ -35292,7 +35087,7 @@
             </a:avLst>
           </a:prstGeom>
           <a:solidFill>
-            <a:srgbClr val="9AA1AA"/>
+            <a:srgbClr val="EDEFF2"/>
           </a:solidFill>
           <a:ln>
             <a:noFill/>
@@ -35323,14 +35118,14 @@
       </p:sp>
       <p:sp>
         <p:nvSpPr>
-          <p:cNvPr id="77" name="TextBox 76"/>
-          <p:cNvSpPr txBox="1"/>
-          <p:nvPr/>
-        </p:nvSpPr>
-        <p:spPr>
-          <a:xfrm>
-            <a:off x="9814560" y="4642866"/>
-            <a:ext cx="731520" cy="137160"/>
+          <p:cNvPr id="72" name="TextBox 71"/>
+          <p:cNvSpPr txBox="1"/>
+          <p:nvPr/>
+        </p:nvSpPr>
+        <p:spPr>
+          <a:xfrm>
+            <a:off x="426720" y="3703320"/>
+            <a:ext cx="2072640" cy="89154"/>
           </a:xfrm>
           <a:prstGeom prst="rect">
             <a:avLst/>
@@ -35349,29 +35144,29 @@
               </a:lnSpc>
             </a:pPr>
             <a:r>
-              <a:rPr sz="850" b="0">
-                <a:solidFill>
-                  <a:srgbClr val="1A1A1C"/>
-                </a:solidFill>
-                <a:latin typeface="微软雅黑"/>
-                <a:ea typeface="微软雅黑"/>
-                <a:cs typeface="微软雅黑"/>
-              </a:rPr>
-              <a:t>374</a:t>
-            </a:r>
-          </a:p>
-        </p:txBody>
-      </p:sp>
-      <p:sp>
-        <p:nvSpPr>
-          <p:cNvPr id="78" name="TextBox 77"/>
-          <p:cNvSpPr txBox="1"/>
-          <p:nvPr/>
-        </p:nvSpPr>
-        <p:spPr>
-          <a:xfrm>
-            <a:off x="6339840" y="4862322"/>
-            <a:ext cx="1219200" cy="137160"/>
+              <a:rPr sz="780" b="0">
+                <a:solidFill>
+                  <a:srgbClr val="5B616B"/>
+                </a:solidFill>
+                <a:latin typeface="微软雅黑"/>
+                <a:ea typeface="微软雅黑"/>
+                <a:cs typeface="微软雅黑"/>
+              </a:rPr>
+              <a:t>开发工具 27,922</a:t>
+            </a:r>
+          </a:p>
+        </p:txBody>
+      </p:sp>
+      <p:sp>
+        <p:nvSpPr>
+          <p:cNvPr id="73" name="TextBox 72"/>
+          <p:cNvSpPr txBox="1"/>
+          <p:nvPr/>
+        </p:nvSpPr>
+        <p:spPr>
+          <a:xfrm>
+            <a:off x="2682240" y="3703320"/>
+            <a:ext cx="2072640" cy="89154"/>
           </a:xfrm>
           <a:prstGeom prst="rect">
             <a:avLst/>
@@ -35390,7 +35185,7 @@
               </a:lnSpc>
             </a:pPr>
             <a:r>
-              <a:rPr sz="900" b="0">
+              <a:rPr sz="780" b="0">
                 <a:solidFill>
                   <a:srgbClr val="5B616B"/>
                 </a:solidFill>
@@ -35398,29 +35193,314 @@
                 <a:ea typeface="微软雅黑"/>
                 <a:cs typeface="微软雅黑"/>
               </a:rPr>
-              <a:t>社区长尾</a:t>
-            </a:r>
-          </a:p>
-        </p:txBody>
-      </p:sp>
-      <p:sp>
-        <p:nvSpPr>
-          <p:cNvPr id="79" name="Rounded Rectangle 78"/>
+              <a:t>代码质检 16,851</a:t>
+            </a:r>
+          </a:p>
+        </p:txBody>
+      </p:sp>
+      <p:sp>
+        <p:nvSpPr>
+          <p:cNvPr id="74" name="TextBox 73"/>
+          <p:cNvSpPr txBox="1"/>
+          <p:nvPr/>
+        </p:nvSpPr>
+        <p:spPr>
+          <a:xfrm>
+            <a:off x="4937760" y="3703320"/>
+            <a:ext cx="2072640" cy="89154"/>
+          </a:xfrm>
+          <a:prstGeom prst="rect">
+            <a:avLst/>
+          </a:prstGeom>
+          <a:noFill/>
+        </p:spPr>
+        <p:txBody>
+          <a:bodyPr wrap="square" lIns="0" rIns="0" tIns="0" bIns="0" anchor="t">
+            <a:spAutoFit/>
+          </a:bodyPr>
+          <a:lstStyle/>
+          <a:p>
+            <a:pPr algn="l">
+              <a:lnSpc>
+                <a:spcPct val="100000"/>
+              </a:lnSpc>
+            </a:pPr>
+            <a:r>
+              <a:rPr sz="780" b="0">
+                <a:solidFill>
+                  <a:srgbClr val="5B616B"/>
+                </a:solidFill>
+                <a:latin typeface="微软雅黑"/>
+                <a:ea typeface="微软雅黑"/>
+                <a:cs typeface="微软雅黑"/>
+              </a:rPr>
+              <a:t>媒体处理 10,570</a:t>
+            </a:r>
+          </a:p>
+        </p:txBody>
+      </p:sp>
+      <p:sp>
+        <p:nvSpPr>
+          <p:cNvPr id="75" name="TextBox 74"/>
+          <p:cNvSpPr txBox="1"/>
+          <p:nvPr/>
+        </p:nvSpPr>
+        <p:spPr>
+          <a:xfrm>
+            <a:off x="7193280" y="3703320"/>
+            <a:ext cx="2072640" cy="89154"/>
+          </a:xfrm>
+          <a:prstGeom prst="rect">
+            <a:avLst/>
+          </a:prstGeom>
+          <a:noFill/>
+        </p:spPr>
+        <p:txBody>
+          <a:bodyPr wrap="square" lIns="0" rIns="0" tIns="0" bIns="0" anchor="t">
+            <a:spAutoFit/>
+          </a:bodyPr>
+          <a:lstStyle/>
+          <a:p>
+            <a:pPr algn="l">
+              <a:lnSpc>
+                <a:spcPct val="100000"/>
+              </a:lnSpc>
+            </a:pPr>
+            <a:r>
+              <a:rPr sz="780" b="0">
+                <a:solidFill>
+                  <a:srgbClr val="5B616B"/>
+                </a:solidFill>
+                <a:latin typeface="微软雅黑"/>
+                <a:ea typeface="微软雅黑"/>
+                <a:cs typeface="微软雅黑"/>
+              </a:rPr>
+              <a:t>前端开发 6,688</a:t>
+            </a:r>
+          </a:p>
+        </p:txBody>
+      </p:sp>
+      <p:sp>
+        <p:nvSpPr>
+          <p:cNvPr id="76" name="TextBox 75"/>
+          <p:cNvSpPr txBox="1"/>
+          <p:nvPr/>
+        </p:nvSpPr>
+        <p:spPr>
+          <a:xfrm>
+            <a:off x="9448800" y="3703320"/>
+            <a:ext cx="2072640" cy="89154"/>
+          </a:xfrm>
+          <a:prstGeom prst="rect">
+            <a:avLst/>
+          </a:prstGeom>
+          <a:noFill/>
+        </p:spPr>
+        <p:txBody>
+          <a:bodyPr wrap="square" lIns="0" rIns="0" tIns="0" bIns="0" anchor="t">
+            <a:spAutoFit/>
+          </a:bodyPr>
+          <a:lstStyle/>
+          <a:p>
+            <a:pPr algn="l">
+              <a:lnSpc>
+                <a:spcPct val="100000"/>
+              </a:lnSpc>
+            </a:pPr>
+            <a:r>
+              <a:rPr sz="780" b="0">
+                <a:solidFill>
+                  <a:srgbClr val="5B616B"/>
+                </a:solidFill>
+                <a:latin typeface="微软雅黑"/>
+                <a:ea typeface="微软雅黑"/>
+                <a:cs typeface="微软雅黑"/>
+              </a:rPr>
+              <a:t>云效工具 5,547</a:t>
+            </a:r>
+          </a:p>
+        </p:txBody>
+      </p:sp>
+      <p:sp>
+        <p:nvSpPr>
+          <p:cNvPr id="77" name="TextBox 76"/>
+          <p:cNvSpPr txBox="1"/>
+          <p:nvPr/>
+        </p:nvSpPr>
+        <p:spPr>
+          <a:xfrm>
+            <a:off x="426720" y="3840480"/>
+            <a:ext cx="9144000" cy="96012"/>
+          </a:xfrm>
+          <a:prstGeom prst="rect">
+            <a:avLst/>
+          </a:prstGeom>
+          <a:noFill/>
+        </p:spPr>
+        <p:txBody>
+          <a:bodyPr wrap="square" lIns="0" rIns="0" tIns="0" bIns="0" anchor="t">
+            <a:spAutoFit/>
+          </a:bodyPr>
+          <a:lstStyle/>
+          <a:p>
+            <a:pPr algn="l">
+              <a:lnSpc>
+                <a:spcPct val="100000"/>
+              </a:lnSpc>
+            </a:pPr>
+            <a:r>
+              <a:rPr sz="750" b="0">
+                <a:solidFill>
+                  <a:srgbClr val="8B8E94"/>
+                </a:solidFill>
+                <a:latin typeface="微软雅黑"/>
+                <a:ea typeface="微软雅黑"/>
+                <a:cs typeface="微软雅黑"/>
+              </a:rPr>
+              <a:t>Top3 = 27,922 + 16,851 + 10,570 = 55,343；其余 4 类 + 未分类 19.1%。</a:t>
+            </a:r>
+          </a:p>
+        </p:txBody>
+      </p:sp>
+      <p:sp>
+        <p:nvSpPr>
+          <p:cNvPr id="78" name="TextBox 77"/>
+          <p:cNvSpPr txBox="1"/>
+          <p:nvPr/>
+        </p:nvSpPr>
+        <p:spPr>
+          <a:xfrm>
+            <a:off x="426720" y="3977639"/>
+            <a:ext cx="11338560" cy="137160"/>
+          </a:xfrm>
+          <a:prstGeom prst="rect">
+            <a:avLst/>
+          </a:prstGeom>
+          <a:noFill/>
+        </p:spPr>
+        <p:txBody>
+          <a:bodyPr wrap="square" lIns="0" rIns="0" tIns="0" bIns="0" anchor="t">
+            <a:spAutoFit/>
+          </a:bodyPr>
+          <a:lstStyle/>
+          <a:p>
+            <a:pPr algn="l">
+              <a:lnSpc>
+                <a:spcPct val="100000"/>
+              </a:lnSpc>
+            </a:pPr>
+            <a:r>
+              <a:rPr sz="1050" b="1">
+                <a:solidFill>
+                  <a:srgbClr val="1A1A1C"/>
+                </a:solidFill>
+                <a:latin typeface="微软雅黑"/>
+                <a:ea typeface="微软雅黑"/>
+                <a:cs typeface="微软雅黑"/>
+              </a:rPr>
+              <a:t>谁被下载：四类来源 Top5（共 20 个）</a:t>
+            </a:r>
+          </a:p>
+        </p:txBody>
+      </p:sp>
+      <p:sp>
+        <p:nvSpPr>
+          <p:cNvPr id="79" name="TextBox 78"/>
+          <p:cNvSpPr txBox="1"/>
+          <p:nvPr/>
+        </p:nvSpPr>
+        <p:spPr>
+          <a:xfrm>
+            <a:off x="426720" y="4210812"/>
+            <a:ext cx="11338560" cy="89154"/>
+          </a:xfrm>
+          <a:prstGeom prst="rect">
+            <a:avLst/>
+          </a:prstGeom>
+          <a:noFill/>
+        </p:spPr>
+        <p:txBody>
+          <a:bodyPr wrap="square" lIns="0" rIns="0" tIns="0" bIns="0" anchor="t">
+            <a:spAutoFit/>
+          </a:bodyPr>
+          <a:lstStyle/>
+          <a:p>
+            <a:pPr algn="l">
+              <a:lnSpc>
+                <a:spcPct val="100000"/>
+              </a:lnSpc>
+            </a:pPr>
+            <a:r>
+              <a:rPr sz="750" b="0">
+                <a:solidFill>
+                  <a:srgbClr val="8B8E94"/>
+                </a:solidFill>
+                <a:latin typeface="微软雅黑"/>
+                <a:ea typeface="微软雅黑"/>
+                <a:cs typeface="微软雅黑"/>
+              </a:rPr>
+              <a:t>显示名 / 所有者 · 下载量；按 DownloadCount 降序</a:t>
+            </a:r>
+          </a:p>
+        </p:txBody>
+      </p:sp>
+      <p:sp>
+        <p:nvSpPr>
+          <p:cNvPr id="80" name="TextBox 79"/>
+          <p:cNvSpPr txBox="1"/>
+          <p:nvPr/>
+        </p:nvSpPr>
+        <p:spPr>
+          <a:xfrm>
+            <a:off x="426720" y="4306824"/>
+            <a:ext cx="2682240" cy="96012"/>
+          </a:xfrm>
+          <a:prstGeom prst="rect">
+            <a:avLst/>
+          </a:prstGeom>
+          <a:noFill/>
+        </p:spPr>
+        <p:txBody>
+          <a:bodyPr wrap="square" lIns="0" rIns="0" tIns="0" bIns="0" anchor="t">
+            <a:spAutoFit/>
+          </a:bodyPr>
+          <a:lstStyle/>
+          <a:p>
+            <a:pPr algn="l">
+              <a:lnSpc>
+                <a:spcPct val="100000"/>
+              </a:lnSpc>
+            </a:pPr>
+            <a:r>
+              <a:rPr sz="860" b="1">
+                <a:solidFill>
+                  <a:srgbClr val="B5333B"/>
+                </a:solidFill>
+                <a:latin typeface="微软雅黑"/>
+                <a:ea typeface="微软雅黑"/>
+                <a:cs typeface="微软雅黑"/>
+              </a:rPr>
+              <a:t>GitHub Top5</a:t>
+            </a:r>
+          </a:p>
+        </p:txBody>
+      </p:sp>
+      <p:sp>
+        <p:nvSpPr>
+          <p:cNvPr id="81" name="Rectangle 80"/>
           <p:cNvSpPr/>
           <p:nvPr/>
         </p:nvSpPr>
         <p:spPr>
           <a:xfrm>
-            <a:off x="7802880" y="4889754"/>
-            <a:ext cx="1828800" cy="75438"/>
-          </a:xfrm>
-          <a:prstGeom prst="roundRect">
-            <a:avLst>
-              <a:gd name="adj" fmla="val 40000"/>
-            </a:avLst>
+            <a:off x="426720" y="4409694"/>
+            <a:ext cx="2682240" cy="5486"/>
+          </a:xfrm>
+          <a:prstGeom prst="rect">
+            <a:avLst/>
           </a:prstGeom>
           <a:solidFill>
-            <a:srgbClr val="EDEFF2"/>
+            <a:srgbClr val="E2E4E7"/>
           </a:solidFill>
           <a:ln>
             <a:noFill/>
@@ -35451,22 +35531,676 @@
       </p:sp>
       <p:sp>
         <p:nvSpPr>
-          <p:cNvPr id="80" name="Rounded Rectangle 79"/>
+          <p:cNvPr id="82" name="TextBox 81"/>
+          <p:cNvSpPr txBox="1"/>
+          <p:nvPr/>
+        </p:nvSpPr>
+        <p:spPr>
+          <a:xfrm>
+            <a:off x="426720" y="4416552"/>
+            <a:ext cx="195072" cy="75438"/>
+          </a:xfrm>
+          <a:prstGeom prst="rect">
+            <a:avLst/>
+          </a:prstGeom>
+          <a:noFill/>
+        </p:spPr>
+        <p:txBody>
+          <a:bodyPr wrap="square" lIns="0" rIns="0" tIns="0" bIns="0" anchor="t">
+            <a:spAutoFit/>
+          </a:bodyPr>
+          <a:lstStyle/>
+          <a:p>
+            <a:pPr algn="l">
+              <a:lnSpc>
+                <a:spcPct val="100000"/>
+              </a:lnSpc>
+            </a:pPr>
+            <a:r>
+              <a:rPr sz="750" b="1">
+                <a:solidFill>
+                  <a:srgbClr val="B5333B"/>
+                </a:solidFill>
+                <a:latin typeface="微软雅黑"/>
+                <a:ea typeface="微软雅黑"/>
+                <a:cs typeface="微软雅黑"/>
+              </a:rPr>
+              <a:t>1</a:t>
+            </a:r>
+          </a:p>
+        </p:txBody>
+      </p:sp>
+      <p:sp>
+        <p:nvSpPr>
+          <p:cNvPr id="83" name="TextBox 82"/>
+          <p:cNvSpPr txBox="1"/>
+          <p:nvPr/>
+        </p:nvSpPr>
+        <p:spPr>
+          <a:xfrm>
+            <a:off x="621792" y="4416552"/>
+            <a:ext cx="2487168" cy="75438"/>
+          </a:xfrm>
+          <a:prstGeom prst="rect">
+            <a:avLst/>
+          </a:prstGeom>
+          <a:noFill/>
+        </p:spPr>
+        <p:txBody>
+          <a:bodyPr wrap="square" lIns="0" rIns="0" tIns="0" bIns="0" anchor="t">
+            <a:spAutoFit/>
+          </a:bodyPr>
+          <a:lstStyle/>
+          <a:p>
+            <a:pPr algn="l">
+              <a:lnSpc>
+                <a:spcPct val="100000"/>
+              </a:lnSpc>
+            </a:pPr>
+            <a:r>
+              <a:rPr sz="780" b="1">
+                <a:solidFill>
+                  <a:srgbClr val="1A1A1C"/>
+                </a:solidFill>
+                <a:latin typeface="微软雅黑"/>
+                <a:ea typeface="微软雅黑"/>
+                <a:cs typeface="微软雅黑"/>
+              </a:rPr>
+              <a:t>dev-expert</a:t>
+            </a:r>
+          </a:p>
+        </p:txBody>
+      </p:sp>
+      <p:sp>
+        <p:nvSpPr>
+          <p:cNvPr id="84" name="TextBox 83"/>
+          <p:cNvSpPr txBox="1"/>
+          <p:nvPr/>
+        </p:nvSpPr>
+        <p:spPr>
+          <a:xfrm>
+            <a:off x="621792" y="4498848"/>
+            <a:ext cx="2487168" cy="68580"/>
+          </a:xfrm>
+          <a:prstGeom prst="rect">
+            <a:avLst/>
+          </a:prstGeom>
+          <a:noFill/>
+        </p:spPr>
+        <p:txBody>
+          <a:bodyPr wrap="square" lIns="0" rIns="0" tIns="0" bIns="0" anchor="t">
+            <a:spAutoFit/>
+          </a:bodyPr>
+          <a:lstStyle/>
+          <a:p>
+            <a:pPr algn="l">
+              <a:lnSpc>
+                <a:spcPct val="100000"/>
+              </a:lnSpc>
+            </a:pPr>
+            <a:r>
+              <a:rPr sz="700" b="0">
+                <a:solidFill>
+                  <a:srgbClr val="5B616B"/>
+                </a:solidFill>
+                <a:latin typeface="微软雅黑"/>
+                <a:ea typeface="微软雅黑"/>
+                <a:cs typeface="微软雅黑"/>
+              </a:rPr>
+              <a:t>ebandao · 1,156,332</a:t>
+            </a:r>
+          </a:p>
+        </p:txBody>
+      </p:sp>
+      <p:sp>
+        <p:nvSpPr>
+          <p:cNvPr id="85" name="TextBox 84"/>
+          <p:cNvSpPr txBox="1"/>
+          <p:nvPr/>
+        </p:nvSpPr>
+        <p:spPr>
+          <a:xfrm>
+            <a:off x="426720" y="4636008"/>
+            <a:ext cx="195072" cy="75438"/>
+          </a:xfrm>
+          <a:prstGeom prst="rect">
+            <a:avLst/>
+          </a:prstGeom>
+          <a:noFill/>
+        </p:spPr>
+        <p:txBody>
+          <a:bodyPr wrap="square" lIns="0" rIns="0" tIns="0" bIns="0" anchor="t">
+            <a:spAutoFit/>
+          </a:bodyPr>
+          <a:lstStyle/>
+          <a:p>
+            <a:pPr algn="l">
+              <a:lnSpc>
+                <a:spcPct val="100000"/>
+              </a:lnSpc>
+            </a:pPr>
+            <a:r>
+              <a:rPr sz="750" b="1">
+                <a:solidFill>
+                  <a:srgbClr val="B5333B"/>
+                </a:solidFill>
+                <a:latin typeface="微软雅黑"/>
+                <a:ea typeface="微软雅黑"/>
+                <a:cs typeface="微软雅黑"/>
+              </a:rPr>
+              <a:t>2</a:t>
+            </a:r>
+          </a:p>
+        </p:txBody>
+      </p:sp>
+      <p:sp>
+        <p:nvSpPr>
+          <p:cNvPr id="86" name="TextBox 85"/>
+          <p:cNvSpPr txBox="1"/>
+          <p:nvPr/>
+        </p:nvSpPr>
+        <p:spPr>
+          <a:xfrm>
+            <a:off x="621792" y="4636008"/>
+            <a:ext cx="2487168" cy="75438"/>
+          </a:xfrm>
+          <a:prstGeom prst="rect">
+            <a:avLst/>
+          </a:prstGeom>
+          <a:noFill/>
+        </p:spPr>
+        <p:txBody>
+          <a:bodyPr wrap="square" lIns="0" rIns="0" tIns="0" bIns="0" anchor="t">
+            <a:spAutoFit/>
+          </a:bodyPr>
+          <a:lstStyle/>
+          <a:p>
+            <a:pPr algn="l">
+              <a:lnSpc>
+                <a:spcPct val="100000"/>
+              </a:lnSpc>
+            </a:pPr>
+            <a:r>
+              <a:rPr sz="780" b="1">
+                <a:solidFill>
+                  <a:srgbClr val="1A1A1C"/>
+                </a:solidFill>
+                <a:latin typeface="微软雅黑"/>
+                <a:ea typeface="微软雅黑"/>
+                <a:cs typeface="微软雅黑"/>
+              </a:rPr>
+              <a:t>skill-creator</a:t>
+            </a:r>
+          </a:p>
+        </p:txBody>
+      </p:sp>
+      <p:sp>
+        <p:nvSpPr>
+          <p:cNvPr id="87" name="TextBox 86"/>
+          <p:cNvSpPr txBox="1"/>
+          <p:nvPr/>
+        </p:nvSpPr>
+        <p:spPr>
+          <a:xfrm>
+            <a:off x="621792" y="4718304"/>
+            <a:ext cx="2487168" cy="68580"/>
+          </a:xfrm>
+          <a:prstGeom prst="rect">
+            <a:avLst/>
+          </a:prstGeom>
+          <a:noFill/>
+        </p:spPr>
+        <p:txBody>
+          <a:bodyPr wrap="square" lIns="0" rIns="0" tIns="0" bIns="0" anchor="t">
+            <a:spAutoFit/>
+          </a:bodyPr>
+          <a:lstStyle/>
+          <a:p>
+            <a:pPr algn="l">
+              <a:lnSpc>
+                <a:spcPct val="100000"/>
+              </a:lnSpc>
+            </a:pPr>
+            <a:r>
+              <a:rPr sz="700" b="0">
+                <a:solidFill>
+                  <a:srgbClr val="5B616B"/>
+                </a:solidFill>
+                <a:latin typeface="微软雅黑"/>
+                <a:ea typeface="微软雅黑"/>
+                <a:cs typeface="微软雅黑"/>
+              </a:rPr>
+              <a:t>@anthropics · 20,876</a:t>
+            </a:r>
+          </a:p>
+        </p:txBody>
+      </p:sp>
+      <p:sp>
+        <p:nvSpPr>
+          <p:cNvPr id="88" name="TextBox 87"/>
+          <p:cNvSpPr txBox="1"/>
+          <p:nvPr/>
+        </p:nvSpPr>
+        <p:spPr>
+          <a:xfrm>
+            <a:off x="426720" y="4855464"/>
+            <a:ext cx="195072" cy="75438"/>
+          </a:xfrm>
+          <a:prstGeom prst="rect">
+            <a:avLst/>
+          </a:prstGeom>
+          <a:noFill/>
+        </p:spPr>
+        <p:txBody>
+          <a:bodyPr wrap="square" lIns="0" rIns="0" tIns="0" bIns="0" anchor="t">
+            <a:spAutoFit/>
+          </a:bodyPr>
+          <a:lstStyle/>
+          <a:p>
+            <a:pPr algn="l">
+              <a:lnSpc>
+                <a:spcPct val="100000"/>
+              </a:lnSpc>
+            </a:pPr>
+            <a:r>
+              <a:rPr sz="750" b="1">
+                <a:solidFill>
+                  <a:srgbClr val="B5333B"/>
+                </a:solidFill>
+                <a:latin typeface="微软雅黑"/>
+                <a:ea typeface="微软雅黑"/>
+                <a:cs typeface="微软雅黑"/>
+              </a:rPr>
+              <a:t>3</a:t>
+            </a:r>
+          </a:p>
+        </p:txBody>
+      </p:sp>
+      <p:sp>
+        <p:nvSpPr>
+          <p:cNvPr id="89" name="TextBox 88"/>
+          <p:cNvSpPr txBox="1"/>
+          <p:nvPr/>
+        </p:nvSpPr>
+        <p:spPr>
+          <a:xfrm>
+            <a:off x="621792" y="4855464"/>
+            <a:ext cx="2487168" cy="75438"/>
+          </a:xfrm>
+          <a:prstGeom prst="rect">
+            <a:avLst/>
+          </a:prstGeom>
+          <a:noFill/>
+        </p:spPr>
+        <p:txBody>
+          <a:bodyPr wrap="square" lIns="0" rIns="0" tIns="0" bIns="0" anchor="t">
+            <a:spAutoFit/>
+          </a:bodyPr>
+          <a:lstStyle/>
+          <a:p>
+            <a:pPr algn="l">
+              <a:lnSpc>
+                <a:spcPct val="100000"/>
+              </a:lnSpc>
+            </a:pPr>
+            <a:r>
+              <a:rPr sz="780" b="1">
+                <a:solidFill>
+                  <a:srgbClr val="1A1A1C"/>
+                </a:solidFill>
+                <a:latin typeface="微软雅黑"/>
+                <a:ea typeface="微软雅黑"/>
+                <a:cs typeface="微软雅黑"/>
+              </a:rPr>
+              <a:t>床垫选购顾问</a:t>
+            </a:r>
+          </a:p>
+        </p:txBody>
+      </p:sp>
+      <p:sp>
+        <p:nvSpPr>
+          <p:cNvPr id="90" name="TextBox 89"/>
+          <p:cNvSpPr txBox="1"/>
+          <p:nvPr/>
+        </p:nvSpPr>
+        <p:spPr>
+          <a:xfrm>
+            <a:off x="621792" y="4937760"/>
+            <a:ext cx="2487168" cy="68580"/>
+          </a:xfrm>
+          <a:prstGeom prst="rect">
+            <a:avLst/>
+          </a:prstGeom>
+          <a:noFill/>
+        </p:spPr>
+        <p:txBody>
+          <a:bodyPr wrap="square" lIns="0" rIns="0" tIns="0" bIns="0" anchor="t">
+            <a:spAutoFit/>
+          </a:bodyPr>
+          <a:lstStyle/>
+          <a:p>
+            <a:pPr algn="l">
+              <a:lnSpc>
+                <a:spcPct val="100000"/>
+              </a:lnSpc>
+            </a:pPr>
+            <a:r>
+              <a:rPr sz="700" b="0">
+                <a:solidFill>
+                  <a:srgbClr val="5B616B"/>
+                </a:solidFill>
+                <a:latin typeface="微软雅黑"/>
+                <a:ea typeface="微软雅黑"/>
+                <a:cs typeface="微软雅黑"/>
+              </a:rPr>
+              <a:t>alv123 · 19,487</a:t>
+            </a:r>
+          </a:p>
+        </p:txBody>
+      </p:sp>
+      <p:sp>
+        <p:nvSpPr>
+          <p:cNvPr id="91" name="TextBox 90"/>
+          <p:cNvSpPr txBox="1"/>
+          <p:nvPr/>
+        </p:nvSpPr>
+        <p:spPr>
+          <a:xfrm>
+            <a:off x="426720" y="5074920"/>
+            <a:ext cx="195072" cy="75438"/>
+          </a:xfrm>
+          <a:prstGeom prst="rect">
+            <a:avLst/>
+          </a:prstGeom>
+          <a:noFill/>
+        </p:spPr>
+        <p:txBody>
+          <a:bodyPr wrap="square" lIns="0" rIns="0" tIns="0" bIns="0" anchor="t">
+            <a:spAutoFit/>
+          </a:bodyPr>
+          <a:lstStyle/>
+          <a:p>
+            <a:pPr algn="l">
+              <a:lnSpc>
+                <a:spcPct val="100000"/>
+              </a:lnSpc>
+            </a:pPr>
+            <a:r>
+              <a:rPr sz="750" b="1">
+                <a:solidFill>
+                  <a:srgbClr val="B5333B"/>
+                </a:solidFill>
+                <a:latin typeface="微软雅黑"/>
+                <a:ea typeface="微软雅黑"/>
+                <a:cs typeface="微软雅黑"/>
+              </a:rPr>
+              <a:t>4</a:t>
+            </a:r>
+          </a:p>
+        </p:txBody>
+      </p:sp>
+      <p:sp>
+        <p:nvSpPr>
+          <p:cNvPr id="92" name="TextBox 91"/>
+          <p:cNvSpPr txBox="1"/>
+          <p:nvPr/>
+        </p:nvSpPr>
+        <p:spPr>
+          <a:xfrm>
+            <a:off x="621792" y="5074920"/>
+            <a:ext cx="2487168" cy="75438"/>
+          </a:xfrm>
+          <a:prstGeom prst="rect">
+            <a:avLst/>
+          </a:prstGeom>
+          <a:noFill/>
+        </p:spPr>
+        <p:txBody>
+          <a:bodyPr wrap="square" lIns="0" rIns="0" tIns="0" bIns="0" anchor="t">
+            <a:spAutoFit/>
+          </a:bodyPr>
+          <a:lstStyle/>
+          <a:p>
+            <a:pPr algn="l">
+              <a:lnSpc>
+                <a:spcPct val="100000"/>
+              </a:lnSpc>
+            </a:pPr>
+            <a:r>
+              <a:rPr sz="780" b="1">
+                <a:solidFill>
+                  <a:srgbClr val="1A1A1C"/>
+                </a:solidFill>
+                <a:latin typeface="微软雅黑"/>
+                <a:ea typeface="微软雅黑"/>
+                <a:cs typeface="微软雅黑"/>
+              </a:rPr>
+              <a:t>frontend-design</a:t>
+            </a:r>
+          </a:p>
+        </p:txBody>
+      </p:sp>
+      <p:sp>
+        <p:nvSpPr>
+          <p:cNvPr id="93" name="TextBox 92"/>
+          <p:cNvSpPr txBox="1"/>
+          <p:nvPr/>
+        </p:nvSpPr>
+        <p:spPr>
+          <a:xfrm>
+            <a:off x="621792" y="5157216"/>
+            <a:ext cx="2487168" cy="68580"/>
+          </a:xfrm>
+          <a:prstGeom prst="rect">
+            <a:avLst/>
+          </a:prstGeom>
+          <a:noFill/>
+        </p:spPr>
+        <p:txBody>
+          <a:bodyPr wrap="square" lIns="0" rIns="0" tIns="0" bIns="0" anchor="t">
+            <a:spAutoFit/>
+          </a:bodyPr>
+          <a:lstStyle/>
+          <a:p>
+            <a:pPr algn="l">
+              <a:lnSpc>
+                <a:spcPct val="100000"/>
+              </a:lnSpc>
+            </a:pPr>
+            <a:r>
+              <a:rPr sz="700" b="0">
+                <a:solidFill>
+                  <a:srgbClr val="5B616B"/>
+                </a:solidFill>
+                <a:latin typeface="微软雅黑"/>
+                <a:ea typeface="微软雅黑"/>
+                <a:cs typeface="微软雅黑"/>
+              </a:rPr>
+              <a:t>@anthropics · 16,285</a:t>
+            </a:r>
+          </a:p>
+        </p:txBody>
+      </p:sp>
+      <p:sp>
+        <p:nvSpPr>
+          <p:cNvPr id="94" name="TextBox 93"/>
+          <p:cNvSpPr txBox="1"/>
+          <p:nvPr/>
+        </p:nvSpPr>
+        <p:spPr>
+          <a:xfrm>
+            <a:off x="426720" y="5294376"/>
+            <a:ext cx="195072" cy="75438"/>
+          </a:xfrm>
+          <a:prstGeom prst="rect">
+            <a:avLst/>
+          </a:prstGeom>
+          <a:noFill/>
+        </p:spPr>
+        <p:txBody>
+          <a:bodyPr wrap="square" lIns="0" rIns="0" tIns="0" bIns="0" anchor="t">
+            <a:spAutoFit/>
+          </a:bodyPr>
+          <a:lstStyle/>
+          <a:p>
+            <a:pPr algn="l">
+              <a:lnSpc>
+                <a:spcPct val="100000"/>
+              </a:lnSpc>
+            </a:pPr>
+            <a:r>
+              <a:rPr sz="750" b="1">
+                <a:solidFill>
+                  <a:srgbClr val="B5333B"/>
+                </a:solidFill>
+                <a:latin typeface="微软雅黑"/>
+                <a:ea typeface="微软雅黑"/>
+                <a:cs typeface="微软雅黑"/>
+              </a:rPr>
+              <a:t>5</a:t>
+            </a:r>
+          </a:p>
+        </p:txBody>
+      </p:sp>
+      <p:sp>
+        <p:nvSpPr>
+          <p:cNvPr id="95" name="TextBox 94"/>
+          <p:cNvSpPr txBox="1"/>
+          <p:nvPr/>
+        </p:nvSpPr>
+        <p:spPr>
+          <a:xfrm>
+            <a:off x="621792" y="5294376"/>
+            <a:ext cx="2487168" cy="75438"/>
+          </a:xfrm>
+          <a:prstGeom prst="rect">
+            <a:avLst/>
+          </a:prstGeom>
+          <a:noFill/>
+        </p:spPr>
+        <p:txBody>
+          <a:bodyPr wrap="square" lIns="0" rIns="0" tIns="0" bIns="0" anchor="t">
+            <a:spAutoFit/>
+          </a:bodyPr>
+          <a:lstStyle/>
+          <a:p>
+            <a:pPr algn="l">
+              <a:lnSpc>
+                <a:spcPct val="100000"/>
+              </a:lnSpc>
+            </a:pPr>
+            <a:r>
+              <a:rPr sz="780" b="1">
+                <a:solidFill>
+                  <a:srgbClr val="1A1A1C"/>
+                </a:solidFill>
+                <a:latin typeface="微软雅黑"/>
+                <a:ea typeface="微软雅黑"/>
+                <a:cs typeface="微软雅黑"/>
+              </a:rPr>
+              <a:t>OneSkills</a:t>
+            </a:r>
+          </a:p>
+        </p:txBody>
+      </p:sp>
+      <p:sp>
+        <p:nvSpPr>
+          <p:cNvPr id="96" name="TextBox 95"/>
+          <p:cNvSpPr txBox="1"/>
+          <p:nvPr/>
+        </p:nvSpPr>
+        <p:spPr>
+          <a:xfrm>
+            <a:off x="621792" y="5376672"/>
+            <a:ext cx="2487168" cy="68580"/>
+          </a:xfrm>
+          <a:prstGeom prst="rect">
+            <a:avLst/>
+          </a:prstGeom>
+          <a:noFill/>
+        </p:spPr>
+        <p:txBody>
+          <a:bodyPr wrap="square" lIns="0" rIns="0" tIns="0" bIns="0" anchor="t">
+            <a:spAutoFit/>
+          </a:bodyPr>
+          <a:lstStyle/>
+          <a:p>
+            <a:pPr algn="l">
+              <a:lnSpc>
+                <a:spcPct val="100000"/>
+              </a:lnSpc>
+            </a:pPr>
+            <a:r>
+              <a:rPr sz="700" b="0">
+                <a:solidFill>
+                  <a:srgbClr val="5B616B"/>
+                </a:solidFill>
+                <a:latin typeface="微软雅黑"/>
+                <a:ea typeface="微软雅黑"/>
+                <a:cs typeface="微软雅黑"/>
+              </a:rPr>
+              <a:t>OneScience · 12,861</a:t>
+            </a:r>
+          </a:p>
+        </p:txBody>
+      </p:sp>
+      <p:sp>
+        <p:nvSpPr>
+          <p:cNvPr id="97" name="TextBox 96"/>
+          <p:cNvSpPr txBox="1"/>
+          <p:nvPr/>
+        </p:nvSpPr>
+        <p:spPr>
+          <a:xfrm>
+            <a:off x="3291840" y="4306824"/>
+            <a:ext cx="2682240" cy="96012"/>
+          </a:xfrm>
+          <a:prstGeom prst="rect">
+            <a:avLst/>
+          </a:prstGeom>
+          <a:noFill/>
+        </p:spPr>
+        <p:txBody>
+          <a:bodyPr wrap="square" lIns="0" rIns="0" tIns="0" bIns="0" anchor="t">
+            <a:spAutoFit/>
+          </a:bodyPr>
+          <a:lstStyle/>
+          <a:p>
+            <a:pPr algn="l">
+              <a:lnSpc>
+                <a:spcPct val="100000"/>
+              </a:lnSpc>
+            </a:pPr>
+            <a:r>
+              <a:rPr sz="860" b="1">
+                <a:solidFill>
+                  <a:srgbClr val="D98A8F"/>
+                </a:solidFill>
+                <a:latin typeface="微软雅黑"/>
+                <a:ea typeface="微软雅黑"/>
+                <a:cs typeface="微软雅黑"/>
+              </a:rPr>
+              <a:t>其他市场 Top5</a:t>
+            </a:r>
+          </a:p>
+        </p:txBody>
+      </p:sp>
+      <p:sp>
+        <p:nvSpPr>
+          <p:cNvPr id="98" name="Rectangle 97"/>
           <p:cNvSpPr/>
           <p:nvPr/>
         </p:nvSpPr>
         <p:spPr>
           <a:xfrm>
-            <a:off x="7802880" y="4889754"/>
-            <a:ext cx="524539" cy="75438"/>
-          </a:xfrm>
-          <a:prstGeom prst="roundRect">
-            <a:avLst>
-              <a:gd name="adj" fmla="val 40000"/>
-            </a:avLst>
+            <a:off x="3291840" y="4409694"/>
+            <a:ext cx="2682240" cy="5486"/>
+          </a:xfrm>
+          <a:prstGeom prst="rect">
+            <a:avLst/>
           </a:prstGeom>
           <a:solidFill>
-            <a:srgbClr val="9AA1AA"/>
+            <a:srgbClr val="E2E4E7"/>
           </a:solidFill>
           <a:ln>
             <a:noFill/>
@@ -35497,14 +36231,14 @@
       </p:sp>
       <p:sp>
         <p:nvSpPr>
-          <p:cNvPr id="81" name="TextBox 80"/>
-          <p:cNvSpPr txBox="1"/>
-          <p:nvPr/>
-        </p:nvSpPr>
-        <p:spPr>
-          <a:xfrm>
-            <a:off x="9814560" y="4862322"/>
-            <a:ext cx="731520" cy="137160"/>
+          <p:cNvPr id="99" name="TextBox 98"/>
+          <p:cNvSpPr txBox="1"/>
+          <p:nvPr/>
+        </p:nvSpPr>
+        <p:spPr>
+          <a:xfrm>
+            <a:off x="3291840" y="4416552"/>
+            <a:ext cx="195072" cy="75438"/>
           </a:xfrm>
           <a:prstGeom prst="rect">
             <a:avLst/>
@@ -35523,29 +36257,29 @@
               </a:lnSpc>
             </a:pPr>
             <a:r>
-              <a:rPr sz="850" b="0">
-                <a:solidFill>
-                  <a:srgbClr val="1A1A1C"/>
-                </a:solidFill>
-                <a:latin typeface="微软雅黑"/>
-                <a:ea typeface="微软雅黑"/>
-                <a:cs typeface="微软雅黑"/>
-              </a:rPr>
-              <a:t>148</a:t>
-            </a:r>
-          </a:p>
-        </p:txBody>
-      </p:sp>
-      <p:sp>
-        <p:nvSpPr>
-          <p:cNvPr id="82" name="TextBox 81"/>
-          <p:cNvSpPr txBox="1"/>
-          <p:nvPr/>
-        </p:nvSpPr>
-        <p:spPr>
-          <a:xfrm>
-            <a:off x="6339840" y="5081778"/>
-            <a:ext cx="1219200" cy="137160"/>
+              <a:rPr sz="750" b="1">
+                <a:solidFill>
+                  <a:srgbClr val="B5333B"/>
+                </a:solidFill>
+                <a:latin typeface="微软雅黑"/>
+                <a:ea typeface="微软雅黑"/>
+                <a:cs typeface="微软雅黑"/>
+              </a:rPr>
+              <a:t>1</a:t>
+            </a:r>
+          </a:p>
+        </p:txBody>
+      </p:sp>
+      <p:sp>
+        <p:nvSpPr>
+          <p:cNvPr id="100" name="TextBox 99"/>
+          <p:cNvSpPr txBox="1"/>
+          <p:nvPr/>
+        </p:nvSpPr>
+        <p:spPr>
+          <a:xfrm>
+            <a:off x="3486912" y="4416552"/>
+            <a:ext cx="2487168" cy="75438"/>
           </a:xfrm>
           <a:prstGeom prst="rect">
             <a:avLst/>
@@ -35564,7 +36298,48 @@
               </a:lnSpc>
             </a:pPr>
             <a:r>
-              <a:rPr sz="900" b="0">
+              <a:rPr sz="780" b="1">
+                <a:solidFill>
+                  <a:srgbClr val="1A1A1C"/>
+                </a:solidFill>
+                <a:latin typeface="微软雅黑"/>
+                <a:ea typeface="微软雅黑"/>
+                <a:cs typeface="微软雅黑"/>
+              </a:rPr>
+              <a:t>Mysteel_PriceSearch</a:t>
+            </a:r>
+          </a:p>
+        </p:txBody>
+      </p:sp>
+      <p:sp>
+        <p:nvSpPr>
+          <p:cNvPr id="101" name="TextBox 100"/>
+          <p:cNvSpPr txBox="1"/>
+          <p:nvPr/>
+        </p:nvSpPr>
+        <p:spPr>
+          <a:xfrm>
+            <a:off x="3486912" y="4498848"/>
+            <a:ext cx="2487168" cy="68580"/>
+          </a:xfrm>
+          <a:prstGeom prst="rect">
+            <a:avLst/>
+          </a:prstGeom>
+          <a:noFill/>
+        </p:spPr>
+        <p:txBody>
+          <a:bodyPr wrap="square" lIns="0" rIns="0" tIns="0" bIns="0" anchor="t">
+            <a:spAutoFit/>
+          </a:bodyPr>
+          <a:lstStyle/>
+          <a:p>
+            <a:pPr algn="l">
+              <a:lnSpc>
+                <a:spcPct val="100000"/>
+              </a:lnSpc>
+            </a:pPr>
+            <a:r>
+              <a:rPr sz="700" b="0">
                 <a:solidFill>
                   <a:srgbClr val="5B616B"/>
                 </a:solidFill>
@@ -35572,29 +36347,560 @@
                 <a:ea typeface="微软雅黑"/>
                 <a:cs typeface="微软雅黑"/>
               </a:rPr>
-              <a:t>聚合 / 镜像</a:t>
-            </a:r>
-          </a:p>
-        </p:txBody>
-      </p:sp>
-      <p:sp>
-        <p:nvSpPr>
-          <p:cNvPr id="83" name="Rounded Rectangle 82"/>
+              <a:t>@wyb92 · 31,477</a:t>
+            </a:r>
+          </a:p>
+        </p:txBody>
+      </p:sp>
+      <p:sp>
+        <p:nvSpPr>
+          <p:cNvPr id="102" name="TextBox 101"/>
+          <p:cNvSpPr txBox="1"/>
+          <p:nvPr/>
+        </p:nvSpPr>
+        <p:spPr>
+          <a:xfrm>
+            <a:off x="3291840" y="4636008"/>
+            <a:ext cx="195072" cy="75438"/>
+          </a:xfrm>
+          <a:prstGeom prst="rect">
+            <a:avLst/>
+          </a:prstGeom>
+          <a:noFill/>
+        </p:spPr>
+        <p:txBody>
+          <a:bodyPr wrap="square" lIns="0" rIns="0" tIns="0" bIns="0" anchor="t">
+            <a:spAutoFit/>
+          </a:bodyPr>
+          <a:lstStyle/>
+          <a:p>
+            <a:pPr algn="l">
+              <a:lnSpc>
+                <a:spcPct val="100000"/>
+              </a:lnSpc>
+            </a:pPr>
+            <a:r>
+              <a:rPr sz="750" b="1">
+                <a:solidFill>
+                  <a:srgbClr val="B5333B"/>
+                </a:solidFill>
+                <a:latin typeface="微软雅黑"/>
+                <a:ea typeface="微软雅黑"/>
+                <a:cs typeface="微软雅黑"/>
+              </a:rPr>
+              <a:t>2</a:t>
+            </a:r>
+          </a:p>
+        </p:txBody>
+      </p:sp>
+      <p:sp>
+        <p:nvSpPr>
+          <p:cNvPr id="103" name="TextBox 102"/>
+          <p:cNvSpPr txBox="1"/>
+          <p:nvPr/>
+        </p:nvSpPr>
+        <p:spPr>
+          <a:xfrm>
+            <a:off x="3486912" y="4636008"/>
+            <a:ext cx="2487168" cy="75438"/>
+          </a:xfrm>
+          <a:prstGeom prst="rect">
+            <a:avLst/>
+          </a:prstGeom>
+          <a:noFill/>
+        </p:spPr>
+        <p:txBody>
+          <a:bodyPr wrap="square" lIns="0" rIns="0" tIns="0" bIns="0" anchor="t">
+            <a:spAutoFit/>
+          </a:bodyPr>
+          <a:lstStyle/>
+          <a:p>
+            <a:pPr algn="l">
+              <a:lnSpc>
+                <a:spcPct val="100000"/>
+              </a:lnSpc>
+            </a:pPr>
+            <a:r>
+              <a:rPr sz="780" b="1">
+                <a:solidFill>
+                  <a:srgbClr val="1A1A1C"/>
+                </a:solidFill>
+                <a:latin typeface="微软雅黑"/>
+                <a:ea typeface="微软雅黑"/>
+                <a:cs typeface="微软雅黑"/>
+              </a:rPr>
+              <a:t>weather天气查询</a:t>
+            </a:r>
+          </a:p>
+        </p:txBody>
+      </p:sp>
+      <p:sp>
+        <p:nvSpPr>
+          <p:cNvPr id="104" name="TextBox 103"/>
+          <p:cNvSpPr txBox="1"/>
+          <p:nvPr/>
+        </p:nvSpPr>
+        <p:spPr>
+          <a:xfrm>
+            <a:off x="3486912" y="4718304"/>
+            <a:ext cx="2487168" cy="68580"/>
+          </a:xfrm>
+          <a:prstGeom prst="rect">
+            <a:avLst/>
+          </a:prstGeom>
+          <a:noFill/>
+        </p:spPr>
+        <p:txBody>
+          <a:bodyPr wrap="square" lIns="0" rIns="0" tIns="0" bIns="0" anchor="t">
+            <a:spAutoFit/>
+          </a:bodyPr>
+          <a:lstStyle/>
+          <a:p>
+            <a:pPr algn="l">
+              <a:lnSpc>
+                <a:spcPct val="100000"/>
+              </a:lnSpc>
+            </a:pPr>
+            <a:r>
+              <a:rPr sz="700" b="0">
+                <a:solidFill>
+                  <a:srgbClr val="5B616B"/>
+                </a:solidFill>
+                <a:latin typeface="微软雅黑"/>
+                <a:ea typeface="微软雅黑"/>
+                <a:cs typeface="微软雅黑"/>
+              </a:rPr>
+              <a:t>@steipete · 5,818</a:t>
+            </a:r>
+          </a:p>
+        </p:txBody>
+      </p:sp>
+      <p:sp>
+        <p:nvSpPr>
+          <p:cNvPr id="105" name="TextBox 104"/>
+          <p:cNvSpPr txBox="1"/>
+          <p:nvPr/>
+        </p:nvSpPr>
+        <p:spPr>
+          <a:xfrm>
+            <a:off x="3291840" y="4855464"/>
+            <a:ext cx="195072" cy="75438"/>
+          </a:xfrm>
+          <a:prstGeom prst="rect">
+            <a:avLst/>
+          </a:prstGeom>
+          <a:noFill/>
+        </p:spPr>
+        <p:txBody>
+          <a:bodyPr wrap="square" lIns="0" rIns="0" tIns="0" bIns="0" anchor="t">
+            <a:spAutoFit/>
+          </a:bodyPr>
+          <a:lstStyle/>
+          <a:p>
+            <a:pPr algn="l">
+              <a:lnSpc>
+                <a:spcPct val="100000"/>
+              </a:lnSpc>
+            </a:pPr>
+            <a:r>
+              <a:rPr sz="750" b="1">
+                <a:solidFill>
+                  <a:srgbClr val="B5333B"/>
+                </a:solidFill>
+                <a:latin typeface="微软雅黑"/>
+                <a:ea typeface="微软雅黑"/>
+                <a:cs typeface="微软雅黑"/>
+              </a:rPr>
+              <a:t>3</a:t>
+            </a:r>
+          </a:p>
+        </p:txBody>
+      </p:sp>
+      <p:sp>
+        <p:nvSpPr>
+          <p:cNvPr id="106" name="TextBox 105"/>
+          <p:cNvSpPr txBox="1"/>
+          <p:nvPr/>
+        </p:nvSpPr>
+        <p:spPr>
+          <a:xfrm>
+            <a:off x="3486912" y="4855464"/>
+            <a:ext cx="2487168" cy="75438"/>
+          </a:xfrm>
+          <a:prstGeom prst="rect">
+            <a:avLst/>
+          </a:prstGeom>
+          <a:noFill/>
+        </p:spPr>
+        <p:txBody>
+          <a:bodyPr wrap="square" lIns="0" rIns="0" tIns="0" bIns="0" anchor="t">
+            <a:spAutoFit/>
+          </a:bodyPr>
+          <a:lstStyle/>
+          <a:p>
+            <a:pPr algn="l">
+              <a:lnSpc>
+                <a:spcPct val="100000"/>
+              </a:lnSpc>
+            </a:pPr>
+            <a:r>
+              <a:rPr sz="780" b="1">
+                <a:solidFill>
+                  <a:srgbClr val="1A1A1C"/>
+                </a:solidFill>
+                <a:latin typeface="微软雅黑"/>
+                <a:ea typeface="微软雅黑"/>
+                <a:cs typeface="微软雅黑"/>
+              </a:rPr>
+              <a:t>summarize</a:t>
+            </a:r>
+          </a:p>
+        </p:txBody>
+      </p:sp>
+      <p:sp>
+        <p:nvSpPr>
+          <p:cNvPr id="107" name="TextBox 106"/>
+          <p:cNvSpPr txBox="1"/>
+          <p:nvPr/>
+        </p:nvSpPr>
+        <p:spPr>
+          <a:xfrm>
+            <a:off x="3486912" y="4937760"/>
+            <a:ext cx="2487168" cy="68580"/>
+          </a:xfrm>
+          <a:prstGeom prst="rect">
+            <a:avLst/>
+          </a:prstGeom>
+          <a:noFill/>
+        </p:spPr>
+        <p:txBody>
+          <a:bodyPr wrap="square" lIns="0" rIns="0" tIns="0" bIns="0" anchor="t">
+            <a:spAutoFit/>
+          </a:bodyPr>
+          <a:lstStyle/>
+          <a:p>
+            <a:pPr algn="l">
+              <a:lnSpc>
+                <a:spcPct val="100000"/>
+              </a:lnSpc>
+            </a:pPr>
+            <a:r>
+              <a:rPr sz="700" b="0">
+                <a:solidFill>
+                  <a:srgbClr val="5B616B"/>
+                </a:solidFill>
+                <a:latin typeface="微软雅黑"/>
+                <a:ea typeface="微软雅黑"/>
+                <a:cs typeface="微软雅黑"/>
+              </a:rPr>
+              <a:t>@steipete · 3,844</a:t>
+            </a:r>
+          </a:p>
+        </p:txBody>
+      </p:sp>
+      <p:sp>
+        <p:nvSpPr>
+          <p:cNvPr id="108" name="TextBox 107"/>
+          <p:cNvSpPr txBox="1"/>
+          <p:nvPr/>
+        </p:nvSpPr>
+        <p:spPr>
+          <a:xfrm>
+            <a:off x="3291840" y="5074920"/>
+            <a:ext cx="195072" cy="75438"/>
+          </a:xfrm>
+          <a:prstGeom prst="rect">
+            <a:avLst/>
+          </a:prstGeom>
+          <a:noFill/>
+        </p:spPr>
+        <p:txBody>
+          <a:bodyPr wrap="square" lIns="0" rIns="0" tIns="0" bIns="0" anchor="t">
+            <a:spAutoFit/>
+          </a:bodyPr>
+          <a:lstStyle/>
+          <a:p>
+            <a:pPr algn="l">
+              <a:lnSpc>
+                <a:spcPct val="100000"/>
+              </a:lnSpc>
+            </a:pPr>
+            <a:r>
+              <a:rPr sz="750" b="1">
+                <a:solidFill>
+                  <a:srgbClr val="B5333B"/>
+                </a:solidFill>
+                <a:latin typeface="微软雅黑"/>
+                <a:ea typeface="微软雅黑"/>
+                <a:cs typeface="微软雅黑"/>
+              </a:rPr>
+              <a:t>4</a:t>
+            </a:r>
+          </a:p>
+        </p:txBody>
+      </p:sp>
+      <p:sp>
+        <p:nvSpPr>
+          <p:cNvPr id="109" name="TextBox 108"/>
+          <p:cNvSpPr txBox="1"/>
+          <p:nvPr/>
+        </p:nvSpPr>
+        <p:spPr>
+          <a:xfrm>
+            <a:off x="3486912" y="5074920"/>
+            <a:ext cx="2487168" cy="75438"/>
+          </a:xfrm>
+          <a:prstGeom prst="rect">
+            <a:avLst/>
+          </a:prstGeom>
+          <a:noFill/>
+        </p:spPr>
+        <p:txBody>
+          <a:bodyPr wrap="square" lIns="0" rIns="0" tIns="0" bIns="0" anchor="t">
+            <a:spAutoFit/>
+          </a:bodyPr>
+          <a:lstStyle/>
+          <a:p>
+            <a:pPr algn="l">
+              <a:lnSpc>
+                <a:spcPct val="100000"/>
+              </a:lnSpc>
+            </a:pPr>
+            <a:r>
+              <a:rPr sz="780" b="1">
+                <a:solidFill>
+                  <a:srgbClr val="1A1A1C"/>
+                </a:solidFill>
+                <a:latin typeface="微软雅黑"/>
+                <a:ea typeface="微软雅黑"/>
+                <a:cs typeface="微软雅黑"/>
+              </a:rPr>
+              <a:t>Skill Vetter 安全扫描</a:t>
+            </a:r>
+          </a:p>
+        </p:txBody>
+      </p:sp>
+      <p:sp>
+        <p:nvSpPr>
+          <p:cNvPr id="110" name="TextBox 109"/>
+          <p:cNvSpPr txBox="1"/>
+          <p:nvPr/>
+        </p:nvSpPr>
+        <p:spPr>
+          <a:xfrm>
+            <a:off x="3486912" y="5157216"/>
+            <a:ext cx="2487168" cy="68580"/>
+          </a:xfrm>
+          <a:prstGeom prst="rect">
+            <a:avLst/>
+          </a:prstGeom>
+          <a:noFill/>
+        </p:spPr>
+        <p:txBody>
+          <a:bodyPr wrap="square" lIns="0" rIns="0" tIns="0" bIns="0" anchor="t">
+            <a:spAutoFit/>
+          </a:bodyPr>
+          <a:lstStyle/>
+          <a:p>
+            <a:pPr algn="l">
+              <a:lnSpc>
+                <a:spcPct val="100000"/>
+              </a:lnSpc>
+            </a:pPr>
+            <a:r>
+              <a:rPr sz="700" b="0">
+                <a:solidFill>
+                  <a:srgbClr val="5B616B"/>
+                </a:solidFill>
+                <a:latin typeface="微软雅黑"/>
+                <a:ea typeface="微软雅黑"/>
+                <a:cs typeface="微软雅黑"/>
+              </a:rPr>
+              <a:t>@spclaudehome · 3,781</a:t>
+            </a:r>
+          </a:p>
+        </p:txBody>
+      </p:sp>
+      <p:sp>
+        <p:nvSpPr>
+          <p:cNvPr id="111" name="TextBox 110"/>
+          <p:cNvSpPr txBox="1"/>
+          <p:nvPr/>
+        </p:nvSpPr>
+        <p:spPr>
+          <a:xfrm>
+            <a:off x="3291840" y="5294376"/>
+            <a:ext cx="195072" cy="75438"/>
+          </a:xfrm>
+          <a:prstGeom prst="rect">
+            <a:avLst/>
+          </a:prstGeom>
+          <a:noFill/>
+        </p:spPr>
+        <p:txBody>
+          <a:bodyPr wrap="square" lIns="0" rIns="0" tIns="0" bIns="0" anchor="t">
+            <a:spAutoFit/>
+          </a:bodyPr>
+          <a:lstStyle/>
+          <a:p>
+            <a:pPr algn="l">
+              <a:lnSpc>
+                <a:spcPct val="100000"/>
+              </a:lnSpc>
+            </a:pPr>
+            <a:r>
+              <a:rPr sz="750" b="1">
+                <a:solidFill>
+                  <a:srgbClr val="B5333B"/>
+                </a:solidFill>
+                <a:latin typeface="微软雅黑"/>
+                <a:ea typeface="微软雅黑"/>
+                <a:cs typeface="微软雅黑"/>
+              </a:rPr>
+              <a:t>5</a:t>
+            </a:r>
+          </a:p>
+        </p:txBody>
+      </p:sp>
+      <p:sp>
+        <p:nvSpPr>
+          <p:cNvPr id="112" name="TextBox 111"/>
+          <p:cNvSpPr txBox="1"/>
+          <p:nvPr/>
+        </p:nvSpPr>
+        <p:spPr>
+          <a:xfrm>
+            <a:off x="3486912" y="5294376"/>
+            <a:ext cx="2487168" cy="75438"/>
+          </a:xfrm>
+          <a:prstGeom prst="rect">
+            <a:avLst/>
+          </a:prstGeom>
+          <a:noFill/>
+        </p:spPr>
+        <p:txBody>
+          <a:bodyPr wrap="square" lIns="0" rIns="0" tIns="0" bIns="0" anchor="t">
+            <a:spAutoFit/>
+          </a:bodyPr>
+          <a:lstStyle/>
+          <a:p>
+            <a:pPr algn="l">
+              <a:lnSpc>
+                <a:spcPct val="100000"/>
+              </a:lnSpc>
+            </a:pPr>
+            <a:r>
+              <a:rPr sz="780" b="1">
+                <a:solidFill>
+                  <a:srgbClr val="1A1A1C"/>
+                </a:solidFill>
+                <a:latin typeface="微软雅黑"/>
+                <a:ea typeface="微软雅黑"/>
+                <a:cs typeface="微软雅黑"/>
+              </a:rPr>
+              <a:t>github</a:t>
+            </a:r>
+          </a:p>
+        </p:txBody>
+      </p:sp>
+      <p:sp>
+        <p:nvSpPr>
+          <p:cNvPr id="113" name="TextBox 112"/>
+          <p:cNvSpPr txBox="1"/>
+          <p:nvPr/>
+        </p:nvSpPr>
+        <p:spPr>
+          <a:xfrm>
+            <a:off x="3486912" y="5376672"/>
+            <a:ext cx="2487168" cy="68580"/>
+          </a:xfrm>
+          <a:prstGeom prst="rect">
+            <a:avLst/>
+          </a:prstGeom>
+          <a:noFill/>
+        </p:spPr>
+        <p:txBody>
+          <a:bodyPr wrap="square" lIns="0" rIns="0" tIns="0" bIns="0" anchor="t">
+            <a:spAutoFit/>
+          </a:bodyPr>
+          <a:lstStyle/>
+          <a:p>
+            <a:pPr algn="l">
+              <a:lnSpc>
+                <a:spcPct val="100000"/>
+              </a:lnSpc>
+            </a:pPr>
+            <a:r>
+              <a:rPr sz="700" b="0">
+                <a:solidFill>
+                  <a:srgbClr val="5B616B"/>
+                </a:solidFill>
+                <a:latin typeface="微软雅黑"/>
+                <a:ea typeface="微软雅黑"/>
+                <a:cs typeface="微软雅黑"/>
+              </a:rPr>
+              <a:t>@steipete · 2,666</a:t>
+            </a:r>
+          </a:p>
+        </p:txBody>
+      </p:sp>
+      <p:sp>
+        <p:nvSpPr>
+          <p:cNvPr id="114" name="TextBox 113"/>
+          <p:cNvSpPr txBox="1"/>
+          <p:nvPr/>
+        </p:nvSpPr>
+        <p:spPr>
+          <a:xfrm>
+            <a:off x="6156960" y="4306824"/>
+            <a:ext cx="2682240" cy="96012"/>
+          </a:xfrm>
+          <a:prstGeom prst="rect">
+            <a:avLst/>
+          </a:prstGeom>
+          <a:noFill/>
+        </p:spPr>
+        <p:txBody>
+          <a:bodyPr wrap="square" lIns="0" rIns="0" tIns="0" bIns="0" anchor="t">
+            <a:spAutoFit/>
+          </a:bodyPr>
+          <a:lstStyle/>
+          <a:p>
+            <a:pPr algn="l">
+              <a:lnSpc>
+                <a:spcPct val="100000"/>
+              </a:lnSpc>
+            </a:pPr>
+            <a:r>
+              <a:rPr sz="860" b="1">
+                <a:solidFill>
+                  <a:srgbClr val="6B7785"/>
+                </a:solidFill>
+                <a:latin typeface="微软雅黑"/>
+                <a:ea typeface="微软雅黑"/>
+                <a:cs typeface="微软雅黑"/>
+              </a:rPr>
+              <a:t>外部网站 Top5</a:t>
+            </a:r>
+          </a:p>
+        </p:txBody>
+      </p:sp>
+      <p:sp>
+        <p:nvSpPr>
+          <p:cNvPr id="115" name="Rectangle 114"/>
           <p:cNvSpPr/>
           <p:nvPr/>
         </p:nvSpPr>
         <p:spPr>
           <a:xfrm>
-            <a:off x="7802880" y="5109210"/>
-            <a:ext cx="1828800" cy="75438"/>
-          </a:xfrm>
-          <a:prstGeom prst="roundRect">
-            <a:avLst>
-              <a:gd name="adj" fmla="val 40000"/>
-            </a:avLst>
+            <a:off x="6156960" y="4409694"/>
+            <a:ext cx="2682240" cy="5486"/>
+          </a:xfrm>
+          <a:prstGeom prst="rect">
+            <a:avLst/>
           </a:prstGeom>
           <a:solidFill>
-            <a:srgbClr val="EDEFF2"/>
+            <a:srgbClr val="E2E4E7"/>
           </a:solidFill>
           <a:ln>
             <a:noFill/>
@@ -35625,22 +36931,676 @@
       </p:sp>
       <p:sp>
         <p:nvSpPr>
-          <p:cNvPr id="84" name="Rounded Rectangle 83"/>
+          <p:cNvPr id="116" name="TextBox 115"/>
+          <p:cNvSpPr txBox="1"/>
+          <p:nvPr/>
+        </p:nvSpPr>
+        <p:spPr>
+          <a:xfrm>
+            <a:off x="6156960" y="4416552"/>
+            <a:ext cx="195072" cy="75438"/>
+          </a:xfrm>
+          <a:prstGeom prst="rect">
+            <a:avLst/>
+          </a:prstGeom>
+          <a:noFill/>
+        </p:spPr>
+        <p:txBody>
+          <a:bodyPr wrap="square" lIns="0" rIns="0" tIns="0" bIns="0" anchor="t">
+            <a:spAutoFit/>
+          </a:bodyPr>
+          <a:lstStyle/>
+          <a:p>
+            <a:pPr algn="l">
+              <a:lnSpc>
+                <a:spcPct val="100000"/>
+              </a:lnSpc>
+            </a:pPr>
+            <a:r>
+              <a:rPr sz="750" b="1">
+                <a:solidFill>
+                  <a:srgbClr val="B5333B"/>
+                </a:solidFill>
+                <a:latin typeface="微软雅黑"/>
+                <a:ea typeface="微软雅黑"/>
+                <a:cs typeface="微软雅黑"/>
+              </a:rPr>
+              <a:t>1</a:t>
+            </a:r>
+          </a:p>
+        </p:txBody>
+      </p:sp>
+      <p:sp>
+        <p:nvSpPr>
+          <p:cNvPr id="117" name="TextBox 116"/>
+          <p:cNvSpPr txBox="1"/>
+          <p:nvPr/>
+        </p:nvSpPr>
+        <p:spPr>
+          <a:xfrm>
+            <a:off x="6352032" y="4416552"/>
+            <a:ext cx="2487168" cy="75438"/>
+          </a:xfrm>
+          <a:prstGeom prst="rect">
+            <a:avLst/>
+          </a:prstGeom>
+          <a:noFill/>
+        </p:spPr>
+        <p:txBody>
+          <a:bodyPr wrap="square" lIns="0" rIns="0" tIns="0" bIns="0" anchor="t">
+            <a:spAutoFit/>
+          </a:bodyPr>
+          <a:lstStyle/>
+          <a:p>
+            <a:pPr algn="l">
+              <a:lnSpc>
+                <a:spcPct val="100000"/>
+              </a:lnSpc>
+            </a:pPr>
+            <a:r>
+              <a:rPr sz="780" b="1">
+                <a:solidFill>
+                  <a:srgbClr val="1A1A1C"/>
+                </a:solidFill>
+                <a:latin typeface="微软雅黑"/>
+                <a:ea typeface="微软雅黑"/>
+                <a:cs typeface="微软雅黑"/>
+              </a:rPr>
+              <a:t>小包公智能法律专家</a:t>
+            </a:r>
+          </a:p>
+        </p:txBody>
+      </p:sp>
+      <p:sp>
+        <p:nvSpPr>
+          <p:cNvPr id="118" name="TextBox 117"/>
+          <p:cNvSpPr txBox="1"/>
+          <p:nvPr/>
+        </p:nvSpPr>
+        <p:spPr>
+          <a:xfrm>
+            <a:off x="6352032" y="4498848"/>
+            <a:ext cx="2487168" cy="68580"/>
+          </a:xfrm>
+          <a:prstGeom prst="rect">
+            <a:avLst/>
+          </a:prstGeom>
+          <a:noFill/>
+        </p:spPr>
+        <p:txBody>
+          <a:bodyPr wrap="square" lIns="0" rIns="0" tIns="0" bIns="0" anchor="t">
+            <a:spAutoFit/>
+          </a:bodyPr>
+          <a:lstStyle/>
+          <a:p>
+            <a:pPr algn="l">
+              <a:lnSpc>
+                <a:spcPct val="100000"/>
+              </a:lnSpc>
+            </a:pPr>
+            <a:r>
+              <a:rPr sz="700" b="0">
+                <a:solidFill>
+                  <a:srgbClr val="5B616B"/>
+                </a:solidFill>
+                <a:latin typeface="微软雅黑"/>
+                <a:ea typeface="微软雅黑"/>
+                <a:cs typeface="微软雅黑"/>
+              </a:rPr>
+              <a:t>xbgai123 · 27,742</a:t>
+            </a:r>
+          </a:p>
+        </p:txBody>
+      </p:sp>
+      <p:sp>
+        <p:nvSpPr>
+          <p:cNvPr id="119" name="TextBox 118"/>
+          <p:cNvSpPr txBox="1"/>
+          <p:nvPr/>
+        </p:nvSpPr>
+        <p:spPr>
+          <a:xfrm>
+            <a:off x="6156960" y="4636008"/>
+            <a:ext cx="195072" cy="75438"/>
+          </a:xfrm>
+          <a:prstGeom prst="rect">
+            <a:avLst/>
+          </a:prstGeom>
+          <a:noFill/>
+        </p:spPr>
+        <p:txBody>
+          <a:bodyPr wrap="square" lIns="0" rIns="0" tIns="0" bIns="0" anchor="t">
+            <a:spAutoFit/>
+          </a:bodyPr>
+          <a:lstStyle/>
+          <a:p>
+            <a:pPr algn="l">
+              <a:lnSpc>
+                <a:spcPct val="100000"/>
+              </a:lnSpc>
+            </a:pPr>
+            <a:r>
+              <a:rPr sz="750" b="1">
+                <a:solidFill>
+                  <a:srgbClr val="B5333B"/>
+                </a:solidFill>
+                <a:latin typeface="微软雅黑"/>
+                <a:ea typeface="微软雅黑"/>
+                <a:cs typeface="微软雅黑"/>
+              </a:rPr>
+              <a:t>2</a:t>
+            </a:r>
+          </a:p>
+        </p:txBody>
+      </p:sp>
+      <p:sp>
+        <p:nvSpPr>
+          <p:cNvPr id="120" name="TextBox 119"/>
+          <p:cNvSpPr txBox="1"/>
+          <p:nvPr/>
+        </p:nvSpPr>
+        <p:spPr>
+          <a:xfrm>
+            <a:off x="6352032" y="4636008"/>
+            <a:ext cx="2487168" cy="75438"/>
+          </a:xfrm>
+          <a:prstGeom prst="rect">
+            <a:avLst/>
+          </a:prstGeom>
+          <a:noFill/>
+        </p:spPr>
+        <p:txBody>
+          <a:bodyPr wrap="square" lIns="0" rIns="0" tIns="0" bIns="0" anchor="t">
+            <a:spAutoFit/>
+          </a:bodyPr>
+          <a:lstStyle/>
+          <a:p>
+            <a:pPr algn="l">
+              <a:lnSpc>
+                <a:spcPct val="100000"/>
+              </a:lnSpc>
+            </a:pPr>
+            <a:r>
+              <a:rPr sz="780" b="1">
+                <a:solidFill>
+                  <a:srgbClr val="1A1A1C"/>
+                </a:solidFill>
+                <a:latin typeface="微软雅黑"/>
+                <a:ea typeface="微软雅黑"/>
+                <a:cs typeface="微软雅黑"/>
+              </a:rPr>
+              <a:t>小包公智能合同起草</a:t>
+            </a:r>
+          </a:p>
+        </p:txBody>
+      </p:sp>
+      <p:sp>
+        <p:nvSpPr>
+          <p:cNvPr id="121" name="TextBox 120"/>
+          <p:cNvSpPr txBox="1"/>
+          <p:nvPr/>
+        </p:nvSpPr>
+        <p:spPr>
+          <a:xfrm>
+            <a:off x="6352032" y="4718304"/>
+            <a:ext cx="2487168" cy="68580"/>
+          </a:xfrm>
+          <a:prstGeom prst="rect">
+            <a:avLst/>
+          </a:prstGeom>
+          <a:noFill/>
+        </p:spPr>
+        <p:txBody>
+          <a:bodyPr wrap="square" lIns="0" rIns="0" tIns="0" bIns="0" anchor="t">
+            <a:spAutoFit/>
+          </a:bodyPr>
+          <a:lstStyle/>
+          <a:p>
+            <a:pPr algn="l">
+              <a:lnSpc>
+                <a:spcPct val="100000"/>
+              </a:lnSpc>
+            </a:pPr>
+            <a:r>
+              <a:rPr sz="700" b="0">
+                <a:solidFill>
+                  <a:srgbClr val="5B616B"/>
+                </a:solidFill>
+                <a:latin typeface="微软雅黑"/>
+                <a:ea typeface="微软雅黑"/>
+                <a:cs typeface="微软雅黑"/>
+              </a:rPr>
+              <a:t>xbgai123 · 26,770</a:t>
+            </a:r>
+          </a:p>
+        </p:txBody>
+      </p:sp>
+      <p:sp>
+        <p:nvSpPr>
+          <p:cNvPr id="122" name="TextBox 121"/>
+          <p:cNvSpPr txBox="1"/>
+          <p:nvPr/>
+        </p:nvSpPr>
+        <p:spPr>
+          <a:xfrm>
+            <a:off x="6156960" y="4855464"/>
+            <a:ext cx="195072" cy="75438"/>
+          </a:xfrm>
+          <a:prstGeom prst="rect">
+            <a:avLst/>
+          </a:prstGeom>
+          <a:noFill/>
+        </p:spPr>
+        <p:txBody>
+          <a:bodyPr wrap="square" lIns="0" rIns="0" tIns="0" bIns="0" anchor="t">
+            <a:spAutoFit/>
+          </a:bodyPr>
+          <a:lstStyle/>
+          <a:p>
+            <a:pPr algn="l">
+              <a:lnSpc>
+                <a:spcPct val="100000"/>
+              </a:lnSpc>
+            </a:pPr>
+            <a:r>
+              <a:rPr sz="750" b="1">
+                <a:solidFill>
+                  <a:srgbClr val="B5333B"/>
+                </a:solidFill>
+                <a:latin typeface="微软雅黑"/>
+                <a:ea typeface="微软雅黑"/>
+                <a:cs typeface="微软雅黑"/>
+              </a:rPr>
+              <a:t>3</a:t>
+            </a:r>
+          </a:p>
+        </p:txBody>
+      </p:sp>
+      <p:sp>
+        <p:nvSpPr>
+          <p:cNvPr id="123" name="TextBox 122"/>
+          <p:cNvSpPr txBox="1"/>
+          <p:nvPr/>
+        </p:nvSpPr>
+        <p:spPr>
+          <a:xfrm>
+            <a:off x="6352032" y="4855464"/>
+            <a:ext cx="2487168" cy="75438"/>
+          </a:xfrm>
+          <a:prstGeom prst="rect">
+            <a:avLst/>
+          </a:prstGeom>
+          <a:noFill/>
+        </p:spPr>
+        <p:txBody>
+          <a:bodyPr wrap="square" lIns="0" rIns="0" tIns="0" bIns="0" anchor="t">
+            <a:spAutoFit/>
+          </a:bodyPr>
+          <a:lstStyle/>
+          <a:p>
+            <a:pPr algn="l">
+              <a:lnSpc>
+                <a:spcPct val="100000"/>
+              </a:lnSpc>
+            </a:pPr>
+            <a:r>
+              <a:rPr sz="780" b="1">
+                <a:solidFill>
+                  <a:srgbClr val="1A1A1C"/>
+                </a:solidFill>
+                <a:latin typeface="微软雅黑"/>
+                <a:ea typeface="微软雅黑"/>
+                <a:cs typeface="微软雅黑"/>
+              </a:rPr>
+              <a:t>小包公智能合同审查</a:t>
+            </a:r>
+          </a:p>
+        </p:txBody>
+      </p:sp>
+      <p:sp>
+        <p:nvSpPr>
+          <p:cNvPr id="124" name="TextBox 123"/>
+          <p:cNvSpPr txBox="1"/>
+          <p:nvPr/>
+        </p:nvSpPr>
+        <p:spPr>
+          <a:xfrm>
+            <a:off x="6352032" y="4937760"/>
+            <a:ext cx="2487168" cy="68580"/>
+          </a:xfrm>
+          <a:prstGeom prst="rect">
+            <a:avLst/>
+          </a:prstGeom>
+          <a:noFill/>
+        </p:spPr>
+        <p:txBody>
+          <a:bodyPr wrap="square" lIns="0" rIns="0" tIns="0" bIns="0" anchor="t">
+            <a:spAutoFit/>
+          </a:bodyPr>
+          <a:lstStyle/>
+          <a:p>
+            <a:pPr algn="l">
+              <a:lnSpc>
+                <a:spcPct val="100000"/>
+              </a:lnSpc>
+            </a:pPr>
+            <a:r>
+              <a:rPr sz="700" b="0">
+                <a:solidFill>
+                  <a:srgbClr val="5B616B"/>
+                </a:solidFill>
+                <a:latin typeface="微软雅黑"/>
+                <a:ea typeface="微软雅黑"/>
+                <a:cs typeface="微软雅黑"/>
+              </a:rPr>
+              <a:t>xbgai123 · 10,637</a:t>
+            </a:r>
+          </a:p>
+        </p:txBody>
+      </p:sp>
+      <p:sp>
+        <p:nvSpPr>
+          <p:cNvPr id="125" name="TextBox 124"/>
+          <p:cNvSpPr txBox="1"/>
+          <p:nvPr/>
+        </p:nvSpPr>
+        <p:spPr>
+          <a:xfrm>
+            <a:off x="6156960" y="5074920"/>
+            <a:ext cx="195072" cy="75438"/>
+          </a:xfrm>
+          <a:prstGeom prst="rect">
+            <a:avLst/>
+          </a:prstGeom>
+          <a:noFill/>
+        </p:spPr>
+        <p:txBody>
+          <a:bodyPr wrap="square" lIns="0" rIns="0" tIns="0" bIns="0" anchor="t">
+            <a:spAutoFit/>
+          </a:bodyPr>
+          <a:lstStyle/>
+          <a:p>
+            <a:pPr algn="l">
+              <a:lnSpc>
+                <a:spcPct val="100000"/>
+              </a:lnSpc>
+            </a:pPr>
+            <a:r>
+              <a:rPr sz="750" b="1">
+                <a:solidFill>
+                  <a:srgbClr val="B5333B"/>
+                </a:solidFill>
+                <a:latin typeface="微软雅黑"/>
+                <a:ea typeface="微软雅黑"/>
+                <a:cs typeface="微软雅黑"/>
+              </a:rPr>
+              <a:t>4</a:t>
+            </a:r>
+          </a:p>
+        </p:txBody>
+      </p:sp>
+      <p:sp>
+        <p:nvSpPr>
+          <p:cNvPr id="126" name="TextBox 125"/>
+          <p:cNvSpPr txBox="1"/>
+          <p:nvPr/>
+        </p:nvSpPr>
+        <p:spPr>
+          <a:xfrm>
+            <a:off x="6352032" y="5074920"/>
+            <a:ext cx="2487168" cy="75438"/>
+          </a:xfrm>
+          <a:prstGeom prst="rect">
+            <a:avLst/>
+          </a:prstGeom>
+          <a:noFill/>
+        </p:spPr>
+        <p:txBody>
+          <a:bodyPr wrap="square" lIns="0" rIns="0" tIns="0" bIns="0" anchor="t">
+            <a:spAutoFit/>
+          </a:bodyPr>
+          <a:lstStyle/>
+          <a:p>
+            <a:pPr algn="l">
+              <a:lnSpc>
+                <a:spcPct val="100000"/>
+              </a:lnSpc>
+            </a:pPr>
+            <a:r>
+              <a:rPr sz="780" b="1">
+                <a:solidFill>
+                  <a:srgbClr val="1A1A1C"/>
+                </a:solidFill>
+                <a:latin typeface="微软雅黑"/>
+                <a:ea typeface="微软雅黑"/>
+                <a:cs typeface="微软雅黑"/>
+              </a:rPr>
+              <a:t>小包公合同自动纠错工具</a:t>
+            </a:r>
+          </a:p>
+        </p:txBody>
+      </p:sp>
+      <p:sp>
+        <p:nvSpPr>
+          <p:cNvPr id="127" name="TextBox 126"/>
+          <p:cNvSpPr txBox="1"/>
+          <p:nvPr/>
+        </p:nvSpPr>
+        <p:spPr>
+          <a:xfrm>
+            <a:off x="6352032" y="5157216"/>
+            <a:ext cx="2487168" cy="68580"/>
+          </a:xfrm>
+          <a:prstGeom prst="rect">
+            <a:avLst/>
+          </a:prstGeom>
+          <a:noFill/>
+        </p:spPr>
+        <p:txBody>
+          <a:bodyPr wrap="square" lIns="0" rIns="0" tIns="0" bIns="0" anchor="t">
+            <a:spAutoFit/>
+          </a:bodyPr>
+          <a:lstStyle/>
+          <a:p>
+            <a:pPr algn="l">
+              <a:lnSpc>
+                <a:spcPct val="100000"/>
+              </a:lnSpc>
+            </a:pPr>
+            <a:r>
+              <a:rPr sz="700" b="0">
+                <a:solidFill>
+                  <a:srgbClr val="5B616B"/>
+                </a:solidFill>
+                <a:latin typeface="微软雅黑"/>
+                <a:ea typeface="微软雅黑"/>
+                <a:cs typeface="微软雅黑"/>
+              </a:rPr>
+              <a:t>xbgai123 · 10,566</a:t>
+            </a:r>
+          </a:p>
+        </p:txBody>
+      </p:sp>
+      <p:sp>
+        <p:nvSpPr>
+          <p:cNvPr id="128" name="TextBox 127"/>
+          <p:cNvSpPr txBox="1"/>
+          <p:nvPr/>
+        </p:nvSpPr>
+        <p:spPr>
+          <a:xfrm>
+            <a:off x="6156960" y="5294376"/>
+            <a:ext cx="195072" cy="75438"/>
+          </a:xfrm>
+          <a:prstGeom prst="rect">
+            <a:avLst/>
+          </a:prstGeom>
+          <a:noFill/>
+        </p:spPr>
+        <p:txBody>
+          <a:bodyPr wrap="square" lIns="0" rIns="0" tIns="0" bIns="0" anchor="t">
+            <a:spAutoFit/>
+          </a:bodyPr>
+          <a:lstStyle/>
+          <a:p>
+            <a:pPr algn="l">
+              <a:lnSpc>
+                <a:spcPct val="100000"/>
+              </a:lnSpc>
+            </a:pPr>
+            <a:r>
+              <a:rPr sz="750" b="1">
+                <a:solidFill>
+                  <a:srgbClr val="B5333B"/>
+                </a:solidFill>
+                <a:latin typeface="微软雅黑"/>
+                <a:ea typeface="微软雅黑"/>
+                <a:cs typeface="微软雅黑"/>
+              </a:rPr>
+              <a:t>5</a:t>
+            </a:r>
+          </a:p>
+        </p:txBody>
+      </p:sp>
+      <p:sp>
+        <p:nvSpPr>
+          <p:cNvPr id="129" name="TextBox 128"/>
+          <p:cNvSpPr txBox="1"/>
+          <p:nvPr/>
+        </p:nvSpPr>
+        <p:spPr>
+          <a:xfrm>
+            <a:off x="6352032" y="5294376"/>
+            <a:ext cx="2487168" cy="75438"/>
+          </a:xfrm>
+          <a:prstGeom prst="rect">
+            <a:avLst/>
+          </a:prstGeom>
+          <a:noFill/>
+        </p:spPr>
+        <p:txBody>
+          <a:bodyPr wrap="square" lIns="0" rIns="0" tIns="0" bIns="0" anchor="t">
+            <a:spAutoFit/>
+          </a:bodyPr>
+          <a:lstStyle/>
+          <a:p>
+            <a:pPr algn="l">
+              <a:lnSpc>
+                <a:spcPct val="100000"/>
+              </a:lnSpc>
+            </a:pPr>
+            <a:r>
+              <a:rPr sz="780" b="1">
+                <a:solidFill>
+                  <a:srgbClr val="1A1A1C"/>
+                </a:solidFill>
+                <a:latin typeface="微软雅黑"/>
+                <a:ea typeface="微软雅黑"/>
+                <a:cs typeface="微软雅黑"/>
+              </a:rPr>
+              <a:t>小包公合同自动排版工具</a:t>
+            </a:r>
+          </a:p>
+        </p:txBody>
+      </p:sp>
+      <p:sp>
+        <p:nvSpPr>
+          <p:cNvPr id="130" name="TextBox 129"/>
+          <p:cNvSpPr txBox="1"/>
+          <p:nvPr/>
+        </p:nvSpPr>
+        <p:spPr>
+          <a:xfrm>
+            <a:off x="6352032" y="5376672"/>
+            <a:ext cx="2487168" cy="68580"/>
+          </a:xfrm>
+          <a:prstGeom prst="rect">
+            <a:avLst/>
+          </a:prstGeom>
+          <a:noFill/>
+        </p:spPr>
+        <p:txBody>
+          <a:bodyPr wrap="square" lIns="0" rIns="0" tIns="0" bIns="0" anchor="t">
+            <a:spAutoFit/>
+          </a:bodyPr>
+          <a:lstStyle/>
+          <a:p>
+            <a:pPr algn="l">
+              <a:lnSpc>
+                <a:spcPct val="100000"/>
+              </a:lnSpc>
+            </a:pPr>
+            <a:r>
+              <a:rPr sz="700" b="0">
+                <a:solidFill>
+                  <a:srgbClr val="5B616B"/>
+                </a:solidFill>
+                <a:latin typeface="微软雅黑"/>
+                <a:ea typeface="微软雅黑"/>
+                <a:cs typeface="微软雅黑"/>
+              </a:rPr>
+              <a:t>xbgai123 · 10,555</a:t>
+            </a:r>
+          </a:p>
+        </p:txBody>
+      </p:sp>
+      <p:sp>
+        <p:nvSpPr>
+          <p:cNvPr id="131" name="TextBox 130"/>
+          <p:cNvSpPr txBox="1"/>
+          <p:nvPr/>
+        </p:nvSpPr>
+        <p:spPr>
+          <a:xfrm>
+            <a:off x="9022080" y="4306824"/>
+            <a:ext cx="2682240" cy="96012"/>
+          </a:xfrm>
+          <a:prstGeom prst="rect">
+            <a:avLst/>
+          </a:prstGeom>
+          <a:noFill/>
+        </p:spPr>
+        <p:txBody>
+          <a:bodyPr wrap="square" lIns="0" rIns="0" tIns="0" bIns="0" anchor="t">
+            <a:spAutoFit/>
+          </a:bodyPr>
+          <a:lstStyle/>
+          <a:p>
+            <a:pPr algn="l">
+              <a:lnSpc>
+                <a:spcPct val="100000"/>
+              </a:lnSpc>
+            </a:pPr>
+            <a:r>
+              <a:rPr sz="860" b="1">
+                <a:solidFill>
+                  <a:srgbClr val="8B8E94"/>
+                </a:solidFill>
+                <a:latin typeface="微软雅黑"/>
+                <a:ea typeface="微软雅黑"/>
+                <a:cs typeface="微软雅黑"/>
+              </a:rPr>
+              <a:t>个人上传 Top5</a:t>
+            </a:r>
+          </a:p>
+        </p:txBody>
+      </p:sp>
+      <p:sp>
+        <p:nvSpPr>
+          <p:cNvPr id="132" name="Rectangle 131"/>
           <p:cNvSpPr/>
           <p:nvPr/>
         </p:nvSpPr>
         <p:spPr>
           <a:xfrm>
-            <a:off x="7802880" y="5109210"/>
-            <a:ext cx="513906" cy="75438"/>
-          </a:xfrm>
-          <a:prstGeom prst="roundRect">
-            <a:avLst>
-              <a:gd name="adj" fmla="val 40000"/>
-            </a:avLst>
+            <a:off x="9022080" y="4409694"/>
+            <a:ext cx="2682240" cy="5486"/>
+          </a:xfrm>
+          <a:prstGeom prst="rect">
+            <a:avLst/>
           </a:prstGeom>
           <a:solidFill>
-            <a:srgbClr val="9AA1AA"/>
+            <a:srgbClr val="E2E4E7"/>
           </a:solidFill>
           <a:ln>
             <a:noFill/>
@@ -35671,14 +37631,14 @@
       </p:sp>
       <p:sp>
         <p:nvSpPr>
-          <p:cNvPr id="85" name="TextBox 84"/>
-          <p:cNvSpPr txBox="1"/>
-          <p:nvPr/>
-        </p:nvSpPr>
-        <p:spPr>
-          <a:xfrm>
-            <a:off x="9814560" y="5081778"/>
-            <a:ext cx="731520" cy="137160"/>
+          <p:cNvPr id="133" name="TextBox 132"/>
+          <p:cNvSpPr txBox="1"/>
+          <p:nvPr/>
+        </p:nvSpPr>
+        <p:spPr>
+          <a:xfrm>
+            <a:off x="9022080" y="4416552"/>
+            <a:ext cx="195072" cy="75438"/>
           </a:xfrm>
           <a:prstGeom prst="rect">
             <a:avLst/>
@@ -35697,29 +37657,29 @@
               </a:lnSpc>
             </a:pPr>
             <a:r>
-              <a:rPr sz="850" b="0">
-                <a:solidFill>
-                  <a:srgbClr val="1A1A1C"/>
-                </a:solidFill>
-                <a:latin typeface="微软雅黑"/>
-                <a:ea typeface="微软雅黑"/>
-                <a:cs typeface="微软雅黑"/>
-              </a:rPr>
-              <a:t>145</a:t>
-            </a:r>
-          </a:p>
-        </p:txBody>
-      </p:sp>
-      <p:sp>
-        <p:nvSpPr>
-          <p:cNvPr id="86" name="TextBox 85"/>
-          <p:cNvSpPr txBox="1"/>
-          <p:nvPr/>
-        </p:nvSpPr>
-        <p:spPr>
-          <a:xfrm>
-            <a:off x="6339840" y="5314950"/>
-            <a:ext cx="5608320" cy="137160"/>
+              <a:rPr sz="750" b="1">
+                <a:solidFill>
+                  <a:srgbClr val="B5333B"/>
+                </a:solidFill>
+                <a:latin typeface="微软雅黑"/>
+                <a:ea typeface="微软雅黑"/>
+                <a:cs typeface="微软雅黑"/>
+              </a:rPr>
+              <a:t>1</a:t>
+            </a:r>
+          </a:p>
+        </p:txBody>
+      </p:sp>
+      <p:sp>
+        <p:nvSpPr>
+          <p:cNvPr id="134" name="TextBox 133"/>
+          <p:cNvSpPr txBox="1"/>
+          <p:nvPr/>
+        </p:nvSpPr>
+        <p:spPr>
+          <a:xfrm>
+            <a:off x="9217152" y="4416552"/>
+            <a:ext cx="2487168" cy="75438"/>
           </a:xfrm>
           <a:prstGeom prst="rect">
             <a:avLst/>
@@ -35738,15 +37698,595 @@
               </a:lnSpc>
             </a:pPr>
             <a:r>
-              <a:rPr sz="850" b="0">
-                <a:solidFill>
-                  <a:srgbClr val="8B8E94"/>
-                </a:solidFill>
-                <a:latin typeface="微软雅黑"/>
-                <a:ea typeface="微软雅黑"/>
-                <a:cs typeface="微软雅黑"/>
-              </a:rPr>
-              <a:t>最高异常：1.15M 下载 / 592 浏览；下载不宜直接当用户数。</a:t>
+              <a:rPr sz="780" b="1">
+                <a:solidFill>
+                  <a:srgbClr val="1A1A1C"/>
+                </a:solidFill>
+                <a:latin typeface="微软雅黑"/>
+                <a:ea typeface="微软雅黑"/>
+                <a:cs typeface="微软雅黑"/>
+              </a:rPr>
+              <a:t>床垫试睡权益顾问</a:t>
+            </a:r>
+          </a:p>
+        </p:txBody>
+      </p:sp>
+      <p:sp>
+        <p:nvSpPr>
+          <p:cNvPr id="135" name="TextBox 134"/>
+          <p:cNvSpPr txBox="1"/>
+          <p:nvPr/>
+        </p:nvSpPr>
+        <p:spPr>
+          <a:xfrm>
+            <a:off x="9217152" y="4498848"/>
+            <a:ext cx="2487168" cy="68580"/>
+          </a:xfrm>
+          <a:prstGeom prst="rect">
+            <a:avLst/>
+          </a:prstGeom>
+          <a:noFill/>
+        </p:spPr>
+        <p:txBody>
+          <a:bodyPr wrap="square" lIns="0" rIns="0" tIns="0" bIns="0" anchor="t">
+            <a:spAutoFit/>
+          </a:bodyPr>
+          <a:lstStyle/>
+          <a:p>
+            <a:pPr algn="l">
+              <a:lnSpc>
+                <a:spcPct val="100000"/>
+              </a:lnSpc>
+            </a:pPr>
+            <a:r>
+              <a:rPr sz="700" b="0">
+                <a:solidFill>
+                  <a:srgbClr val="5B616B"/>
+                </a:solidFill>
+                <a:latin typeface="微软雅黑"/>
+                <a:ea typeface="微软雅黑"/>
+                <a:cs typeface="微软雅黑"/>
+              </a:rPr>
+              <a:t>alv123 · 13,082</a:t>
+            </a:r>
+          </a:p>
+        </p:txBody>
+      </p:sp>
+      <p:sp>
+        <p:nvSpPr>
+          <p:cNvPr id="136" name="TextBox 135"/>
+          <p:cNvSpPr txBox="1"/>
+          <p:nvPr/>
+        </p:nvSpPr>
+        <p:spPr>
+          <a:xfrm>
+            <a:off x="9022080" y="4636008"/>
+            <a:ext cx="195072" cy="75438"/>
+          </a:xfrm>
+          <a:prstGeom prst="rect">
+            <a:avLst/>
+          </a:prstGeom>
+          <a:noFill/>
+        </p:spPr>
+        <p:txBody>
+          <a:bodyPr wrap="square" lIns="0" rIns="0" tIns="0" bIns="0" anchor="t">
+            <a:spAutoFit/>
+          </a:bodyPr>
+          <a:lstStyle/>
+          <a:p>
+            <a:pPr algn="l">
+              <a:lnSpc>
+                <a:spcPct val="100000"/>
+              </a:lnSpc>
+            </a:pPr>
+            <a:r>
+              <a:rPr sz="750" b="1">
+                <a:solidFill>
+                  <a:srgbClr val="B5333B"/>
+                </a:solidFill>
+                <a:latin typeface="微软雅黑"/>
+                <a:ea typeface="微软雅黑"/>
+                <a:cs typeface="微软雅黑"/>
+              </a:rPr>
+              <a:t>2</a:t>
+            </a:r>
+          </a:p>
+        </p:txBody>
+      </p:sp>
+      <p:sp>
+        <p:nvSpPr>
+          <p:cNvPr id="137" name="TextBox 136"/>
+          <p:cNvSpPr txBox="1"/>
+          <p:nvPr/>
+        </p:nvSpPr>
+        <p:spPr>
+          <a:xfrm>
+            <a:off x="9217152" y="4636008"/>
+            <a:ext cx="2487168" cy="75438"/>
+          </a:xfrm>
+          <a:prstGeom prst="rect">
+            <a:avLst/>
+          </a:prstGeom>
+          <a:noFill/>
+        </p:spPr>
+        <p:txBody>
+          <a:bodyPr wrap="square" lIns="0" rIns="0" tIns="0" bIns="0" anchor="t">
+            <a:spAutoFit/>
+          </a:bodyPr>
+          <a:lstStyle/>
+          <a:p>
+            <a:pPr algn="l">
+              <a:lnSpc>
+                <a:spcPct val="100000"/>
+              </a:lnSpc>
+            </a:pPr>
+            <a:r>
+              <a:rPr sz="780" b="1">
+                <a:solidFill>
+                  <a:srgbClr val="1A1A1C"/>
+                </a:solidFill>
+                <a:latin typeface="微软雅黑"/>
+                <a:ea typeface="微软雅黑"/>
+                <a:cs typeface="微软雅黑"/>
+              </a:rPr>
+              <a:t>新房低异味床垫顾问</a:t>
+            </a:r>
+          </a:p>
+        </p:txBody>
+      </p:sp>
+      <p:sp>
+        <p:nvSpPr>
+          <p:cNvPr id="138" name="TextBox 137"/>
+          <p:cNvSpPr txBox="1"/>
+          <p:nvPr/>
+        </p:nvSpPr>
+        <p:spPr>
+          <a:xfrm>
+            <a:off x="9217152" y="4718304"/>
+            <a:ext cx="2487168" cy="68580"/>
+          </a:xfrm>
+          <a:prstGeom prst="rect">
+            <a:avLst/>
+          </a:prstGeom>
+          <a:noFill/>
+        </p:spPr>
+        <p:txBody>
+          <a:bodyPr wrap="square" lIns="0" rIns="0" tIns="0" bIns="0" anchor="t">
+            <a:spAutoFit/>
+          </a:bodyPr>
+          <a:lstStyle/>
+          <a:p>
+            <a:pPr algn="l">
+              <a:lnSpc>
+                <a:spcPct val="100000"/>
+              </a:lnSpc>
+            </a:pPr>
+            <a:r>
+              <a:rPr sz="700" b="0">
+                <a:solidFill>
+                  <a:srgbClr val="5B616B"/>
+                </a:solidFill>
+                <a:latin typeface="微软雅黑"/>
+                <a:ea typeface="微软雅黑"/>
+                <a:cs typeface="微软雅黑"/>
+              </a:rPr>
+              <a:t>alv123 · 12,583</a:t>
+            </a:r>
+          </a:p>
+        </p:txBody>
+      </p:sp>
+      <p:sp>
+        <p:nvSpPr>
+          <p:cNvPr id="139" name="TextBox 138"/>
+          <p:cNvSpPr txBox="1"/>
+          <p:nvPr/>
+        </p:nvSpPr>
+        <p:spPr>
+          <a:xfrm>
+            <a:off x="9022080" y="4855464"/>
+            <a:ext cx="195072" cy="75438"/>
+          </a:xfrm>
+          <a:prstGeom prst="rect">
+            <a:avLst/>
+          </a:prstGeom>
+          <a:noFill/>
+        </p:spPr>
+        <p:txBody>
+          <a:bodyPr wrap="square" lIns="0" rIns="0" tIns="0" bIns="0" anchor="t">
+            <a:spAutoFit/>
+          </a:bodyPr>
+          <a:lstStyle/>
+          <a:p>
+            <a:pPr algn="l">
+              <a:lnSpc>
+                <a:spcPct val="100000"/>
+              </a:lnSpc>
+            </a:pPr>
+            <a:r>
+              <a:rPr sz="750" b="1">
+                <a:solidFill>
+                  <a:srgbClr val="B5333B"/>
+                </a:solidFill>
+                <a:latin typeface="微软雅黑"/>
+                <a:ea typeface="微软雅黑"/>
+                <a:cs typeface="微软雅黑"/>
+              </a:rPr>
+              <a:t>3</a:t>
+            </a:r>
+          </a:p>
+        </p:txBody>
+      </p:sp>
+      <p:sp>
+        <p:nvSpPr>
+          <p:cNvPr id="140" name="TextBox 139"/>
+          <p:cNvSpPr txBox="1"/>
+          <p:nvPr/>
+        </p:nvSpPr>
+        <p:spPr>
+          <a:xfrm>
+            <a:off x="9217152" y="4855464"/>
+            <a:ext cx="2487168" cy="75438"/>
+          </a:xfrm>
+          <a:prstGeom prst="rect">
+            <a:avLst/>
+          </a:prstGeom>
+          <a:noFill/>
+        </p:spPr>
+        <p:txBody>
+          <a:bodyPr wrap="square" lIns="0" rIns="0" tIns="0" bIns="0" anchor="t">
+            <a:spAutoFit/>
+          </a:bodyPr>
+          <a:lstStyle/>
+          <a:p>
+            <a:pPr algn="l">
+              <a:lnSpc>
+                <a:spcPct val="100000"/>
+              </a:lnSpc>
+            </a:pPr>
+            <a:r>
+              <a:rPr sz="780" b="1">
+                <a:solidFill>
+                  <a:srgbClr val="1A1A1C"/>
+                </a:solidFill>
+                <a:latin typeface="微软雅黑"/>
+                <a:ea typeface="微软雅黑"/>
+                <a:cs typeface="微软雅黑"/>
+              </a:rPr>
+              <a:t>招标中标数据查询API，标讯日更新30万+</a:t>
+            </a:r>
+          </a:p>
+        </p:txBody>
+      </p:sp>
+      <p:sp>
+        <p:nvSpPr>
+          <p:cNvPr id="141" name="TextBox 140"/>
+          <p:cNvSpPr txBox="1"/>
+          <p:nvPr/>
+        </p:nvSpPr>
+        <p:spPr>
+          <a:xfrm>
+            <a:off x="9217152" y="4937760"/>
+            <a:ext cx="2487168" cy="68580"/>
+          </a:xfrm>
+          <a:prstGeom prst="rect">
+            <a:avLst/>
+          </a:prstGeom>
+          <a:noFill/>
+        </p:spPr>
+        <p:txBody>
+          <a:bodyPr wrap="square" lIns="0" rIns="0" tIns="0" bIns="0" anchor="t">
+            <a:spAutoFit/>
+          </a:bodyPr>
+          <a:lstStyle/>
+          <a:p>
+            <a:pPr algn="l">
+              <a:lnSpc>
+                <a:spcPct val="100000"/>
+              </a:lnSpc>
+            </a:pPr>
+            <a:r>
+              <a:rPr sz="700" b="0">
+                <a:solidFill>
+                  <a:srgbClr val="5B616B"/>
+                </a:solidFill>
+                <a:latin typeface="微软雅黑"/>
+                <a:ea typeface="微软雅黑"/>
+                <a:cs typeface="微软雅黑"/>
+              </a:rPr>
+              <a:t>tingting0980 · 11,312</a:t>
+            </a:r>
+          </a:p>
+        </p:txBody>
+      </p:sp>
+      <p:sp>
+        <p:nvSpPr>
+          <p:cNvPr id="142" name="TextBox 141"/>
+          <p:cNvSpPr txBox="1"/>
+          <p:nvPr/>
+        </p:nvSpPr>
+        <p:spPr>
+          <a:xfrm>
+            <a:off x="9022080" y="5074920"/>
+            <a:ext cx="195072" cy="75438"/>
+          </a:xfrm>
+          <a:prstGeom prst="rect">
+            <a:avLst/>
+          </a:prstGeom>
+          <a:noFill/>
+        </p:spPr>
+        <p:txBody>
+          <a:bodyPr wrap="square" lIns="0" rIns="0" tIns="0" bIns="0" anchor="t">
+            <a:spAutoFit/>
+          </a:bodyPr>
+          <a:lstStyle/>
+          <a:p>
+            <a:pPr algn="l">
+              <a:lnSpc>
+                <a:spcPct val="100000"/>
+              </a:lnSpc>
+            </a:pPr>
+            <a:r>
+              <a:rPr sz="750" b="1">
+                <a:solidFill>
+                  <a:srgbClr val="B5333B"/>
+                </a:solidFill>
+                <a:latin typeface="微软雅黑"/>
+                <a:ea typeface="微软雅黑"/>
+                <a:cs typeface="微软雅黑"/>
+              </a:rPr>
+              <a:t>4</a:t>
+            </a:r>
+          </a:p>
+        </p:txBody>
+      </p:sp>
+      <p:sp>
+        <p:nvSpPr>
+          <p:cNvPr id="143" name="TextBox 142"/>
+          <p:cNvSpPr txBox="1"/>
+          <p:nvPr/>
+        </p:nvSpPr>
+        <p:spPr>
+          <a:xfrm>
+            <a:off x="9217152" y="5074920"/>
+            <a:ext cx="2487168" cy="75438"/>
+          </a:xfrm>
+          <a:prstGeom prst="rect">
+            <a:avLst/>
+          </a:prstGeom>
+          <a:noFill/>
+        </p:spPr>
+        <p:txBody>
+          <a:bodyPr wrap="square" lIns="0" rIns="0" tIns="0" bIns="0" anchor="t">
+            <a:spAutoFit/>
+          </a:bodyPr>
+          <a:lstStyle/>
+          <a:p>
+            <a:pPr algn="l">
+              <a:lnSpc>
+                <a:spcPct val="100000"/>
+              </a:lnSpc>
+            </a:pPr>
+            <a:r>
+              <a:rPr sz="780" b="1">
+                <a:solidFill>
+                  <a:srgbClr val="1A1A1C"/>
+                </a:solidFill>
+                <a:latin typeface="微软雅黑"/>
+                <a:ea typeface="微软雅黑"/>
+                <a:cs typeface="微软雅黑"/>
+              </a:rPr>
+              <a:t>3000档床垫预算顾问</a:t>
+            </a:r>
+          </a:p>
+        </p:txBody>
+      </p:sp>
+      <p:sp>
+        <p:nvSpPr>
+          <p:cNvPr id="144" name="TextBox 143"/>
+          <p:cNvSpPr txBox="1"/>
+          <p:nvPr/>
+        </p:nvSpPr>
+        <p:spPr>
+          <a:xfrm>
+            <a:off x="9217152" y="5157216"/>
+            <a:ext cx="2487168" cy="68580"/>
+          </a:xfrm>
+          <a:prstGeom prst="rect">
+            <a:avLst/>
+          </a:prstGeom>
+          <a:noFill/>
+        </p:spPr>
+        <p:txBody>
+          <a:bodyPr wrap="square" lIns="0" rIns="0" tIns="0" bIns="0" anchor="t">
+            <a:spAutoFit/>
+          </a:bodyPr>
+          <a:lstStyle/>
+          <a:p>
+            <a:pPr algn="l">
+              <a:lnSpc>
+                <a:spcPct val="100000"/>
+              </a:lnSpc>
+            </a:pPr>
+            <a:r>
+              <a:rPr sz="700" b="0">
+                <a:solidFill>
+                  <a:srgbClr val="5B616B"/>
+                </a:solidFill>
+                <a:latin typeface="微软雅黑"/>
+                <a:ea typeface="微软雅黑"/>
+                <a:cs typeface="微软雅黑"/>
+              </a:rPr>
+              <a:t>alv123 · 11,273</a:t>
+            </a:r>
+          </a:p>
+        </p:txBody>
+      </p:sp>
+      <p:sp>
+        <p:nvSpPr>
+          <p:cNvPr id="145" name="TextBox 144"/>
+          <p:cNvSpPr txBox="1"/>
+          <p:nvPr/>
+        </p:nvSpPr>
+        <p:spPr>
+          <a:xfrm>
+            <a:off x="9022080" y="5294376"/>
+            <a:ext cx="195072" cy="75438"/>
+          </a:xfrm>
+          <a:prstGeom prst="rect">
+            <a:avLst/>
+          </a:prstGeom>
+          <a:noFill/>
+        </p:spPr>
+        <p:txBody>
+          <a:bodyPr wrap="square" lIns="0" rIns="0" tIns="0" bIns="0" anchor="t">
+            <a:spAutoFit/>
+          </a:bodyPr>
+          <a:lstStyle/>
+          <a:p>
+            <a:pPr algn="l">
+              <a:lnSpc>
+                <a:spcPct val="100000"/>
+              </a:lnSpc>
+            </a:pPr>
+            <a:r>
+              <a:rPr sz="750" b="1">
+                <a:solidFill>
+                  <a:srgbClr val="B5333B"/>
+                </a:solidFill>
+                <a:latin typeface="微软雅黑"/>
+                <a:ea typeface="微软雅黑"/>
+                <a:cs typeface="微软雅黑"/>
+              </a:rPr>
+              <a:t>5</a:t>
+            </a:r>
+          </a:p>
+        </p:txBody>
+      </p:sp>
+      <p:sp>
+        <p:nvSpPr>
+          <p:cNvPr id="146" name="TextBox 145"/>
+          <p:cNvSpPr txBox="1"/>
+          <p:nvPr/>
+        </p:nvSpPr>
+        <p:spPr>
+          <a:xfrm>
+            <a:off x="9217152" y="5294376"/>
+            <a:ext cx="2487168" cy="75438"/>
+          </a:xfrm>
+          <a:prstGeom prst="rect">
+            <a:avLst/>
+          </a:prstGeom>
+          <a:noFill/>
+        </p:spPr>
+        <p:txBody>
+          <a:bodyPr wrap="square" lIns="0" rIns="0" tIns="0" bIns="0" anchor="t">
+            <a:spAutoFit/>
+          </a:bodyPr>
+          <a:lstStyle/>
+          <a:p>
+            <a:pPr algn="l">
+              <a:lnSpc>
+                <a:spcPct val="100000"/>
+              </a:lnSpc>
+            </a:pPr>
+            <a:r>
+              <a:rPr sz="780" b="1">
+                <a:solidFill>
+                  <a:srgbClr val="1A1A1C"/>
+                </a:solidFill>
+                <a:latin typeface="微软雅黑"/>
+                <a:ea typeface="微软雅黑"/>
+                <a:cs typeface="微软雅黑"/>
+              </a:rPr>
+              <a:t>企业画像与上下游关系分析</a:t>
+            </a:r>
+          </a:p>
+        </p:txBody>
+      </p:sp>
+      <p:sp>
+        <p:nvSpPr>
+          <p:cNvPr id="147" name="TextBox 146"/>
+          <p:cNvSpPr txBox="1"/>
+          <p:nvPr/>
+        </p:nvSpPr>
+        <p:spPr>
+          <a:xfrm>
+            <a:off x="9217152" y="5376672"/>
+            <a:ext cx="2487168" cy="68580"/>
+          </a:xfrm>
+          <a:prstGeom prst="rect">
+            <a:avLst/>
+          </a:prstGeom>
+          <a:noFill/>
+        </p:spPr>
+        <p:txBody>
+          <a:bodyPr wrap="square" lIns="0" rIns="0" tIns="0" bIns="0" anchor="t">
+            <a:spAutoFit/>
+          </a:bodyPr>
+          <a:lstStyle/>
+          <a:p>
+            <a:pPr algn="l">
+              <a:lnSpc>
+                <a:spcPct val="100000"/>
+              </a:lnSpc>
+            </a:pPr>
+            <a:r>
+              <a:rPr sz="700" b="0">
+                <a:solidFill>
+                  <a:srgbClr val="5B616B"/>
+                </a:solidFill>
+                <a:latin typeface="微软雅黑"/>
+                <a:ea typeface="微软雅黑"/>
+                <a:cs typeface="微软雅黑"/>
+              </a:rPr>
+              <a:t>tingting0980 · 10,207</a:t>
+            </a:r>
+          </a:p>
+        </p:txBody>
+      </p:sp>
+      <p:sp>
+        <p:nvSpPr>
+          <p:cNvPr id="148" name="TextBox 147"/>
+          <p:cNvSpPr txBox="1"/>
+          <p:nvPr/>
+        </p:nvSpPr>
+        <p:spPr>
+          <a:xfrm>
+            <a:off x="426720" y="5589270"/>
+            <a:ext cx="11338560" cy="192024"/>
+          </a:xfrm>
+          <a:prstGeom prst="rect">
+            <a:avLst/>
+          </a:prstGeom>
+          <a:noFill/>
+        </p:spPr>
+        <p:txBody>
+          <a:bodyPr wrap="square" lIns="0" rIns="0" tIns="0" bIns="0">
+            <a:spAutoFit/>
+          </a:bodyPr>
+          <a:lstStyle/>
+          <a:p>
+            <a:r>
+              <a:rPr sz="1000" b="1">
+                <a:solidFill>
+                  <a:srgbClr val="B5333B"/>
+                </a:solidFill>
+                <a:latin typeface="微软雅黑"/>
+                <a:ea typeface="微软雅黑"/>
+                <a:cs typeface="微软雅黑"/>
+              </a:rPr>
+              <a:t>读法：</a:t>
+            </a:r>
+            <a:r>
+              <a:rPr sz="1000" b="0">
+                <a:solidFill>
+                  <a:srgbClr val="1A1A1C"/>
+                </a:solidFill>
+                <a:latin typeface="微软雅黑"/>
+                <a:ea typeface="微软雅黑"/>
+                <a:cs typeface="微软雅黑"/>
+              </a:rPr>
+              <a:t>GitHub 撑数量，3 月集中导入；四类头部差异大，个人上传集中在少数账号。</a:t>
             </a:r>
           </a:p>
         </p:txBody>

--- a/skill-final-v1.pptx
+++ b/skill-final-v1.pptx
@@ -34766,8 +34766,8 @@
         </p:nvSpPr>
         <p:spPr>
           <a:xfrm>
-            <a:off x="426720" y="3257550"/>
-            <a:ext cx="7315200" cy="150876"/>
+            <a:off x="426720" y="3168396"/>
+            <a:ext cx="7315200" cy="137160"/>
           </a:xfrm>
           <a:prstGeom prst="rect">
             <a:avLst/>
@@ -34801,55 +34801,14 @@
       </p:sp>
       <p:sp>
         <p:nvSpPr>
-          <p:cNvPr id="65" name="TextBox 64"/>
-          <p:cNvSpPr txBox="1"/>
-          <p:nvPr/>
-        </p:nvSpPr>
-        <p:spPr>
-          <a:xfrm>
-            <a:off x="426720" y="3429000"/>
-            <a:ext cx="8534400" cy="102870"/>
-          </a:xfrm>
-          <a:prstGeom prst="rect">
-            <a:avLst/>
-          </a:prstGeom>
-          <a:noFill/>
-        </p:spPr>
-        <p:txBody>
-          <a:bodyPr wrap="square" lIns="0" rIns="0" tIns="0" bIns="0" anchor="t">
-            <a:spAutoFit/>
-          </a:bodyPr>
-          <a:lstStyle/>
-          <a:p>
-            <a:pPr algn="l">
-              <a:lnSpc>
-                <a:spcPct val="100000"/>
-              </a:lnSpc>
-            </a:pPr>
-            <a:r>
-              <a:rPr sz="780" b="0">
-                <a:solidFill>
-                  <a:srgbClr val="8B8E94"/>
-                </a:solidFill>
-                <a:latin typeface="微软雅黑"/>
-                <a:ea typeface="微软雅黑"/>
-                <a:cs typeface="微软雅黑"/>
-              </a:rPr>
-              <a:t>10 个一级类目；35 个二级类目里 24 个是 0 条</a:t>
-            </a:r>
-          </a:p>
-        </p:txBody>
-      </p:sp>
-      <p:sp>
-        <p:nvSpPr>
-          <p:cNvPr id="66" name="Rounded Rectangle 65"/>
+          <p:cNvPr id="65" name="Rounded Rectangle 64"/>
           <p:cNvSpPr/>
           <p:nvPr/>
         </p:nvSpPr>
         <p:spPr>
           <a:xfrm>
-            <a:off x="426720" y="3566160"/>
-            <a:ext cx="3666968" cy="123443"/>
+            <a:off x="426720" y="3353562"/>
+            <a:ext cx="3666968" cy="109728"/>
           </a:xfrm>
           <a:prstGeom prst="roundRect">
             <a:avLst>
@@ -34888,14 +34847,14 @@
       </p:sp>
       <p:sp>
         <p:nvSpPr>
-          <p:cNvPr id="67" name="Rounded Rectangle 66"/>
+          <p:cNvPr id="66" name="Rounded Rectangle 65"/>
           <p:cNvSpPr/>
           <p:nvPr/>
         </p:nvSpPr>
         <p:spPr>
           <a:xfrm>
-            <a:off x="4093688" y="3566160"/>
-            <a:ext cx="2213024" cy="123443"/>
+            <a:off x="4093688" y="3353562"/>
+            <a:ext cx="2213024" cy="109728"/>
           </a:xfrm>
           <a:prstGeom prst="roundRect">
             <a:avLst>
@@ -34934,14 +34893,14 @@
       </p:sp>
       <p:sp>
         <p:nvSpPr>
-          <p:cNvPr id="68" name="Rounded Rectangle 67"/>
+          <p:cNvPr id="67" name="Rounded Rectangle 66"/>
           <p:cNvSpPr/>
           <p:nvPr/>
         </p:nvSpPr>
         <p:spPr>
           <a:xfrm>
-            <a:off x="6306712" y="3566160"/>
-            <a:ext cx="1388147" cy="123443"/>
+            <a:off x="6306712" y="3353562"/>
+            <a:ext cx="1388147" cy="109728"/>
           </a:xfrm>
           <a:prstGeom prst="roundRect">
             <a:avLst>
@@ -34980,14 +34939,14 @@
       </p:sp>
       <p:sp>
         <p:nvSpPr>
-          <p:cNvPr id="69" name="Rounded Rectangle 68"/>
+          <p:cNvPr id="68" name="Rounded Rectangle 67"/>
           <p:cNvSpPr/>
           <p:nvPr/>
         </p:nvSpPr>
         <p:spPr>
           <a:xfrm>
-            <a:off x="7694860" y="3566160"/>
-            <a:ext cx="878328" cy="123443"/>
+            <a:off x="7694860" y="3353562"/>
+            <a:ext cx="878328" cy="109728"/>
           </a:xfrm>
           <a:prstGeom prst="roundRect">
             <a:avLst>
@@ -35026,14 +34985,14 @@
       </p:sp>
       <p:sp>
         <p:nvSpPr>
-          <p:cNvPr id="70" name="Rounded Rectangle 69"/>
+          <p:cNvPr id="69" name="Rounded Rectangle 68"/>
           <p:cNvSpPr/>
           <p:nvPr/>
         </p:nvSpPr>
         <p:spPr>
           <a:xfrm>
-            <a:off x="8573188" y="3566160"/>
-            <a:ext cx="728481" cy="123443"/>
+            <a:off x="8573188" y="3353562"/>
+            <a:ext cx="728481" cy="109728"/>
           </a:xfrm>
           <a:prstGeom prst="roundRect">
             <a:avLst>
@@ -35072,14 +35031,14 @@
       </p:sp>
       <p:sp>
         <p:nvSpPr>
-          <p:cNvPr id="71" name="Rounded Rectangle 70"/>
+          <p:cNvPr id="70" name="Rounded Rectangle 69"/>
           <p:cNvSpPr/>
           <p:nvPr/>
         </p:nvSpPr>
         <p:spPr>
           <a:xfrm>
-            <a:off x="9301670" y="3566160"/>
-            <a:ext cx="2097849" cy="123443"/>
+            <a:off x="9301670" y="3353562"/>
+            <a:ext cx="2097849" cy="109728"/>
           </a:xfrm>
           <a:prstGeom prst="roundRect">
             <a:avLst>
@@ -35118,14 +35077,14 @@
       </p:sp>
       <p:sp>
         <p:nvSpPr>
-          <p:cNvPr id="72" name="TextBox 71"/>
-          <p:cNvSpPr txBox="1"/>
-          <p:nvPr/>
-        </p:nvSpPr>
-        <p:spPr>
-          <a:xfrm>
-            <a:off x="426720" y="3703320"/>
-            <a:ext cx="2072640" cy="89154"/>
+          <p:cNvPr id="71" name="TextBox 70"/>
+          <p:cNvSpPr txBox="1"/>
+          <p:nvPr/>
+        </p:nvSpPr>
+        <p:spPr>
+          <a:xfrm>
+            <a:off x="426720" y="3477006"/>
+            <a:ext cx="2072640" cy="82296"/>
           </a:xfrm>
           <a:prstGeom prst="rect">
             <a:avLst/>
@@ -35144,7 +35103,7 @@
               </a:lnSpc>
             </a:pPr>
             <a:r>
-              <a:rPr sz="780" b="0">
+              <a:rPr sz="760" b="0">
                 <a:solidFill>
                   <a:srgbClr val="5B616B"/>
                 </a:solidFill>
@@ -35159,14 +35118,14 @@
       </p:sp>
       <p:sp>
         <p:nvSpPr>
-          <p:cNvPr id="73" name="TextBox 72"/>
-          <p:cNvSpPr txBox="1"/>
-          <p:nvPr/>
-        </p:nvSpPr>
-        <p:spPr>
-          <a:xfrm>
-            <a:off x="2682240" y="3703320"/>
-            <a:ext cx="2072640" cy="89154"/>
+          <p:cNvPr id="72" name="TextBox 71"/>
+          <p:cNvSpPr txBox="1"/>
+          <p:nvPr/>
+        </p:nvSpPr>
+        <p:spPr>
+          <a:xfrm>
+            <a:off x="2682240" y="3477006"/>
+            <a:ext cx="2072640" cy="82296"/>
           </a:xfrm>
           <a:prstGeom prst="rect">
             <a:avLst/>
@@ -35185,7 +35144,7 @@
               </a:lnSpc>
             </a:pPr>
             <a:r>
-              <a:rPr sz="780" b="0">
+              <a:rPr sz="760" b="0">
                 <a:solidFill>
                   <a:srgbClr val="5B616B"/>
                 </a:solidFill>
@@ -35200,14 +35159,14 @@
       </p:sp>
       <p:sp>
         <p:nvSpPr>
-          <p:cNvPr id="74" name="TextBox 73"/>
-          <p:cNvSpPr txBox="1"/>
-          <p:nvPr/>
-        </p:nvSpPr>
-        <p:spPr>
-          <a:xfrm>
-            <a:off x="4937760" y="3703320"/>
-            <a:ext cx="2072640" cy="89154"/>
+          <p:cNvPr id="73" name="TextBox 72"/>
+          <p:cNvSpPr txBox="1"/>
+          <p:nvPr/>
+        </p:nvSpPr>
+        <p:spPr>
+          <a:xfrm>
+            <a:off x="4937760" y="3477006"/>
+            <a:ext cx="2072640" cy="82296"/>
           </a:xfrm>
           <a:prstGeom prst="rect">
             <a:avLst/>
@@ -35226,7 +35185,7 @@
               </a:lnSpc>
             </a:pPr>
             <a:r>
-              <a:rPr sz="780" b="0">
+              <a:rPr sz="760" b="0">
                 <a:solidFill>
                   <a:srgbClr val="5B616B"/>
                 </a:solidFill>
@@ -35241,14 +35200,14 @@
       </p:sp>
       <p:sp>
         <p:nvSpPr>
-          <p:cNvPr id="75" name="TextBox 74"/>
-          <p:cNvSpPr txBox="1"/>
-          <p:nvPr/>
-        </p:nvSpPr>
-        <p:spPr>
-          <a:xfrm>
-            <a:off x="7193280" y="3703320"/>
-            <a:ext cx="2072640" cy="89154"/>
+          <p:cNvPr id="74" name="TextBox 73"/>
+          <p:cNvSpPr txBox="1"/>
+          <p:nvPr/>
+        </p:nvSpPr>
+        <p:spPr>
+          <a:xfrm>
+            <a:off x="7193280" y="3477006"/>
+            <a:ext cx="2072640" cy="82296"/>
           </a:xfrm>
           <a:prstGeom prst="rect">
             <a:avLst/>
@@ -35267,7 +35226,7 @@
               </a:lnSpc>
             </a:pPr>
             <a:r>
-              <a:rPr sz="780" b="0">
+              <a:rPr sz="760" b="0">
                 <a:solidFill>
                   <a:srgbClr val="5B616B"/>
                 </a:solidFill>
@@ -35282,14 +35241,14 @@
       </p:sp>
       <p:sp>
         <p:nvSpPr>
-          <p:cNvPr id="76" name="TextBox 75"/>
-          <p:cNvSpPr txBox="1"/>
-          <p:nvPr/>
-        </p:nvSpPr>
-        <p:spPr>
-          <a:xfrm>
-            <a:off x="9448800" y="3703320"/>
-            <a:ext cx="2072640" cy="89154"/>
+          <p:cNvPr id="75" name="TextBox 74"/>
+          <p:cNvSpPr txBox="1"/>
+          <p:nvPr/>
+        </p:nvSpPr>
+        <p:spPr>
+          <a:xfrm>
+            <a:off x="9448800" y="3477006"/>
+            <a:ext cx="2072640" cy="82296"/>
           </a:xfrm>
           <a:prstGeom prst="rect">
             <a:avLst/>
@@ -35308,7 +35267,7 @@
               </a:lnSpc>
             </a:pPr>
             <a:r>
-              <a:rPr sz="780" b="0">
+              <a:rPr sz="760" b="0">
                 <a:solidFill>
                   <a:srgbClr val="5B616B"/>
                 </a:solidFill>
@@ -35323,14 +35282,14 @@
       </p:sp>
       <p:sp>
         <p:nvSpPr>
-          <p:cNvPr id="77" name="TextBox 76"/>
-          <p:cNvSpPr txBox="1"/>
-          <p:nvPr/>
-        </p:nvSpPr>
-        <p:spPr>
-          <a:xfrm>
-            <a:off x="426720" y="3840480"/>
-            <a:ext cx="9144000" cy="96012"/>
+          <p:cNvPr id="76" name="TextBox 75"/>
+          <p:cNvSpPr txBox="1"/>
+          <p:nvPr/>
+        </p:nvSpPr>
+        <p:spPr>
+          <a:xfrm>
+            <a:off x="426720" y="3579876"/>
+            <a:ext cx="10972800" cy="82296"/>
           </a:xfrm>
           <a:prstGeom prst="rect">
             <a:avLst/>
@@ -35349,7 +35308,7 @@
               </a:lnSpc>
             </a:pPr>
             <a:r>
-              <a:rPr sz="750" b="0">
+              <a:rPr sz="720" b="0">
                 <a:solidFill>
                   <a:srgbClr val="8B8E94"/>
                 </a:solidFill>
@@ -35357,21 +35316,21 @@
                 <a:ea typeface="微软雅黑"/>
                 <a:cs typeface="微软雅黑"/>
               </a:rPr>
-              <a:t>Top3 = 27,922 + 16,851 + 10,570 = 55,343；其余 4 类 + 未分类 19.1%。</a:t>
-            </a:r>
-          </a:p>
-        </p:txBody>
-      </p:sp>
-      <p:sp>
-        <p:nvSpPr>
-          <p:cNvPr id="78" name="TextBox 77"/>
-          <p:cNvSpPr txBox="1"/>
-          <p:nvPr/>
-        </p:nvSpPr>
-        <p:spPr>
-          <a:xfrm>
-            <a:off x="426720" y="3977639"/>
-            <a:ext cx="11338560" cy="137160"/>
+              <a:t>10 个一级类目；35 个二级里 24 个空；Top3=55,343；Top5=67,578。</a:t>
+            </a:r>
+          </a:p>
+        </p:txBody>
+      </p:sp>
+      <p:sp>
+        <p:nvSpPr>
+          <p:cNvPr id="77" name="TextBox 76"/>
+          <p:cNvSpPr txBox="1"/>
+          <p:nvPr/>
+        </p:nvSpPr>
+        <p:spPr>
+          <a:xfrm>
+            <a:off x="426720" y="3669030"/>
+            <a:ext cx="11338560" cy="123443"/>
           </a:xfrm>
           <a:prstGeom prst="rect">
             <a:avLst/>
@@ -35398,20 +35357,20 @@
                 <a:ea typeface="微软雅黑"/>
                 <a:cs typeface="微软雅黑"/>
               </a:rPr>
-              <a:t>谁被下载：四类来源 Top5（共 20 个）</a:t>
-            </a:r>
-          </a:p>
-        </p:txBody>
-      </p:sp>
-      <p:sp>
-        <p:nvSpPr>
-          <p:cNvPr id="79" name="TextBox 78"/>
-          <p:cNvSpPr txBox="1"/>
-          <p:nvPr/>
-        </p:nvSpPr>
-        <p:spPr>
-          <a:xfrm>
-            <a:off x="426720" y="4210812"/>
+              <a:t>谁被下载：四类 Top6（共 24 个）</a:t>
+            </a:r>
+          </a:p>
+        </p:txBody>
+      </p:sp>
+      <p:sp>
+        <p:nvSpPr>
+          <p:cNvPr id="78" name="TextBox 77"/>
+          <p:cNvSpPr txBox="1"/>
+          <p:nvPr/>
+        </p:nvSpPr>
+        <p:spPr>
+          <a:xfrm>
+            <a:off x="426720" y="3826764"/>
             <a:ext cx="11338560" cy="89154"/>
           </a:xfrm>
           <a:prstGeom prst="rect">
@@ -35431,7 +35390,7 @@
               </a:lnSpc>
             </a:pPr>
             <a:r>
-              <a:rPr sz="750" b="0">
+              <a:rPr sz="720" b="0">
                 <a:solidFill>
                   <a:srgbClr val="8B8E94"/>
                 </a:solidFill>
@@ -35439,71 +35398,34 @@
                 <a:ea typeface="微软雅黑"/>
                 <a:cs typeface="微软雅黑"/>
               </a:rPr>
-              <a:t>显示名 / 所有者 · 下载量；按 DownloadCount 降序</a:t>
-            </a:r>
-          </a:p>
-        </p:txBody>
-      </p:sp>
-      <p:sp>
-        <p:nvSpPr>
-          <p:cNvPr id="80" name="TextBox 79"/>
-          <p:cNvSpPr txBox="1"/>
-          <p:nvPr/>
-        </p:nvSpPr>
-        <p:spPr>
-          <a:xfrm>
-            <a:off x="426720" y="4306824"/>
-            <a:ext cx="2682240" cy="96012"/>
-          </a:xfrm>
-          <a:prstGeom prst="rect">
-            <a:avLst/>
-          </a:prstGeom>
-          <a:noFill/>
-        </p:spPr>
-        <p:txBody>
-          <a:bodyPr wrap="square" lIns="0" rIns="0" tIns="0" bIns="0" anchor="t">
-            <a:spAutoFit/>
-          </a:bodyPr>
-          <a:lstStyle/>
-          <a:p>
-            <a:pPr algn="l">
-              <a:lnSpc>
-                <a:spcPct val="100000"/>
-              </a:lnSpc>
-            </a:pPr>
-            <a:r>
-              <a:rPr sz="860" b="1">
-                <a:solidFill>
-                  <a:srgbClr val="B5333B"/>
-                </a:solidFill>
-                <a:latin typeface="微软雅黑"/>
-                <a:ea typeface="微软雅黑"/>
-                <a:cs typeface="微软雅黑"/>
-              </a:rPr>
-              <a:t>GitHub Top5</a:t>
-            </a:r>
-          </a:p>
-        </p:txBody>
-      </p:sp>
-      <p:sp>
-        <p:nvSpPr>
-          <p:cNvPr id="81" name="Rectangle 80"/>
+              <a:t>原始英文名（中文名） · 所有者 · 下载量；按 DownloadCount 降序</a:t>
+            </a:r>
+          </a:p>
+        </p:txBody>
+      </p:sp>
+      <p:sp>
+        <p:nvSpPr>
+          <p:cNvPr id="79" name="Rounded Rectangle 78"/>
           <p:cNvSpPr/>
           <p:nvPr/>
         </p:nvSpPr>
         <p:spPr>
           <a:xfrm>
-            <a:off x="426720" y="4409694"/>
-            <a:ext cx="2682240" cy="5486"/>
-          </a:xfrm>
-          <a:prstGeom prst="rect">
-            <a:avLst/>
+            <a:off x="426720" y="3909059"/>
+            <a:ext cx="5547360" cy="1014984"/>
+          </a:xfrm>
+          <a:prstGeom prst="roundRect">
+            <a:avLst>
+              <a:gd name="adj" fmla="val 2000"/>
+            </a:avLst>
           </a:prstGeom>
           <a:solidFill>
-            <a:srgbClr val="E2E4E7"/>
+            <a:srgbClr val="FFFFFF"/>
           </a:solidFill>
-          <a:ln>
-            <a:noFill/>
+          <a:ln w="9525">
+            <a:solidFill>
+              <a:srgbClr val="E2E4E7"/>
+            </a:solidFill>
           </a:ln>
           <a:effectLst/>
         </p:spPr>
@@ -35531,14 +35453,14 @@
       </p:sp>
       <p:sp>
         <p:nvSpPr>
-          <p:cNvPr id="82" name="TextBox 81"/>
-          <p:cNvSpPr txBox="1"/>
-          <p:nvPr/>
-        </p:nvSpPr>
-        <p:spPr>
-          <a:xfrm>
-            <a:off x="426720" y="4416552"/>
-            <a:ext cx="195072" cy="75438"/>
+          <p:cNvPr id="80" name="TextBox 79"/>
+          <p:cNvSpPr txBox="1"/>
+          <p:nvPr/>
+        </p:nvSpPr>
+        <p:spPr>
+          <a:xfrm>
+            <a:off x="573024" y="3957065"/>
+            <a:ext cx="3657600" cy="96012"/>
           </a:xfrm>
           <a:prstGeom prst="rect">
             <a:avLst/>
@@ -35557,7 +35479,7 @@
               </a:lnSpc>
             </a:pPr>
             <a:r>
-              <a:rPr sz="750" b="1">
+              <a:rPr sz="860" b="1">
                 <a:solidFill>
                   <a:srgbClr val="B5333B"/>
                 </a:solidFill>
@@ -35565,636 +35487,21 @@
                 <a:ea typeface="微软雅黑"/>
                 <a:cs typeface="微软雅黑"/>
               </a:rPr>
-              <a:t>1</a:t>
-            </a:r>
-          </a:p>
-        </p:txBody>
-      </p:sp>
-      <p:sp>
-        <p:nvSpPr>
-          <p:cNvPr id="83" name="TextBox 82"/>
-          <p:cNvSpPr txBox="1"/>
-          <p:nvPr/>
-        </p:nvSpPr>
-        <p:spPr>
-          <a:xfrm>
-            <a:off x="621792" y="4416552"/>
-            <a:ext cx="2487168" cy="75438"/>
-          </a:xfrm>
-          <a:prstGeom prst="rect">
-            <a:avLst/>
-          </a:prstGeom>
-          <a:noFill/>
-        </p:spPr>
-        <p:txBody>
-          <a:bodyPr wrap="square" lIns="0" rIns="0" tIns="0" bIns="0" anchor="t">
-            <a:spAutoFit/>
-          </a:bodyPr>
-          <a:lstStyle/>
-          <a:p>
-            <a:pPr algn="l">
-              <a:lnSpc>
-                <a:spcPct val="100000"/>
-              </a:lnSpc>
-            </a:pPr>
-            <a:r>
-              <a:rPr sz="780" b="1">
-                <a:solidFill>
-                  <a:srgbClr val="1A1A1C"/>
-                </a:solidFill>
-                <a:latin typeface="微软雅黑"/>
-                <a:ea typeface="微软雅黑"/>
-                <a:cs typeface="微软雅黑"/>
-              </a:rPr>
-              <a:t>dev-expert</a:t>
-            </a:r>
-          </a:p>
-        </p:txBody>
-      </p:sp>
-      <p:sp>
-        <p:nvSpPr>
-          <p:cNvPr id="84" name="TextBox 83"/>
-          <p:cNvSpPr txBox="1"/>
-          <p:nvPr/>
-        </p:nvSpPr>
-        <p:spPr>
-          <a:xfrm>
-            <a:off x="621792" y="4498848"/>
-            <a:ext cx="2487168" cy="68580"/>
-          </a:xfrm>
-          <a:prstGeom prst="rect">
-            <a:avLst/>
-          </a:prstGeom>
-          <a:noFill/>
-        </p:spPr>
-        <p:txBody>
-          <a:bodyPr wrap="square" lIns="0" rIns="0" tIns="0" bIns="0" anchor="t">
-            <a:spAutoFit/>
-          </a:bodyPr>
-          <a:lstStyle/>
-          <a:p>
-            <a:pPr algn="l">
-              <a:lnSpc>
-                <a:spcPct val="100000"/>
-              </a:lnSpc>
-            </a:pPr>
-            <a:r>
-              <a:rPr sz="700" b="0">
-                <a:solidFill>
-                  <a:srgbClr val="5B616B"/>
-                </a:solidFill>
-                <a:latin typeface="微软雅黑"/>
-                <a:ea typeface="微软雅黑"/>
-                <a:cs typeface="微软雅黑"/>
-              </a:rPr>
-              <a:t>ebandao · 1,156,332</a:t>
-            </a:r>
-          </a:p>
-        </p:txBody>
-      </p:sp>
-      <p:sp>
-        <p:nvSpPr>
-          <p:cNvPr id="85" name="TextBox 84"/>
-          <p:cNvSpPr txBox="1"/>
-          <p:nvPr/>
-        </p:nvSpPr>
-        <p:spPr>
-          <a:xfrm>
-            <a:off x="426720" y="4636008"/>
-            <a:ext cx="195072" cy="75438"/>
-          </a:xfrm>
-          <a:prstGeom prst="rect">
-            <a:avLst/>
-          </a:prstGeom>
-          <a:noFill/>
-        </p:spPr>
-        <p:txBody>
-          <a:bodyPr wrap="square" lIns="0" rIns="0" tIns="0" bIns="0" anchor="t">
-            <a:spAutoFit/>
-          </a:bodyPr>
-          <a:lstStyle/>
-          <a:p>
-            <a:pPr algn="l">
-              <a:lnSpc>
-                <a:spcPct val="100000"/>
-              </a:lnSpc>
-            </a:pPr>
-            <a:r>
-              <a:rPr sz="750" b="1">
-                <a:solidFill>
-                  <a:srgbClr val="B5333B"/>
-                </a:solidFill>
-                <a:latin typeface="微软雅黑"/>
-                <a:ea typeface="微软雅黑"/>
-                <a:cs typeface="微软雅黑"/>
-              </a:rPr>
-              <a:t>2</a:t>
-            </a:r>
-          </a:p>
-        </p:txBody>
-      </p:sp>
-      <p:sp>
-        <p:nvSpPr>
-          <p:cNvPr id="86" name="TextBox 85"/>
-          <p:cNvSpPr txBox="1"/>
-          <p:nvPr/>
-        </p:nvSpPr>
-        <p:spPr>
-          <a:xfrm>
-            <a:off x="621792" y="4636008"/>
-            <a:ext cx="2487168" cy="75438"/>
-          </a:xfrm>
-          <a:prstGeom prst="rect">
-            <a:avLst/>
-          </a:prstGeom>
-          <a:noFill/>
-        </p:spPr>
-        <p:txBody>
-          <a:bodyPr wrap="square" lIns="0" rIns="0" tIns="0" bIns="0" anchor="t">
-            <a:spAutoFit/>
-          </a:bodyPr>
-          <a:lstStyle/>
-          <a:p>
-            <a:pPr algn="l">
-              <a:lnSpc>
-                <a:spcPct val="100000"/>
-              </a:lnSpc>
-            </a:pPr>
-            <a:r>
-              <a:rPr sz="780" b="1">
-                <a:solidFill>
-                  <a:srgbClr val="1A1A1C"/>
-                </a:solidFill>
-                <a:latin typeface="微软雅黑"/>
-                <a:ea typeface="微软雅黑"/>
-                <a:cs typeface="微软雅黑"/>
-              </a:rPr>
-              <a:t>skill-creator</a:t>
-            </a:r>
-          </a:p>
-        </p:txBody>
-      </p:sp>
-      <p:sp>
-        <p:nvSpPr>
-          <p:cNvPr id="87" name="TextBox 86"/>
-          <p:cNvSpPr txBox="1"/>
-          <p:nvPr/>
-        </p:nvSpPr>
-        <p:spPr>
-          <a:xfrm>
-            <a:off x="621792" y="4718304"/>
-            <a:ext cx="2487168" cy="68580"/>
-          </a:xfrm>
-          <a:prstGeom prst="rect">
-            <a:avLst/>
-          </a:prstGeom>
-          <a:noFill/>
-        </p:spPr>
-        <p:txBody>
-          <a:bodyPr wrap="square" lIns="0" rIns="0" tIns="0" bIns="0" anchor="t">
-            <a:spAutoFit/>
-          </a:bodyPr>
-          <a:lstStyle/>
-          <a:p>
-            <a:pPr algn="l">
-              <a:lnSpc>
-                <a:spcPct val="100000"/>
-              </a:lnSpc>
-            </a:pPr>
-            <a:r>
-              <a:rPr sz="700" b="0">
-                <a:solidFill>
-                  <a:srgbClr val="5B616B"/>
-                </a:solidFill>
-                <a:latin typeface="微软雅黑"/>
-                <a:ea typeface="微软雅黑"/>
-                <a:cs typeface="微软雅黑"/>
-              </a:rPr>
-              <a:t>@anthropics · 20,876</a:t>
-            </a:r>
-          </a:p>
-        </p:txBody>
-      </p:sp>
-      <p:sp>
-        <p:nvSpPr>
-          <p:cNvPr id="88" name="TextBox 87"/>
-          <p:cNvSpPr txBox="1"/>
-          <p:nvPr/>
-        </p:nvSpPr>
-        <p:spPr>
-          <a:xfrm>
-            <a:off x="426720" y="4855464"/>
-            <a:ext cx="195072" cy="75438"/>
-          </a:xfrm>
-          <a:prstGeom prst="rect">
-            <a:avLst/>
-          </a:prstGeom>
-          <a:noFill/>
-        </p:spPr>
-        <p:txBody>
-          <a:bodyPr wrap="square" lIns="0" rIns="0" tIns="0" bIns="0" anchor="t">
-            <a:spAutoFit/>
-          </a:bodyPr>
-          <a:lstStyle/>
-          <a:p>
-            <a:pPr algn="l">
-              <a:lnSpc>
-                <a:spcPct val="100000"/>
-              </a:lnSpc>
-            </a:pPr>
-            <a:r>
-              <a:rPr sz="750" b="1">
-                <a:solidFill>
-                  <a:srgbClr val="B5333B"/>
-                </a:solidFill>
-                <a:latin typeface="微软雅黑"/>
-                <a:ea typeface="微软雅黑"/>
-                <a:cs typeface="微软雅黑"/>
-              </a:rPr>
-              <a:t>3</a:t>
-            </a:r>
-          </a:p>
-        </p:txBody>
-      </p:sp>
-      <p:sp>
-        <p:nvSpPr>
-          <p:cNvPr id="89" name="TextBox 88"/>
-          <p:cNvSpPr txBox="1"/>
-          <p:nvPr/>
-        </p:nvSpPr>
-        <p:spPr>
-          <a:xfrm>
-            <a:off x="621792" y="4855464"/>
-            <a:ext cx="2487168" cy="75438"/>
-          </a:xfrm>
-          <a:prstGeom prst="rect">
-            <a:avLst/>
-          </a:prstGeom>
-          <a:noFill/>
-        </p:spPr>
-        <p:txBody>
-          <a:bodyPr wrap="square" lIns="0" rIns="0" tIns="0" bIns="0" anchor="t">
-            <a:spAutoFit/>
-          </a:bodyPr>
-          <a:lstStyle/>
-          <a:p>
-            <a:pPr algn="l">
-              <a:lnSpc>
-                <a:spcPct val="100000"/>
-              </a:lnSpc>
-            </a:pPr>
-            <a:r>
-              <a:rPr sz="780" b="1">
-                <a:solidFill>
-                  <a:srgbClr val="1A1A1C"/>
-                </a:solidFill>
-                <a:latin typeface="微软雅黑"/>
-                <a:ea typeface="微软雅黑"/>
-                <a:cs typeface="微软雅黑"/>
-              </a:rPr>
-              <a:t>床垫选购顾问</a:t>
-            </a:r>
-          </a:p>
-        </p:txBody>
-      </p:sp>
-      <p:sp>
-        <p:nvSpPr>
-          <p:cNvPr id="90" name="TextBox 89"/>
-          <p:cNvSpPr txBox="1"/>
-          <p:nvPr/>
-        </p:nvSpPr>
-        <p:spPr>
-          <a:xfrm>
-            <a:off x="621792" y="4937760"/>
-            <a:ext cx="2487168" cy="68580"/>
-          </a:xfrm>
-          <a:prstGeom prst="rect">
-            <a:avLst/>
-          </a:prstGeom>
-          <a:noFill/>
-        </p:spPr>
-        <p:txBody>
-          <a:bodyPr wrap="square" lIns="0" rIns="0" tIns="0" bIns="0" anchor="t">
-            <a:spAutoFit/>
-          </a:bodyPr>
-          <a:lstStyle/>
-          <a:p>
-            <a:pPr algn="l">
-              <a:lnSpc>
-                <a:spcPct val="100000"/>
-              </a:lnSpc>
-            </a:pPr>
-            <a:r>
-              <a:rPr sz="700" b="0">
-                <a:solidFill>
-                  <a:srgbClr val="5B616B"/>
-                </a:solidFill>
-                <a:latin typeface="微软雅黑"/>
-                <a:ea typeface="微软雅黑"/>
-                <a:cs typeface="微软雅黑"/>
-              </a:rPr>
-              <a:t>alv123 · 19,487</a:t>
-            </a:r>
-          </a:p>
-        </p:txBody>
-      </p:sp>
-      <p:sp>
-        <p:nvSpPr>
-          <p:cNvPr id="91" name="TextBox 90"/>
-          <p:cNvSpPr txBox="1"/>
-          <p:nvPr/>
-        </p:nvSpPr>
-        <p:spPr>
-          <a:xfrm>
-            <a:off x="426720" y="5074920"/>
-            <a:ext cx="195072" cy="75438"/>
-          </a:xfrm>
-          <a:prstGeom prst="rect">
-            <a:avLst/>
-          </a:prstGeom>
-          <a:noFill/>
-        </p:spPr>
-        <p:txBody>
-          <a:bodyPr wrap="square" lIns="0" rIns="0" tIns="0" bIns="0" anchor="t">
-            <a:spAutoFit/>
-          </a:bodyPr>
-          <a:lstStyle/>
-          <a:p>
-            <a:pPr algn="l">
-              <a:lnSpc>
-                <a:spcPct val="100000"/>
-              </a:lnSpc>
-            </a:pPr>
-            <a:r>
-              <a:rPr sz="750" b="1">
-                <a:solidFill>
-                  <a:srgbClr val="B5333B"/>
-                </a:solidFill>
-                <a:latin typeface="微软雅黑"/>
-                <a:ea typeface="微软雅黑"/>
-                <a:cs typeface="微软雅黑"/>
-              </a:rPr>
-              <a:t>4</a:t>
-            </a:r>
-          </a:p>
-        </p:txBody>
-      </p:sp>
-      <p:sp>
-        <p:nvSpPr>
-          <p:cNvPr id="92" name="TextBox 91"/>
-          <p:cNvSpPr txBox="1"/>
-          <p:nvPr/>
-        </p:nvSpPr>
-        <p:spPr>
-          <a:xfrm>
-            <a:off x="621792" y="5074920"/>
-            <a:ext cx="2487168" cy="75438"/>
-          </a:xfrm>
-          <a:prstGeom prst="rect">
-            <a:avLst/>
-          </a:prstGeom>
-          <a:noFill/>
-        </p:spPr>
-        <p:txBody>
-          <a:bodyPr wrap="square" lIns="0" rIns="0" tIns="0" bIns="0" anchor="t">
-            <a:spAutoFit/>
-          </a:bodyPr>
-          <a:lstStyle/>
-          <a:p>
-            <a:pPr algn="l">
-              <a:lnSpc>
-                <a:spcPct val="100000"/>
-              </a:lnSpc>
-            </a:pPr>
-            <a:r>
-              <a:rPr sz="780" b="1">
-                <a:solidFill>
-                  <a:srgbClr val="1A1A1C"/>
-                </a:solidFill>
-                <a:latin typeface="微软雅黑"/>
-                <a:ea typeface="微软雅黑"/>
-                <a:cs typeface="微软雅黑"/>
-              </a:rPr>
-              <a:t>frontend-design</a:t>
-            </a:r>
-          </a:p>
-        </p:txBody>
-      </p:sp>
-      <p:sp>
-        <p:nvSpPr>
-          <p:cNvPr id="93" name="TextBox 92"/>
-          <p:cNvSpPr txBox="1"/>
-          <p:nvPr/>
-        </p:nvSpPr>
-        <p:spPr>
-          <a:xfrm>
-            <a:off x="621792" y="5157216"/>
-            <a:ext cx="2487168" cy="68580"/>
-          </a:xfrm>
-          <a:prstGeom prst="rect">
-            <a:avLst/>
-          </a:prstGeom>
-          <a:noFill/>
-        </p:spPr>
-        <p:txBody>
-          <a:bodyPr wrap="square" lIns="0" rIns="0" tIns="0" bIns="0" anchor="t">
-            <a:spAutoFit/>
-          </a:bodyPr>
-          <a:lstStyle/>
-          <a:p>
-            <a:pPr algn="l">
-              <a:lnSpc>
-                <a:spcPct val="100000"/>
-              </a:lnSpc>
-            </a:pPr>
-            <a:r>
-              <a:rPr sz="700" b="0">
-                <a:solidFill>
-                  <a:srgbClr val="5B616B"/>
-                </a:solidFill>
-                <a:latin typeface="微软雅黑"/>
-                <a:ea typeface="微软雅黑"/>
-                <a:cs typeface="微软雅黑"/>
-              </a:rPr>
-              <a:t>@anthropics · 16,285</a:t>
-            </a:r>
-          </a:p>
-        </p:txBody>
-      </p:sp>
-      <p:sp>
-        <p:nvSpPr>
-          <p:cNvPr id="94" name="TextBox 93"/>
-          <p:cNvSpPr txBox="1"/>
-          <p:nvPr/>
-        </p:nvSpPr>
-        <p:spPr>
-          <a:xfrm>
-            <a:off x="426720" y="5294376"/>
-            <a:ext cx="195072" cy="75438"/>
-          </a:xfrm>
-          <a:prstGeom prst="rect">
-            <a:avLst/>
-          </a:prstGeom>
-          <a:noFill/>
-        </p:spPr>
-        <p:txBody>
-          <a:bodyPr wrap="square" lIns="0" rIns="0" tIns="0" bIns="0" anchor="t">
-            <a:spAutoFit/>
-          </a:bodyPr>
-          <a:lstStyle/>
-          <a:p>
-            <a:pPr algn="l">
-              <a:lnSpc>
-                <a:spcPct val="100000"/>
-              </a:lnSpc>
-            </a:pPr>
-            <a:r>
-              <a:rPr sz="750" b="1">
-                <a:solidFill>
-                  <a:srgbClr val="B5333B"/>
-                </a:solidFill>
-                <a:latin typeface="微软雅黑"/>
-                <a:ea typeface="微软雅黑"/>
-                <a:cs typeface="微软雅黑"/>
-              </a:rPr>
-              <a:t>5</a:t>
-            </a:r>
-          </a:p>
-        </p:txBody>
-      </p:sp>
-      <p:sp>
-        <p:nvSpPr>
-          <p:cNvPr id="95" name="TextBox 94"/>
-          <p:cNvSpPr txBox="1"/>
-          <p:nvPr/>
-        </p:nvSpPr>
-        <p:spPr>
-          <a:xfrm>
-            <a:off x="621792" y="5294376"/>
-            <a:ext cx="2487168" cy="75438"/>
-          </a:xfrm>
-          <a:prstGeom prst="rect">
-            <a:avLst/>
-          </a:prstGeom>
-          <a:noFill/>
-        </p:spPr>
-        <p:txBody>
-          <a:bodyPr wrap="square" lIns="0" rIns="0" tIns="0" bIns="0" anchor="t">
-            <a:spAutoFit/>
-          </a:bodyPr>
-          <a:lstStyle/>
-          <a:p>
-            <a:pPr algn="l">
-              <a:lnSpc>
-                <a:spcPct val="100000"/>
-              </a:lnSpc>
-            </a:pPr>
-            <a:r>
-              <a:rPr sz="780" b="1">
-                <a:solidFill>
-                  <a:srgbClr val="1A1A1C"/>
-                </a:solidFill>
-                <a:latin typeface="微软雅黑"/>
-                <a:ea typeface="微软雅黑"/>
-                <a:cs typeface="微软雅黑"/>
-              </a:rPr>
-              <a:t>OneSkills</a:t>
-            </a:r>
-          </a:p>
-        </p:txBody>
-      </p:sp>
-      <p:sp>
-        <p:nvSpPr>
-          <p:cNvPr id="96" name="TextBox 95"/>
-          <p:cNvSpPr txBox="1"/>
-          <p:nvPr/>
-        </p:nvSpPr>
-        <p:spPr>
-          <a:xfrm>
-            <a:off x="621792" y="5376672"/>
-            <a:ext cx="2487168" cy="68580"/>
-          </a:xfrm>
-          <a:prstGeom prst="rect">
-            <a:avLst/>
-          </a:prstGeom>
-          <a:noFill/>
-        </p:spPr>
-        <p:txBody>
-          <a:bodyPr wrap="square" lIns="0" rIns="0" tIns="0" bIns="0" anchor="t">
-            <a:spAutoFit/>
-          </a:bodyPr>
-          <a:lstStyle/>
-          <a:p>
-            <a:pPr algn="l">
-              <a:lnSpc>
-                <a:spcPct val="100000"/>
-              </a:lnSpc>
-            </a:pPr>
-            <a:r>
-              <a:rPr sz="700" b="0">
-                <a:solidFill>
-                  <a:srgbClr val="5B616B"/>
-                </a:solidFill>
-                <a:latin typeface="微软雅黑"/>
-                <a:ea typeface="微软雅黑"/>
-                <a:cs typeface="微软雅黑"/>
-              </a:rPr>
-              <a:t>OneScience · 12,861</a:t>
-            </a:r>
-          </a:p>
-        </p:txBody>
-      </p:sp>
-      <p:sp>
-        <p:nvSpPr>
-          <p:cNvPr id="97" name="TextBox 96"/>
-          <p:cNvSpPr txBox="1"/>
-          <p:nvPr/>
-        </p:nvSpPr>
-        <p:spPr>
-          <a:xfrm>
-            <a:off x="3291840" y="4306824"/>
-            <a:ext cx="2682240" cy="96012"/>
-          </a:xfrm>
-          <a:prstGeom prst="rect">
-            <a:avLst/>
-          </a:prstGeom>
-          <a:noFill/>
-        </p:spPr>
-        <p:txBody>
-          <a:bodyPr wrap="square" lIns="0" rIns="0" tIns="0" bIns="0" anchor="t">
-            <a:spAutoFit/>
-          </a:bodyPr>
-          <a:lstStyle/>
-          <a:p>
-            <a:pPr algn="l">
-              <a:lnSpc>
-                <a:spcPct val="100000"/>
-              </a:lnSpc>
-            </a:pPr>
-            <a:r>
-              <a:rPr sz="860" b="1">
-                <a:solidFill>
-                  <a:srgbClr val="D98A8F"/>
-                </a:solidFill>
-                <a:latin typeface="微软雅黑"/>
-                <a:ea typeface="微软雅黑"/>
-                <a:cs typeface="微软雅黑"/>
-              </a:rPr>
-              <a:t>其他市场 Top5</a:t>
-            </a:r>
-          </a:p>
-        </p:txBody>
-      </p:sp>
-      <p:sp>
-        <p:nvSpPr>
-          <p:cNvPr id="98" name="Rectangle 97"/>
+              <a:t>GitHub Top6</a:t>
+            </a:r>
+          </a:p>
+        </p:txBody>
+      </p:sp>
+      <p:sp>
+        <p:nvSpPr>
+          <p:cNvPr id="81" name="Rectangle 80"/>
           <p:cNvSpPr/>
           <p:nvPr/>
         </p:nvSpPr>
         <p:spPr>
           <a:xfrm>
-            <a:off x="3291840" y="4409694"/>
-            <a:ext cx="2682240" cy="5486"/>
+            <a:off x="573024" y="4059935"/>
+            <a:ext cx="5254752" cy="5486"/>
           </a:xfrm>
           <a:prstGeom prst="rect">
             <a:avLst/>
@@ -36231,14 +35538,14 @@
       </p:sp>
       <p:sp>
         <p:nvSpPr>
-          <p:cNvPr id="99" name="TextBox 98"/>
-          <p:cNvSpPr txBox="1"/>
-          <p:nvPr/>
-        </p:nvSpPr>
-        <p:spPr>
-          <a:xfrm>
-            <a:off x="3291840" y="4416552"/>
-            <a:ext cx="195072" cy="75438"/>
+          <p:cNvPr id="82" name="TextBox 81"/>
+          <p:cNvSpPr txBox="1"/>
+          <p:nvPr/>
+        </p:nvSpPr>
+        <p:spPr>
+          <a:xfrm>
+            <a:off x="573024" y="4087367"/>
+            <a:ext cx="170688" cy="68580"/>
           </a:xfrm>
           <a:prstGeom prst="rect">
             <a:avLst/>
@@ -36257,7 +35564,7 @@
               </a:lnSpc>
             </a:pPr>
             <a:r>
-              <a:rPr sz="750" b="1">
+              <a:rPr sz="720" b="1">
                 <a:solidFill>
                   <a:srgbClr val="B5333B"/>
                 </a:solidFill>
@@ -36272,14 +35579,14 @@
       </p:sp>
       <p:sp>
         <p:nvSpPr>
-          <p:cNvPr id="100" name="TextBox 99"/>
-          <p:cNvSpPr txBox="1"/>
-          <p:nvPr/>
-        </p:nvSpPr>
-        <p:spPr>
-          <a:xfrm>
-            <a:off x="3486912" y="4416552"/>
-            <a:ext cx="2487168" cy="75438"/>
+          <p:cNvPr id="83" name="TextBox 82"/>
+          <p:cNvSpPr txBox="1"/>
+          <p:nvPr/>
+        </p:nvSpPr>
+        <p:spPr>
+          <a:xfrm>
+            <a:off x="743712" y="4087367"/>
+            <a:ext cx="4084320" cy="68580"/>
           </a:xfrm>
           <a:prstGeom prst="rect">
             <a:avLst/>
@@ -36298,7 +35605,7 @@
               </a:lnSpc>
             </a:pPr>
             <a:r>
-              <a:rPr sz="780" b="1">
+              <a:rPr sz="720" b="1">
                 <a:solidFill>
                   <a:srgbClr val="1A1A1C"/>
                 </a:solidFill>
@@ -36306,21 +35613,62 @@
                 <a:ea typeface="微软雅黑"/>
                 <a:cs typeface="微软雅黑"/>
               </a:rPr>
-              <a:t>Mysteel_PriceSearch</a:t>
-            </a:r>
-          </a:p>
-        </p:txBody>
-      </p:sp>
-      <p:sp>
-        <p:nvSpPr>
-          <p:cNvPr id="101" name="TextBox 100"/>
-          <p:cNvSpPr txBox="1"/>
-          <p:nvPr/>
-        </p:nvSpPr>
-        <p:spPr>
-          <a:xfrm>
-            <a:off x="3486912" y="4498848"/>
-            <a:ext cx="2487168" cy="68580"/>
+              <a:t>dev-expert</a:t>
+            </a:r>
+          </a:p>
+        </p:txBody>
+      </p:sp>
+      <p:sp>
+        <p:nvSpPr>
+          <p:cNvPr id="84" name="TextBox 83"/>
+          <p:cNvSpPr txBox="1"/>
+          <p:nvPr/>
+        </p:nvSpPr>
+        <p:spPr>
+          <a:xfrm>
+            <a:off x="4876800" y="4087367"/>
+            <a:ext cx="914400" cy="68580"/>
+          </a:xfrm>
+          <a:prstGeom prst="rect">
+            <a:avLst/>
+          </a:prstGeom>
+          <a:noFill/>
+        </p:spPr>
+        <p:txBody>
+          <a:bodyPr wrap="square" lIns="0" rIns="0" tIns="0" bIns="0" anchor="t">
+            <a:spAutoFit/>
+          </a:bodyPr>
+          <a:lstStyle/>
+          <a:p>
+            <a:pPr algn="r">
+              <a:lnSpc>
+                <a:spcPct val="100000"/>
+              </a:lnSpc>
+            </a:pPr>
+            <a:r>
+              <a:rPr sz="700" b="0">
+                <a:solidFill>
+                  <a:srgbClr val="5B616B"/>
+                </a:solidFill>
+                <a:latin typeface="微软雅黑"/>
+                <a:ea typeface="微软雅黑"/>
+                <a:cs typeface="微软雅黑"/>
+              </a:rPr>
+              <a:t>1,156,332</a:t>
+            </a:r>
+          </a:p>
+        </p:txBody>
+      </p:sp>
+      <p:sp>
+        <p:nvSpPr>
+          <p:cNvPr id="85" name="TextBox 84"/>
+          <p:cNvSpPr txBox="1"/>
+          <p:nvPr/>
+        </p:nvSpPr>
+        <p:spPr>
+          <a:xfrm>
+            <a:off x="743712" y="4155947"/>
+            <a:ext cx="4876800" cy="61721"/>
           </a:xfrm>
           <a:prstGeom prst="rect">
             <a:avLst/>
@@ -36339,7 +35687,7 @@
               </a:lnSpc>
             </a:pPr>
             <a:r>
-              <a:rPr sz="700" b="0">
+              <a:rPr sz="630" b="0">
                 <a:solidFill>
                   <a:srgbClr val="5B616B"/>
                 </a:solidFill>
@@ -36347,21 +35695,21 @@
                 <a:ea typeface="微软雅黑"/>
                 <a:cs typeface="微软雅黑"/>
               </a:rPr>
-              <a:t>@wyb92 · 31,477</a:t>
-            </a:r>
-          </a:p>
-        </p:txBody>
-      </p:sp>
-      <p:sp>
-        <p:nvSpPr>
-          <p:cNvPr id="102" name="TextBox 101"/>
-          <p:cNvSpPr txBox="1"/>
-          <p:nvPr/>
-        </p:nvSpPr>
-        <p:spPr>
-          <a:xfrm>
-            <a:off x="3291840" y="4636008"/>
-            <a:ext cx="195072" cy="75438"/>
+              <a:t>ebandao</a:t>
+            </a:r>
+          </a:p>
+        </p:txBody>
+      </p:sp>
+      <p:sp>
+        <p:nvSpPr>
+          <p:cNvPr id="86" name="TextBox 85"/>
+          <p:cNvSpPr txBox="1"/>
+          <p:nvPr/>
+        </p:nvSpPr>
+        <p:spPr>
+          <a:xfrm>
+            <a:off x="573024" y="4224528"/>
+            <a:ext cx="170688" cy="68580"/>
           </a:xfrm>
           <a:prstGeom prst="rect">
             <a:avLst/>
@@ -36380,7 +35728,7 @@
               </a:lnSpc>
             </a:pPr>
             <a:r>
-              <a:rPr sz="750" b="1">
+              <a:rPr sz="720" b="1">
                 <a:solidFill>
                   <a:srgbClr val="B5333B"/>
                 </a:solidFill>
@@ -36395,14 +35743,14 @@
       </p:sp>
       <p:sp>
         <p:nvSpPr>
-          <p:cNvPr id="103" name="TextBox 102"/>
-          <p:cNvSpPr txBox="1"/>
-          <p:nvPr/>
-        </p:nvSpPr>
-        <p:spPr>
-          <a:xfrm>
-            <a:off x="3486912" y="4636008"/>
-            <a:ext cx="2487168" cy="75438"/>
+          <p:cNvPr id="87" name="TextBox 86"/>
+          <p:cNvSpPr txBox="1"/>
+          <p:nvPr/>
+        </p:nvSpPr>
+        <p:spPr>
+          <a:xfrm>
+            <a:off x="743712" y="4224528"/>
+            <a:ext cx="4084320" cy="68580"/>
           </a:xfrm>
           <a:prstGeom prst="rect">
             <a:avLst/>
@@ -36421,7 +35769,7 @@
               </a:lnSpc>
             </a:pPr>
             <a:r>
-              <a:rPr sz="780" b="1">
+              <a:rPr sz="720" b="1">
                 <a:solidFill>
                   <a:srgbClr val="1A1A1C"/>
                 </a:solidFill>
@@ -36429,21 +35777,62 @@
                 <a:ea typeface="微软雅黑"/>
                 <a:cs typeface="微软雅黑"/>
               </a:rPr>
-              <a:t>weather天气查询</a:t>
-            </a:r>
-          </a:p>
-        </p:txBody>
-      </p:sp>
-      <p:sp>
-        <p:nvSpPr>
-          <p:cNvPr id="104" name="TextBox 103"/>
-          <p:cNvSpPr txBox="1"/>
-          <p:nvPr/>
-        </p:nvSpPr>
-        <p:spPr>
-          <a:xfrm>
-            <a:off x="3486912" y="4718304"/>
-            <a:ext cx="2487168" cy="68580"/>
+              <a:t>skill-creator</a:t>
+            </a:r>
+          </a:p>
+        </p:txBody>
+      </p:sp>
+      <p:sp>
+        <p:nvSpPr>
+          <p:cNvPr id="88" name="TextBox 87"/>
+          <p:cNvSpPr txBox="1"/>
+          <p:nvPr/>
+        </p:nvSpPr>
+        <p:spPr>
+          <a:xfrm>
+            <a:off x="4876800" y="4224528"/>
+            <a:ext cx="914400" cy="68580"/>
+          </a:xfrm>
+          <a:prstGeom prst="rect">
+            <a:avLst/>
+          </a:prstGeom>
+          <a:noFill/>
+        </p:spPr>
+        <p:txBody>
+          <a:bodyPr wrap="square" lIns="0" rIns="0" tIns="0" bIns="0" anchor="t">
+            <a:spAutoFit/>
+          </a:bodyPr>
+          <a:lstStyle/>
+          <a:p>
+            <a:pPr algn="r">
+              <a:lnSpc>
+                <a:spcPct val="100000"/>
+              </a:lnSpc>
+            </a:pPr>
+            <a:r>
+              <a:rPr sz="700" b="0">
+                <a:solidFill>
+                  <a:srgbClr val="5B616B"/>
+                </a:solidFill>
+                <a:latin typeface="微软雅黑"/>
+                <a:ea typeface="微软雅黑"/>
+                <a:cs typeface="微软雅黑"/>
+              </a:rPr>
+              <a:t>20,876</a:t>
+            </a:r>
+          </a:p>
+        </p:txBody>
+      </p:sp>
+      <p:sp>
+        <p:nvSpPr>
+          <p:cNvPr id="89" name="TextBox 88"/>
+          <p:cNvSpPr txBox="1"/>
+          <p:nvPr/>
+        </p:nvSpPr>
+        <p:spPr>
+          <a:xfrm>
+            <a:off x="743712" y="4293108"/>
+            <a:ext cx="4876800" cy="61721"/>
           </a:xfrm>
           <a:prstGeom prst="rect">
             <a:avLst/>
@@ -36462,7 +35851,7 @@
               </a:lnSpc>
             </a:pPr>
             <a:r>
-              <a:rPr sz="700" b="0">
+              <a:rPr sz="630" b="0">
                 <a:solidFill>
                   <a:srgbClr val="5B616B"/>
                 </a:solidFill>
@@ -36470,21 +35859,21 @@
                 <a:ea typeface="微软雅黑"/>
                 <a:cs typeface="微软雅黑"/>
               </a:rPr>
-              <a:t>@steipete · 5,818</a:t>
-            </a:r>
-          </a:p>
-        </p:txBody>
-      </p:sp>
-      <p:sp>
-        <p:nvSpPr>
-          <p:cNvPr id="105" name="TextBox 104"/>
-          <p:cNvSpPr txBox="1"/>
-          <p:nvPr/>
-        </p:nvSpPr>
-        <p:spPr>
-          <a:xfrm>
-            <a:off x="3291840" y="4855464"/>
-            <a:ext cx="195072" cy="75438"/>
+              <a:t>@anthropics</a:t>
+            </a:r>
+          </a:p>
+        </p:txBody>
+      </p:sp>
+      <p:sp>
+        <p:nvSpPr>
+          <p:cNvPr id="90" name="TextBox 89"/>
+          <p:cNvSpPr txBox="1"/>
+          <p:nvPr/>
+        </p:nvSpPr>
+        <p:spPr>
+          <a:xfrm>
+            <a:off x="573024" y="4361688"/>
+            <a:ext cx="170688" cy="68580"/>
           </a:xfrm>
           <a:prstGeom prst="rect">
             <a:avLst/>
@@ -36503,7 +35892,7 @@
               </a:lnSpc>
             </a:pPr>
             <a:r>
-              <a:rPr sz="750" b="1">
+              <a:rPr sz="720" b="1">
                 <a:solidFill>
                   <a:srgbClr val="B5333B"/>
                 </a:solidFill>
@@ -36518,14 +35907,14 @@
       </p:sp>
       <p:sp>
         <p:nvSpPr>
-          <p:cNvPr id="106" name="TextBox 105"/>
-          <p:cNvSpPr txBox="1"/>
-          <p:nvPr/>
-        </p:nvSpPr>
-        <p:spPr>
-          <a:xfrm>
-            <a:off x="3486912" y="4855464"/>
-            <a:ext cx="2487168" cy="75438"/>
+          <p:cNvPr id="91" name="TextBox 90"/>
+          <p:cNvSpPr txBox="1"/>
+          <p:nvPr/>
+        </p:nvSpPr>
+        <p:spPr>
+          <a:xfrm>
+            <a:off x="743712" y="4361688"/>
+            <a:ext cx="4084320" cy="68580"/>
           </a:xfrm>
           <a:prstGeom prst="rect">
             <a:avLst/>
@@ -36544,7 +35933,7 @@
               </a:lnSpc>
             </a:pPr>
             <a:r>
-              <a:rPr sz="780" b="1">
+              <a:rPr sz="720" b="1">
                 <a:solidFill>
                   <a:srgbClr val="1A1A1C"/>
                 </a:solidFill>
@@ -36552,21 +35941,62 @@
                 <a:ea typeface="微软雅黑"/>
                 <a:cs typeface="微软雅黑"/>
               </a:rPr>
-              <a:t>summarize</a:t>
-            </a:r>
-          </a:p>
-        </p:txBody>
-      </p:sp>
-      <p:sp>
-        <p:nvSpPr>
-          <p:cNvPr id="107" name="TextBox 106"/>
-          <p:cNvSpPr txBox="1"/>
-          <p:nvPr/>
-        </p:nvSpPr>
-        <p:spPr>
-          <a:xfrm>
-            <a:off x="3486912" y="4937760"/>
-            <a:ext cx="2487168" cy="68580"/>
+              <a:t>mattress-sleep-support-advisor（床垫选购顾问）</a:t>
+            </a:r>
+          </a:p>
+        </p:txBody>
+      </p:sp>
+      <p:sp>
+        <p:nvSpPr>
+          <p:cNvPr id="92" name="TextBox 91"/>
+          <p:cNvSpPr txBox="1"/>
+          <p:nvPr/>
+        </p:nvSpPr>
+        <p:spPr>
+          <a:xfrm>
+            <a:off x="4876800" y="4361688"/>
+            <a:ext cx="914400" cy="68580"/>
+          </a:xfrm>
+          <a:prstGeom prst="rect">
+            <a:avLst/>
+          </a:prstGeom>
+          <a:noFill/>
+        </p:spPr>
+        <p:txBody>
+          <a:bodyPr wrap="square" lIns="0" rIns="0" tIns="0" bIns="0" anchor="t">
+            <a:spAutoFit/>
+          </a:bodyPr>
+          <a:lstStyle/>
+          <a:p>
+            <a:pPr algn="r">
+              <a:lnSpc>
+                <a:spcPct val="100000"/>
+              </a:lnSpc>
+            </a:pPr>
+            <a:r>
+              <a:rPr sz="700" b="0">
+                <a:solidFill>
+                  <a:srgbClr val="5B616B"/>
+                </a:solidFill>
+                <a:latin typeface="微软雅黑"/>
+                <a:ea typeface="微软雅黑"/>
+                <a:cs typeface="微软雅黑"/>
+              </a:rPr>
+              <a:t>19,487</a:t>
+            </a:r>
+          </a:p>
+        </p:txBody>
+      </p:sp>
+      <p:sp>
+        <p:nvSpPr>
+          <p:cNvPr id="93" name="TextBox 92"/>
+          <p:cNvSpPr txBox="1"/>
+          <p:nvPr/>
+        </p:nvSpPr>
+        <p:spPr>
+          <a:xfrm>
+            <a:off x="743712" y="4430268"/>
+            <a:ext cx="4876800" cy="61721"/>
           </a:xfrm>
           <a:prstGeom prst="rect">
             <a:avLst/>
@@ -36585,7 +36015,7 @@
               </a:lnSpc>
             </a:pPr>
             <a:r>
-              <a:rPr sz="700" b="0">
+              <a:rPr sz="630" b="0">
                 <a:solidFill>
                   <a:srgbClr val="5B616B"/>
                 </a:solidFill>
@@ -36593,21 +36023,21 @@
                 <a:ea typeface="微软雅黑"/>
                 <a:cs typeface="微软雅黑"/>
               </a:rPr>
-              <a:t>@steipete · 3,844</a:t>
-            </a:r>
-          </a:p>
-        </p:txBody>
-      </p:sp>
-      <p:sp>
-        <p:nvSpPr>
-          <p:cNvPr id="108" name="TextBox 107"/>
-          <p:cNvSpPr txBox="1"/>
-          <p:nvPr/>
-        </p:nvSpPr>
-        <p:spPr>
-          <a:xfrm>
-            <a:off x="3291840" y="5074920"/>
-            <a:ext cx="195072" cy="75438"/>
+              <a:t>alv123</a:t>
+            </a:r>
+          </a:p>
+        </p:txBody>
+      </p:sp>
+      <p:sp>
+        <p:nvSpPr>
+          <p:cNvPr id="94" name="TextBox 93"/>
+          <p:cNvSpPr txBox="1"/>
+          <p:nvPr/>
+        </p:nvSpPr>
+        <p:spPr>
+          <a:xfrm>
+            <a:off x="573024" y="4498848"/>
+            <a:ext cx="170688" cy="68580"/>
           </a:xfrm>
           <a:prstGeom prst="rect">
             <a:avLst/>
@@ -36626,7 +36056,7 @@
               </a:lnSpc>
             </a:pPr>
             <a:r>
-              <a:rPr sz="750" b="1">
+              <a:rPr sz="720" b="1">
                 <a:solidFill>
                   <a:srgbClr val="B5333B"/>
                 </a:solidFill>
@@ -36641,14 +36071,14 @@
       </p:sp>
       <p:sp>
         <p:nvSpPr>
-          <p:cNvPr id="109" name="TextBox 108"/>
-          <p:cNvSpPr txBox="1"/>
-          <p:nvPr/>
-        </p:nvSpPr>
-        <p:spPr>
-          <a:xfrm>
-            <a:off x="3486912" y="5074920"/>
-            <a:ext cx="2487168" cy="75438"/>
+          <p:cNvPr id="95" name="TextBox 94"/>
+          <p:cNvSpPr txBox="1"/>
+          <p:nvPr/>
+        </p:nvSpPr>
+        <p:spPr>
+          <a:xfrm>
+            <a:off x="743712" y="4498848"/>
+            <a:ext cx="4084320" cy="68580"/>
           </a:xfrm>
           <a:prstGeom prst="rect">
             <a:avLst/>
@@ -36667,7 +36097,7 @@
               </a:lnSpc>
             </a:pPr>
             <a:r>
-              <a:rPr sz="780" b="1">
+              <a:rPr sz="720" b="1">
                 <a:solidFill>
                   <a:srgbClr val="1A1A1C"/>
                 </a:solidFill>
@@ -36675,21 +36105,62 @@
                 <a:ea typeface="微软雅黑"/>
                 <a:cs typeface="微软雅黑"/>
               </a:rPr>
-              <a:t>Skill Vetter 安全扫描</a:t>
-            </a:r>
-          </a:p>
-        </p:txBody>
-      </p:sp>
-      <p:sp>
-        <p:nvSpPr>
-          <p:cNvPr id="110" name="TextBox 109"/>
-          <p:cNvSpPr txBox="1"/>
-          <p:nvPr/>
-        </p:nvSpPr>
-        <p:spPr>
-          <a:xfrm>
-            <a:off x="3486912" y="5157216"/>
-            <a:ext cx="2487168" cy="68580"/>
+              <a:t>frontend-design</a:t>
+            </a:r>
+          </a:p>
+        </p:txBody>
+      </p:sp>
+      <p:sp>
+        <p:nvSpPr>
+          <p:cNvPr id="96" name="TextBox 95"/>
+          <p:cNvSpPr txBox="1"/>
+          <p:nvPr/>
+        </p:nvSpPr>
+        <p:spPr>
+          <a:xfrm>
+            <a:off x="4876800" y="4498848"/>
+            <a:ext cx="914400" cy="68580"/>
+          </a:xfrm>
+          <a:prstGeom prst="rect">
+            <a:avLst/>
+          </a:prstGeom>
+          <a:noFill/>
+        </p:spPr>
+        <p:txBody>
+          <a:bodyPr wrap="square" lIns="0" rIns="0" tIns="0" bIns="0" anchor="t">
+            <a:spAutoFit/>
+          </a:bodyPr>
+          <a:lstStyle/>
+          <a:p>
+            <a:pPr algn="r">
+              <a:lnSpc>
+                <a:spcPct val="100000"/>
+              </a:lnSpc>
+            </a:pPr>
+            <a:r>
+              <a:rPr sz="700" b="0">
+                <a:solidFill>
+                  <a:srgbClr val="5B616B"/>
+                </a:solidFill>
+                <a:latin typeface="微软雅黑"/>
+                <a:ea typeface="微软雅黑"/>
+                <a:cs typeface="微软雅黑"/>
+              </a:rPr>
+              <a:t>16,285</a:t>
+            </a:r>
+          </a:p>
+        </p:txBody>
+      </p:sp>
+      <p:sp>
+        <p:nvSpPr>
+          <p:cNvPr id="97" name="TextBox 96"/>
+          <p:cNvSpPr txBox="1"/>
+          <p:nvPr/>
+        </p:nvSpPr>
+        <p:spPr>
+          <a:xfrm>
+            <a:off x="743712" y="4567428"/>
+            <a:ext cx="4876800" cy="61721"/>
           </a:xfrm>
           <a:prstGeom prst="rect">
             <a:avLst/>
@@ -36708,7 +36179,7 @@
               </a:lnSpc>
             </a:pPr>
             <a:r>
-              <a:rPr sz="700" b="0">
+              <a:rPr sz="630" b="0">
                 <a:solidFill>
                   <a:srgbClr val="5B616B"/>
                 </a:solidFill>
@@ -36716,21 +36187,21 @@
                 <a:ea typeface="微软雅黑"/>
                 <a:cs typeface="微软雅黑"/>
               </a:rPr>
-              <a:t>@spclaudehome · 3,781</a:t>
-            </a:r>
-          </a:p>
-        </p:txBody>
-      </p:sp>
-      <p:sp>
-        <p:nvSpPr>
-          <p:cNvPr id="111" name="TextBox 110"/>
-          <p:cNvSpPr txBox="1"/>
-          <p:nvPr/>
-        </p:nvSpPr>
-        <p:spPr>
-          <a:xfrm>
-            <a:off x="3291840" y="5294376"/>
-            <a:ext cx="195072" cy="75438"/>
+              <a:t>@anthropics</a:t>
+            </a:r>
+          </a:p>
+        </p:txBody>
+      </p:sp>
+      <p:sp>
+        <p:nvSpPr>
+          <p:cNvPr id="98" name="TextBox 97"/>
+          <p:cNvSpPr txBox="1"/>
+          <p:nvPr/>
+        </p:nvSpPr>
+        <p:spPr>
+          <a:xfrm>
+            <a:off x="573024" y="4636008"/>
+            <a:ext cx="170688" cy="68580"/>
           </a:xfrm>
           <a:prstGeom prst="rect">
             <a:avLst/>
@@ -36749,7 +36220,7 @@
               </a:lnSpc>
             </a:pPr>
             <a:r>
-              <a:rPr sz="750" b="1">
+              <a:rPr sz="720" b="1">
                 <a:solidFill>
                   <a:srgbClr val="B5333B"/>
                 </a:solidFill>
@@ -36764,14 +36235,14 @@
       </p:sp>
       <p:sp>
         <p:nvSpPr>
-          <p:cNvPr id="112" name="TextBox 111"/>
-          <p:cNvSpPr txBox="1"/>
-          <p:nvPr/>
-        </p:nvSpPr>
-        <p:spPr>
-          <a:xfrm>
-            <a:off x="3486912" y="5294376"/>
-            <a:ext cx="2487168" cy="75438"/>
+          <p:cNvPr id="99" name="TextBox 98"/>
+          <p:cNvSpPr txBox="1"/>
+          <p:nvPr/>
+        </p:nvSpPr>
+        <p:spPr>
+          <a:xfrm>
+            <a:off x="743712" y="4636008"/>
+            <a:ext cx="4084320" cy="68580"/>
           </a:xfrm>
           <a:prstGeom prst="rect">
             <a:avLst/>
@@ -36790,7 +36261,7 @@
               </a:lnSpc>
             </a:pPr>
             <a:r>
-              <a:rPr sz="780" b="1">
+              <a:rPr sz="720" b="1">
                 <a:solidFill>
                   <a:srgbClr val="1A1A1C"/>
                 </a:solidFill>
@@ -36798,21 +36269,62 @@
                 <a:ea typeface="微软雅黑"/>
                 <a:cs typeface="微软雅黑"/>
               </a:rPr>
-              <a:t>github</a:t>
-            </a:r>
-          </a:p>
-        </p:txBody>
-      </p:sp>
-      <p:sp>
-        <p:nvSpPr>
-          <p:cNvPr id="113" name="TextBox 112"/>
-          <p:cNvSpPr txBox="1"/>
-          <p:nvPr/>
-        </p:nvSpPr>
-        <p:spPr>
-          <a:xfrm>
-            <a:off x="3486912" y="5376672"/>
-            <a:ext cx="2487168" cy="68580"/>
+              <a:t>oneskills</a:t>
+            </a:r>
+          </a:p>
+        </p:txBody>
+      </p:sp>
+      <p:sp>
+        <p:nvSpPr>
+          <p:cNvPr id="100" name="TextBox 99"/>
+          <p:cNvSpPr txBox="1"/>
+          <p:nvPr/>
+        </p:nvSpPr>
+        <p:spPr>
+          <a:xfrm>
+            <a:off x="4876800" y="4636008"/>
+            <a:ext cx="914400" cy="68580"/>
+          </a:xfrm>
+          <a:prstGeom prst="rect">
+            <a:avLst/>
+          </a:prstGeom>
+          <a:noFill/>
+        </p:spPr>
+        <p:txBody>
+          <a:bodyPr wrap="square" lIns="0" rIns="0" tIns="0" bIns="0" anchor="t">
+            <a:spAutoFit/>
+          </a:bodyPr>
+          <a:lstStyle/>
+          <a:p>
+            <a:pPr algn="r">
+              <a:lnSpc>
+                <a:spcPct val="100000"/>
+              </a:lnSpc>
+            </a:pPr>
+            <a:r>
+              <a:rPr sz="700" b="0">
+                <a:solidFill>
+                  <a:srgbClr val="5B616B"/>
+                </a:solidFill>
+                <a:latin typeface="微软雅黑"/>
+                <a:ea typeface="微软雅黑"/>
+                <a:cs typeface="微软雅黑"/>
+              </a:rPr>
+              <a:t>12,861</a:t>
+            </a:r>
+          </a:p>
+        </p:txBody>
+      </p:sp>
+      <p:sp>
+        <p:nvSpPr>
+          <p:cNvPr id="101" name="TextBox 100"/>
+          <p:cNvSpPr txBox="1"/>
+          <p:nvPr/>
+        </p:nvSpPr>
+        <p:spPr>
+          <a:xfrm>
+            <a:off x="743712" y="4704588"/>
+            <a:ext cx="4876800" cy="61721"/>
           </a:xfrm>
           <a:prstGeom prst="rect">
             <a:avLst/>
@@ -36831,7 +36343,7 @@
               </a:lnSpc>
             </a:pPr>
             <a:r>
-              <a:rPr sz="700" b="0">
+              <a:rPr sz="630" b="0">
                 <a:solidFill>
                   <a:srgbClr val="5B616B"/>
                 </a:solidFill>
@@ -36839,21 +36351,21 @@
                 <a:ea typeface="微软雅黑"/>
                 <a:cs typeface="微软雅黑"/>
               </a:rPr>
-              <a:t>@steipete · 2,666</a:t>
-            </a:r>
-          </a:p>
-        </p:txBody>
-      </p:sp>
-      <p:sp>
-        <p:nvSpPr>
-          <p:cNvPr id="114" name="TextBox 113"/>
-          <p:cNvSpPr txBox="1"/>
-          <p:nvPr/>
-        </p:nvSpPr>
-        <p:spPr>
-          <a:xfrm>
-            <a:off x="6156960" y="4306824"/>
-            <a:ext cx="2682240" cy="96012"/>
+              <a:t>OneScience</a:t>
+            </a:r>
+          </a:p>
+        </p:txBody>
+      </p:sp>
+      <p:sp>
+        <p:nvSpPr>
+          <p:cNvPr id="102" name="TextBox 101"/>
+          <p:cNvSpPr txBox="1"/>
+          <p:nvPr/>
+        </p:nvSpPr>
+        <p:spPr>
+          <a:xfrm>
+            <a:off x="573024" y="4773168"/>
+            <a:ext cx="170688" cy="68580"/>
           </a:xfrm>
           <a:prstGeom prst="rect">
             <a:avLst/>
@@ -36872,38 +36384,165 @@
               </a:lnSpc>
             </a:pPr>
             <a:r>
-              <a:rPr sz="860" b="1">
-                <a:solidFill>
-                  <a:srgbClr val="6B7785"/>
-                </a:solidFill>
-                <a:latin typeface="微软雅黑"/>
-                <a:ea typeface="微软雅黑"/>
-                <a:cs typeface="微软雅黑"/>
-              </a:rPr>
-              <a:t>外部网站 Top5</a:t>
-            </a:r>
-          </a:p>
-        </p:txBody>
-      </p:sp>
-      <p:sp>
-        <p:nvSpPr>
-          <p:cNvPr id="115" name="Rectangle 114"/>
+              <a:rPr sz="720" b="1">
+                <a:solidFill>
+                  <a:srgbClr val="B5333B"/>
+                </a:solidFill>
+                <a:latin typeface="微软雅黑"/>
+                <a:ea typeface="微软雅黑"/>
+                <a:cs typeface="微软雅黑"/>
+              </a:rPr>
+              <a:t>6</a:t>
+            </a:r>
+          </a:p>
+        </p:txBody>
+      </p:sp>
+      <p:sp>
+        <p:nvSpPr>
+          <p:cNvPr id="103" name="TextBox 102"/>
+          <p:cNvSpPr txBox="1"/>
+          <p:nvPr/>
+        </p:nvSpPr>
+        <p:spPr>
+          <a:xfrm>
+            <a:off x="743712" y="4773168"/>
+            <a:ext cx="4084320" cy="68580"/>
+          </a:xfrm>
+          <a:prstGeom prst="rect">
+            <a:avLst/>
+          </a:prstGeom>
+          <a:noFill/>
+        </p:spPr>
+        <p:txBody>
+          <a:bodyPr wrap="square" lIns="0" rIns="0" tIns="0" bIns="0" anchor="t">
+            <a:spAutoFit/>
+          </a:bodyPr>
+          <a:lstStyle/>
+          <a:p>
+            <a:pPr algn="l">
+              <a:lnSpc>
+                <a:spcPct val="100000"/>
+              </a:lnSpc>
+            </a:pPr>
+            <a:r>
+              <a:rPr sz="720" b="1">
+                <a:solidFill>
+                  <a:srgbClr val="1A1A1C"/>
+                </a:solidFill>
+                <a:latin typeface="微软雅黑"/>
+                <a:ea typeface="微软雅黑"/>
+                <a:cs typeface="微软雅黑"/>
+              </a:rPr>
+              <a:t>docx</a:t>
+            </a:r>
+          </a:p>
+        </p:txBody>
+      </p:sp>
+      <p:sp>
+        <p:nvSpPr>
+          <p:cNvPr id="104" name="TextBox 103"/>
+          <p:cNvSpPr txBox="1"/>
+          <p:nvPr/>
+        </p:nvSpPr>
+        <p:spPr>
+          <a:xfrm>
+            <a:off x="4876800" y="4773168"/>
+            <a:ext cx="914400" cy="68580"/>
+          </a:xfrm>
+          <a:prstGeom prst="rect">
+            <a:avLst/>
+          </a:prstGeom>
+          <a:noFill/>
+        </p:spPr>
+        <p:txBody>
+          <a:bodyPr wrap="square" lIns="0" rIns="0" tIns="0" bIns="0" anchor="t">
+            <a:spAutoFit/>
+          </a:bodyPr>
+          <a:lstStyle/>
+          <a:p>
+            <a:pPr algn="r">
+              <a:lnSpc>
+                <a:spcPct val="100000"/>
+              </a:lnSpc>
+            </a:pPr>
+            <a:r>
+              <a:rPr sz="700" b="0">
+                <a:solidFill>
+                  <a:srgbClr val="5B616B"/>
+                </a:solidFill>
+                <a:latin typeface="微软雅黑"/>
+                <a:ea typeface="微软雅黑"/>
+                <a:cs typeface="微软雅黑"/>
+              </a:rPr>
+              <a:t>10,754</a:t>
+            </a:r>
+          </a:p>
+        </p:txBody>
+      </p:sp>
+      <p:sp>
+        <p:nvSpPr>
+          <p:cNvPr id="105" name="TextBox 104"/>
+          <p:cNvSpPr txBox="1"/>
+          <p:nvPr/>
+        </p:nvSpPr>
+        <p:spPr>
+          <a:xfrm>
+            <a:off x="743712" y="4841748"/>
+            <a:ext cx="4876800" cy="61721"/>
+          </a:xfrm>
+          <a:prstGeom prst="rect">
+            <a:avLst/>
+          </a:prstGeom>
+          <a:noFill/>
+        </p:spPr>
+        <p:txBody>
+          <a:bodyPr wrap="square" lIns="0" rIns="0" tIns="0" bIns="0" anchor="t">
+            <a:spAutoFit/>
+          </a:bodyPr>
+          <a:lstStyle/>
+          <a:p>
+            <a:pPr algn="l">
+              <a:lnSpc>
+                <a:spcPct val="100000"/>
+              </a:lnSpc>
+            </a:pPr>
+            <a:r>
+              <a:rPr sz="630" b="0">
+                <a:solidFill>
+                  <a:srgbClr val="5B616B"/>
+                </a:solidFill>
+                <a:latin typeface="微软雅黑"/>
+                <a:ea typeface="微软雅黑"/>
+                <a:cs typeface="微软雅黑"/>
+              </a:rPr>
+              <a:t>@anthropics</a:t>
+            </a:r>
+          </a:p>
+        </p:txBody>
+      </p:sp>
+      <p:sp>
+        <p:nvSpPr>
+          <p:cNvPr id="106" name="Rounded Rectangle 105"/>
           <p:cNvSpPr/>
           <p:nvPr/>
         </p:nvSpPr>
         <p:spPr>
           <a:xfrm>
-            <a:off x="6156960" y="4409694"/>
-            <a:ext cx="2682240" cy="5486"/>
-          </a:xfrm>
-          <a:prstGeom prst="rect">
-            <a:avLst/>
+            <a:off x="6217920" y="3909059"/>
+            <a:ext cx="5547360" cy="1014984"/>
+          </a:xfrm>
+          <a:prstGeom prst="roundRect">
+            <a:avLst>
+              <a:gd name="adj" fmla="val 2000"/>
+            </a:avLst>
           </a:prstGeom>
           <a:solidFill>
-            <a:srgbClr val="E2E4E7"/>
+            <a:srgbClr val="FFFFFF"/>
           </a:solidFill>
-          <a:ln>
-            <a:noFill/>
+          <a:ln w="9525">
+            <a:solidFill>
+              <a:srgbClr val="E2E4E7"/>
+            </a:solidFill>
           </a:ln>
           <a:effectLst/>
         </p:spPr>
@@ -36931,14 +36570,14 @@
       </p:sp>
       <p:sp>
         <p:nvSpPr>
-          <p:cNvPr id="116" name="TextBox 115"/>
-          <p:cNvSpPr txBox="1"/>
-          <p:nvPr/>
-        </p:nvSpPr>
-        <p:spPr>
-          <a:xfrm>
-            <a:off x="6156960" y="4416552"/>
-            <a:ext cx="195072" cy="75438"/>
+          <p:cNvPr id="107" name="TextBox 106"/>
+          <p:cNvSpPr txBox="1"/>
+          <p:nvPr/>
+        </p:nvSpPr>
+        <p:spPr>
+          <a:xfrm>
+            <a:off x="6364224" y="3957065"/>
+            <a:ext cx="3657600" cy="96012"/>
           </a:xfrm>
           <a:prstGeom prst="rect">
             <a:avLst/>
@@ -36957,644 +36596,29 @@
               </a:lnSpc>
             </a:pPr>
             <a:r>
-              <a:rPr sz="750" b="1">
-                <a:solidFill>
-                  <a:srgbClr val="B5333B"/>
-                </a:solidFill>
-                <a:latin typeface="微软雅黑"/>
-                <a:ea typeface="微软雅黑"/>
-                <a:cs typeface="微软雅黑"/>
-              </a:rPr>
-              <a:t>1</a:t>
-            </a:r>
-          </a:p>
-        </p:txBody>
-      </p:sp>
-      <p:sp>
-        <p:nvSpPr>
-          <p:cNvPr id="117" name="TextBox 116"/>
-          <p:cNvSpPr txBox="1"/>
-          <p:nvPr/>
-        </p:nvSpPr>
-        <p:spPr>
-          <a:xfrm>
-            <a:off x="6352032" y="4416552"/>
-            <a:ext cx="2487168" cy="75438"/>
-          </a:xfrm>
-          <a:prstGeom prst="rect">
-            <a:avLst/>
-          </a:prstGeom>
-          <a:noFill/>
-        </p:spPr>
-        <p:txBody>
-          <a:bodyPr wrap="square" lIns="0" rIns="0" tIns="0" bIns="0" anchor="t">
-            <a:spAutoFit/>
-          </a:bodyPr>
-          <a:lstStyle/>
-          <a:p>
-            <a:pPr algn="l">
-              <a:lnSpc>
-                <a:spcPct val="100000"/>
-              </a:lnSpc>
-            </a:pPr>
-            <a:r>
-              <a:rPr sz="780" b="1">
-                <a:solidFill>
-                  <a:srgbClr val="1A1A1C"/>
-                </a:solidFill>
-                <a:latin typeface="微软雅黑"/>
-                <a:ea typeface="微软雅黑"/>
-                <a:cs typeface="微软雅黑"/>
-              </a:rPr>
-              <a:t>小包公智能法律专家</a:t>
-            </a:r>
-          </a:p>
-        </p:txBody>
-      </p:sp>
-      <p:sp>
-        <p:nvSpPr>
-          <p:cNvPr id="118" name="TextBox 117"/>
-          <p:cNvSpPr txBox="1"/>
-          <p:nvPr/>
-        </p:nvSpPr>
-        <p:spPr>
-          <a:xfrm>
-            <a:off x="6352032" y="4498848"/>
-            <a:ext cx="2487168" cy="68580"/>
-          </a:xfrm>
-          <a:prstGeom prst="rect">
-            <a:avLst/>
-          </a:prstGeom>
-          <a:noFill/>
-        </p:spPr>
-        <p:txBody>
-          <a:bodyPr wrap="square" lIns="0" rIns="0" tIns="0" bIns="0" anchor="t">
-            <a:spAutoFit/>
-          </a:bodyPr>
-          <a:lstStyle/>
-          <a:p>
-            <a:pPr algn="l">
-              <a:lnSpc>
-                <a:spcPct val="100000"/>
-              </a:lnSpc>
-            </a:pPr>
-            <a:r>
-              <a:rPr sz="700" b="0">
-                <a:solidFill>
-                  <a:srgbClr val="5B616B"/>
-                </a:solidFill>
-                <a:latin typeface="微软雅黑"/>
-                <a:ea typeface="微软雅黑"/>
-                <a:cs typeface="微软雅黑"/>
-              </a:rPr>
-              <a:t>xbgai123 · 27,742</a:t>
-            </a:r>
-          </a:p>
-        </p:txBody>
-      </p:sp>
-      <p:sp>
-        <p:nvSpPr>
-          <p:cNvPr id="119" name="TextBox 118"/>
-          <p:cNvSpPr txBox="1"/>
-          <p:nvPr/>
-        </p:nvSpPr>
-        <p:spPr>
-          <a:xfrm>
-            <a:off x="6156960" y="4636008"/>
-            <a:ext cx="195072" cy="75438"/>
-          </a:xfrm>
-          <a:prstGeom prst="rect">
-            <a:avLst/>
-          </a:prstGeom>
-          <a:noFill/>
-        </p:spPr>
-        <p:txBody>
-          <a:bodyPr wrap="square" lIns="0" rIns="0" tIns="0" bIns="0" anchor="t">
-            <a:spAutoFit/>
-          </a:bodyPr>
-          <a:lstStyle/>
-          <a:p>
-            <a:pPr algn="l">
-              <a:lnSpc>
-                <a:spcPct val="100000"/>
-              </a:lnSpc>
-            </a:pPr>
-            <a:r>
-              <a:rPr sz="750" b="1">
-                <a:solidFill>
-                  <a:srgbClr val="B5333B"/>
-                </a:solidFill>
-                <a:latin typeface="微软雅黑"/>
-                <a:ea typeface="微软雅黑"/>
-                <a:cs typeface="微软雅黑"/>
-              </a:rPr>
-              <a:t>2</a:t>
-            </a:r>
-          </a:p>
-        </p:txBody>
-      </p:sp>
-      <p:sp>
-        <p:nvSpPr>
-          <p:cNvPr id="120" name="TextBox 119"/>
-          <p:cNvSpPr txBox="1"/>
-          <p:nvPr/>
-        </p:nvSpPr>
-        <p:spPr>
-          <a:xfrm>
-            <a:off x="6352032" y="4636008"/>
-            <a:ext cx="2487168" cy="75438"/>
-          </a:xfrm>
-          <a:prstGeom prst="rect">
-            <a:avLst/>
-          </a:prstGeom>
-          <a:noFill/>
-        </p:spPr>
-        <p:txBody>
-          <a:bodyPr wrap="square" lIns="0" rIns="0" tIns="0" bIns="0" anchor="t">
-            <a:spAutoFit/>
-          </a:bodyPr>
-          <a:lstStyle/>
-          <a:p>
-            <a:pPr algn="l">
-              <a:lnSpc>
-                <a:spcPct val="100000"/>
-              </a:lnSpc>
-            </a:pPr>
-            <a:r>
-              <a:rPr sz="780" b="1">
-                <a:solidFill>
-                  <a:srgbClr val="1A1A1C"/>
-                </a:solidFill>
-                <a:latin typeface="微软雅黑"/>
-                <a:ea typeface="微软雅黑"/>
-                <a:cs typeface="微软雅黑"/>
-              </a:rPr>
-              <a:t>小包公智能合同起草</a:t>
-            </a:r>
-          </a:p>
-        </p:txBody>
-      </p:sp>
-      <p:sp>
-        <p:nvSpPr>
-          <p:cNvPr id="121" name="TextBox 120"/>
-          <p:cNvSpPr txBox="1"/>
-          <p:nvPr/>
-        </p:nvSpPr>
-        <p:spPr>
-          <a:xfrm>
-            <a:off x="6352032" y="4718304"/>
-            <a:ext cx="2487168" cy="68580"/>
-          </a:xfrm>
-          <a:prstGeom prst="rect">
-            <a:avLst/>
-          </a:prstGeom>
-          <a:noFill/>
-        </p:spPr>
-        <p:txBody>
-          <a:bodyPr wrap="square" lIns="0" rIns="0" tIns="0" bIns="0" anchor="t">
-            <a:spAutoFit/>
-          </a:bodyPr>
-          <a:lstStyle/>
-          <a:p>
-            <a:pPr algn="l">
-              <a:lnSpc>
-                <a:spcPct val="100000"/>
-              </a:lnSpc>
-            </a:pPr>
-            <a:r>
-              <a:rPr sz="700" b="0">
-                <a:solidFill>
-                  <a:srgbClr val="5B616B"/>
-                </a:solidFill>
-                <a:latin typeface="微软雅黑"/>
-                <a:ea typeface="微软雅黑"/>
-                <a:cs typeface="微软雅黑"/>
-              </a:rPr>
-              <a:t>xbgai123 · 26,770</a:t>
-            </a:r>
-          </a:p>
-        </p:txBody>
-      </p:sp>
-      <p:sp>
-        <p:nvSpPr>
-          <p:cNvPr id="122" name="TextBox 121"/>
-          <p:cNvSpPr txBox="1"/>
-          <p:nvPr/>
-        </p:nvSpPr>
-        <p:spPr>
-          <a:xfrm>
-            <a:off x="6156960" y="4855464"/>
-            <a:ext cx="195072" cy="75438"/>
-          </a:xfrm>
-          <a:prstGeom prst="rect">
-            <a:avLst/>
-          </a:prstGeom>
-          <a:noFill/>
-        </p:spPr>
-        <p:txBody>
-          <a:bodyPr wrap="square" lIns="0" rIns="0" tIns="0" bIns="0" anchor="t">
-            <a:spAutoFit/>
-          </a:bodyPr>
-          <a:lstStyle/>
-          <a:p>
-            <a:pPr algn="l">
-              <a:lnSpc>
-                <a:spcPct val="100000"/>
-              </a:lnSpc>
-            </a:pPr>
-            <a:r>
-              <a:rPr sz="750" b="1">
-                <a:solidFill>
-                  <a:srgbClr val="B5333B"/>
-                </a:solidFill>
-                <a:latin typeface="微软雅黑"/>
-                <a:ea typeface="微软雅黑"/>
-                <a:cs typeface="微软雅黑"/>
-              </a:rPr>
-              <a:t>3</a:t>
-            </a:r>
-          </a:p>
-        </p:txBody>
-      </p:sp>
-      <p:sp>
-        <p:nvSpPr>
-          <p:cNvPr id="123" name="TextBox 122"/>
-          <p:cNvSpPr txBox="1"/>
-          <p:nvPr/>
-        </p:nvSpPr>
-        <p:spPr>
-          <a:xfrm>
-            <a:off x="6352032" y="4855464"/>
-            <a:ext cx="2487168" cy="75438"/>
-          </a:xfrm>
-          <a:prstGeom prst="rect">
-            <a:avLst/>
-          </a:prstGeom>
-          <a:noFill/>
-        </p:spPr>
-        <p:txBody>
-          <a:bodyPr wrap="square" lIns="0" rIns="0" tIns="0" bIns="0" anchor="t">
-            <a:spAutoFit/>
-          </a:bodyPr>
-          <a:lstStyle/>
-          <a:p>
-            <a:pPr algn="l">
-              <a:lnSpc>
-                <a:spcPct val="100000"/>
-              </a:lnSpc>
-            </a:pPr>
-            <a:r>
-              <a:rPr sz="780" b="1">
-                <a:solidFill>
-                  <a:srgbClr val="1A1A1C"/>
-                </a:solidFill>
-                <a:latin typeface="微软雅黑"/>
-                <a:ea typeface="微软雅黑"/>
-                <a:cs typeface="微软雅黑"/>
-              </a:rPr>
-              <a:t>小包公智能合同审查</a:t>
-            </a:r>
-          </a:p>
-        </p:txBody>
-      </p:sp>
-      <p:sp>
-        <p:nvSpPr>
-          <p:cNvPr id="124" name="TextBox 123"/>
-          <p:cNvSpPr txBox="1"/>
-          <p:nvPr/>
-        </p:nvSpPr>
-        <p:spPr>
-          <a:xfrm>
-            <a:off x="6352032" y="4937760"/>
-            <a:ext cx="2487168" cy="68580"/>
-          </a:xfrm>
-          <a:prstGeom prst="rect">
-            <a:avLst/>
-          </a:prstGeom>
-          <a:noFill/>
-        </p:spPr>
-        <p:txBody>
-          <a:bodyPr wrap="square" lIns="0" rIns="0" tIns="0" bIns="0" anchor="t">
-            <a:spAutoFit/>
-          </a:bodyPr>
-          <a:lstStyle/>
-          <a:p>
-            <a:pPr algn="l">
-              <a:lnSpc>
-                <a:spcPct val="100000"/>
-              </a:lnSpc>
-            </a:pPr>
-            <a:r>
-              <a:rPr sz="700" b="0">
-                <a:solidFill>
-                  <a:srgbClr val="5B616B"/>
-                </a:solidFill>
-                <a:latin typeface="微软雅黑"/>
-                <a:ea typeface="微软雅黑"/>
-                <a:cs typeface="微软雅黑"/>
-              </a:rPr>
-              <a:t>xbgai123 · 10,637</a:t>
-            </a:r>
-          </a:p>
-        </p:txBody>
-      </p:sp>
-      <p:sp>
-        <p:nvSpPr>
-          <p:cNvPr id="125" name="TextBox 124"/>
-          <p:cNvSpPr txBox="1"/>
-          <p:nvPr/>
-        </p:nvSpPr>
-        <p:spPr>
-          <a:xfrm>
-            <a:off x="6156960" y="5074920"/>
-            <a:ext cx="195072" cy="75438"/>
-          </a:xfrm>
-          <a:prstGeom prst="rect">
-            <a:avLst/>
-          </a:prstGeom>
-          <a:noFill/>
-        </p:spPr>
-        <p:txBody>
-          <a:bodyPr wrap="square" lIns="0" rIns="0" tIns="0" bIns="0" anchor="t">
-            <a:spAutoFit/>
-          </a:bodyPr>
-          <a:lstStyle/>
-          <a:p>
-            <a:pPr algn="l">
-              <a:lnSpc>
-                <a:spcPct val="100000"/>
-              </a:lnSpc>
-            </a:pPr>
-            <a:r>
-              <a:rPr sz="750" b="1">
-                <a:solidFill>
-                  <a:srgbClr val="B5333B"/>
-                </a:solidFill>
-                <a:latin typeface="微软雅黑"/>
-                <a:ea typeface="微软雅黑"/>
-                <a:cs typeface="微软雅黑"/>
-              </a:rPr>
-              <a:t>4</a:t>
-            </a:r>
-          </a:p>
-        </p:txBody>
-      </p:sp>
-      <p:sp>
-        <p:nvSpPr>
-          <p:cNvPr id="126" name="TextBox 125"/>
-          <p:cNvSpPr txBox="1"/>
-          <p:nvPr/>
-        </p:nvSpPr>
-        <p:spPr>
-          <a:xfrm>
-            <a:off x="6352032" y="5074920"/>
-            <a:ext cx="2487168" cy="75438"/>
-          </a:xfrm>
-          <a:prstGeom prst="rect">
-            <a:avLst/>
-          </a:prstGeom>
-          <a:noFill/>
-        </p:spPr>
-        <p:txBody>
-          <a:bodyPr wrap="square" lIns="0" rIns="0" tIns="0" bIns="0" anchor="t">
-            <a:spAutoFit/>
-          </a:bodyPr>
-          <a:lstStyle/>
-          <a:p>
-            <a:pPr algn="l">
-              <a:lnSpc>
-                <a:spcPct val="100000"/>
-              </a:lnSpc>
-            </a:pPr>
-            <a:r>
-              <a:rPr sz="780" b="1">
-                <a:solidFill>
-                  <a:srgbClr val="1A1A1C"/>
-                </a:solidFill>
-                <a:latin typeface="微软雅黑"/>
-                <a:ea typeface="微软雅黑"/>
-                <a:cs typeface="微软雅黑"/>
-              </a:rPr>
-              <a:t>小包公合同自动纠错工具</a:t>
-            </a:r>
-          </a:p>
-        </p:txBody>
-      </p:sp>
-      <p:sp>
-        <p:nvSpPr>
-          <p:cNvPr id="127" name="TextBox 126"/>
-          <p:cNvSpPr txBox="1"/>
-          <p:nvPr/>
-        </p:nvSpPr>
-        <p:spPr>
-          <a:xfrm>
-            <a:off x="6352032" y="5157216"/>
-            <a:ext cx="2487168" cy="68580"/>
-          </a:xfrm>
-          <a:prstGeom prst="rect">
-            <a:avLst/>
-          </a:prstGeom>
-          <a:noFill/>
-        </p:spPr>
-        <p:txBody>
-          <a:bodyPr wrap="square" lIns="0" rIns="0" tIns="0" bIns="0" anchor="t">
-            <a:spAutoFit/>
-          </a:bodyPr>
-          <a:lstStyle/>
-          <a:p>
-            <a:pPr algn="l">
-              <a:lnSpc>
-                <a:spcPct val="100000"/>
-              </a:lnSpc>
-            </a:pPr>
-            <a:r>
-              <a:rPr sz="700" b="0">
-                <a:solidFill>
-                  <a:srgbClr val="5B616B"/>
-                </a:solidFill>
-                <a:latin typeface="微软雅黑"/>
-                <a:ea typeface="微软雅黑"/>
-                <a:cs typeface="微软雅黑"/>
-              </a:rPr>
-              <a:t>xbgai123 · 10,566</a:t>
-            </a:r>
-          </a:p>
-        </p:txBody>
-      </p:sp>
-      <p:sp>
-        <p:nvSpPr>
-          <p:cNvPr id="128" name="TextBox 127"/>
-          <p:cNvSpPr txBox="1"/>
-          <p:nvPr/>
-        </p:nvSpPr>
-        <p:spPr>
-          <a:xfrm>
-            <a:off x="6156960" y="5294376"/>
-            <a:ext cx="195072" cy="75438"/>
-          </a:xfrm>
-          <a:prstGeom prst="rect">
-            <a:avLst/>
-          </a:prstGeom>
-          <a:noFill/>
-        </p:spPr>
-        <p:txBody>
-          <a:bodyPr wrap="square" lIns="0" rIns="0" tIns="0" bIns="0" anchor="t">
-            <a:spAutoFit/>
-          </a:bodyPr>
-          <a:lstStyle/>
-          <a:p>
-            <a:pPr algn="l">
-              <a:lnSpc>
-                <a:spcPct val="100000"/>
-              </a:lnSpc>
-            </a:pPr>
-            <a:r>
-              <a:rPr sz="750" b="1">
-                <a:solidFill>
-                  <a:srgbClr val="B5333B"/>
-                </a:solidFill>
-                <a:latin typeface="微软雅黑"/>
-                <a:ea typeface="微软雅黑"/>
-                <a:cs typeface="微软雅黑"/>
-              </a:rPr>
-              <a:t>5</a:t>
-            </a:r>
-          </a:p>
-        </p:txBody>
-      </p:sp>
-      <p:sp>
-        <p:nvSpPr>
-          <p:cNvPr id="129" name="TextBox 128"/>
-          <p:cNvSpPr txBox="1"/>
-          <p:nvPr/>
-        </p:nvSpPr>
-        <p:spPr>
-          <a:xfrm>
-            <a:off x="6352032" y="5294376"/>
-            <a:ext cx="2487168" cy="75438"/>
-          </a:xfrm>
-          <a:prstGeom prst="rect">
-            <a:avLst/>
-          </a:prstGeom>
-          <a:noFill/>
-        </p:spPr>
-        <p:txBody>
-          <a:bodyPr wrap="square" lIns="0" rIns="0" tIns="0" bIns="0" anchor="t">
-            <a:spAutoFit/>
-          </a:bodyPr>
-          <a:lstStyle/>
-          <a:p>
-            <a:pPr algn="l">
-              <a:lnSpc>
-                <a:spcPct val="100000"/>
-              </a:lnSpc>
-            </a:pPr>
-            <a:r>
-              <a:rPr sz="780" b="1">
-                <a:solidFill>
-                  <a:srgbClr val="1A1A1C"/>
-                </a:solidFill>
-                <a:latin typeface="微软雅黑"/>
-                <a:ea typeface="微软雅黑"/>
-                <a:cs typeface="微软雅黑"/>
-              </a:rPr>
-              <a:t>小包公合同自动排版工具</a:t>
-            </a:r>
-          </a:p>
-        </p:txBody>
-      </p:sp>
-      <p:sp>
-        <p:nvSpPr>
-          <p:cNvPr id="130" name="TextBox 129"/>
-          <p:cNvSpPr txBox="1"/>
-          <p:nvPr/>
-        </p:nvSpPr>
-        <p:spPr>
-          <a:xfrm>
-            <a:off x="6352032" y="5376672"/>
-            <a:ext cx="2487168" cy="68580"/>
-          </a:xfrm>
-          <a:prstGeom prst="rect">
-            <a:avLst/>
-          </a:prstGeom>
-          <a:noFill/>
-        </p:spPr>
-        <p:txBody>
-          <a:bodyPr wrap="square" lIns="0" rIns="0" tIns="0" bIns="0" anchor="t">
-            <a:spAutoFit/>
-          </a:bodyPr>
-          <a:lstStyle/>
-          <a:p>
-            <a:pPr algn="l">
-              <a:lnSpc>
-                <a:spcPct val="100000"/>
-              </a:lnSpc>
-            </a:pPr>
-            <a:r>
-              <a:rPr sz="700" b="0">
-                <a:solidFill>
-                  <a:srgbClr val="5B616B"/>
-                </a:solidFill>
-                <a:latin typeface="微软雅黑"/>
-                <a:ea typeface="微软雅黑"/>
-                <a:cs typeface="微软雅黑"/>
-              </a:rPr>
-              <a:t>xbgai123 · 10,555</a:t>
-            </a:r>
-          </a:p>
-        </p:txBody>
-      </p:sp>
-      <p:sp>
-        <p:nvSpPr>
-          <p:cNvPr id="131" name="TextBox 130"/>
-          <p:cNvSpPr txBox="1"/>
-          <p:nvPr/>
-        </p:nvSpPr>
-        <p:spPr>
-          <a:xfrm>
-            <a:off x="9022080" y="4306824"/>
-            <a:ext cx="2682240" cy="96012"/>
-          </a:xfrm>
-          <a:prstGeom prst="rect">
-            <a:avLst/>
-          </a:prstGeom>
-          <a:noFill/>
-        </p:spPr>
-        <p:txBody>
-          <a:bodyPr wrap="square" lIns="0" rIns="0" tIns="0" bIns="0" anchor="t">
-            <a:spAutoFit/>
-          </a:bodyPr>
-          <a:lstStyle/>
-          <a:p>
-            <a:pPr algn="l">
-              <a:lnSpc>
-                <a:spcPct val="100000"/>
-              </a:lnSpc>
-            </a:pPr>
-            <a:r>
               <a:rPr sz="860" b="1">
                 <a:solidFill>
-                  <a:srgbClr val="8B8E94"/>
-                </a:solidFill>
-                <a:latin typeface="微软雅黑"/>
-                <a:ea typeface="微软雅黑"/>
-                <a:cs typeface="微软雅黑"/>
-              </a:rPr>
-              <a:t>个人上传 Top5</a:t>
-            </a:r>
-          </a:p>
-        </p:txBody>
-      </p:sp>
-      <p:sp>
-        <p:nvSpPr>
-          <p:cNvPr id="132" name="Rectangle 131"/>
+                  <a:srgbClr val="D98A8F"/>
+                </a:solidFill>
+                <a:latin typeface="微软雅黑"/>
+                <a:ea typeface="微软雅黑"/>
+                <a:cs typeface="微软雅黑"/>
+              </a:rPr>
+              <a:t>其他市场 Top6</a:t>
+            </a:r>
+          </a:p>
+        </p:txBody>
+      </p:sp>
+      <p:sp>
+        <p:nvSpPr>
+          <p:cNvPr id="108" name="Rectangle 107"/>
           <p:cNvSpPr/>
           <p:nvPr/>
         </p:nvSpPr>
         <p:spPr>
           <a:xfrm>
-            <a:off x="9022080" y="4409694"/>
-            <a:ext cx="2682240" cy="5486"/>
+            <a:off x="6364224" y="4059935"/>
+            <a:ext cx="5254752" cy="5486"/>
           </a:xfrm>
           <a:prstGeom prst="rect">
             <a:avLst/>
@@ -37631,14 +36655,14 @@
       </p:sp>
       <p:sp>
         <p:nvSpPr>
-          <p:cNvPr id="133" name="TextBox 132"/>
-          <p:cNvSpPr txBox="1"/>
-          <p:nvPr/>
-        </p:nvSpPr>
-        <p:spPr>
-          <a:xfrm>
-            <a:off x="9022080" y="4416552"/>
-            <a:ext cx="195072" cy="75438"/>
+          <p:cNvPr id="109" name="TextBox 108"/>
+          <p:cNvSpPr txBox="1"/>
+          <p:nvPr/>
+        </p:nvSpPr>
+        <p:spPr>
+          <a:xfrm>
+            <a:off x="6364224" y="4087367"/>
+            <a:ext cx="170688" cy="68580"/>
           </a:xfrm>
           <a:prstGeom prst="rect">
             <a:avLst/>
@@ -37657,7 +36681,7 @@
               </a:lnSpc>
             </a:pPr>
             <a:r>
-              <a:rPr sz="750" b="1">
+              <a:rPr sz="720" b="1">
                 <a:solidFill>
                   <a:srgbClr val="B5333B"/>
                 </a:solidFill>
@@ -37672,14 +36696,14 @@
       </p:sp>
       <p:sp>
         <p:nvSpPr>
-          <p:cNvPr id="134" name="TextBox 133"/>
-          <p:cNvSpPr txBox="1"/>
-          <p:nvPr/>
-        </p:nvSpPr>
-        <p:spPr>
-          <a:xfrm>
-            <a:off x="9217152" y="4416552"/>
-            <a:ext cx="2487168" cy="75438"/>
+          <p:cNvPr id="110" name="TextBox 109"/>
+          <p:cNvSpPr txBox="1"/>
+          <p:nvPr/>
+        </p:nvSpPr>
+        <p:spPr>
+          <a:xfrm>
+            <a:off x="6534912" y="4087367"/>
+            <a:ext cx="4084320" cy="68580"/>
           </a:xfrm>
           <a:prstGeom prst="rect">
             <a:avLst/>
@@ -37698,7 +36722,7 @@
               </a:lnSpc>
             </a:pPr>
             <a:r>
-              <a:rPr sz="780" b="1">
+              <a:rPr sz="720" b="1">
                 <a:solidFill>
                   <a:srgbClr val="1A1A1C"/>
                 </a:solidFill>
@@ -37706,21 +36730,62 @@
                 <a:ea typeface="微软雅黑"/>
                 <a:cs typeface="微软雅黑"/>
               </a:rPr>
-              <a:t>床垫试睡权益顾问</a:t>
-            </a:r>
-          </a:p>
-        </p:txBody>
-      </p:sp>
-      <p:sp>
-        <p:nvSpPr>
-          <p:cNvPr id="135" name="TextBox 134"/>
-          <p:cNvSpPr txBox="1"/>
-          <p:nvPr/>
-        </p:nvSpPr>
-        <p:spPr>
-          <a:xfrm>
-            <a:off x="9217152" y="4498848"/>
-            <a:ext cx="2487168" cy="68580"/>
+              <a:t>mysteel-pricesearch</a:t>
+            </a:r>
+          </a:p>
+        </p:txBody>
+      </p:sp>
+      <p:sp>
+        <p:nvSpPr>
+          <p:cNvPr id="111" name="TextBox 110"/>
+          <p:cNvSpPr txBox="1"/>
+          <p:nvPr/>
+        </p:nvSpPr>
+        <p:spPr>
+          <a:xfrm>
+            <a:off x="10668000" y="4087367"/>
+            <a:ext cx="914400" cy="68580"/>
+          </a:xfrm>
+          <a:prstGeom prst="rect">
+            <a:avLst/>
+          </a:prstGeom>
+          <a:noFill/>
+        </p:spPr>
+        <p:txBody>
+          <a:bodyPr wrap="square" lIns="0" rIns="0" tIns="0" bIns="0" anchor="t">
+            <a:spAutoFit/>
+          </a:bodyPr>
+          <a:lstStyle/>
+          <a:p>
+            <a:pPr algn="r">
+              <a:lnSpc>
+                <a:spcPct val="100000"/>
+              </a:lnSpc>
+            </a:pPr>
+            <a:r>
+              <a:rPr sz="700" b="0">
+                <a:solidFill>
+                  <a:srgbClr val="5B616B"/>
+                </a:solidFill>
+                <a:latin typeface="微软雅黑"/>
+                <a:ea typeface="微软雅黑"/>
+                <a:cs typeface="微软雅黑"/>
+              </a:rPr>
+              <a:t>31,477</a:t>
+            </a:r>
+          </a:p>
+        </p:txBody>
+      </p:sp>
+      <p:sp>
+        <p:nvSpPr>
+          <p:cNvPr id="112" name="TextBox 111"/>
+          <p:cNvSpPr txBox="1"/>
+          <p:nvPr/>
+        </p:nvSpPr>
+        <p:spPr>
+          <a:xfrm>
+            <a:off x="6534912" y="4155947"/>
+            <a:ext cx="4876800" cy="61721"/>
           </a:xfrm>
           <a:prstGeom prst="rect">
             <a:avLst/>
@@ -37739,7 +36804,7 @@
               </a:lnSpc>
             </a:pPr>
             <a:r>
-              <a:rPr sz="700" b="0">
+              <a:rPr sz="630" b="0">
                 <a:solidFill>
                   <a:srgbClr val="5B616B"/>
                 </a:solidFill>
@@ -37747,21 +36812,21 @@
                 <a:ea typeface="微软雅黑"/>
                 <a:cs typeface="微软雅黑"/>
               </a:rPr>
-              <a:t>alv123 · 13,082</a:t>
-            </a:r>
-          </a:p>
-        </p:txBody>
-      </p:sp>
-      <p:sp>
-        <p:nvSpPr>
-          <p:cNvPr id="136" name="TextBox 135"/>
-          <p:cNvSpPr txBox="1"/>
-          <p:nvPr/>
-        </p:nvSpPr>
-        <p:spPr>
-          <a:xfrm>
-            <a:off x="9022080" y="4636008"/>
-            <a:ext cx="195072" cy="75438"/>
+              <a:t>@wyb92</a:t>
+            </a:r>
+          </a:p>
+        </p:txBody>
+      </p:sp>
+      <p:sp>
+        <p:nvSpPr>
+          <p:cNvPr id="113" name="TextBox 112"/>
+          <p:cNvSpPr txBox="1"/>
+          <p:nvPr/>
+        </p:nvSpPr>
+        <p:spPr>
+          <a:xfrm>
+            <a:off x="6364224" y="4224528"/>
+            <a:ext cx="170688" cy="68580"/>
           </a:xfrm>
           <a:prstGeom prst="rect">
             <a:avLst/>
@@ -37780,7 +36845,7 @@
               </a:lnSpc>
             </a:pPr>
             <a:r>
-              <a:rPr sz="750" b="1">
+              <a:rPr sz="720" b="1">
                 <a:solidFill>
                   <a:srgbClr val="B5333B"/>
                 </a:solidFill>
@@ -37795,14 +36860,14 @@
       </p:sp>
       <p:sp>
         <p:nvSpPr>
-          <p:cNvPr id="137" name="TextBox 136"/>
-          <p:cNvSpPr txBox="1"/>
-          <p:nvPr/>
-        </p:nvSpPr>
-        <p:spPr>
-          <a:xfrm>
-            <a:off x="9217152" y="4636008"/>
-            <a:ext cx="2487168" cy="75438"/>
+          <p:cNvPr id="114" name="TextBox 113"/>
+          <p:cNvSpPr txBox="1"/>
+          <p:nvPr/>
+        </p:nvSpPr>
+        <p:spPr>
+          <a:xfrm>
+            <a:off x="6534912" y="4224528"/>
+            <a:ext cx="4084320" cy="68580"/>
           </a:xfrm>
           <a:prstGeom prst="rect">
             <a:avLst/>
@@ -37821,7 +36886,7 @@
               </a:lnSpc>
             </a:pPr>
             <a:r>
-              <a:rPr sz="780" b="1">
+              <a:rPr sz="720" b="1">
                 <a:solidFill>
                   <a:srgbClr val="1A1A1C"/>
                 </a:solidFill>
@@ -37829,21 +36894,62 @@
                 <a:ea typeface="微软雅黑"/>
                 <a:cs typeface="微软雅黑"/>
               </a:rPr>
-              <a:t>新房低异味床垫顾问</a:t>
-            </a:r>
-          </a:p>
-        </p:txBody>
-      </p:sp>
-      <p:sp>
-        <p:nvSpPr>
-          <p:cNvPr id="138" name="TextBox 137"/>
-          <p:cNvSpPr txBox="1"/>
-          <p:nvPr/>
-        </p:nvSpPr>
-        <p:spPr>
-          <a:xfrm>
-            <a:off x="9217152" y="4718304"/>
-            <a:ext cx="2487168" cy="68580"/>
+              <a:t>weather（天气查询）</a:t>
+            </a:r>
+          </a:p>
+        </p:txBody>
+      </p:sp>
+      <p:sp>
+        <p:nvSpPr>
+          <p:cNvPr id="115" name="TextBox 114"/>
+          <p:cNvSpPr txBox="1"/>
+          <p:nvPr/>
+        </p:nvSpPr>
+        <p:spPr>
+          <a:xfrm>
+            <a:off x="10668000" y="4224528"/>
+            <a:ext cx="914400" cy="68580"/>
+          </a:xfrm>
+          <a:prstGeom prst="rect">
+            <a:avLst/>
+          </a:prstGeom>
+          <a:noFill/>
+        </p:spPr>
+        <p:txBody>
+          <a:bodyPr wrap="square" lIns="0" rIns="0" tIns="0" bIns="0" anchor="t">
+            <a:spAutoFit/>
+          </a:bodyPr>
+          <a:lstStyle/>
+          <a:p>
+            <a:pPr algn="r">
+              <a:lnSpc>
+                <a:spcPct val="100000"/>
+              </a:lnSpc>
+            </a:pPr>
+            <a:r>
+              <a:rPr sz="700" b="0">
+                <a:solidFill>
+                  <a:srgbClr val="5B616B"/>
+                </a:solidFill>
+                <a:latin typeface="微软雅黑"/>
+                <a:ea typeface="微软雅黑"/>
+                <a:cs typeface="微软雅黑"/>
+              </a:rPr>
+              <a:t>5,818</a:t>
+            </a:r>
+          </a:p>
+        </p:txBody>
+      </p:sp>
+      <p:sp>
+        <p:nvSpPr>
+          <p:cNvPr id="116" name="TextBox 115"/>
+          <p:cNvSpPr txBox="1"/>
+          <p:nvPr/>
+        </p:nvSpPr>
+        <p:spPr>
+          <a:xfrm>
+            <a:off x="6534912" y="4293108"/>
+            <a:ext cx="4876800" cy="61721"/>
           </a:xfrm>
           <a:prstGeom prst="rect">
             <a:avLst/>
@@ -37862,7 +36968,7 @@
               </a:lnSpc>
             </a:pPr>
             <a:r>
-              <a:rPr sz="700" b="0">
+              <a:rPr sz="630" b="0">
                 <a:solidFill>
                   <a:srgbClr val="5B616B"/>
                 </a:solidFill>
@@ -37870,21 +36976,21 @@
                 <a:ea typeface="微软雅黑"/>
                 <a:cs typeface="微软雅黑"/>
               </a:rPr>
-              <a:t>alv123 · 12,583</a:t>
-            </a:r>
-          </a:p>
-        </p:txBody>
-      </p:sp>
-      <p:sp>
-        <p:nvSpPr>
-          <p:cNvPr id="139" name="TextBox 138"/>
-          <p:cNvSpPr txBox="1"/>
-          <p:nvPr/>
-        </p:nvSpPr>
-        <p:spPr>
-          <a:xfrm>
-            <a:off x="9022080" y="4855464"/>
-            <a:ext cx="195072" cy="75438"/>
+              <a:t>@steipete</a:t>
+            </a:r>
+          </a:p>
+        </p:txBody>
+      </p:sp>
+      <p:sp>
+        <p:nvSpPr>
+          <p:cNvPr id="117" name="TextBox 116"/>
+          <p:cNvSpPr txBox="1"/>
+          <p:nvPr/>
+        </p:nvSpPr>
+        <p:spPr>
+          <a:xfrm>
+            <a:off x="6364224" y="4361688"/>
+            <a:ext cx="170688" cy="68580"/>
           </a:xfrm>
           <a:prstGeom prst="rect">
             <a:avLst/>
@@ -37903,7 +37009,7 @@
               </a:lnSpc>
             </a:pPr>
             <a:r>
-              <a:rPr sz="750" b="1">
+              <a:rPr sz="720" b="1">
                 <a:solidFill>
                   <a:srgbClr val="B5333B"/>
                 </a:solidFill>
@@ -37918,14 +37024,14 @@
       </p:sp>
       <p:sp>
         <p:nvSpPr>
-          <p:cNvPr id="140" name="TextBox 139"/>
-          <p:cNvSpPr txBox="1"/>
-          <p:nvPr/>
-        </p:nvSpPr>
-        <p:spPr>
-          <a:xfrm>
-            <a:off x="9217152" y="4855464"/>
-            <a:ext cx="2487168" cy="75438"/>
+          <p:cNvPr id="118" name="TextBox 117"/>
+          <p:cNvSpPr txBox="1"/>
+          <p:nvPr/>
+        </p:nvSpPr>
+        <p:spPr>
+          <a:xfrm>
+            <a:off x="6534912" y="4361688"/>
+            <a:ext cx="4084320" cy="68580"/>
           </a:xfrm>
           <a:prstGeom prst="rect">
             <a:avLst/>
@@ -37944,7 +37050,7 @@
               </a:lnSpc>
             </a:pPr>
             <a:r>
-              <a:rPr sz="780" b="1">
+              <a:rPr sz="720" b="1">
                 <a:solidFill>
                   <a:srgbClr val="1A1A1C"/>
                 </a:solidFill>
@@ -37952,21 +37058,62 @@
                 <a:ea typeface="微软雅黑"/>
                 <a:cs typeface="微软雅黑"/>
               </a:rPr>
-              <a:t>招标中标数据查询API，标讯日更新30万+</a:t>
-            </a:r>
-          </a:p>
-        </p:txBody>
-      </p:sp>
-      <p:sp>
-        <p:nvSpPr>
-          <p:cNvPr id="141" name="TextBox 140"/>
-          <p:cNvSpPr txBox="1"/>
-          <p:nvPr/>
-        </p:nvSpPr>
-        <p:spPr>
-          <a:xfrm>
-            <a:off x="9217152" y="4937760"/>
-            <a:ext cx="2487168" cy="68580"/>
+              <a:t>summarize</a:t>
+            </a:r>
+          </a:p>
+        </p:txBody>
+      </p:sp>
+      <p:sp>
+        <p:nvSpPr>
+          <p:cNvPr id="119" name="TextBox 118"/>
+          <p:cNvSpPr txBox="1"/>
+          <p:nvPr/>
+        </p:nvSpPr>
+        <p:spPr>
+          <a:xfrm>
+            <a:off x="10668000" y="4361688"/>
+            <a:ext cx="914400" cy="68580"/>
+          </a:xfrm>
+          <a:prstGeom prst="rect">
+            <a:avLst/>
+          </a:prstGeom>
+          <a:noFill/>
+        </p:spPr>
+        <p:txBody>
+          <a:bodyPr wrap="square" lIns="0" rIns="0" tIns="0" bIns="0" anchor="t">
+            <a:spAutoFit/>
+          </a:bodyPr>
+          <a:lstStyle/>
+          <a:p>
+            <a:pPr algn="r">
+              <a:lnSpc>
+                <a:spcPct val="100000"/>
+              </a:lnSpc>
+            </a:pPr>
+            <a:r>
+              <a:rPr sz="700" b="0">
+                <a:solidFill>
+                  <a:srgbClr val="5B616B"/>
+                </a:solidFill>
+                <a:latin typeface="微软雅黑"/>
+                <a:ea typeface="微软雅黑"/>
+                <a:cs typeface="微软雅黑"/>
+              </a:rPr>
+              <a:t>3,844</a:t>
+            </a:r>
+          </a:p>
+        </p:txBody>
+      </p:sp>
+      <p:sp>
+        <p:nvSpPr>
+          <p:cNvPr id="120" name="TextBox 119"/>
+          <p:cNvSpPr txBox="1"/>
+          <p:nvPr/>
+        </p:nvSpPr>
+        <p:spPr>
+          <a:xfrm>
+            <a:off x="6534912" y="4430268"/>
+            <a:ext cx="4876800" cy="61721"/>
           </a:xfrm>
           <a:prstGeom prst="rect">
             <a:avLst/>
@@ -37985,7 +37132,7 @@
               </a:lnSpc>
             </a:pPr>
             <a:r>
-              <a:rPr sz="700" b="0">
+              <a:rPr sz="630" b="0">
                 <a:solidFill>
                   <a:srgbClr val="5B616B"/>
                 </a:solidFill>
@@ -37993,21 +37140,21 @@
                 <a:ea typeface="微软雅黑"/>
                 <a:cs typeface="微软雅黑"/>
               </a:rPr>
-              <a:t>tingting0980 · 11,312</a:t>
-            </a:r>
-          </a:p>
-        </p:txBody>
-      </p:sp>
-      <p:sp>
-        <p:nvSpPr>
-          <p:cNvPr id="142" name="TextBox 141"/>
-          <p:cNvSpPr txBox="1"/>
-          <p:nvPr/>
-        </p:nvSpPr>
-        <p:spPr>
-          <a:xfrm>
-            <a:off x="9022080" y="5074920"/>
-            <a:ext cx="195072" cy="75438"/>
+              <a:t>@steipete</a:t>
+            </a:r>
+          </a:p>
+        </p:txBody>
+      </p:sp>
+      <p:sp>
+        <p:nvSpPr>
+          <p:cNvPr id="121" name="TextBox 120"/>
+          <p:cNvSpPr txBox="1"/>
+          <p:nvPr/>
+        </p:nvSpPr>
+        <p:spPr>
+          <a:xfrm>
+            <a:off x="6364224" y="4498848"/>
+            <a:ext cx="170688" cy="68580"/>
           </a:xfrm>
           <a:prstGeom prst="rect">
             <a:avLst/>
@@ -38026,7 +37173,7 @@
               </a:lnSpc>
             </a:pPr>
             <a:r>
-              <a:rPr sz="750" b="1">
+              <a:rPr sz="720" b="1">
                 <a:solidFill>
                   <a:srgbClr val="B5333B"/>
                 </a:solidFill>
@@ -38041,14 +37188,14 @@
       </p:sp>
       <p:sp>
         <p:nvSpPr>
-          <p:cNvPr id="143" name="TextBox 142"/>
-          <p:cNvSpPr txBox="1"/>
-          <p:nvPr/>
-        </p:nvSpPr>
-        <p:spPr>
-          <a:xfrm>
-            <a:off x="9217152" y="5074920"/>
-            <a:ext cx="2487168" cy="75438"/>
+          <p:cNvPr id="122" name="TextBox 121"/>
+          <p:cNvSpPr txBox="1"/>
+          <p:nvPr/>
+        </p:nvSpPr>
+        <p:spPr>
+          <a:xfrm>
+            <a:off x="6534912" y="4498848"/>
+            <a:ext cx="4084320" cy="68580"/>
           </a:xfrm>
           <a:prstGeom prst="rect">
             <a:avLst/>
@@ -38067,7 +37214,7 @@
               </a:lnSpc>
             </a:pPr>
             <a:r>
-              <a:rPr sz="780" b="1">
+              <a:rPr sz="720" b="1">
                 <a:solidFill>
                   <a:srgbClr val="1A1A1C"/>
                 </a:solidFill>
@@ -38075,21 +37222,62 @@
                 <a:ea typeface="微软雅黑"/>
                 <a:cs typeface="微软雅黑"/>
               </a:rPr>
-              <a:t>3000档床垫预算顾问</a:t>
-            </a:r>
-          </a:p>
-        </p:txBody>
-      </p:sp>
-      <p:sp>
-        <p:nvSpPr>
-          <p:cNvPr id="144" name="TextBox 143"/>
-          <p:cNvSpPr txBox="1"/>
-          <p:nvPr/>
-        </p:nvSpPr>
-        <p:spPr>
-          <a:xfrm>
-            <a:off x="9217152" y="5157216"/>
-            <a:ext cx="2487168" cy="68580"/>
+              <a:t>skill-vetter（Skill Vetter 安全扫描）</a:t>
+            </a:r>
+          </a:p>
+        </p:txBody>
+      </p:sp>
+      <p:sp>
+        <p:nvSpPr>
+          <p:cNvPr id="123" name="TextBox 122"/>
+          <p:cNvSpPr txBox="1"/>
+          <p:nvPr/>
+        </p:nvSpPr>
+        <p:spPr>
+          <a:xfrm>
+            <a:off x="10668000" y="4498848"/>
+            <a:ext cx="914400" cy="68580"/>
+          </a:xfrm>
+          <a:prstGeom prst="rect">
+            <a:avLst/>
+          </a:prstGeom>
+          <a:noFill/>
+        </p:spPr>
+        <p:txBody>
+          <a:bodyPr wrap="square" lIns="0" rIns="0" tIns="0" bIns="0" anchor="t">
+            <a:spAutoFit/>
+          </a:bodyPr>
+          <a:lstStyle/>
+          <a:p>
+            <a:pPr algn="r">
+              <a:lnSpc>
+                <a:spcPct val="100000"/>
+              </a:lnSpc>
+            </a:pPr>
+            <a:r>
+              <a:rPr sz="700" b="0">
+                <a:solidFill>
+                  <a:srgbClr val="5B616B"/>
+                </a:solidFill>
+                <a:latin typeface="微软雅黑"/>
+                <a:ea typeface="微软雅黑"/>
+                <a:cs typeface="微软雅黑"/>
+              </a:rPr>
+              <a:t>3,781</a:t>
+            </a:r>
+          </a:p>
+        </p:txBody>
+      </p:sp>
+      <p:sp>
+        <p:nvSpPr>
+          <p:cNvPr id="124" name="TextBox 123"/>
+          <p:cNvSpPr txBox="1"/>
+          <p:nvPr/>
+        </p:nvSpPr>
+        <p:spPr>
+          <a:xfrm>
+            <a:off x="6534912" y="4567428"/>
+            <a:ext cx="4876800" cy="61721"/>
           </a:xfrm>
           <a:prstGeom prst="rect">
             <a:avLst/>
@@ -38108,7 +37296,7 @@
               </a:lnSpc>
             </a:pPr>
             <a:r>
-              <a:rPr sz="700" b="0">
+              <a:rPr sz="630" b="0">
                 <a:solidFill>
                   <a:srgbClr val="5B616B"/>
                 </a:solidFill>
@@ -38116,21 +37304,21 @@
                 <a:ea typeface="微软雅黑"/>
                 <a:cs typeface="微软雅黑"/>
               </a:rPr>
-              <a:t>alv123 · 11,273</a:t>
-            </a:r>
-          </a:p>
-        </p:txBody>
-      </p:sp>
-      <p:sp>
-        <p:nvSpPr>
-          <p:cNvPr id="145" name="TextBox 144"/>
-          <p:cNvSpPr txBox="1"/>
-          <p:nvPr/>
-        </p:nvSpPr>
-        <p:spPr>
-          <a:xfrm>
-            <a:off x="9022080" y="5294376"/>
-            <a:ext cx="195072" cy="75438"/>
+              <a:t>@spclaudehome</a:t>
+            </a:r>
+          </a:p>
+        </p:txBody>
+      </p:sp>
+      <p:sp>
+        <p:nvSpPr>
+          <p:cNvPr id="125" name="TextBox 124"/>
+          <p:cNvSpPr txBox="1"/>
+          <p:nvPr/>
+        </p:nvSpPr>
+        <p:spPr>
+          <a:xfrm>
+            <a:off x="6364224" y="4636008"/>
+            <a:ext cx="170688" cy="68580"/>
           </a:xfrm>
           <a:prstGeom prst="rect">
             <a:avLst/>
@@ -38149,7 +37337,7 @@
               </a:lnSpc>
             </a:pPr>
             <a:r>
-              <a:rPr sz="750" b="1">
+              <a:rPr sz="720" b="1">
                 <a:solidFill>
                   <a:srgbClr val="B5333B"/>
                 </a:solidFill>
@@ -38164,14 +37352,14 @@
       </p:sp>
       <p:sp>
         <p:nvSpPr>
-          <p:cNvPr id="146" name="TextBox 145"/>
-          <p:cNvSpPr txBox="1"/>
-          <p:nvPr/>
-        </p:nvSpPr>
-        <p:spPr>
-          <a:xfrm>
-            <a:off x="9217152" y="5294376"/>
-            <a:ext cx="2487168" cy="75438"/>
+          <p:cNvPr id="126" name="TextBox 125"/>
+          <p:cNvSpPr txBox="1"/>
+          <p:nvPr/>
+        </p:nvSpPr>
+        <p:spPr>
+          <a:xfrm>
+            <a:off x="6534912" y="4636008"/>
+            <a:ext cx="4084320" cy="68580"/>
           </a:xfrm>
           <a:prstGeom prst="rect">
             <a:avLst/>
@@ -38190,7 +37378,7 @@
               </a:lnSpc>
             </a:pPr>
             <a:r>
-              <a:rPr sz="780" b="1">
+              <a:rPr sz="720" b="1">
                 <a:solidFill>
                   <a:srgbClr val="1A1A1C"/>
                 </a:solidFill>
@@ -38198,21 +37386,62 @@
                 <a:ea typeface="微软雅黑"/>
                 <a:cs typeface="微软雅黑"/>
               </a:rPr>
-              <a:t>企业画像与上下游关系分析</a:t>
-            </a:r>
-          </a:p>
-        </p:txBody>
-      </p:sp>
-      <p:sp>
-        <p:nvSpPr>
-          <p:cNvPr id="147" name="TextBox 146"/>
-          <p:cNvSpPr txBox="1"/>
-          <p:nvPr/>
-        </p:nvSpPr>
-        <p:spPr>
-          <a:xfrm>
-            <a:off x="9217152" y="5376672"/>
-            <a:ext cx="2487168" cy="68580"/>
+              <a:t>github</a:t>
+            </a:r>
+          </a:p>
+        </p:txBody>
+      </p:sp>
+      <p:sp>
+        <p:nvSpPr>
+          <p:cNvPr id="127" name="TextBox 126"/>
+          <p:cNvSpPr txBox="1"/>
+          <p:nvPr/>
+        </p:nvSpPr>
+        <p:spPr>
+          <a:xfrm>
+            <a:off x="10668000" y="4636008"/>
+            <a:ext cx="914400" cy="68580"/>
+          </a:xfrm>
+          <a:prstGeom prst="rect">
+            <a:avLst/>
+          </a:prstGeom>
+          <a:noFill/>
+        </p:spPr>
+        <p:txBody>
+          <a:bodyPr wrap="square" lIns="0" rIns="0" tIns="0" bIns="0" anchor="t">
+            <a:spAutoFit/>
+          </a:bodyPr>
+          <a:lstStyle/>
+          <a:p>
+            <a:pPr algn="r">
+              <a:lnSpc>
+                <a:spcPct val="100000"/>
+              </a:lnSpc>
+            </a:pPr>
+            <a:r>
+              <a:rPr sz="700" b="0">
+                <a:solidFill>
+                  <a:srgbClr val="5B616B"/>
+                </a:solidFill>
+                <a:latin typeface="微软雅黑"/>
+                <a:ea typeface="微软雅黑"/>
+                <a:cs typeface="微软雅黑"/>
+              </a:rPr>
+              <a:t>2,666</a:t>
+            </a:r>
+          </a:p>
+        </p:txBody>
+      </p:sp>
+      <p:sp>
+        <p:nvSpPr>
+          <p:cNvPr id="128" name="TextBox 127"/>
+          <p:cNvSpPr txBox="1"/>
+          <p:nvPr/>
+        </p:nvSpPr>
+        <p:spPr>
+          <a:xfrm>
+            <a:off x="6534912" y="4704588"/>
+            <a:ext cx="4876800" cy="61721"/>
           </a:xfrm>
           <a:prstGeom prst="rect">
             <a:avLst/>
@@ -38231,6 +37460,129 @@
               </a:lnSpc>
             </a:pPr>
             <a:r>
+              <a:rPr sz="630" b="0">
+                <a:solidFill>
+                  <a:srgbClr val="5B616B"/>
+                </a:solidFill>
+                <a:latin typeface="微软雅黑"/>
+                <a:ea typeface="微软雅黑"/>
+                <a:cs typeface="微软雅黑"/>
+              </a:rPr>
+              <a:t>@steipete</a:t>
+            </a:r>
+          </a:p>
+        </p:txBody>
+      </p:sp>
+      <p:sp>
+        <p:nvSpPr>
+          <p:cNvPr id="129" name="TextBox 128"/>
+          <p:cNvSpPr txBox="1"/>
+          <p:nvPr/>
+        </p:nvSpPr>
+        <p:spPr>
+          <a:xfrm>
+            <a:off x="6364224" y="4773168"/>
+            <a:ext cx="170688" cy="68580"/>
+          </a:xfrm>
+          <a:prstGeom prst="rect">
+            <a:avLst/>
+          </a:prstGeom>
+          <a:noFill/>
+        </p:spPr>
+        <p:txBody>
+          <a:bodyPr wrap="square" lIns="0" rIns="0" tIns="0" bIns="0" anchor="t">
+            <a:spAutoFit/>
+          </a:bodyPr>
+          <a:lstStyle/>
+          <a:p>
+            <a:pPr algn="l">
+              <a:lnSpc>
+                <a:spcPct val="100000"/>
+              </a:lnSpc>
+            </a:pPr>
+            <a:r>
+              <a:rPr sz="720" b="1">
+                <a:solidFill>
+                  <a:srgbClr val="B5333B"/>
+                </a:solidFill>
+                <a:latin typeface="微软雅黑"/>
+                <a:ea typeface="微软雅黑"/>
+                <a:cs typeface="微软雅黑"/>
+              </a:rPr>
+              <a:t>6</a:t>
+            </a:r>
+          </a:p>
+        </p:txBody>
+      </p:sp>
+      <p:sp>
+        <p:nvSpPr>
+          <p:cNvPr id="130" name="TextBox 129"/>
+          <p:cNvSpPr txBox="1"/>
+          <p:nvPr/>
+        </p:nvSpPr>
+        <p:spPr>
+          <a:xfrm>
+            <a:off x="6534912" y="4773168"/>
+            <a:ext cx="4084320" cy="68580"/>
+          </a:xfrm>
+          <a:prstGeom prst="rect">
+            <a:avLst/>
+          </a:prstGeom>
+          <a:noFill/>
+        </p:spPr>
+        <p:txBody>
+          <a:bodyPr wrap="square" lIns="0" rIns="0" tIns="0" bIns="0" anchor="t">
+            <a:spAutoFit/>
+          </a:bodyPr>
+          <a:lstStyle/>
+          <a:p>
+            <a:pPr algn="l">
+              <a:lnSpc>
+                <a:spcPct val="100000"/>
+              </a:lnSpc>
+            </a:pPr>
+            <a:r>
+              <a:rPr sz="720" b="1">
+                <a:solidFill>
+                  <a:srgbClr val="1A1A1C"/>
+                </a:solidFill>
+                <a:latin typeface="微软雅黑"/>
+                <a:ea typeface="微软雅黑"/>
+                <a:cs typeface="微软雅黑"/>
+              </a:rPr>
+              <a:t>amap-jsapi-skill</a:t>
+            </a:r>
+          </a:p>
+        </p:txBody>
+      </p:sp>
+      <p:sp>
+        <p:nvSpPr>
+          <p:cNvPr id="131" name="TextBox 130"/>
+          <p:cNvSpPr txBox="1"/>
+          <p:nvPr/>
+        </p:nvSpPr>
+        <p:spPr>
+          <a:xfrm>
+            <a:off x="10668000" y="4773168"/>
+            <a:ext cx="914400" cy="68580"/>
+          </a:xfrm>
+          <a:prstGeom prst="rect">
+            <a:avLst/>
+          </a:prstGeom>
+          <a:noFill/>
+        </p:spPr>
+        <p:txBody>
+          <a:bodyPr wrap="square" lIns="0" rIns="0" tIns="0" bIns="0" anchor="t">
+            <a:spAutoFit/>
+          </a:bodyPr>
+          <a:lstStyle/>
+          <a:p>
+            <a:pPr algn="r">
+              <a:lnSpc>
+                <a:spcPct val="100000"/>
+              </a:lnSpc>
+            </a:pPr>
+            <a:r>
               <a:rPr sz="700" b="0">
                 <a:solidFill>
                   <a:srgbClr val="5B616B"/>
@@ -38239,7 +37591,673 @@
                 <a:ea typeface="微软雅黑"/>
                 <a:cs typeface="微软雅黑"/>
               </a:rPr>
-              <a:t>tingting0980 · 10,207</a:t>
+              <a:t>2,344</a:t>
+            </a:r>
+          </a:p>
+        </p:txBody>
+      </p:sp>
+      <p:sp>
+        <p:nvSpPr>
+          <p:cNvPr id="132" name="TextBox 131"/>
+          <p:cNvSpPr txBox="1"/>
+          <p:nvPr/>
+        </p:nvSpPr>
+        <p:spPr>
+          <a:xfrm>
+            <a:off x="6534912" y="4841748"/>
+            <a:ext cx="4876800" cy="61721"/>
+          </a:xfrm>
+          <a:prstGeom prst="rect">
+            <a:avLst/>
+          </a:prstGeom>
+          <a:noFill/>
+        </p:spPr>
+        <p:txBody>
+          <a:bodyPr wrap="square" lIns="0" rIns="0" tIns="0" bIns="0" anchor="t">
+            <a:spAutoFit/>
+          </a:bodyPr>
+          <a:lstStyle/>
+          <a:p>
+            <a:pPr algn="l">
+              <a:lnSpc>
+                <a:spcPct val="100000"/>
+              </a:lnSpc>
+            </a:pPr>
+            <a:r>
+              <a:rPr sz="630" b="0">
+                <a:solidFill>
+                  <a:srgbClr val="5B616B"/>
+                </a:solidFill>
+                <a:latin typeface="微软雅黑"/>
+                <a:ea typeface="微软雅黑"/>
+                <a:cs typeface="微软雅黑"/>
+              </a:rPr>
+              <a:t>@lbs-amap</a:t>
+            </a:r>
+          </a:p>
+        </p:txBody>
+      </p:sp>
+      <p:sp>
+        <p:nvSpPr>
+          <p:cNvPr id="133" name="Rounded Rectangle 132"/>
+          <p:cNvSpPr/>
+          <p:nvPr/>
+        </p:nvSpPr>
+        <p:spPr>
+          <a:xfrm>
+            <a:off x="426720" y="4937760"/>
+            <a:ext cx="5547360" cy="1014984"/>
+          </a:xfrm>
+          <a:prstGeom prst="roundRect">
+            <a:avLst>
+              <a:gd name="adj" fmla="val 2000"/>
+            </a:avLst>
+          </a:prstGeom>
+          <a:solidFill>
+            <a:srgbClr val="FFFFFF"/>
+          </a:solidFill>
+          <a:ln w="9525">
+            <a:solidFill>
+              <a:srgbClr val="E2E4E7"/>
+            </a:solidFill>
+          </a:ln>
+          <a:effectLst/>
+        </p:spPr>
+        <p:style>
+          <a:lnRef idx="1">
+            <a:schemeClr val="accent1"/>
+          </a:lnRef>
+          <a:fillRef idx="3">
+            <a:schemeClr val="accent1"/>
+          </a:fillRef>
+          <a:effectRef idx="2">
+            <a:schemeClr val="accent1"/>
+          </a:effectRef>
+          <a:fontRef idx="minor">
+            <a:schemeClr val="lt1"/>
+          </a:fontRef>
+        </p:style>
+        <p:txBody>
+          <a:bodyPr rtlCol="0" anchor="ctr"/>
+          <a:lstStyle/>
+          <a:p>
+            <a:pPr algn="ctr"/>
+          </a:p>
+        </p:txBody>
+      </p:sp>
+      <p:sp>
+        <p:nvSpPr>
+          <p:cNvPr id="134" name="TextBox 133"/>
+          <p:cNvSpPr txBox="1"/>
+          <p:nvPr/>
+        </p:nvSpPr>
+        <p:spPr>
+          <a:xfrm>
+            <a:off x="573024" y="4985766"/>
+            <a:ext cx="3657600" cy="96012"/>
+          </a:xfrm>
+          <a:prstGeom prst="rect">
+            <a:avLst/>
+          </a:prstGeom>
+          <a:noFill/>
+        </p:spPr>
+        <p:txBody>
+          <a:bodyPr wrap="square" lIns="0" rIns="0" tIns="0" bIns="0" anchor="t">
+            <a:spAutoFit/>
+          </a:bodyPr>
+          <a:lstStyle/>
+          <a:p>
+            <a:pPr algn="l">
+              <a:lnSpc>
+                <a:spcPct val="100000"/>
+              </a:lnSpc>
+            </a:pPr>
+            <a:r>
+              <a:rPr sz="860" b="1">
+                <a:solidFill>
+                  <a:srgbClr val="6B7785"/>
+                </a:solidFill>
+                <a:latin typeface="微软雅黑"/>
+                <a:ea typeface="微软雅黑"/>
+                <a:cs typeface="微软雅黑"/>
+              </a:rPr>
+              <a:t>外部网站 Top6</a:t>
+            </a:r>
+          </a:p>
+        </p:txBody>
+      </p:sp>
+      <p:sp>
+        <p:nvSpPr>
+          <p:cNvPr id="135" name="Rectangle 134"/>
+          <p:cNvSpPr/>
+          <p:nvPr/>
+        </p:nvSpPr>
+        <p:spPr>
+          <a:xfrm>
+            <a:off x="573024" y="5088636"/>
+            <a:ext cx="5254752" cy="5486"/>
+          </a:xfrm>
+          <a:prstGeom prst="rect">
+            <a:avLst/>
+          </a:prstGeom>
+          <a:solidFill>
+            <a:srgbClr val="E2E4E7"/>
+          </a:solidFill>
+          <a:ln>
+            <a:noFill/>
+          </a:ln>
+          <a:effectLst/>
+        </p:spPr>
+        <p:style>
+          <a:lnRef idx="1">
+            <a:schemeClr val="accent1"/>
+          </a:lnRef>
+          <a:fillRef idx="3">
+            <a:schemeClr val="accent1"/>
+          </a:fillRef>
+          <a:effectRef idx="2">
+            <a:schemeClr val="accent1"/>
+          </a:effectRef>
+          <a:fontRef idx="minor">
+            <a:schemeClr val="lt1"/>
+          </a:fontRef>
+        </p:style>
+        <p:txBody>
+          <a:bodyPr rtlCol="0" anchor="ctr"/>
+          <a:lstStyle/>
+          <a:p>
+            <a:pPr algn="ctr"/>
+          </a:p>
+        </p:txBody>
+      </p:sp>
+      <p:sp>
+        <p:nvSpPr>
+          <p:cNvPr id="136" name="TextBox 135"/>
+          <p:cNvSpPr txBox="1"/>
+          <p:nvPr/>
+        </p:nvSpPr>
+        <p:spPr>
+          <a:xfrm>
+            <a:off x="573024" y="5116068"/>
+            <a:ext cx="170688" cy="68580"/>
+          </a:xfrm>
+          <a:prstGeom prst="rect">
+            <a:avLst/>
+          </a:prstGeom>
+          <a:noFill/>
+        </p:spPr>
+        <p:txBody>
+          <a:bodyPr wrap="square" lIns="0" rIns="0" tIns="0" bIns="0" anchor="t">
+            <a:spAutoFit/>
+          </a:bodyPr>
+          <a:lstStyle/>
+          <a:p>
+            <a:pPr algn="l">
+              <a:lnSpc>
+                <a:spcPct val="100000"/>
+              </a:lnSpc>
+            </a:pPr>
+            <a:r>
+              <a:rPr sz="720" b="1">
+                <a:solidFill>
+                  <a:srgbClr val="B5333B"/>
+                </a:solidFill>
+                <a:latin typeface="微软雅黑"/>
+                <a:ea typeface="微软雅黑"/>
+                <a:cs typeface="微软雅黑"/>
+              </a:rPr>
+              <a:t>1</a:t>
+            </a:r>
+          </a:p>
+        </p:txBody>
+      </p:sp>
+      <p:sp>
+        <p:nvSpPr>
+          <p:cNvPr id="137" name="TextBox 136"/>
+          <p:cNvSpPr txBox="1"/>
+          <p:nvPr/>
+        </p:nvSpPr>
+        <p:spPr>
+          <a:xfrm>
+            <a:off x="743712" y="5116068"/>
+            <a:ext cx="4084320" cy="68580"/>
+          </a:xfrm>
+          <a:prstGeom prst="rect">
+            <a:avLst/>
+          </a:prstGeom>
+          <a:noFill/>
+        </p:spPr>
+        <p:txBody>
+          <a:bodyPr wrap="square" lIns="0" rIns="0" tIns="0" bIns="0" anchor="t">
+            <a:spAutoFit/>
+          </a:bodyPr>
+          <a:lstStyle/>
+          <a:p>
+            <a:pPr algn="l">
+              <a:lnSpc>
+                <a:spcPct val="100000"/>
+              </a:lnSpc>
+            </a:pPr>
+            <a:r>
+              <a:rPr sz="720" b="1">
+                <a:solidFill>
+                  <a:srgbClr val="1A1A1C"/>
+                </a:solidFill>
+                <a:latin typeface="微软雅黑"/>
+                <a:ea typeface="微软雅黑"/>
+                <a:cs typeface="微软雅黑"/>
+              </a:rPr>
+              <a:t>xiaobaogongai-law（小包公智能法律专家）</a:t>
+            </a:r>
+          </a:p>
+        </p:txBody>
+      </p:sp>
+      <p:sp>
+        <p:nvSpPr>
+          <p:cNvPr id="138" name="TextBox 137"/>
+          <p:cNvSpPr txBox="1"/>
+          <p:nvPr/>
+        </p:nvSpPr>
+        <p:spPr>
+          <a:xfrm>
+            <a:off x="4876800" y="5116068"/>
+            <a:ext cx="914400" cy="68580"/>
+          </a:xfrm>
+          <a:prstGeom prst="rect">
+            <a:avLst/>
+          </a:prstGeom>
+          <a:noFill/>
+        </p:spPr>
+        <p:txBody>
+          <a:bodyPr wrap="square" lIns="0" rIns="0" tIns="0" bIns="0" anchor="t">
+            <a:spAutoFit/>
+          </a:bodyPr>
+          <a:lstStyle/>
+          <a:p>
+            <a:pPr algn="r">
+              <a:lnSpc>
+                <a:spcPct val="100000"/>
+              </a:lnSpc>
+            </a:pPr>
+            <a:r>
+              <a:rPr sz="700" b="0">
+                <a:solidFill>
+                  <a:srgbClr val="5B616B"/>
+                </a:solidFill>
+                <a:latin typeface="微软雅黑"/>
+                <a:ea typeface="微软雅黑"/>
+                <a:cs typeface="微软雅黑"/>
+              </a:rPr>
+              <a:t>27,742</a:t>
+            </a:r>
+          </a:p>
+        </p:txBody>
+      </p:sp>
+      <p:sp>
+        <p:nvSpPr>
+          <p:cNvPr id="139" name="TextBox 138"/>
+          <p:cNvSpPr txBox="1"/>
+          <p:nvPr/>
+        </p:nvSpPr>
+        <p:spPr>
+          <a:xfrm>
+            <a:off x="743712" y="5184648"/>
+            <a:ext cx="4876800" cy="61721"/>
+          </a:xfrm>
+          <a:prstGeom prst="rect">
+            <a:avLst/>
+          </a:prstGeom>
+          <a:noFill/>
+        </p:spPr>
+        <p:txBody>
+          <a:bodyPr wrap="square" lIns="0" rIns="0" tIns="0" bIns="0" anchor="t">
+            <a:spAutoFit/>
+          </a:bodyPr>
+          <a:lstStyle/>
+          <a:p>
+            <a:pPr algn="l">
+              <a:lnSpc>
+                <a:spcPct val="100000"/>
+              </a:lnSpc>
+            </a:pPr>
+            <a:r>
+              <a:rPr sz="630" b="0">
+                <a:solidFill>
+                  <a:srgbClr val="5B616B"/>
+                </a:solidFill>
+                <a:latin typeface="微软雅黑"/>
+                <a:ea typeface="微软雅黑"/>
+                <a:cs typeface="微软雅黑"/>
+              </a:rPr>
+              <a:t>xbgai123</a:t>
+            </a:r>
+          </a:p>
+        </p:txBody>
+      </p:sp>
+      <p:sp>
+        <p:nvSpPr>
+          <p:cNvPr id="140" name="TextBox 139"/>
+          <p:cNvSpPr txBox="1"/>
+          <p:nvPr/>
+        </p:nvSpPr>
+        <p:spPr>
+          <a:xfrm>
+            <a:off x="573024" y="5253228"/>
+            <a:ext cx="170688" cy="68580"/>
+          </a:xfrm>
+          <a:prstGeom prst="rect">
+            <a:avLst/>
+          </a:prstGeom>
+          <a:noFill/>
+        </p:spPr>
+        <p:txBody>
+          <a:bodyPr wrap="square" lIns="0" rIns="0" tIns="0" bIns="0" anchor="t">
+            <a:spAutoFit/>
+          </a:bodyPr>
+          <a:lstStyle/>
+          <a:p>
+            <a:pPr algn="l">
+              <a:lnSpc>
+                <a:spcPct val="100000"/>
+              </a:lnSpc>
+            </a:pPr>
+            <a:r>
+              <a:rPr sz="720" b="1">
+                <a:solidFill>
+                  <a:srgbClr val="B5333B"/>
+                </a:solidFill>
+                <a:latin typeface="微软雅黑"/>
+                <a:ea typeface="微软雅黑"/>
+                <a:cs typeface="微软雅黑"/>
+              </a:rPr>
+              <a:t>2</a:t>
+            </a:r>
+          </a:p>
+        </p:txBody>
+      </p:sp>
+      <p:sp>
+        <p:nvSpPr>
+          <p:cNvPr id="141" name="TextBox 140"/>
+          <p:cNvSpPr txBox="1"/>
+          <p:nvPr/>
+        </p:nvSpPr>
+        <p:spPr>
+          <a:xfrm>
+            <a:off x="743712" y="5253228"/>
+            <a:ext cx="4084320" cy="68580"/>
+          </a:xfrm>
+          <a:prstGeom prst="rect">
+            <a:avLst/>
+          </a:prstGeom>
+          <a:noFill/>
+        </p:spPr>
+        <p:txBody>
+          <a:bodyPr wrap="square" lIns="0" rIns="0" tIns="0" bIns="0" anchor="t">
+            <a:spAutoFit/>
+          </a:bodyPr>
+          <a:lstStyle/>
+          <a:p>
+            <a:pPr algn="l">
+              <a:lnSpc>
+                <a:spcPct val="100000"/>
+              </a:lnSpc>
+            </a:pPr>
+            <a:r>
+              <a:rPr sz="720" b="1">
+                <a:solidFill>
+                  <a:srgbClr val="1A1A1C"/>
+                </a:solidFill>
+                <a:latin typeface="微软雅黑"/>
+                <a:ea typeface="微软雅黑"/>
+                <a:cs typeface="微软雅黑"/>
+              </a:rPr>
+              <a:t>xiaobaogongai-contract-drafting（小包公智能合同起草）</a:t>
+            </a:r>
+          </a:p>
+        </p:txBody>
+      </p:sp>
+      <p:sp>
+        <p:nvSpPr>
+          <p:cNvPr id="142" name="TextBox 141"/>
+          <p:cNvSpPr txBox="1"/>
+          <p:nvPr/>
+        </p:nvSpPr>
+        <p:spPr>
+          <a:xfrm>
+            <a:off x="4876800" y="5253228"/>
+            <a:ext cx="914400" cy="68580"/>
+          </a:xfrm>
+          <a:prstGeom prst="rect">
+            <a:avLst/>
+          </a:prstGeom>
+          <a:noFill/>
+        </p:spPr>
+        <p:txBody>
+          <a:bodyPr wrap="square" lIns="0" rIns="0" tIns="0" bIns="0" anchor="t">
+            <a:spAutoFit/>
+          </a:bodyPr>
+          <a:lstStyle/>
+          <a:p>
+            <a:pPr algn="r">
+              <a:lnSpc>
+                <a:spcPct val="100000"/>
+              </a:lnSpc>
+            </a:pPr>
+            <a:r>
+              <a:rPr sz="700" b="0">
+                <a:solidFill>
+                  <a:srgbClr val="5B616B"/>
+                </a:solidFill>
+                <a:latin typeface="微软雅黑"/>
+                <a:ea typeface="微软雅黑"/>
+                <a:cs typeface="微软雅黑"/>
+              </a:rPr>
+              <a:t>26,770</a:t>
+            </a:r>
+          </a:p>
+        </p:txBody>
+      </p:sp>
+      <p:sp>
+        <p:nvSpPr>
+          <p:cNvPr id="143" name="TextBox 142"/>
+          <p:cNvSpPr txBox="1"/>
+          <p:nvPr/>
+        </p:nvSpPr>
+        <p:spPr>
+          <a:xfrm>
+            <a:off x="743712" y="5321808"/>
+            <a:ext cx="4876800" cy="61721"/>
+          </a:xfrm>
+          <a:prstGeom prst="rect">
+            <a:avLst/>
+          </a:prstGeom>
+          <a:noFill/>
+        </p:spPr>
+        <p:txBody>
+          <a:bodyPr wrap="square" lIns="0" rIns="0" tIns="0" bIns="0" anchor="t">
+            <a:spAutoFit/>
+          </a:bodyPr>
+          <a:lstStyle/>
+          <a:p>
+            <a:pPr algn="l">
+              <a:lnSpc>
+                <a:spcPct val="100000"/>
+              </a:lnSpc>
+            </a:pPr>
+            <a:r>
+              <a:rPr sz="630" b="0">
+                <a:solidFill>
+                  <a:srgbClr val="5B616B"/>
+                </a:solidFill>
+                <a:latin typeface="微软雅黑"/>
+                <a:ea typeface="微软雅黑"/>
+                <a:cs typeface="微软雅黑"/>
+              </a:rPr>
+              <a:t>xbgai123</a:t>
+            </a:r>
+          </a:p>
+        </p:txBody>
+      </p:sp>
+      <p:sp>
+        <p:nvSpPr>
+          <p:cNvPr id="144" name="TextBox 143"/>
+          <p:cNvSpPr txBox="1"/>
+          <p:nvPr/>
+        </p:nvSpPr>
+        <p:spPr>
+          <a:xfrm>
+            <a:off x="573024" y="5390388"/>
+            <a:ext cx="170688" cy="68580"/>
+          </a:xfrm>
+          <a:prstGeom prst="rect">
+            <a:avLst/>
+          </a:prstGeom>
+          <a:noFill/>
+        </p:spPr>
+        <p:txBody>
+          <a:bodyPr wrap="square" lIns="0" rIns="0" tIns="0" bIns="0" anchor="t">
+            <a:spAutoFit/>
+          </a:bodyPr>
+          <a:lstStyle/>
+          <a:p>
+            <a:pPr algn="l">
+              <a:lnSpc>
+                <a:spcPct val="100000"/>
+              </a:lnSpc>
+            </a:pPr>
+            <a:r>
+              <a:rPr sz="720" b="1">
+                <a:solidFill>
+                  <a:srgbClr val="B5333B"/>
+                </a:solidFill>
+                <a:latin typeface="微软雅黑"/>
+                <a:ea typeface="微软雅黑"/>
+                <a:cs typeface="微软雅黑"/>
+              </a:rPr>
+              <a:t>3</a:t>
+            </a:r>
+          </a:p>
+        </p:txBody>
+      </p:sp>
+      <p:sp>
+        <p:nvSpPr>
+          <p:cNvPr id="145" name="TextBox 144"/>
+          <p:cNvSpPr txBox="1"/>
+          <p:nvPr/>
+        </p:nvSpPr>
+        <p:spPr>
+          <a:xfrm>
+            <a:off x="743712" y="5390388"/>
+            <a:ext cx="4084320" cy="68580"/>
+          </a:xfrm>
+          <a:prstGeom prst="rect">
+            <a:avLst/>
+          </a:prstGeom>
+          <a:noFill/>
+        </p:spPr>
+        <p:txBody>
+          <a:bodyPr wrap="square" lIns="0" rIns="0" tIns="0" bIns="0" anchor="t">
+            <a:spAutoFit/>
+          </a:bodyPr>
+          <a:lstStyle/>
+          <a:p>
+            <a:pPr algn="l">
+              <a:lnSpc>
+                <a:spcPct val="100000"/>
+              </a:lnSpc>
+            </a:pPr>
+            <a:r>
+              <a:rPr sz="720" b="1">
+                <a:solidFill>
+                  <a:srgbClr val="1A1A1C"/>
+                </a:solidFill>
+                <a:latin typeface="微软雅黑"/>
+                <a:ea typeface="微软雅黑"/>
+                <a:cs typeface="微软雅黑"/>
+              </a:rPr>
+              <a:t>xiaobaogongai-contract-review（小包公智能合同审查）</a:t>
+            </a:r>
+          </a:p>
+        </p:txBody>
+      </p:sp>
+      <p:sp>
+        <p:nvSpPr>
+          <p:cNvPr id="146" name="TextBox 145"/>
+          <p:cNvSpPr txBox="1"/>
+          <p:nvPr/>
+        </p:nvSpPr>
+        <p:spPr>
+          <a:xfrm>
+            <a:off x="4876800" y="5390388"/>
+            <a:ext cx="914400" cy="68580"/>
+          </a:xfrm>
+          <a:prstGeom prst="rect">
+            <a:avLst/>
+          </a:prstGeom>
+          <a:noFill/>
+        </p:spPr>
+        <p:txBody>
+          <a:bodyPr wrap="square" lIns="0" rIns="0" tIns="0" bIns="0" anchor="t">
+            <a:spAutoFit/>
+          </a:bodyPr>
+          <a:lstStyle/>
+          <a:p>
+            <a:pPr algn="r">
+              <a:lnSpc>
+                <a:spcPct val="100000"/>
+              </a:lnSpc>
+            </a:pPr>
+            <a:r>
+              <a:rPr sz="700" b="0">
+                <a:solidFill>
+                  <a:srgbClr val="5B616B"/>
+                </a:solidFill>
+                <a:latin typeface="微软雅黑"/>
+                <a:ea typeface="微软雅黑"/>
+                <a:cs typeface="微软雅黑"/>
+              </a:rPr>
+              <a:t>10,637</a:t>
+            </a:r>
+          </a:p>
+        </p:txBody>
+      </p:sp>
+      <p:sp>
+        <p:nvSpPr>
+          <p:cNvPr id="147" name="TextBox 146"/>
+          <p:cNvSpPr txBox="1"/>
+          <p:nvPr/>
+        </p:nvSpPr>
+        <p:spPr>
+          <a:xfrm>
+            <a:off x="743712" y="5458968"/>
+            <a:ext cx="4876800" cy="61721"/>
+          </a:xfrm>
+          <a:prstGeom prst="rect">
+            <a:avLst/>
+          </a:prstGeom>
+          <a:noFill/>
+        </p:spPr>
+        <p:txBody>
+          <a:bodyPr wrap="square" lIns="0" rIns="0" tIns="0" bIns="0" anchor="t">
+            <a:spAutoFit/>
+          </a:bodyPr>
+          <a:lstStyle/>
+          <a:p>
+            <a:pPr algn="l">
+              <a:lnSpc>
+                <a:spcPct val="100000"/>
+              </a:lnSpc>
+            </a:pPr>
+            <a:r>
+              <a:rPr sz="630" b="0">
+                <a:solidFill>
+                  <a:srgbClr val="5B616B"/>
+                </a:solidFill>
+                <a:latin typeface="微软雅黑"/>
+                <a:ea typeface="微软雅黑"/>
+                <a:cs typeface="微软雅黑"/>
+              </a:rPr>
+              <a:t>xbgai123</a:t>
             </a:r>
           </a:p>
         </p:txBody>
@@ -38252,7 +38270,1616 @@
         </p:nvSpPr>
         <p:spPr>
           <a:xfrm>
-            <a:off x="426720" y="5589270"/>
+            <a:off x="573024" y="5527548"/>
+            <a:ext cx="170688" cy="68580"/>
+          </a:xfrm>
+          <a:prstGeom prst="rect">
+            <a:avLst/>
+          </a:prstGeom>
+          <a:noFill/>
+        </p:spPr>
+        <p:txBody>
+          <a:bodyPr wrap="square" lIns="0" rIns="0" tIns="0" bIns="0" anchor="t">
+            <a:spAutoFit/>
+          </a:bodyPr>
+          <a:lstStyle/>
+          <a:p>
+            <a:pPr algn="l">
+              <a:lnSpc>
+                <a:spcPct val="100000"/>
+              </a:lnSpc>
+            </a:pPr>
+            <a:r>
+              <a:rPr sz="720" b="1">
+                <a:solidFill>
+                  <a:srgbClr val="B5333B"/>
+                </a:solidFill>
+                <a:latin typeface="微软雅黑"/>
+                <a:ea typeface="微软雅黑"/>
+                <a:cs typeface="微软雅黑"/>
+              </a:rPr>
+              <a:t>4</a:t>
+            </a:r>
+          </a:p>
+        </p:txBody>
+      </p:sp>
+      <p:sp>
+        <p:nvSpPr>
+          <p:cNvPr id="149" name="TextBox 148"/>
+          <p:cNvSpPr txBox="1"/>
+          <p:nvPr/>
+        </p:nvSpPr>
+        <p:spPr>
+          <a:xfrm>
+            <a:off x="743712" y="5527548"/>
+            <a:ext cx="4084320" cy="68580"/>
+          </a:xfrm>
+          <a:prstGeom prst="rect">
+            <a:avLst/>
+          </a:prstGeom>
+          <a:noFill/>
+        </p:spPr>
+        <p:txBody>
+          <a:bodyPr wrap="square" lIns="0" rIns="0" tIns="0" bIns="0" anchor="t">
+            <a:spAutoFit/>
+          </a:bodyPr>
+          <a:lstStyle/>
+          <a:p>
+            <a:pPr algn="l">
+              <a:lnSpc>
+                <a:spcPct val="100000"/>
+              </a:lnSpc>
+            </a:pPr>
+            <a:r>
+              <a:rPr sz="720" b="1">
+                <a:solidFill>
+                  <a:srgbClr val="1A1A1C"/>
+                </a:solidFill>
+                <a:latin typeface="微软雅黑"/>
+                <a:ea typeface="微软雅黑"/>
+                <a:cs typeface="微软雅黑"/>
+              </a:rPr>
+              <a:t>xiaobaogongai-contract-error（小包公合同自动纠错工具）</a:t>
+            </a:r>
+          </a:p>
+        </p:txBody>
+      </p:sp>
+      <p:sp>
+        <p:nvSpPr>
+          <p:cNvPr id="150" name="TextBox 149"/>
+          <p:cNvSpPr txBox="1"/>
+          <p:nvPr/>
+        </p:nvSpPr>
+        <p:spPr>
+          <a:xfrm>
+            <a:off x="4876800" y="5527548"/>
+            <a:ext cx="914400" cy="68580"/>
+          </a:xfrm>
+          <a:prstGeom prst="rect">
+            <a:avLst/>
+          </a:prstGeom>
+          <a:noFill/>
+        </p:spPr>
+        <p:txBody>
+          <a:bodyPr wrap="square" lIns="0" rIns="0" tIns="0" bIns="0" anchor="t">
+            <a:spAutoFit/>
+          </a:bodyPr>
+          <a:lstStyle/>
+          <a:p>
+            <a:pPr algn="r">
+              <a:lnSpc>
+                <a:spcPct val="100000"/>
+              </a:lnSpc>
+            </a:pPr>
+            <a:r>
+              <a:rPr sz="700" b="0">
+                <a:solidFill>
+                  <a:srgbClr val="5B616B"/>
+                </a:solidFill>
+                <a:latin typeface="微软雅黑"/>
+                <a:ea typeface="微软雅黑"/>
+                <a:cs typeface="微软雅黑"/>
+              </a:rPr>
+              <a:t>10,566</a:t>
+            </a:r>
+          </a:p>
+        </p:txBody>
+      </p:sp>
+      <p:sp>
+        <p:nvSpPr>
+          <p:cNvPr id="151" name="TextBox 150"/>
+          <p:cNvSpPr txBox="1"/>
+          <p:nvPr/>
+        </p:nvSpPr>
+        <p:spPr>
+          <a:xfrm>
+            <a:off x="743712" y="5596128"/>
+            <a:ext cx="4876800" cy="61721"/>
+          </a:xfrm>
+          <a:prstGeom prst="rect">
+            <a:avLst/>
+          </a:prstGeom>
+          <a:noFill/>
+        </p:spPr>
+        <p:txBody>
+          <a:bodyPr wrap="square" lIns="0" rIns="0" tIns="0" bIns="0" anchor="t">
+            <a:spAutoFit/>
+          </a:bodyPr>
+          <a:lstStyle/>
+          <a:p>
+            <a:pPr algn="l">
+              <a:lnSpc>
+                <a:spcPct val="100000"/>
+              </a:lnSpc>
+            </a:pPr>
+            <a:r>
+              <a:rPr sz="630" b="0">
+                <a:solidFill>
+                  <a:srgbClr val="5B616B"/>
+                </a:solidFill>
+                <a:latin typeface="微软雅黑"/>
+                <a:ea typeface="微软雅黑"/>
+                <a:cs typeface="微软雅黑"/>
+              </a:rPr>
+              <a:t>xbgai123</a:t>
+            </a:r>
+          </a:p>
+        </p:txBody>
+      </p:sp>
+      <p:sp>
+        <p:nvSpPr>
+          <p:cNvPr id="152" name="TextBox 151"/>
+          <p:cNvSpPr txBox="1"/>
+          <p:nvPr/>
+        </p:nvSpPr>
+        <p:spPr>
+          <a:xfrm>
+            <a:off x="573024" y="5664708"/>
+            <a:ext cx="170688" cy="68580"/>
+          </a:xfrm>
+          <a:prstGeom prst="rect">
+            <a:avLst/>
+          </a:prstGeom>
+          <a:noFill/>
+        </p:spPr>
+        <p:txBody>
+          <a:bodyPr wrap="square" lIns="0" rIns="0" tIns="0" bIns="0" anchor="t">
+            <a:spAutoFit/>
+          </a:bodyPr>
+          <a:lstStyle/>
+          <a:p>
+            <a:pPr algn="l">
+              <a:lnSpc>
+                <a:spcPct val="100000"/>
+              </a:lnSpc>
+            </a:pPr>
+            <a:r>
+              <a:rPr sz="720" b="1">
+                <a:solidFill>
+                  <a:srgbClr val="B5333B"/>
+                </a:solidFill>
+                <a:latin typeface="微软雅黑"/>
+                <a:ea typeface="微软雅黑"/>
+                <a:cs typeface="微软雅黑"/>
+              </a:rPr>
+              <a:t>5</a:t>
+            </a:r>
+          </a:p>
+        </p:txBody>
+      </p:sp>
+      <p:sp>
+        <p:nvSpPr>
+          <p:cNvPr id="153" name="TextBox 152"/>
+          <p:cNvSpPr txBox="1"/>
+          <p:nvPr/>
+        </p:nvSpPr>
+        <p:spPr>
+          <a:xfrm>
+            <a:off x="743712" y="5664708"/>
+            <a:ext cx="4084320" cy="68580"/>
+          </a:xfrm>
+          <a:prstGeom prst="rect">
+            <a:avLst/>
+          </a:prstGeom>
+          <a:noFill/>
+        </p:spPr>
+        <p:txBody>
+          <a:bodyPr wrap="square" lIns="0" rIns="0" tIns="0" bIns="0" anchor="t">
+            <a:spAutoFit/>
+          </a:bodyPr>
+          <a:lstStyle/>
+          <a:p>
+            <a:pPr algn="l">
+              <a:lnSpc>
+                <a:spcPct val="100000"/>
+              </a:lnSpc>
+            </a:pPr>
+            <a:r>
+              <a:rPr sz="720" b="1">
+                <a:solidFill>
+                  <a:srgbClr val="1A1A1C"/>
+                </a:solidFill>
+                <a:latin typeface="微软雅黑"/>
+                <a:ea typeface="微软雅黑"/>
+                <a:cs typeface="微软雅黑"/>
+              </a:rPr>
+              <a:t>xiaobaogongai-contract-typesetting（小包公合同自动排版工具）</a:t>
+            </a:r>
+          </a:p>
+        </p:txBody>
+      </p:sp>
+      <p:sp>
+        <p:nvSpPr>
+          <p:cNvPr id="154" name="TextBox 153"/>
+          <p:cNvSpPr txBox="1"/>
+          <p:nvPr/>
+        </p:nvSpPr>
+        <p:spPr>
+          <a:xfrm>
+            <a:off x="4876800" y="5664708"/>
+            <a:ext cx="914400" cy="68580"/>
+          </a:xfrm>
+          <a:prstGeom prst="rect">
+            <a:avLst/>
+          </a:prstGeom>
+          <a:noFill/>
+        </p:spPr>
+        <p:txBody>
+          <a:bodyPr wrap="square" lIns="0" rIns="0" tIns="0" bIns="0" anchor="t">
+            <a:spAutoFit/>
+          </a:bodyPr>
+          <a:lstStyle/>
+          <a:p>
+            <a:pPr algn="r">
+              <a:lnSpc>
+                <a:spcPct val="100000"/>
+              </a:lnSpc>
+            </a:pPr>
+            <a:r>
+              <a:rPr sz="700" b="0">
+                <a:solidFill>
+                  <a:srgbClr val="5B616B"/>
+                </a:solidFill>
+                <a:latin typeface="微软雅黑"/>
+                <a:ea typeface="微软雅黑"/>
+                <a:cs typeface="微软雅黑"/>
+              </a:rPr>
+              <a:t>10,555</a:t>
+            </a:r>
+          </a:p>
+        </p:txBody>
+      </p:sp>
+      <p:sp>
+        <p:nvSpPr>
+          <p:cNvPr id="155" name="TextBox 154"/>
+          <p:cNvSpPr txBox="1"/>
+          <p:nvPr/>
+        </p:nvSpPr>
+        <p:spPr>
+          <a:xfrm>
+            <a:off x="743712" y="5733288"/>
+            <a:ext cx="4876800" cy="61721"/>
+          </a:xfrm>
+          <a:prstGeom prst="rect">
+            <a:avLst/>
+          </a:prstGeom>
+          <a:noFill/>
+        </p:spPr>
+        <p:txBody>
+          <a:bodyPr wrap="square" lIns="0" rIns="0" tIns="0" bIns="0" anchor="t">
+            <a:spAutoFit/>
+          </a:bodyPr>
+          <a:lstStyle/>
+          <a:p>
+            <a:pPr algn="l">
+              <a:lnSpc>
+                <a:spcPct val="100000"/>
+              </a:lnSpc>
+            </a:pPr>
+            <a:r>
+              <a:rPr sz="630" b="0">
+                <a:solidFill>
+                  <a:srgbClr val="5B616B"/>
+                </a:solidFill>
+                <a:latin typeface="微软雅黑"/>
+                <a:ea typeface="微软雅黑"/>
+                <a:cs typeface="微软雅黑"/>
+              </a:rPr>
+              <a:t>xbgai123</a:t>
+            </a:r>
+          </a:p>
+        </p:txBody>
+      </p:sp>
+      <p:sp>
+        <p:nvSpPr>
+          <p:cNvPr id="156" name="TextBox 155"/>
+          <p:cNvSpPr txBox="1"/>
+          <p:nvPr/>
+        </p:nvSpPr>
+        <p:spPr>
+          <a:xfrm>
+            <a:off x="573024" y="5801868"/>
+            <a:ext cx="170688" cy="68580"/>
+          </a:xfrm>
+          <a:prstGeom prst="rect">
+            <a:avLst/>
+          </a:prstGeom>
+          <a:noFill/>
+        </p:spPr>
+        <p:txBody>
+          <a:bodyPr wrap="square" lIns="0" rIns="0" tIns="0" bIns="0" anchor="t">
+            <a:spAutoFit/>
+          </a:bodyPr>
+          <a:lstStyle/>
+          <a:p>
+            <a:pPr algn="l">
+              <a:lnSpc>
+                <a:spcPct val="100000"/>
+              </a:lnSpc>
+            </a:pPr>
+            <a:r>
+              <a:rPr sz="720" b="1">
+                <a:solidFill>
+                  <a:srgbClr val="B5333B"/>
+                </a:solidFill>
+                <a:latin typeface="微软雅黑"/>
+                <a:ea typeface="微软雅黑"/>
+                <a:cs typeface="微软雅黑"/>
+              </a:rPr>
+              <a:t>6</a:t>
+            </a:r>
+          </a:p>
+        </p:txBody>
+      </p:sp>
+      <p:sp>
+        <p:nvSpPr>
+          <p:cNvPr id="157" name="TextBox 156"/>
+          <p:cNvSpPr txBox="1"/>
+          <p:nvPr/>
+        </p:nvSpPr>
+        <p:spPr>
+          <a:xfrm>
+            <a:off x="743712" y="5801868"/>
+            <a:ext cx="4084320" cy="68580"/>
+          </a:xfrm>
+          <a:prstGeom prst="rect">
+            <a:avLst/>
+          </a:prstGeom>
+          <a:noFill/>
+        </p:spPr>
+        <p:txBody>
+          <a:bodyPr wrap="square" lIns="0" rIns="0" tIns="0" bIns="0" anchor="t">
+            <a:spAutoFit/>
+          </a:bodyPr>
+          <a:lstStyle/>
+          <a:p>
+            <a:pPr algn="l">
+              <a:lnSpc>
+                <a:spcPct val="100000"/>
+              </a:lnSpc>
+            </a:pPr>
+            <a:r>
+              <a:rPr sz="720" b="1">
+                <a:solidFill>
+                  <a:srgbClr val="1A1A1C"/>
+                </a:solidFill>
+                <a:latin typeface="微软雅黑"/>
+                <a:ea typeface="微软雅黑"/>
+                <a:cs typeface="微软雅黑"/>
+              </a:rPr>
+              <a:t>xiaobaogongai-contract-risk（小包公合同风险评估工具）</a:t>
+            </a:r>
+          </a:p>
+        </p:txBody>
+      </p:sp>
+      <p:sp>
+        <p:nvSpPr>
+          <p:cNvPr id="158" name="TextBox 157"/>
+          <p:cNvSpPr txBox="1"/>
+          <p:nvPr/>
+        </p:nvSpPr>
+        <p:spPr>
+          <a:xfrm>
+            <a:off x="4876800" y="5801868"/>
+            <a:ext cx="914400" cy="68580"/>
+          </a:xfrm>
+          <a:prstGeom prst="rect">
+            <a:avLst/>
+          </a:prstGeom>
+          <a:noFill/>
+        </p:spPr>
+        <p:txBody>
+          <a:bodyPr wrap="square" lIns="0" rIns="0" tIns="0" bIns="0" anchor="t">
+            <a:spAutoFit/>
+          </a:bodyPr>
+          <a:lstStyle/>
+          <a:p>
+            <a:pPr algn="r">
+              <a:lnSpc>
+                <a:spcPct val="100000"/>
+              </a:lnSpc>
+            </a:pPr>
+            <a:r>
+              <a:rPr sz="700" b="0">
+                <a:solidFill>
+                  <a:srgbClr val="5B616B"/>
+                </a:solidFill>
+                <a:latin typeface="微软雅黑"/>
+                <a:ea typeface="微软雅黑"/>
+                <a:cs typeface="微软雅黑"/>
+              </a:rPr>
+              <a:t>10,481</a:t>
+            </a:r>
+          </a:p>
+        </p:txBody>
+      </p:sp>
+      <p:sp>
+        <p:nvSpPr>
+          <p:cNvPr id="159" name="TextBox 158"/>
+          <p:cNvSpPr txBox="1"/>
+          <p:nvPr/>
+        </p:nvSpPr>
+        <p:spPr>
+          <a:xfrm>
+            <a:off x="743712" y="5870448"/>
+            <a:ext cx="4876800" cy="61721"/>
+          </a:xfrm>
+          <a:prstGeom prst="rect">
+            <a:avLst/>
+          </a:prstGeom>
+          <a:noFill/>
+        </p:spPr>
+        <p:txBody>
+          <a:bodyPr wrap="square" lIns="0" rIns="0" tIns="0" bIns="0" anchor="t">
+            <a:spAutoFit/>
+          </a:bodyPr>
+          <a:lstStyle/>
+          <a:p>
+            <a:pPr algn="l">
+              <a:lnSpc>
+                <a:spcPct val="100000"/>
+              </a:lnSpc>
+            </a:pPr>
+            <a:r>
+              <a:rPr sz="630" b="0">
+                <a:solidFill>
+                  <a:srgbClr val="5B616B"/>
+                </a:solidFill>
+                <a:latin typeface="微软雅黑"/>
+                <a:ea typeface="微软雅黑"/>
+                <a:cs typeface="微软雅黑"/>
+              </a:rPr>
+              <a:t>xbgai123</a:t>
+            </a:r>
+          </a:p>
+        </p:txBody>
+      </p:sp>
+      <p:sp>
+        <p:nvSpPr>
+          <p:cNvPr id="160" name="Rounded Rectangle 159"/>
+          <p:cNvSpPr/>
+          <p:nvPr/>
+        </p:nvSpPr>
+        <p:spPr>
+          <a:xfrm>
+            <a:off x="6217920" y="4937760"/>
+            <a:ext cx="5547360" cy="1014984"/>
+          </a:xfrm>
+          <a:prstGeom prst="roundRect">
+            <a:avLst>
+              <a:gd name="adj" fmla="val 2000"/>
+            </a:avLst>
+          </a:prstGeom>
+          <a:solidFill>
+            <a:srgbClr val="FFFFFF"/>
+          </a:solidFill>
+          <a:ln w="9525">
+            <a:solidFill>
+              <a:srgbClr val="E2E4E7"/>
+            </a:solidFill>
+          </a:ln>
+          <a:effectLst/>
+        </p:spPr>
+        <p:style>
+          <a:lnRef idx="1">
+            <a:schemeClr val="accent1"/>
+          </a:lnRef>
+          <a:fillRef idx="3">
+            <a:schemeClr val="accent1"/>
+          </a:fillRef>
+          <a:effectRef idx="2">
+            <a:schemeClr val="accent1"/>
+          </a:effectRef>
+          <a:fontRef idx="minor">
+            <a:schemeClr val="lt1"/>
+          </a:fontRef>
+        </p:style>
+        <p:txBody>
+          <a:bodyPr rtlCol="0" anchor="ctr"/>
+          <a:lstStyle/>
+          <a:p>
+            <a:pPr algn="ctr"/>
+          </a:p>
+        </p:txBody>
+      </p:sp>
+      <p:sp>
+        <p:nvSpPr>
+          <p:cNvPr id="161" name="TextBox 160"/>
+          <p:cNvSpPr txBox="1"/>
+          <p:nvPr/>
+        </p:nvSpPr>
+        <p:spPr>
+          <a:xfrm>
+            <a:off x="6364224" y="4985766"/>
+            <a:ext cx="3657600" cy="96012"/>
+          </a:xfrm>
+          <a:prstGeom prst="rect">
+            <a:avLst/>
+          </a:prstGeom>
+          <a:noFill/>
+        </p:spPr>
+        <p:txBody>
+          <a:bodyPr wrap="square" lIns="0" rIns="0" tIns="0" bIns="0" anchor="t">
+            <a:spAutoFit/>
+          </a:bodyPr>
+          <a:lstStyle/>
+          <a:p>
+            <a:pPr algn="l">
+              <a:lnSpc>
+                <a:spcPct val="100000"/>
+              </a:lnSpc>
+            </a:pPr>
+            <a:r>
+              <a:rPr sz="860" b="1">
+                <a:solidFill>
+                  <a:srgbClr val="8B8E94"/>
+                </a:solidFill>
+                <a:latin typeface="微软雅黑"/>
+                <a:ea typeface="微软雅黑"/>
+                <a:cs typeface="微软雅黑"/>
+              </a:rPr>
+              <a:t>个人上传 Top6</a:t>
+            </a:r>
+          </a:p>
+        </p:txBody>
+      </p:sp>
+      <p:sp>
+        <p:nvSpPr>
+          <p:cNvPr id="162" name="Rectangle 161"/>
+          <p:cNvSpPr/>
+          <p:nvPr/>
+        </p:nvSpPr>
+        <p:spPr>
+          <a:xfrm>
+            <a:off x="6364224" y="5088636"/>
+            <a:ext cx="5254752" cy="5486"/>
+          </a:xfrm>
+          <a:prstGeom prst="rect">
+            <a:avLst/>
+          </a:prstGeom>
+          <a:solidFill>
+            <a:srgbClr val="E2E4E7"/>
+          </a:solidFill>
+          <a:ln>
+            <a:noFill/>
+          </a:ln>
+          <a:effectLst/>
+        </p:spPr>
+        <p:style>
+          <a:lnRef idx="1">
+            <a:schemeClr val="accent1"/>
+          </a:lnRef>
+          <a:fillRef idx="3">
+            <a:schemeClr val="accent1"/>
+          </a:fillRef>
+          <a:effectRef idx="2">
+            <a:schemeClr val="accent1"/>
+          </a:effectRef>
+          <a:fontRef idx="minor">
+            <a:schemeClr val="lt1"/>
+          </a:fontRef>
+        </p:style>
+        <p:txBody>
+          <a:bodyPr rtlCol="0" anchor="ctr"/>
+          <a:lstStyle/>
+          <a:p>
+            <a:pPr algn="ctr"/>
+          </a:p>
+        </p:txBody>
+      </p:sp>
+      <p:sp>
+        <p:nvSpPr>
+          <p:cNvPr id="163" name="TextBox 162"/>
+          <p:cNvSpPr txBox="1"/>
+          <p:nvPr/>
+        </p:nvSpPr>
+        <p:spPr>
+          <a:xfrm>
+            <a:off x="6364224" y="5116068"/>
+            <a:ext cx="170688" cy="68580"/>
+          </a:xfrm>
+          <a:prstGeom prst="rect">
+            <a:avLst/>
+          </a:prstGeom>
+          <a:noFill/>
+        </p:spPr>
+        <p:txBody>
+          <a:bodyPr wrap="square" lIns="0" rIns="0" tIns="0" bIns="0" anchor="t">
+            <a:spAutoFit/>
+          </a:bodyPr>
+          <a:lstStyle/>
+          <a:p>
+            <a:pPr algn="l">
+              <a:lnSpc>
+                <a:spcPct val="100000"/>
+              </a:lnSpc>
+            </a:pPr>
+            <a:r>
+              <a:rPr sz="720" b="1">
+                <a:solidFill>
+                  <a:srgbClr val="B5333B"/>
+                </a:solidFill>
+                <a:latin typeface="微软雅黑"/>
+                <a:ea typeface="微软雅黑"/>
+                <a:cs typeface="微软雅黑"/>
+              </a:rPr>
+              <a:t>1</a:t>
+            </a:r>
+          </a:p>
+        </p:txBody>
+      </p:sp>
+      <p:sp>
+        <p:nvSpPr>
+          <p:cNvPr id="164" name="TextBox 163"/>
+          <p:cNvSpPr txBox="1"/>
+          <p:nvPr/>
+        </p:nvSpPr>
+        <p:spPr>
+          <a:xfrm>
+            <a:off x="6534912" y="5116068"/>
+            <a:ext cx="4084320" cy="68580"/>
+          </a:xfrm>
+          <a:prstGeom prst="rect">
+            <a:avLst/>
+          </a:prstGeom>
+          <a:noFill/>
+        </p:spPr>
+        <p:txBody>
+          <a:bodyPr wrap="square" lIns="0" rIns="0" tIns="0" bIns="0" anchor="t">
+            <a:spAutoFit/>
+          </a:bodyPr>
+          <a:lstStyle/>
+          <a:p>
+            <a:pPr algn="l">
+              <a:lnSpc>
+                <a:spcPct val="100000"/>
+              </a:lnSpc>
+            </a:pPr>
+            <a:r>
+              <a:rPr sz="720" b="1">
+                <a:solidFill>
+                  <a:srgbClr val="1A1A1C"/>
+                </a:solidFill>
+                <a:latin typeface="微软雅黑"/>
+                <a:ea typeface="微软雅黑"/>
+                <a:cs typeface="微软雅黑"/>
+              </a:rPr>
+              <a:t>mattress-trial-rights-advisor（床垫试睡权益顾问）</a:t>
+            </a:r>
+          </a:p>
+        </p:txBody>
+      </p:sp>
+      <p:sp>
+        <p:nvSpPr>
+          <p:cNvPr id="165" name="TextBox 164"/>
+          <p:cNvSpPr txBox="1"/>
+          <p:nvPr/>
+        </p:nvSpPr>
+        <p:spPr>
+          <a:xfrm>
+            <a:off x="10668000" y="5116068"/>
+            <a:ext cx="914400" cy="68580"/>
+          </a:xfrm>
+          <a:prstGeom prst="rect">
+            <a:avLst/>
+          </a:prstGeom>
+          <a:noFill/>
+        </p:spPr>
+        <p:txBody>
+          <a:bodyPr wrap="square" lIns="0" rIns="0" tIns="0" bIns="0" anchor="t">
+            <a:spAutoFit/>
+          </a:bodyPr>
+          <a:lstStyle/>
+          <a:p>
+            <a:pPr algn="r">
+              <a:lnSpc>
+                <a:spcPct val="100000"/>
+              </a:lnSpc>
+            </a:pPr>
+            <a:r>
+              <a:rPr sz="700" b="0">
+                <a:solidFill>
+                  <a:srgbClr val="5B616B"/>
+                </a:solidFill>
+                <a:latin typeface="微软雅黑"/>
+                <a:ea typeface="微软雅黑"/>
+                <a:cs typeface="微软雅黑"/>
+              </a:rPr>
+              <a:t>13,082</a:t>
+            </a:r>
+          </a:p>
+        </p:txBody>
+      </p:sp>
+      <p:sp>
+        <p:nvSpPr>
+          <p:cNvPr id="166" name="TextBox 165"/>
+          <p:cNvSpPr txBox="1"/>
+          <p:nvPr/>
+        </p:nvSpPr>
+        <p:spPr>
+          <a:xfrm>
+            <a:off x="6534912" y="5184648"/>
+            <a:ext cx="4876800" cy="61721"/>
+          </a:xfrm>
+          <a:prstGeom prst="rect">
+            <a:avLst/>
+          </a:prstGeom>
+          <a:noFill/>
+        </p:spPr>
+        <p:txBody>
+          <a:bodyPr wrap="square" lIns="0" rIns="0" tIns="0" bIns="0" anchor="t">
+            <a:spAutoFit/>
+          </a:bodyPr>
+          <a:lstStyle/>
+          <a:p>
+            <a:pPr algn="l">
+              <a:lnSpc>
+                <a:spcPct val="100000"/>
+              </a:lnSpc>
+            </a:pPr>
+            <a:r>
+              <a:rPr sz="630" b="0">
+                <a:solidFill>
+                  <a:srgbClr val="5B616B"/>
+                </a:solidFill>
+                <a:latin typeface="微软雅黑"/>
+                <a:ea typeface="微软雅黑"/>
+                <a:cs typeface="微软雅黑"/>
+              </a:rPr>
+              <a:t>alv123</a:t>
+            </a:r>
+          </a:p>
+        </p:txBody>
+      </p:sp>
+      <p:sp>
+        <p:nvSpPr>
+          <p:cNvPr id="167" name="TextBox 166"/>
+          <p:cNvSpPr txBox="1"/>
+          <p:nvPr/>
+        </p:nvSpPr>
+        <p:spPr>
+          <a:xfrm>
+            <a:off x="6364224" y="5253228"/>
+            <a:ext cx="170688" cy="68580"/>
+          </a:xfrm>
+          <a:prstGeom prst="rect">
+            <a:avLst/>
+          </a:prstGeom>
+          <a:noFill/>
+        </p:spPr>
+        <p:txBody>
+          <a:bodyPr wrap="square" lIns="0" rIns="0" tIns="0" bIns="0" anchor="t">
+            <a:spAutoFit/>
+          </a:bodyPr>
+          <a:lstStyle/>
+          <a:p>
+            <a:pPr algn="l">
+              <a:lnSpc>
+                <a:spcPct val="100000"/>
+              </a:lnSpc>
+            </a:pPr>
+            <a:r>
+              <a:rPr sz="720" b="1">
+                <a:solidFill>
+                  <a:srgbClr val="B5333B"/>
+                </a:solidFill>
+                <a:latin typeface="微软雅黑"/>
+                <a:ea typeface="微软雅黑"/>
+                <a:cs typeface="微软雅黑"/>
+              </a:rPr>
+              <a:t>2</a:t>
+            </a:r>
+          </a:p>
+        </p:txBody>
+      </p:sp>
+      <p:sp>
+        <p:nvSpPr>
+          <p:cNvPr id="168" name="TextBox 167"/>
+          <p:cNvSpPr txBox="1"/>
+          <p:nvPr/>
+        </p:nvSpPr>
+        <p:spPr>
+          <a:xfrm>
+            <a:off x="6534912" y="5253228"/>
+            <a:ext cx="4084320" cy="68580"/>
+          </a:xfrm>
+          <a:prstGeom prst="rect">
+            <a:avLst/>
+          </a:prstGeom>
+          <a:noFill/>
+        </p:spPr>
+        <p:txBody>
+          <a:bodyPr wrap="square" lIns="0" rIns="0" tIns="0" bIns="0" anchor="t">
+            <a:spAutoFit/>
+          </a:bodyPr>
+          <a:lstStyle/>
+          <a:p>
+            <a:pPr algn="l">
+              <a:lnSpc>
+                <a:spcPct val="100000"/>
+              </a:lnSpc>
+            </a:pPr>
+            <a:r>
+              <a:rPr sz="720" b="1">
+                <a:solidFill>
+                  <a:srgbClr val="1A1A1C"/>
+                </a:solidFill>
+                <a:latin typeface="微软雅黑"/>
+                <a:ea typeface="微软雅黑"/>
+                <a:cs typeface="微软雅黑"/>
+              </a:rPr>
+              <a:t>mattress-new-home-low-odor-advisor（新房低异味床垫顾问）</a:t>
+            </a:r>
+          </a:p>
+        </p:txBody>
+      </p:sp>
+      <p:sp>
+        <p:nvSpPr>
+          <p:cNvPr id="169" name="TextBox 168"/>
+          <p:cNvSpPr txBox="1"/>
+          <p:nvPr/>
+        </p:nvSpPr>
+        <p:spPr>
+          <a:xfrm>
+            <a:off x="10668000" y="5253228"/>
+            <a:ext cx="914400" cy="68580"/>
+          </a:xfrm>
+          <a:prstGeom prst="rect">
+            <a:avLst/>
+          </a:prstGeom>
+          <a:noFill/>
+        </p:spPr>
+        <p:txBody>
+          <a:bodyPr wrap="square" lIns="0" rIns="0" tIns="0" bIns="0" anchor="t">
+            <a:spAutoFit/>
+          </a:bodyPr>
+          <a:lstStyle/>
+          <a:p>
+            <a:pPr algn="r">
+              <a:lnSpc>
+                <a:spcPct val="100000"/>
+              </a:lnSpc>
+            </a:pPr>
+            <a:r>
+              <a:rPr sz="700" b="0">
+                <a:solidFill>
+                  <a:srgbClr val="5B616B"/>
+                </a:solidFill>
+                <a:latin typeface="微软雅黑"/>
+                <a:ea typeface="微软雅黑"/>
+                <a:cs typeface="微软雅黑"/>
+              </a:rPr>
+              <a:t>12,583</a:t>
+            </a:r>
+          </a:p>
+        </p:txBody>
+      </p:sp>
+      <p:sp>
+        <p:nvSpPr>
+          <p:cNvPr id="170" name="TextBox 169"/>
+          <p:cNvSpPr txBox="1"/>
+          <p:nvPr/>
+        </p:nvSpPr>
+        <p:spPr>
+          <a:xfrm>
+            <a:off x="6534912" y="5321808"/>
+            <a:ext cx="4876800" cy="61721"/>
+          </a:xfrm>
+          <a:prstGeom prst="rect">
+            <a:avLst/>
+          </a:prstGeom>
+          <a:noFill/>
+        </p:spPr>
+        <p:txBody>
+          <a:bodyPr wrap="square" lIns="0" rIns="0" tIns="0" bIns="0" anchor="t">
+            <a:spAutoFit/>
+          </a:bodyPr>
+          <a:lstStyle/>
+          <a:p>
+            <a:pPr algn="l">
+              <a:lnSpc>
+                <a:spcPct val="100000"/>
+              </a:lnSpc>
+            </a:pPr>
+            <a:r>
+              <a:rPr sz="630" b="0">
+                <a:solidFill>
+                  <a:srgbClr val="5B616B"/>
+                </a:solidFill>
+                <a:latin typeface="微软雅黑"/>
+                <a:ea typeface="微软雅黑"/>
+                <a:cs typeface="微软雅黑"/>
+              </a:rPr>
+              <a:t>alv123</a:t>
+            </a:r>
+          </a:p>
+        </p:txBody>
+      </p:sp>
+      <p:sp>
+        <p:nvSpPr>
+          <p:cNvPr id="171" name="TextBox 170"/>
+          <p:cNvSpPr txBox="1"/>
+          <p:nvPr/>
+        </p:nvSpPr>
+        <p:spPr>
+          <a:xfrm>
+            <a:off x="6364224" y="5390388"/>
+            <a:ext cx="170688" cy="68580"/>
+          </a:xfrm>
+          <a:prstGeom prst="rect">
+            <a:avLst/>
+          </a:prstGeom>
+          <a:noFill/>
+        </p:spPr>
+        <p:txBody>
+          <a:bodyPr wrap="square" lIns="0" rIns="0" tIns="0" bIns="0" anchor="t">
+            <a:spAutoFit/>
+          </a:bodyPr>
+          <a:lstStyle/>
+          <a:p>
+            <a:pPr algn="l">
+              <a:lnSpc>
+                <a:spcPct val="100000"/>
+              </a:lnSpc>
+            </a:pPr>
+            <a:r>
+              <a:rPr sz="720" b="1">
+                <a:solidFill>
+                  <a:srgbClr val="B5333B"/>
+                </a:solidFill>
+                <a:latin typeface="微软雅黑"/>
+                <a:ea typeface="微软雅黑"/>
+                <a:cs typeface="微软雅黑"/>
+              </a:rPr>
+              <a:t>3</a:t>
+            </a:r>
+          </a:p>
+        </p:txBody>
+      </p:sp>
+      <p:sp>
+        <p:nvSpPr>
+          <p:cNvPr id="172" name="TextBox 171"/>
+          <p:cNvSpPr txBox="1"/>
+          <p:nvPr/>
+        </p:nvSpPr>
+        <p:spPr>
+          <a:xfrm>
+            <a:off x="6534912" y="5390388"/>
+            <a:ext cx="4084320" cy="68580"/>
+          </a:xfrm>
+          <a:prstGeom prst="rect">
+            <a:avLst/>
+          </a:prstGeom>
+          <a:noFill/>
+        </p:spPr>
+        <p:txBody>
+          <a:bodyPr wrap="square" lIns="0" rIns="0" tIns="0" bIns="0" anchor="t">
+            <a:spAutoFit/>
+          </a:bodyPr>
+          <a:lstStyle/>
+          <a:p>
+            <a:pPr algn="l">
+              <a:lnSpc>
+                <a:spcPct val="100000"/>
+              </a:lnSpc>
+            </a:pPr>
+            <a:r>
+              <a:rPr sz="720" b="1">
+                <a:solidFill>
+                  <a:srgbClr val="1A1A1C"/>
+                </a:solidFill>
+                <a:latin typeface="微软雅黑"/>
+                <a:ea typeface="微软雅黑"/>
+                <a:cs typeface="微软雅黑"/>
+              </a:rPr>
+              <a:t>baobiao-API（招标中标数据查询API，标讯日更新30万+）</a:t>
+            </a:r>
+          </a:p>
+        </p:txBody>
+      </p:sp>
+      <p:sp>
+        <p:nvSpPr>
+          <p:cNvPr id="173" name="TextBox 172"/>
+          <p:cNvSpPr txBox="1"/>
+          <p:nvPr/>
+        </p:nvSpPr>
+        <p:spPr>
+          <a:xfrm>
+            <a:off x="10668000" y="5390388"/>
+            <a:ext cx="914400" cy="68580"/>
+          </a:xfrm>
+          <a:prstGeom prst="rect">
+            <a:avLst/>
+          </a:prstGeom>
+          <a:noFill/>
+        </p:spPr>
+        <p:txBody>
+          <a:bodyPr wrap="square" lIns="0" rIns="0" tIns="0" bIns="0" anchor="t">
+            <a:spAutoFit/>
+          </a:bodyPr>
+          <a:lstStyle/>
+          <a:p>
+            <a:pPr algn="r">
+              <a:lnSpc>
+                <a:spcPct val="100000"/>
+              </a:lnSpc>
+            </a:pPr>
+            <a:r>
+              <a:rPr sz="700" b="0">
+                <a:solidFill>
+                  <a:srgbClr val="5B616B"/>
+                </a:solidFill>
+                <a:latin typeface="微软雅黑"/>
+                <a:ea typeface="微软雅黑"/>
+                <a:cs typeface="微软雅黑"/>
+              </a:rPr>
+              <a:t>11,312</a:t>
+            </a:r>
+          </a:p>
+        </p:txBody>
+      </p:sp>
+      <p:sp>
+        <p:nvSpPr>
+          <p:cNvPr id="174" name="TextBox 173"/>
+          <p:cNvSpPr txBox="1"/>
+          <p:nvPr/>
+        </p:nvSpPr>
+        <p:spPr>
+          <a:xfrm>
+            <a:off x="6534912" y="5458968"/>
+            <a:ext cx="4876800" cy="61721"/>
+          </a:xfrm>
+          <a:prstGeom prst="rect">
+            <a:avLst/>
+          </a:prstGeom>
+          <a:noFill/>
+        </p:spPr>
+        <p:txBody>
+          <a:bodyPr wrap="square" lIns="0" rIns="0" tIns="0" bIns="0" anchor="t">
+            <a:spAutoFit/>
+          </a:bodyPr>
+          <a:lstStyle/>
+          <a:p>
+            <a:pPr algn="l">
+              <a:lnSpc>
+                <a:spcPct val="100000"/>
+              </a:lnSpc>
+            </a:pPr>
+            <a:r>
+              <a:rPr sz="630" b="0">
+                <a:solidFill>
+                  <a:srgbClr val="5B616B"/>
+                </a:solidFill>
+                <a:latin typeface="微软雅黑"/>
+                <a:ea typeface="微软雅黑"/>
+                <a:cs typeface="微软雅黑"/>
+              </a:rPr>
+              <a:t>tingting0980</a:t>
+            </a:r>
+          </a:p>
+        </p:txBody>
+      </p:sp>
+      <p:sp>
+        <p:nvSpPr>
+          <p:cNvPr id="175" name="TextBox 174"/>
+          <p:cNvSpPr txBox="1"/>
+          <p:nvPr/>
+        </p:nvSpPr>
+        <p:spPr>
+          <a:xfrm>
+            <a:off x="6364224" y="5527548"/>
+            <a:ext cx="170688" cy="68580"/>
+          </a:xfrm>
+          <a:prstGeom prst="rect">
+            <a:avLst/>
+          </a:prstGeom>
+          <a:noFill/>
+        </p:spPr>
+        <p:txBody>
+          <a:bodyPr wrap="square" lIns="0" rIns="0" tIns="0" bIns="0" anchor="t">
+            <a:spAutoFit/>
+          </a:bodyPr>
+          <a:lstStyle/>
+          <a:p>
+            <a:pPr algn="l">
+              <a:lnSpc>
+                <a:spcPct val="100000"/>
+              </a:lnSpc>
+            </a:pPr>
+            <a:r>
+              <a:rPr sz="720" b="1">
+                <a:solidFill>
+                  <a:srgbClr val="B5333B"/>
+                </a:solidFill>
+                <a:latin typeface="微软雅黑"/>
+                <a:ea typeface="微软雅黑"/>
+                <a:cs typeface="微软雅黑"/>
+              </a:rPr>
+              <a:t>4</a:t>
+            </a:r>
+          </a:p>
+        </p:txBody>
+      </p:sp>
+      <p:sp>
+        <p:nvSpPr>
+          <p:cNvPr id="176" name="TextBox 175"/>
+          <p:cNvSpPr txBox="1"/>
+          <p:nvPr/>
+        </p:nvSpPr>
+        <p:spPr>
+          <a:xfrm>
+            <a:off x="6534912" y="5527548"/>
+            <a:ext cx="4084320" cy="68580"/>
+          </a:xfrm>
+          <a:prstGeom prst="rect">
+            <a:avLst/>
+          </a:prstGeom>
+          <a:noFill/>
+        </p:spPr>
+        <p:txBody>
+          <a:bodyPr wrap="square" lIns="0" rIns="0" tIns="0" bIns="0" anchor="t">
+            <a:spAutoFit/>
+          </a:bodyPr>
+          <a:lstStyle/>
+          <a:p>
+            <a:pPr algn="l">
+              <a:lnSpc>
+                <a:spcPct val="100000"/>
+              </a:lnSpc>
+            </a:pPr>
+            <a:r>
+              <a:rPr sz="720" b="1">
+                <a:solidFill>
+                  <a:srgbClr val="1A1A1C"/>
+                </a:solidFill>
+                <a:latin typeface="微软雅黑"/>
+                <a:ea typeface="微软雅黑"/>
+                <a:cs typeface="微软雅黑"/>
+              </a:rPr>
+              <a:t>mattress-3000-budget-advisor（3000档床垫预算顾问）</a:t>
+            </a:r>
+          </a:p>
+        </p:txBody>
+      </p:sp>
+      <p:sp>
+        <p:nvSpPr>
+          <p:cNvPr id="177" name="TextBox 176"/>
+          <p:cNvSpPr txBox="1"/>
+          <p:nvPr/>
+        </p:nvSpPr>
+        <p:spPr>
+          <a:xfrm>
+            <a:off x="10668000" y="5527548"/>
+            <a:ext cx="914400" cy="68580"/>
+          </a:xfrm>
+          <a:prstGeom prst="rect">
+            <a:avLst/>
+          </a:prstGeom>
+          <a:noFill/>
+        </p:spPr>
+        <p:txBody>
+          <a:bodyPr wrap="square" lIns="0" rIns="0" tIns="0" bIns="0" anchor="t">
+            <a:spAutoFit/>
+          </a:bodyPr>
+          <a:lstStyle/>
+          <a:p>
+            <a:pPr algn="r">
+              <a:lnSpc>
+                <a:spcPct val="100000"/>
+              </a:lnSpc>
+            </a:pPr>
+            <a:r>
+              <a:rPr sz="700" b="0">
+                <a:solidFill>
+                  <a:srgbClr val="5B616B"/>
+                </a:solidFill>
+                <a:latin typeface="微软雅黑"/>
+                <a:ea typeface="微软雅黑"/>
+                <a:cs typeface="微软雅黑"/>
+              </a:rPr>
+              <a:t>11,273</a:t>
+            </a:r>
+          </a:p>
+        </p:txBody>
+      </p:sp>
+      <p:sp>
+        <p:nvSpPr>
+          <p:cNvPr id="178" name="TextBox 177"/>
+          <p:cNvSpPr txBox="1"/>
+          <p:nvPr/>
+        </p:nvSpPr>
+        <p:spPr>
+          <a:xfrm>
+            <a:off x="6534912" y="5596128"/>
+            <a:ext cx="4876800" cy="61721"/>
+          </a:xfrm>
+          <a:prstGeom prst="rect">
+            <a:avLst/>
+          </a:prstGeom>
+          <a:noFill/>
+        </p:spPr>
+        <p:txBody>
+          <a:bodyPr wrap="square" lIns="0" rIns="0" tIns="0" bIns="0" anchor="t">
+            <a:spAutoFit/>
+          </a:bodyPr>
+          <a:lstStyle/>
+          <a:p>
+            <a:pPr algn="l">
+              <a:lnSpc>
+                <a:spcPct val="100000"/>
+              </a:lnSpc>
+            </a:pPr>
+            <a:r>
+              <a:rPr sz="630" b="0">
+                <a:solidFill>
+                  <a:srgbClr val="5B616B"/>
+                </a:solidFill>
+                <a:latin typeface="微软雅黑"/>
+                <a:ea typeface="微软雅黑"/>
+                <a:cs typeface="微软雅黑"/>
+              </a:rPr>
+              <a:t>alv123</a:t>
+            </a:r>
+          </a:p>
+        </p:txBody>
+      </p:sp>
+      <p:sp>
+        <p:nvSpPr>
+          <p:cNvPr id="179" name="TextBox 178"/>
+          <p:cNvSpPr txBox="1"/>
+          <p:nvPr/>
+        </p:nvSpPr>
+        <p:spPr>
+          <a:xfrm>
+            <a:off x="6364224" y="5664708"/>
+            <a:ext cx="170688" cy="68580"/>
+          </a:xfrm>
+          <a:prstGeom prst="rect">
+            <a:avLst/>
+          </a:prstGeom>
+          <a:noFill/>
+        </p:spPr>
+        <p:txBody>
+          <a:bodyPr wrap="square" lIns="0" rIns="0" tIns="0" bIns="0" anchor="t">
+            <a:spAutoFit/>
+          </a:bodyPr>
+          <a:lstStyle/>
+          <a:p>
+            <a:pPr algn="l">
+              <a:lnSpc>
+                <a:spcPct val="100000"/>
+              </a:lnSpc>
+            </a:pPr>
+            <a:r>
+              <a:rPr sz="720" b="1">
+                <a:solidFill>
+                  <a:srgbClr val="B5333B"/>
+                </a:solidFill>
+                <a:latin typeface="微软雅黑"/>
+                <a:ea typeface="微软雅黑"/>
+                <a:cs typeface="微软雅黑"/>
+              </a:rPr>
+              <a:t>5</a:t>
+            </a:r>
+          </a:p>
+        </p:txBody>
+      </p:sp>
+      <p:sp>
+        <p:nvSpPr>
+          <p:cNvPr id="180" name="TextBox 179"/>
+          <p:cNvSpPr txBox="1"/>
+          <p:nvPr/>
+        </p:nvSpPr>
+        <p:spPr>
+          <a:xfrm>
+            <a:off x="6534912" y="5664708"/>
+            <a:ext cx="4084320" cy="68580"/>
+          </a:xfrm>
+          <a:prstGeom prst="rect">
+            <a:avLst/>
+          </a:prstGeom>
+          <a:noFill/>
+        </p:spPr>
+        <p:txBody>
+          <a:bodyPr wrap="square" lIns="0" rIns="0" tIns="0" bIns="0" anchor="t">
+            <a:spAutoFit/>
+          </a:bodyPr>
+          <a:lstStyle/>
+          <a:p>
+            <a:pPr algn="l">
+              <a:lnSpc>
+                <a:spcPct val="100000"/>
+              </a:lnSpc>
+            </a:pPr>
+            <a:r>
+              <a:rPr sz="720" b="1">
+                <a:solidFill>
+                  <a:srgbClr val="1A1A1C"/>
+                </a:solidFill>
+                <a:latin typeface="微软雅黑"/>
+                <a:ea typeface="微软雅黑"/>
+                <a:cs typeface="微软雅黑"/>
+              </a:rPr>
+              <a:t>baobiao-analyze-company-network（企业画像与上下游关系分析）</a:t>
+            </a:r>
+          </a:p>
+        </p:txBody>
+      </p:sp>
+      <p:sp>
+        <p:nvSpPr>
+          <p:cNvPr id="181" name="TextBox 180"/>
+          <p:cNvSpPr txBox="1"/>
+          <p:nvPr/>
+        </p:nvSpPr>
+        <p:spPr>
+          <a:xfrm>
+            <a:off x="10668000" y="5664708"/>
+            <a:ext cx="914400" cy="68580"/>
+          </a:xfrm>
+          <a:prstGeom prst="rect">
+            <a:avLst/>
+          </a:prstGeom>
+          <a:noFill/>
+        </p:spPr>
+        <p:txBody>
+          <a:bodyPr wrap="square" lIns="0" rIns="0" tIns="0" bIns="0" anchor="t">
+            <a:spAutoFit/>
+          </a:bodyPr>
+          <a:lstStyle/>
+          <a:p>
+            <a:pPr algn="r">
+              <a:lnSpc>
+                <a:spcPct val="100000"/>
+              </a:lnSpc>
+            </a:pPr>
+            <a:r>
+              <a:rPr sz="700" b="0">
+                <a:solidFill>
+                  <a:srgbClr val="5B616B"/>
+                </a:solidFill>
+                <a:latin typeface="微软雅黑"/>
+                <a:ea typeface="微软雅黑"/>
+                <a:cs typeface="微软雅黑"/>
+              </a:rPr>
+              <a:t>10,207</a:t>
+            </a:r>
+          </a:p>
+        </p:txBody>
+      </p:sp>
+      <p:sp>
+        <p:nvSpPr>
+          <p:cNvPr id="182" name="TextBox 181"/>
+          <p:cNvSpPr txBox="1"/>
+          <p:nvPr/>
+        </p:nvSpPr>
+        <p:spPr>
+          <a:xfrm>
+            <a:off x="6534912" y="5733288"/>
+            <a:ext cx="4876800" cy="61721"/>
+          </a:xfrm>
+          <a:prstGeom prst="rect">
+            <a:avLst/>
+          </a:prstGeom>
+          <a:noFill/>
+        </p:spPr>
+        <p:txBody>
+          <a:bodyPr wrap="square" lIns="0" rIns="0" tIns="0" bIns="0" anchor="t">
+            <a:spAutoFit/>
+          </a:bodyPr>
+          <a:lstStyle/>
+          <a:p>
+            <a:pPr algn="l">
+              <a:lnSpc>
+                <a:spcPct val="100000"/>
+              </a:lnSpc>
+            </a:pPr>
+            <a:r>
+              <a:rPr sz="630" b="0">
+                <a:solidFill>
+                  <a:srgbClr val="5B616B"/>
+                </a:solidFill>
+                <a:latin typeface="微软雅黑"/>
+                <a:ea typeface="微软雅黑"/>
+                <a:cs typeface="微软雅黑"/>
+              </a:rPr>
+              <a:t>tingting0980</a:t>
+            </a:r>
+          </a:p>
+        </p:txBody>
+      </p:sp>
+      <p:sp>
+        <p:nvSpPr>
+          <p:cNvPr id="183" name="TextBox 182"/>
+          <p:cNvSpPr txBox="1"/>
+          <p:nvPr/>
+        </p:nvSpPr>
+        <p:spPr>
+          <a:xfrm>
+            <a:off x="6364224" y="5801868"/>
+            <a:ext cx="170688" cy="68580"/>
+          </a:xfrm>
+          <a:prstGeom prst="rect">
+            <a:avLst/>
+          </a:prstGeom>
+          <a:noFill/>
+        </p:spPr>
+        <p:txBody>
+          <a:bodyPr wrap="square" lIns="0" rIns="0" tIns="0" bIns="0" anchor="t">
+            <a:spAutoFit/>
+          </a:bodyPr>
+          <a:lstStyle/>
+          <a:p>
+            <a:pPr algn="l">
+              <a:lnSpc>
+                <a:spcPct val="100000"/>
+              </a:lnSpc>
+            </a:pPr>
+            <a:r>
+              <a:rPr sz="720" b="1">
+                <a:solidFill>
+                  <a:srgbClr val="B5333B"/>
+                </a:solidFill>
+                <a:latin typeface="微软雅黑"/>
+                <a:ea typeface="微软雅黑"/>
+                <a:cs typeface="微软雅黑"/>
+              </a:rPr>
+              <a:t>6</a:t>
+            </a:r>
+          </a:p>
+        </p:txBody>
+      </p:sp>
+      <p:sp>
+        <p:nvSpPr>
+          <p:cNvPr id="184" name="TextBox 183"/>
+          <p:cNvSpPr txBox="1"/>
+          <p:nvPr/>
+        </p:nvSpPr>
+        <p:spPr>
+          <a:xfrm>
+            <a:off x="6534912" y="5801868"/>
+            <a:ext cx="4084320" cy="68580"/>
+          </a:xfrm>
+          <a:prstGeom prst="rect">
+            <a:avLst/>
+          </a:prstGeom>
+          <a:noFill/>
+        </p:spPr>
+        <p:txBody>
+          <a:bodyPr wrap="square" lIns="0" rIns="0" tIns="0" bIns="0" anchor="t">
+            <a:spAutoFit/>
+          </a:bodyPr>
+          <a:lstStyle/>
+          <a:p>
+            <a:pPr algn="l">
+              <a:lnSpc>
+                <a:spcPct val="100000"/>
+              </a:lnSpc>
+            </a:pPr>
+            <a:r>
+              <a:rPr sz="720" b="1">
+                <a:solidFill>
+                  <a:srgbClr val="1A1A1C"/>
+                </a:solidFill>
+                <a:latin typeface="微软雅黑"/>
+                <a:ea typeface="微软雅黑"/>
+                <a:cs typeface="微软雅黑"/>
+              </a:rPr>
+              <a:t>baobiao-find-planned-projects（拟在建项目与招投标前置商机挖掘）</a:t>
+            </a:r>
+          </a:p>
+        </p:txBody>
+      </p:sp>
+      <p:sp>
+        <p:nvSpPr>
+          <p:cNvPr id="185" name="TextBox 184"/>
+          <p:cNvSpPr txBox="1"/>
+          <p:nvPr/>
+        </p:nvSpPr>
+        <p:spPr>
+          <a:xfrm>
+            <a:off x="10668000" y="5801868"/>
+            <a:ext cx="914400" cy="68580"/>
+          </a:xfrm>
+          <a:prstGeom prst="rect">
+            <a:avLst/>
+          </a:prstGeom>
+          <a:noFill/>
+        </p:spPr>
+        <p:txBody>
+          <a:bodyPr wrap="square" lIns="0" rIns="0" tIns="0" bIns="0" anchor="t">
+            <a:spAutoFit/>
+          </a:bodyPr>
+          <a:lstStyle/>
+          <a:p>
+            <a:pPr algn="r">
+              <a:lnSpc>
+                <a:spcPct val="100000"/>
+              </a:lnSpc>
+            </a:pPr>
+            <a:r>
+              <a:rPr sz="700" b="0">
+                <a:solidFill>
+                  <a:srgbClr val="5B616B"/>
+                </a:solidFill>
+                <a:latin typeface="微软雅黑"/>
+                <a:ea typeface="微软雅黑"/>
+                <a:cs typeface="微软雅黑"/>
+              </a:rPr>
+              <a:t>10,200</a:t>
+            </a:r>
+          </a:p>
+        </p:txBody>
+      </p:sp>
+      <p:sp>
+        <p:nvSpPr>
+          <p:cNvPr id="186" name="TextBox 185"/>
+          <p:cNvSpPr txBox="1"/>
+          <p:nvPr/>
+        </p:nvSpPr>
+        <p:spPr>
+          <a:xfrm>
+            <a:off x="6534912" y="5870448"/>
+            <a:ext cx="4876800" cy="61721"/>
+          </a:xfrm>
+          <a:prstGeom prst="rect">
+            <a:avLst/>
+          </a:prstGeom>
+          <a:noFill/>
+        </p:spPr>
+        <p:txBody>
+          <a:bodyPr wrap="square" lIns="0" rIns="0" tIns="0" bIns="0" anchor="t">
+            <a:spAutoFit/>
+          </a:bodyPr>
+          <a:lstStyle/>
+          <a:p>
+            <a:pPr algn="l">
+              <a:lnSpc>
+                <a:spcPct val="100000"/>
+              </a:lnSpc>
+            </a:pPr>
+            <a:r>
+              <a:rPr sz="630" b="0">
+                <a:solidFill>
+                  <a:srgbClr val="5B616B"/>
+                </a:solidFill>
+                <a:latin typeface="微软雅黑"/>
+                <a:ea typeface="微软雅黑"/>
+                <a:cs typeface="微软雅黑"/>
+              </a:rPr>
+              <a:t>tingting0980</a:t>
+            </a:r>
+          </a:p>
+        </p:txBody>
+      </p:sp>
+      <p:sp>
+        <p:nvSpPr>
+          <p:cNvPr id="187" name="TextBox 186"/>
+          <p:cNvSpPr txBox="1"/>
+          <p:nvPr/>
+        </p:nvSpPr>
+        <p:spPr>
+          <a:xfrm>
+            <a:off x="426720" y="6021324"/>
             <a:ext cx="11338560" cy="192024"/>
           </a:xfrm>
           <a:prstGeom prst="rect">

--- a/skill-final-v1.pptx
+++ b/skill-final-v1.pptx
@@ -35370,7 +35370,7 @@
         </p:nvSpPr>
         <p:spPr>
           <a:xfrm>
-            <a:off x="426720" y="3826764"/>
+            <a:off x="426720" y="3785616"/>
             <a:ext cx="11338560" cy="89154"/>
           </a:xfrm>
           <a:prstGeom prst="rect">
@@ -35390,7 +35390,7 @@
               </a:lnSpc>
             </a:pPr>
             <a:r>
-              <a:rPr sz="720" b="0">
+              <a:rPr sz="740" b="0">
                 <a:solidFill>
                   <a:srgbClr val="8B8E94"/>
                 </a:solidFill>
@@ -35398,34 +35398,71 @@
                 <a:ea typeface="微软雅黑"/>
                 <a:cs typeface="微软雅黑"/>
               </a:rPr>
-              <a:t>原始英文名（中文名） · 所有者 · 下载量；按 DownloadCount 降序</a:t>
-            </a:r>
-          </a:p>
-        </p:txBody>
-      </p:sp>
-      <p:sp>
-        <p:nvSpPr>
-          <p:cNvPr id="79" name="Rounded Rectangle 78"/>
+              <a:t>显示名 · 所有者 · 下载量；按 DownloadCount 降序</a:t>
+            </a:r>
+          </a:p>
+        </p:txBody>
+      </p:sp>
+      <p:sp>
+        <p:nvSpPr>
+          <p:cNvPr id="79" name="TextBox 78"/>
+          <p:cNvSpPr txBox="1"/>
+          <p:nvPr/>
+        </p:nvSpPr>
+        <p:spPr>
+          <a:xfrm>
+            <a:off x="426720" y="3909059"/>
+            <a:ext cx="2682240" cy="96012"/>
+          </a:xfrm>
+          <a:prstGeom prst="rect">
+            <a:avLst/>
+          </a:prstGeom>
+          <a:noFill/>
+        </p:spPr>
+        <p:txBody>
+          <a:bodyPr wrap="square" lIns="0" rIns="0" tIns="0" bIns="0" anchor="t">
+            <a:spAutoFit/>
+          </a:bodyPr>
+          <a:lstStyle/>
+          <a:p>
+            <a:pPr algn="l">
+              <a:lnSpc>
+                <a:spcPct val="100000"/>
+              </a:lnSpc>
+            </a:pPr>
+            <a:r>
+              <a:rPr sz="860" b="1">
+                <a:solidFill>
+                  <a:srgbClr val="B5333B"/>
+                </a:solidFill>
+                <a:latin typeface="微软雅黑"/>
+                <a:ea typeface="微软雅黑"/>
+                <a:cs typeface="微软雅黑"/>
+              </a:rPr>
+              <a:t>GitHub Top6</a:t>
+            </a:r>
+          </a:p>
+        </p:txBody>
+      </p:sp>
+      <p:sp>
+        <p:nvSpPr>
+          <p:cNvPr id="80" name="Rectangle 79"/>
           <p:cNvSpPr/>
           <p:nvPr/>
         </p:nvSpPr>
         <p:spPr>
           <a:xfrm>
-            <a:off x="426720" y="3909059"/>
-            <a:ext cx="5547360" cy="1014984"/>
-          </a:xfrm>
-          <a:prstGeom prst="roundRect">
-            <a:avLst>
-              <a:gd name="adj" fmla="val 2000"/>
-            </a:avLst>
+            <a:off x="426720" y="4005071"/>
+            <a:ext cx="2682240" cy="5486"/>
+          </a:xfrm>
+          <a:prstGeom prst="rect">
+            <a:avLst/>
           </a:prstGeom>
           <a:solidFill>
-            <a:srgbClr val="FFFFFF"/>
+            <a:srgbClr val="E2E4E7"/>
           </a:solidFill>
-          <a:ln w="9525">
-            <a:solidFill>
-              <a:srgbClr val="E2E4E7"/>
-            </a:solidFill>
+          <a:ln>
+            <a:noFill/>
           </a:ln>
           <a:effectLst/>
         </p:spPr>
@@ -35453,14 +35490,14 @@
       </p:sp>
       <p:sp>
         <p:nvSpPr>
-          <p:cNvPr id="80" name="TextBox 79"/>
-          <p:cNvSpPr txBox="1"/>
-          <p:nvPr/>
-        </p:nvSpPr>
-        <p:spPr>
-          <a:xfrm>
-            <a:off x="573024" y="3957065"/>
-            <a:ext cx="3657600" cy="96012"/>
+          <p:cNvPr id="81" name="TextBox 80"/>
+          <p:cNvSpPr txBox="1"/>
+          <p:nvPr/>
+        </p:nvSpPr>
+        <p:spPr>
+          <a:xfrm>
+            <a:off x="426720" y="4025646"/>
+            <a:ext cx="170688" cy="75438"/>
           </a:xfrm>
           <a:prstGeom prst="rect">
             <a:avLst/>
@@ -35479,29 +35516,1013 @@
               </a:lnSpc>
             </a:pPr>
             <a:r>
+              <a:rPr sz="760" b="1">
+                <a:solidFill>
+                  <a:srgbClr val="B5333B"/>
+                </a:solidFill>
+                <a:latin typeface="微软雅黑"/>
+                <a:ea typeface="微软雅黑"/>
+                <a:cs typeface="微软雅黑"/>
+              </a:rPr>
+              <a:t>1</a:t>
+            </a:r>
+          </a:p>
+        </p:txBody>
+      </p:sp>
+      <p:sp>
+        <p:nvSpPr>
+          <p:cNvPr id="82" name="TextBox 81"/>
+          <p:cNvSpPr txBox="1"/>
+          <p:nvPr/>
+        </p:nvSpPr>
+        <p:spPr>
+          <a:xfrm>
+            <a:off x="609600" y="4025646"/>
+            <a:ext cx="2121408" cy="75438"/>
+          </a:xfrm>
+          <a:prstGeom prst="rect">
+            <a:avLst/>
+          </a:prstGeom>
+          <a:noFill/>
+        </p:spPr>
+        <p:txBody>
+          <a:bodyPr wrap="square" lIns="0" rIns="0" tIns="0" bIns="0" anchor="t">
+            <a:spAutoFit/>
+          </a:bodyPr>
+          <a:lstStyle/>
+          <a:p>
+            <a:pPr algn="l">
+              <a:lnSpc>
+                <a:spcPct val="100000"/>
+              </a:lnSpc>
+            </a:pPr>
+            <a:r>
+              <a:rPr sz="780" b="1">
+                <a:solidFill>
+                  <a:srgbClr val="1A1A1C"/>
+                </a:solidFill>
+                <a:latin typeface="微软雅黑"/>
+                <a:ea typeface="微软雅黑"/>
+                <a:cs typeface="微软雅黑"/>
+              </a:rPr>
+              <a:t>dev-expert</a:t>
+            </a:r>
+          </a:p>
+        </p:txBody>
+      </p:sp>
+      <p:sp>
+        <p:nvSpPr>
+          <p:cNvPr id="83" name="TextBox 82"/>
+          <p:cNvSpPr txBox="1"/>
+          <p:nvPr/>
+        </p:nvSpPr>
+        <p:spPr>
+          <a:xfrm>
+            <a:off x="2718816" y="4025646"/>
+            <a:ext cx="402336" cy="75438"/>
+          </a:xfrm>
+          <a:prstGeom prst="rect">
+            <a:avLst/>
+          </a:prstGeom>
+          <a:noFill/>
+        </p:spPr>
+        <p:txBody>
+          <a:bodyPr wrap="square" lIns="0" rIns="0" tIns="0" bIns="0" anchor="t">
+            <a:spAutoFit/>
+          </a:bodyPr>
+          <a:lstStyle/>
+          <a:p>
+            <a:pPr algn="r">
+              <a:lnSpc>
+                <a:spcPct val="100000"/>
+              </a:lnSpc>
+            </a:pPr>
+            <a:r>
+              <a:rPr sz="760" b="0">
+                <a:solidFill>
+                  <a:srgbClr val="5B616B"/>
+                </a:solidFill>
+                <a:latin typeface="微软雅黑"/>
+                <a:ea typeface="微软雅黑"/>
+                <a:cs typeface="微软雅黑"/>
+              </a:rPr>
+              <a:t>1,156,332</a:t>
+            </a:r>
+          </a:p>
+        </p:txBody>
+      </p:sp>
+      <p:sp>
+        <p:nvSpPr>
+          <p:cNvPr id="84" name="TextBox 83"/>
+          <p:cNvSpPr txBox="1"/>
+          <p:nvPr/>
+        </p:nvSpPr>
+        <p:spPr>
+          <a:xfrm>
+            <a:off x="609600" y="4114800"/>
+            <a:ext cx="2499360" cy="68580"/>
+          </a:xfrm>
+          <a:prstGeom prst="rect">
+            <a:avLst/>
+          </a:prstGeom>
+          <a:noFill/>
+        </p:spPr>
+        <p:txBody>
+          <a:bodyPr wrap="square" lIns="0" rIns="0" tIns="0" bIns="0" anchor="t">
+            <a:spAutoFit/>
+          </a:bodyPr>
+          <a:lstStyle/>
+          <a:p>
+            <a:pPr algn="l">
+              <a:lnSpc>
+                <a:spcPct val="100000"/>
+              </a:lnSpc>
+            </a:pPr>
+            <a:r>
+              <a:rPr sz="700" b="0">
+                <a:solidFill>
+                  <a:srgbClr val="5B616B"/>
+                </a:solidFill>
+                <a:latin typeface="微软雅黑"/>
+                <a:ea typeface="微软雅黑"/>
+                <a:cs typeface="微软雅黑"/>
+              </a:rPr>
+              <a:t>ebandao</a:t>
+            </a:r>
+          </a:p>
+        </p:txBody>
+      </p:sp>
+      <p:sp>
+        <p:nvSpPr>
+          <p:cNvPr id="85" name="TextBox 84"/>
+          <p:cNvSpPr txBox="1"/>
+          <p:nvPr/>
+        </p:nvSpPr>
+        <p:spPr>
+          <a:xfrm>
+            <a:off x="426720" y="4279392"/>
+            <a:ext cx="170688" cy="75438"/>
+          </a:xfrm>
+          <a:prstGeom prst="rect">
+            <a:avLst/>
+          </a:prstGeom>
+          <a:noFill/>
+        </p:spPr>
+        <p:txBody>
+          <a:bodyPr wrap="square" lIns="0" rIns="0" tIns="0" bIns="0" anchor="t">
+            <a:spAutoFit/>
+          </a:bodyPr>
+          <a:lstStyle/>
+          <a:p>
+            <a:pPr algn="l">
+              <a:lnSpc>
+                <a:spcPct val="100000"/>
+              </a:lnSpc>
+            </a:pPr>
+            <a:r>
+              <a:rPr sz="760" b="1">
+                <a:solidFill>
+                  <a:srgbClr val="B5333B"/>
+                </a:solidFill>
+                <a:latin typeface="微软雅黑"/>
+                <a:ea typeface="微软雅黑"/>
+                <a:cs typeface="微软雅黑"/>
+              </a:rPr>
+              <a:t>2</a:t>
+            </a:r>
+          </a:p>
+        </p:txBody>
+      </p:sp>
+      <p:sp>
+        <p:nvSpPr>
+          <p:cNvPr id="86" name="TextBox 85"/>
+          <p:cNvSpPr txBox="1"/>
+          <p:nvPr/>
+        </p:nvSpPr>
+        <p:spPr>
+          <a:xfrm>
+            <a:off x="609600" y="4279392"/>
+            <a:ext cx="2121408" cy="75438"/>
+          </a:xfrm>
+          <a:prstGeom prst="rect">
+            <a:avLst/>
+          </a:prstGeom>
+          <a:noFill/>
+        </p:spPr>
+        <p:txBody>
+          <a:bodyPr wrap="square" lIns="0" rIns="0" tIns="0" bIns="0" anchor="t">
+            <a:spAutoFit/>
+          </a:bodyPr>
+          <a:lstStyle/>
+          <a:p>
+            <a:pPr algn="l">
+              <a:lnSpc>
+                <a:spcPct val="100000"/>
+              </a:lnSpc>
+            </a:pPr>
+            <a:r>
+              <a:rPr sz="780" b="1">
+                <a:solidFill>
+                  <a:srgbClr val="1A1A1C"/>
+                </a:solidFill>
+                <a:latin typeface="微软雅黑"/>
+                <a:ea typeface="微软雅黑"/>
+                <a:cs typeface="微软雅黑"/>
+              </a:rPr>
+              <a:t>skill-creator</a:t>
+            </a:r>
+          </a:p>
+        </p:txBody>
+      </p:sp>
+      <p:sp>
+        <p:nvSpPr>
+          <p:cNvPr id="87" name="TextBox 86"/>
+          <p:cNvSpPr txBox="1"/>
+          <p:nvPr/>
+        </p:nvSpPr>
+        <p:spPr>
+          <a:xfrm>
+            <a:off x="2718816" y="4279392"/>
+            <a:ext cx="402336" cy="75438"/>
+          </a:xfrm>
+          <a:prstGeom prst="rect">
+            <a:avLst/>
+          </a:prstGeom>
+          <a:noFill/>
+        </p:spPr>
+        <p:txBody>
+          <a:bodyPr wrap="square" lIns="0" rIns="0" tIns="0" bIns="0" anchor="t">
+            <a:spAutoFit/>
+          </a:bodyPr>
+          <a:lstStyle/>
+          <a:p>
+            <a:pPr algn="r">
+              <a:lnSpc>
+                <a:spcPct val="100000"/>
+              </a:lnSpc>
+            </a:pPr>
+            <a:r>
+              <a:rPr sz="760" b="0">
+                <a:solidFill>
+                  <a:srgbClr val="5B616B"/>
+                </a:solidFill>
+                <a:latin typeface="微软雅黑"/>
+                <a:ea typeface="微软雅黑"/>
+                <a:cs typeface="微软雅黑"/>
+              </a:rPr>
+              <a:t>20,876</a:t>
+            </a:r>
+          </a:p>
+        </p:txBody>
+      </p:sp>
+      <p:sp>
+        <p:nvSpPr>
+          <p:cNvPr id="88" name="TextBox 87"/>
+          <p:cNvSpPr txBox="1"/>
+          <p:nvPr/>
+        </p:nvSpPr>
+        <p:spPr>
+          <a:xfrm>
+            <a:off x="609600" y="4368546"/>
+            <a:ext cx="2499360" cy="68580"/>
+          </a:xfrm>
+          <a:prstGeom prst="rect">
+            <a:avLst/>
+          </a:prstGeom>
+          <a:noFill/>
+        </p:spPr>
+        <p:txBody>
+          <a:bodyPr wrap="square" lIns="0" rIns="0" tIns="0" bIns="0" anchor="t">
+            <a:spAutoFit/>
+          </a:bodyPr>
+          <a:lstStyle/>
+          <a:p>
+            <a:pPr algn="l">
+              <a:lnSpc>
+                <a:spcPct val="100000"/>
+              </a:lnSpc>
+            </a:pPr>
+            <a:r>
+              <a:rPr sz="700" b="0">
+                <a:solidFill>
+                  <a:srgbClr val="5B616B"/>
+                </a:solidFill>
+                <a:latin typeface="微软雅黑"/>
+                <a:ea typeface="微软雅黑"/>
+                <a:cs typeface="微软雅黑"/>
+              </a:rPr>
+              <a:t>@anthropics</a:t>
+            </a:r>
+          </a:p>
+        </p:txBody>
+      </p:sp>
+      <p:sp>
+        <p:nvSpPr>
+          <p:cNvPr id="89" name="TextBox 88"/>
+          <p:cNvSpPr txBox="1"/>
+          <p:nvPr/>
+        </p:nvSpPr>
+        <p:spPr>
+          <a:xfrm>
+            <a:off x="426720" y="4533137"/>
+            <a:ext cx="170688" cy="75438"/>
+          </a:xfrm>
+          <a:prstGeom prst="rect">
+            <a:avLst/>
+          </a:prstGeom>
+          <a:noFill/>
+        </p:spPr>
+        <p:txBody>
+          <a:bodyPr wrap="square" lIns="0" rIns="0" tIns="0" bIns="0" anchor="t">
+            <a:spAutoFit/>
+          </a:bodyPr>
+          <a:lstStyle/>
+          <a:p>
+            <a:pPr algn="l">
+              <a:lnSpc>
+                <a:spcPct val="100000"/>
+              </a:lnSpc>
+            </a:pPr>
+            <a:r>
+              <a:rPr sz="760" b="1">
+                <a:solidFill>
+                  <a:srgbClr val="B5333B"/>
+                </a:solidFill>
+                <a:latin typeface="微软雅黑"/>
+                <a:ea typeface="微软雅黑"/>
+                <a:cs typeface="微软雅黑"/>
+              </a:rPr>
+              <a:t>3</a:t>
+            </a:r>
+          </a:p>
+        </p:txBody>
+      </p:sp>
+      <p:sp>
+        <p:nvSpPr>
+          <p:cNvPr id="90" name="TextBox 89"/>
+          <p:cNvSpPr txBox="1"/>
+          <p:nvPr/>
+        </p:nvSpPr>
+        <p:spPr>
+          <a:xfrm>
+            <a:off x="609600" y="4533137"/>
+            <a:ext cx="2121408" cy="75438"/>
+          </a:xfrm>
+          <a:prstGeom prst="rect">
+            <a:avLst/>
+          </a:prstGeom>
+          <a:noFill/>
+        </p:spPr>
+        <p:txBody>
+          <a:bodyPr wrap="square" lIns="0" rIns="0" tIns="0" bIns="0" anchor="t">
+            <a:spAutoFit/>
+          </a:bodyPr>
+          <a:lstStyle/>
+          <a:p>
+            <a:pPr algn="l">
+              <a:lnSpc>
+                <a:spcPct val="100000"/>
+              </a:lnSpc>
+            </a:pPr>
+            <a:r>
+              <a:rPr sz="780" b="1">
+                <a:solidFill>
+                  <a:srgbClr val="1A1A1C"/>
+                </a:solidFill>
+                <a:latin typeface="微软雅黑"/>
+                <a:ea typeface="微软雅黑"/>
+                <a:cs typeface="微软雅黑"/>
+              </a:rPr>
+              <a:t>床垫选购顾问</a:t>
+            </a:r>
+          </a:p>
+        </p:txBody>
+      </p:sp>
+      <p:sp>
+        <p:nvSpPr>
+          <p:cNvPr id="91" name="TextBox 90"/>
+          <p:cNvSpPr txBox="1"/>
+          <p:nvPr/>
+        </p:nvSpPr>
+        <p:spPr>
+          <a:xfrm>
+            <a:off x="2718816" y="4533137"/>
+            <a:ext cx="402336" cy="75438"/>
+          </a:xfrm>
+          <a:prstGeom prst="rect">
+            <a:avLst/>
+          </a:prstGeom>
+          <a:noFill/>
+        </p:spPr>
+        <p:txBody>
+          <a:bodyPr wrap="square" lIns="0" rIns="0" tIns="0" bIns="0" anchor="t">
+            <a:spAutoFit/>
+          </a:bodyPr>
+          <a:lstStyle/>
+          <a:p>
+            <a:pPr algn="r">
+              <a:lnSpc>
+                <a:spcPct val="100000"/>
+              </a:lnSpc>
+            </a:pPr>
+            <a:r>
+              <a:rPr sz="760" b="0">
+                <a:solidFill>
+                  <a:srgbClr val="5B616B"/>
+                </a:solidFill>
+                <a:latin typeface="微软雅黑"/>
+                <a:ea typeface="微软雅黑"/>
+                <a:cs typeface="微软雅黑"/>
+              </a:rPr>
+              <a:t>19,487</a:t>
+            </a:r>
+          </a:p>
+        </p:txBody>
+      </p:sp>
+      <p:sp>
+        <p:nvSpPr>
+          <p:cNvPr id="92" name="TextBox 91"/>
+          <p:cNvSpPr txBox="1"/>
+          <p:nvPr/>
+        </p:nvSpPr>
+        <p:spPr>
+          <a:xfrm>
+            <a:off x="609600" y="4622292"/>
+            <a:ext cx="2499360" cy="68580"/>
+          </a:xfrm>
+          <a:prstGeom prst="rect">
+            <a:avLst/>
+          </a:prstGeom>
+          <a:noFill/>
+        </p:spPr>
+        <p:txBody>
+          <a:bodyPr wrap="square" lIns="0" rIns="0" tIns="0" bIns="0" anchor="t">
+            <a:spAutoFit/>
+          </a:bodyPr>
+          <a:lstStyle/>
+          <a:p>
+            <a:pPr algn="l">
+              <a:lnSpc>
+                <a:spcPct val="100000"/>
+              </a:lnSpc>
+            </a:pPr>
+            <a:r>
+              <a:rPr sz="700" b="0">
+                <a:solidFill>
+                  <a:srgbClr val="5B616B"/>
+                </a:solidFill>
+                <a:latin typeface="微软雅黑"/>
+                <a:ea typeface="微软雅黑"/>
+                <a:cs typeface="微软雅黑"/>
+              </a:rPr>
+              <a:t>alv123</a:t>
+            </a:r>
+          </a:p>
+        </p:txBody>
+      </p:sp>
+      <p:sp>
+        <p:nvSpPr>
+          <p:cNvPr id="93" name="TextBox 92"/>
+          <p:cNvSpPr txBox="1"/>
+          <p:nvPr/>
+        </p:nvSpPr>
+        <p:spPr>
+          <a:xfrm>
+            <a:off x="426720" y="4786884"/>
+            <a:ext cx="170688" cy="75438"/>
+          </a:xfrm>
+          <a:prstGeom prst="rect">
+            <a:avLst/>
+          </a:prstGeom>
+          <a:noFill/>
+        </p:spPr>
+        <p:txBody>
+          <a:bodyPr wrap="square" lIns="0" rIns="0" tIns="0" bIns="0" anchor="t">
+            <a:spAutoFit/>
+          </a:bodyPr>
+          <a:lstStyle/>
+          <a:p>
+            <a:pPr algn="l">
+              <a:lnSpc>
+                <a:spcPct val="100000"/>
+              </a:lnSpc>
+            </a:pPr>
+            <a:r>
+              <a:rPr sz="760" b="1">
+                <a:solidFill>
+                  <a:srgbClr val="B5333B"/>
+                </a:solidFill>
+                <a:latin typeface="微软雅黑"/>
+                <a:ea typeface="微软雅黑"/>
+                <a:cs typeface="微软雅黑"/>
+              </a:rPr>
+              <a:t>4</a:t>
+            </a:r>
+          </a:p>
+        </p:txBody>
+      </p:sp>
+      <p:sp>
+        <p:nvSpPr>
+          <p:cNvPr id="94" name="TextBox 93"/>
+          <p:cNvSpPr txBox="1"/>
+          <p:nvPr/>
+        </p:nvSpPr>
+        <p:spPr>
+          <a:xfrm>
+            <a:off x="609600" y="4786884"/>
+            <a:ext cx="2121408" cy="75438"/>
+          </a:xfrm>
+          <a:prstGeom prst="rect">
+            <a:avLst/>
+          </a:prstGeom>
+          <a:noFill/>
+        </p:spPr>
+        <p:txBody>
+          <a:bodyPr wrap="square" lIns="0" rIns="0" tIns="0" bIns="0" anchor="t">
+            <a:spAutoFit/>
+          </a:bodyPr>
+          <a:lstStyle/>
+          <a:p>
+            <a:pPr algn="l">
+              <a:lnSpc>
+                <a:spcPct val="100000"/>
+              </a:lnSpc>
+            </a:pPr>
+            <a:r>
+              <a:rPr sz="780" b="1">
+                <a:solidFill>
+                  <a:srgbClr val="1A1A1C"/>
+                </a:solidFill>
+                <a:latin typeface="微软雅黑"/>
+                <a:ea typeface="微软雅黑"/>
+                <a:cs typeface="微软雅黑"/>
+              </a:rPr>
+              <a:t>frontend-design</a:t>
+            </a:r>
+          </a:p>
+        </p:txBody>
+      </p:sp>
+      <p:sp>
+        <p:nvSpPr>
+          <p:cNvPr id="95" name="TextBox 94"/>
+          <p:cNvSpPr txBox="1"/>
+          <p:nvPr/>
+        </p:nvSpPr>
+        <p:spPr>
+          <a:xfrm>
+            <a:off x="2718816" y="4786884"/>
+            <a:ext cx="402336" cy="75438"/>
+          </a:xfrm>
+          <a:prstGeom prst="rect">
+            <a:avLst/>
+          </a:prstGeom>
+          <a:noFill/>
+        </p:spPr>
+        <p:txBody>
+          <a:bodyPr wrap="square" lIns="0" rIns="0" tIns="0" bIns="0" anchor="t">
+            <a:spAutoFit/>
+          </a:bodyPr>
+          <a:lstStyle/>
+          <a:p>
+            <a:pPr algn="r">
+              <a:lnSpc>
+                <a:spcPct val="100000"/>
+              </a:lnSpc>
+            </a:pPr>
+            <a:r>
+              <a:rPr sz="760" b="0">
+                <a:solidFill>
+                  <a:srgbClr val="5B616B"/>
+                </a:solidFill>
+                <a:latin typeface="微软雅黑"/>
+                <a:ea typeface="微软雅黑"/>
+                <a:cs typeface="微软雅黑"/>
+              </a:rPr>
+              <a:t>16,285</a:t>
+            </a:r>
+          </a:p>
+        </p:txBody>
+      </p:sp>
+      <p:sp>
+        <p:nvSpPr>
+          <p:cNvPr id="96" name="TextBox 95"/>
+          <p:cNvSpPr txBox="1"/>
+          <p:nvPr/>
+        </p:nvSpPr>
+        <p:spPr>
+          <a:xfrm>
+            <a:off x="609600" y="4876038"/>
+            <a:ext cx="2499360" cy="68580"/>
+          </a:xfrm>
+          <a:prstGeom prst="rect">
+            <a:avLst/>
+          </a:prstGeom>
+          <a:noFill/>
+        </p:spPr>
+        <p:txBody>
+          <a:bodyPr wrap="square" lIns="0" rIns="0" tIns="0" bIns="0" anchor="t">
+            <a:spAutoFit/>
+          </a:bodyPr>
+          <a:lstStyle/>
+          <a:p>
+            <a:pPr algn="l">
+              <a:lnSpc>
+                <a:spcPct val="100000"/>
+              </a:lnSpc>
+            </a:pPr>
+            <a:r>
+              <a:rPr sz="700" b="0">
+                <a:solidFill>
+                  <a:srgbClr val="5B616B"/>
+                </a:solidFill>
+                <a:latin typeface="微软雅黑"/>
+                <a:ea typeface="微软雅黑"/>
+                <a:cs typeface="微软雅黑"/>
+              </a:rPr>
+              <a:t>@anthropics</a:t>
+            </a:r>
+          </a:p>
+        </p:txBody>
+      </p:sp>
+      <p:sp>
+        <p:nvSpPr>
+          <p:cNvPr id="97" name="TextBox 96"/>
+          <p:cNvSpPr txBox="1"/>
+          <p:nvPr/>
+        </p:nvSpPr>
+        <p:spPr>
+          <a:xfrm>
+            <a:off x="426720" y="5040630"/>
+            <a:ext cx="170688" cy="75438"/>
+          </a:xfrm>
+          <a:prstGeom prst="rect">
+            <a:avLst/>
+          </a:prstGeom>
+          <a:noFill/>
+        </p:spPr>
+        <p:txBody>
+          <a:bodyPr wrap="square" lIns="0" rIns="0" tIns="0" bIns="0" anchor="t">
+            <a:spAutoFit/>
+          </a:bodyPr>
+          <a:lstStyle/>
+          <a:p>
+            <a:pPr algn="l">
+              <a:lnSpc>
+                <a:spcPct val="100000"/>
+              </a:lnSpc>
+            </a:pPr>
+            <a:r>
+              <a:rPr sz="760" b="1">
+                <a:solidFill>
+                  <a:srgbClr val="B5333B"/>
+                </a:solidFill>
+                <a:latin typeface="微软雅黑"/>
+                <a:ea typeface="微软雅黑"/>
+                <a:cs typeface="微软雅黑"/>
+              </a:rPr>
+              <a:t>5</a:t>
+            </a:r>
+          </a:p>
+        </p:txBody>
+      </p:sp>
+      <p:sp>
+        <p:nvSpPr>
+          <p:cNvPr id="98" name="TextBox 97"/>
+          <p:cNvSpPr txBox="1"/>
+          <p:nvPr/>
+        </p:nvSpPr>
+        <p:spPr>
+          <a:xfrm>
+            <a:off x="609600" y="5040630"/>
+            <a:ext cx="2121408" cy="75438"/>
+          </a:xfrm>
+          <a:prstGeom prst="rect">
+            <a:avLst/>
+          </a:prstGeom>
+          <a:noFill/>
+        </p:spPr>
+        <p:txBody>
+          <a:bodyPr wrap="square" lIns="0" rIns="0" tIns="0" bIns="0" anchor="t">
+            <a:spAutoFit/>
+          </a:bodyPr>
+          <a:lstStyle/>
+          <a:p>
+            <a:pPr algn="l">
+              <a:lnSpc>
+                <a:spcPct val="100000"/>
+              </a:lnSpc>
+            </a:pPr>
+            <a:r>
+              <a:rPr sz="780" b="1">
+                <a:solidFill>
+                  <a:srgbClr val="1A1A1C"/>
+                </a:solidFill>
+                <a:latin typeface="微软雅黑"/>
+                <a:ea typeface="微软雅黑"/>
+                <a:cs typeface="微软雅黑"/>
+              </a:rPr>
+              <a:t>OneSkills</a:t>
+            </a:r>
+          </a:p>
+        </p:txBody>
+      </p:sp>
+      <p:sp>
+        <p:nvSpPr>
+          <p:cNvPr id="99" name="TextBox 98"/>
+          <p:cNvSpPr txBox="1"/>
+          <p:nvPr/>
+        </p:nvSpPr>
+        <p:spPr>
+          <a:xfrm>
+            <a:off x="2718816" y="5040630"/>
+            <a:ext cx="402336" cy="75438"/>
+          </a:xfrm>
+          <a:prstGeom prst="rect">
+            <a:avLst/>
+          </a:prstGeom>
+          <a:noFill/>
+        </p:spPr>
+        <p:txBody>
+          <a:bodyPr wrap="square" lIns="0" rIns="0" tIns="0" bIns="0" anchor="t">
+            <a:spAutoFit/>
+          </a:bodyPr>
+          <a:lstStyle/>
+          <a:p>
+            <a:pPr algn="r">
+              <a:lnSpc>
+                <a:spcPct val="100000"/>
+              </a:lnSpc>
+            </a:pPr>
+            <a:r>
+              <a:rPr sz="760" b="0">
+                <a:solidFill>
+                  <a:srgbClr val="5B616B"/>
+                </a:solidFill>
+                <a:latin typeface="微软雅黑"/>
+                <a:ea typeface="微软雅黑"/>
+                <a:cs typeface="微软雅黑"/>
+              </a:rPr>
+              <a:t>12,861</a:t>
+            </a:r>
+          </a:p>
+        </p:txBody>
+      </p:sp>
+      <p:sp>
+        <p:nvSpPr>
+          <p:cNvPr id="100" name="TextBox 99"/>
+          <p:cNvSpPr txBox="1"/>
+          <p:nvPr/>
+        </p:nvSpPr>
+        <p:spPr>
+          <a:xfrm>
+            <a:off x="609600" y="5129784"/>
+            <a:ext cx="2499360" cy="68580"/>
+          </a:xfrm>
+          <a:prstGeom prst="rect">
+            <a:avLst/>
+          </a:prstGeom>
+          <a:noFill/>
+        </p:spPr>
+        <p:txBody>
+          <a:bodyPr wrap="square" lIns="0" rIns="0" tIns="0" bIns="0" anchor="t">
+            <a:spAutoFit/>
+          </a:bodyPr>
+          <a:lstStyle/>
+          <a:p>
+            <a:pPr algn="l">
+              <a:lnSpc>
+                <a:spcPct val="100000"/>
+              </a:lnSpc>
+            </a:pPr>
+            <a:r>
+              <a:rPr sz="700" b="0">
+                <a:solidFill>
+                  <a:srgbClr val="5B616B"/>
+                </a:solidFill>
+                <a:latin typeface="微软雅黑"/>
+                <a:ea typeface="微软雅黑"/>
+                <a:cs typeface="微软雅黑"/>
+              </a:rPr>
+              <a:t>OneScience</a:t>
+            </a:r>
+          </a:p>
+        </p:txBody>
+      </p:sp>
+      <p:sp>
+        <p:nvSpPr>
+          <p:cNvPr id="101" name="TextBox 100"/>
+          <p:cNvSpPr txBox="1"/>
+          <p:nvPr/>
+        </p:nvSpPr>
+        <p:spPr>
+          <a:xfrm>
+            <a:off x="426720" y="5294376"/>
+            <a:ext cx="170688" cy="75438"/>
+          </a:xfrm>
+          <a:prstGeom prst="rect">
+            <a:avLst/>
+          </a:prstGeom>
+          <a:noFill/>
+        </p:spPr>
+        <p:txBody>
+          <a:bodyPr wrap="square" lIns="0" rIns="0" tIns="0" bIns="0" anchor="t">
+            <a:spAutoFit/>
+          </a:bodyPr>
+          <a:lstStyle/>
+          <a:p>
+            <a:pPr algn="l">
+              <a:lnSpc>
+                <a:spcPct val="100000"/>
+              </a:lnSpc>
+            </a:pPr>
+            <a:r>
+              <a:rPr sz="760" b="1">
+                <a:solidFill>
+                  <a:srgbClr val="B5333B"/>
+                </a:solidFill>
+                <a:latin typeface="微软雅黑"/>
+                <a:ea typeface="微软雅黑"/>
+                <a:cs typeface="微软雅黑"/>
+              </a:rPr>
+              <a:t>6</a:t>
+            </a:r>
+          </a:p>
+        </p:txBody>
+      </p:sp>
+      <p:sp>
+        <p:nvSpPr>
+          <p:cNvPr id="102" name="TextBox 101"/>
+          <p:cNvSpPr txBox="1"/>
+          <p:nvPr/>
+        </p:nvSpPr>
+        <p:spPr>
+          <a:xfrm>
+            <a:off x="609600" y="5294376"/>
+            <a:ext cx="2121408" cy="75438"/>
+          </a:xfrm>
+          <a:prstGeom prst="rect">
+            <a:avLst/>
+          </a:prstGeom>
+          <a:noFill/>
+        </p:spPr>
+        <p:txBody>
+          <a:bodyPr wrap="square" lIns="0" rIns="0" tIns="0" bIns="0" anchor="t">
+            <a:spAutoFit/>
+          </a:bodyPr>
+          <a:lstStyle/>
+          <a:p>
+            <a:pPr algn="l">
+              <a:lnSpc>
+                <a:spcPct val="100000"/>
+              </a:lnSpc>
+            </a:pPr>
+            <a:r>
+              <a:rPr sz="780" b="1">
+                <a:solidFill>
+                  <a:srgbClr val="1A1A1C"/>
+                </a:solidFill>
+                <a:latin typeface="微软雅黑"/>
+                <a:ea typeface="微软雅黑"/>
+                <a:cs typeface="微软雅黑"/>
+              </a:rPr>
+              <a:t>docx</a:t>
+            </a:r>
+          </a:p>
+        </p:txBody>
+      </p:sp>
+      <p:sp>
+        <p:nvSpPr>
+          <p:cNvPr id="103" name="TextBox 102"/>
+          <p:cNvSpPr txBox="1"/>
+          <p:nvPr/>
+        </p:nvSpPr>
+        <p:spPr>
+          <a:xfrm>
+            <a:off x="2718816" y="5294376"/>
+            <a:ext cx="402336" cy="75438"/>
+          </a:xfrm>
+          <a:prstGeom prst="rect">
+            <a:avLst/>
+          </a:prstGeom>
+          <a:noFill/>
+        </p:spPr>
+        <p:txBody>
+          <a:bodyPr wrap="square" lIns="0" rIns="0" tIns="0" bIns="0" anchor="t">
+            <a:spAutoFit/>
+          </a:bodyPr>
+          <a:lstStyle/>
+          <a:p>
+            <a:pPr algn="r">
+              <a:lnSpc>
+                <a:spcPct val="100000"/>
+              </a:lnSpc>
+            </a:pPr>
+            <a:r>
+              <a:rPr sz="760" b="0">
+                <a:solidFill>
+                  <a:srgbClr val="5B616B"/>
+                </a:solidFill>
+                <a:latin typeface="微软雅黑"/>
+                <a:ea typeface="微软雅黑"/>
+                <a:cs typeface="微软雅黑"/>
+              </a:rPr>
+              <a:t>10,754</a:t>
+            </a:r>
+          </a:p>
+        </p:txBody>
+      </p:sp>
+      <p:sp>
+        <p:nvSpPr>
+          <p:cNvPr id="104" name="TextBox 103"/>
+          <p:cNvSpPr txBox="1"/>
+          <p:nvPr/>
+        </p:nvSpPr>
+        <p:spPr>
+          <a:xfrm>
+            <a:off x="609600" y="5383530"/>
+            <a:ext cx="2499360" cy="68580"/>
+          </a:xfrm>
+          <a:prstGeom prst="rect">
+            <a:avLst/>
+          </a:prstGeom>
+          <a:noFill/>
+        </p:spPr>
+        <p:txBody>
+          <a:bodyPr wrap="square" lIns="0" rIns="0" tIns="0" bIns="0" anchor="t">
+            <a:spAutoFit/>
+          </a:bodyPr>
+          <a:lstStyle/>
+          <a:p>
+            <a:pPr algn="l">
+              <a:lnSpc>
+                <a:spcPct val="100000"/>
+              </a:lnSpc>
+            </a:pPr>
+            <a:r>
+              <a:rPr sz="700" b="0">
+                <a:solidFill>
+                  <a:srgbClr val="5B616B"/>
+                </a:solidFill>
+                <a:latin typeface="微软雅黑"/>
+                <a:ea typeface="微软雅黑"/>
+                <a:cs typeface="微软雅黑"/>
+              </a:rPr>
+              <a:t>@anthropics</a:t>
+            </a:r>
+          </a:p>
+        </p:txBody>
+      </p:sp>
+      <p:sp>
+        <p:nvSpPr>
+          <p:cNvPr id="105" name="TextBox 104"/>
+          <p:cNvSpPr txBox="1"/>
+          <p:nvPr/>
+        </p:nvSpPr>
+        <p:spPr>
+          <a:xfrm>
+            <a:off x="3291840" y="3909059"/>
+            <a:ext cx="2682240" cy="96012"/>
+          </a:xfrm>
+          <a:prstGeom prst="rect">
+            <a:avLst/>
+          </a:prstGeom>
+          <a:noFill/>
+        </p:spPr>
+        <p:txBody>
+          <a:bodyPr wrap="square" lIns="0" rIns="0" tIns="0" bIns="0" anchor="t">
+            <a:spAutoFit/>
+          </a:bodyPr>
+          <a:lstStyle/>
+          <a:p>
+            <a:pPr algn="l">
+              <a:lnSpc>
+                <a:spcPct val="100000"/>
+              </a:lnSpc>
+            </a:pPr>
+            <a:r>
               <a:rPr sz="860" b="1">
                 <a:solidFill>
-                  <a:srgbClr val="B5333B"/>
-                </a:solidFill>
-                <a:latin typeface="微软雅黑"/>
-                <a:ea typeface="微软雅黑"/>
-                <a:cs typeface="微软雅黑"/>
-              </a:rPr>
-              <a:t>GitHub Top6</a:t>
-            </a:r>
-          </a:p>
-        </p:txBody>
-      </p:sp>
-      <p:sp>
-        <p:nvSpPr>
-          <p:cNvPr id="81" name="Rectangle 80"/>
+                  <a:srgbClr val="D98A8F"/>
+                </a:solidFill>
+                <a:latin typeface="微软雅黑"/>
+                <a:ea typeface="微软雅黑"/>
+                <a:cs typeface="微软雅黑"/>
+              </a:rPr>
+              <a:t>其他市场 Top6</a:t>
+            </a:r>
+          </a:p>
+        </p:txBody>
+      </p:sp>
+      <p:sp>
+        <p:nvSpPr>
+          <p:cNvPr id="106" name="Rectangle 105"/>
           <p:cNvSpPr/>
           <p:nvPr/>
         </p:nvSpPr>
         <p:spPr>
           <a:xfrm>
-            <a:off x="573024" y="4059935"/>
-            <a:ext cx="5254752" cy="5486"/>
+            <a:off x="3291840" y="4005071"/>
+            <a:ext cx="2682240" cy="5486"/>
           </a:xfrm>
           <a:prstGeom prst="rect">
             <a:avLst/>
@@ -35538,14 +36559,14 @@
       </p:sp>
       <p:sp>
         <p:nvSpPr>
-          <p:cNvPr id="82" name="TextBox 81"/>
-          <p:cNvSpPr txBox="1"/>
-          <p:nvPr/>
-        </p:nvSpPr>
-        <p:spPr>
-          <a:xfrm>
-            <a:off x="573024" y="4087367"/>
-            <a:ext cx="170688" cy="68580"/>
+          <p:cNvPr id="107" name="TextBox 106"/>
+          <p:cNvSpPr txBox="1"/>
+          <p:nvPr/>
+        </p:nvSpPr>
+        <p:spPr>
+          <a:xfrm>
+            <a:off x="3291840" y="4025646"/>
+            <a:ext cx="170688" cy="75438"/>
           </a:xfrm>
           <a:prstGeom prst="rect">
             <a:avLst/>
@@ -35564,7 +36585,7 @@
               </a:lnSpc>
             </a:pPr>
             <a:r>
-              <a:rPr sz="720" b="1">
+              <a:rPr sz="760" b="1">
                 <a:solidFill>
                   <a:srgbClr val="B5333B"/>
                 </a:solidFill>
@@ -35579,14 +36600,14 @@
       </p:sp>
       <p:sp>
         <p:nvSpPr>
-          <p:cNvPr id="83" name="TextBox 82"/>
-          <p:cNvSpPr txBox="1"/>
-          <p:nvPr/>
-        </p:nvSpPr>
-        <p:spPr>
-          <a:xfrm>
-            <a:off x="743712" y="4087367"/>
-            <a:ext cx="4084320" cy="68580"/>
+          <p:cNvPr id="108" name="TextBox 107"/>
+          <p:cNvSpPr txBox="1"/>
+          <p:nvPr/>
+        </p:nvSpPr>
+        <p:spPr>
+          <a:xfrm>
+            <a:off x="3474720" y="4025646"/>
+            <a:ext cx="2121408" cy="75438"/>
           </a:xfrm>
           <a:prstGeom prst="rect">
             <a:avLst/>
@@ -35605,7 +36626,7 @@
               </a:lnSpc>
             </a:pPr>
             <a:r>
-              <a:rPr sz="720" b="1">
+              <a:rPr sz="780" b="1">
                 <a:solidFill>
                   <a:srgbClr val="1A1A1C"/>
                 </a:solidFill>
@@ -35613,21 +36634,21 @@
                 <a:ea typeface="微软雅黑"/>
                 <a:cs typeface="微软雅黑"/>
               </a:rPr>
-              <a:t>dev-expert</a:t>
-            </a:r>
-          </a:p>
-        </p:txBody>
-      </p:sp>
-      <p:sp>
-        <p:nvSpPr>
-          <p:cNvPr id="84" name="TextBox 83"/>
-          <p:cNvSpPr txBox="1"/>
-          <p:nvPr/>
-        </p:nvSpPr>
-        <p:spPr>
-          <a:xfrm>
-            <a:off x="4876800" y="4087367"/>
-            <a:ext cx="914400" cy="68580"/>
+              <a:t>Mysteel_PriceSearch</a:t>
+            </a:r>
+          </a:p>
+        </p:txBody>
+      </p:sp>
+      <p:sp>
+        <p:nvSpPr>
+          <p:cNvPr id="109" name="TextBox 108"/>
+          <p:cNvSpPr txBox="1"/>
+          <p:nvPr/>
+        </p:nvSpPr>
+        <p:spPr>
+          <a:xfrm>
+            <a:off x="5583936" y="4025646"/>
+            <a:ext cx="402336" cy="75438"/>
           </a:xfrm>
           <a:prstGeom prst="rect">
             <a:avLst/>
@@ -35646,7 +36667,7 @@
               </a:lnSpc>
             </a:pPr>
             <a:r>
-              <a:rPr sz="700" b="0">
+              <a:rPr sz="760" b="0">
                 <a:solidFill>
                   <a:srgbClr val="5B616B"/>
                 </a:solidFill>
@@ -35654,21 +36675,21 @@
                 <a:ea typeface="微软雅黑"/>
                 <a:cs typeface="微软雅黑"/>
               </a:rPr>
-              <a:t>1,156,332</a:t>
-            </a:r>
-          </a:p>
-        </p:txBody>
-      </p:sp>
-      <p:sp>
-        <p:nvSpPr>
-          <p:cNvPr id="85" name="TextBox 84"/>
-          <p:cNvSpPr txBox="1"/>
-          <p:nvPr/>
-        </p:nvSpPr>
-        <p:spPr>
-          <a:xfrm>
-            <a:off x="743712" y="4155947"/>
-            <a:ext cx="4876800" cy="61721"/>
+              <a:t>31,477</a:t>
+            </a:r>
+          </a:p>
+        </p:txBody>
+      </p:sp>
+      <p:sp>
+        <p:nvSpPr>
+          <p:cNvPr id="110" name="TextBox 109"/>
+          <p:cNvSpPr txBox="1"/>
+          <p:nvPr/>
+        </p:nvSpPr>
+        <p:spPr>
+          <a:xfrm>
+            <a:off x="3474720" y="4114800"/>
+            <a:ext cx="2499360" cy="68580"/>
           </a:xfrm>
           <a:prstGeom prst="rect">
             <a:avLst/>
@@ -35687,7 +36708,7 @@
               </a:lnSpc>
             </a:pPr>
             <a:r>
-              <a:rPr sz="630" b="0">
+              <a:rPr sz="700" b="0">
                 <a:solidFill>
                   <a:srgbClr val="5B616B"/>
                 </a:solidFill>
@@ -35695,21 +36716,21 @@
                 <a:ea typeface="微软雅黑"/>
                 <a:cs typeface="微软雅黑"/>
               </a:rPr>
-              <a:t>ebandao</a:t>
-            </a:r>
-          </a:p>
-        </p:txBody>
-      </p:sp>
-      <p:sp>
-        <p:nvSpPr>
-          <p:cNvPr id="86" name="TextBox 85"/>
-          <p:cNvSpPr txBox="1"/>
-          <p:nvPr/>
-        </p:nvSpPr>
-        <p:spPr>
-          <a:xfrm>
-            <a:off x="573024" y="4224528"/>
-            <a:ext cx="170688" cy="68580"/>
+              <a:t>@wyb92</a:t>
+            </a:r>
+          </a:p>
+        </p:txBody>
+      </p:sp>
+      <p:sp>
+        <p:nvSpPr>
+          <p:cNvPr id="111" name="TextBox 110"/>
+          <p:cNvSpPr txBox="1"/>
+          <p:nvPr/>
+        </p:nvSpPr>
+        <p:spPr>
+          <a:xfrm>
+            <a:off x="3291840" y="4279392"/>
+            <a:ext cx="170688" cy="75438"/>
           </a:xfrm>
           <a:prstGeom prst="rect">
             <a:avLst/>
@@ -35728,7 +36749,7 @@
               </a:lnSpc>
             </a:pPr>
             <a:r>
-              <a:rPr sz="720" b="1">
+              <a:rPr sz="760" b="1">
                 <a:solidFill>
                   <a:srgbClr val="B5333B"/>
                 </a:solidFill>
@@ -35743,14 +36764,14 @@
       </p:sp>
       <p:sp>
         <p:nvSpPr>
-          <p:cNvPr id="87" name="TextBox 86"/>
-          <p:cNvSpPr txBox="1"/>
-          <p:nvPr/>
-        </p:nvSpPr>
-        <p:spPr>
-          <a:xfrm>
-            <a:off x="743712" y="4224528"/>
-            <a:ext cx="4084320" cy="68580"/>
+          <p:cNvPr id="112" name="TextBox 111"/>
+          <p:cNvSpPr txBox="1"/>
+          <p:nvPr/>
+        </p:nvSpPr>
+        <p:spPr>
+          <a:xfrm>
+            <a:off x="3474720" y="4279392"/>
+            <a:ext cx="2121408" cy="75438"/>
           </a:xfrm>
           <a:prstGeom prst="rect">
             <a:avLst/>
@@ -35769,7 +36790,7 @@
               </a:lnSpc>
             </a:pPr>
             <a:r>
-              <a:rPr sz="720" b="1">
+              <a:rPr sz="780" b="1">
                 <a:solidFill>
                   <a:srgbClr val="1A1A1C"/>
                 </a:solidFill>
@@ -35777,21 +36798,21 @@
                 <a:ea typeface="微软雅黑"/>
                 <a:cs typeface="微软雅黑"/>
               </a:rPr>
-              <a:t>skill-creator</a:t>
-            </a:r>
-          </a:p>
-        </p:txBody>
-      </p:sp>
-      <p:sp>
-        <p:nvSpPr>
-          <p:cNvPr id="88" name="TextBox 87"/>
-          <p:cNvSpPr txBox="1"/>
-          <p:nvPr/>
-        </p:nvSpPr>
-        <p:spPr>
-          <a:xfrm>
-            <a:off x="4876800" y="4224528"/>
-            <a:ext cx="914400" cy="68580"/>
+              <a:t>weather天气查询</a:t>
+            </a:r>
+          </a:p>
+        </p:txBody>
+      </p:sp>
+      <p:sp>
+        <p:nvSpPr>
+          <p:cNvPr id="113" name="TextBox 112"/>
+          <p:cNvSpPr txBox="1"/>
+          <p:nvPr/>
+        </p:nvSpPr>
+        <p:spPr>
+          <a:xfrm>
+            <a:off x="5583936" y="4279392"/>
+            <a:ext cx="402336" cy="75438"/>
           </a:xfrm>
           <a:prstGeom prst="rect">
             <a:avLst/>
@@ -35810,7 +36831,7 @@
               </a:lnSpc>
             </a:pPr>
             <a:r>
-              <a:rPr sz="700" b="0">
+              <a:rPr sz="760" b="0">
                 <a:solidFill>
                   <a:srgbClr val="5B616B"/>
                 </a:solidFill>
@@ -35818,21 +36839,21 @@
                 <a:ea typeface="微软雅黑"/>
                 <a:cs typeface="微软雅黑"/>
               </a:rPr>
-              <a:t>20,876</a:t>
-            </a:r>
-          </a:p>
-        </p:txBody>
-      </p:sp>
-      <p:sp>
-        <p:nvSpPr>
-          <p:cNvPr id="89" name="TextBox 88"/>
-          <p:cNvSpPr txBox="1"/>
-          <p:nvPr/>
-        </p:nvSpPr>
-        <p:spPr>
-          <a:xfrm>
-            <a:off x="743712" y="4293108"/>
-            <a:ext cx="4876800" cy="61721"/>
+              <a:t>5,818</a:t>
+            </a:r>
+          </a:p>
+        </p:txBody>
+      </p:sp>
+      <p:sp>
+        <p:nvSpPr>
+          <p:cNvPr id="114" name="TextBox 113"/>
+          <p:cNvSpPr txBox="1"/>
+          <p:nvPr/>
+        </p:nvSpPr>
+        <p:spPr>
+          <a:xfrm>
+            <a:off x="3474720" y="4368546"/>
+            <a:ext cx="2499360" cy="68580"/>
           </a:xfrm>
           <a:prstGeom prst="rect">
             <a:avLst/>
@@ -35851,7 +36872,7 @@
               </a:lnSpc>
             </a:pPr>
             <a:r>
-              <a:rPr sz="630" b="0">
+              <a:rPr sz="700" b="0">
                 <a:solidFill>
                   <a:srgbClr val="5B616B"/>
                 </a:solidFill>
@@ -35859,21 +36880,21 @@
                 <a:ea typeface="微软雅黑"/>
                 <a:cs typeface="微软雅黑"/>
               </a:rPr>
-              <a:t>@anthropics</a:t>
-            </a:r>
-          </a:p>
-        </p:txBody>
-      </p:sp>
-      <p:sp>
-        <p:nvSpPr>
-          <p:cNvPr id="90" name="TextBox 89"/>
-          <p:cNvSpPr txBox="1"/>
-          <p:nvPr/>
-        </p:nvSpPr>
-        <p:spPr>
-          <a:xfrm>
-            <a:off x="573024" y="4361688"/>
-            <a:ext cx="170688" cy="68580"/>
+              <a:t>@steipete</a:t>
+            </a:r>
+          </a:p>
+        </p:txBody>
+      </p:sp>
+      <p:sp>
+        <p:nvSpPr>
+          <p:cNvPr id="115" name="TextBox 114"/>
+          <p:cNvSpPr txBox="1"/>
+          <p:nvPr/>
+        </p:nvSpPr>
+        <p:spPr>
+          <a:xfrm>
+            <a:off x="3291840" y="4533137"/>
+            <a:ext cx="170688" cy="75438"/>
           </a:xfrm>
           <a:prstGeom prst="rect">
             <a:avLst/>
@@ -35892,7 +36913,7 @@
               </a:lnSpc>
             </a:pPr>
             <a:r>
-              <a:rPr sz="720" b="1">
+              <a:rPr sz="760" b="1">
                 <a:solidFill>
                   <a:srgbClr val="B5333B"/>
                 </a:solidFill>
@@ -35907,14 +36928,14 @@
       </p:sp>
       <p:sp>
         <p:nvSpPr>
-          <p:cNvPr id="91" name="TextBox 90"/>
-          <p:cNvSpPr txBox="1"/>
-          <p:nvPr/>
-        </p:nvSpPr>
-        <p:spPr>
-          <a:xfrm>
-            <a:off x="743712" y="4361688"/>
-            <a:ext cx="4084320" cy="68580"/>
+          <p:cNvPr id="116" name="TextBox 115"/>
+          <p:cNvSpPr txBox="1"/>
+          <p:nvPr/>
+        </p:nvSpPr>
+        <p:spPr>
+          <a:xfrm>
+            <a:off x="3474720" y="4533137"/>
+            <a:ext cx="2121408" cy="75438"/>
           </a:xfrm>
           <a:prstGeom prst="rect">
             <a:avLst/>
@@ -35933,7 +36954,7 @@
               </a:lnSpc>
             </a:pPr>
             <a:r>
-              <a:rPr sz="720" b="1">
+              <a:rPr sz="780" b="1">
                 <a:solidFill>
                   <a:srgbClr val="1A1A1C"/>
                 </a:solidFill>
@@ -35941,21 +36962,21 @@
                 <a:ea typeface="微软雅黑"/>
                 <a:cs typeface="微软雅黑"/>
               </a:rPr>
-              <a:t>mattress-sleep-support-advisor（床垫选购顾问）</a:t>
-            </a:r>
-          </a:p>
-        </p:txBody>
-      </p:sp>
-      <p:sp>
-        <p:nvSpPr>
-          <p:cNvPr id="92" name="TextBox 91"/>
-          <p:cNvSpPr txBox="1"/>
-          <p:nvPr/>
-        </p:nvSpPr>
-        <p:spPr>
-          <a:xfrm>
-            <a:off x="4876800" y="4361688"/>
-            <a:ext cx="914400" cy="68580"/>
+              <a:t>summarize</a:t>
+            </a:r>
+          </a:p>
+        </p:txBody>
+      </p:sp>
+      <p:sp>
+        <p:nvSpPr>
+          <p:cNvPr id="117" name="TextBox 116"/>
+          <p:cNvSpPr txBox="1"/>
+          <p:nvPr/>
+        </p:nvSpPr>
+        <p:spPr>
+          <a:xfrm>
+            <a:off x="5583936" y="4533137"/>
+            <a:ext cx="402336" cy="75438"/>
           </a:xfrm>
           <a:prstGeom prst="rect">
             <a:avLst/>
@@ -35974,7 +36995,7 @@
               </a:lnSpc>
             </a:pPr>
             <a:r>
-              <a:rPr sz="700" b="0">
+              <a:rPr sz="760" b="0">
                 <a:solidFill>
                   <a:srgbClr val="5B616B"/>
                 </a:solidFill>
@@ -35982,21 +37003,21 @@
                 <a:ea typeface="微软雅黑"/>
                 <a:cs typeface="微软雅黑"/>
               </a:rPr>
-              <a:t>19,487</a:t>
-            </a:r>
-          </a:p>
-        </p:txBody>
-      </p:sp>
-      <p:sp>
-        <p:nvSpPr>
-          <p:cNvPr id="93" name="TextBox 92"/>
-          <p:cNvSpPr txBox="1"/>
-          <p:nvPr/>
-        </p:nvSpPr>
-        <p:spPr>
-          <a:xfrm>
-            <a:off x="743712" y="4430268"/>
-            <a:ext cx="4876800" cy="61721"/>
+              <a:t>3,844</a:t>
+            </a:r>
+          </a:p>
+        </p:txBody>
+      </p:sp>
+      <p:sp>
+        <p:nvSpPr>
+          <p:cNvPr id="118" name="TextBox 117"/>
+          <p:cNvSpPr txBox="1"/>
+          <p:nvPr/>
+        </p:nvSpPr>
+        <p:spPr>
+          <a:xfrm>
+            <a:off x="3474720" y="4622292"/>
+            <a:ext cx="2499360" cy="68580"/>
           </a:xfrm>
           <a:prstGeom prst="rect">
             <a:avLst/>
@@ -36015,7 +37036,7 @@
               </a:lnSpc>
             </a:pPr>
             <a:r>
-              <a:rPr sz="630" b="0">
+              <a:rPr sz="700" b="0">
                 <a:solidFill>
                   <a:srgbClr val="5B616B"/>
                 </a:solidFill>
@@ -36023,21 +37044,21 @@
                 <a:ea typeface="微软雅黑"/>
                 <a:cs typeface="微软雅黑"/>
               </a:rPr>
-              <a:t>alv123</a:t>
-            </a:r>
-          </a:p>
-        </p:txBody>
-      </p:sp>
-      <p:sp>
-        <p:nvSpPr>
-          <p:cNvPr id="94" name="TextBox 93"/>
-          <p:cNvSpPr txBox="1"/>
-          <p:nvPr/>
-        </p:nvSpPr>
-        <p:spPr>
-          <a:xfrm>
-            <a:off x="573024" y="4498848"/>
-            <a:ext cx="170688" cy="68580"/>
+              <a:t>@steipete</a:t>
+            </a:r>
+          </a:p>
+        </p:txBody>
+      </p:sp>
+      <p:sp>
+        <p:nvSpPr>
+          <p:cNvPr id="119" name="TextBox 118"/>
+          <p:cNvSpPr txBox="1"/>
+          <p:nvPr/>
+        </p:nvSpPr>
+        <p:spPr>
+          <a:xfrm>
+            <a:off x="3291840" y="4786884"/>
+            <a:ext cx="170688" cy="75438"/>
           </a:xfrm>
           <a:prstGeom prst="rect">
             <a:avLst/>
@@ -36056,7 +37077,7 @@
               </a:lnSpc>
             </a:pPr>
             <a:r>
-              <a:rPr sz="720" b="1">
+              <a:rPr sz="760" b="1">
                 <a:solidFill>
                   <a:srgbClr val="B5333B"/>
                 </a:solidFill>
@@ -36071,14 +37092,14 @@
       </p:sp>
       <p:sp>
         <p:nvSpPr>
-          <p:cNvPr id="95" name="TextBox 94"/>
-          <p:cNvSpPr txBox="1"/>
-          <p:nvPr/>
-        </p:nvSpPr>
-        <p:spPr>
-          <a:xfrm>
-            <a:off x="743712" y="4498848"/>
-            <a:ext cx="4084320" cy="68580"/>
+          <p:cNvPr id="120" name="TextBox 119"/>
+          <p:cNvSpPr txBox="1"/>
+          <p:nvPr/>
+        </p:nvSpPr>
+        <p:spPr>
+          <a:xfrm>
+            <a:off x="3474720" y="4786884"/>
+            <a:ext cx="2121408" cy="75438"/>
           </a:xfrm>
           <a:prstGeom prst="rect">
             <a:avLst/>
@@ -36097,7 +37118,7 @@
               </a:lnSpc>
             </a:pPr>
             <a:r>
-              <a:rPr sz="720" b="1">
+              <a:rPr sz="780" b="1">
                 <a:solidFill>
                   <a:srgbClr val="1A1A1C"/>
                 </a:solidFill>
@@ -36105,21 +37126,21 @@
                 <a:ea typeface="微软雅黑"/>
                 <a:cs typeface="微软雅黑"/>
               </a:rPr>
-              <a:t>frontend-design</a:t>
-            </a:r>
-          </a:p>
-        </p:txBody>
-      </p:sp>
-      <p:sp>
-        <p:nvSpPr>
-          <p:cNvPr id="96" name="TextBox 95"/>
-          <p:cNvSpPr txBox="1"/>
-          <p:nvPr/>
-        </p:nvSpPr>
-        <p:spPr>
-          <a:xfrm>
-            <a:off x="4876800" y="4498848"/>
-            <a:ext cx="914400" cy="68580"/>
+              <a:t>Skill Vetter 安全扫描</a:t>
+            </a:r>
+          </a:p>
+        </p:txBody>
+      </p:sp>
+      <p:sp>
+        <p:nvSpPr>
+          <p:cNvPr id="121" name="TextBox 120"/>
+          <p:cNvSpPr txBox="1"/>
+          <p:nvPr/>
+        </p:nvSpPr>
+        <p:spPr>
+          <a:xfrm>
+            <a:off x="5583936" y="4786884"/>
+            <a:ext cx="402336" cy="75438"/>
           </a:xfrm>
           <a:prstGeom prst="rect">
             <a:avLst/>
@@ -36138,7 +37159,7 @@
               </a:lnSpc>
             </a:pPr>
             <a:r>
-              <a:rPr sz="700" b="0">
+              <a:rPr sz="760" b="0">
                 <a:solidFill>
                   <a:srgbClr val="5B616B"/>
                 </a:solidFill>
@@ -36146,21 +37167,21 @@
                 <a:ea typeface="微软雅黑"/>
                 <a:cs typeface="微软雅黑"/>
               </a:rPr>
-              <a:t>16,285</a:t>
-            </a:r>
-          </a:p>
-        </p:txBody>
-      </p:sp>
-      <p:sp>
-        <p:nvSpPr>
-          <p:cNvPr id="97" name="TextBox 96"/>
-          <p:cNvSpPr txBox="1"/>
-          <p:nvPr/>
-        </p:nvSpPr>
-        <p:spPr>
-          <a:xfrm>
-            <a:off x="743712" y="4567428"/>
-            <a:ext cx="4876800" cy="61721"/>
+              <a:t>3,781</a:t>
+            </a:r>
+          </a:p>
+        </p:txBody>
+      </p:sp>
+      <p:sp>
+        <p:nvSpPr>
+          <p:cNvPr id="122" name="TextBox 121"/>
+          <p:cNvSpPr txBox="1"/>
+          <p:nvPr/>
+        </p:nvSpPr>
+        <p:spPr>
+          <a:xfrm>
+            <a:off x="3474720" y="4876038"/>
+            <a:ext cx="2499360" cy="68580"/>
           </a:xfrm>
           <a:prstGeom prst="rect">
             <a:avLst/>
@@ -36179,7 +37200,7 @@
               </a:lnSpc>
             </a:pPr>
             <a:r>
-              <a:rPr sz="630" b="0">
+              <a:rPr sz="700" b="0">
                 <a:solidFill>
                   <a:srgbClr val="5B616B"/>
                 </a:solidFill>
@@ -36187,21 +37208,21 @@
                 <a:ea typeface="微软雅黑"/>
                 <a:cs typeface="微软雅黑"/>
               </a:rPr>
-              <a:t>@anthropics</a:t>
-            </a:r>
-          </a:p>
-        </p:txBody>
-      </p:sp>
-      <p:sp>
-        <p:nvSpPr>
-          <p:cNvPr id="98" name="TextBox 97"/>
-          <p:cNvSpPr txBox="1"/>
-          <p:nvPr/>
-        </p:nvSpPr>
-        <p:spPr>
-          <a:xfrm>
-            <a:off x="573024" y="4636008"/>
-            <a:ext cx="170688" cy="68580"/>
+              <a:t>@spclaudehome</a:t>
+            </a:r>
+          </a:p>
+        </p:txBody>
+      </p:sp>
+      <p:sp>
+        <p:nvSpPr>
+          <p:cNvPr id="123" name="TextBox 122"/>
+          <p:cNvSpPr txBox="1"/>
+          <p:nvPr/>
+        </p:nvSpPr>
+        <p:spPr>
+          <a:xfrm>
+            <a:off x="3291840" y="5040630"/>
+            <a:ext cx="170688" cy="75438"/>
           </a:xfrm>
           <a:prstGeom prst="rect">
             <a:avLst/>
@@ -36220,7 +37241,7 @@
               </a:lnSpc>
             </a:pPr>
             <a:r>
-              <a:rPr sz="720" b="1">
+              <a:rPr sz="760" b="1">
                 <a:solidFill>
                   <a:srgbClr val="B5333B"/>
                 </a:solidFill>
@@ -36235,14 +37256,14 @@
       </p:sp>
       <p:sp>
         <p:nvSpPr>
-          <p:cNvPr id="99" name="TextBox 98"/>
-          <p:cNvSpPr txBox="1"/>
-          <p:nvPr/>
-        </p:nvSpPr>
-        <p:spPr>
-          <a:xfrm>
-            <a:off x="743712" y="4636008"/>
-            <a:ext cx="4084320" cy="68580"/>
+          <p:cNvPr id="124" name="TextBox 123"/>
+          <p:cNvSpPr txBox="1"/>
+          <p:nvPr/>
+        </p:nvSpPr>
+        <p:spPr>
+          <a:xfrm>
+            <a:off x="3474720" y="5040630"/>
+            <a:ext cx="2121408" cy="75438"/>
           </a:xfrm>
           <a:prstGeom prst="rect">
             <a:avLst/>
@@ -36261,7 +37282,7 @@
               </a:lnSpc>
             </a:pPr>
             <a:r>
-              <a:rPr sz="720" b="1">
+              <a:rPr sz="780" b="1">
                 <a:solidFill>
                   <a:srgbClr val="1A1A1C"/>
                 </a:solidFill>
@@ -36269,21 +37290,21 @@
                 <a:ea typeface="微软雅黑"/>
                 <a:cs typeface="微软雅黑"/>
               </a:rPr>
-              <a:t>oneskills</a:t>
-            </a:r>
-          </a:p>
-        </p:txBody>
-      </p:sp>
-      <p:sp>
-        <p:nvSpPr>
-          <p:cNvPr id="100" name="TextBox 99"/>
-          <p:cNvSpPr txBox="1"/>
-          <p:nvPr/>
-        </p:nvSpPr>
-        <p:spPr>
-          <a:xfrm>
-            <a:off x="4876800" y="4636008"/>
-            <a:ext cx="914400" cy="68580"/>
+              <a:t>github</a:t>
+            </a:r>
+          </a:p>
+        </p:txBody>
+      </p:sp>
+      <p:sp>
+        <p:nvSpPr>
+          <p:cNvPr id="125" name="TextBox 124"/>
+          <p:cNvSpPr txBox="1"/>
+          <p:nvPr/>
+        </p:nvSpPr>
+        <p:spPr>
+          <a:xfrm>
+            <a:off x="5583936" y="5040630"/>
+            <a:ext cx="402336" cy="75438"/>
           </a:xfrm>
           <a:prstGeom prst="rect">
             <a:avLst/>
@@ -36302,7 +37323,7 @@
               </a:lnSpc>
             </a:pPr>
             <a:r>
-              <a:rPr sz="700" b="0">
+              <a:rPr sz="760" b="0">
                 <a:solidFill>
                   <a:srgbClr val="5B616B"/>
                 </a:solidFill>
@@ -36310,21 +37331,21 @@
                 <a:ea typeface="微软雅黑"/>
                 <a:cs typeface="微软雅黑"/>
               </a:rPr>
-              <a:t>12,861</a:t>
-            </a:r>
-          </a:p>
-        </p:txBody>
-      </p:sp>
-      <p:sp>
-        <p:nvSpPr>
-          <p:cNvPr id="101" name="TextBox 100"/>
-          <p:cNvSpPr txBox="1"/>
-          <p:nvPr/>
-        </p:nvSpPr>
-        <p:spPr>
-          <a:xfrm>
-            <a:off x="743712" y="4704588"/>
-            <a:ext cx="4876800" cy="61721"/>
+              <a:t>2,666</a:t>
+            </a:r>
+          </a:p>
+        </p:txBody>
+      </p:sp>
+      <p:sp>
+        <p:nvSpPr>
+          <p:cNvPr id="126" name="TextBox 125"/>
+          <p:cNvSpPr txBox="1"/>
+          <p:nvPr/>
+        </p:nvSpPr>
+        <p:spPr>
+          <a:xfrm>
+            <a:off x="3474720" y="5129784"/>
+            <a:ext cx="2499360" cy="68580"/>
           </a:xfrm>
           <a:prstGeom prst="rect">
             <a:avLst/>
@@ -36343,7 +37364,7 @@
               </a:lnSpc>
             </a:pPr>
             <a:r>
-              <a:rPr sz="630" b="0">
+              <a:rPr sz="700" b="0">
                 <a:solidFill>
                   <a:srgbClr val="5B616B"/>
                 </a:solidFill>
@@ -36351,21 +37372,21 @@
                 <a:ea typeface="微软雅黑"/>
                 <a:cs typeface="微软雅黑"/>
               </a:rPr>
-              <a:t>OneScience</a:t>
-            </a:r>
-          </a:p>
-        </p:txBody>
-      </p:sp>
-      <p:sp>
-        <p:nvSpPr>
-          <p:cNvPr id="102" name="TextBox 101"/>
-          <p:cNvSpPr txBox="1"/>
-          <p:nvPr/>
-        </p:nvSpPr>
-        <p:spPr>
-          <a:xfrm>
-            <a:off x="573024" y="4773168"/>
-            <a:ext cx="170688" cy="68580"/>
+              <a:t>@steipete</a:t>
+            </a:r>
+          </a:p>
+        </p:txBody>
+      </p:sp>
+      <p:sp>
+        <p:nvSpPr>
+          <p:cNvPr id="127" name="TextBox 126"/>
+          <p:cNvSpPr txBox="1"/>
+          <p:nvPr/>
+        </p:nvSpPr>
+        <p:spPr>
+          <a:xfrm>
+            <a:off x="3291840" y="5294376"/>
+            <a:ext cx="170688" cy="75438"/>
           </a:xfrm>
           <a:prstGeom prst="rect">
             <a:avLst/>
@@ -36384,7 +37405,7 @@
               </a:lnSpc>
             </a:pPr>
             <a:r>
-              <a:rPr sz="720" b="1">
+              <a:rPr sz="760" b="1">
                 <a:solidFill>
                   <a:srgbClr val="B5333B"/>
                 </a:solidFill>
@@ -36399,14 +37420,14 @@
       </p:sp>
       <p:sp>
         <p:nvSpPr>
-          <p:cNvPr id="103" name="TextBox 102"/>
-          <p:cNvSpPr txBox="1"/>
-          <p:nvPr/>
-        </p:nvSpPr>
-        <p:spPr>
-          <a:xfrm>
-            <a:off x="743712" y="4773168"/>
-            <a:ext cx="4084320" cy="68580"/>
+          <p:cNvPr id="128" name="TextBox 127"/>
+          <p:cNvSpPr txBox="1"/>
+          <p:nvPr/>
+        </p:nvSpPr>
+        <p:spPr>
+          <a:xfrm>
+            <a:off x="3474720" y="5294376"/>
+            <a:ext cx="2121408" cy="75438"/>
           </a:xfrm>
           <a:prstGeom prst="rect">
             <a:avLst/>
@@ -36425,7 +37446,7 @@
               </a:lnSpc>
             </a:pPr>
             <a:r>
-              <a:rPr sz="720" b="1">
+              <a:rPr sz="780" b="1">
                 <a:solidFill>
                   <a:srgbClr val="1A1A1C"/>
                 </a:solidFill>
@@ -36433,21 +37454,21 @@
                 <a:ea typeface="微软雅黑"/>
                 <a:cs typeface="微软雅黑"/>
               </a:rPr>
-              <a:t>docx</a:t>
-            </a:r>
-          </a:p>
-        </p:txBody>
-      </p:sp>
-      <p:sp>
-        <p:nvSpPr>
-          <p:cNvPr id="104" name="TextBox 103"/>
-          <p:cNvSpPr txBox="1"/>
-          <p:nvPr/>
-        </p:nvSpPr>
-        <p:spPr>
-          <a:xfrm>
-            <a:off x="4876800" y="4773168"/>
-            <a:ext cx="914400" cy="68580"/>
+              <a:t>amap-jsapi-skill</a:t>
+            </a:r>
+          </a:p>
+        </p:txBody>
+      </p:sp>
+      <p:sp>
+        <p:nvSpPr>
+          <p:cNvPr id="129" name="TextBox 128"/>
+          <p:cNvSpPr txBox="1"/>
+          <p:nvPr/>
+        </p:nvSpPr>
+        <p:spPr>
+          <a:xfrm>
+            <a:off x="5583936" y="5294376"/>
+            <a:ext cx="402336" cy="75438"/>
           </a:xfrm>
           <a:prstGeom prst="rect">
             <a:avLst/>
@@ -36466,7 +37487,7 @@
               </a:lnSpc>
             </a:pPr>
             <a:r>
-              <a:rPr sz="700" b="0">
+              <a:rPr sz="760" b="0">
                 <a:solidFill>
                   <a:srgbClr val="5B616B"/>
                 </a:solidFill>
@@ -36474,21 +37495,21 @@
                 <a:ea typeface="微软雅黑"/>
                 <a:cs typeface="微软雅黑"/>
               </a:rPr>
-              <a:t>10,754</a:t>
-            </a:r>
-          </a:p>
-        </p:txBody>
-      </p:sp>
-      <p:sp>
-        <p:nvSpPr>
-          <p:cNvPr id="105" name="TextBox 104"/>
-          <p:cNvSpPr txBox="1"/>
-          <p:nvPr/>
-        </p:nvSpPr>
-        <p:spPr>
-          <a:xfrm>
-            <a:off x="743712" y="4841748"/>
-            <a:ext cx="4876800" cy="61721"/>
+              <a:t>2,344</a:t>
+            </a:r>
+          </a:p>
+        </p:txBody>
+      </p:sp>
+      <p:sp>
+        <p:nvSpPr>
+          <p:cNvPr id="130" name="TextBox 129"/>
+          <p:cNvSpPr txBox="1"/>
+          <p:nvPr/>
+        </p:nvSpPr>
+        <p:spPr>
+          <a:xfrm>
+            <a:off x="3474720" y="5383530"/>
+            <a:ext cx="2499360" cy="68580"/>
           </a:xfrm>
           <a:prstGeom prst="rect">
             <a:avLst/>
@@ -36507,7 +37528,7 @@
               </a:lnSpc>
             </a:pPr>
             <a:r>
-              <a:rPr sz="630" b="0">
+              <a:rPr sz="700" b="0">
                 <a:solidFill>
                   <a:srgbClr val="5B616B"/>
                 </a:solidFill>
@@ -36515,34 +37536,71 @@
                 <a:ea typeface="微软雅黑"/>
                 <a:cs typeface="微软雅黑"/>
               </a:rPr>
-              <a:t>@anthropics</a:t>
-            </a:r>
-          </a:p>
-        </p:txBody>
-      </p:sp>
-      <p:sp>
-        <p:nvSpPr>
-          <p:cNvPr id="106" name="Rounded Rectangle 105"/>
+              <a:t>@lbs-amap</a:t>
+            </a:r>
+          </a:p>
+        </p:txBody>
+      </p:sp>
+      <p:sp>
+        <p:nvSpPr>
+          <p:cNvPr id="131" name="TextBox 130"/>
+          <p:cNvSpPr txBox="1"/>
+          <p:nvPr/>
+        </p:nvSpPr>
+        <p:spPr>
+          <a:xfrm>
+            <a:off x="6156960" y="3909059"/>
+            <a:ext cx="2682240" cy="96012"/>
+          </a:xfrm>
+          <a:prstGeom prst="rect">
+            <a:avLst/>
+          </a:prstGeom>
+          <a:noFill/>
+        </p:spPr>
+        <p:txBody>
+          <a:bodyPr wrap="square" lIns="0" rIns="0" tIns="0" bIns="0" anchor="t">
+            <a:spAutoFit/>
+          </a:bodyPr>
+          <a:lstStyle/>
+          <a:p>
+            <a:pPr algn="l">
+              <a:lnSpc>
+                <a:spcPct val="100000"/>
+              </a:lnSpc>
+            </a:pPr>
+            <a:r>
+              <a:rPr sz="860" b="1">
+                <a:solidFill>
+                  <a:srgbClr val="6B7785"/>
+                </a:solidFill>
+                <a:latin typeface="微软雅黑"/>
+                <a:ea typeface="微软雅黑"/>
+                <a:cs typeface="微软雅黑"/>
+              </a:rPr>
+              <a:t>外部网站 Top6</a:t>
+            </a:r>
+          </a:p>
+        </p:txBody>
+      </p:sp>
+      <p:sp>
+        <p:nvSpPr>
+          <p:cNvPr id="132" name="Rectangle 131"/>
           <p:cNvSpPr/>
           <p:nvPr/>
         </p:nvSpPr>
         <p:spPr>
           <a:xfrm>
-            <a:off x="6217920" y="3909059"/>
-            <a:ext cx="5547360" cy="1014984"/>
-          </a:xfrm>
-          <a:prstGeom prst="roundRect">
-            <a:avLst>
-              <a:gd name="adj" fmla="val 2000"/>
-            </a:avLst>
+            <a:off x="6156960" y="4005071"/>
+            <a:ext cx="2682240" cy="5486"/>
+          </a:xfrm>
+          <a:prstGeom prst="rect">
+            <a:avLst/>
           </a:prstGeom>
           <a:solidFill>
-            <a:srgbClr val="FFFFFF"/>
+            <a:srgbClr val="E2E4E7"/>
           </a:solidFill>
-          <a:ln w="9525">
-            <a:solidFill>
-              <a:srgbClr val="E2E4E7"/>
-            </a:solidFill>
+          <a:ln>
+            <a:noFill/>
           </a:ln>
           <a:effectLst/>
         </p:spPr>
@@ -36570,14 +37628,14 @@
       </p:sp>
       <p:sp>
         <p:nvSpPr>
-          <p:cNvPr id="107" name="TextBox 106"/>
-          <p:cNvSpPr txBox="1"/>
-          <p:nvPr/>
-        </p:nvSpPr>
-        <p:spPr>
-          <a:xfrm>
-            <a:off x="6364224" y="3957065"/>
-            <a:ext cx="3657600" cy="96012"/>
+          <p:cNvPr id="133" name="TextBox 132"/>
+          <p:cNvSpPr txBox="1"/>
+          <p:nvPr/>
+        </p:nvSpPr>
+        <p:spPr>
+          <a:xfrm>
+            <a:off x="6156960" y="4025646"/>
+            <a:ext cx="170688" cy="75438"/>
           </a:xfrm>
           <a:prstGeom prst="rect">
             <a:avLst/>
@@ -36596,29 +37654,1013 @@
               </a:lnSpc>
             </a:pPr>
             <a:r>
+              <a:rPr sz="760" b="1">
+                <a:solidFill>
+                  <a:srgbClr val="B5333B"/>
+                </a:solidFill>
+                <a:latin typeface="微软雅黑"/>
+                <a:ea typeface="微软雅黑"/>
+                <a:cs typeface="微软雅黑"/>
+              </a:rPr>
+              <a:t>1</a:t>
+            </a:r>
+          </a:p>
+        </p:txBody>
+      </p:sp>
+      <p:sp>
+        <p:nvSpPr>
+          <p:cNvPr id="134" name="TextBox 133"/>
+          <p:cNvSpPr txBox="1"/>
+          <p:nvPr/>
+        </p:nvSpPr>
+        <p:spPr>
+          <a:xfrm>
+            <a:off x="6339840" y="4025646"/>
+            <a:ext cx="2121408" cy="75438"/>
+          </a:xfrm>
+          <a:prstGeom prst="rect">
+            <a:avLst/>
+          </a:prstGeom>
+          <a:noFill/>
+        </p:spPr>
+        <p:txBody>
+          <a:bodyPr wrap="square" lIns="0" rIns="0" tIns="0" bIns="0" anchor="t">
+            <a:spAutoFit/>
+          </a:bodyPr>
+          <a:lstStyle/>
+          <a:p>
+            <a:pPr algn="l">
+              <a:lnSpc>
+                <a:spcPct val="100000"/>
+              </a:lnSpc>
+            </a:pPr>
+            <a:r>
+              <a:rPr sz="780" b="1">
+                <a:solidFill>
+                  <a:srgbClr val="1A1A1C"/>
+                </a:solidFill>
+                <a:latin typeface="微软雅黑"/>
+                <a:ea typeface="微软雅黑"/>
+                <a:cs typeface="微软雅黑"/>
+              </a:rPr>
+              <a:t>小包公智能法律专家</a:t>
+            </a:r>
+          </a:p>
+        </p:txBody>
+      </p:sp>
+      <p:sp>
+        <p:nvSpPr>
+          <p:cNvPr id="135" name="TextBox 134"/>
+          <p:cNvSpPr txBox="1"/>
+          <p:nvPr/>
+        </p:nvSpPr>
+        <p:spPr>
+          <a:xfrm>
+            <a:off x="8449056" y="4025646"/>
+            <a:ext cx="402336" cy="75438"/>
+          </a:xfrm>
+          <a:prstGeom prst="rect">
+            <a:avLst/>
+          </a:prstGeom>
+          <a:noFill/>
+        </p:spPr>
+        <p:txBody>
+          <a:bodyPr wrap="square" lIns="0" rIns="0" tIns="0" bIns="0" anchor="t">
+            <a:spAutoFit/>
+          </a:bodyPr>
+          <a:lstStyle/>
+          <a:p>
+            <a:pPr algn="r">
+              <a:lnSpc>
+                <a:spcPct val="100000"/>
+              </a:lnSpc>
+            </a:pPr>
+            <a:r>
+              <a:rPr sz="760" b="0">
+                <a:solidFill>
+                  <a:srgbClr val="5B616B"/>
+                </a:solidFill>
+                <a:latin typeface="微软雅黑"/>
+                <a:ea typeface="微软雅黑"/>
+                <a:cs typeface="微软雅黑"/>
+              </a:rPr>
+              <a:t>27,742</a:t>
+            </a:r>
+          </a:p>
+        </p:txBody>
+      </p:sp>
+      <p:sp>
+        <p:nvSpPr>
+          <p:cNvPr id="136" name="TextBox 135"/>
+          <p:cNvSpPr txBox="1"/>
+          <p:nvPr/>
+        </p:nvSpPr>
+        <p:spPr>
+          <a:xfrm>
+            <a:off x="6339840" y="4114800"/>
+            <a:ext cx="2499360" cy="68580"/>
+          </a:xfrm>
+          <a:prstGeom prst="rect">
+            <a:avLst/>
+          </a:prstGeom>
+          <a:noFill/>
+        </p:spPr>
+        <p:txBody>
+          <a:bodyPr wrap="square" lIns="0" rIns="0" tIns="0" bIns="0" anchor="t">
+            <a:spAutoFit/>
+          </a:bodyPr>
+          <a:lstStyle/>
+          <a:p>
+            <a:pPr algn="l">
+              <a:lnSpc>
+                <a:spcPct val="100000"/>
+              </a:lnSpc>
+            </a:pPr>
+            <a:r>
+              <a:rPr sz="700" b="0">
+                <a:solidFill>
+                  <a:srgbClr val="5B616B"/>
+                </a:solidFill>
+                <a:latin typeface="微软雅黑"/>
+                <a:ea typeface="微软雅黑"/>
+                <a:cs typeface="微软雅黑"/>
+              </a:rPr>
+              <a:t>xbgai123</a:t>
+            </a:r>
+          </a:p>
+        </p:txBody>
+      </p:sp>
+      <p:sp>
+        <p:nvSpPr>
+          <p:cNvPr id="137" name="TextBox 136"/>
+          <p:cNvSpPr txBox="1"/>
+          <p:nvPr/>
+        </p:nvSpPr>
+        <p:spPr>
+          <a:xfrm>
+            <a:off x="6156960" y="4279392"/>
+            <a:ext cx="170688" cy="75438"/>
+          </a:xfrm>
+          <a:prstGeom prst="rect">
+            <a:avLst/>
+          </a:prstGeom>
+          <a:noFill/>
+        </p:spPr>
+        <p:txBody>
+          <a:bodyPr wrap="square" lIns="0" rIns="0" tIns="0" bIns="0" anchor="t">
+            <a:spAutoFit/>
+          </a:bodyPr>
+          <a:lstStyle/>
+          <a:p>
+            <a:pPr algn="l">
+              <a:lnSpc>
+                <a:spcPct val="100000"/>
+              </a:lnSpc>
+            </a:pPr>
+            <a:r>
+              <a:rPr sz="760" b="1">
+                <a:solidFill>
+                  <a:srgbClr val="B5333B"/>
+                </a:solidFill>
+                <a:latin typeface="微软雅黑"/>
+                <a:ea typeface="微软雅黑"/>
+                <a:cs typeface="微软雅黑"/>
+              </a:rPr>
+              <a:t>2</a:t>
+            </a:r>
+          </a:p>
+        </p:txBody>
+      </p:sp>
+      <p:sp>
+        <p:nvSpPr>
+          <p:cNvPr id="138" name="TextBox 137"/>
+          <p:cNvSpPr txBox="1"/>
+          <p:nvPr/>
+        </p:nvSpPr>
+        <p:spPr>
+          <a:xfrm>
+            <a:off x="6339840" y="4279392"/>
+            <a:ext cx="2121408" cy="75438"/>
+          </a:xfrm>
+          <a:prstGeom prst="rect">
+            <a:avLst/>
+          </a:prstGeom>
+          <a:noFill/>
+        </p:spPr>
+        <p:txBody>
+          <a:bodyPr wrap="square" lIns="0" rIns="0" tIns="0" bIns="0" anchor="t">
+            <a:spAutoFit/>
+          </a:bodyPr>
+          <a:lstStyle/>
+          <a:p>
+            <a:pPr algn="l">
+              <a:lnSpc>
+                <a:spcPct val="100000"/>
+              </a:lnSpc>
+            </a:pPr>
+            <a:r>
+              <a:rPr sz="780" b="1">
+                <a:solidFill>
+                  <a:srgbClr val="1A1A1C"/>
+                </a:solidFill>
+                <a:latin typeface="微软雅黑"/>
+                <a:ea typeface="微软雅黑"/>
+                <a:cs typeface="微软雅黑"/>
+              </a:rPr>
+              <a:t>小包公智能合同起草</a:t>
+            </a:r>
+          </a:p>
+        </p:txBody>
+      </p:sp>
+      <p:sp>
+        <p:nvSpPr>
+          <p:cNvPr id="139" name="TextBox 138"/>
+          <p:cNvSpPr txBox="1"/>
+          <p:nvPr/>
+        </p:nvSpPr>
+        <p:spPr>
+          <a:xfrm>
+            <a:off x="8449056" y="4279392"/>
+            <a:ext cx="402336" cy="75438"/>
+          </a:xfrm>
+          <a:prstGeom prst="rect">
+            <a:avLst/>
+          </a:prstGeom>
+          <a:noFill/>
+        </p:spPr>
+        <p:txBody>
+          <a:bodyPr wrap="square" lIns="0" rIns="0" tIns="0" bIns="0" anchor="t">
+            <a:spAutoFit/>
+          </a:bodyPr>
+          <a:lstStyle/>
+          <a:p>
+            <a:pPr algn="r">
+              <a:lnSpc>
+                <a:spcPct val="100000"/>
+              </a:lnSpc>
+            </a:pPr>
+            <a:r>
+              <a:rPr sz="760" b="0">
+                <a:solidFill>
+                  <a:srgbClr val="5B616B"/>
+                </a:solidFill>
+                <a:latin typeface="微软雅黑"/>
+                <a:ea typeface="微软雅黑"/>
+                <a:cs typeface="微软雅黑"/>
+              </a:rPr>
+              <a:t>26,770</a:t>
+            </a:r>
+          </a:p>
+        </p:txBody>
+      </p:sp>
+      <p:sp>
+        <p:nvSpPr>
+          <p:cNvPr id="140" name="TextBox 139"/>
+          <p:cNvSpPr txBox="1"/>
+          <p:nvPr/>
+        </p:nvSpPr>
+        <p:spPr>
+          <a:xfrm>
+            <a:off x="6339840" y="4368546"/>
+            <a:ext cx="2499360" cy="68580"/>
+          </a:xfrm>
+          <a:prstGeom prst="rect">
+            <a:avLst/>
+          </a:prstGeom>
+          <a:noFill/>
+        </p:spPr>
+        <p:txBody>
+          <a:bodyPr wrap="square" lIns="0" rIns="0" tIns="0" bIns="0" anchor="t">
+            <a:spAutoFit/>
+          </a:bodyPr>
+          <a:lstStyle/>
+          <a:p>
+            <a:pPr algn="l">
+              <a:lnSpc>
+                <a:spcPct val="100000"/>
+              </a:lnSpc>
+            </a:pPr>
+            <a:r>
+              <a:rPr sz="700" b="0">
+                <a:solidFill>
+                  <a:srgbClr val="5B616B"/>
+                </a:solidFill>
+                <a:latin typeface="微软雅黑"/>
+                <a:ea typeface="微软雅黑"/>
+                <a:cs typeface="微软雅黑"/>
+              </a:rPr>
+              <a:t>xbgai123</a:t>
+            </a:r>
+          </a:p>
+        </p:txBody>
+      </p:sp>
+      <p:sp>
+        <p:nvSpPr>
+          <p:cNvPr id="141" name="TextBox 140"/>
+          <p:cNvSpPr txBox="1"/>
+          <p:nvPr/>
+        </p:nvSpPr>
+        <p:spPr>
+          <a:xfrm>
+            <a:off x="6156960" y="4533137"/>
+            <a:ext cx="170688" cy="75438"/>
+          </a:xfrm>
+          <a:prstGeom prst="rect">
+            <a:avLst/>
+          </a:prstGeom>
+          <a:noFill/>
+        </p:spPr>
+        <p:txBody>
+          <a:bodyPr wrap="square" lIns="0" rIns="0" tIns="0" bIns="0" anchor="t">
+            <a:spAutoFit/>
+          </a:bodyPr>
+          <a:lstStyle/>
+          <a:p>
+            <a:pPr algn="l">
+              <a:lnSpc>
+                <a:spcPct val="100000"/>
+              </a:lnSpc>
+            </a:pPr>
+            <a:r>
+              <a:rPr sz="760" b="1">
+                <a:solidFill>
+                  <a:srgbClr val="B5333B"/>
+                </a:solidFill>
+                <a:latin typeface="微软雅黑"/>
+                <a:ea typeface="微软雅黑"/>
+                <a:cs typeface="微软雅黑"/>
+              </a:rPr>
+              <a:t>3</a:t>
+            </a:r>
+          </a:p>
+        </p:txBody>
+      </p:sp>
+      <p:sp>
+        <p:nvSpPr>
+          <p:cNvPr id="142" name="TextBox 141"/>
+          <p:cNvSpPr txBox="1"/>
+          <p:nvPr/>
+        </p:nvSpPr>
+        <p:spPr>
+          <a:xfrm>
+            <a:off x="6339840" y="4533137"/>
+            <a:ext cx="2121408" cy="75438"/>
+          </a:xfrm>
+          <a:prstGeom prst="rect">
+            <a:avLst/>
+          </a:prstGeom>
+          <a:noFill/>
+        </p:spPr>
+        <p:txBody>
+          <a:bodyPr wrap="square" lIns="0" rIns="0" tIns="0" bIns="0" anchor="t">
+            <a:spAutoFit/>
+          </a:bodyPr>
+          <a:lstStyle/>
+          <a:p>
+            <a:pPr algn="l">
+              <a:lnSpc>
+                <a:spcPct val="100000"/>
+              </a:lnSpc>
+            </a:pPr>
+            <a:r>
+              <a:rPr sz="780" b="1">
+                <a:solidFill>
+                  <a:srgbClr val="1A1A1C"/>
+                </a:solidFill>
+                <a:latin typeface="微软雅黑"/>
+                <a:ea typeface="微软雅黑"/>
+                <a:cs typeface="微软雅黑"/>
+              </a:rPr>
+              <a:t>小包公智能合同审查</a:t>
+            </a:r>
+          </a:p>
+        </p:txBody>
+      </p:sp>
+      <p:sp>
+        <p:nvSpPr>
+          <p:cNvPr id="143" name="TextBox 142"/>
+          <p:cNvSpPr txBox="1"/>
+          <p:nvPr/>
+        </p:nvSpPr>
+        <p:spPr>
+          <a:xfrm>
+            <a:off x="8449056" y="4533137"/>
+            <a:ext cx="402336" cy="75438"/>
+          </a:xfrm>
+          <a:prstGeom prst="rect">
+            <a:avLst/>
+          </a:prstGeom>
+          <a:noFill/>
+        </p:spPr>
+        <p:txBody>
+          <a:bodyPr wrap="square" lIns="0" rIns="0" tIns="0" bIns="0" anchor="t">
+            <a:spAutoFit/>
+          </a:bodyPr>
+          <a:lstStyle/>
+          <a:p>
+            <a:pPr algn="r">
+              <a:lnSpc>
+                <a:spcPct val="100000"/>
+              </a:lnSpc>
+            </a:pPr>
+            <a:r>
+              <a:rPr sz="760" b="0">
+                <a:solidFill>
+                  <a:srgbClr val="5B616B"/>
+                </a:solidFill>
+                <a:latin typeface="微软雅黑"/>
+                <a:ea typeface="微软雅黑"/>
+                <a:cs typeface="微软雅黑"/>
+              </a:rPr>
+              <a:t>10,637</a:t>
+            </a:r>
+          </a:p>
+        </p:txBody>
+      </p:sp>
+      <p:sp>
+        <p:nvSpPr>
+          <p:cNvPr id="144" name="TextBox 143"/>
+          <p:cNvSpPr txBox="1"/>
+          <p:nvPr/>
+        </p:nvSpPr>
+        <p:spPr>
+          <a:xfrm>
+            <a:off x="6339840" y="4622292"/>
+            <a:ext cx="2499360" cy="68580"/>
+          </a:xfrm>
+          <a:prstGeom prst="rect">
+            <a:avLst/>
+          </a:prstGeom>
+          <a:noFill/>
+        </p:spPr>
+        <p:txBody>
+          <a:bodyPr wrap="square" lIns="0" rIns="0" tIns="0" bIns="0" anchor="t">
+            <a:spAutoFit/>
+          </a:bodyPr>
+          <a:lstStyle/>
+          <a:p>
+            <a:pPr algn="l">
+              <a:lnSpc>
+                <a:spcPct val="100000"/>
+              </a:lnSpc>
+            </a:pPr>
+            <a:r>
+              <a:rPr sz="700" b="0">
+                <a:solidFill>
+                  <a:srgbClr val="5B616B"/>
+                </a:solidFill>
+                <a:latin typeface="微软雅黑"/>
+                <a:ea typeface="微软雅黑"/>
+                <a:cs typeface="微软雅黑"/>
+              </a:rPr>
+              <a:t>xbgai123</a:t>
+            </a:r>
+          </a:p>
+        </p:txBody>
+      </p:sp>
+      <p:sp>
+        <p:nvSpPr>
+          <p:cNvPr id="145" name="TextBox 144"/>
+          <p:cNvSpPr txBox="1"/>
+          <p:nvPr/>
+        </p:nvSpPr>
+        <p:spPr>
+          <a:xfrm>
+            <a:off x="6156960" y="4786884"/>
+            <a:ext cx="170688" cy="75438"/>
+          </a:xfrm>
+          <a:prstGeom prst="rect">
+            <a:avLst/>
+          </a:prstGeom>
+          <a:noFill/>
+        </p:spPr>
+        <p:txBody>
+          <a:bodyPr wrap="square" lIns="0" rIns="0" tIns="0" bIns="0" anchor="t">
+            <a:spAutoFit/>
+          </a:bodyPr>
+          <a:lstStyle/>
+          <a:p>
+            <a:pPr algn="l">
+              <a:lnSpc>
+                <a:spcPct val="100000"/>
+              </a:lnSpc>
+            </a:pPr>
+            <a:r>
+              <a:rPr sz="760" b="1">
+                <a:solidFill>
+                  <a:srgbClr val="B5333B"/>
+                </a:solidFill>
+                <a:latin typeface="微软雅黑"/>
+                <a:ea typeface="微软雅黑"/>
+                <a:cs typeface="微软雅黑"/>
+              </a:rPr>
+              <a:t>4</a:t>
+            </a:r>
+          </a:p>
+        </p:txBody>
+      </p:sp>
+      <p:sp>
+        <p:nvSpPr>
+          <p:cNvPr id="146" name="TextBox 145"/>
+          <p:cNvSpPr txBox="1"/>
+          <p:nvPr/>
+        </p:nvSpPr>
+        <p:spPr>
+          <a:xfrm>
+            <a:off x="6339840" y="4786884"/>
+            <a:ext cx="2121408" cy="75438"/>
+          </a:xfrm>
+          <a:prstGeom prst="rect">
+            <a:avLst/>
+          </a:prstGeom>
+          <a:noFill/>
+        </p:spPr>
+        <p:txBody>
+          <a:bodyPr wrap="square" lIns="0" rIns="0" tIns="0" bIns="0" anchor="t">
+            <a:spAutoFit/>
+          </a:bodyPr>
+          <a:lstStyle/>
+          <a:p>
+            <a:pPr algn="l">
+              <a:lnSpc>
+                <a:spcPct val="100000"/>
+              </a:lnSpc>
+            </a:pPr>
+            <a:r>
+              <a:rPr sz="780" b="1">
+                <a:solidFill>
+                  <a:srgbClr val="1A1A1C"/>
+                </a:solidFill>
+                <a:latin typeface="微软雅黑"/>
+                <a:ea typeface="微软雅黑"/>
+                <a:cs typeface="微软雅黑"/>
+              </a:rPr>
+              <a:t>小包公合同自动纠错工具</a:t>
+            </a:r>
+          </a:p>
+        </p:txBody>
+      </p:sp>
+      <p:sp>
+        <p:nvSpPr>
+          <p:cNvPr id="147" name="TextBox 146"/>
+          <p:cNvSpPr txBox="1"/>
+          <p:nvPr/>
+        </p:nvSpPr>
+        <p:spPr>
+          <a:xfrm>
+            <a:off x="8449056" y="4786884"/>
+            <a:ext cx="402336" cy="75438"/>
+          </a:xfrm>
+          <a:prstGeom prst="rect">
+            <a:avLst/>
+          </a:prstGeom>
+          <a:noFill/>
+        </p:spPr>
+        <p:txBody>
+          <a:bodyPr wrap="square" lIns="0" rIns="0" tIns="0" bIns="0" anchor="t">
+            <a:spAutoFit/>
+          </a:bodyPr>
+          <a:lstStyle/>
+          <a:p>
+            <a:pPr algn="r">
+              <a:lnSpc>
+                <a:spcPct val="100000"/>
+              </a:lnSpc>
+            </a:pPr>
+            <a:r>
+              <a:rPr sz="760" b="0">
+                <a:solidFill>
+                  <a:srgbClr val="5B616B"/>
+                </a:solidFill>
+                <a:latin typeface="微软雅黑"/>
+                <a:ea typeface="微软雅黑"/>
+                <a:cs typeface="微软雅黑"/>
+              </a:rPr>
+              <a:t>10,566</a:t>
+            </a:r>
+          </a:p>
+        </p:txBody>
+      </p:sp>
+      <p:sp>
+        <p:nvSpPr>
+          <p:cNvPr id="148" name="TextBox 147"/>
+          <p:cNvSpPr txBox="1"/>
+          <p:nvPr/>
+        </p:nvSpPr>
+        <p:spPr>
+          <a:xfrm>
+            <a:off x="6339840" y="4876038"/>
+            <a:ext cx="2499360" cy="68580"/>
+          </a:xfrm>
+          <a:prstGeom prst="rect">
+            <a:avLst/>
+          </a:prstGeom>
+          <a:noFill/>
+        </p:spPr>
+        <p:txBody>
+          <a:bodyPr wrap="square" lIns="0" rIns="0" tIns="0" bIns="0" anchor="t">
+            <a:spAutoFit/>
+          </a:bodyPr>
+          <a:lstStyle/>
+          <a:p>
+            <a:pPr algn="l">
+              <a:lnSpc>
+                <a:spcPct val="100000"/>
+              </a:lnSpc>
+            </a:pPr>
+            <a:r>
+              <a:rPr sz="700" b="0">
+                <a:solidFill>
+                  <a:srgbClr val="5B616B"/>
+                </a:solidFill>
+                <a:latin typeface="微软雅黑"/>
+                <a:ea typeface="微软雅黑"/>
+                <a:cs typeface="微软雅黑"/>
+              </a:rPr>
+              <a:t>xbgai123</a:t>
+            </a:r>
+          </a:p>
+        </p:txBody>
+      </p:sp>
+      <p:sp>
+        <p:nvSpPr>
+          <p:cNvPr id="149" name="TextBox 148"/>
+          <p:cNvSpPr txBox="1"/>
+          <p:nvPr/>
+        </p:nvSpPr>
+        <p:spPr>
+          <a:xfrm>
+            <a:off x="6156960" y="5040630"/>
+            <a:ext cx="170688" cy="75438"/>
+          </a:xfrm>
+          <a:prstGeom prst="rect">
+            <a:avLst/>
+          </a:prstGeom>
+          <a:noFill/>
+        </p:spPr>
+        <p:txBody>
+          <a:bodyPr wrap="square" lIns="0" rIns="0" tIns="0" bIns="0" anchor="t">
+            <a:spAutoFit/>
+          </a:bodyPr>
+          <a:lstStyle/>
+          <a:p>
+            <a:pPr algn="l">
+              <a:lnSpc>
+                <a:spcPct val="100000"/>
+              </a:lnSpc>
+            </a:pPr>
+            <a:r>
+              <a:rPr sz="760" b="1">
+                <a:solidFill>
+                  <a:srgbClr val="B5333B"/>
+                </a:solidFill>
+                <a:latin typeface="微软雅黑"/>
+                <a:ea typeface="微软雅黑"/>
+                <a:cs typeface="微软雅黑"/>
+              </a:rPr>
+              <a:t>5</a:t>
+            </a:r>
+          </a:p>
+        </p:txBody>
+      </p:sp>
+      <p:sp>
+        <p:nvSpPr>
+          <p:cNvPr id="150" name="TextBox 149"/>
+          <p:cNvSpPr txBox="1"/>
+          <p:nvPr/>
+        </p:nvSpPr>
+        <p:spPr>
+          <a:xfrm>
+            <a:off x="6339840" y="5040630"/>
+            <a:ext cx="2121408" cy="75438"/>
+          </a:xfrm>
+          <a:prstGeom prst="rect">
+            <a:avLst/>
+          </a:prstGeom>
+          <a:noFill/>
+        </p:spPr>
+        <p:txBody>
+          <a:bodyPr wrap="square" lIns="0" rIns="0" tIns="0" bIns="0" anchor="t">
+            <a:spAutoFit/>
+          </a:bodyPr>
+          <a:lstStyle/>
+          <a:p>
+            <a:pPr algn="l">
+              <a:lnSpc>
+                <a:spcPct val="100000"/>
+              </a:lnSpc>
+            </a:pPr>
+            <a:r>
+              <a:rPr sz="780" b="1">
+                <a:solidFill>
+                  <a:srgbClr val="1A1A1C"/>
+                </a:solidFill>
+                <a:latin typeface="微软雅黑"/>
+                <a:ea typeface="微软雅黑"/>
+                <a:cs typeface="微软雅黑"/>
+              </a:rPr>
+              <a:t>小包公合同自动排版工具</a:t>
+            </a:r>
+          </a:p>
+        </p:txBody>
+      </p:sp>
+      <p:sp>
+        <p:nvSpPr>
+          <p:cNvPr id="151" name="TextBox 150"/>
+          <p:cNvSpPr txBox="1"/>
+          <p:nvPr/>
+        </p:nvSpPr>
+        <p:spPr>
+          <a:xfrm>
+            <a:off x="8449056" y="5040630"/>
+            <a:ext cx="402336" cy="75438"/>
+          </a:xfrm>
+          <a:prstGeom prst="rect">
+            <a:avLst/>
+          </a:prstGeom>
+          <a:noFill/>
+        </p:spPr>
+        <p:txBody>
+          <a:bodyPr wrap="square" lIns="0" rIns="0" tIns="0" bIns="0" anchor="t">
+            <a:spAutoFit/>
+          </a:bodyPr>
+          <a:lstStyle/>
+          <a:p>
+            <a:pPr algn="r">
+              <a:lnSpc>
+                <a:spcPct val="100000"/>
+              </a:lnSpc>
+            </a:pPr>
+            <a:r>
+              <a:rPr sz="760" b="0">
+                <a:solidFill>
+                  <a:srgbClr val="5B616B"/>
+                </a:solidFill>
+                <a:latin typeface="微软雅黑"/>
+                <a:ea typeface="微软雅黑"/>
+                <a:cs typeface="微软雅黑"/>
+              </a:rPr>
+              <a:t>10,555</a:t>
+            </a:r>
+          </a:p>
+        </p:txBody>
+      </p:sp>
+      <p:sp>
+        <p:nvSpPr>
+          <p:cNvPr id="152" name="TextBox 151"/>
+          <p:cNvSpPr txBox="1"/>
+          <p:nvPr/>
+        </p:nvSpPr>
+        <p:spPr>
+          <a:xfrm>
+            <a:off x="6339840" y="5129784"/>
+            <a:ext cx="2499360" cy="68580"/>
+          </a:xfrm>
+          <a:prstGeom prst="rect">
+            <a:avLst/>
+          </a:prstGeom>
+          <a:noFill/>
+        </p:spPr>
+        <p:txBody>
+          <a:bodyPr wrap="square" lIns="0" rIns="0" tIns="0" bIns="0" anchor="t">
+            <a:spAutoFit/>
+          </a:bodyPr>
+          <a:lstStyle/>
+          <a:p>
+            <a:pPr algn="l">
+              <a:lnSpc>
+                <a:spcPct val="100000"/>
+              </a:lnSpc>
+            </a:pPr>
+            <a:r>
+              <a:rPr sz="700" b="0">
+                <a:solidFill>
+                  <a:srgbClr val="5B616B"/>
+                </a:solidFill>
+                <a:latin typeface="微软雅黑"/>
+                <a:ea typeface="微软雅黑"/>
+                <a:cs typeface="微软雅黑"/>
+              </a:rPr>
+              <a:t>xbgai123</a:t>
+            </a:r>
+          </a:p>
+        </p:txBody>
+      </p:sp>
+      <p:sp>
+        <p:nvSpPr>
+          <p:cNvPr id="153" name="TextBox 152"/>
+          <p:cNvSpPr txBox="1"/>
+          <p:nvPr/>
+        </p:nvSpPr>
+        <p:spPr>
+          <a:xfrm>
+            <a:off x="6156960" y="5294376"/>
+            <a:ext cx="170688" cy="75438"/>
+          </a:xfrm>
+          <a:prstGeom prst="rect">
+            <a:avLst/>
+          </a:prstGeom>
+          <a:noFill/>
+        </p:spPr>
+        <p:txBody>
+          <a:bodyPr wrap="square" lIns="0" rIns="0" tIns="0" bIns="0" anchor="t">
+            <a:spAutoFit/>
+          </a:bodyPr>
+          <a:lstStyle/>
+          <a:p>
+            <a:pPr algn="l">
+              <a:lnSpc>
+                <a:spcPct val="100000"/>
+              </a:lnSpc>
+            </a:pPr>
+            <a:r>
+              <a:rPr sz="760" b="1">
+                <a:solidFill>
+                  <a:srgbClr val="B5333B"/>
+                </a:solidFill>
+                <a:latin typeface="微软雅黑"/>
+                <a:ea typeface="微软雅黑"/>
+                <a:cs typeface="微软雅黑"/>
+              </a:rPr>
+              <a:t>6</a:t>
+            </a:r>
+          </a:p>
+        </p:txBody>
+      </p:sp>
+      <p:sp>
+        <p:nvSpPr>
+          <p:cNvPr id="154" name="TextBox 153"/>
+          <p:cNvSpPr txBox="1"/>
+          <p:nvPr/>
+        </p:nvSpPr>
+        <p:spPr>
+          <a:xfrm>
+            <a:off x="6339840" y="5294376"/>
+            <a:ext cx="2121408" cy="75438"/>
+          </a:xfrm>
+          <a:prstGeom prst="rect">
+            <a:avLst/>
+          </a:prstGeom>
+          <a:noFill/>
+        </p:spPr>
+        <p:txBody>
+          <a:bodyPr wrap="square" lIns="0" rIns="0" tIns="0" bIns="0" anchor="t">
+            <a:spAutoFit/>
+          </a:bodyPr>
+          <a:lstStyle/>
+          <a:p>
+            <a:pPr algn="l">
+              <a:lnSpc>
+                <a:spcPct val="100000"/>
+              </a:lnSpc>
+            </a:pPr>
+            <a:r>
+              <a:rPr sz="780" b="1">
+                <a:solidFill>
+                  <a:srgbClr val="1A1A1C"/>
+                </a:solidFill>
+                <a:latin typeface="微软雅黑"/>
+                <a:ea typeface="微软雅黑"/>
+                <a:cs typeface="微软雅黑"/>
+              </a:rPr>
+              <a:t>小包公合同风险评估工具</a:t>
+            </a:r>
+          </a:p>
+        </p:txBody>
+      </p:sp>
+      <p:sp>
+        <p:nvSpPr>
+          <p:cNvPr id="155" name="TextBox 154"/>
+          <p:cNvSpPr txBox="1"/>
+          <p:nvPr/>
+        </p:nvSpPr>
+        <p:spPr>
+          <a:xfrm>
+            <a:off x="8449056" y="5294376"/>
+            <a:ext cx="402336" cy="75438"/>
+          </a:xfrm>
+          <a:prstGeom prst="rect">
+            <a:avLst/>
+          </a:prstGeom>
+          <a:noFill/>
+        </p:spPr>
+        <p:txBody>
+          <a:bodyPr wrap="square" lIns="0" rIns="0" tIns="0" bIns="0" anchor="t">
+            <a:spAutoFit/>
+          </a:bodyPr>
+          <a:lstStyle/>
+          <a:p>
+            <a:pPr algn="r">
+              <a:lnSpc>
+                <a:spcPct val="100000"/>
+              </a:lnSpc>
+            </a:pPr>
+            <a:r>
+              <a:rPr sz="760" b="0">
+                <a:solidFill>
+                  <a:srgbClr val="5B616B"/>
+                </a:solidFill>
+                <a:latin typeface="微软雅黑"/>
+                <a:ea typeface="微软雅黑"/>
+                <a:cs typeface="微软雅黑"/>
+              </a:rPr>
+              <a:t>10,481</a:t>
+            </a:r>
+          </a:p>
+        </p:txBody>
+      </p:sp>
+      <p:sp>
+        <p:nvSpPr>
+          <p:cNvPr id="156" name="TextBox 155"/>
+          <p:cNvSpPr txBox="1"/>
+          <p:nvPr/>
+        </p:nvSpPr>
+        <p:spPr>
+          <a:xfrm>
+            <a:off x="6339840" y="5383530"/>
+            <a:ext cx="2499360" cy="68580"/>
+          </a:xfrm>
+          <a:prstGeom prst="rect">
+            <a:avLst/>
+          </a:prstGeom>
+          <a:noFill/>
+        </p:spPr>
+        <p:txBody>
+          <a:bodyPr wrap="square" lIns="0" rIns="0" tIns="0" bIns="0" anchor="t">
+            <a:spAutoFit/>
+          </a:bodyPr>
+          <a:lstStyle/>
+          <a:p>
+            <a:pPr algn="l">
+              <a:lnSpc>
+                <a:spcPct val="100000"/>
+              </a:lnSpc>
+            </a:pPr>
+            <a:r>
+              <a:rPr sz="700" b="0">
+                <a:solidFill>
+                  <a:srgbClr val="5B616B"/>
+                </a:solidFill>
+                <a:latin typeface="微软雅黑"/>
+                <a:ea typeface="微软雅黑"/>
+                <a:cs typeface="微软雅黑"/>
+              </a:rPr>
+              <a:t>xbgai123</a:t>
+            </a:r>
+          </a:p>
+        </p:txBody>
+      </p:sp>
+      <p:sp>
+        <p:nvSpPr>
+          <p:cNvPr id="157" name="TextBox 156"/>
+          <p:cNvSpPr txBox="1"/>
+          <p:nvPr/>
+        </p:nvSpPr>
+        <p:spPr>
+          <a:xfrm>
+            <a:off x="9022080" y="3909059"/>
+            <a:ext cx="2682240" cy="96012"/>
+          </a:xfrm>
+          <a:prstGeom prst="rect">
+            <a:avLst/>
+          </a:prstGeom>
+          <a:noFill/>
+        </p:spPr>
+        <p:txBody>
+          <a:bodyPr wrap="square" lIns="0" rIns="0" tIns="0" bIns="0" anchor="t">
+            <a:spAutoFit/>
+          </a:bodyPr>
+          <a:lstStyle/>
+          <a:p>
+            <a:pPr algn="l">
+              <a:lnSpc>
+                <a:spcPct val="100000"/>
+              </a:lnSpc>
+            </a:pPr>
+            <a:r>
               <a:rPr sz="860" b="1">
                 <a:solidFill>
-                  <a:srgbClr val="D98A8F"/>
-                </a:solidFill>
-                <a:latin typeface="微软雅黑"/>
-                <a:ea typeface="微软雅黑"/>
-                <a:cs typeface="微软雅黑"/>
-              </a:rPr>
-              <a:t>其他市场 Top6</a:t>
-            </a:r>
-          </a:p>
-        </p:txBody>
-      </p:sp>
-      <p:sp>
-        <p:nvSpPr>
-          <p:cNvPr id="108" name="Rectangle 107"/>
+                  <a:srgbClr val="8B8E94"/>
+                </a:solidFill>
+                <a:latin typeface="微软雅黑"/>
+                <a:ea typeface="微软雅黑"/>
+                <a:cs typeface="微软雅黑"/>
+              </a:rPr>
+              <a:t>个人上传 Top6</a:t>
+            </a:r>
+          </a:p>
+        </p:txBody>
+      </p:sp>
+      <p:sp>
+        <p:nvSpPr>
+          <p:cNvPr id="158" name="Rectangle 157"/>
           <p:cNvSpPr/>
           <p:nvPr/>
         </p:nvSpPr>
         <p:spPr>
           <a:xfrm>
-            <a:off x="6364224" y="4059935"/>
-            <a:ext cx="5254752" cy="5486"/>
+            <a:off x="9022080" y="4005071"/>
+            <a:ext cx="2682240" cy="5486"/>
           </a:xfrm>
           <a:prstGeom prst="rect">
             <a:avLst/>
@@ -36655,14 +38697,14 @@
       </p:sp>
       <p:sp>
         <p:nvSpPr>
-          <p:cNvPr id="109" name="TextBox 108"/>
-          <p:cNvSpPr txBox="1"/>
-          <p:nvPr/>
-        </p:nvSpPr>
-        <p:spPr>
-          <a:xfrm>
-            <a:off x="6364224" y="4087367"/>
-            <a:ext cx="170688" cy="68580"/>
+          <p:cNvPr id="159" name="TextBox 158"/>
+          <p:cNvSpPr txBox="1"/>
+          <p:nvPr/>
+        </p:nvSpPr>
+        <p:spPr>
+          <a:xfrm>
+            <a:off x="9022080" y="4025646"/>
+            <a:ext cx="170688" cy="75438"/>
           </a:xfrm>
           <a:prstGeom prst="rect">
             <a:avLst/>
@@ -36681,7 +38723,7 @@
               </a:lnSpc>
             </a:pPr>
             <a:r>
-              <a:rPr sz="720" b="1">
+              <a:rPr sz="760" b="1">
                 <a:solidFill>
                   <a:srgbClr val="B5333B"/>
                 </a:solidFill>
@@ -36696,14 +38738,14 @@
       </p:sp>
       <p:sp>
         <p:nvSpPr>
-          <p:cNvPr id="110" name="TextBox 109"/>
-          <p:cNvSpPr txBox="1"/>
-          <p:nvPr/>
-        </p:nvSpPr>
-        <p:spPr>
-          <a:xfrm>
-            <a:off x="6534912" y="4087367"/>
-            <a:ext cx="4084320" cy="68580"/>
+          <p:cNvPr id="160" name="TextBox 159"/>
+          <p:cNvSpPr txBox="1"/>
+          <p:nvPr/>
+        </p:nvSpPr>
+        <p:spPr>
+          <a:xfrm>
+            <a:off x="9204960" y="4025646"/>
+            <a:ext cx="2121408" cy="75438"/>
           </a:xfrm>
           <a:prstGeom prst="rect">
             <a:avLst/>
@@ -36722,7 +38764,7 @@
               </a:lnSpc>
             </a:pPr>
             <a:r>
-              <a:rPr sz="720" b="1">
+              <a:rPr sz="780" b="1">
                 <a:solidFill>
                   <a:srgbClr val="1A1A1C"/>
                 </a:solidFill>
@@ -36730,21 +38772,21 @@
                 <a:ea typeface="微软雅黑"/>
                 <a:cs typeface="微软雅黑"/>
               </a:rPr>
-              <a:t>mysteel-pricesearch</a:t>
-            </a:r>
-          </a:p>
-        </p:txBody>
-      </p:sp>
-      <p:sp>
-        <p:nvSpPr>
-          <p:cNvPr id="111" name="TextBox 110"/>
-          <p:cNvSpPr txBox="1"/>
-          <p:nvPr/>
-        </p:nvSpPr>
-        <p:spPr>
-          <a:xfrm>
-            <a:off x="10668000" y="4087367"/>
-            <a:ext cx="914400" cy="68580"/>
+              <a:t>床垫试睡权益顾问</a:t>
+            </a:r>
+          </a:p>
+        </p:txBody>
+      </p:sp>
+      <p:sp>
+        <p:nvSpPr>
+          <p:cNvPr id="161" name="TextBox 160"/>
+          <p:cNvSpPr txBox="1"/>
+          <p:nvPr/>
+        </p:nvSpPr>
+        <p:spPr>
+          <a:xfrm>
+            <a:off x="11314176" y="4025646"/>
+            <a:ext cx="402336" cy="75438"/>
           </a:xfrm>
           <a:prstGeom prst="rect">
             <a:avLst/>
@@ -36763,7 +38805,7 @@
               </a:lnSpc>
             </a:pPr>
             <a:r>
-              <a:rPr sz="700" b="0">
+              <a:rPr sz="760" b="0">
                 <a:solidFill>
                   <a:srgbClr val="5B616B"/>
                 </a:solidFill>
@@ -36771,21 +38813,21 @@
                 <a:ea typeface="微软雅黑"/>
                 <a:cs typeface="微软雅黑"/>
               </a:rPr>
-              <a:t>31,477</a:t>
-            </a:r>
-          </a:p>
-        </p:txBody>
-      </p:sp>
-      <p:sp>
-        <p:nvSpPr>
-          <p:cNvPr id="112" name="TextBox 111"/>
-          <p:cNvSpPr txBox="1"/>
-          <p:nvPr/>
-        </p:nvSpPr>
-        <p:spPr>
-          <a:xfrm>
-            <a:off x="6534912" y="4155947"/>
-            <a:ext cx="4876800" cy="61721"/>
+              <a:t>13,082</a:t>
+            </a:r>
+          </a:p>
+        </p:txBody>
+      </p:sp>
+      <p:sp>
+        <p:nvSpPr>
+          <p:cNvPr id="162" name="TextBox 161"/>
+          <p:cNvSpPr txBox="1"/>
+          <p:nvPr/>
+        </p:nvSpPr>
+        <p:spPr>
+          <a:xfrm>
+            <a:off x="9204960" y="4114800"/>
+            <a:ext cx="2499360" cy="68580"/>
           </a:xfrm>
           <a:prstGeom prst="rect">
             <a:avLst/>
@@ -36804,7 +38846,7 @@
               </a:lnSpc>
             </a:pPr>
             <a:r>
-              <a:rPr sz="630" b="0">
+              <a:rPr sz="700" b="0">
                 <a:solidFill>
                   <a:srgbClr val="5B616B"/>
                 </a:solidFill>
@@ -36812,21 +38854,21 @@
                 <a:ea typeface="微软雅黑"/>
                 <a:cs typeface="微软雅黑"/>
               </a:rPr>
-              <a:t>@wyb92</a:t>
-            </a:r>
-          </a:p>
-        </p:txBody>
-      </p:sp>
-      <p:sp>
-        <p:nvSpPr>
-          <p:cNvPr id="113" name="TextBox 112"/>
-          <p:cNvSpPr txBox="1"/>
-          <p:nvPr/>
-        </p:nvSpPr>
-        <p:spPr>
-          <a:xfrm>
-            <a:off x="6364224" y="4224528"/>
-            <a:ext cx="170688" cy="68580"/>
+              <a:t>alv123</a:t>
+            </a:r>
+          </a:p>
+        </p:txBody>
+      </p:sp>
+      <p:sp>
+        <p:nvSpPr>
+          <p:cNvPr id="163" name="TextBox 162"/>
+          <p:cNvSpPr txBox="1"/>
+          <p:nvPr/>
+        </p:nvSpPr>
+        <p:spPr>
+          <a:xfrm>
+            <a:off x="9022080" y="4279392"/>
+            <a:ext cx="170688" cy="75438"/>
           </a:xfrm>
           <a:prstGeom prst="rect">
             <a:avLst/>
@@ -36845,7 +38887,7 @@
               </a:lnSpc>
             </a:pPr>
             <a:r>
-              <a:rPr sz="720" b="1">
+              <a:rPr sz="760" b="1">
                 <a:solidFill>
                   <a:srgbClr val="B5333B"/>
                 </a:solidFill>
@@ -36860,14 +38902,14 @@
       </p:sp>
       <p:sp>
         <p:nvSpPr>
-          <p:cNvPr id="114" name="TextBox 113"/>
-          <p:cNvSpPr txBox="1"/>
-          <p:nvPr/>
-        </p:nvSpPr>
-        <p:spPr>
-          <a:xfrm>
-            <a:off x="6534912" y="4224528"/>
-            <a:ext cx="4084320" cy="68580"/>
+          <p:cNvPr id="164" name="TextBox 163"/>
+          <p:cNvSpPr txBox="1"/>
+          <p:nvPr/>
+        </p:nvSpPr>
+        <p:spPr>
+          <a:xfrm>
+            <a:off x="9204960" y="4279392"/>
+            <a:ext cx="2121408" cy="75438"/>
           </a:xfrm>
           <a:prstGeom prst="rect">
             <a:avLst/>
@@ -36886,7 +38928,7 @@
               </a:lnSpc>
             </a:pPr>
             <a:r>
-              <a:rPr sz="720" b="1">
+              <a:rPr sz="780" b="1">
                 <a:solidFill>
                   <a:srgbClr val="1A1A1C"/>
                 </a:solidFill>
@@ -36894,21 +38936,21 @@
                 <a:ea typeface="微软雅黑"/>
                 <a:cs typeface="微软雅黑"/>
               </a:rPr>
-              <a:t>weather（天气查询）</a:t>
-            </a:r>
-          </a:p>
-        </p:txBody>
-      </p:sp>
-      <p:sp>
-        <p:nvSpPr>
-          <p:cNvPr id="115" name="TextBox 114"/>
-          <p:cNvSpPr txBox="1"/>
-          <p:nvPr/>
-        </p:nvSpPr>
-        <p:spPr>
-          <a:xfrm>
-            <a:off x="10668000" y="4224528"/>
-            <a:ext cx="914400" cy="68580"/>
+              <a:t>新房低异味床垫顾问</a:t>
+            </a:r>
+          </a:p>
+        </p:txBody>
+      </p:sp>
+      <p:sp>
+        <p:nvSpPr>
+          <p:cNvPr id="165" name="TextBox 164"/>
+          <p:cNvSpPr txBox="1"/>
+          <p:nvPr/>
+        </p:nvSpPr>
+        <p:spPr>
+          <a:xfrm>
+            <a:off x="11314176" y="4279392"/>
+            <a:ext cx="402336" cy="75438"/>
           </a:xfrm>
           <a:prstGeom prst="rect">
             <a:avLst/>
@@ -36927,7 +38969,7 @@
               </a:lnSpc>
             </a:pPr>
             <a:r>
-              <a:rPr sz="700" b="0">
+              <a:rPr sz="760" b="0">
                 <a:solidFill>
                   <a:srgbClr val="5B616B"/>
                 </a:solidFill>
@@ -36935,21 +38977,21 @@
                 <a:ea typeface="微软雅黑"/>
                 <a:cs typeface="微软雅黑"/>
               </a:rPr>
-              <a:t>5,818</a:t>
-            </a:r>
-          </a:p>
-        </p:txBody>
-      </p:sp>
-      <p:sp>
-        <p:nvSpPr>
-          <p:cNvPr id="116" name="TextBox 115"/>
-          <p:cNvSpPr txBox="1"/>
-          <p:nvPr/>
-        </p:nvSpPr>
-        <p:spPr>
-          <a:xfrm>
-            <a:off x="6534912" y="4293108"/>
-            <a:ext cx="4876800" cy="61721"/>
+              <a:t>12,583</a:t>
+            </a:r>
+          </a:p>
+        </p:txBody>
+      </p:sp>
+      <p:sp>
+        <p:nvSpPr>
+          <p:cNvPr id="166" name="TextBox 165"/>
+          <p:cNvSpPr txBox="1"/>
+          <p:nvPr/>
+        </p:nvSpPr>
+        <p:spPr>
+          <a:xfrm>
+            <a:off x="9204960" y="4368546"/>
+            <a:ext cx="2499360" cy="68580"/>
           </a:xfrm>
           <a:prstGeom prst="rect">
             <a:avLst/>
@@ -36968,7 +39010,7 @@
               </a:lnSpc>
             </a:pPr>
             <a:r>
-              <a:rPr sz="630" b="0">
+              <a:rPr sz="700" b="0">
                 <a:solidFill>
                   <a:srgbClr val="5B616B"/>
                 </a:solidFill>
@@ -36976,21 +39018,21 @@
                 <a:ea typeface="微软雅黑"/>
                 <a:cs typeface="微软雅黑"/>
               </a:rPr>
-              <a:t>@steipete</a:t>
-            </a:r>
-          </a:p>
-        </p:txBody>
-      </p:sp>
-      <p:sp>
-        <p:nvSpPr>
-          <p:cNvPr id="117" name="TextBox 116"/>
-          <p:cNvSpPr txBox="1"/>
-          <p:nvPr/>
-        </p:nvSpPr>
-        <p:spPr>
-          <a:xfrm>
-            <a:off x="6364224" y="4361688"/>
-            <a:ext cx="170688" cy="68580"/>
+              <a:t>alv123</a:t>
+            </a:r>
+          </a:p>
+        </p:txBody>
+      </p:sp>
+      <p:sp>
+        <p:nvSpPr>
+          <p:cNvPr id="167" name="TextBox 166"/>
+          <p:cNvSpPr txBox="1"/>
+          <p:nvPr/>
+        </p:nvSpPr>
+        <p:spPr>
+          <a:xfrm>
+            <a:off x="9022080" y="4533137"/>
+            <a:ext cx="170688" cy="75438"/>
           </a:xfrm>
           <a:prstGeom prst="rect">
             <a:avLst/>
@@ -37009,7 +39051,7 @@
               </a:lnSpc>
             </a:pPr>
             <a:r>
-              <a:rPr sz="720" b="1">
+              <a:rPr sz="760" b="1">
                 <a:solidFill>
                   <a:srgbClr val="B5333B"/>
                 </a:solidFill>
@@ -37024,14 +39066,14 @@
       </p:sp>
       <p:sp>
         <p:nvSpPr>
-          <p:cNvPr id="118" name="TextBox 117"/>
-          <p:cNvSpPr txBox="1"/>
-          <p:nvPr/>
-        </p:nvSpPr>
-        <p:spPr>
-          <a:xfrm>
-            <a:off x="6534912" y="4361688"/>
-            <a:ext cx="4084320" cy="68580"/>
+          <p:cNvPr id="168" name="TextBox 167"/>
+          <p:cNvSpPr txBox="1"/>
+          <p:nvPr/>
+        </p:nvSpPr>
+        <p:spPr>
+          <a:xfrm>
+            <a:off x="9204960" y="4533137"/>
+            <a:ext cx="2121408" cy="75438"/>
           </a:xfrm>
           <a:prstGeom prst="rect">
             <a:avLst/>
@@ -37050,7 +39092,7 @@
               </a:lnSpc>
             </a:pPr>
             <a:r>
-              <a:rPr sz="720" b="1">
+              <a:rPr sz="780" b="1">
                 <a:solidFill>
                   <a:srgbClr val="1A1A1C"/>
                 </a:solidFill>
@@ -37058,21 +39100,21 @@
                 <a:ea typeface="微软雅黑"/>
                 <a:cs typeface="微软雅黑"/>
               </a:rPr>
-              <a:t>summarize</a:t>
-            </a:r>
-          </a:p>
-        </p:txBody>
-      </p:sp>
-      <p:sp>
-        <p:nvSpPr>
-          <p:cNvPr id="119" name="TextBox 118"/>
-          <p:cNvSpPr txBox="1"/>
-          <p:nvPr/>
-        </p:nvSpPr>
-        <p:spPr>
-          <a:xfrm>
-            <a:off x="10668000" y="4361688"/>
-            <a:ext cx="914400" cy="68580"/>
+              <a:t>招标中标数据查询API，标讯日更新30万+</a:t>
+            </a:r>
+          </a:p>
+        </p:txBody>
+      </p:sp>
+      <p:sp>
+        <p:nvSpPr>
+          <p:cNvPr id="169" name="TextBox 168"/>
+          <p:cNvSpPr txBox="1"/>
+          <p:nvPr/>
+        </p:nvSpPr>
+        <p:spPr>
+          <a:xfrm>
+            <a:off x="11314176" y="4533137"/>
+            <a:ext cx="402336" cy="75438"/>
           </a:xfrm>
           <a:prstGeom prst="rect">
             <a:avLst/>
@@ -37091,7 +39133,7 @@
               </a:lnSpc>
             </a:pPr>
             <a:r>
-              <a:rPr sz="700" b="0">
+              <a:rPr sz="760" b="0">
                 <a:solidFill>
                   <a:srgbClr val="5B616B"/>
                 </a:solidFill>
@@ -37099,21 +39141,21 @@
                 <a:ea typeface="微软雅黑"/>
                 <a:cs typeface="微软雅黑"/>
               </a:rPr>
-              <a:t>3,844</a:t>
-            </a:r>
-          </a:p>
-        </p:txBody>
-      </p:sp>
-      <p:sp>
-        <p:nvSpPr>
-          <p:cNvPr id="120" name="TextBox 119"/>
-          <p:cNvSpPr txBox="1"/>
-          <p:nvPr/>
-        </p:nvSpPr>
-        <p:spPr>
-          <a:xfrm>
-            <a:off x="6534912" y="4430268"/>
-            <a:ext cx="4876800" cy="61721"/>
+              <a:t>11,312</a:t>
+            </a:r>
+          </a:p>
+        </p:txBody>
+      </p:sp>
+      <p:sp>
+        <p:nvSpPr>
+          <p:cNvPr id="170" name="TextBox 169"/>
+          <p:cNvSpPr txBox="1"/>
+          <p:nvPr/>
+        </p:nvSpPr>
+        <p:spPr>
+          <a:xfrm>
+            <a:off x="9204960" y="4622292"/>
+            <a:ext cx="2499360" cy="68580"/>
           </a:xfrm>
           <a:prstGeom prst="rect">
             <a:avLst/>
@@ -37132,7 +39174,7 @@
               </a:lnSpc>
             </a:pPr>
             <a:r>
-              <a:rPr sz="630" b="0">
+              <a:rPr sz="700" b="0">
                 <a:solidFill>
                   <a:srgbClr val="5B616B"/>
                 </a:solidFill>
@@ -37140,21 +39182,21 @@
                 <a:ea typeface="微软雅黑"/>
                 <a:cs typeface="微软雅黑"/>
               </a:rPr>
-              <a:t>@steipete</a:t>
-            </a:r>
-          </a:p>
-        </p:txBody>
-      </p:sp>
-      <p:sp>
-        <p:nvSpPr>
-          <p:cNvPr id="121" name="TextBox 120"/>
-          <p:cNvSpPr txBox="1"/>
-          <p:nvPr/>
-        </p:nvSpPr>
-        <p:spPr>
-          <a:xfrm>
-            <a:off x="6364224" y="4498848"/>
-            <a:ext cx="170688" cy="68580"/>
+              <a:t>tingting0980</a:t>
+            </a:r>
+          </a:p>
+        </p:txBody>
+      </p:sp>
+      <p:sp>
+        <p:nvSpPr>
+          <p:cNvPr id="171" name="TextBox 170"/>
+          <p:cNvSpPr txBox="1"/>
+          <p:nvPr/>
+        </p:nvSpPr>
+        <p:spPr>
+          <a:xfrm>
+            <a:off x="9022080" y="4786884"/>
+            <a:ext cx="170688" cy="75438"/>
           </a:xfrm>
           <a:prstGeom prst="rect">
             <a:avLst/>
@@ -37173,7 +39215,7 @@
               </a:lnSpc>
             </a:pPr>
             <a:r>
-              <a:rPr sz="720" b="1">
+              <a:rPr sz="760" b="1">
                 <a:solidFill>
                   <a:srgbClr val="B5333B"/>
                 </a:solidFill>
@@ -37188,14 +39230,14 @@
       </p:sp>
       <p:sp>
         <p:nvSpPr>
-          <p:cNvPr id="122" name="TextBox 121"/>
-          <p:cNvSpPr txBox="1"/>
-          <p:nvPr/>
-        </p:nvSpPr>
-        <p:spPr>
-          <a:xfrm>
-            <a:off x="6534912" y="4498848"/>
-            <a:ext cx="4084320" cy="68580"/>
+          <p:cNvPr id="172" name="TextBox 171"/>
+          <p:cNvSpPr txBox="1"/>
+          <p:nvPr/>
+        </p:nvSpPr>
+        <p:spPr>
+          <a:xfrm>
+            <a:off x="9204960" y="4786884"/>
+            <a:ext cx="2121408" cy="75438"/>
           </a:xfrm>
           <a:prstGeom prst="rect">
             <a:avLst/>
@@ -37214,7 +39256,7 @@
               </a:lnSpc>
             </a:pPr>
             <a:r>
-              <a:rPr sz="720" b="1">
+              <a:rPr sz="780" b="1">
                 <a:solidFill>
                   <a:srgbClr val="1A1A1C"/>
                 </a:solidFill>
@@ -37222,21 +39264,21 @@
                 <a:ea typeface="微软雅黑"/>
                 <a:cs typeface="微软雅黑"/>
               </a:rPr>
-              <a:t>skill-vetter（Skill Vetter 安全扫描）</a:t>
-            </a:r>
-          </a:p>
-        </p:txBody>
-      </p:sp>
-      <p:sp>
-        <p:nvSpPr>
-          <p:cNvPr id="123" name="TextBox 122"/>
-          <p:cNvSpPr txBox="1"/>
-          <p:nvPr/>
-        </p:nvSpPr>
-        <p:spPr>
-          <a:xfrm>
-            <a:off x="10668000" y="4498848"/>
-            <a:ext cx="914400" cy="68580"/>
+              <a:t>3000档床垫预算顾问</a:t>
+            </a:r>
+          </a:p>
+        </p:txBody>
+      </p:sp>
+      <p:sp>
+        <p:nvSpPr>
+          <p:cNvPr id="173" name="TextBox 172"/>
+          <p:cNvSpPr txBox="1"/>
+          <p:nvPr/>
+        </p:nvSpPr>
+        <p:spPr>
+          <a:xfrm>
+            <a:off x="11314176" y="4786884"/>
+            <a:ext cx="402336" cy="75438"/>
           </a:xfrm>
           <a:prstGeom prst="rect">
             <a:avLst/>
@@ -37255,7 +39297,7 @@
               </a:lnSpc>
             </a:pPr>
             <a:r>
-              <a:rPr sz="700" b="0">
+              <a:rPr sz="760" b="0">
                 <a:solidFill>
                   <a:srgbClr val="5B616B"/>
                 </a:solidFill>
@@ -37263,21 +39305,21 @@
                 <a:ea typeface="微软雅黑"/>
                 <a:cs typeface="微软雅黑"/>
               </a:rPr>
-              <a:t>3,781</a:t>
-            </a:r>
-          </a:p>
-        </p:txBody>
-      </p:sp>
-      <p:sp>
-        <p:nvSpPr>
-          <p:cNvPr id="124" name="TextBox 123"/>
-          <p:cNvSpPr txBox="1"/>
-          <p:nvPr/>
-        </p:nvSpPr>
-        <p:spPr>
-          <a:xfrm>
-            <a:off x="6534912" y="4567428"/>
-            <a:ext cx="4876800" cy="61721"/>
+              <a:t>11,273</a:t>
+            </a:r>
+          </a:p>
+        </p:txBody>
+      </p:sp>
+      <p:sp>
+        <p:nvSpPr>
+          <p:cNvPr id="174" name="TextBox 173"/>
+          <p:cNvSpPr txBox="1"/>
+          <p:nvPr/>
+        </p:nvSpPr>
+        <p:spPr>
+          <a:xfrm>
+            <a:off x="9204960" y="4876038"/>
+            <a:ext cx="2499360" cy="68580"/>
           </a:xfrm>
           <a:prstGeom prst="rect">
             <a:avLst/>
@@ -37296,7 +39338,7 @@
               </a:lnSpc>
             </a:pPr>
             <a:r>
-              <a:rPr sz="630" b="0">
+              <a:rPr sz="700" b="0">
                 <a:solidFill>
                   <a:srgbClr val="5B616B"/>
                 </a:solidFill>
@@ -37304,21 +39346,21 @@
                 <a:ea typeface="微软雅黑"/>
                 <a:cs typeface="微软雅黑"/>
               </a:rPr>
-              <a:t>@spclaudehome</a:t>
-            </a:r>
-          </a:p>
-        </p:txBody>
-      </p:sp>
-      <p:sp>
-        <p:nvSpPr>
-          <p:cNvPr id="125" name="TextBox 124"/>
-          <p:cNvSpPr txBox="1"/>
-          <p:nvPr/>
-        </p:nvSpPr>
-        <p:spPr>
-          <a:xfrm>
-            <a:off x="6364224" y="4636008"/>
-            <a:ext cx="170688" cy="68580"/>
+              <a:t>alv123</a:t>
+            </a:r>
+          </a:p>
+        </p:txBody>
+      </p:sp>
+      <p:sp>
+        <p:nvSpPr>
+          <p:cNvPr id="175" name="TextBox 174"/>
+          <p:cNvSpPr txBox="1"/>
+          <p:nvPr/>
+        </p:nvSpPr>
+        <p:spPr>
+          <a:xfrm>
+            <a:off x="9022080" y="5040630"/>
+            <a:ext cx="170688" cy="75438"/>
           </a:xfrm>
           <a:prstGeom prst="rect">
             <a:avLst/>
@@ -37337,7 +39379,7 @@
               </a:lnSpc>
             </a:pPr>
             <a:r>
-              <a:rPr sz="720" b="1">
+              <a:rPr sz="760" b="1">
                 <a:solidFill>
                   <a:srgbClr val="B5333B"/>
                 </a:solidFill>
@@ -37352,14 +39394,14 @@
       </p:sp>
       <p:sp>
         <p:nvSpPr>
-          <p:cNvPr id="126" name="TextBox 125"/>
-          <p:cNvSpPr txBox="1"/>
-          <p:nvPr/>
-        </p:nvSpPr>
-        <p:spPr>
-          <a:xfrm>
-            <a:off x="6534912" y="4636008"/>
-            <a:ext cx="4084320" cy="68580"/>
+          <p:cNvPr id="176" name="TextBox 175"/>
+          <p:cNvSpPr txBox="1"/>
+          <p:nvPr/>
+        </p:nvSpPr>
+        <p:spPr>
+          <a:xfrm>
+            <a:off x="9204960" y="5040630"/>
+            <a:ext cx="2121408" cy="75438"/>
           </a:xfrm>
           <a:prstGeom prst="rect">
             <a:avLst/>
@@ -37378,7 +39420,7 @@
               </a:lnSpc>
             </a:pPr>
             <a:r>
-              <a:rPr sz="720" b="1">
+              <a:rPr sz="780" b="1">
                 <a:solidFill>
                   <a:srgbClr val="1A1A1C"/>
                 </a:solidFill>
@@ -37386,21 +39428,21 @@
                 <a:ea typeface="微软雅黑"/>
                 <a:cs typeface="微软雅黑"/>
               </a:rPr>
-              <a:t>github</a:t>
-            </a:r>
-          </a:p>
-        </p:txBody>
-      </p:sp>
-      <p:sp>
-        <p:nvSpPr>
-          <p:cNvPr id="127" name="TextBox 126"/>
-          <p:cNvSpPr txBox="1"/>
-          <p:nvPr/>
-        </p:nvSpPr>
-        <p:spPr>
-          <a:xfrm>
-            <a:off x="10668000" y="4636008"/>
-            <a:ext cx="914400" cy="68580"/>
+              <a:t>企业画像与上下游关系分析</a:t>
+            </a:r>
+          </a:p>
+        </p:txBody>
+      </p:sp>
+      <p:sp>
+        <p:nvSpPr>
+          <p:cNvPr id="177" name="TextBox 176"/>
+          <p:cNvSpPr txBox="1"/>
+          <p:nvPr/>
+        </p:nvSpPr>
+        <p:spPr>
+          <a:xfrm>
+            <a:off x="11314176" y="5040630"/>
+            <a:ext cx="402336" cy="75438"/>
           </a:xfrm>
           <a:prstGeom prst="rect">
             <a:avLst/>
@@ -37419,7 +39461,7 @@
               </a:lnSpc>
             </a:pPr>
             <a:r>
-              <a:rPr sz="700" b="0">
+              <a:rPr sz="760" b="0">
                 <a:solidFill>
                   <a:srgbClr val="5B616B"/>
                 </a:solidFill>
@@ -37427,21 +39469,21 @@
                 <a:ea typeface="微软雅黑"/>
                 <a:cs typeface="微软雅黑"/>
               </a:rPr>
-              <a:t>2,666</a:t>
-            </a:r>
-          </a:p>
-        </p:txBody>
-      </p:sp>
-      <p:sp>
-        <p:nvSpPr>
-          <p:cNvPr id="128" name="TextBox 127"/>
-          <p:cNvSpPr txBox="1"/>
-          <p:nvPr/>
-        </p:nvSpPr>
-        <p:spPr>
-          <a:xfrm>
-            <a:off x="6534912" y="4704588"/>
-            <a:ext cx="4876800" cy="61721"/>
+              <a:t>10,207</a:t>
+            </a:r>
+          </a:p>
+        </p:txBody>
+      </p:sp>
+      <p:sp>
+        <p:nvSpPr>
+          <p:cNvPr id="178" name="TextBox 177"/>
+          <p:cNvSpPr txBox="1"/>
+          <p:nvPr/>
+        </p:nvSpPr>
+        <p:spPr>
+          <a:xfrm>
+            <a:off x="9204960" y="5129784"/>
+            <a:ext cx="2499360" cy="68580"/>
           </a:xfrm>
           <a:prstGeom prst="rect">
             <a:avLst/>
@@ -37460,7 +39502,7 @@
               </a:lnSpc>
             </a:pPr>
             <a:r>
-              <a:rPr sz="630" b="0">
+              <a:rPr sz="700" b="0">
                 <a:solidFill>
                   <a:srgbClr val="5B616B"/>
                 </a:solidFill>
@@ -37468,21 +39510,21 @@
                 <a:ea typeface="微软雅黑"/>
                 <a:cs typeface="微软雅黑"/>
               </a:rPr>
-              <a:t>@steipete</a:t>
-            </a:r>
-          </a:p>
-        </p:txBody>
-      </p:sp>
-      <p:sp>
-        <p:nvSpPr>
-          <p:cNvPr id="129" name="TextBox 128"/>
-          <p:cNvSpPr txBox="1"/>
-          <p:nvPr/>
-        </p:nvSpPr>
-        <p:spPr>
-          <a:xfrm>
-            <a:off x="6364224" y="4773168"/>
-            <a:ext cx="170688" cy="68580"/>
+              <a:t>tingting0980</a:t>
+            </a:r>
+          </a:p>
+        </p:txBody>
+      </p:sp>
+      <p:sp>
+        <p:nvSpPr>
+          <p:cNvPr id="179" name="TextBox 178"/>
+          <p:cNvSpPr txBox="1"/>
+          <p:nvPr/>
+        </p:nvSpPr>
+        <p:spPr>
+          <a:xfrm>
+            <a:off x="9022080" y="5294376"/>
+            <a:ext cx="170688" cy="75438"/>
           </a:xfrm>
           <a:prstGeom prst="rect">
             <a:avLst/>
@@ -37501,7 +39543,7 @@
               </a:lnSpc>
             </a:pPr>
             <a:r>
-              <a:rPr sz="720" b="1">
+              <a:rPr sz="760" b="1">
                 <a:solidFill>
                   <a:srgbClr val="B5333B"/>
                 </a:solidFill>
@@ -37516,14 +39558,14 @@
       </p:sp>
       <p:sp>
         <p:nvSpPr>
-          <p:cNvPr id="130" name="TextBox 129"/>
-          <p:cNvSpPr txBox="1"/>
-          <p:nvPr/>
-        </p:nvSpPr>
-        <p:spPr>
-          <a:xfrm>
-            <a:off x="6534912" y="4773168"/>
-            <a:ext cx="4084320" cy="68580"/>
+          <p:cNvPr id="180" name="TextBox 179"/>
+          <p:cNvSpPr txBox="1"/>
+          <p:nvPr/>
+        </p:nvSpPr>
+        <p:spPr>
+          <a:xfrm>
+            <a:off x="9204960" y="5294376"/>
+            <a:ext cx="2121408" cy="75438"/>
           </a:xfrm>
           <a:prstGeom prst="rect">
             <a:avLst/>
@@ -37542,7 +39584,7 @@
               </a:lnSpc>
             </a:pPr>
             <a:r>
-              <a:rPr sz="720" b="1">
+              <a:rPr sz="780" b="1">
                 <a:solidFill>
                   <a:srgbClr val="1A1A1C"/>
                 </a:solidFill>
@@ -37550,21 +39592,21 @@
                 <a:ea typeface="微软雅黑"/>
                 <a:cs typeface="微软雅黑"/>
               </a:rPr>
-              <a:t>amap-jsapi-skill</a:t>
-            </a:r>
-          </a:p>
-        </p:txBody>
-      </p:sp>
-      <p:sp>
-        <p:nvSpPr>
-          <p:cNvPr id="131" name="TextBox 130"/>
-          <p:cNvSpPr txBox="1"/>
-          <p:nvPr/>
-        </p:nvSpPr>
-        <p:spPr>
-          <a:xfrm>
-            <a:off x="10668000" y="4773168"/>
-            <a:ext cx="914400" cy="68580"/>
+              <a:t>拟在建项目与招投标前置商机挖掘</a:t>
+            </a:r>
+          </a:p>
+        </p:txBody>
+      </p:sp>
+      <p:sp>
+        <p:nvSpPr>
+          <p:cNvPr id="181" name="TextBox 180"/>
+          <p:cNvSpPr txBox="1"/>
+          <p:nvPr/>
+        </p:nvSpPr>
+        <p:spPr>
+          <a:xfrm>
+            <a:off x="11314176" y="5294376"/>
+            <a:ext cx="402336" cy="75438"/>
           </a:xfrm>
           <a:prstGeom prst="rect">
             <a:avLst/>
@@ -37583,7 +39625,7 @@
               </a:lnSpc>
             </a:pPr>
             <a:r>
-              <a:rPr sz="700" b="0">
+              <a:rPr sz="760" b="0">
                 <a:solidFill>
                   <a:srgbClr val="5B616B"/>
                 </a:solidFill>
@@ -37591,21 +39633,21 @@
                 <a:ea typeface="微软雅黑"/>
                 <a:cs typeface="微软雅黑"/>
               </a:rPr>
-              <a:t>2,344</a:t>
-            </a:r>
-          </a:p>
-        </p:txBody>
-      </p:sp>
-      <p:sp>
-        <p:nvSpPr>
-          <p:cNvPr id="132" name="TextBox 131"/>
-          <p:cNvSpPr txBox="1"/>
-          <p:nvPr/>
-        </p:nvSpPr>
-        <p:spPr>
-          <a:xfrm>
-            <a:off x="6534912" y="4841748"/>
-            <a:ext cx="4876800" cy="61721"/>
+              <a:t>10,200</a:t>
+            </a:r>
+          </a:p>
+        </p:txBody>
+      </p:sp>
+      <p:sp>
+        <p:nvSpPr>
+          <p:cNvPr id="182" name="TextBox 181"/>
+          <p:cNvSpPr txBox="1"/>
+          <p:nvPr/>
+        </p:nvSpPr>
+        <p:spPr>
+          <a:xfrm>
+            <a:off x="9204960" y="5383530"/>
+            <a:ext cx="2499360" cy="68580"/>
           </a:xfrm>
           <a:prstGeom prst="rect">
             <a:avLst/>
@@ -37624,7 +39666,7 @@
               </a:lnSpc>
             </a:pPr>
             <a:r>
-              <a:rPr sz="630" b="0">
+              <a:rPr sz="700" b="0">
                 <a:solidFill>
                   <a:srgbClr val="5B616B"/>
                 </a:solidFill>
@@ -37632,1748 +39674,6 @@
                 <a:ea typeface="微软雅黑"/>
                 <a:cs typeface="微软雅黑"/>
               </a:rPr>
-              <a:t>@lbs-amap</a:t>
-            </a:r>
-          </a:p>
-        </p:txBody>
-      </p:sp>
-      <p:sp>
-        <p:nvSpPr>
-          <p:cNvPr id="133" name="Rounded Rectangle 132"/>
-          <p:cNvSpPr/>
-          <p:nvPr/>
-        </p:nvSpPr>
-        <p:spPr>
-          <a:xfrm>
-            <a:off x="426720" y="4937760"/>
-            <a:ext cx="5547360" cy="1014984"/>
-          </a:xfrm>
-          <a:prstGeom prst="roundRect">
-            <a:avLst>
-              <a:gd name="adj" fmla="val 2000"/>
-            </a:avLst>
-          </a:prstGeom>
-          <a:solidFill>
-            <a:srgbClr val="FFFFFF"/>
-          </a:solidFill>
-          <a:ln w="9525">
-            <a:solidFill>
-              <a:srgbClr val="E2E4E7"/>
-            </a:solidFill>
-          </a:ln>
-          <a:effectLst/>
-        </p:spPr>
-        <p:style>
-          <a:lnRef idx="1">
-            <a:schemeClr val="accent1"/>
-          </a:lnRef>
-          <a:fillRef idx="3">
-            <a:schemeClr val="accent1"/>
-          </a:fillRef>
-          <a:effectRef idx="2">
-            <a:schemeClr val="accent1"/>
-          </a:effectRef>
-          <a:fontRef idx="minor">
-            <a:schemeClr val="lt1"/>
-          </a:fontRef>
-        </p:style>
-        <p:txBody>
-          <a:bodyPr rtlCol="0" anchor="ctr"/>
-          <a:lstStyle/>
-          <a:p>
-            <a:pPr algn="ctr"/>
-          </a:p>
-        </p:txBody>
-      </p:sp>
-      <p:sp>
-        <p:nvSpPr>
-          <p:cNvPr id="134" name="TextBox 133"/>
-          <p:cNvSpPr txBox="1"/>
-          <p:nvPr/>
-        </p:nvSpPr>
-        <p:spPr>
-          <a:xfrm>
-            <a:off x="573024" y="4985766"/>
-            <a:ext cx="3657600" cy="96012"/>
-          </a:xfrm>
-          <a:prstGeom prst="rect">
-            <a:avLst/>
-          </a:prstGeom>
-          <a:noFill/>
-        </p:spPr>
-        <p:txBody>
-          <a:bodyPr wrap="square" lIns="0" rIns="0" tIns="0" bIns="0" anchor="t">
-            <a:spAutoFit/>
-          </a:bodyPr>
-          <a:lstStyle/>
-          <a:p>
-            <a:pPr algn="l">
-              <a:lnSpc>
-                <a:spcPct val="100000"/>
-              </a:lnSpc>
-            </a:pPr>
-            <a:r>
-              <a:rPr sz="860" b="1">
-                <a:solidFill>
-                  <a:srgbClr val="6B7785"/>
-                </a:solidFill>
-                <a:latin typeface="微软雅黑"/>
-                <a:ea typeface="微软雅黑"/>
-                <a:cs typeface="微软雅黑"/>
-              </a:rPr>
-              <a:t>外部网站 Top6</a:t>
-            </a:r>
-          </a:p>
-        </p:txBody>
-      </p:sp>
-      <p:sp>
-        <p:nvSpPr>
-          <p:cNvPr id="135" name="Rectangle 134"/>
-          <p:cNvSpPr/>
-          <p:nvPr/>
-        </p:nvSpPr>
-        <p:spPr>
-          <a:xfrm>
-            <a:off x="573024" y="5088636"/>
-            <a:ext cx="5254752" cy="5486"/>
-          </a:xfrm>
-          <a:prstGeom prst="rect">
-            <a:avLst/>
-          </a:prstGeom>
-          <a:solidFill>
-            <a:srgbClr val="E2E4E7"/>
-          </a:solidFill>
-          <a:ln>
-            <a:noFill/>
-          </a:ln>
-          <a:effectLst/>
-        </p:spPr>
-        <p:style>
-          <a:lnRef idx="1">
-            <a:schemeClr val="accent1"/>
-          </a:lnRef>
-          <a:fillRef idx="3">
-            <a:schemeClr val="accent1"/>
-          </a:fillRef>
-          <a:effectRef idx="2">
-            <a:schemeClr val="accent1"/>
-          </a:effectRef>
-          <a:fontRef idx="minor">
-            <a:schemeClr val="lt1"/>
-          </a:fontRef>
-        </p:style>
-        <p:txBody>
-          <a:bodyPr rtlCol="0" anchor="ctr"/>
-          <a:lstStyle/>
-          <a:p>
-            <a:pPr algn="ctr"/>
-          </a:p>
-        </p:txBody>
-      </p:sp>
-      <p:sp>
-        <p:nvSpPr>
-          <p:cNvPr id="136" name="TextBox 135"/>
-          <p:cNvSpPr txBox="1"/>
-          <p:nvPr/>
-        </p:nvSpPr>
-        <p:spPr>
-          <a:xfrm>
-            <a:off x="573024" y="5116068"/>
-            <a:ext cx="170688" cy="68580"/>
-          </a:xfrm>
-          <a:prstGeom prst="rect">
-            <a:avLst/>
-          </a:prstGeom>
-          <a:noFill/>
-        </p:spPr>
-        <p:txBody>
-          <a:bodyPr wrap="square" lIns="0" rIns="0" tIns="0" bIns="0" anchor="t">
-            <a:spAutoFit/>
-          </a:bodyPr>
-          <a:lstStyle/>
-          <a:p>
-            <a:pPr algn="l">
-              <a:lnSpc>
-                <a:spcPct val="100000"/>
-              </a:lnSpc>
-            </a:pPr>
-            <a:r>
-              <a:rPr sz="720" b="1">
-                <a:solidFill>
-                  <a:srgbClr val="B5333B"/>
-                </a:solidFill>
-                <a:latin typeface="微软雅黑"/>
-                <a:ea typeface="微软雅黑"/>
-                <a:cs typeface="微软雅黑"/>
-              </a:rPr>
-              <a:t>1</a:t>
-            </a:r>
-          </a:p>
-        </p:txBody>
-      </p:sp>
-      <p:sp>
-        <p:nvSpPr>
-          <p:cNvPr id="137" name="TextBox 136"/>
-          <p:cNvSpPr txBox="1"/>
-          <p:nvPr/>
-        </p:nvSpPr>
-        <p:spPr>
-          <a:xfrm>
-            <a:off x="743712" y="5116068"/>
-            <a:ext cx="4084320" cy="68580"/>
-          </a:xfrm>
-          <a:prstGeom prst="rect">
-            <a:avLst/>
-          </a:prstGeom>
-          <a:noFill/>
-        </p:spPr>
-        <p:txBody>
-          <a:bodyPr wrap="square" lIns="0" rIns="0" tIns="0" bIns="0" anchor="t">
-            <a:spAutoFit/>
-          </a:bodyPr>
-          <a:lstStyle/>
-          <a:p>
-            <a:pPr algn="l">
-              <a:lnSpc>
-                <a:spcPct val="100000"/>
-              </a:lnSpc>
-            </a:pPr>
-            <a:r>
-              <a:rPr sz="720" b="1">
-                <a:solidFill>
-                  <a:srgbClr val="1A1A1C"/>
-                </a:solidFill>
-                <a:latin typeface="微软雅黑"/>
-                <a:ea typeface="微软雅黑"/>
-                <a:cs typeface="微软雅黑"/>
-              </a:rPr>
-              <a:t>xiaobaogongai-law（小包公智能法律专家）</a:t>
-            </a:r>
-          </a:p>
-        </p:txBody>
-      </p:sp>
-      <p:sp>
-        <p:nvSpPr>
-          <p:cNvPr id="138" name="TextBox 137"/>
-          <p:cNvSpPr txBox="1"/>
-          <p:nvPr/>
-        </p:nvSpPr>
-        <p:spPr>
-          <a:xfrm>
-            <a:off x="4876800" y="5116068"/>
-            <a:ext cx="914400" cy="68580"/>
-          </a:xfrm>
-          <a:prstGeom prst="rect">
-            <a:avLst/>
-          </a:prstGeom>
-          <a:noFill/>
-        </p:spPr>
-        <p:txBody>
-          <a:bodyPr wrap="square" lIns="0" rIns="0" tIns="0" bIns="0" anchor="t">
-            <a:spAutoFit/>
-          </a:bodyPr>
-          <a:lstStyle/>
-          <a:p>
-            <a:pPr algn="r">
-              <a:lnSpc>
-                <a:spcPct val="100000"/>
-              </a:lnSpc>
-            </a:pPr>
-            <a:r>
-              <a:rPr sz="700" b="0">
-                <a:solidFill>
-                  <a:srgbClr val="5B616B"/>
-                </a:solidFill>
-                <a:latin typeface="微软雅黑"/>
-                <a:ea typeface="微软雅黑"/>
-                <a:cs typeface="微软雅黑"/>
-              </a:rPr>
-              <a:t>27,742</a:t>
-            </a:r>
-          </a:p>
-        </p:txBody>
-      </p:sp>
-      <p:sp>
-        <p:nvSpPr>
-          <p:cNvPr id="139" name="TextBox 138"/>
-          <p:cNvSpPr txBox="1"/>
-          <p:nvPr/>
-        </p:nvSpPr>
-        <p:spPr>
-          <a:xfrm>
-            <a:off x="743712" y="5184648"/>
-            <a:ext cx="4876800" cy="61721"/>
-          </a:xfrm>
-          <a:prstGeom prst="rect">
-            <a:avLst/>
-          </a:prstGeom>
-          <a:noFill/>
-        </p:spPr>
-        <p:txBody>
-          <a:bodyPr wrap="square" lIns="0" rIns="0" tIns="0" bIns="0" anchor="t">
-            <a:spAutoFit/>
-          </a:bodyPr>
-          <a:lstStyle/>
-          <a:p>
-            <a:pPr algn="l">
-              <a:lnSpc>
-                <a:spcPct val="100000"/>
-              </a:lnSpc>
-            </a:pPr>
-            <a:r>
-              <a:rPr sz="630" b="0">
-                <a:solidFill>
-                  <a:srgbClr val="5B616B"/>
-                </a:solidFill>
-                <a:latin typeface="微软雅黑"/>
-                <a:ea typeface="微软雅黑"/>
-                <a:cs typeface="微软雅黑"/>
-              </a:rPr>
-              <a:t>xbgai123</a:t>
-            </a:r>
-          </a:p>
-        </p:txBody>
-      </p:sp>
-      <p:sp>
-        <p:nvSpPr>
-          <p:cNvPr id="140" name="TextBox 139"/>
-          <p:cNvSpPr txBox="1"/>
-          <p:nvPr/>
-        </p:nvSpPr>
-        <p:spPr>
-          <a:xfrm>
-            <a:off x="573024" y="5253228"/>
-            <a:ext cx="170688" cy="68580"/>
-          </a:xfrm>
-          <a:prstGeom prst="rect">
-            <a:avLst/>
-          </a:prstGeom>
-          <a:noFill/>
-        </p:spPr>
-        <p:txBody>
-          <a:bodyPr wrap="square" lIns="0" rIns="0" tIns="0" bIns="0" anchor="t">
-            <a:spAutoFit/>
-          </a:bodyPr>
-          <a:lstStyle/>
-          <a:p>
-            <a:pPr algn="l">
-              <a:lnSpc>
-                <a:spcPct val="100000"/>
-              </a:lnSpc>
-            </a:pPr>
-            <a:r>
-              <a:rPr sz="720" b="1">
-                <a:solidFill>
-                  <a:srgbClr val="B5333B"/>
-                </a:solidFill>
-                <a:latin typeface="微软雅黑"/>
-                <a:ea typeface="微软雅黑"/>
-                <a:cs typeface="微软雅黑"/>
-              </a:rPr>
-              <a:t>2</a:t>
-            </a:r>
-          </a:p>
-        </p:txBody>
-      </p:sp>
-      <p:sp>
-        <p:nvSpPr>
-          <p:cNvPr id="141" name="TextBox 140"/>
-          <p:cNvSpPr txBox="1"/>
-          <p:nvPr/>
-        </p:nvSpPr>
-        <p:spPr>
-          <a:xfrm>
-            <a:off x="743712" y="5253228"/>
-            <a:ext cx="4084320" cy="68580"/>
-          </a:xfrm>
-          <a:prstGeom prst="rect">
-            <a:avLst/>
-          </a:prstGeom>
-          <a:noFill/>
-        </p:spPr>
-        <p:txBody>
-          <a:bodyPr wrap="square" lIns="0" rIns="0" tIns="0" bIns="0" anchor="t">
-            <a:spAutoFit/>
-          </a:bodyPr>
-          <a:lstStyle/>
-          <a:p>
-            <a:pPr algn="l">
-              <a:lnSpc>
-                <a:spcPct val="100000"/>
-              </a:lnSpc>
-            </a:pPr>
-            <a:r>
-              <a:rPr sz="720" b="1">
-                <a:solidFill>
-                  <a:srgbClr val="1A1A1C"/>
-                </a:solidFill>
-                <a:latin typeface="微软雅黑"/>
-                <a:ea typeface="微软雅黑"/>
-                <a:cs typeface="微软雅黑"/>
-              </a:rPr>
-              <a:t>xiaobaogongai-contract-drafting（小包公智能合同起草）</a:t>
-            </a:r>
-          </a:p>
-        </p:txBody>
-      </p:sp>
-      <p:sp>
-        <p:nvSpPr>
-          <p:cNvPr id="142" name="TextBox 141"/>
-          <p:cNvSpPr txBox="1"/>
-          <p:nvPr/>
-        </p:nvSpPr>
-        <p:spPr>
-          <a:xfrm>
-            <a:off x="4876800" y="5253228"/>
-            <a:ext cx="914400" cy="68580"/>
-          </a:xfrm>
-          <a:prstGeom prst="rect">
-            <a:avLst/>
-          </a:prstGeom>
-          <a:noFill/>
-        </p:spPr>
-        <p:txBody>
-          <a:bodyPr wrap="square" lIns="0" rIns="0" tIns="0" bIns="0" anchor="t">
-            <a:spAutoFit/>
-          </a:bodyPr>
-          <a:lstStyle/>
-          <a:p>
-            <a:pPr algn="r">
-              <a:lnSpc>
-                <a:spcPct val="100000"/>
-              </a:lnSpc>
-            </a:pPr>
-            <a:r>
-              <a:rPr sz="700" b="0">
-                <a:solidFill>
-                  <a:srgbClr val="5B616B"/>
-                </a:solidFill>
-                <a:latin typeface="微软雅黑"/>
-                <a:ea typeface="微软雅黑"/>
-                <a:cs typeface="微软雅黑"/>
-              </a:rPr>
-              <a:t>26,770</a:t>
-            </a:r>
-          </a:p>
-        </p:txBody>
-      </p:sp>
-      <p:sp>
-        <p:nvSpPr>
-          <p:cNvPr id="143" name="TextBox 142"/>
-          <p:cNvSpPr txBox="1"/>
-          <p:nvPr/>
-        </p:nvSpPr>
-        <p:spPr>
-          <a:xfrm>
-            <a:off x="743712" y="5321808"/>
-            <a:ext cx="4876800" cy="61721"/>
-          </a:xfrm>
-          <a:prstGeom prst="rect">
-            <a:avLst/>
-          </a:prstGeom>
-          <a:noFill/>
-        </p:spPr>
-        <p:txBody>
-          <a:bodyPr wrap="square" lIns="0" rIns="0" tIns="0" bIns="0" anchor="t">
-            <a:spAutoFit/>
-          </a:bodyPr>
-          <a:lstStyle/>
-          <a:p>
-            <a:pPr algn="l">
-              <a:lnSpc>
-                <a:spcPct val="100000"/>
-              </a:lnSpc>
-            </a:pPr>
-            <a:r>
-              <a:rPr sz="630" b="0">
-                <a:solidFill>
-                  <a:srgbClr val="5B616B"/>
-                </a:solidFill>
-                <a:latin typeface="微软雅黑"/>
-                <a:ea typeface="微软雅黑"/>
-                <a:cs typeface="微软雅黑"/>
-              </a:rPr>
-              <a:t>xbgai123</a:t>
-            </a:r>
-          </a:p>
-        </p:txBody>
-      </p:sp>
-      <p:sp>
-        <p:nvSpPr>
-          <p:cNvPr id="144" name="TextBox 143"/>
-          <p:cNvSpPr txBox="1"/>
-          <p:nvPr/>
-        </p:nvSpPr>
-        <p:spPr>
-          <a:xfrm>
-            <a:off x="573024" y="5390388"/>
-            <a:ext cx="170688" cy="68580"/>
-          </a:xfrm>
-          <a:prstGeom prst="rect">
-            <a:avLst/>
-          </a:prstGeom>
-          <a:noFill/>
-        </p:spPr>
-        <p:txBody>
-          <a:bodyPr wrap="square" lIns="0" rIns="0" tIns="0" bIns="0" anchor="t">
-            <a:spAutoFit/>
-          </a:bodyPr>
-          <a:lstStyle/>
-          <a:p>
-            <a:pPr algn="l">
-              <a:lnSpc>
-                <a:spcPct val="100000"/>
-              </a:lnSpc>
-            </a:pPr>
-            <a:r>
-              <a:rPr sz="720" b="1">
-                <a:solidFill>
-                  <a:srgbClr val="B5333B"/>
-                </a:solidFill>
-                <a:latin typeface="微软雅黑"/>
-                <a:ea typeface="微软雅黑"/>
-                <a:cs typeface="微软雅黑"/>
-              </a:rPr>
-              <a:t>3</a:t>
-            </a:r>
-          </a:p>
-        </p:txBody>
-      </p:sp>
-      <p:sp>
-        <p:nvSpPr>
-          <p:cNvPr id="145" name="TextBox 144"/>
-          <p:cNvSpPr txBox="1"/>
-          <p:nvPr/>
-        </p:nvSpPr>
-        <p:spPr>
-          <a:xfrm>
-            <a:off x="743712" y="5390388"/>
-            <a:ext cx="4084320" cy="68580"/>
-          </a:xfrm>
-          <a:prstGeom prst="rect">
-            <a:avLst/>
-          </a:prstGeom>
-          <a:noFill/>
-        </p:spPr>
-        <p:txBody>
-          <a:bodyPr wrap="square" lIns="0" rIns="0" tIns="0" bIns="0" anchor="t">
-            <a:spAutoFit/>
-          </a:bodyPr>
-          <a:lstStyle/>
-          <a:p>
-            <a:pPr algn="l">
-              <a:lnSpc>
-                <a:spcPct val="100000"/>
-              </a:lnSpc>
-            </a:pPr>
-            <a:r>
-              <a:rPr sz="720" b="1">
-                <a:solidFill>
-                  <a:srgbClr val="1A1A1C"/>
-                </a:solidFill>
-                <a:latin typeface="微软雅黑"/>
-                <a:ea typeface="微软雅黑"/>
-                <a:cs typeface="微软雅黑"/>
-              </a:rPr>
-              <a:t>xiaobaogongai-contract-review（小包公智能合同审查）</a:t>
-            </a:r>
-          </a:p>
-        </p:txBody>
-      </p:sp>
-      <p:sp>
-        <p:nvSpPr>
-          <p:cNvPr id="146" name="TextBox 145"/>
-          <p:cNvSpPr txBox="1"/>
-          <p:nvPr/>
-        </p:nvSpPr>
-        <p:spPr>
-          <a:xfrm>
-            <a:off x="4876800" y="5390388"/>
-            <a:ext cx="914400" cy="68580"/>
-          </a:xfrm>
-          <a:prstGeom prst="rect">
-            <a:avLst/>
-          </a:prstGeom>
-          <a:noFill/>
-        </p:spPr>
-        <p:txBody>
-          <a:bodyPr wrap="square" lIns="0" rIns="0" tIns="0" bIns="0" anchor="t">
-            <a:spAutoFit/>
-          </a:bodyPr>
-          <a:lstStyle/>
-          <a:p>
-            <a:pPr algn="r">
-              <a:lnSpc>
-                <a:spcPct val="100000"/>
-              </a:lnSpc>
-            </a:pPr>
-            <a:r>
-              <a:rPr sz="700" b="0">
-                <a:solidFill>
-                  <a:srgbClr val="5B616B"/>
-                </a:solidFill>
-                <a:latin typeface="微软雅黑"/>
-                <a:ea typeface="微软雅黑"/>
-                <a:cs typeface="微软雅黑"/>
-              </a:rPr>
-              <a:t>10,637</a:t>
-            </a:r>
-          </a:p>
-        </p:txBody>
-      </p:sp>
-      <p:sp>
-        <p:nvSpPr>
-          <p:cNvPr id="147" name="TextBox 146"/>
-          <p:cNvSpPr txBox="1"/>
-          <p:nvPr/>
-        </p:nvSpPr>
-        <p:spPr>
-          <a:xfrm>
-            <a:off x="743712" y="5458968"/>
-            <a:ext cx="4876800" cy="61721"/>
-          </a:xfrm>
-          <a:prstGeom prst="rect">
-            <a:avLst/>
-          </a:prstGeom>
-          <a:noFill/>
-        </p:spPr>
-        <p:txBody>
-          <a:bodyPr wrap="square" lIns="0" rIns="0" tIns="0" bIns="0" anchor="t">
-            <a:spAutoFit/>
-          </a:bodyPr>
-          <a:lstStyle/>
-          <a:p>
-            <a:pPr algn="l">
-              <a:lnSpc>
-                <a:spcPct val="100000"/>
-              </a:lnSpc>
-            </a:pPr>
-            <a:r>
-              <a:rPr sz="630" b="0">
-                <a:solidFill>
-                  <a:srgbClr val="5B616B"/>
-                </a:solidFill>
-                <a:latin typeface="微软雅黑"/>
-                <a:ea typeface="微软雅黑"/>
-                <a:cs typeface="微软雅黑"/>
-              </a:rPr>
-              <a:t>xbgai123</a:t>
-            </a:r>
-          </a:p>
-        </p:txBody>
-      </p:sp>
-      <p:sp>
-        <p:nvSpPr>
-          <p:cNvPr id="148" name="TextBox 147"/>
-          <p:cNvSpPr txBox="1"/>
-          <p:nvPr/>
-        </p:nvSpPr>
-        <p:spPr>
-          <a:xfrm>
-            <a:off x="573024" y="5527548"/>
-            <a:ext cx="170688" cy="68580"/>
-          </a:xfrm>
-          <a:prstGeom prst="rect">
-            <a:avLst/>
-          </a:prstGeom>
-          <a:noFill/>
-        </p:spPr>
-        <p:txBody>
-          <a:bodyPr wrap="square" lIns="0" rIns="0" tIns="0" bIns="0" anchor="t">
-            <a:spAutoFit/>
-          </a:bodyPr>
-          <a:lstStyle/>
-          <a:p>
-            <a:pPr algn="l">
-              <a:lnSpc>
-                <a:spcPct val="100000"/>
-              </a:lnSpc>
-            </a:pPr>
-            <a:r>
-              <a:rPr sz="720" b="1">
-                <a:solidFill>
-                  <a:srgbClr val="B5333B"/>
-                </a:solidFill>
-                <a:latin typeface="微软雅黑"/>
-                <a:ea typeface="微软雅黑"/>
-                <a:cs typeface="微软雅黑"/>
-              </a:rPr>
-              <a:t>4</a:t>
-            </a:r>
-          </a:p>
-        </p:txBody>
-      </p:sp>
-      <p:sp>
-        <p:nvSpPr>
-          <p:cNvPr id="149" name="TextBox 148"/>
-          <p:cNvSpPr txBox="1"/>
-          <p:nvPr/>
-        </p:nvSpPr>
-        <p:spPr>
-          <a:xfrm>
-            <a:off x="743712" y="5527548"/>
-            <a:ext cx="4084320" cy="68580"/>
-          </a:xfrm>
-          <a:prstGeom prst="rect">
-            <a:avLst/>
-          </a:prstGeom>
-          <a:noFill/>
-        </p:spPr>
-        <p:txBody>
-          <a:bodyPr wrap="square" lIns="0" rIns="0" tIns="0" bIns="0" anchor="t">
-            <a:spAutoFit/>
-          </a:bodyPr>
-          <a:lstStyle/>
-          <a:p>
-            <a:pPr algn="l">
-              <a:lnSpc>
-                <a:spcPct val="100000"/>
-              </a:lnSpc>
-            </a:pPr>
-            <a:r>
-              <a:rPr sz="720" b="1">
-                <a:solidFill>
-                  <a:srgbClr val="1A1A1C"/>
-                </a:solidFill>
-                <a:latin typeface="微软雅黑"/>
-                <a:ea typeface="微软雅黑"/>
-                <a:cs typeface="微软雅黑"/>
-              </a:rPr>
-              <a:t>xiaobaogongai-contract-error（小包公合同自动纠错工具）</a:t>
-            </a:r>
-          </a:p>
-        </p:txBody>
-      </p:sp>
-      <p:sp>
-        <p:nvSpPr>
-          <p:cNvPr id="150" name="TextBox 149"/>
-          <p:cNvSpPr txBox="1"/>
-          <p:nvPr/>
-        </p:nvSpPr>
-        <p:spPr>
-          <a:xfrm>
-            <a:off x="4876800" y="5527548"/>
-            <a:ext cx="914400" cy="68580"/>
-          </a:xfrm>
-          <a:prstGeom prst="rect">
-            <a:avLst/>
-          </a:prstGeom>
-          <a:noFill/>
-        </p:spPr>
-        <p:txBody>
-          <a:bodyPr wrap="square" lIns="0" rIns="0" tIns="0" bIns="0" anchor="t">
-            <a:spAutoFit/>
-          </a:bodyPr>
-          <a:lstStyle/>
-          <a:p>
-            <a:pPr algn="r">
-              <a:lnSpc>
-                <a:spcPct val="100000"/>
-              </a:lnSpc>
-            </a:pPr>
-            <a:r>
-              <a:rPr sz="700" b="0">
-                <a:solidFill>
-                  <a:srgbClr val="5B616B"/>
-                </a:solidFill>
-                <a:latin typeface="微软雅黑"/>
-                <a:ea typeface="微软雅黑"/>
-                <a:cs typeface="微软雅黑"/>
-              </a:rPr>
-              <a:t>10,566</a:t>
-            </a:r>
-          </a:p>
-        </p:txBody>
-      </p:sp>
-      <p:sp>
-        <p:nvSpPr>
-          <p:cNvPr id="151" name="TextBox 150"/>
-          <p:cNvSpPr txBox="1"/>
-          <p:nvPr/>
-        </p:nvSpPr>
-        <p:spPr>
-          <a:xfrm>
-            <a:off x="743712" y="5596128"/>
-            <a:ext cx="4876800" cy="61721"/>
-          </a:xfrm>
-          <a:prstGeom prst="rect">
-            <a:avLst/>
-          </a:prstGeom>
-          <a:noFill/>
-        </p:spPr>
-        <p:txBody>
-          <a:bodyPr wrap="square" lIns="0" rIns="0" tIns="0" bIns="0" anchor="t">
-            <a:spAutoFit/>
-          </a:bodyPr>
-          <a:lstStyle/>
-          <a:p>
-            <a:pPr algn="l">
-              <a:lnSpc>
-                <a:spcPct val="100000"/>
-              </a:lnSpc>
-            </a:pPr>
-            <a:r>
-              <a:rPr sz="630" b="0">
-                <a:solidFill>
-                  <a:srgbClr val="5B616B"/>
-                </a:solidFill>
-                <a:latin typeface="微软雅黑"/>
-                <a:ea typeface="微软雅黑"/>
-                <a:cs typeface="微软雅黑"/>
-              </a:rPr>
-              <a:t>xbgai123</a:t>
-            </a:r>
-          </a:p>
-        </p:txBody>
-      </p:sp>
-      <p:sp>
-        <p:nvSpPr>
-          <p:cNvPr id="152" name="TextBox 151"/>
-          <p:cNvSpPr txBox="1"/>
-          <p:nvPr/>
-        </p:nvSpPr>
-        <p:spPr>
-          <a:xfrm>
-            <a:off x="573024" y="5664708"/>
-            <a:ext cx="170688" cy="68580"/>
-          </a:xfrm>
-          <a:prstGeom prst="rect">
-            <a:avLst/>
-          </a:prstGeom>
-          <a:noFill/>
-        </p:spPr>
-        <p:txBody>
-          <a:bodyPr wrap="square" lIns="0" rIns="0" tIns="0" bIns="0" anchor="t">
-            <a:spAutoFit/>
-          </a:bodyPr>
-          <a:lstStyle/>
-          <a:p>
-            <a:pPr algn="l">
-              <a:lnSpc>
-                <a:spcPct val="100000"/>
-              </a:lnSpc>
-            </a:pPr>
-            <a:r>
-              <a:rPr sz="720" b="1">
-                <a:solidFill>
-                  <a:srgbClr val="B5333B"/>
-                </a:solidFill>
-                <a:latin typeface="微软雅黑"/>
-                <a:ea typeface="微软雅黑"/>
-                <a:cs typeface="微软雅黑"/>
-              </a:rPr>
-              <a:t>5</a:t>
-            </a:r>
-          </a:p>
-        </p:txBody>
-      </p:sp>
-      <p:sp>
-        <p:nvSpPr>
-          <p:cNvPr id="153" name="TextBox 152"/>
-          <p:cNvSpPr txBox="1"/>
-          <p:nvPr/>
-        </p:nvSpPr>
-        <p:spPr>
-          <a:xfrm>
-            <a:off x="743712" y="5664708"/>
-            <a:ext cx="4084320" cy="68580"/>
-          </a:xfrm>
-          <a:prstGeom prst="rect">
-            <a:avLst/>
-          </a:prstGeom>
-          <a:noFill/>
-        </p:spPr>
-        <p:txBody>
-          <a:bodyPr wrap="square" lIns="0" rIns="0" tIns="0" bIns="0" anchor="t">
-            <a:spAutoFit/>
-          </a:bodyPr>
-          <a:lstStyle/>
-          <a:p>
-            <a:pPr algn="l">
-              <a:lnSpc>
-                <a:spcPct val="100000"/>
-              </a:lnSpc>
-            </a:pPr>
-            <a:r>
-              <a:rPr sz="720" b="1">
-                <a:solidFill>
-                  <a:srgbClr val="1A1A1C"/>
-                </a:solidFill>
-                <a:latin typeface="微软雅黑"/>
-                <a:ea typeface="微软雅黑"/>
-                <a:cs typeface="微软雅黑"/>
-              </a:rPr>
-              <a:t>xiaobaogongai-contract-typesetting（小包公合同自动排版工具）</a:t>
-            </a:r>
-          </a:p>
-        </p:txBody>
-      </p:sp>
-      <p:sp>
-        <p:nvSpPr>
-          <p:cNvPr id="154" name="TextBox 153"/>
-          <p:cNvSpPr txBox="1"/>
-          <p:nvPr/>
-        </p:nvSpPr>
-        <p:spPr>
-          <a:xfrm>
-            <a:off x="4876800" y="5664708"/>
-            <a:ext cx="914400" cy="68580"/>
-          </a:xfrm>
-          <a:prstGeom prst="rect">
-            <a:avLst/>
-          </a:prstGeom>
-          <a:noFill/>
-        </p:spPr>
-        <p:txBody>
-          <a:bodyPr wrap="square" lIns="0" rIns="0" tIns="0" bIns="0" anchor="t">
-            <a:spAutoFit/>
-          </a:bodyPr>
-          <a:lstStyle/>
-          <a:p>
-            <a:pPr algn="r">
-              <a:lnSpc>
-                <a:spcPct val="100000"/>
-              </a:lnSpc>
-            </a:pPr>
-            <a:r>
-              <a:rPr sz="700" b="0">
-                <a:solidFill>
-                  <a:srgbClr val="5B616B"/>
-                </a:solidFill>
-                <a:latin typeface="微软雅黑"/>
-                <a:ea typeface="微软雅黑"/>
-                <a:cs typeface="微软雅黑"/>
-              </a:rPr>
-              <a:t>10,555</a:t>
-            </a:r>
-          </a:p>
-        </p:txBody>
-      </p:sp>
-      <p:sp>
-        <p:nvSpPr>
-          <p:cNvPr id="155" name="TextBox 154"/>
-          <p:cNvSpPr txBox="1"/>
-          <p:nvPr/>
-        </p:nvSpPr>
-        <p:spPr>
-          <a:xfrm>
-            <a:off x="743712" y="5733288"/>
-            <a:ext cx="4876800" cy="61721"/>
-          </a:xfrm>
-          <a:prstGeom prst="rect">
-            <a:avLst/>
-          </a:prstGeom>
-          <a:noFill/>
-        </p:spPr>
-        <p:txBody>
-          <a:bodyPr wrap="square" lIns="0" rIns="0" tIns="0" bIns="0" anchor="t">
-            <a:spAutoFit/>
-          </a:bodyPr>
-          <a:lstStyle/>
-          <a:p>
-            <a:pPr algn="l">
-              <a:lnSpc>
-                <a:spcPct val="100000"/>
-              </a:lnSpc>
-            </a:pPr>
-            <a:r>
-              <a:rPr sz="630" b="0">
-                <a:solidFill>
-                  <a:srgbClr val="5B616B"/>
-                </a:solidFill>
-                <a:latin typeface="微软雅黑"/>
-                <a:ea typeface="微软雅黑"/>
-                <a:cs typeface="微软雅黑"/>
-              </a:rPr>
-              <a:t>xbgai123</a:t>
-            </a:r>
-          </a:p>
-        </p:txBody>
-      </p:sp>
-      <p:sp>
-        <p:nvSpPr>
-          <p:cNvPr id="156" name="TextBox 155"/>
-          <p:cNvSpPr txBox="1"/>
-          <p:nvPr/>
-        </p:nvSpPr>
-        <p:spPr>
-          <a:xfrm>
-            <a:off x="573024" y="5801868"/>
-            <a:ext cx="170688" cy="68580"/>
-          </a:xfrm>
-          <a:prstGeom prst="rect">
-            <a:avLst/>
-          </a:prstGeom>
-          <a:noFill/>
-        </p:spPr>
-        <p:txBody>
-          <a:bodyPr wrap="square" lIns="0" rIns="0" tIns="0" bIns="0" anchor="t">
-            <a:spAutoFit/>
-          </a:bodyPr>
-          <a:lstStyle/>
-          <a:p>
-            <a:pPr algn="l">
-              <a:lnSpc>
-                <a:spcPct val="100000"/>
-              </a:lnSpc>
-            </a:pPr>
-            <a:r>
-              <a:rPr sz="720" b="1">
-                <a:solidFill>
-                  <a:srgbClr val="B5333B"/>
-                </a:solidFill>
-                <a:latin typeface="微软雅黑"/>
-                <a:ea typeface="微软雅黑"/>
-                <a:cs typeface="微软雅黑"/>
-              </a:rPr>
-              <a:t>6</a:t>
-            </a:r>
-          </a:p>
-        </p:txBody>
-      </p:sp>
-      <p:sp>
-        <p:nvSpPr>
-          <p:cNvPr id="157" name="TextBox 156"/>
-          <p:cNvSpPr txBox="1"/>
-          <p:nvPr/>
-        </p:nvSpPr>
-        <p:spPr>
-          <a:xfrm>
-            <a:off x="743712" y="5801868"/>
-            <a:ext cx="4084320" cy="68580"/>
-          </a:xfrm>
-          <a:prstGeom prst="rect">
-            <a:avLst/>
-          </a:prstGeom>
-          <a:noFill/>
-        </p:spPr>
-        <p:txBody>
-          <a:bodyPr wrap="square" lIns="0" rIns="0" tIns="0" bIns="0" anchor="t">
-            <a:spAutoFit/>
-          </a:bodyPr>
-          <a:lstStyle/>
-          <a:p>
-            <a:pPr algn="l">
-              <a:lnSpc>
-                <a:spcPct val="100000"/>
-              </a:lnSpc>
-            </a:pPr>
-            <a:r>
-              <a:rPr sz="720" b="1">
-                <a:solidFill>
-                  <a:srgbClr val="1A1A1C"/>
-                </a:solidFill>
-                <a:latin typeface="微软雅黑"/>
-                <a:ea typeface="微软雅黑"/>
-                <a:cs typeface="微软雅黑"/>
-              </a:rPr>
-              <a:t>xiaobaogongai-contract-risk（小包公合同风险评估工具）</a:t>
-            </a:r>
-          </a:p>
-        </p:txBody>
-      </p:sp>
-      <p:sp>
-        <p:nvSpPr>
-          <p:cNvPr id="158" name="TextBox 157"/>
-          <p:cNvSpPr txBox="1"/>
-          <p:nvPr/>
-        </p:nvSpPr>
-        <p:spPr>
-          <a:xfrm>
-            <a:off x="4876800" y="5801868"/>
-            <a:ext cx="914400" cy="68580"/>
-          </a:xfrm>
-          <a:prstGeom prst="rect">
-            <a:avLst/>
-          </a:prstGeom>
-          <a:noFill/>
-        </p:spPr>
-        <p:txBody>
-          <a:bodyPr wrap="square" lIns="0" rIns="0" tIns="0" bIns="0" anchor="t">
-            <a:spAutoFit/>
-          </a:bodyPr>
-          <a:lstStyle/>
-          <a:p>
-            <a:pPr algn="r">
-              <a:lnSpc>
-                <a:spcPct val="100000"/>
-              </a:lnSpc>
-            </a:pPr>
-            <a:r>
-              <a:rPr sz="700" b="0">
-                <a:solidFill>
-                  <a:srgbClr val="5B616B"/>
-                </a:solidFill>
-                <a:latin typeface="微软雅黑"/>
-                <a:ea typeface="微软雅黑"/>
-                <a:cs typeface="微软雅黑"/>
-              </a:rPr>
-              <a:t>10,481</a:t>
-            </a:r>
-          </a:p>
-        </p:txBody>
-      </p:sp>
-      <p:sp>
-        <p:nvSpPr>
-          <p:cNvPr id="159" name="TextBox 158"/>
-          <p:cNvSpPr txBox="1"/>
-          <p:nvPr/>
-        </p:nvSpPr>
-        <p:spPr>
-          <a:xfrm>
-            <a:off x="743712" y="5870448"/>
-            <a:ext cx="4876800" cy="61721"/>
-          </a:xfrm>
-          <a:prstGeom prst="rect">
-            <a:avLst/>
-          </a:prstGeom>
-          <a:noFill/>
-        </p:spPr>
-        <p:txBody>
-          <a:bodyPr wrap="square" lIns="0" rIns="0" tIns="0" bIns="0" anchor="t">
-            <a:spAutoFit/>
-          </a:bodyPr>
-          <a:lstStyle/>
-          <a:p>
-            <a:pPr algn="l">
-              <a:lnSpc>
-                <a:spcPct val="100000"/>
-              </a:lnSpc>
-            </a:pPr>
-            <a:r>
-              <a:rPr sz="630" b="0">
-                <a:solidFill>
-                  <a:srgbClr val="5B616B"/>
-                </a:solidFill>
-                <a:latin typeface="微软雅黑"/>
-                <a:ea typeface="微软雅黑"/>
-                <a:cs typeface="微软雅黑"/>
-              </a:rPr>
-              <a:t>xbgai123</a:t>
-            </a:r>
-          </a:p>
-        </p:txBody>
-      </p:sp>
-      <p:sp>
-        <p:nvSpPr>
-          <p:cNvPr id="160" name="Rounded Rectangle 159"/>
-          <p:cNvSpPr/>
-          <p:nvPr/>
-        </p:nvSpPr>
-        <p:spPr>
-          <a:xfrm>
-            <a:off x="6217920" y="4937760"/>
-            <a:ext cx="5547360" cy="1014984"/>
-          </a:xfrm>
-          <a:prstGeom prst="roundRect">
-            <a:avLst>
-              <a:gd name="adj" fmla="val 2000"/>
-            </a:avLst>
-          </a:prstGeom>
-          <a:solidFill>
-            <a:srgbClr val="FFFFFF"/>
-          </a:solidFill>
-          <a:ln w="9525">
-            <a:solidFill>
-              <a:srgbClr val="E2E4E7"/>
-            </a:solidFill>
-          </a:ln>
-          <a:effectLst/>
-        </p:spPr>
-        <p:style>
-          <a:lnRef idx="1">
-            <a:schemeClr val="accent1"/>
-          </a:lnRef>
-          <a:fillRef idx="3">
-            <a:schemeClr val="accent1"/>
-          </a:fillRef>
-          <a:effectRef idx="2">
-            <a:schemeClr val="accent1"/>
-          </a:effectRef>
-          <a:fontRef idx="minor">
-            <a:schemeClr val="lt1"/>
-          </a:fontRef>
-        </p:style>
-        <p:txBody>
-          <a:bodyPr rtlCol="0" anchor="ctr"/>
-          <a:lstStyle/>
-          <a:p>
-            <a:pPr algn="ctr"/>
-          </a:p>
-        </p:txBody>
-      </p:sp>
-      <p:sp>
-        <p:nvSpPr>
-          <p:cNvPr id="161" name="TextBox 160"/>
-          <p:cNvSpPr txBox="1"/>
-          <p:nvPr/>
-        </p:nvSpPr>
-        <p:spPr>
-          <a:xfrm>
-            <a:off x="6364224" y="4985766"/>
-            <a:ext cx="3657600" cy="96012"/>
-          </a:xfrm>
-          <a:prstGeom prst="rect">
-            <a:avLst/>
-          </a:prstGeom>
-          <a:noFill/>
-        </p:spPr>
-        <p:txBody>
-          <a:bodyPr wrap="square" lIns="0" rIns="0" tIns="0" bIns="0" anchor="t">
-            <a:spAutoFit/>
-          </a:bodyPr>
-          <a:lstStyle/>
-          <a:p>
-            <a:pPr algn="l">
-              <a:lnSpc>
-                <a:spcPct val="100000"/>
-              </a:lnSpc>
-            </a:pPr>
-            <a:r>
-              <a:rPr sz="860" b="1">
-                <a:solidFill>
-                  <a:srgbClr val="8B8E94"/>
-                </a:solidFill>
-                <a:latin typeface="微软雅黑"/>
-                <a:ea typeface="微软雅黑"/>
-                <a:cs typeface="微软雅黑"/>
-              </a:rPr>
-              <a:t>个人上传 Top6</a:t>
-            </a:r>
-          </a:p>
-        </p:txBody>
-      </p:sp>
-      <p:sp>
-        <p:nvSpPr>
-          <p:cNvPr id="162" name="Rectangle 161"/>
-          <p:cNvSpPr/>
-          <p:nvPr/>
-        </p:nvSpPr>
-        <p:spPr>
-          <a:xfrm>
-            <a:off x="6364224" y="5088636"/>
-            <a:ext cx="5254752" cy="5486"/>
-          </a:xfrm>
-          <a:prstGeom prst="rect">
-            <a:avLst/>
-          </a:prstGeom>
-          <a:solidFill>
-            <a:srgbClr val="E2E4E7"/>
-          </a:solidFill>
-          <a:ln>
-            <a:noFill/>
-          </a:ln>
-          <a:effectLst/>
-        </p:spPr>
-        <p:style>
-          <a:lnRef idx="1">
-            <a:schemeClr val="accent1"/>
-          </a:lnRef>
-          <a:fillRef idx="3">
-            <a:schemeClr val="accent1"/>
-          </a:fillRef>
-          <a:effectRef idx="2">
-            <a:schemeClr val="accent1"/>
-          </a:effectRef>
-          <a:fontRef idx="minor">
-            <a:schemeClr val="lt1"/>
-          </a:fontRef>
-        </p:style>
-        <p:txBody>
-          <a:bodyPr rtlCol="0" anchor="ctr"/>
-          <a:lstStyle/>
-          <a:p>
-            <a:pPr algn="ctr"/>
-          </a:p>
-        </p:txBody>
-      </p:sp>
-      <p:sp>
-        <p:nvSpPr>
-          <p:cNvPr id="163" name="TextBox 162"/>
-          <p:cNvSpPr txBox="1"/>
-          <p:nvPr/>
-        </p:nvSpPr>
-        <p:spPr>
-          <a:xfrm>
-            <a:off x="6364224" y="5116068"/>
-            <a:ext cx="170688" cy="68580"/>
-          </a:xfrm>
-          <a:prstGeom prst="rect">
-            <a:avLst/>
-          </a:prstGeom>
-          <a:noFill/>
-        </p:spPr>
-        <p:txBody>
-          <a:bodyPr wrap="square" lIns="0" rIns="0" tIns="0" bIns="0" anchor="t">
-            <a:spAutoFit/>
-          </a:bodyPr>
-          <a:lstStyle/>
-          <a:p>
-            <a:pPr algn="l">
-              <a:lnSpc>
-                <a:spcPct val="100000"/>
-              </a:lnSpc>
-            </a:pPr>
-            <a:r>
-              <a:rPr sz="720" b="1">
-                <a:solidFill>
-                  <a:srgbClr val="B5333B"/>
-                </a:solidFill>
-                <a:latin typeface="微软雅黑"/>
-                <a:ea typeface="微软雅黑"/>
-                <a:cs typeface="微软雅黑"/>
-              </a:rPr>
-              <a:t>1</a:t>
-            </a:r>
-          </a:p>
-        </p:txBody>
-      </p:sp>
-      <p:sp>
-        <p:nvSpPr>
-          <p:cNvPr id="164" name="TextBox 163"/>
-          <p:cNvSpPr txBox="1"/>
-          <p:nvPr/>
-        </p:nvSpPr>
-        <p:spPr>
-          <a:xfrm>
-            <a:off x="6534912" y="5116068"/>
-            <a:ext cx="4084320" cy="68580"/>
-          </a:xfrm>
-          <a:prstGeom prst="rect">
-            <a:avLst/>
-          </a:prstGeom>
-          <a:noFill/>
-        </p:spPr>
-        <p:txBody>
-          <a:bodyPr wrap="square" lIns="0" rIns="0" tIns="0" bIns="0" anchor="t">
-            <a:spAutoFit/>
-          </a:bodyPr>
-          <a:lstStyle/>
-          <a:p>
-            <a:pPr algn="l">
-              <a:lnSpc>
-                <a:spcPct val="100000"/>
-              </a:lnSpc>
-            </a:pPr>
-            <a:r>
-              <a:rPr sz="720" b="1">
-                <a:solidFill>
-                  <a:srgbClr val="1A1A1C"/>
-                </a:solidFill>
-                <a:latin typeface="微软雅黑"/>
-                <a:ea typeface="微软雅黑"/>
-                <a:cs typeface="微软雅黑"/>
-              </a:rPr>
-              <a:t>mattress-trial-rights-advisor（床垫试睡权益顾问）</a:t>
-            </a:r>
-          </a:p>
-        </p:txBody>
-      </p:sp>
-      <p:sp>
-        <p:nvSpPr>
-          <p:cNvPr id="165" name="TextBox 164"/>
-          <p:cNvSpPr txBox="1"/>
-          <p:nvPr/>
-        </p:nvSpPr>
-        <p:spPr>
-          <a:xfrm>
-            <a:off x="10668000" y="5116068"/>
-            <a:ext cx="914400" cy="68580"/>
-          </a:xfrm>
-          <a:prstGeom prst="rect">
-            <a:avLst/>
-          </a:prstGeom>
-          <a:noFill/>
-        </p:spPr>
-        <p:txBody>
-          <a:bodyPr wrap="square" lIns="0" rIns="0" tIns="0" bIns="0" anchor="t">
-            <a:spAutoFit/>
-          </a:bodyPr>
-          <a:lstStyle/>
-          <a:p>
-            <a:pPr algn="r">
-              <a:lnSpc>
-                <a:spcPct val="100000"/>
-              </a:lnSpc>
-            </a:pPr>
-            <a:r>
-              <a:rPr sz="700" b="0">
-                <a:solidFill>
-                  <a:srgbClr val="5B616B"/>
-                </a:solidFill>
-                <a:latin typeface="微软雅黑"/>
-                <a:ea typeface="微软雅黑"/>
-                <a:cs typeface="微软雅黑"/>
-              </a:rPr>
-              <a:t>13,082</a:t>
-            </a:r>
-          </a:p>
-        </p:txBody>
-      </p:sp>
-      <p:sp>
-        <p:nvSpPr>
-          <p:cNvPr id="166" name="TextBox 165"/>
-          <p:cNvSpPr txBox="1"/>
-          <p:nvPr/>
-        </p:nvSpPr>
-        <p:spPr>
-          <a:xfrm>
-            <a:off x="6534912" y="5184648"/>
-            <a:ext cx="4876800" cy="61721"/>
-          </a:xfrm>
-          <a:prstGeom prst="rect">
-            <a:avLst/>
-          </a:prstGeom>
-          <a:noFill/>
-        </p:spPr>
-        <p:txBody>
-          <a:bodyPr wrap="square" lIns="0" rIns="0" tIns="0" bIns="0" anchor="t">
-            <a:spAutoFit/>
-          </a:bodyPr>
-          <a:lstStyle/>
-          <a:p>
-            <a:pPr algn="l">
-              <a:lnSpc>
-                <a:spcPct val="100000"/>
-              </a:lnSpc>
-            </a:pPr>
-            <a:r>
-              <a:rPr sz="630" b="0">
-                <a:solidFill>
-                  <a:srgbClr val="5B616B"/>
-                </a:solidFill>
-                <a:latin typeface="微软雅黑"/>
-                <a:ea typeface="微软雅黑"/>
-                <a:cs typeface="微软雅黑"/>
-              </a:rPr>
-              <a:t>alv123</a:t>
-            </a:r>
-          </a:p>
-        </p:txBody>
-      </p:sp>
-      <p:sp>
-        <p:nvSpPr>
-          <p:cNvPr id="167" name="TextBox 166"/>
-          <p:cNvSpPr txBox="1"/>
-          <p:nvPr/>
-        </p:nvSpPr>
-        <p:spPr>
-          <a:xfrm>
-            <a:off x="6364224" y="5253228"/>
-            <a:ext cx="170688" cy="68580"/>
-          </a:xfrm>
-          <a:prstGeom prst="rect">
-            <a:avLst/>
-          </a:prstGeom>
-          <a:noFill/>
-        </p:spPr>
-        <p:txBody>
-          <a:bodyPr wrap="square" lIns="0" rIns="0" tIns="0" bIns="0" anchor="t">
-            <a:spAutoFit/>
-          </a:bodyPr>
-          <a:lstStyle/>
-          <a:p>
-            <a:pPr algn="l">
-              <a:lnSpc>
-                <a:spcPct val="100000"/>
-              </a:lnSpc>
-            </a:pPr>
-            <a:r>
-              <a:rPr sz="720" b="1">
-                <a:solidFill>
-                  <a:srgbClr val="B5333B"/>
-                </a:solidFill>
-                <a:latin typeface="微软雅黑"/>
-                <a:ea typeface="微软雅黑"/>
-                <a:cs typeface="微软雅黑"/>
-              </a:rPr>
-              <a:t>2</a:t>
-            </a:r>
-          </a:p>
-        </p:txBody>
-      </p:sp>
-      <p:sp>
-        <p:nvSpPr>
-          <p:cNvPr id="168" name="TextBox 167"/>
-          <p:cNvSpPr txBox="1"/>
-          <p:nvPr/>
-        </p:nvSpPr>
-        <p:spPr>
-          <a:xfrm>
-            <a:off x="6534912" y="5253228"/>
-            <a:ext cx="4084320" cy="68580"/>
-          </a:xfrm>
-          <a:prstGeom prst="rect">
-            <a:avLst/>
-          </a:prstGeom>
-          <a:noFill/>
-        </p:spPr>
-        <p:txBody>
-          <a:bodyPr wrap="square" lIns="0" rIns="0" tIns="0" bIns="0" anchor="t">
-            <a:spAutoFit/>
-          </a:bodyPr>
-          <a:lstStyle/>
-          <a:p>
-            <a:pPr algn="l">
-              <a:lnSpc>
-                <a:spcPct val="100000"/>
-              </a:lnSpc>
-            </a:pPr>
-            <a:r>
-              <a:rPr sz="720" b="1">
-                <a:solidFill>
-                  <a:srgbClr val="1A1A1C"/>
-                </a:solidFill>
-                <a:latin typeface="微软雅黑"/>
-                <a:ea typeface="微软雅黑"/>
-                <a:cs typeface="微软雅黑"/>
-              </a:rPr>
-              <a:t>mattress-new-home-low-odor-advisor（新房低异味床垫顾问）</a:t>
-            </a:r>
-          </a:p>
-        </p:txBody>
-      </p:sp>
-      <p:sp>
-        <p:nvSpPr>
-          <p:cNvPr id="169" name="TextBox 168"/>
-          <p:cNvSpPr txBox="1"/>
-          <p:nvPr/>
-        </p:nvSpPr>
-        <p:spPr>
-          <a:xfrm>
-            <a:off x="10668000" y="5253228"/>
-            <a:ext cx="914400" cy="68580"/>
-          </a:xfrm>
-          <a:prstGeom prst="rect">
-            <a:avLst/>
-          </a:prstGeom>
-          <a:noFill/>
-        </p:spPr>
-        <p:txBody>
-          <a:bodyPr wrap="square" lIns="0" rIns="0" tIns="0" bIns="0" anchor="t">
-            <a:spAutoFit/>
-          </a:bodyPr>
-          <a:lstStyle/>
-          <a:p>
-            <a:pPr algn="r">
-              <a:lnSpc>
-                <a:spcPct val="100000"/>
-              </a:lnSpc>
-            </a:pPr>
-            <a:r>
-              <a:rPr sz="700" b="0">
-                <a:solidFill>
-                  <a:srgbClr val="5B616B"/>
-                </a:solidFill>
-                <a:latin typeface="微软雅黑"/>
-                <a:ea typeface="微软雅黑"/>
-                <a:cs typeface="微软雅黑"/>
-              </a:rPr>
-              <a:t>12,583</a:t>
-            </a:r>
-          </a:p>
-        </p:txBody>
-      </p:sp>
-      <p:sp>
-        <p:nvSpPr>
-          <p:cNvPr id="170" name="TextBox 169"/>
-          <p:cNvSpPr txBox="1"/>
-          <p:nvPr/>
-        </p:nvSpPr>
-        <p:spPr>
-          <a:xfrm>
-            <a:off x="6534912" y="5321808"/>
-            <a:ext cx="4876800" cy="61721"/>
-          </a:xfrm>
-          <a:prstGeom prst="rect">
-            <a:avLst/>
-          </a:prstGeom>
-          <a:noFill/>
-        </p:spPr>
-        <p:txBody>
-          <a:bodyPr wrap="square" lIns="0" rIns="0" tIns="0" bIns="0" anchor="t">
-            <a:spAutoFit/>
-          </a:bodyPr>
-          <a:lstStyle/>
-          <a:p>
-            <a:pPr algn="l">
-              <a:lnSpc>
-                <a:spcPct val="100000"/>
-              </a:lnSpc>
-            </a:pPr>
-            <a:r>
-              <a:rPr sz="630" b="0">
-                <a:solidFill>
-                  <a:srgbClr val="5B616B"/>
-                </a:solidFill>
-                <a:latin typeface="微软雅黑"/>
-                <a:ea typeface="微软雅黑"/>
-                <a:cs typeface="微软雅黑"/>
-              </a:rPr>
-              <a:t>alv123</a:t>
-            </a:r>
-          </a:p>
-        </p:txBody>
-      </p:sp>
-      <p:sp>
-        <p:nvSpPr>
-          <p:cNvPr id="171" name="TextBox 170"/>
-          <p:cNvSpPr txBox="1"/>
-          <p:nvPr/>
-        </p:nvSpPr>
-        <p:spPr>
-          <a:xfrm>
-            <a:off x="6364224" y="5390388"/>
-            <a:ext cx="170688" cy="68580"/>
-          </a:xfrm>
-          <a:prstGeom prst="rect">
-            <a:avLst/>
-          </a:prstGeom>
-          <a:noFill/>
-        </p:spPr>
-        <p:txBody>
-          <a:bodyPr wrap="square" lIns="0" rIns="0" tIns="0" bIns="0" anchor="t">
-            <a:spAutoFit/>
-          </a:bodyPr>
-          <a:lstStyle/>
-          <a:p>
-            <a:pPr algn="l">
-              <a:lnSpc>
-                <a:spcPct val="100000"/>
-              </a:lnSpc>
-            </a:pPr>
-            <a:r>
-              <a:rPr sz="720" b="1">
-                <a:solidFill>
-                  <a:srgbClr val="B5333B"/>
-                </a:solidFill>
-                <a:latin typeface="微软雅黑"/>
-                <a:ea typeface="微软雅黑"/>
-                <a:cs typeface="微软雅黑"/>
-              </a:rPr>
-              <a:t>3</a:t>
-            </a:r>
-          </a:p>
-        </p:txBody>
-      </p:sp>
-      <p:sp>
-        <p:nvSpPr>
-          <p:cNvPr id="172" name="TextBox 171"/>
-          <p:cNvSpPr txBox="1"/>
-          <p:nvPr/>
-        </p:nvSpPr>
-        <p:spPr>
-          <a:xfrm>
-            <a:off x="6534912" y="5390388"/>
-            <a:ext cx="4084320" cy="68580"/>
-          </a:xfrm>
-          <a:prstGeom prst="rect">
-            <a:avLst/>
-          </a:prstGeom>
-          <a:noFill/>
-        </p:spPr>
-        <p:txBody>
-          <a:bodyPr wrap="square" lIns="0" rIns="0" tIns="0" bIns="0" anchor="t">
-            <a:spAutoFit/>
-          </a:bodyPr>
-          <a:lstStyle/>
-          <a:p>
-            <a:pPr algn="l">
-              <a:lnSpc>
-                <a:spcPct val="100000"/>
-              </a:lnSpc>
-            </a:pPr>
-            <a:r>
-              <a:rPr sz="720" b="1">
-                <a:solidFill>
-                  <a:srgbClr val="1A1A1C"/>
-                </a:solidFill>
-                <a:latin typeface="微软雅黑"/>
-                <a:ea typeface="微软雅黑"/>
-                <a:cs typeface="微软雅黑"/>
-              </a:rPr>
-              <a:t>baobiao-API（招标中标数据查询API，标讯日更新30万+）</a:t>
-            </a:r>
-          </a:p>
-        </p:txBody>
-      </p:sp>
-      <p:sp>
-        <p:nvSpPr>
-          <p:cNvPr id="173" name="TextBox 172"/>
-          <p:cNvSpPr txBox="1"/>
-          <p:nvPr/>
-        </p:nvSpPr>
-        <p:spPr>
-          <a:xfrm>
-            <a:off x="10668000" y="5390388"/>
-            <a:ext cx="914400" cy="68580"/>
-          </a:xfrm>
-          <a:prstGeom prst="rect">
-            <a:avLst/>
-          </a:prstGeom>
-          <a:noFill/>
-        </p:spPr>
-        <p:txBody>
-          <a:bodyPr wrap="square" lIns="0" rIns="0" tIns="0" bIns="0" anchor="t">
-            <a:spAutoFit/>
-          </a:bodyPr>
-          <a:lstStyle/>
-          <a:p>
-            <a:pPr algn="r">
-              <a:lnSpc>
-                <a:spcPct val="100000"/>
-              </a:lnSpc>
-            </a:pPr>
-            <a:r>
-              <a:rPr sz="700" b="0">
-                <a:solidFill>
-                  <a:srgbClr val="5B616B"/>
-                </a:solidFill>
-                <a:latin typeface="微软雅黑"/>
-                <a:ea typeface="微软雅黑"/>
-                <a:cs typeface="微软雅黑"/>
-              </a:rPr>
-              <a:t>11,312</a:t>
-            </a:r>
-          </a:p>
-        </p:txBody>
-      </p:sp>
-      <p:sp>
-        <p:nvSpPr>
-          <p:cNvPr id="174" name="TextBox 173"/>
-          <p:cNvSpPr txBox="1"/>
-          <p:nvPr/>
-        </p:nvSpPr>
-        <p:spPr>
-          <a:xfrm>
-            <a:off x="6534912" y="5458968"/>
-            <a:ext cx="4876800" cy="61721"/>
-          </a:xfrm>
-          <a:prstGeom prst="rect">
-            <a:avLst/>
-          </a:prstGeom>
-          <a:noFill/>
-        </p:spPr>
-        <p:txBody>
-          <a:bodyPr wrap="square" lIns="0" rIns="0" tIns="0" bIns="0" anchor="t">
-            <a:spAutoFit/>
-          </a:bodyPr>
-          <a:lstStyle/>
-          <a:p>
-            <a:pPr algn="l">
-              <a:lnSpc>
-                <a:spcPct val="100000"/>
-              </a:lnSpc>
-            </a:pPr>
-            <a:r>
-              <a:rPr sz="630" b="0">
-                <a:solidFill>
-                  <a:srgbClr val="5B616B"/>
-                </a:solidFill>
-                <a:latin typeface="微软雅黑"/>
-                <a:ea typeface="微软雅黑"/>
-                <a:cs typeface="微软雅黑"/>
-              </a:rPr>
               <a:t>tingting0980</a:t>
             </a:r>
           </a:p>
@@ -39381,505 +39681,13 @@
       </p:sp>
       <p:sp>
         <p:nvSpPr>
-          <p:cNvPr id="175" name="TextBox 174"/>
-          <p:cNvSpPr txBox="1"/>
-          <p:nvPr/>
-        </p:nvSpPr>
-        <p:spPr>
-          <a:xfrm>
-            <a:off x="6364224" y="5527548"/>
-            <a:ext cx="170688" cy="68580"/>
-          </a:xfrm>
-          <a:prstGeom prst="rect">
-            <a:avLst/>
-          </a:prstGeom>
-          <a:noFill/>
-        </p:spPr>
-        <p:txBody>
-          <a:bodyPr wrap="square" lIns="0" rIns="0" tIns="0" bIns="0" anchor="t">
-            <a:spAutoFit/>
-          </a:bodyPr>
-          <a:lstStyle/>
-          <a:p>
-            <a:pPr algn="l">
-              <a:lnSpc>
-                <a:spcPct val="100000"/>
-              </a:lnSpc>
-            </a:pPr>
-            <a:r>
-              <a:rPr sz="720" b="1">
-                <a:solidFill>
-                  <a:srgbClr val="B5333B"/>
-                </a:solidFill>
-                <a:latin typeface="微软雅黑"/>
-                <a:ea typeface="微软雅黑"/>
-                <a:cs typeface="微软雅黑"/>
-              </a:rPr>
-              <a:t>4</a:t>
-            </a:r>
-          </a:p>
-        </p:txBody>
-      </p:sp>
-      <p:sp>
-        <p:nvSpPr>
-          <p:cNvPr id="176" name="TextBox 175"/>
-          <p:cNvSpPr txBox="1"/>
-          <p:nvPr/>
-        </p:nvSpPr>
-        <p:spPr>
-          <a:xfrm>
-            <a:off x="6534912" y="5527548"/>
-            <a:ext cx="4084320" cy="68580"/>
-          </a:xfrm>
-          <a:prstGeom prst="rect">
-            <a:avLst/>
-          </a:prstGeom>
-          <a:noFill/>
-        </p:spPr>
-        <p:txBody>
-          <a:bodyPr wrap="square" lIns="0" rIns="0" tIns="0" bIns="0" anchor="t">
-            <a:spAutoFit/>
-          </a:bodyPr>
-          <a:lstStyle/>
-          <a:p>
-            <a:pPr algn="l">
-              <a:lnSpc>
-                <a:spcPct val="100000"/>
-              </a:lnSpc>
-            </a:pPr>
-            <a:r>
-              <a:rPr sz="720" b="1">
-                <a:solidFill>
-                  <a:srgbClr val="1A1A1C"/>
-                </a:solidFill>
-                <a:latin typeface="微软雅黑"/>
-                <a:ea typeface="微软雅黑"/>
-                <a:cs typeface="微软雅黑"/>
-              </a:rPr>
-              <a:t>mattress-3000-budget-advisor（3000档床垫预算顾问）</a:t>
-            </a:r>
-          </a:p>
-        </p:txBody>
-      </p:sp>
-      <p:sp>
-        <p:nvSpPr>
-          <p:cNvPr id="177" name="TextBox 176"/>
-          <p:cNvSpPr txBox="1"/>
-          <p:nvPr/>
-        </p:nvSpPr>
-        <p:spPr>
-          <a:xfrm>
-            <a:off x="10668000" y="5527548"/>
-            <a:ext cx="914400" cy="68580"/>
-          </a:xfrm>
-          <a:prstGeom prst="rect">
-            <a:avLst/>
-          </a:prstGeom>
-          <a:noFill/>
-        </p:spPr>
-        <p:txBody>
-          <a:bodyPr wrap="square" lIns="0" rIns="0" tIns="0" bIns="0" anchor="t">
-            <a:spAutoFit/>
-          </a:bodyPr>
-          <a:lstStyle/>
-          <a:p>
-            <a:pPr algn="r">
-              <a:lnSpc>
-                <a:spcPct val="100000"/>
-              </a:lnSpc>
-            </a:pPr>
-            <a:r>
-              <a:rPr sz="700" b="0">
-                <a:solidFill>
-                  <a:srgbClr val="5B616B"/>
-                </a:solidFill>
-                <a:latin typeface="微软雅黑"/>
-                <a:ea typeface="微软雅黑"/>
-                <a:cs typeface="微软雅黑"/>
-              </a:rPr>
-              <a:t>11,273</a:t>
-            </a:r>
-          </a:p>
-        </p:txBody>
-      </p:sp>
-      <p:sp>
-        <p:nvSpPr>
-          <p:cNvPr id="178" name="TextBox 177"/>
-          <p:cNvSpPr txBox="1"/>
-          <p:nvPr/>
-        </p:nvSpPr>
-        <p:spPr>
-          <a:xfrm>
-            <a:off x="6534912" y="5596128"/>
-            <a:ext cx="4876800" cy="61721"/>
-          </a:xfrm>
-          <a:prstGeom prst="rect">
-            <a:avLst/>
-          </a:prstGeom>
-          <a:noFill/>
-        </p:spPr>
-        <p:txBody>
-          <a:bodyPr wrap="square" lIns="0" rIns="0" tIns="0" bIns="0" anchor="t">
-            <a:spAutoFit/>
-          </a:bodyPr>
-          <a:lstStyle/>
-          <a:p>
-            <a:pPr algn="l">
-              <a:lnSpc>
-                <a:spcPct val="100000"/>
-              </a:lnSpc>
-            </a:pPr>
-            <a:r>
-              <a:rPr sz="630" b="0">
-                <a:solidFill>
-                  <a:srgbClr val="5B616B"/>
-                </a:solidFill>
-                <a:latin typeface="微软雅黑"/>
-                <a:ea typeface="微软雅黑"/>
-                <a:cs typeface="微软雅黑"/>
-              </a:rPr>
-              <a:t>alv123</a:t>
-            </a:r>
-          </a:p>
-        </p:txBody>
-      </p:sp>
-      <p:sp>
-        <p:nvSpPr>
-          <p:cNvPr id="179" name="TextBox 178"/>
-          <p:cNvSpPr txBox="1"/>
-          <p:nvPr/>
-        </p:nvSpPr>
-        <p:spPr>
-          <a:xfrm>
-            <a:off x="6364224" y="5664708"/>
-            <a:ext cx="170688" cy="68580"/>
-          </a:xfrm>
-          <a:prstGeom prst="rect">
-            <a:avLst/>
-          </a:prstGeom>
-          <a:noFill/>
-        </p:spPr>
-        <p:txBody>
-          <a:bodyPr wrap="square" lIns="0" rIns="0" tIns="0" bIns="0" anchor="t">
-            <a:spAutoFit/>
-          </a:bodyPr>
-          <a:lstStyle/>
-          <a:p>
-            <a:pPr algn="l">
-              <a:lnSpc>
-                <a:spcPct val="100000"/>
-              </a:lnSpc>
-            </a:pPr>
-            <a:r>
-              <a:rPr sz="720" b="1">
-                <a:solidFill>
-                  <a:srgbClr val="B5333B"/>
-                </a:solidFill>
-                <a:latin typeface="微软雅黑"/>
-                <a:ea typeface="微软雅黑"/>
-                <a:cs typeface="微软雅黑"/>
-              </a:rPr>
-              <a:t>5</a:t>
-            </a:r>
-          </a:p>
-        </p:txBody>
-      </p:sp>
-      <p:sp>
-        <p:nvSpPr>
-          <p:cNvPr id="180" name="TextBox 179"/>
-          <p:cNvSpPr txBox="1"/>
-          <p:nvPr/>
-        </p:nvSpPr>
-        <p:spPr>
-          <a:xfrm>
-            <a:off x="6534912" y="5664708"/>
-            <a:ext cx="4084320" cy="68580"/>
-          </a:xfrm>
-          <a:prstGeom prst="rect">
-            <a:avLst/>
-          </a:prstGeom>
-          <a:noFill/>
-        </p:spPr>
-        <p:txBody>
-          <a:bodyPr wrap="square" lIns="0" rIns="0" tIns="0" bIns="0" anchor="t">
-            <a:spAutoFit/>
-          </a:bodyPr>
-          <a:lstStyle/>
-          <a:p>
-            <a:pPr algn="l">
-              <a:lnSpc>
-                <a:spcPct val="100000"/>
-              </a:lnSpc>
-            </a:pPr>
-            <a:r>
-              <a:rPr sz="720" b="1">
-                <a:solidFill>
-                  <a:srgbClr val="1A1A1C"/>
-                </a:solidFill>
-                <a:latin typeface="微软雅黑"/>
-                <a:ea typeface="微软雅黑"/>
-                <a:cs typeface="微软雅黑"/>
-              </a:rPr>
-              <a:t>baobiao-analyze-company-network（企业画像与上下游关系分析）</a:t>
-            </a:r>
-          </a:p>
-        </p:txBody>
-      </p:sp>
-      <p:sp>
-        <p:nvSpPr>
-          <p:cNvPr id="181" name="TextBox 180"/>
-          <p:cNvSpPr txBox="1"/>
-          <p:nvPr/>
-        </p:nvSpPr>
-        <p:spPr>
-          <a:xfrm>
-            <a:off x="10668000" y="5664708"/>
-            <a:ext cx="914400" cy="68580"/>
-          </a:xfrm>
-          <a:prstGeom prst="rect">
-            <a:avLst/>
-          </a:prstGeom>
-          <a:noFill/>
-        </p:spPr>
-        <p:txBody>
-          <a:bodyPr wrap="square" lIns="0" rIns="0" tIns="0" bIns="0" anchor="t">
-            <a:spAutoFit/>
-          </a:bodyPr>
-          <a:lstStyle/>
-          <a:p>
-            <a:pPr algn="r">
-              <a:lnSpc>
-                <a:spcPct val="100000"/>
-              </a:lnSpc>
-            </a:pPr>
-            <a:r>
-              <a:rPr sz="700" b="0">
-                <a:solidFill>
-                  <a:srgbClr val="5B616B"/>
-                </a:solidFill>
-                <a:latin typeface="微软雅黑"/>
-                <a:ea typeface="微软雅黑"/>
-                <a:cs typeface="微软雅黑"/>
-              </a:rPr>
-              <a:t>10,207</a:t>
-            </a:r>
-          </a:p>
-        </p:txBody>
-      </p:sp>
-      <p:sp>
-        <p:nvSpPr>
-          <p:cNvPr id="182" name="TextBox 181"/>
-          <p:cNvSpPr txBox="1"/>
-          <p:nvPr/>
-        </p:nvSpPr>
-        <p:spPr>
-          <a:xfrm>
-            <a:off x="6534912" y="5733288"/>
-            <a:ext cx="4876800" cy="61721"/>
-          </a:xfrm>
-          <a:prstGeom prst="rect">
-            <a:avLst/>
-          </a:prstGeom>
-          <a:noFill/>
-        </p:spPr>
-        <p:txBody>
-          <a:bodyPr wrap="square" lIns="0" rIns="0" tIns="0" bIns="0" anchor="t">
-            <a:spAutoFit/>
-          </a:bodyPr>
-          <a:lstStyle/>
-          <a:p>
-            <a:pPr algn="l">
-              <a:lnSpc>
-                <a:spcPct val="100000"/>
-              </a:lnSpc>
-            </a:pPr>
-            <a:r>
-              <a:rPr sz="630" b="0">
-                <a:solidFill>
-                  <a:srgbClr val="5B616B"/>
-                </a:solidFill>
-                <a:latin typeface="微软雅黑"/>
-                <a:ea typeface="微软雅黑"/>
-                <a:cs typeface="微软雅黑"/>
-              </a:rPr>
-              <a:t>tingting0980</a:t>
-            </a:r>
-          </a:p>
-        </p:txBody>
-      </p:sp>
-      <p:sp>
-        <p:nvSpPr>
           <p:cNvPr id="183" name="TextBox 182"/>
           <p:cNvSpPr txBox="1"/>
           <p:nvPr/>
         </p:nvSpPr>
         <p:spPr>
           <a:xfrm>
-            <a:off x="6364224" y="5801868"/>
-            <a:ext cx="170688" cy="68580"/>
-          </a:xfrm>
-          <a:prstGeom prst="rect">
-            <a:avLst/>
-          </a:prstGeom>
-          <a:noFill/>
-        </p:spPr>
-        <p:txBody>
-          <a:bodyPr wrap="square" lIns="0" rIns="0" tIns="0" bIns="0" anchor="t">
-            <a:spAutoFit/>
-          </a:bodyPr>
-          <a:lstStyle/>
-          <a:p>
-            <a:pPr algn="l">
-              <a:lnSpc>
-                <a:spcPct val="100000"/>
-              </a:lnSpc>
-            </a:pPr>
-            <a:r>
-              <a:rPr sz="720" b="1">
-                <a:solidFill>
-                  <a:srgbClr val="B5333B"/>
-                </a:solidFill>
-                <a:latin typeface="微软雅黑"/>
-                <a:ea typeface="微软雅黑"/>
-                <a:cs typeface="微软雅黑"/>
-              </a:rPr>
-              <a:t>6</a:t>
-            </a:r>
-          </a:p>
-        </p:txBody>
-      </p:sp>
-      <p:sp>
-        <p:nvSpPr>
-          <p:cNvPr id="184" name="TextBox 183"/>
-          <p:cNvSpPr txBox="1"/>
-          <p:nvPr/>
-        </p:nvSpPr>
-        <p:spPr>
-          <a:xfrm>
-            <a:off x="6534912" y="5801868"/>
-            <a:ext cx="4084320" cy="68580"/>
-          </a:xfrm>
-          <a:prstGeom prst="rect">
-            <a:avLst/>
-          </a:prstGeom>
-          <a:noFill/>
-        </p:spPr>
-        <p:txBody>
-          <a:bodyPr wrap="square" lIns="0" rIns="0" tIns="0" bIns="0" anchor="t">
-            <a:spAutoFit/>
-          </a:bodyPr>
-          <a:lstStyle/>
-          <a:p>
-            <a:pPr algn="l">
-              <a:lnSpc>
-                <a:spcPct val="100000"/>
-              </a:lnSpc>
-            </a:pPr>
-            <a:r>
-              <a:rPr sz="720" b="1">
-                <a:solidFill>
-                  <a:srgbClr val="1A1A1C"/>
-                </a:solidFill>
-                <a:latin typeface="微软雅黑"/>
-                <a:ea typeface="微软雅黑"/>
-                <a:cs typeface="微软雅黑"/>
-              </a:rPr>
-              <a:t>baobiao-find-planned-projects（拟在建项目与招投标前置商机挖掘）</a:t>
-            </a:r>
-          </a:p>
-        </p:txBody>
-      </p:sp>
-      <p:sp>
-        <p:nvSpPr>
-          <p:cNvPr id="185" name="TextBox 184"/>
-          <p:cNvSpPr txBox="1"/>
-          <p:nvPr/>
-        </p:nvSpPr>
-        <p:spPr>
-          <a:xfrm>
-            <a:off x="10668000" y="5801868"/>
-            <a:ext cx="914400" cy="68580"/>
-          </a:xfrm>
-          <a:prstGeom prst="rect">
-            <a:avLst/>
-          </a:prstGeom>
-          <a:noFill/>
-        </p:spPr>
-        <p:txBody>
-          <a:bodyPr wrap="square" lIns="0" rIns="0" tIns="0" bIns="0" anchor="t">
-            <a:spAutoFit/>
-          </a:bodyPr>
-          <a:lstStyle/>
-          <a:p>
-            <a:pPr algn="r">
-              <a:lnSpc>
-                <a:spcPct val="100000"/>
-              </a:lnSpc>
-            </a:pPr>
-            <a:r>
-              <a:rPr sz="700" b="0">
-                <a:solidFill>
-                  <a:srgbClr val="5B616B"/>
-                </a:solidFill>
-                <a:latin typeface="微软雅黑"/>
-                <a:ea typeface="微软雅黑"/>
-                <a:cs typeface="微软雅黑"/>
-              </a:rPr>
-              <a:t>10,200</a:t>
-            </a:r>
-          </a:p>
-        </p:txBody>
-      </p:sp>
-      <p:sp>
-        <p:nvSpPr>
-          <p:cNvPr id="186" name="TextBox 185"/>
-          <p:cNvSpPr txBox="1"/>
-          <p:nvPr/>
-        </p:nvSpPr>
-        <p:spPr>
-          <a:xfrm>
-            <a:off x="6534912" y="5870448"/>
-            <a:ext cx="4876800" cy="61721"/>
-          </a:xfrm>
-          <a:prstGeom prst="rect">
-            <a:avLst/>
-          </a:prstGeom>
-          <a:noFill/>
-        </p:spPr>
-        <p:txBody>
-          <a:bodyPr wrap="square" lIns="0" rIns="0" tIns="0" bIns="0" anchor="t">
-            <a:spAutoFit/>
-          </a:bodyPr>
-          <a:lstStyle/>
-          <a:p>
-            <a:pPr algn="l">
-              <a:lnSpc>
-                <a:spcPct val="100000"/>
-              </a:lnSpc>
-            </a:pPr>
-            <a:r>
-              <a:rPr sz="630" b="0">
-                <a:solidFill>
-                  <a:srgbClr val="5B616B"/>
-                </a:solidFill>
-                <a:latin typeface="微软雅黑"/>
-                <a:ea typeface="微软雅黑"/>
-                <a:cs typeface="微软雅黑"/>
-              </a:rPr>
-              <a:t>tingting0980</a:t>
-            </a:r>
-          </a:p>
-        </p:txBody>
-      </p:sp>
-      <p:sp>
-        <p:nvSpPr>
-          <p:cNvPr id="187" name="TextBox 186"/>
-          <p:cNvSpPr txBox="1"/>
-          <p:nvPr/>
-        </p:nvSpPr>
-        <p:spPr>
-          <a:xfrm>
-            <a:off x="426720" y="6021324"/>
+            <a:off x="426720" y="5554980"/>
             <a:ext cx="11338560" cy="192024"/>
           </a:xfrm>
           <a:prstGeom prst="rect">

--- a/skill-final-v1.pptx
+++ b/skill-final-v1.pptx
@@ -44131,8 +44131,8 @@
         </p:nvSpPr>
         <p:spPr>
           <a:xfrm>
-            <a:off x="426720" y="4354830"/>
-            <a:ext cx="10972800" cy="164592"/>
+            <a:off x="426720" y="4320540"/>
+            <a:ext cx="11338560" cy="137160"/>
           </a:xfrm>
           <a:prstGeom prst="rect">
             <a:avLst/>
@@ -44159,7 +44159,7 @@
                 <a:ea typeface="微软雅黑"/>
                 <a:cs typeface="微软雅黑"/>
               </a:rPr>
-              <a:t>付费与 API Key：全站 10.0% / 19.3%，Top10000 付费仅 0.7%</a:t>
+              <a:t>Top6 下载：免费 / Payskill / API Key</a:t>
             </a:r>
           </a:p>
         </p:txBody>
@@ -44172,8 +44172,8 @@
         </p:nvSpPr>
         <p:spPr>
           <a:xfrm>
-            <a:off x="426720" y="4512564"/>
-            <a:ext cx="10972800" cy="137160"/>
+            <a:off x="426720" y="4485132"/>
+            <a:ext cx="11338560" cy="89154"/>
           </a:xfrm>
           <a:prstGeom prst="rect">
             <a:avLst/>
@@ -44192,7 +44192,7 @@
               </a:lnSpc>
             </a:pPr>
             <a:r>
-              <a:rPr sz="850" b="0">
+              <a:rPr sz="720" b="0">
                 <a:solidFill>
                   <a:srgbClr val="8B8E94"/>
                 </a:solidFill>
@@ -44200,7 +44200,7 @@
                 <a:ea typeface="微软雅黑"/>
                 <a:cs typeface="微软雅黑"/>
               </a:rPr>
-              <a:t>全站 200,403 条；Pay Skill 20,125、API Key 38,646</a:t>
+              <a:t>Top10000 内：免费 6,908 / Payskill 68 / API Key 3,030；Payskill 与 API Key 可重叠</a:t>
             </a:r>
           </a:p>
         </p:txBody>
@@ -44213,8 +44213,8 @@
         </p:nvSpPr>
         <p:spPr>
           <a:xfrm>
-            <a:off x="426720" y="4677156"/>
-            <a:ext cx="1097280" cy="246887"/>
+            <a:off x="426720" y="4594860"/>
+            <a:ext cx="3535679" cy="96012"/>
           </a:xfrm>
           <a:prstGeom prst="rect">
             <a:avLst/>
@@ -44233,7 +44233,7 @@
               </a:lnSpc>
             </a:pPr>
             <a:r>
-              <a:rPr sz="1600" b="1">
+              <a:rPr sz="860" b="1">
                 <a:solidFill>
                   <a:srgbClr val="B5333B"/>
                 </a:solidFill>
@@ -44241,21 +44241,65 @@
                 <a:ea typeface="微软雅黑"/>
                 <a:cs typeface="微软雅黑"/>
               </a:rPr>
-              <a:t>10.0%</a:t>
-            </a:r>
-          </a:p>
-        </p:txBody>
-      </p:sp>
-      <p:sp>
-        <p:nvSpPr>
-          <p:cNvPr id="75" name="TextBox 74"/>
-          <p:cNvSpPr txBox="1"/>
-          <p:nvPr/>
-        </p:nvSpPr>
-        <p:spPr>
-          <a:xfrm>
-            <a:off x="426720" y="4910328"/>
-            <a:ext cx="1584960" cy="137160"/>
+              <a:t>免费 Top6</a:t>
+            </a:r>
+          </a:p>
+        </p:txBody>
+      </p:sp>
+      <p:sp>
+        <p:nvSpPr>
+          <p:cNvPr id="75" name="Rectangle 74"/>
+          <p:cNvSpPr/>
+          <p:nvPr/>
+        </p:nvSpPr>
+        <p:spPr>
+          <a:xfrm>
+            <a:off x="426720" y="4690872"/>
+            <a:ext cx="3535679" cy="5486"/>
+          </a:xfrm>
+          <a:prstGeom prst="rect">
+            <a:avLst/>
+          </a:prstGeom>
+          <a:solidFill>
+            <a:srgbClr val="E2E4E7"/>
+          </a:solidFill>
+          <a:ln>
+            <a:noFill/>
+          </a:ln>
+          <a:effectLst/>
+        </p:spPr>
+        <p:style>
+          <a:lnRef idx="1">
+            <a:schemeClr val="accent1"/>
+          </a:lnRef>
+          <a:fillRef idx="3">
+            <a:schemeClr val="accent1"/>
+          </a:fillRef>
+          <a:effectRef idx="2">
+            <a:schemeClr val="accent1"/>
+          </a:effectRef>
+          <a:fontRef idx="minor">
+            <a:schemeClr val="lt1"/>
+          </a:fontRef>
+        </p:style>
+        <p:txBody>
+          <a:bodyPr rtlCol="0" anchor="ctr"/>
+          <a:lstStyle/>
+          <a:p>
+            <a:pPr algn="ctr"/>
+          </a:p>
+        </p:txBody>
+      </p:sp>
+      <p:sp>
+        <p:nvSpPr>
+          <p:cNvPr id="76" name="TextBox 75"/>
+          <p:cNvSpPr txBox="1"/>
+          <p:nvPr/>
+        </p:nvSpPr>
+        <p:spPr>
+          <a:xfrm>
+            <a:off x="426720" y="4718304"/>
+            <a:ext cx="170688" cy="75438"/>
           </a:xfrm>
           <a:prstGeom prst="rect">
             <a:avLst/>
@@ -44274,29 +44318,29 @@
               </a:lnSpc>
             </a:pPr>
             <a:r>
-              <a:rPr sz="850" b="0">
-                <a:solidFill>
-                  <a:srgbClr val="5B616B"/>
-                </a:solidFill>
-                <a:latin typeface="微软雅黑"/>
-                <a:ea typeface="微软雅黑"/>
-                <a:cs typeface="微软雅黑"/>
-              </a:rPr>
-              <a:t>Pay Skill</a:t>
-            </a:r>
-          </a:p>
-        </p:txBody>
-      </p:sp>
-      <p:sp>
-        <p:nvSpPr>
-          <p:cNvPr id="76" name="TextBox 75"/>
-          <p:cNvSpPr txBox="1"/>
-          <p:nvPr/>
-        </p:nvSpPr>
-        <p:spPr>
-          <a:xfrm>
-            <a:off x="2194560" y="4677156"/>
-            <a:ext cx="1097280" cy="246887"/>
+              <a:rPr sz="740" b="1">
+                <a:solidFill>
+                  <a:srgbClr val="B5333B"/>
+                </a:solidFill>
+                <a:latin typeface="微软雅黑"/>
+                <a:ea typeface="微软雅黑"/>
+                <a:cs typeface="微软雅黑"/>
+              </a:rPr>
+              <a:t>1</a:t>
+            </a:r>
+          </a:p>
+        </p:txBody>
+      </p:sp>
+      <p:sp>
+        <p:nvSpPr>
+          <p:cNvPr id="77" name="TextBox 76"/>
+          <p:cNvSpPr txBox="1"/>
+          <p:nvPr/>
+        </p:nvSpPr>
+        <p:spPr>
+          <a:xfrm>
+            <a:off x="621792" y="4718304"/>
+            <a:ext cx="2621280" cy="75438"/>
           </a:xfrm>
           <a:prstGeom prst="rect">
             <a:avLst/>
@@ -44315,29 +44359,70 @@
               </a:lnSpc>
             </a:pPr>
             <a:r>
-              <a:rPr sz="1600" b="1">
-                <a:solidFill>
-                  <a:srgbClr val="B5333B"/>
-                </a:solidFill>
-                <a:latin typeface="微软雅黑"/>
-                <a:ea typeface="微软雅黑"/>
-                <a:cs typeface="微软雅黑"/>
-              </a:rPr>
-              <a:t>19.3%</a:t>
-            </a:r>
-          </a:p>
-        </p:txBody>
-      </p:sp>
-      <p:sp>
-        <p:nvSpPr>
-          <p:cNvPr id="77" name="TextBox 76"/>
-          <p:cNvSpPr txBox="1"/>
-          <p:nvPr/>
-        </p:nvSpPr>
-        <p:spPr>
-          <a:xfrm>
-            <a:off x="2194560" y="4910328"/>
-            <a:ext cx="1584960" cy="137160"/>
+              <a:rPr sz="720" b="1">
+                <a:solidFill>
+                  <a:srgbClr val="1A1A1C"/>
+                </a:solidFill>
+                <a:latin typeface="微软雅黑"/>
+                <a:ea typeface="微软雅黑"/>
+                <a:cs typeface="微软雅黑"/>
+              </a:rPr>
+              <a:t>编程大神.Skill</a:t>
+            </a:r>
+          </a:p>
+        </p:txBody>
+      </p:sp>
+      <p:sp>
+        <p:nvSpPr>
+          <p:cNvPr id="78" name="TextBox 77"/>
+          <p:cNvSpPr txBox="1"/>
+          <p:nvPr/>
+        </p:nvSpPr>
+        <p:spPr>
+          <a:xfrm>
+            <a:off x="3328416" y="4718304"/>
+            <a:ext cx="609600" cy="75438"/>
+          </a:xfrm>
+          <a:prstGeom prst="rect">
+            <a:avLst/>
+          </a:prstGeom>
+          <a:noFill/>
+        </p:spPr>
+        <p:txBody>
+          <a:bodyPr wrap="square" lIns="0" rIns="0" tIns="0" bIns="0" anchor="t">
+            <a:spAutoFit/>
+          </a:bodyPr>
+          <a:lstStyle/>
+          <a:p>
+            <a:pPr algn="r">
+              <a:lnSpc>
+                <a:spcPct val="100000"/>
+              </a:lnSpc>
+            </a:pPr>
+            <a:r>
+              <a:rPr sz="720" b="0">
+                <a:solidFill>
+                  <a:srgbClr val="5B616B"/>
+                </a:solidFill>
+                <a:latin typeface="微软雅黑"/>
+                <a:ea typeface="微软雅黑"/>
+                <a:cs typeface="微软雅黑"/>
+              </a:rPr>
+              <a:t>5,213,811</a:t>
+            </a:r>
+          </a:p>
+        </p:txBody>
+      </p:sp>
+      <p:sp>
+        <p:nvSpPr>
+          <p:cNvPr id="79" name="TextBox 78"/>
+          <p:cNvSpPr txBox="1"/>
+          <p:nvPr/>
+        </p:nvSpPr>
+        <p:spPr>
+          <a:xfrm>
+            <a:off x="621792" y="4821174"/>
+            <a:ext cx="3291840" cy="61721"/>
           </a:xfrm>
           <a:prstGeom prst="rect">
             <a:avLst/>
@@ -44356,7 +44441,7 @@
               </a:lnSpc>
             </a:pPr>
             <a:r>
-              <a:rPr sz="850" b="0">
+              <a:rPr sz="620" b="0">
                 <a:solidFill>
                   <a:srgbClr val="5B616B"/>
                 </a:solidFill>
@@ -44364,63 +44449,21 @@
                 <a:ea typeface="微软雅黑"/>
                 <a:cs typeface="微软雅黑"/>
               </a:rPr>
-              <a:t>API Key</a:t>
-            </a:r>
-          </a:p>
-        </p:txBody>
-      </p:sp>
-      <p:sp>
-        <p:nvSpPr>
-          <p:cNvPr id="78" name="TextBox 77"/>
-          <p:cNvSpPr txBox="1"/>
-          <p:nvPr/>
-        </p:nvSpPr>
-        <p:spPr>
-          <a:xfrm>
-            <a:off x="4267200" y="4677156"/>
-            <a:ext cx="7315200" cy="411480"/>
-          </a:xfrm>
-          <a:prstGeom prst="rect">
-            <a:avLst/>
-          </a:prstGeom>
-          <a:noFill/>
-        </p:spPr>
-        <p:txBody>
-          <a:bodyPr wrap="square" lIns="0" rIns="0" tIns="0" bIns="0" anchor="t">
-            <a:spAutoFit/>
-          </a:bodyPr>
-          <a:lstStyle/>
-          <a:p>
-            <a:pPr algn="l">
-              <a:lnSpc>
-                <a:spcPct val="110000"/>
-              </a:lnSpc>
-            </a:pPr>
-            <a:r>
-              <a:rPr sz="850" b="0">
-                <a:solidFill>
-                  <a:srgbClr val="8B8E94"/>
-                </a:solidFill>
-                <a:latin typeface="微软雅黑"/>
-                <a:ea typeface="微软雅黑"/>
-                <a:cs typeface="微软雅黑"/>
-              </a:rPr>
-              <a:t>付费标签 17,123（8.5%）、支付宝 2,901（1.4%）；Pay Skill 且 API Key 331 条。
-Top10000：付费 0.7%（68 条）、API Key 30.3%；Pay Skill 分类 0 条。</a:t>
-            </a:r>
-          </a:p>
-        </p:txBody>
-      </p:sp>
-      <p:sp>
-        <p:nvSpPr>
-          <p:cNvPr id="79" name="TextBox 78"/>
-          <p:cNvSpPr txBox="1"/>
-          <p:nvPr/>
-        </p:nvSpPr>
-        <p:spPr>
-          <a:xfrm>
-            <a:off x="426720" y="5795010"/>
-            <a:ext cx="11338560" cy="192024"/>
+              <a:t>阿客实验室</a:t>
+            </a:r>
+          </a:p>
+        </p:txBody>
+      </p:sp>
+      <p:sp>
+        <p:nvSpPr>
+          <p:cNvPr id="80" name="TextBox 79"/>
+          <p:cNvSpPr txBox="1"/>
+          <p:nvPr/>
+        </p:nvSpPr>
+        <p:spPr>
+          <a:xfrm>
+            <a:off x="426720" y="4889754"/>
+            <a:ext cx="170688" cy="75438"/>
           </a:xfrm>
           <a:prstGeom prst="rect">
             <a:avLst/>
@@ -44439,7 +44482,48 @@
               </a:lnSpc>
             </a:pPr>
             <a:r>
-              <a:rPr sz="1000" b="0">
+              <a:rPr sz="740" b="1">
+                <a:solidFill>
+                  <a:srgbClr val="B5333B"/>
+                </a:solidFill>
+                <a:latin typeface="微软雅黑"/>
+                <a:ea typeface="微软雅黑"/>
+                <a:cs typeface="微软雅黑"/>
+              </a:rPr>
+              <a:t>2</a:t>
+            </a:r>
+          </a:p>
+        </p:txBody>
+      </p:sp>
+      <p:sp>
+        <p:nvSpPr>
+          <p:cNvPr id="81" name="TextBox 80"/>
+          <p:cNvSpPr txBox="1"/>
+          <p:nvPr/>
+        </p:nvSpPr>
+        <p:spPr>
+          <a:xfrm>
+            <a:off x="621792" y="4889754"/>
+            <a:ext cx="2621280" cy="75438"/>
+          </a:xfrm>
+          <a:prstGeom prst="rect">
+            <a:avLst/>
+          </a:prstGeom>
+          <a:noFill/>
+        </p:spPr>
+        <p:txBody>
+          <a:bodyPr wrap="square" lIns="0" rIns="0" tIns="0" bIns="0" anchor="t">
+            <a:spAutoFit/>
+          </a:bodyPr>
+          <a:lstStyle/>
+          <a:p>
+            <a:pPr algn="l">
+              <a:lnSpc>
+                <a:spcPct val="100000"/>
+              </a:lnSpc>
+            </a:pPr>
+            <a:r>
+              <a:rPr sz="720" b="1">
                 <a:solidFill>
                   <a:srgbClr val="1A1A1C"/>
                 </a:solidFill>
@@ -44447,7 +44531,2924 @@
                 <a:ea typeface="微软雅黑"/>
                 <a:cs typeface="微软雅黑"/>
               </a:rPr>
-              <a:t>读法：镜像撑数量也撑总下载，企业撑单条；付费沉在长尾，API 在头部。</a:t>
+              <a:t>编程专家Pro.Skill</a:t>
+            </a:r>
+          </a:p>
+        </p:txBody>
+      </p:sp>
+      <p:sp>
+        <p:nvSpPr>
+          <p:cNvPr id="82" name="TextBox 81"/>
+          <p:cNvSpPr txBox="1"/>
+          <p:nvPr/>
+        </p:nvSpPr>
+        <p:spPr>
+          <a:xfrm>
+            <a:off x="3328416" y="4889754"/>
+            <a:ext cx="609600" cy="75438"/>
+          </a:xfrm>
+          <a:prstGeom prst="rect">
+            <a:avLst/>
+          </a:prstGeom>
+          <a:noFill/>
+        </p:spPr>
+        <p:txBody>
+          <a:bodyPr wrap="square" lIns="0" rIns="0" tIns="0" bIns="0" anchor="t">
+            <a:spAutoFit/>
+          </a:bodyPr>
+          <a:lstStyle/>
+          <a:p>
+            <a:pPr algn="r">
+              <a:lnSpc>
+                <a:spcPct val="100000"/>
+              </a:lnSpc>
+            </a:pPr>
+            <a:r>
+              <a:rPr sz="720" b="0">
+                <a:solidFill>
+                  <a:srgbClr val="5B616B"/>
+                </a:solidFill>
+                <a:latin typeface="微软雅黑"/>
+                <a:ea typeface="微软雅黑"/>
+                <a:cs typeface="微软雅黑"/>
+              </a:rPr>
+              <a:t>5,192,102</a:t>
+            </a:r>
+          </a:p>
+        </p:txBody>
+      </p:sp>
+      <p:sp>
+        <p:nvSpPr>
+          <p:cNvPr id="83" name="TextBox 82"/>
+          <p:cNvSpPr txBox="1"/>
+          <p:nvPr/>
+        </p:nvSpPr>
+        <p:spPr>
+          <a:xfrm>
+            <a:off x="621792" y="4992624"/>
+            <a:ext cx="3291840" cy="61721"/>
+          </a:xfrm>
+          <a:prstGeom prst="rect">
+            <a:avLst/>
+          </a:prstGeom>
+          <a:noFill/>
+        </p:spPr>
+        <p:txBody>
+          <a:bodyPr wrap="square" lIns="0" rIns="0" tIns="0" bIns="0" anchor="t">
+            <a:spAutoFit/>
+          </a:bodyPr>
+          <a:lstStyle/>
+          <a:p>
+            <a:pPr algn="l">
+              <a:lnSpc>
+                <a:spcPct val="100000"/>
+              </a:lnSpc>
+            </a:pPr>
+            <a:r>
+              <a:rPr sz="620" b="0">
+                <a:solidFill>
+                  <a:srgbClr val="5B616B"/>
+                </a:solidFill>
+                <a:latin typeface="微软雅黑"/>
+                <a:ea typeface="微软雅黑"/>
+                <a:cs typeface="微软雅黑"/>
+              </a:rPr>
+              <a:t>user_47d655f0</a:t>
+            </a:r>
+          </a:p>
+        </p:txBody>
+      </p:sp>
+      <p:sp>
+        <p:nvSpPr>
+          <p:cNvPr id="84" name="TextBox 83"/>
+          <p:cNvSpPr txBox="1"/>
+          <p:nvPr/>
+        </p:nvSpPr>
+        <p:spPr>
+          <a:xfrm>
+            <a:off x="426720" y="5061204"/>
+            <a:ext cx="170688" cy="75438"/>
+          </a:xfrm>
+          <a:prstGeom prst="rect">
+            <a:avLst/>
+          </a:prstGeom>
+          <a:noFill/>
+        </p:spPr>
+        <p:txBody>
+          <a:bodyPr wrap="square" lIns="0" rIns="0" tIns="0" bIns="0" anchor="t">
+            <a:spAutoFit/>
+          </a:bodyPr>
+          <a:lstStyle/>
+          <a:p>
+            <a:pPr algn="l">
+              <a:lnSpc>
+                <a:spcPct val="100000"/>
+              </a:lnSpc>
+            </a:pPr>
+            <a:r>
+              <a:rPr sz="740" b="1">
+                <a:solidFill>
+                  <a:srgbClr val="B5333B"/>
+                </a:solidFill>
+                <a:latin typeface="微软雅黑"/>
+                <a:ea typeface="微软雅黑"/>
+                <a:cs typeface="微软雅黑"/>
+              </a:rPr>
+              <a:t>3</a:t>
+            </a:r>
+          </a:p>
+        </p:txBody>
+      </p:sp>
+      <p:sp>
+        <p:nvSpPr>
+          <p:cNvPr id="85" name="TextBox 84"/>
+          <p:cNvSpPr txBox="1"/>
+          <p:nvPr/>
+        </p:nvSpPr>
+        <p:spPr>
+          <a:xfrm>
+            <a:off x="621792" y="5061204"/>
+            <a:ext cx="2621280" cy="75438"/>
+          </a:xfrm>
+          <a:prstGeom prst="rect">
+            <a:avLst/>
+          </a:prstGeom>
+          <a:noFill/>
+        </p:spPr>
+        <p:txBody>
+          <a:bodyPr wrap="square" lIns="0" rIns="0" tIns="0" bIns="0" anchor="t">
+            <a:spAutoFit/>
+          </a:bodyPr>
+          <a:lstStyle/>
+          <a:p>
+            <a:pPr algn="l">
+              <a:lnSpc>
+                <a:spcPct val="100000"/>
+              </a:lnSpc>
+            </a:pPr>
+            <a:r>
+              <a:rPr sz="720" b="1">
+                <a:solidFill>
+                  <a:srgbClr val="1A1A1C"/>
+                </a:solidFill>
+                <a:latin typeface="微软雅黑"/>
+                <a:ea typeface="微软雅黑"/>
+                <a:cs typeface="微软雅黑"/>
+              </a:rPr>
+              <a:t>编程专家.Skill</a:t>
+            </a:r>
+          </a:p>
+        </p:txBody>
+      </p:sp>
+      <p:sp>
+        <p:nvSpPr>
+          <p:cNvPr id="86" name="TextBox 85"/>
+          <p:cNvSpPr txBox="1"/>
+          <p:nvPr/>
+        </p:nvSpPr>
+        <p:spPr>
+          <a:xfrm>
+            <a:off x="3328416" y="5061204"/>
+            <a:ext cx="609600" cy="75438"/>
+          </a:xfrm>
+          <a:prstGeom prst="rect">
+            <a:avLst/>
+          </a:prstGeom>
+          <a:noFill/>
+        </p:spPr>
+        <p:txBody>
+          <a:bodyPr wrap="square" lIns="0" rIns="0" tIns="0" bIns="0" anchor="t">
+            <a:spAutoFit/>
+          </a:bodyPr>
+          <a:lstStyle/>
+          <a:p>
+            <a:pPr algn="r">
+              <a:lnSpc>
+                <a:spcPct val="100000"/>
+              </a:lnSpc>
+            </a:pPr>
+            <a:r>
+              <a:rPr sz="720" b="0">
+                <a:solidFill>
+                  <a:srgbClr val="5B616B"/>
+                </a:solidFill>
+                <a:latin typeface="微软雅黑"/>
+                <a:ea typeface="微软雅黑"/>
+                <a:cs typeface="微软雅黑"/>
+              </a:rPr>
+              <a:t>4,877,322</a:t>
+            </a:r>
+          </a:p>
+        </p:txBody>
+      </p:sp>
+      <p:sp>
+        <p:nvSpPr>
+          <p:cNvPr id="87" name="TextBox 86"/>
+          <p:cNvSpPr txBox="1"/>
+          <p:nvPr/>
+        </p:nvSpPr>
+        <p:spPr>
+          <a:xfrm>
+            <a:off x="621792" y="5164074"/>
+            <a:ext cx="3291840" cy="61721"/>
+          </a:xfrm>
+          <a:prstGeom prst="rect">
+            <a:avLst/>
+          </a:prstGeom>
+          <a:noFill/>
+        </p:spPr>
+        <p:txBody>
+          <a:bodyPr wrap="square" lIns="0" rIns="0" tIns="0" bIns="0" anchor="t">
+            <a:spAutoFit/>
+          </a:bodyPr>
+          <a:lstStyle/>
+          <a:p>
+            <a:pPr algn="l">
+              <a:lnSpc>
+                <a:spcPct val="100000"/>
+              </a:lnSpc>
+            </a:pPr>
+            <a:r>
+              <a:rPr sz="620" b="0">
+                <a:solidFill>
+                  <a:srgbClr val="5B616B"/>
+                </a:solidFill>
+                <a:latin typeface="微软雅黑"/>
+                <a:ea typeface="微软雅黑"/>
+                <a:cs typeface="微软雅黑"/>
+              </a:rPr>
+              <a:t>user_741dc82b</a:t>
+            </a:r>
+          </a:p>
+        </p:txBody>
+      </p:sp>
+      <p:sp>
+        <p:nvSpPr>
+          <p:cNvPr id="88" name="TextBox 87"/>
+          <p:cNvSpPr txBox="1"/>
+          <p:nvPr/>
+        </p:nvSpPr>
+        <p:spPr>
+          <a:xfrm>
+            <a:off x="426720" y="5232653"/>
+            <a:ext cx="170688" cy="75438"/>
+          </a:xfrm>
+          <a:prstGeom prst="rect">
+            <a:avLst/>
+          </a:prstGeom>
+          <a:noFill/>
+        </p:spPr>
+        <p:txBody>
+          <a:bodyPr wrap="square" lIns="0" rIns="0" tIns="0" bIns="0" anchor="t">
+            <a:spAutoFit/>
+          </a:bodyPr>
+          <a:lstStyle/>
+          <a:p>
+            <a:pPr algn="l">
+              <a:lnSpc>
+                <a:spcPct val="100000"/>
+              </a:lnSpc>
+            </a:pPr>
+            <a:r>
+              <a:rPr sz="740" b="1">
+                <a:solidFill>
+                  <a:srgbClr val="B5333B"/>
+                </a:solidFill>
+                <a:latin typeface="微软雅黑"/>
+                <a:ea typeface="微软雅黑"/>
+                <a:cs typeface="微软雅黑"/>
+              </a:rPr>
+              <a:t>4</a:t>
+            </a:r>
+          </a:p>
+        </p:txBody>
+      </p:sp>
+      <p:sp>
+        <p:nvSpPr>
+          <p:cNvPr id="89" name="TextBox 88"/>
+          <p:cNvSpPr txBox="1"/>
+          <p:nvPr/>
+        </p:nvSpPr>
+        <p:spPr>
+          <a:xfrm>
+            <a:off x="621792" y="5232653"/>
+            <a:ext cx="2621280" cy="75438"/>
+          </a:xfrm>
+          <a:prstGeom prst="rect">
+            <a:avLst/>
+          </a:prstGeom>
+          <a:noFill/>
+        </p:spPr>
+        <p:txBody>
+          <a:bodyPr wrap="square" lIns="0" rIns="0" tIns="0" bIns="0" anchor="t">
+            <a:spAutoFit/>
+          </a:bodyPr>
+          <a:lstStyle/>
+          <a:p>
+            <a:pPr algn="l">
+              <a:lnSpc>
+                <a:spcPct val="100000"/>
+              </a:lnSpc>
+            </a:pPr>
+            <a:r>
+              <a:rPr sz="720" b="1">
+                <a:solidFill>
+                  <a:srgbClr val="1A1A1C"/>
+                </a:solidFill>
+                <a:latin typeface="微软雅黑"/>
+                <a:ea typeface="微软雅黑"/>
+                <a:cs typeface="微软雅黑"/>
+              </a:rPr>
+              <a:t>搜索引擎</a:t>
+            </a:r>
+          </a:p>
+        </p:txBody>
+      </p:sp>
+      <p:sp>
+        <p:nvSpPr>
+          <p:cNvPr id="90" name="TextBox 89"/>
+          <p:cNvSpPr txBox="1"/>
+          <p:nvPr/>
+        </p:nvSpPr>
+        <p:spPr>
+          <a:xfrm>
+            <a:off x="3328416" y="5232653"/>
+            <a:ext cx="609600" cy="75438"/>
+          </a:xfrm>
+          <a:prstGeom prst="rect">
+            <a:avLst/>
+          </a:prstGeom>
+          <a:noFill/>
+        </p:spPr>
+        <p:txBody>
+          <a:bodyPr wrap="square" lIns="0" rIns="0" tIns="0" bIns="0" anchor="t">
+            <a:spAutoFit/>
+          </a:bodyPr>
+          <a:lstStyle/>
+          <a:p>
+            <a:pPr algn="r">
+              <a:lnSpc>
+                <a:spcPct val="100000"/>
+              </a:lnSpc>
+            </a:pPr>
+            <a:r>
+              <a:rPr sz="720" b="0">
+                <a:solidFill>
+                  <a:srgbClr val="5B616B"/>
+                </a:solidFill>
+                <a:latin typeface="微软雅黑"/>
+                <a:ea typeface="微软雅黑"/>
+                <a:cs typeface="微软雅黑"/>
+              </a:rPr>
+              <a:t>4,712,038</a:t>
+            </a:r>
+          </a:p>
+        </p:txBody>
+      </p:sp>
+      <p:sp>
+        <p:nvSpPr>
+          <p:cNvPr id="91" name="TextBox 90"/>
+          <p:cNvSpPr txBox="1"/>
+          <p:nvPr/>
+        </p:nvSpPr>
+        <p:spPr>
+          <a:xfrm>
+            <a:off x="621792" y="5335523"/>
+            <a:ext cx="3291840" cy="61721"/>
+          </a:xfrm>
+          <a:prstGeom prst="rect">
+            <a:avLst/>
+          </a:prstGeom>
+          <a:noFill/>
+        </p:spPr>
+        <p:txBody>
+          <a:bodyPr wrap="square" lIns="0" rIns="0" tIns="0" bIns="0" anchor="t">
+            <a:spAutoFit/>
+          </a:bodyPr>
+          <a:lstStyle/>
+          <a:p>
+            <a:pPr algn="l">
+              <a:lnSpc>
+                <a:spcPct val="100000"/>
+              </a:lnSpc>
+            </a:pPr>
+            <a:r>
+              <a:rPr sz="620" b="0">
+                <a:solidFill>
+                  <a:srgbClr val="5B616B"/>
+                </a:solidFill>
+                <a:latin typeface="微软雅黑"/>
+                <a:ea typeface="微软雅黑"/>
+                <a:cs typeface="微软雅黑"/>
+              </a:rPr>
+              <a:t>智创未来</a:t>
+            </a:r>
+          </a:p>
+        </p:txBody>
+      </p:sp>
+      <p:sp>
+        <p:nvSpPr>
+          <p:cNvPr id="92" name="TextBox 91"/>
+          <p:cNvSpPr txBox="1"/>
+          <p:nvPr/>
+        </p:nvSpPr>
+        <p:spPr>
+          <a:xfrm>
+            <a:off x="426720" y="5404103"/>
+            <a:ext cx="170688" cy="75438"/>
+          </a:xfrm>
+          <a:prstGeom prst="rect">
+            <a:avLst/>
+          </a:prstGeom>
+          <a:noFill/>
+        </p:spPr>
+        <p:txBody>
+          <a:bodyPr wrap="square" lIns="0" rIns="0" tIns="0" bIns="0" anchor="t">
+            <a:spAutoFit/>
+          </a:bodyPr>
+          <a:lstStyle/>
+          <a:p>
+            <a:pPr algn="l">
+              <a:lnSpc>
+                <a:spcPct val="100000"/>
+              </a:lnSpc>
+            </a:pPr>
+            <a:r>
+              <a:rPr sz="740" b="1">
+                <a:solidFill>
+                  <a:srgbClr val="B5333B"/>
+                </a:solidFill>
+                <a:latin typeface="微软雅黑"/>
+                <a:ea typeface="微软雅黑"/>
+                <a:cs typeface="微软雅黑"/>
+              </a:rPr>
+              <a:t>5</a:t>
+            </a:r>
+          </a:p>
+        </p:txBody>
+      </p:sp>
+      <p:sp>
+        <p:nvSpPr>
+          <p:cNvPr id="93" name="TextBox 92"/>
+          <p:cNvSpPr txBox="1"/>
+          <p:nvPr/>
+        </p:nvSpPr>
+        <p:spPr>
+          <a:xfrm>
+            <a:off x="621792" y="5404103"/>
+            <a:ext cx="2621280" cy="75438"/>
+          </a:xfrm>
+          <a:prstGeom prst="rect">
+            <a:avLst/>
+          </a:prstGeom>
+          <a:noFill/>
+        </p:spPr>
+        <p:txBody>
+          <a:bodyPr wrap="square" lIns="0" rIns="0" tIns="0" bIns="0" anchor="t">
+            <a:spAutoFit/>
+          </a:bodyPr>
+          <a:lstStyle/>
+          <a:p>
+            <a:pPr algn="l">
+              <a:lnSpc>
+                <a:spcPct val="100000"/>
+              </a:lnSpc>
+            </a:pPr>
+            <a:r>
+              <a:rPr sz="720" b="1">
+                <a:solidFill>
+                  <a:srgbClr val="1A1A1C"/>
+                </a:solidFill>
+                <a:latin typeface="微软雅黑"/>
+                <a:ea typeface="微软雅黑"/>
+                <a:cs typeface="微软雅黑"/>
+              </a:rPr>
+              <a:t>dev-expert</a:t>
+            </a:r>
+          </a:p>
+        </p:txBody>
+      </p:sp>
+      <p:sp>
+        <p:nvSpPr>
+          <p:cNvPr id="94" name="TextBox 93"/>
+          <p:cNvSpPr txBox="1"/>
+          <p:nvPr/>
+        </p:nvSpPr>
+        <p:spPr>
+          <a:xfrm>
+            <a:off x="3328416" y="5404103"/>
+            <a:ext cx="609600" cy="75438"/>
+          </a:xfrm>
+          <a:prstGeom prst="rect">
+            <a:avLst/>
+          </a:prstGeom>
+          <a:noFill/>
+        </p:spPr>
+        <p:txBody>
+          <a:bodyPr wrap="square" lIns="0" rIns="0" tIns="0" bIns="0" anchor="t">
+            <a:spAutoFit/>
+          </a:bodyPr>
+          <a:lstStyle/>
+          <a:p>
+            <a:pPr algn="r">
+              <a:lnSpc>
+                <a:spcPct val="100000"/>
+              </a:lnSpc>
+            </a:pPr>
+            <a:r>
+              <a:rPr sz="720" b="0">
+                <a:solidFill>
+                  <a:srgbClr val="5B616B"/>
+                </a:solidFill>
+                <a:latin typeface="微软雅黑"/>
+                <a:ea typeface="微软雅黑"/>
+                <a:cs typeface="微软雅黑"/>
+              </a:rPr>
+              <a:t>4,173,129</a:t>
+            </a:r>
+          </a:p>
+        </p:txBody>
+      </p:sp>
+      <p:sp>
+        <p:nvSpPr>
+          <p:cNvPr id="95" name="TextBox 94"/>
+          <p:cNvSpPr txBox="1"/>
+          <p:nvPr/>
+        </p:nvSpPr>
+        <p:spPr>
+          <a:xfrm>
+            <a:off x="621792" y="5506974"/>
+            <a:ext cx="3291840" cy="61721"/>
+          </a:xfrm>
+          <a:prstGeom prst="rect">
+            <a:avLst/>
+          </a:prstGeom>
+          <a:noFill/>
+        </p:spPr>
+        <p:txBody>
+          <a:bodyPr wrap="square" lIns="0" rIns="0" tIns="0" bIns="0" anchor="t">
+            <a:spAutoFit/>
+          </a:bodyPr>
+          <a:lstStyle/>
+          <a:p>
+            <a:pPr algn="l">
+              <a:lnSpc>
+                <a:spcPct val="100000"/>
+              </a:lnSpc>
+            </a:pPr>
+            <a:r>
+              <a:rPr sz="620" b="0">
+                <a:solidFill>
+                  <a:srgbClr val="5B616B"/>
+                </a:solidFill>
+                <a:latin typeface="微软雅黑"/>
+                <a:ea typeface="微软雅黑"/>
+                <a:cs typeface="微软雅黑"/>
+              </a:rPr>
+              <a:t>user_814dbe54</a:t>
+            </a:r>
+          </a:p>
+        </p:txBody>
+      </p:sp>
+      <p:sp>
+        <p:nvSpPr>
+          <p:cNvPr id="96" name="TextBox 95"/>
+          <p:cNvSpPr txBox="1"/>
+          <p:nvPr/>
+        </p:nvSpPr>
+        <p:spPr>
+          <a:xfrm>
+            <a:off x="426720" y="5575554"/>
+            <a:ext cx="170688" cy="75438"/>
+          </a:xfrm>
+          <a:prstGeom prst="rect">
+            <a:avLst/>
+          </a:prstGeom>
+          <a:noFill/>
+        </p:spPr>
+        <p:txBody>
+          <a:bodyPr wrap="square" lIns="0" rIns="0" tIns="0" bIns="0" anchor="t">
+            <a:spAutoFit/>
+          </a:bodyPr>
+          <a:lstStyle/>
+          <a:p>
+            <a:pPr algn="l">
+              <a:lnSpc>
+                <a:spcPct val="100000"/>
+              </a:lnSpc>
+            </a:pPr>
+            <a:r>
+              <a:rPr sz="740" b="1">
+                <a:solidFill>
+                  <a:srgbClr val="B5333B"/>
+                </a:solidFill>
+                <a:latin typeface="微软雅黑"/>
+                <a:ea typeface="微软雅黑"/>
+                <a:cs typeface="微软雅黑"/>
+              </a:rPr>
+              <a:t>6</a:t>
+            </a:r>
+          </a:p>
+        </p:txBody>
+      </p:sp>
+      <p:sp>
+        <p:nvSpPr>
+          <p:cNvPr id="97" name="TextBox 96"/>
+          <p:cNvSpPr txBox="1"/>
+          <p:nvPr/>
+        </p:nvSpPr>
+        <p:spPr>
+          <a:xfrm>
+            <a:off x="621792" y="5575554"/>
+            <a:ext cx="2621280" cy="75438"/>
+          </a:xfrm>
+          <a:prstGeom prst="rect">
+            <a:avLst/>
+          </a:prstGeom>
+          <a:noFill/>
+        </p:spPr>
+        <p:txBody>
+          <a:bodyPr wrap="square" lIns="0" rIns="0" tIns="0" bIns="0" anchor="t">
+            <a:spAutoFit/>
+          </a:bodyPr>
+          <a:lstStyle/>
+          <a:p>
+            <a:pPr algn="l">
+              <a:lnSpc>
+                <a:spcPct val="100000"/>
+              </a:lnSpc>
+            </a:pPr>
+            <a:r>
+              <a:rPr sz="720" b="1">
+                <a:solidFill>
+                  <a:srgbClr val="1A1A1C"/>
+                </a:solidFill>
+                <a:latin typeface="微软雅黑"/>
+                <a:ea typeface="微软雅黑"/>
+                <a:cs typeface="微软雅黑"/>
+              </a:rPr>
+              <a:t>育儿大师.Skill</a:t>
+            </a:r>
+          </a:p>
+        </p:txBody>
+      </p:sp>
+      <p:sp>
+        <p:nvSpPr>
+          <p:cNvPr id="98" name="TextBox 97"/>
+          <p:cNvSpPr txBox="1"/>
+          <p:nvPr/>
+        </p:nvSpPr>
+        <p:spPr>
+          <a:xfrm>
+            <a:off x="3328416" y="5575554"/>
+            <a:ext cx="609600" cy="75438"/>
+          </a:xfrm>
+          <a:prstGeom prst="rect">
+            <a:avLst/>
+          </a:prstGeom>
+          <a:noFill/>
+        </p:spPr>
+        <p:txBody>
+          <a:bodyPr wrap="square" lIns="0" rIns="0" tIns="0" bIns="0" anchor="t">
+            <a:spAutoFit/>
+          </a:bodyPr>
+          <a:lstStyle/>
+          <a:p>
+            <a:pPr algn="r">
+              <a:lnSpc>
+                <a:spcPct val="100000"/>
+              </a:lnSpc>
+            </a:pPr>
+            <a:r>
+              <a:rPr sz="720" b="0">
+                <a:solidFill>
+                  <a:srgbClr val="5B616B"/>
+                </a:solidFill>
+                <a:latin typeface="微软雅黑"/>
+                <a:ea typeface="微软雅黑"/>
+                <a:cs typeface="微软雅黑"/>
+              </a:rPr>
+              <a:t>2,508,248</a:t>
+            </a:r>
+          </a:p>
+        </p:txBody>
+      </p:sp>
+      <p:sp>
+        <p:nvSpPr>
+          <p:cNvPr id="99" name="TextBox 98"/>
+          <p:cNvSpPr txBox="1"/>
+          <p:nvPr/>
+        </p:nvSpPr>
+        <p:spPr>
+          <a:xfrm>
+            <a:off x="621792" y="5678424"/>
+            <a:ext cx="3291840" cy="61721"/>
+          </a:xfrm>
+          <a:prstGeom prst="rect">
+            <a:avLst/>
+          </a:prstGeom>
+          <a:noFill/>
+        </p:spPr>
+        <p:txBody>
+          <a:bodyPr wrap="square" lIns="0" rIns="0" tIns="0" bIns="0" anchor="t">
+            <a:spAutoFit/>
+          </a:bodyPr>
+          <a:lstStyle/>
+          <a:p>
+            <a:pPr algn="l">
+              <a:lnSpc>
+                <a:spcPct val="100000"/>
+              </a:lnSpc>
+            </a:pPr>
+            <a:r>
+              <a:rPr sz="620" b="0">
+                <a:solidFill>
+                  <a:srgbClr val="5B616B"/>
+                </a:solidFill>
+                <a:latin typeface="微软雅黑"/>
+                <a:ea typeface="微软雅黑"/>
+                <a:cs typeface="微软雅黑"/>
+              </a:rPr>
+              <a:t>user_741dc82b</a:t>
+            </a:r>
+          </a:p>
+        </p:txBody>
+      </p:sp>
+      <p:sp>
+        <p:nvSpPr>
+          <p:cNvPr id="100" name="TextBox 99"/>
+          <p:cNvSpPr txBox="1"/>
+          <p:nvPr/>
+        </p:nvSpPr>
+        <p:spPr>
+          <a:xfrm>
+            <a:off x="4328160" y="4594860"/>
+            <a:ext cx="3535679" cy="96012"/>
+          </a:xfrm>
+          <a:prstGeom prst="rect">
+            <a:avLst/>
+          </a:prstGeom>
+          <a:noFill/>
+        </p:spPr>
+        <p:txBody>
+          <a:bodyPr wrap="square" lIns="0" rIns="0" tIns="0" bIns="0" anchor="t">
+            <a:spAutoFit/>
+          </a:bodyPr>
+          <a:lstStyle/>
+          <a:p>
+            <a:pPr algn="l">
+              <a:lnSpc>
+                <a:spcPct val="100000"/>
+              </a:lnSpc>
+            </a:pPr>
+            <a:r>
+              <a:rPr sz="860" b="1">
+                <a:solidFill>
+                  <a:srgbClr val="D98A8F"/>
+                </a:solidFill>
+                <a:latin typeface="微软雅黑"/>
+                <a:ea typeface="微软雅黑"/>
+                <a:cs typeface="微软雅黑"/>
+              </a:rPr>
+              <a:t>Payskill Top6</a:t>
+            </a:r>
+          </a:p>
+        </p:txBody>
+      </p:sp>
+      <p:sp>
+        <p:nvSpPr>
+          <p:cNvPr id="101" name="Rectangle 100"/>
+          <p:cNvSpPr/>
+          <p:nvPr/>
+        </p:nvSpPr>
+        <p:spPr>
+          <a:xfrm>
+            <a:off x="4328160" y="4690872"/>
+            <a:ext cx="3535679" cy="5486"/>
+          </a:xfrm>
+          <a:prstGeom prst="rect">
+            <a:avLst/>
+          </a:prstGeom>
+          <a:solidFill>
+            <a:srgbClr val="E2E4E7"/>
+          </a:solidFill>
+          <a:ln>
+            <a:noFill/>
+          </a:ln>
+          <a:effectLst/>
+        </p:spPr>
+        <p:style>
+          <a:lnRef idx="1">
+            <a:schemeClr val="accent1"/>
+          </a:lnRef>
+          <a:fillRef idx="3">
+            <a:schemeClr val="accent1"/>
+          </a:fillRef>
+          <a:effectRef idx="2">
+            <a:schemeClr val="accent1"/>
+          </a:effectRef>
+          <a:fontRef idx="minor">
+            <a:schemeClr val="lt1"/>
+          </a:fontRef>
+        </p:style>
+        <p:txBody>
+          <a:bodyPr rtlCol="0" anchor="ctr"/>
+          <a:lstStyle/>
+          <a:p>
+            <a:pPr algn="ctr"/>
+          </a:p>
+        </p:txBody>
+      </p:sp>
+      <p:sp>
+        <p:nvSpPr>
+          <p:cNvPr id="102" name="TextBox 101"/>
+          <p:cNvSpPr txBox="1"/>
+          <p:nvPr/>
+        </p:nvSpPr>
+        <p:spPr>
+          <a:xfrm>
+            <a:off x="4328160" y="4718304"/>
+            <a:ext cx="170688" cy="75438"/>
+          </a:xfrm>
+          <a:prstGeom prst="rect">
+            <a:avLst/>
+          </a:prstGeom>
+          <a:noFill/>
+        </p:spPr>
+        <p:txBody>
+          <a:bodyPr wrap="square" lIns="0" rIns="0" tIns="0" bIns="0" anchor="t">
+            <a:spAutoFit/>
+          </a:bodyPr>
+          <a:lstStyle/>
+          <a:p>
+            <a:pPr algn="l">
+              <a:lnSpc>
+                <a:spcPct val="100000"/>
+              </a:lnSpc>
+            </a:pPr>
+            <a:r>
+              <a:rPr sz="740" b="1">
+                <a:solidFill>
+                  <a:srgbClr val="B5333B"/>
+                </a:solidFill>
+                <a:latin typeface="微软雅黑"/>
+                <a:ea typeface="微软雅黑"/>
+                <a:cs typeface="微软雅黑"/>
+              </a:rPr>
+              <a:t>1</a:t>
+            </a:r>
+          </a:p>
+        </p:txBody>
+      </p:sp>
+      <p:sp>
+        <p:nvSpPr>
+          <p:cNvPr id="103" name="TextBox 102"/>
+          <p:cNvSpPr txBox="1"/>
+          <p:nvPr/>
+        </p:nvSpPr>
+        <p:spPr>
+          <a:xfrm>
+            <a:off x="4523232" y="4718304"/>
+            <a:ext cx="2621280" cy="75438"/>
+          </a:xfrm>
+          <a:prstGeom prst="rect">
+            <a:avLst/>
+          </a:prstGeom>
+          <a:noFill/>
+        </p:spPr>
+        <p:txBody>
+          <a:bodyPr wrap="square" lIns="0" rIns="0" tIns="0" bIns="0" anchor="t">
+            <a:spAutoFit/>
+          </a:bodyPr>
+          <a:lstStyle/>
+          <a:p>
+            <a:pPr algn="l">
+              <a:lnSpc>
+                <a:spcPct val="100000"/>
+              </a:lnSpc>
+            </a:pPr>
+            <a:r>
+              <a:rPr sz="720" b="1">
+                <a:solidFill>
+                  <a:srgbClr val="1A1A1C"/>
+                </a:solidFill>
+                <a:latin typeface="微软雅黑"/>
+                <a:ea typeface="微软雅黑"/>
+                <a:cs typeface="微软雅黑"/>
+              </a:rPr>
+              <a:t>WPS全家桶·办公管家.Skill</a:t>
+            </a:r>
+          </a:p>
+        </p:txBody>
+      </p:sp>
+      <p:sp>
+        <p:nvSpPr>
+          <p:cNvPr id="104" name="TextBox 103"/>
+          <p:cNvSpPr txBox="1"/>
+          <p:nvPr/>
+        </p:nvSpPr>
+        <p:spPr>
+          <a:xfrm>
+            <a:off x="7229856" y="4718304"/>
+            <a:ext cx="609600" cy="75438"/>
+          </a:xfrm>
+          <a:prstGeom prst="rect">
+            <a:avLst/>
+          </a:prstGeom>
+          <a:noFill/>
+        </p:spPr>
+        <p:txBody>
+          <a:bodyPr wrap="square" lIns="0" rIns="0" tIns="0" bIns="0" anchor="t">
+            <a:spAutoFit/>
+          </a:bodyPr>
+          <a:lstStyle/>
+          <a:p>
+            <a:pPr algn="r">
+              <a:lnSpc>
+                <a:spcPct val="100000"/>
+              </a:lnSpc>
+            </a:pPr>
+            <a:r>
+              <a:rPr sz="720" b="0">
+                <a:solidFill>
+                  <a:srgbClr val="5B616B"/>
+                </a:solidFill>
+                <a:latin typeface="微软雅黑"/>
+                <a:ea typeface="微软雅黑"/>
+                <a:cs typeface="微软雅黑"/>
+              </a:rPr>
+              <a:t>190,264</a:t>
+            </a:r>
+          </a:p>
+        </p:txBody>
+      </p:sp>
+      <p:sp>
+        <p:nvSpPr>
+          <p:cNvPr id="105" name="TextBox 104"/>
+          <p:cNvSpPr txBox="1"/>
+          <p:nvPr/>
+        </p:nvSpPr>
+        <p:spPr>
+          <a:xfrm>
+            <a:off x="4523232" y="4821174"/>
+            <a:ext cx="3291840" cy="61721"/>
+          </a:xfrm>
+          <a:prstGeom prst="rect">
+            <a:avLst/>
+          </a:prstGeom>
+          <a:noFill/>
+        </p:spPr>
+        <p:txBody>
+          <a:bodyPr wrap="square" lIns="0" rIns="0" tIns="0" bIns="0" anchor="t">
+            <a:spAutoFit/>
+          </a:bodyPr>
+          <a:lstStyle/>
+          <a:p>
+            <a:pPr algn="l">
+              <a:lnSpc>
+                <a:spcPct val="100000"/>
+              </a:lnSpc>
+            </a:pPr>
+            <a:r>
+              <a:rPr sz="620" b="0">
+                <a:solidFill>
+                  <a:srgbClr val="5B616B"/>
+                </a:solidFill>
+                <a:latin typeface="微软雅黑"/>
+                <a:ea typeface="微软雅黑"/>
+                <a:cs typeface="微软雅黑"/>
+              </a:rPr>
+              <a:t>user_185644ed</a:t>
+            </a:r>
+          </a:p>
+        </p:txBody>
+      </p:sp>
+      <p:sp>
+        <p:nvSpPr>
+          <p:cNvPr id="106" name="TextBox 105"/>
+          <p:cNvSpPr txBox="1"/>
+          <p:nvPr/>
+        </p:nvSpPr>
+        <p:spPr>
+          <a:xfrm>
+            <a:off x="4328160" y="4889754"/>
+            <a:ext cx="170688" cy="75438"/>
+          </a:xfrm>
+          <a:prstGeom prst="rect">
+            <a:avLst/>
+          </a:prstGeom>
+          <a:noFill/>
+        </p:spPr>
+        <p:txBody>
+          <a:bodyPr wrap="square" lIns="0" rIns="0" tIns="0" bIns="0" anchor="t">
+            <a:spAutoFit/>
+          </a:bodyPr>
+          <a:lstStyle/>
+          <a:p>
+            <a:pPr algn="l">
+              <a:lnSpc>
+                <a:spcPct val="100000"/>
+              </a:lnSpc>
+            </a:pPr>
+            <a:r>
+              <a:rPr sz="740" b="1">
+                <a:solidFill>
+                  <a:srgbClr val="B5333B"/>
+                </a:solidFill>
+                <a:latin typeface="微软雅黑"/>
+                <a:ea typeface="微软雅黑"/>
+                <a:cs typeface="微软雅黑"/>
+              </a:rPr>
+              <a:t>2</a:t>
+            </a:r>
+          </a:p>
+        </p:txBody>
+      </p:sp>
+      <p:sp>
+        <p:nvSpPr>
+          <p:cNvPr id="107" name="TextBox 106"/>
+          <p:cNvSpPr txBox="1"/>
+          <p:nvPr/>
+        </p:nvSpPr>
+        <p:spPr>
+          <a:xfrm>
+            <a:off x="4523232" y="4889754"/>
+            <a:ext cx="2621280" cy="75438"/>
+          </a:xfrm>
+          <a:prstGeom prst="rect">
+            <a:avLst/>
+          </a:prstGeom>
+          <a:noFill/>
+        </p:spPr>
+        <p:txBody>
+          <a:bodyPr wrap="square" lIns="0" rIns="0" tIns="0" bIns="0" anchor="t">
+            <a:spAutoFit/>
+          </a:bodyPr>
+          <a:lstStyle/>
+          <a:p>
+            <a:pPr algn="l">
+              <a:lnSpc>
+                <a:spcPct val="100000"/>
+              </a:lnSpc>
+            </a:pPr>
+            <a:r>
+              <a:rPr sz="720" b="1">
+                <a:solidFill>
+                  <a:srgbClr val="1A1A1C"/>
+                </a:solidFill>
+                <a:latin typeface="微软雅黑"/>
+                <a:ea typeface="微软雅黑"/>
+                <a:cs typeface="微软雅黑"/>
+              </a:rPr>
+              <a:t>招标文件解读【喜鹊标书】</a:t>
+            </a:r>
+          </a:p>
+        </p:txBody>
+      </p:sp>
+      <p:sp>
+        <p:nvSpPr>
+          <p:cNvPr id="108" name="TextBox 107"/>
+          <p:cNvSpPr txBox="1"/>
+          <p:nvPr/>
+        </p:nvSpPr>
+        <p:spPr>
+          <a:xfrm>
+            <a:off x="7229856" y="4889754"/>
+            <a:ext cx="609600" cy="75438"/>
+          </a:xfrm>
+          <a:prstGeom prst="rect">
+            <a:avLst/>
+          </a:prstGeom>
+          <a:noFill/>
+        </p:spPr>
+        <p:txBody>
+          <a:bodyPr wrap="square" lIns="0" rIns="0" tIns="0" bIns="0" anchor="t">
+            <a:spAutoFit/>
+          </a:bodyPr>
+          <a:lstStyle/>
+          <a:p>
+            <a:pPr algn="r">
+              <a:lnSpc>
+                <a:spcPct val="100000"/>
+              </a:lnSpc>
+            </a:pPr>
+            <a:r>
+              <a:rPr sz="720" b="0">
+                <a:solidFill>
+                  <a:srgbClr val="5B616B"/>
+                </a:solidFill>
+                <a:latin typeface="微软雅黑"/>
+                <a:ea typeface="微软雅黑"/>
+                <a:cs typeface="微软雅黑"/>
+              </a:rPr>
+              <a:t>169,094</a:t>
+            </a:r>
+          </a:p>
+        </p:txBody>
+      </p:sp>
+      <p:sp>
+        <p:nvSpPr>
+          <p:cNvPr id="109" name="TextBox 108"/>
+          <p:cNvSpPr txBox="1"/>
+          <p:nvPr/>
+        </p:nvSpPr>
+        <p:spPr>
+          <a:xfrm>
+            <a:off x="4523232" y="4992624"/>
+            <a:ext cx="3291840" cy="61721"/>
+          </a:xfrm>
+          <a:prstGeom prst="rect">
+            <a:avLst/>
+          </a:prstGeom>
+          <a:noFill/>
+        </p:spPr>
+        <p:txBody>
+          <a:bodyPr wrap="square" lIns="0" rIns="0" tIns="0" bIns="0" anchor="t">
+            <a:spAutoFit/>
+          </a:bodyPr>
+          <a:lstStyle/>
+          <a:p>
+            <a:pPr algn="l">
+              <a:lnSpc>
+                <a:spcPct val="100000"/>
+              </a:lnSpc>
+            </a:pPr>
+            <a:r>
+              <a:rPr sz="620" b="0">
+                <a:solidFill>
+                  <a:srgbClr val="5B616B"/>
+                </a:solidFill>
+                <a:latin typeface="微软雅黑"/>
+                <a:ea typeface="微软雅黑"/>
+                <a:cs typeface="微软雅黑"/>
+              </a:rPr>
+              <a:t>喜鹊AI</a:t>
+            </a:r>
+          </a:p>
+        </p:txBody>
+      </p:sp>
+      <p:sp>
+        <p:nvSpPr>
+          <p:cNvPr id="110" name="TextBox 109"/>
+          <p:cNvSpPr txBox="1"/>
+          <p:nvPr/>
+        </p:nvSpPr>
+        <p:spPr>
+          <a:xfrm>
+            <a:off x="4328160" y="5061204"/>
+            <a:ext cx="170688" cy="75438"/>
+          </a:xfrm>
+          <a:prstGeom prst="rect">
+            <a:avLst/>
+          </a:prstGeom>
+          <a:noFill/>
+        </p:spPr>
+        <p:txBody>
+          <a:bodyPr wrap="square" lIns="0" rIns="0" tIns="0" bIns="0" anchor="t">
+            <a:spAutoFit/>
+          </a:bodyPr>
+          <a:lstStyle/>
+          <a:p>
+            <a:pPr algn="l">
+              <a:lnSpc>
+                <a:spcPct val="100000"/>
+              </a:lnSpc>
+            </a:pPr>
+            <a:r>
+              <a:rPr sz="740" b="1">
+                <a:solidFill>
+                  <a:srgbClr val="B5333B"/>
+                </a:solidFill>
+                <a:latin typeface="微软雅黑"/>
+                <a:ea typeface="微软雅黑"/>
+                <a:cs typeface="微软雅黑"/>
+              </a:rPr>
+              <a:t>3</a:t>
+            </a:r>
+          </a:p>
+        </p:txBody>
+      </p:sp>
+      <p:sp>
+        <p:nvSpPr>
+          <p:cNvPr id="111" name="TextBox 110"/>
+          <p:cNvSpPr txBox="1"/>
+          <p:nvPr/>
+        </p:nvSpPr>
+        <p:spPr>
+          <a:xfrm>
+            <a:off x="4523232" y="5061204"/>
+            <a:ext cx="2621280" cy="75438"/>
+          </a:xfrm>
+          <a:prstGeom prst="rect">
+            <a:avLst/>
+          </a:prstGeom>
+          <a:noFill/>
+        </p:spPr>
+        <p:txBody>
+          <a:bodyPr wrap="square" lIns="0" rIns="0" tIns="0" bIns="0" anchor="t">
+            <a:spAutoFit/>
+          </a:bodyPr>
+          <a:lstStyle/>
+          <a:p>
+            <a:pPr algn="l">
+              <a:lnSpc>
+                <a:spcPct val="100000"/>
+              </a:lnSpc>
+            </a:pPr>
+            <a:r>
+              <a:rPr sz="720" b="1">
+                <a:solidFill>
+                  <a:srgbClr val="1A1A1C"/>
+                </a:solidFill>
+                <a:latin typeface="微软雅黑"/>
+                <a:ea typeface="微软雅黑"/>
+                <a:cs typeface="微软雅黑"/>
+              </a:rPr>
+              <a:t>办公文档三件套（Word/Excel/PDF）</a:t>
+            </a:r>
+          </a:p>
+        </p:txBody>
+      </p:sp>
+      <p:sp>
+        <p:nvSpPr>
+          <p:cNvPr id="112" name="TextBox 111"/>
+          <p:cNvSpPr txBox="1"/>
+          <p:nvPr/>
+        </p:nvSpPr>
+        <p:spPr>
+          <a:xfrm>
+            <a:off x="7229856" y="5061204"/>
+            <a:ext cx="609600" cy="75438"/>
+          </a:xfrm>
+          <a:prstGeom prst="rect">
+            <a:avLst/>
+          </a:prstGeom>
+          <a:noFill/>
+        </p:spPr>
+        <p:txBody>
+          <a:bodyPr wrap="square" lIns="0" rIns="0" tIns="0" bIns="0" anchor="t">
+            <a:spAutoFit/>
+          </a:bodyPr>
+          <a:lstStyle/>
+          <a:p>
+            <a:pPr algn="r">
+              <a:lnSpc>
+                <a:spcPct val="100000"/>
+              </a:lnSpc>
+            </a:pPr>
+            <a:r>
+              <a:rPr sz="720" b="0">
+                <a:solidFill>
+                  <a:srgbClr val="5B616B"/>
+                </a:solidFill>
+                <a:latin typeface="微软雅黑"/>
+                <a:ea typeface="微软雅黑"/>
+                <a:cs typeface="微软雅黑"/>
+              </a:rPr>
+              <a:t>135,227</a:t>
+            </a:r>
+          </a:p>
+        </p:txBody>
+      </p:sp>
+      <p:sp>
+        <p:nvSpPr>
+          <p:cNvPr id="113" name="TextBox 112"/>
+          <p:cNvSpPr txBox="1"/>
+          <p:nvPr/>
+        </p:nvSpPr>
+        <p:spPr>
+          <a:xfrm>
+            <a:off x="4523232" y="5164074"/>
+            <a:ext cx="3291840" cy="61721"/>
+          </a:xfrm>
+          <a:prstGeom prst="rect">
+            <a:avLst/>
+          </a:prstGeom>
+          <a:noFill/>
+        </p:spPr>
+        <p:txBody>
+          <a:bodyPr wrap="square" lIns="0" rIns="0" tIns="0" bIns="0" anchor="t">
+            <a:spAutoFit/>
+          </a:bodyPr>
+          <a:lstStyle/>
+          <a:p>
+            <a:pPr algn="l">
+              <a:lnSpc>
+                <a:spcPct val="100000"/>
+              </a:lnSpc>
+            </a:pPr>
+            <a:r>
+              <a:rPr sz="620" b="0">
+                <a:solidFill>
+                  <a:srgbClr val="5B616B"/>
+                </a:solidFill>
+                <a:latin typeface="微软雅黑"/>
+                <a:ea typeface="微软雅黑"/>
+                <a:cs typeface="微软雅黑"/>
+              </a:rPr>
+              <a:t>user_69794d19</a:t>
+            </a:r>
+          </a:p>
+        </p:txBody>
+      </p:sp>
+      <p:sp>
+        <p:nvSpPr>
+          <p:cNvPr id="114" name="TextBox 113"/>
+          <p:cNvSpPr txBox="1"/>
+          <p:nvPr/>
+        </p:nvSpPr>
+        <p:spPr>
+          <a:xfrm>
+            <a:off x="4328160" y="5232653"/>
+            <a:ext cx="170688" cy="75438"/>
+          </a:xfrm>
+          <a:prstGeom prst="rect">
+            <a:avLst/>
+          </a:prstGeom>
+          <a:noFill/>
+        </p:spPr>
+        <p:txBody>
+          <a:bodyPr wrap="square" lIns="0" rIns="0" tIns="0" bIns="0" anchor="t">
+            <a:spAutoFit/>
+          </a:bodyPr>
+          <a:lstStyle/>
+          <a:p>
+            <a:pPr algn="l">
+              <a:lnSpc>
+                <a:spcPct val="100000"/>
+              </a:lnSpc>
+            </a:pPr>
+            <a:r>
+              <a:rPr sz="740" b="1">
+                <a:solidFill>
+                  <a:srgbClr val="B5333B"/>
+                </a:solidFill>
+                <a:latin typeface="微软雅黑"/>
+                <a:ea typeface="微软雅黑"/>
+                <a:cs typeface="微软雅黑"/>
+              </a:rPr>
+              <a:t>4</a:t>
+            </a:r>
+          </a:p>
+        </p:txBody>
+      </p:sp>
+      <p:sp>
+        <p:nvSpPr>
+          <p:cNvPr id="115" name="TextBox 114"/>
+          <p:cNvSpPr txBox="1"/>
+          <p:nvPr/>
+        </p:nvSpPr>
+        <p:spPr>
+          <a:xfrm>
+            <a:off x="4523232" y="5232653"/>
+            <a:ext cx="2621280" cy="75438"/>
+          </a:xfrm>
+          <a:prstGeom prst="rect">
+            <a:avLst/>
+          </a:prstGeom>
+          <a:noFill/>
+        </p:spPr>
+        <p:txBody>
+          <a:bodyPr wrap="square" lIns="0" rIns="0" tIns="0" bIns="0" anchor="t">
+            <a:spAutoFit/>
+          </a:bodyPr>
+          <a:lstStyle/>
+          <a:p>
+            <a:pPr algn="l">
+              <a:lnSpc>
+                <a:spcPct val="100000"/>
+              </a:lnSpc>
+            </a:pPr>
+            <a:r>
+              <a:rPr sz="720" b="1">
+                <a:solidFill>
+                  <a:srgbClr val="1A1A1C"/>
+                </a:solidFill>
+                <a:latin typeface="微软雅黑"/>
+                <a:ea typeface="微软雅黑"/>
+                <a:cs typeface="微软雅黑"/>
+              </a:rPr>
+              <a:t>知了标讯 · 全网招中标数据查询</a:t>
+            </a:r>
+          </a:p>
+        </p:txBody>
+      </p:sp>
+      <p:sp>
+        <p:nvSpPr>
+          <p:cNvPr id="116" name="TextBox 115"/>
+          <p:cNvSpPr txBox="1"/>
+          <p:nvPr/>
+        </p:nvSpPr>
+        <p:spPr>
+          <a:xfrm>
+            <a:off x="7229856" y="5232653"/>
+            <a:ext cx="609600" cy="75438"/>
+          </a:xfrm>
+          <a:prstGeom prst="rect">
+            <a:avLst/>
+          </a:prstGeom>
+          <a:noFill/>
+        </p:spPr>
+        <p:txBody>
+          <a:bodyPr wrap="square" lIns="0" rIns="0" tIns="0" bIns="0" anchor="t">
+            <a:spAutoFit/>
+          </a:bodyPr>
+          <a:lstStyle/>
+          <a:p>
+            <a:pPr algn="r">
+              <a:lnSpc>
+                <a:spcPct val="100000"/>
+              </a:lnSpc>
+            </a:pPr>
+            <a:r>
+              <a:rPr sz="720" b="0">
+                <a:solidFill>
+                  <a:srgbClr val="5B616B"/>
+                </a:solidFill>
+                <a:latin typeface="微软雅黑"/>
+                <a:ea typeface="微软雅黑"/>
+                <a:cs typeface="微软雅黑"/>
+              </a:rPr>
+              <a:t>82,636</a:t>
+            </a:r>
+          </a:p>
+        </p:txBody>
+      </p:sp>
+      <p:sp>
+        <p:nvSpPr>
+          <p:cNvPr id="117" name="TextBox 116"/>
+          <p:cNvSpPr txBox="1"/>
+          <p:nvPr/>
+        </p:nvSpPr>
+        <p:spPr>
+          <a:xfrm>
+            <a:off x="4523232" y="5335523"/>
+            <a:ext cx="3291840" cy="61721"/>
+          </a:xfrm>
+          <a:prstGeom prst="rect">
+            <a:avLst/>
+          </a:prstGeom>
+          <a:noFill/>
+        </p:spPr>
+        <p:txBody>
+          <a:bodyPr wrap="square" lIns="0" rIns="0" tIns="0" bIns="0" anchor="t">
+            <a:spAutoFit/>
+          </a:bodyPr>
+          <a:lstStyle/>
+          <a:p>
+            <a:pPr algn="l">
+              <a:lnSpc>
+                <a:spcPct val="100000"/>
+              </a:lnSpc>
+            </a:pPr>
+            <a:r>
+              <a:rPr sz="620" b="0">
+                <a:solidFill>
+                  <a:srgbClr val="5B616B"/>
+                </a:solidFill>
+                <a:latin typeface="微软雅黑"/>
+                <a:ea typeface="微软雅黑"/>
+                <a:cs typeface="微软雅黑"/>
+              </a:rPr>
+              <a:t>知了标讯</a:t>
+            </a:r>
+          </a:p>
+        </p:txBody>
+      </p:sp>
+      <p:sp>
+        <p:nvSpPr>
+          <p:cNvPr id="118" name="TextBox 117"/>
+          <p:cNvSpPr txBox="1"/>
+          <p:nvPr/>
+        </p:nvSpPr>
+        <p:spPr>
+          <a:xfrm>
+            <a:off x="4328160" y="5404103"/>
+            <a:ext cx="170688" cy="75438"/>
+          </a:xfrm>
+          <a:prstGeom prst="rect">
+            <a:avLst/>
+          </a:prstGeom>
+          <a:noFill/>
+        </p:spPr>
+        <p:txBody>
+          <a:bodyPr wrap="square" lIns="0" rIns="0" tIns="0" bIns="0" anchor="t">
+            <a:spAutoFit/>
+          </a:bodyPr>
+          <a:lstStyle/>
+          <a:p>
+            <a:pPr algn="l">
+              <a:lnSpc>
+                <a:spcPct val="100000"/>
+              </a:lnSpc>
+            </a:pPr>
+            <a:r>
+              <a:rPr sz="740" b="1">
+                <a:solidFill>
+                  <a:srgbClr val="B5333B"/>
+                </a:solidFill>
+                <a:latin typeface="微软雅黑"/>
+                <a:ea typeface="微软雅黑"/>
+                <a:cs typeface="微软雅黑"/>
+              </a:rPr>
+              <a:t>5</a:t>
+            </a:r>
+          </a:p>
+        </p:txBody>
+      </p:sp>
+      <p:sp>
+        <p:nvSpPr>
+          <p:cNvPr id="119" name="TextBox 118"/>
+          <p:cNvSpPr txBox="1"/>
+          <p:nvPr/>
+        </p:nvSpPr>
+        <p:spPr>
+          <a:xfrm>
+            <a:off x="4523232" y="5404103"/>
+            <a:ext cx="2621280" cy="75438"/>
+          </a:xfrm>
+          <a:prstGeom prst="rect">
+            <a:avLst/>
+          </a:prstGeom>
+          <a:noFill/>
+        </p:spPr>
+        <p:txBody>
+          <a:bodyPr wrap="square" lIns="0" rIns="0" tIns="0" bIns="0" anchor="t">
+            <a:spAutoFit/>
+          </a:bodyPr>
+          <a:lstStyle/>
+          <a:p>
+            <a:pPr algn="l">
+              <a:lnSpc>
+                <a:spcPct val="100000"/>
+              </a:lnSpc>
+            </a:pPr>
+            <a:r>
+              <a:rPr sz="720" b="1">
+                <a:solidFill>
+                  <a:srgbClr val="1A1A1C"/>
+                </a:solidFill>
+                <a:latin typeface="微软雅黑"/>
+                <a:ea typeface="微软雅黑"/>
+                <a:cs typeface="微软雅黑"/>
+              </a:rPr>
+              <a:t>标书审查【喜鹊标书】</a:t>
+            </a:r>
+          </a:p>
+        </p:txBody>
+      </p:sp>
+      <p:sp>
+        <p:nvSpPr>
+          <p:cNvPr id="120" name="TextBox 119"/>
+          <p:cNvSpPr txBox="1"/>
+          <p:nvPr/>
+        </p:nvSpPr>
+        <p:spPr>
+          <a:xfrm>
+            <a:off x="7229856" y="5404103"/>
+            <a:ext cx="609600" cy="75438"/>
+          </a:xfrm>
+          <a:prstGeom prst="rect">
+            <a:avLst/>
+          </a:prstGeom>
+          <a:noFill/>
+        </p:spPr>
+        <p:txBody>
+          <a:bodyPr wrap="square" lIns="0" rIns="0" tIns="0" bIns="0" anchor="t">
+            <a:spAutoFit/>
+          </a:bodyPr>
+          <a:lstStyle/>
+          <a:p>
+            <a:pPr algn="r">
+              <a:lnSpc>
+                <a:spcPct val="100000"/>
+              </a:lnSpc>
+            </a:pPr>
+            <a:r>
+              <a:rPr sz="720" b="0">
+                <a:solidFill>
+                  <a:srgbClr val="5B616B"/>
+                </a:solidFill>
+                <a:latin typeface="微软雅黑"/>
+                <a:ea typeface="微软雅黑"/>
+                <a:cs typeface="微软雅黑"/>
+              </a:rPr>
+              <a:t>80,948</a:t>
+            </a:r>
+          </a:p>
+        </p:txBody>
+      </p:sp>
+      <p:sp>
+        <p:nvSpPr>
+          <p:cNvPr id="121" name="TextBox 120"/>
+          <p:cNvSpPr txBox="1"/>
+          <p:nvPr/>
+        </p:nvSpPr>
+        <p:spPr>
+          <a:xfrm>
+            <a:off x="4523232" y="5506974"/>
+            <a:ext cx="3291840" cy="61721"/>
+          </a:xfrm>
+          <a:prstGeom prst="rect">
+            <a:avLst/>
+          </a:prstGeom>
+          <a:noFill/>
+        </p:spPr>
+        <p:txBody>
+          <a:bodyPr wrap="square" lIns="0" rIns="0" tIns="0" bIns="0" anchor="t">
+            <a:spAutoFit/>
+          </a:bodyPr>
+          <a:lstStyle/>
+          <a:p>
+            <a:pPr algn="l">
+              <a:lnSpc>
+                <a:spcPct val="100000"/>
+              </a:lnSpc>
+            </a:pPr>
+            <a:r>
+              <a:rPr sz="620" b="0">
+                <a:solidFill>
+                  <a:srgbClr val="5B616B"/>
+                </a:solidFill>
+                <a:latin typeface="微软雅黑"/>
+                <a:ea typeface="微软雅黑"/>
+                <a:cs typeface="微软雅黑"/>
+              </a:rPr>
+              <a:t>喜鹊AI</a:t>
+            </a:r>
+          </a:p>
+        </p:txBody>
+      </p:sp>
+      <p:sp>
+        <p:nvSpPr>
+          <p:cNvPr id="122" name="TextBox 121"/>
+          <p:cNvSpPr txBox="1"/>
+          <p:nvPr/>
+        </p:nvSpPr>
+        <p:spPr>
+          <a:xfrm>
+            <a:off x="4328160" y="5575554"/>
+            <a:ext cx="170688" cy="75438"/>
+          </a:xfrm>
+          <a:prstGeom prst="rect">
+            <a:avLst/>
+          </a:prstGeom>
+          <a:noFill/>
+        </p:spPr>
+        <p:txBody>
+          <a:bodyPr wrap="square" lIns="0" rIns="0" tIns="0" bIns="0" anchor="t">
+            <a:spAutoFit/>
+          </a:bodyPr>
+          <a:lstStyle/>
+          <a:p>
+            <a:pPr algn="l">
+              <a:lnSpc>
+                <a:spcPct val="100000"/>
+              </a:lnSpc>
+            </a:pPr>
+            <a:r>
+              <a:rPr sz="740" b="1">
+                <a:solidFill>
+                  <a:srgbClr val="B5333B"/>
+                </a:solidFill>
+                <a:latin typeface="微软雅黑"/>
+                <a:ea typeface="微软雅黑"/>
+                <a:cs typeface="微软雅黑"/>
+              </a:rPr>
+              <a:t>6</a:t>
+            </a:r>
+          </a:p>
+        </p:txBody>
+      </p:sp>
+      <p:sp>
+        <p:nvSpPr>
+          <p:cNvPr id="123" name="TextBox 122"/>
+          <p:cNvSpPr txBox="1"/>
+          <p:nvPr/>
+        </p:nvSpPr>
+        <p:spPr>
+          <a:xfrm>
+            <a:off x="4523232" y="5575554"/>
+            <a:ext cx="2621280" cy="75438"/>
+          </a:xfrm>
+          <a:prstGeom prst="rect">
+            <a:avLst/>
+          </a:prstGeom>
+          <a:noFill/>
+        </p:spPr>
+        <p:txBody>
+          <a:bodyPr wrap="square" lIns="0" rIns="0" tIns="0" bIns="0" anchor="t">
+            <a:spAutoFit/>
+          </a:bodyPr>
+          <a:lstStyle/>
+          <a:p>
+            <a:pPr algn="l">
+              <a:lnSpc>
+                <a:spcPct val="100000"/>
+              </a:lnSpc>
+            </a:pPr>
+            <a:r>
+              <a:rPr sz="720" b="1">
+                <a:solidFill>
+                  <a:srgbClr val="1A1A1C"/>
+                </a:solidFill>
+                <a:latin typeface="微软雅黑"/>
+                <a:ea typeface="微软雅黑"/>
+                <a:cs typeface="微软雅黑"/>
+              </a:rPr>
+              <a:t>浏览器自动化</a:t>
+            </a:r>
+          </a:p>
+        </p:txBody>
+      </p:sp>
+      <p:sp>
+        <p:nvSpPr>
+          <p:cNvPr id="124" name="TextBox 123"/>
+          <p:cNvSpPr txBox="1"/>
+          <p:nvPr/>
+        </p:nvSpPr>
+        <p:spPr>
+          <a:xfrm>
+            <a:off x="7229856" y="5575554"/>
+            <a:ext cx="609600" cy="75438"/>
+          </a:xfrm>
+          <a:prstGeom prst="rect">
+            <a:avLst/>
+          </a:prstGeom>
+          <a:noFill/>
+        </p:spPr>
+        <p:txBody>
+          <a:bodyPr wrap="square" lIns="0" rIns="0" tIns="0" bIns="0" anchor="t">
+            <a:spAutoFit/>
+          </a:bodyPr>
+          <a:lstStyle/>
+          <a:p>
+            <a:pPr algn="r">
+              <a:lnSpc>
+                <a:spcPct val="100000"/>
+              </a:lnSpc>
+            </a:pPr>
+            <a:r>
+              <a:rPr sz="720" b="0">
+                <a:solidFill>
+                  <a:srgbClr val="5B616B"/>
+                </a:solidFill>
+                <a:latin typeface="微软雅黑"/>
+                <a:ea typeface="微软雅黑"/>
+                <a:cs typeface="微软雅黑"/>
+              </a:rPr>
+              <a:t>66,947</a:t>
+            </a:r>
+          </a:p>
+        </p:txBody>
+      </p:sp>
+      <p:sp>
+        <p:nvSpPr>
+          <p:cNvPr id="125" name="TextBox 124"/>
+          <p:cNvSpPr txBox="1"/>
+          <p:nvPr/>
+        </p:nvSpPr>
+        <p:spPr>
+          <a:xfrm>
+            <a:off x="4523232" y="5678424"/>
+            <a:ext cx="3291840" cy="61721"/>
+          </a:xfrm>
+          <a:prstGeom prst="rect">
+            <a:avLst/>
+          </a:prstGeom>
+          <a:noFill/>
+        </p:spPr>
+        <p:txBody>
+          <a:bodyPr wrap="square" lIns="0" rIns="0" tIns="0" bIns="0" anchor="t">
+            <a:spAutoFit/>
+          </a:bodyPr>
+          <a:lstStyle/>
+          <a:p>
+            <a:pPr algn="l">
+              <a:lnSpc>
+                <a:spcPct val="100000"/>
+              </a:lnSpc>
+            </a:pPr>
+            <a:r>
+              <a:rPr sz="620" b="0">
+                <a:solidFill>
+                  <a:srgbClr val="5B616B"/>
+                </a:solidFill>
+                <a:latin typeface="微软雅黑"/>
+                <a:ea typeface="微软雅黑"/>
+                <a:cs typeface="微软雅黑"/>
+              </a:rPr>
+              <a:t>菏泽九有信息科技有限公司</a:t>
+            </a:r>
+          </a:p>
+        </p:txBody>
+      </p:sp>
+      <p:sp>
+        <p:nvSpPr>
+          <p:cNvPr id="126" name="TextBox 125"/>
+          <p:cNvSpPr txBox="1"/>
+          <p:nvPr/>
+        </p:nvSpPr>
+        <p:spPr>
+          <a:xfrm>
+            <a:off x="8229600" y="4594860"/>
+            <a:ext cx="3535679" cy="96012"/>
+          </a:xfrm>
+          <a:prstGeom prst="rect">
+            <a:avLst/>
+          </a:prstGeom>
+          <a:noFill/>
+        </p:spPr>
+        <p:txBody>
+          <a:bodyPr wrap="square" lIns="0" rIns="0" tIns="0" bIns="0" anchor="t">
+            <a:spAutoFit/>
+          </a:bodyPr>
+          <a:lstStyle/>
+          <a:p>
+            <a:pPr algn="l">
+              <a:lnSpc>
+                <a:spcPct val="100000"/>
+              </a:lnSpc>
+            </a:pPr>
+            <a:r>
+              <a:rPr sz="860" b="1">
+                <a:solidFill>
+                  <a:srgbClr val="6B7785"/>
+                </a:solidFill>
+                <a:latin typeface="微软雅黑"/>
+                <a:ea typeface="微软雅黑"/>
+                <a:cs typeface="微软雅黑"/>
+              </a:rPr>
+              <a:t>API Key Top6</a:t>
+            </a:r>
+          </a:p>
+        </p:txBody>
+      </p:sp>
+      <p:sp>
+        <p:nvSpPr>
+          <p:cNvPr id="127" name="Rectangle 126"/>
+          <p:cNvSpPr/>
+          <p:nvPr/>
+        </p:nvSpPr>
+        <p:spPr>
+          <a:xfrm>
+            <a:off x="8229600" y="4690872"/>
+            <a:ext cx="3535679" cy="5486"/>
+          </a:xfrm>
+          <a:prstGeom prst="rect">
+            <a:avLst/>
+          </a:prstGeom>
+          <a:solidFill>
+            <a:srgbClr val="E2E4E7"/>
+          </a:solidFill>
+          <a:ln>
+            <a:noFill/>
+          </a:ln>
+          <a:effectLst/>
+        </p:spPr>
+        <p:style>
+          <a:lnRef idx="1">
+            <a:schemeClr val="accent1"/>
+          </a:lnRef>
+          <a:fillRef idx="3">
+            <a:schemeClr val="accent1"/>
+          </a:fillRef>
+          <a:effectRef idx="2">
+            <a:schemeClr val="accent1"/>
+          </a:effectRef>
+          <a:fontRef idx="minor">
+            <a:schemeClr val="lt1"/>
+          </a:fontRef>
+        </p:style>
+        <p:txBody>
+          <a:bodyPr rtlCol="0" anchor="ctr"/>
+          <a:lstStyle/>
+          <a:p>
+            <a:pPr algn="ctr"/>
+          </a:p>
+        </p:txBody>
+      </p:sp>
+      <p:sp>
+        <p:nvSpPr>
+          <p:cNvPr id="128" name="TextBox 127"/>
+          <p:cNvSpPr txBox="1"/>
+          <p:nvPr/>
+        </p:nvSpPr>
+        <p:spPr>
+          <a:xfrm>
+            <a:off x="8229600" y="4718304"/>
+            <a:ext cx="170688" cy="75438"/>
+          </a:xfrm>
+          <a:prstGeom prst="rect">
+            <a:avLst/>
+          </a:prstGeom>
+          <a:noFill/>
+        </p:spPr>
+        <p:txBody>
+          <a:bodyPr wrap="square" lIns="0" rIns="0" tIns="0" bIns="0" anchor="t">
+            <a:spAutoFit/>
+          </a:bodyPr>
+          <a:lstStyle/>
+          <a:p>
+            <a:pPr algn="l">
+              <a:lnSpc>
+                <a:spcPct val="100000"/>
+              </a:lnSpc>
+            </a:pPr>
+            <a:r>
+              <a:rPr sz="740" b="1">
+                <a:solidFill>
+                  <a:srgbClr val="B5333B"/>
+                </a:solidFill>
+                <a:latin typeface="微软雅黑"/>
+                <a:ea typeface="微软雅黑"/>
+                <a:cs typeface="微软雅黑"/>
+              </a:rPr>
+              <a:t>1</a:t>
+            </a:r>
+          </a:p>
+        </p:txBody>
+      </p:sp>
+      <p:sp>
+        <p:nvSpPr>
+          <p:cNvPr id="129" name="TextBox 128"/>
+          <p:cNvSpPr txBox="1"/>
+          <p:nvPr/>
+        </p:nvSpPr>
+        <p:spPr>
+          <a:xfrm>
+            <a:off x="8424672" y="4718304"/>
+            <a:ext cx="2621280" cy="75438"/>
+          </a:xfrm>
+          <a:prstGeom prst="rect">
+            <a:avLst/>
+          </a:prstGeom>
+          <a:noFill/>
+        </p:spPr>
+        <p:txBody>
+          <a:bodyPr wrap="square" lIns="0" rIns="0" tIns="0" bIns="0" anchor="t">
+            <a:spAutoFit/>
+          </a:bodyPr>
+          <a:lstStyle/>
+          <a:p>
+            <a:pPr algn="l">
+              <a:lnSpc>
+                <a:spcPct val="100000"/>
+              </a:lnSpc>
+            </a:pPr>
+            <a:r>
+              <a:rPr sz="720" b="1">
+                <a:solidFill>
+                  <a:srgbClr val="1A1A1C"/>
+                </a:solidFill>
+                <a:latin typeface="微软雅黑"/>
+                <a:ea typeface="微软雅黑"/>
+                <a:cs typeface="微软雅黑"/>
+              </a:rPr>
+              <a:t>腾讯文档 TENCENT DOCS</a:t>
+            </a:r>
+          </a:p>
+        </p:txBody>
+      </p:sp>
+      <p:sp>
+        <p:nvSpPr>
+          <p:cNvPr id="130" name="TextBox 129"/>
+          <p:cNvSpPr txBox="1"/>
+          <p:nvPr/>
+        </p:nvSpPr>
+        <p:spPr>
+          <a:xfrm>
+            <a:off x="11131296" y="4718304"/>
+            <a:ext cx="609600" cy="75438"/>
+          </a:xfrm>
+          <a:prstGeom prst="rect">
+            <a:avLst/>
+          </a:prstGeom>
+          <a:noFill/>
+        </p:spPr>
+        <p:txBody>
+          <a:bodyPr wrap="square" lIns="0" rIns="0" tIns="0" bIns="0" anchor="t">
+            <a:spAutoFit/>
+          </a:bodyPr>
+          <a:lstStyle/>
+          <a:p>
+            <a:pPr algn="r">
+              <a:lnSpc>
+                <a:spcPct val="100000"/>
+              </a:lnSpc>
+            </a:pPr>
+            <a:r>
+              <a:rPr sz="720" b="0">
+                <a:solidFill>
+                  <a:srgbClr val="5B616B"/>
+                </a:solidFill>
+                <a:latin typeface="微软雅黑"/>
+                <a:ea typeface="微软雅黑"/>
+                <a:cs typeface="微软雅黑"/>
+              </a:rPr>
+              <a:t>1,824,922</a:t>
+            </a:r>
+          </a:p>
+        </p:txBody>
+      </p:sp>
+      <p:sp>
+        <p:nvSpPr>
+          <p:cNvPr id="131" name="TextBox 130"/>
+          <p:cNvSpPr txBox="1"/>
+          <p:nvPr/>
+        </p:nvSpPr>
+        <p:spPr>
+          <a:xfrm>
+            <a:off x="8424672" y="4821174"/>
+            <a:ext cx="3291840" cy="61721"/>
+          </a:xfrm>
+          <a:prstGeom prst="rect">
+            <a:avLst/>
+          </a:prstGeom>
+          <a:noFill/>
+        </p:spPr>
+        <p:txBody>
+          <a:bodyPr wrap="square" lIns="0" rIns="0" tIns="0" bIns="0" anchor="t">
+            <a:spAutoFit/>
+          </a:bodyPr>
+          <a:lstStyle/>
+          <a:p>
+            <a:pPr algn="l">
+              <a:lnSpc>
+                <a:spcPct val="100000"/>
+              </a:lnSpc>
+            </a:pPr>
+            <a:r>
+              <a:rPr sz="620" b="0">
+                <a:solidFill>
+                  <a:srgbClr val="5B616B"/>
+                </a:solidFill>
+                <a:latin typeface="微软雅黑"/>
+                <a:ea typeface="微软雅黑"/>
+                <a:cs typeface="微软雅黑"/>
+              </a:rPr>
+              <a:t>腾讯文档团队</a:t>
+            </a:r>
+          </a:p>
+        </p:txBody>
+      </p:sp>
+      <p:sp>
+        <p:nvSpPr>
+          <p:cNvPr id="132" name="TextBox 131"/>
+          <p:cNvSpPr txBox="1"/>
+          <p:nvPr/>
+        </p:nvSpPr>
+        <p:spPr>
+          <a:xfrm>
+            <a:off x="8229600" y="4889754"/>
+            <a:ext cx="170688" cy="75438"/>
+          </a:xfrm>
+          <a:prstGeom prst="rect">
+            <a:avLst/>
+          </a:prstGeom>
+          <a:noFill/>
+        </p:spPr>
+        <p:txBody>
+          <a:bodyPr wrap="square" lIns="0" rIns="0" tIns="0" bIns="0" anchor="t">
+            <a:spAutoFit/>
+          </a:bodyPr>
+          <a:lstStyle/>
+          <a:p>
+            <a:pPr algn="l">
+              <a:lnSpc>
+                <a:spcPct val="100000"/>
+              </a:lnSpc>
+            </a:pPr>
+            <a:r>
+              <a:rPr sz="740" b="1">
+                <a:solidFill>
+                  <a:srgbClr val="B5333B"/>
+                </a:solidFill>
+                <a:latin typeface="微软雅黑"/>
+                <a:ea typeface="微软雅黑"/>
+                <a:cs typeface="微软雅黑"/>
+              </a:rPr>
+              <a:t>2</a:t>
+            </a:r>
+          </a:p>
+        </p:txBody>
+      </p:sp>
+      <p:sp>
+        <p:nvSpPr>
+          <p:cNvPr id="133" name="TextBox 132"/>
+          <p:cNvSpPr txBox="1"/>
+          <p:nvPr/>
+        </p:nvSpPr>
+        <p:spPr>
+          <a:xfrm>
+            <a:off x="8424672" y="4889754"/>
+            <a:ext cx="2621280" cy="75438"/>
+          </a:xfrm>
+          <a:prstGeom prst="rect">
+            <a:avLst/>
+          </a:prstGeom>
+          <a:noFill/>
+        </p:spPr>
+        <p:txBody>
+          <a:bodyPr wrap="square" lIns="0" rIns="0" tIns="0" bIns="0" anchor="t">
+            <a:spAutoFit/>
+          </a:bodyPr>
+          <a:lstStyle/>
+          <a:p>
+            <a:pPr algn="l">
+              <a:lnSpc>
+                <a:spcPct val="100000"/>
+              </a:lnSpc>
+            </a:pPr>
+            <a:r>
+              <a:rPr sz="720" b="1">
+                <a:solidFill>
+                  <a:srgbClr val="1A1A1C"/>
+                </a:solidFill>
+                <a:latin typeface="微软雅黑"/>
+                <a:ea typeface="微软雅黑"/>
+                <a:cs typeface="微软雅黑"/>
+              </a:rPr>
+              <a:t>全国电子印章互认平台</a:t>
+            </a:r>
+          </a:p>
+        </p:txBody>
+      </p:sp>
+      <p:sp>
+        <p:nvSpPr>
+          <p:cNvPr id="134" name="TextBox 133"/>
+          <p:cNvSpPr txBox="1"/>
+          <p:nvPr/>
+        </p:nvSpPr>
+        <p:spPr>
+          <a:xfrm>
+            <a:off x="11131296" y="4889754"/>
+            <a:ext cx="609600" cy="75438"/>
+          </a:xfrm>
+          <a:prstGeom prst="rect">
+            <a:avLst/>
+          </a:prstGeom>
+          <a:noFill/>
+        </p:spPr>
+        <p:txBody>
+          <a:bodyPr wrap="square" lIns="0" rIns="0" tIns="0" bIns="0" anchor="t">
+            <a:spAutoFit/>
+          </a:bodyPr>
+          <a:lstStyle/>
+          <a:p>
+            <a:pPr algn="r">
+              <a:lnSpc>
+                <a:spcPct val="100000"/>
+              </a:lnSpc>
+            </a:pPr>
+            <a:r>
+              <a:rPr sz="720" b="0">
+                <a:solidFill>
+                  <a:srgbClr val="5B616B"/>
+                </a:solidFill>
+                <a:latin typeface="微软雅黑"/>
+                <a:ea typeface="微软雅黑"/>
+                <a:cs typeface="微软雅黑"/>
+              </a:rPr>
+              <a:t>1,033,084</a:t>
+            </a:r>
+          </a:p>
+        </p:txBody>
+      </p:sp>
+      <p:sp>
+        <p:nvSpPr>
+          <p:cNvPr id="135" name="TextBox 134"/>
+          <p:cNvSpPr txBox="1"/>
+          <p:nvPr/>
+        </p:nvSpPr>
+        <p:spPr>
+          <a:xfrm>
+            <a:off x="8424672" y="4992624"/>
+            <a:ext cx="3291840" cy="61721"/>
+          </a:xfrm>
+          <a:prstGeom prst="rect">
+            <a:avLst/>
+          </a:prstGeom>
+          <a:noFill/>
+        </p:spPr>
+        <p:txBody>
+          <a:bodyPr wrap="square" lIns="0" rIns="0" tIns="0" bIns="0" anchor="t">
+            <a:spAutoFit/>
+          </a:bodyPr>
+          <a:lstStyle/>
+          <a:p>
+            <a:pPr algn="l">
+              <a:lnSpc>
+                <a:spcPct val="100000"/>
+              </a:lnSpc>
+            </a:pPr>
+            <a:r>
+              <a:rPr sz="620" b="0">
+                <a:solidFill>
+                  <a:srgbClr val="5B616B"/>
+                </a:solidFill>
+                <a:latin typeface="微软雅黑"/>
+                <a:ea typeface="微软雅黑"/>
+                <a:cs typeface="微软雅黑"/>
+              </a:rPr>
+              <a:t>成都国信公链科技有限公司</a:t>
+            </a:r>
+          </a:p>
+        </p:txBody>
+      </p:sp>
+      <p:sp>
+        <p:nvSpPr>
+          <p:cNvPr id="136" name="TextBox 135"/>
+          <p:cNvSpPr txBox="1"/>
+          <p:nvPr/>
+        </p:nvSpPr>
+        <p:spPr>
+          <a:xfrm>
+            <a:off x="8229600" y="5061204"/>
+            <a:ext cx="170688" cy="75438"/>
+          </a:xfrm>
+          <a:prstGeom prst="rect">
+            <a:avLst/>
+          </a:prstGeom>
+          <a:noFill/>
+        </p:spPr>
+        <p:txBody>
+          <a:bodyPr wrap="square" lIns="0" rIns="0" tIns="0" bIns="0" anchor="t">
+            <a:spAutoFit/>
+          </a:bodyPr>
+          <a:lstStyle/>
+          <a:p>
+            <a:pPr algn="l">
+              <a:lnSpc>
+                <a:spcPct val="100000"/>
+              </a:lnSpc>
+            </a:pPr>
+            <a:r>
+              <a:rPr sz="740" b="1">
+                <a:solidFill>
+                  <a:srgbClr val="B5333B"/>
+                </a:solidFill>
+                <a:latin typeface="微软雅黑"/>
+                <a:ea typeface="微软雅黑"/>
+                <a:cs typeface="微软雅黑"/>
+              </a:rPr>
+              <a:t>3</a:t>
+            </a:r>
+          </a:p>
+        </p:txBody>
+      </p:sp>
+      <p:sp>
+        <p:nvSpPr>
+          <p:cNvPr id="137" name="TextBox 136"/>
+          <p:cNvSpPr txBox="1"/>
+          <p:nvPr/>
+        </p:nvSpPr>
+        <p:spPr>
+          <a:xfrm>
+            <a:off x="8424672" y="5061204"/>
+            <a:ext cx="2621280" cy="75438"/>
+          </a:xfrm>
+          <a:prstGeom prst="rect">
+            <a:avLst/>
+          </a:prstGeom>
+          <a:noFill/>
+        </p:spPr>
+        <p:txBody>
+          <a:bodyPr wrap="square" lIns="0" rIns="0" tIns="0" bIns="0" anchor="t">
+            <a:spAutoFit/>
+          </a:bodyPr>
+          <a:lstStyle/>
+          <a:p>
+            <a:pPr algn="l">
+              <a:lnSpc>
+                <a:spcPct val="100000"/>
+              </a:lnSpc>
+            </a:pPr>
+            <a:r>
+              <a:rPr sz="720" b="1">
+                <a:solidFill>
+                  <a:srgbClr val="1A1A1C"/>
+                </a:solidFill>
+                <a:latin typeface="微软雅黑"/>
+                <a:ea typeface="微软雅黑"/>
+                <a:cs typeface="微软雅黑"/>
+              </a:rPr>
+              <a:t>Summarize</a:t>
+            </a:r>
+          </a:p>
+        </p:txBody>
+      </p:sp>
+      <p:sp>
+        <p:nvSpPr>
+          <p:cNvPr id="138" name="TextBox 137"/>
+          <p:cNvSpPr txBox="1"/>
+          <p:nvPr/>
+        </p:nvSpPr>
+        <p:spPr>
+          <a:xfrm>
+            <a:off x="11131296" y="5061204"/>
+            <a:ext cx="609600" cy="75438"/>
+          </a:xfrm>
+          <a:prstGeom prst="rect">
+            <a:avLst/>
+          </a:prstGeom>
+          <a:noFill/>
+        </p:spPr>
+        <p:txBody>
+          <a:bodyPr wrap="square" lIns="0" rIns="0" tIns="0" bIns="0" anchor="t">
+            <a:spAutoFit/>
+          </a:bodyPr>
+          <a:lstStyle/>
+          <a:p>
+            <a:pPr algn="r">
+              <a:lnSpc>
+                <a:spcPct val="100000"/>
+              </a:lnSpc>
+            </a:pPr>
+            <a:r>
+              <a:rPr sz="720" b="0">
+                <a:solidFill>
+                  <a:srgbClr val="5B616B"/>
+                </a:solidFill>
+                <a:latin typeface="微软雅黑"/>
+                <a:ea typeface="微软雅黑"/>
+                <a:cs typeface="微软雅黑"/>
+              </a:rPr>
+              <a:t>765,618</a:t>
+            </a:r>
+          </a:p>
+        </p:txBody>
+      </p:sp>
+      <p:sp>
+        <p:nvSpPr>
+          <p:cNvPr id="139" name="TextBox 138"/>
+          <p:cNvSpPr txBox="1"/>
+          <p:nvPr/>
+        </p:nvSpPr>
+        <p:spPr>
+          <a:xfrm>
+            <a:off x="8424672" y="5164074"/>
+            <a:ext cx="3291840" cy="61721"/>
+          </a:xfrm>
+          <a:prstGeom prst="rect">
+            <a:avLst/>
+          </a:prstGeom>
+          <a:noFill/>
+        </p:spPr>
+        <p:txBody>
+          <a:bodyPr wrap="square" lIns="0" rIns="0" tIns="0" bIns="0" anchor="t">
+            <a:spAutoFit/>
+          </a:bodyPr>
+          <a:lstStyle/>
+          <a:p>
+            <a:pPr algn="l">
+              <a:lnSpc>
+                <a:spcPct val="100000"/>
+              </a:lnSpc>
+            </a:pPr>
+            <a:r>
+              <a:rPr sz="620" b="0">
+                <a:solidFill>
+                  <a:srgbClr val="5B616B"/>
+                </a:solidFill>
+                <a:latin typeface="微软雅黑"/>
+                <a:ea typeface="微软雅黑"/>
+                <a:cs typeface="微软雅黑"/>
+              </a:rPr>
+              <a:t>paudyyin</a:t>
+            </a:r>
+          </a:p>
+        </p:txBody>
+      </p:sp>
+      <p:sp>
+        <p:nvSpPr>
+          <p:cNvPr id="140" name="TextBox 139"/>
+          <p:cNvSpPr txBox="1"/>
+          <p:nvPr/>
+        </p:nvSpPr>
+        <p:spPr>
+          <a:xfrm>
+            <a:off x="8229600" y="5232653"/>
+            <a:ext cx="170688" cy="75438"/>
+          </a:xfrm>
+          <a:prstGeom prst="rect">
+            <a:avLst/>
+          </a:prstGeom>
+          <a:noFill/>
+        </p:spPr>
+        <p:txBody>
+          <a:bodyPr wrap="square" lIns="0" rIns="0" tIns="0" bIns="0" anchor="t">
+            <a:spAutoFit/>
+          </a:bodyPr>
+          <a:lstStyle/>
+          <a:p>
+            <a:pPr algn="l">
+              <a:lnSpc>
+                <a:spcPct val="100000"/>
+              </a:lnSpc>
+            </a:pPr>
+            <a:r>
+              <a:rPr sz="740" b="1">
+                <a:solidFill>
+                  <a:srgbClr val="B5333B"/>
+                </a:solidFill>
+                <a:latin typeface="微软雅黑"/>
+                <a:ea typeface="微软雅黑"/>
+                <a:cs typeface="微软雅黑"/>
+              </a:rPr>
+              <a:t>4</a:t>
+            </a:r>
+          </a:p>
+        </p:txBody>
+      </p:sp>
+      <p:sp>
+        <p:nvSpPr>
+          <p:cNvPr id="141" name="TextBox 140"/>
+          <p:cNvSpPr txBox="1"/>
+          <p:nvPr/>
+        </p:nvSpPr>
+        <p:spPr>
+          <a:xfrm>
+            <a:off x="8424672" y="5232653"/>
+            <a:ext cx="2621280" cy="75438"/>
+          </a:xfrm>
+          <a:prstGeom prst="rect">
+            <a:avLst/>
+          </a:prstGeom>
+          <a:noFill/>
+        </p:spPr>
+        <p:txBody>
+          <a:bodyPr wrap="square" lIns="0" rIns="0" tIns="0" bIns="0" anchor="t">
+            <a:spAutoFit/>
+          </a:bodyPr>
+          <a:lstStyle/>
+          <a:p>
+            <a:pPr algn="l">
+              <a:lnSpc>
+                <a:spcPct val="100000"/>
+              </a:lnSpc>
+            </a:pPr>
+            <a:r>
+              <a:rPr sz="690" b="1">
+                <a:solidFill>
+                  <a:srgbClr val="1A1A1C"/>
+                </a:solidFill>
+                <a:latin typeface="微软雅黑"/>
+                <a:ea typeface="微软雅黑"/>
+                <a:cs typeface="微软雅黑"/>
+              </a:rPr>
+              <a:t>视频号爆款短视频拆解（付费版：全能）【零一数科·出品】</a:t>
+            </a:r>
+          </a:p>
+        </p:txBody>
+      </p:sp>
+      <p:sp>
+        <p:nvSpPr>
+          <p:cNvPr id="142" name="TextBox 141"/>
+          <p:cNvSpPr txBox="1"/>
+          <p:nvPr/>
+        </p:nvSpPr>
+        <p:spPr>
+          <a:xfrm>
+            <a:off x="11131296" y="5232653"/>
+            <a:ext cx="609600" cy="75438"/>
+          </a:xfrm>
+          <a:prstGeom prst="rect">
+            <a:avLst/>
+          </a:prstGeom>
+          <a:noFill/>
+        </p:spPr>
+        <p:txBody>
+          <a:bodyPr wrap="square" lIns="0" rIns="0" tIns="0" bIns="0" anchor="t">
+            <a:spAutoFit/>
+          </a:bodyPr>
+          <a:lstStyle/>
+          <a:p>
+            <a:pPr algn="r">
+              <a:lnSpc>
+                <a:spcPct val="100000"/>
+              </a:lnSpc>
+            </a:pPr>
+            <a:r>
+              <a:rPr sz="720" b="0">
+                <a:solidFill>
+                  <a:srgbClr val="5B616B"/>
+                </a:solidFill>
+                <a:latin typeface="微软雅黑"/>
+                <a:ea typeface="微软雅黑"/>
+                <a:cs typeface="微软雅黑"/>
+              </a:rPr>
+              <a:t>690,517</a:t>
+            </a:r>
+          </a:p>
+        </p:txBody>
+      </p:sp>
+      <p:sp>
+        <p:nvSpPr>
+          <p:cNvPr id="143" name="TextBox 142"/>
+          <p:cNvSpPr txBox="1"/>
+          <p:nvPr/>
+        </p:nvSpPr>
+        <p:spPr>
+          <a:xfrm>
+            <a:off x="8424672" y="5335523"/>
+            <a:ext cx="3291840" cy="61721"/>
+          </a:xfrm>
+          <a:prstGeom prst="rect">
+            <a:avLst/>
+          </a:prstGeom>
+          <a:noFill/>
+        </p:spPr>
+        <p:txBody>
+          <a:bodyPr wrap="square" lIns="0" rIns="0" tIns="0" bIns="0" anchor="t">
+            <a:spAutoFit/>
+          </a:bodyPr>
+          <a:lstStyle/>
+          <a:p>
+            <a:pPr algn="l">
+              <a:lnSpc>
+                <a:spcPct val="100000"/>
+              </a:lnSpc>
+            </a:pPr>
+            <a:r>
+              <a:rPr sz="620" b="0">
+                <a:solidFill>
+                  <a:srgbClr val="5B616B"/>
+                </a:solidFill>
+                <a:latin typeface="微软雅黑"/>
+                <a:ea typeface="微软雅黑"/>
+                <a:cs typeface="微软雅黑"/>
+              </a:rPr>
+              <a:t>零一数科</a:t>
+            </a:r>
+          </a:p>
+        </p:txBody>
+      </p:sp>
+      <p:sp>
+        <p:nvSpPr>
+          <p:cNvPr id="144" name="TextBox 143"/>
+          <p:cNvSpPr txBox="1"/>
+          <p:nvPr/>
+        </p:nvSpPr>
+        <p:spPr>
+          <a:xfrm>
+            <a:off x="8229600" y="5404103"/>
+            <a:ext cx="170688" cy="75438"/>
+          </a:xfrm>
+          <a:prstGeom prst="rect">
+            <a:avLst/>
+          </a:prstGeom>
+          <a:noFill/>
+        </p:spPr>
+        <p:txBody>
+          <a:bodyPr wrap="square" lIns="0" rIns="0" tIns="0" bIns="0" anchor="t">
+            <a:spAutoFit/>
+          </a:bodyPr>
+          <a:lstStyle/>
+          <a:p>
+            <a:pPr algn="l">
+              <a:lnSpc>
+                <a:spcPct val="100000"/>
+              </a:lnSpc>
+            </a:pPr>
+            <a:r>
+              <a:rPr sz="740" b="1">
+                <a:solidFill>
+                  <a:srgbClr val="B5333B"/>
+                </a:solidFill>
+                <a:latin typeface="微软雅黑"/>
+                <a:ea typeface="微软雅黑"/>
+                <a:cs typeface="微软雅黑"/>
+              </a:rPr>
+              <a:t>5</a:t>
+            </a:r>
+          </a:p>
+        </p:txBody>
+      </p:sp>
+      <p:sp>
+        <p:nvSpPr>
+          <p:cNvPr id="145" name="TextBox 144"/>
+          <p:cNvSpPr txBox="1"/>
+          <p:nvPr/>
+        </p:nvSpPr>
+        <p:spPr>
+          <a:xfrm>
+            <a:off x="8424672" y="5404103"/>
+            <a:ext cx="2621280" cy="75438"/>
+          </a:xfrm>
+          <a:prstGeom prst="rect">
+            <a:avLst/>
+          </a:prstGeom>
+          <a:noFill/>
+        </p:spPr>
+        <p:txBody>
+          <a:bodyPr wrap="square" lIns="0" rIns="0" tIns="0" bIns="0" anchor="t">
+            <a:spAutoFit/>
+          </a:bodyPr>
+          <a:lstStyle/>
+          <a:p>
+            <a:pPr algn="l">
+              <a:lnSpc>
+                <a:spcPct val="100000"/>
+              </a:lnSpc>
+            </a:pPr>
+            <a:r>
+              <a:rPr sz="720" b="1">
+                <a:solidFill>
+                  <a:srgbClr val="1A1A1C"/>
+                </a:solidFill>
+                <a:latin typeface="微软雅黑"/>
+                <a:ea typeface="微软雅黑"/>
+                <a:cs typeface="微软雅黑"/>
+              </a:rPr>
+              <a:t>钢联AI - 智能问数</a:t>
+            </a:r>
+          </a:p>
+        </p:txBody>
+      </p:sp>
+      <p:sp>
+        <p:nvSpPr>
+          <p:cNvPr id="146" name="TextBox 145"/>
+          <p:cNvSpPr txBox="1"/>
+          <p:nvPr/>
+        </p:nvSpPr>
+        <p:spPr>
+          <a:xfrm>
+            <a:off x="11131296" y="5404103"/>
+            <a:ext cx="609600" cy="75438"/>
+          </a:xfrm>
+          <a:prstGeom prst="rect">
+            <a:avLst/>
+          </a:prstGeom>
+          <a:noFill/>
+        </p:spPr>
+        <p:txBody>
+          <a:bodyPr wrap="square" lIns="0" rIns="0" tIns="0" bIns="0" anchor="t">
+            <a:spAutoFit/>
+          </a:bodyPr>
+          <a:lstStyle/>
+          <a:p>
+            <a:pPr algn="r">
+              <a:lnSpc>
+                <a:spcPct val="100000"/>
+              </a:lnSpc>
+            </a:pPr>
+            <a:r>
+              <a:rPr sz="720" b="0">
+                <a:solidFill>
+                  <a:srgbClr val="5B616B"/>
+                </a:solidFill>
+                <a:latin typeface="微软雅黑"/>
+                <a:ea typeface="微软雅黑"/>
+                <a:cs typeface="微软雅黑"/>
+              </a:rPr>
+              <a:t>667,903</a:t>
+            </a:r>
+          </a:p>
+        </p:txBody>
+      </p:sp>
+      <p:sp>
+        <p:nvSpPr>
+          <p:cNvPr id="147" name="TextBox 146"/>
+          <p:cNvSpPr txBox="1"/>
+          <p:nvPr/>
+        </p:nvSpPr>
+        <p:spPr>
+          <a:xfrm>
+            <a:off x="8424672" y="5506974"/>
+            <a:ext cx="3291840" cy="61721"/>
+          </a:xfrm>
+          <a:prstGeom prst="rect">
+            <a:avLst/>
+          </a:prstGeom>
+          <a:noFill/>
+        </p:spPr>
+        <p:txBody>
+          <a:bodyPr wrap="square" lIns="0" rIns="0" tIns="0" bIns="0" anchor="t">
+            <a:spAutoFit/>
+          </a:bodyPr>
+          <a:lstStyle/>
+          <a:p>
+            <a:pPr algn="l">
+              <a:lnSpc>
+                <a:spcPct val="100000"/>
+              </a:lnSpc>
+            </a:pPr>
+            <a:r>
+              <a:rPr sz="620" b="0">
+                <a:solidFill>
+                  <a:srgbClr val="5B616B"/>
+                </a:solidFill>
+                <a:latin typeface="微软雅黑"/>
+                <a:ea typeface="微软雅黑"/>
+                <a:cs typeface="微软雅黑"/>
+              </a:rPr>
+              <a:t>上海钢联电子商务股份有限公司</a:t>
+            </a:r>
+          </a:p>
+        </p:txBody>
+      </p:sp>
+      <p:sp>
+        <p:nvSpPr>
+          <p:cNvPr id="148" name="TextBox 147"/>
+          <p:cNvSpPr txBox="1"/>
+          <p:nvPr/>
+        </p:nvSpPr>
+        <p:spPr>
+          <a:xfrm>
+            <a:off x="8229600" y="5575554"/>
+            <a:ext cx="170688" cy="75438"/>
+          </a:xfrm>
+          <a:prstGeom prst="rect">
+            <a:avLst/>
+          </a:prstGeom>
+          <a:noFill/>
+        </p:spPr>
+        <p:txBody>
+          <a:bodyPr wrap="square" lIns="0" rIns="0" tIns="0" bIns="0" anchor="t">
+            <a:spAutoFit/>
+          </a:bodyPr>
+          <a:lstStyle/>
+          <a:p>
+            <a:pPr algn="l">
+              <a:lnSpc>
+                <a:spcPct val="100000"/>
+              </a:lnSpc>
+            </a:pPr>
+            <a:r>
+              <a:rPr sz="740" b="1">
+                <a:solidFill>
+                  <a:srgbClr val="B5333B"/>
+                </a:solidFill>
+                <a:latin typeface="微软雅黑"/>
+                <a:ea typeface="微软雅黑"/>
+                <a:cs typeface="微软雅黑"/>
+              </a:rPr>
+              <a:t>6</a:t>
+            </a:r>
+          </a:p>
+        </p:txBody>
+      </p:sp>
+      <p:sp>
+        <p:nvSpPr>
+          <p:cNvPr id="149" name="TextBox 148"/>
+          <p:cNvSpPr txBox="1"/>
+          <p:nvPr/>
+        </p:nvSpPr>
+        <p:spPr>
+          <a:xfrm>
+            <a:off x="8424672" y="5575554"/>
+            <a:ext cx="2621280" cy="75438"/>
+          </a:xfrm>
+          <a:prstGeom prst="rect">
+            <a:avLst/>
+          </a:prstGeom>
+          <a:noFill/>
+        </p:spPr>
+        <p:txBody>
+          <a:bodyPr wrap="square" lIns="0" rIns="0" tIns="0" bIns="0" anchor="t">
+            <a:spAutoFit/>
+          </a:bodyPr>
+          <a:lstStyle/>
+          <a:p>
+            <a:pPr algn="l">
+              <a:lnSpc>
+                <a:spcPct val="100000"/>
+              </a:lnSpc>
+            </a:pPr>
+            <a:r>
+              <a:rPr sz="720" b="1">
+                <a:solidFill>
+                  <a:srgbClr val="1A1A1C"/>
+                </a:solidFill>
+                <a:latin typeface="微软雅黑"/>
+                <a:ea typeface="微软雅黑"/>
+                <a:cs typeface="微软雅黑"/>
+              </a:rPr>
+              <a:t>ima-skills</a:t>
+            </a:r>
+          </a:p>
+        </p:txBody>
+      </p:sp>
+      <p:sp>
+        <p:nvSpPr>
+          <p:cNvPr id="150" name="TextBox 149"/>
+          <p:cNvSpPr txBox="1"/>
+          <p:nvPr/>
+        </p:nvSpPr>
+        <p:spPr>
+          <a:xfrm>
+            <a:off x="11131296" y="5575554"/>
+            <a:ext cx="609600" cy="75438"/>
+          </a:xfrm>
+          <a:prstGeom prst="rect">
+            <a:avLst/>
+          </a:prstGeom>
+          <a:noFill/>
+        </p:spPr>
+        <p:txBody>
+          <a:bodyPr wrap="square" lIns="0" rIns="0" tIns="0" bIns="0" anchor="t">
+            <a:spAutoFit/>
+          </a:bodyPr>
+          <a:lstStyle/>
+          <a:p>
+            <a:pPr algn="r">
+              <a:lnSpc>
+                <a:spcPct val="100000"/>
+              </a:lnSpc>
+            </a:pPr>
+            <a:r>
+              <a:rPr sz="720" b="0">
+                <a:solidFill>
+                  <a:srgbClr val="5B616B"/>
+                </a:solidFill>
+                <a:latin typeface="微软雅黑"/>
+                <a:ea typeface="微软雅黑"/>
+                <a:cs typeface="微软雅黑"/>
+              </a:rPr>
+              <a:t>663,062</a:t>
+            </a:r>
+          </a:p>
+        </p:txBody>
+      </p:sp>
+      <p:sp>
+        <p:nvSpPr>
+          <p:cNvPr id="151" name="TextBox 150"/>
+          <p:cNvSpPr txBox="1"/>
+          <p:nvPr/>
+        </p:nvSpPr>
+        <p:spPr>
+          <a:xfrm>
+            <a:off x="8424672" y="5678424"/>
+            <a:ext cx="3291840" cy="61721"/>
+          </a:xfrm>
+          <a:prstGeom prst="rect">
+            <a:avLst/>
+          </a:prstGeom>
+          <a:noFill/>
+        </p:spPr>
+        <p:txBody>
+          <a:bodyPr wrap="square" lIns="0" rIns="0" tIns="0" bIns="0" anchor="t">
+            <a:spAutoFit/>
+          </a:bodyPr>
+          <a:lstStyle/>
+          <a:p>
+            <a:pPr algn="l">
+              <a:lnSpc>
+                <a:spcPct val="100000"/>
+              </a:lnSpc>
+            </a:pPr>
+            <a:r>
+              <a:rPr sz="620" b="0">
+                <a:solidFill>
+                  <a:srgbClr val="5B616B"/>
+                </a:solidFill>
+                <a:latin typeface="微软雅黑"/>
+                <a:ea typeface="微软雅黑"/>
+                <a:cs typeface="微软雅黑"/>
+              </a:rPr>
+              <a:t>tencent-ima</a:t>
+            </a:r>
+          </a:p>
+        </p:txBody>
+      </p:sp>
+      <p:sp>
+        <p:nvSpPr>
+          <p:cNvPr id="152" name="TextBox 151"/>
+          <p:cNvSpPr txBox="1"/>
+          <p:nvPr/>
+        </p:nvSpPr>
+        <p:spPr>
+          <a:xfrm>
+            <a:off x="426720" y="5863590"/>
+            <a:ext cx="11338560" cy="178308"/>
+          </a:xfrm>
+          <a:prstGeom prst="rect">
+            <a:avLst/>
+          </a:prstGeom>
+          <a:noFill/>
+        </p:spPr>
+        <p:txBody>
+          <a:bodyPr wrap="square" lIns="0" rIns="0" tIns="0" bIns="0" anchor="t">
+            <a:spAutoFit/>
+          </a:bodyPr>
+          <a:lstStyle/>
+          <a:p>
+            <a:pPr algn="l">
+              <a:lnSpc>
+                <a:spcPct val="100000"/>
+              </a:lnSpc>
+            </a:pPr>
+            <a:r>
+              <a:rPr sz="950" b="0">
+                <a:solidFill>
+                  <a:srgbClr val="5B616B"/>
+                </a:solidFill>
+                <a:latin typeface="微软雅黑"/>
+                <a:ea typeface="微软雅黑"/>
+                <a:cs typeface="微软雅黑"/>
+              </a:rPr>
+              <a:t>免费拿走了头部下载；Payskill 是付费标签，API Key 是接入要求，两者可同时成立。</a:t>
             </a:r>
           </a:p>
         </p:txBody>

--- a/skill-final-v1.pptx
+++ b/skill-final-v1.pptx
@@ -41209,7 +41209,7 @@
                 <a:ea typeface="微软雅黑"/>
                 <a:cs typeface="微软雅黑"/>
               </a:rPr>
-              <a:t>全站个人/企业/镜像约三分；Top10000 镜像 72.4%、拿走 40.3% 下载，企业单条最强，付费不足 1%。</a:t>
+              <a:t>全站个人/企业/镜像约三分；下方按 Top10000 样本看免费 / Payskill / API Key 三类 Top8。</a:t>
             </a:r>
           </a:p>
         </p:txBody>
@@ -41222,8 +41222,8 @@
         </p:nvSpPr>
         <p:spPr>
           <a:xfrm>
-            <a:off x="426720" y="994409"/>
-            <a:ext cx="5364480" cy="164592"/>
+            <a:off x="426720" y="1028700"/>
+            <a:ext cx="5364480" cy="137160"/>
           </a:xfrm>
           <a:prstGeom prst="rect">
             <a:avLst/>
@@ -41250,7 +41250,7 @@
                 <a:ea typeface="微软雅黑"/>
                 <a:cs typeface="微软雅黑"/>
               </a:rPr>
-              <a:t>谁在供给：个人 34.0%、企业 34.4%、镜像 31.6%</a:t>
+              <a:t>谁在供给：个人 34.0% / 企业 34.4% / 镜像 31.6%</a:t>
             </a:r>
           </a:p>
         </p:txBody>
@@ -41263,8 +41263,8 @@
         </p:nvSpPr>
         <p:spPr>
           <a:xfrm>
-            <a:off x="426720" y="1152144"/>
-            <a:ext cx="5364480" cy="137160"/>
+            <a:off x="426720" y="1193292"/>
+            <a:ext cx="5364480" cy="96012"/>
           </a:xfrm>
           <a:prstGeom prst="rect">
             <a:avLst/>
@@ -41283,7 +41283,7 @@
               </a:lnSpc>
             </a:pPr>
             <a:r>
-              <a:rPr sz="850" b="0">
+              <a:rPr sz="750" b="0">
                 <a:solidFill>
                   <a:srgbClr val="8B8E94"/>
                 </a:solidFill>
@@ -41304,8 +41304,8 @@
         </p:nvSpPr>
         <p:spPr>
           <a:xfrm>
-            <a:off x="426720" y="1371600"/>
-            <a:ext cx="1158240" cy="137160"/>
+            <a:off x="426720" y="1303020"/>
+            <a:ext cx="1341120" cy="96012"/>
           </a:xfrm>
           <a:prstGeom prst="rect">
             <a:avLst/>
@@ -41324,9 +41324,9 @@
               </a:lnSpc>
             </a:pPr>
             <a:r>
-              <a:rPr sz="950" b="0">
-                <a:solidFill>
-                  <a:srgbClr val="5B616B"/>
+              <a:rPr sz="819" b="0">
+                <a:solidFill>
+                  <a:srgbClr val="1A1A1C"/>
                 </a:solidFill>
                 <a:latin typeface="微软雅黑"/>
                 <a:ea typeface="微软雅黑"/>
@@ -41345,8 +41345,8 @@
         </p:nvSpPr>
         <p:spPr>
           <a:xfrm>
-            <a:off x="1609344" y="1399032"/>
-            <a:ext cx="1767839" cy="68580"/>
+            <a:off x="1828800" y="1330452"/>
+            <a:ext cx="2072640" cy="48006"/>
           </a:xfrm>
           <a:prstGeom prst="roundRect">
             <a:avLst>
@@ -41391,8 +41391,8 @@
         </p:nvSpPr>
         <p:spPr>
           <a:xfrm>
-            <a:off x="1609344" y="1399032"/>
-            <a:ext cx="1747283" cy="68580"/>
+            <a:off x="1828800" y="1330452"/>
+            <a:ext cx="704697" cy="48006"/>
           </a:xfrm>
           <a:prstGeom prst="roundRect">
             <a:avLst>
@@ -41437,8 +41437,8 @@
         </p:nvSpPr>
         <p:spPr>
           <a:xfrm>
-            <a:off x="3511295" y="1371600"/>
-            <a:ext cx="2011680" cy="137160"/>
+            <a:off x="4023360" y="1303020"/>
+            <a:ext cx="1584960" cy="96012"/>
           </a:xfrm>
           <a:prstGeom prst="rect">
             <a:avLst/>
@@ -41457,9 +41457,9 @@
               </a:lnSpc>
             </a:pPr>
             <a:r>
-              <a:rPr sz="850" b="0">
-                <a:solidFill>
-                  <a:srgbClr val="1A1A1C"/>
+              <a:rPr sz="780" b="0">
+                <a:solidFill>
+                  <a:srgbClr val="5B616B"/>
                 </a:solidFill>
                 <a:latin typeface="微软雅黑"/>
                 <a:ea typeface="微软雅黑"/>
@@ -41478,8 +41478,8 @@
         </p:nvSpPr>
         <p:spPr>
           <a:xfrm>
-            <a:off x="426720" y="1577340"/>
-            <a:ext cx="1158240" cy="137160"/>
+            <a:off x="426720" y="1474470"/>
+            <a:ext cx="1341120" cy="96012"/>
           </a:xfrm>
           <a:prstGeom prst="rect">
             <a:avLst/>
@@ -41498,9 +41498,9 @@
               </a:lnSpc>
             </a:pPr>
             <a:r>
-              <a:rPr sz="950" b="0">
-                <a:solidFill>
-                  <a:srgbClr val="5B616B"/>
+              <a:rPr sz="819" b="0">
+                <a:solidFill>
+                  <a:srgbClr val="1A1A1C"/>
                 </a:solidFill>
                 <a:latin typeface="微软雅黑"/>
                 <a:ea typeface="微软雅黑"/>
@@ -41519,8 +41519,8 @@
         </p:nvSpPr>
         <p:spPr>
           <a:xfrm>
-            <a:off x="1609344" y="1604772"/>
-            <a:ext cx="1767839" cy="68580"/>
+            <a:off x="1828800" y="1501902"/>
+            <a:ext cx="2072640" cy="48006"/>
           </a:xfrm>
           <a:prstGeom prst="roundRect">
             <a:avLst>
@@ -41565,8 +41565,8 @@
         </p:nvSpPr>
         <p:spPr>
           <a:xfrm>
-            <a:off x="1609344" y="1604772"/>
-            <a:ext cx="1767839" cy="68580"/>
+            <a:off x="1828800" y="1501902"/>
+            <a:ext cx="712988" cy="48006"/>
           </a:xfrm>
           <a:prstGeom prst="roundRect">
             <a:avLst>
@@ -41574,7 +41574,7 @@
             </a:avLst>
           </a:prstGeom>
           <a:solidFill>
-            <a:srgbClr val="566472"/>
+            <a:srgbClr val="6B7785"/>
           </a:solidFill>
           <a:ln>
             <a:noFill/>
@@ -41611,8 +41611,8 @@
         </p:nvSpPr>
         <p:spPr>
           <a:xfrm>
-            <a:off x="3511295" y="1577340"/>
-            <a:ext cx="2011680" cy="137160"/>
+            <a:off x="4023360" y="1474470"/>
+            <a:ext cx="1584960" cy="96012"/>
           </a:xfrm>
           <a:prstGeom prst="rect">
             <a:avLst/>
@@ -41631,9 +41631,9 @@
               </a:lnSpc>
             </a:pPr>
             <a:r>
-              <a:rPr sz="850" b="0">
-                <a:solidFill>
-                  <a:srgbClr val="1A1A1C"/>
+              <a:rPr sz="780" b="0">
+                <a:solidFill>
+                  <a:srgbClr val="5B616B"/>
                 </a:solidFill>
                 <a:latin typeface="微软雅黑"/>
                 <a:ea typeface="微软雅黑"/>
@@ -41652,8 +41652,8 @@
         </p:nvSpPr>
         <p:spPr>
           <a:xfrm>
-            <a:off x="426720" y="1783080"/>
-            <a:ext cx="1158240" cy="137160"/>
+            <a:off x="426720" y="1645920"/>
+            <a:ext cx="1341120" cy="96012"/>
           </a:xfrm>
           <a:prstGeom prst="rect">
             <a:avLst/>
@@ -41672,9 +41672,9 @@
               </a:lnSpc>
             </a:pPr>
             <a:r>
-              <a:rPr sz="950" b="0">
-                <a:solidFill>
-                  <a:srgbClr val="5B616B"/>
+              <a:rPr sz="819" b="0">
+                <a:solidFill>
+                  <a:srgbClr val="1A1A1C"/>
                 </a:solidFill>
                 <a:latin typeface="微软雅黑"/>
                 <a:ea typeface="微软雅黑"/>
@@ -41693,8 +41693,8 @@
         </p:nvSpPr>
         <p:spPr>
           <a:xfrm>
-            <a:off x="1609344" y="1810512"/>
-            <a:ext cx="1767839" cy="68580"/>
+            <a:off x="1828800" y="1673352"/>
+            <a:ext cx="2072640" cy="48006"/>
           </a:xfrm>
           <a:prstGeom prst="roundRect">
             <a:avLst>
@@ -41739,8 +41739,8 @@
         </p:nvSpPr>
         <p:spPr>
           <a:xfrm>
-            <a:off x="1609344" y="1810512"/>
-            <a:ext cx="1623946" cy="68580"/>
+            <a:off x="1828800" y="1673352"/>
+            <a:ext cx="654954" cy="48006"/>
           </a:xfrm>
           <a:prstGeom prst="roundRect">
             <a:avLst>
@@ -41748,7 +41748,7 @@
             </a:avLst>
           </a:prstGeom>
           <a:solidFill>
-            <a:srgbClr val="CFD4DA"/>
+            <a:srgbClr val="D98A8F"/>
           </a:solidFill>
           <a:ln>
             <a:noFill/>
@@ -41785,8 +41785,8 @@
         </p:nvSpPr>
         <p:spPr>
           <a:xfrm>
-            <a:off x="3511295" y="1783080"/>
-            <a:ext cx="2011680" cy="137160"/>
+            <a:off x="4023360" y="1645920"/>
+            <a:ext cx="1584960" cy="96012"/>
           </a:xfrm>
           <a:prstGeom prst="rect">
             <a:avLst/>
@@ -41805,9 +41805,9 @@
               </a:lnSpc>
             </a:pPr>
             <a:r>
-              <a:rPr sz="850" b="0">
-                <a:solidFill>
-                  <a:srgbClr val="1A1A1C"/>
+              <a:rPr sz="780" b="0">
+                <a:solidFill>
+                  <a:srgbClr val="5B616B"/>
                 </a:solidFill>
                 <a:latin typeface="微软雅黑"/>
                 <a:ea typeface="微软雅黑"/>
@@ -41826,50 +41826,8 @@
         </p:nvSpPr>
         <p:spPr>
           <a:xfrm>
-            <a:off x="426720" y="2023110"/>
-            <a:ext cx="5364480" cy="329184"/>
-          </a:xfrm>
-          <a:prstGeom prst="rect">
-            <a:avLst/>
-          </a:prstGeom>
-          <a:noFill/>
-        </p:spPr>
-        <p:txBody>
-          <a:bodyPr wrap="square" lIns="0" rIns="0" tIns="0" bIns="0" anchor="t">
-            <a:spAutoFit/>
-          </a:bodyPr>
-          <a:lstStyle/>
-          <a:p>
-            <a:pPr algn="l">
-              <a:lnSpc>
-                <a:spcPct val="110000"/>
-              </a:lnSpc>
-            </a:pPr>
-            <a:r>
-              <a:rPr sz="850" b="0">
-                <a:solidFill>
-                  <a:srgbClr val="8B8E94"/>
-                </a:solidFill>
-                <a:latin typeface="微软雅黑"/>
-                <a:ea typeface="微软雅黑"/>
-                <a:cs typeface="微软雅黑"/>
-              </a:rPr>
-              <a:t>按来源标签折算：个人 = 社区 137,017 − 企业 68,859；
-企业 = 1,999 家 publishedSkillCount 合计；镜像 = ClawHub 63,402。</a:t>
-            </a:r>
-          </a:p>
-        </p:txBody>
-      </p:sp>
-      <p:sp>
-        <p:nvSpPr>
-          <p:cNvPr id="19" name="TextBox 18"/>
-          <p:cNvSpPr txBox="1"/>
-          <p:nvPr/>
-        </p:nvSpPr>
-        <p:spPr>
-          <a:xfrm>
-            <a:off x="6217920" y="994409"/>
-            <a:ext cx="5364480" cy="164592"/>
+            <a:off x="426720" y="1885950"/>
+            <a:ext cx="5364480" cy="178308"/>
           </a:xfrm>
           <a:prstGeom prst="rect">
             <a:avLst/>
@@ -41888,28 +41846,28 @@
               </a:lnSpc>
             </a:pPr>
             <a:r>
-              <a:rPr sz="1050" b="1">
-                <a:solidFill>
-                  <a:srgbClr val="1A1A1C"/>
-                </a:solidFill>
-                <a:latin typeface="微软雅黑"/>
-                <a:ea typeface="微软雅黑"/>
-                <a:cs typeface="微软雅黑"/>
-              </a:rPr>
-              <a:t>分类：全站商业 / 专业 / AI / 开发居前</a:t>
-            </a:r>
-          </a:p>
-        </p:txBody>
-      </p:sp>
-      <p:sp>
-        <p:nvSpPr>
-          <p:cNvPr id="20" name="TextBox 19"/>
-          <p:cNvSpPr txBox="1"/>
-          <p:nvPr/>
-        </p:nvSpPr>
-        <p:spPr>
-          <a:xfrm>
-            <a:off x="6217920" y="1152144"/>
+              <a:rPr sz="720" b="0">
+                <a:solidFill>
+                  <a:srgbClr val="8B8E94"/>
+                </a:solidFill>
+                <a:latin typeface="微软雅黑"/>
+                <a:ea typeface="微软雅黑"/>
+                <a:cs typeface="微软雅黑"/>
+              </a:rPr>
+              <a:t>按账号/来源标签折算；个人=社区−企业；非严格互斥。</a:t>
+            </a:r>
+          </a:p>
+        </p:txBody>
+      </p:sp>
+      <p:sp>
+        <p:nvSpPr>
+          <p:cNvPr id="19" name="TextBox 18"/>
+          <p:cNvSpPr txBox="1"/>
+          <p:nvPr/>
+        </p:nvSpPr>
+        <p:spPr>
+          <a:xfrm>
+            <a:off x="6339840" y="1028700"/>
             <a:ext cx="5364480" cy="137160"/>
           </a:xfrm>
           <a:prstGeom prst="rect">
@@ -41929,29 +41887,29 @@
               </a:lnSpc>
             </a:pPr>
             <a:r>
-              <a:rPr sz="850" b="0">
-                <a:solidFill>
-                  <a:srgbClr val="8B8E94"/>
-                </a:solidFill>
-                <a:latin typeface="微软雅黑"/>
-                <a:ea typeface="微软雅黑"/>
-                <a:cs typeface="微软雅黑"/>
-              </a:rPr>
-              <a:t>全站 200,403 条 · 条数占比</a:t>
-            </a:r>
-          </a:p>
-        </p:txBody>
-      </p:sp>
-      <p:sp>
-        <p:nvSpPr>
-          <p:cNvPr id="21" name="TextBox 20"/>
-          <p:cNvSpPr txBox="1"/>
-          <p:nvPr/>
-        </p:nvSpPr>
-        <p:spPr>
-          <a:xfrm>
-            <a:off x="6217920" y="1357884"/>
-            <a:ext cx="1036320" cy="137160"/>
+              <a:rPr sz="1050" b="1">
+                <a:solidFill>
+                  <a:srgbClr val="1A1A1C"/>
+                </a:solidFill>
+                <a:latin typeface="微软雅黑"/>
+                <a:ea typeface="微软雅黑"/>
+                <a:cs typeface="微软雅黑"/>
+              </a:rPr>
+              <a:t>类目：商业 / 专业 / AI / 开发居前</a:t>
+            </a:r>
+          </a:p>
+        </p:txBody>
+      </p:sp>
+      <p:sp>
+        <p:nvSpPr>
+          <p:cNvPr id="20" name="TextBox 19"/>
+          <p:cNvSpPr txBox="1"/>
+          <p:nvPr/>
+        </p:nvSpPr>
+        <p:spPr>
+          <a:xfrm>
+            <a:off x="6339840" y="1193292"/>
+            <a:ext cx="5364480" cy="96012"/>
           </a:xfrm>
           <a:prstGeom prst="rect">
             <a:avLst/>
@@ -41970,9 +41928,50 @@
               </a:lnSpc>
             </a:pPr>
             <a:r>
-              <a:rPr sz="900" b="0">
-                <a:solidFill>
-                  <a:srgbClr val="5B616B"/>
+              <a:rPr sz="750" b="0">
+                <a:solidFill>
+                  <a:srgbClr val="8B8E94"/>
+                </a:solidFill>
+                <a:latin typeface="微软雅黑"/>
+                <a:ea typeface="微软雅黑"/>
+                <a:cs typeface="微软雅黑"/>
+              </a:rPr>
+              <a:t>全站 200,403 条 · 12 个内容分类</a:t>
+            </a:r>
+          </a:p>
+        </p:txBody>
+      </p:sp>
+      <p:sp>
+        <p:nvSpPr>
+          <p:cNvPr id="21" name="TextBox 20"/>
+          <p:cNvSpPr txBox="1"/>
+          <p:nvPr/>
+        </p:nvSpPr>
+        <p:spPr>
+          <a:xfrm>
+            <a:off x="6339840" y="1303020"/>
+            <a:ext cx="1158240" cy="96012"/>
+          </a:xfrm>
+          <a:prstGeom prst="rect">
+            <a:avLst/>
+          </a:prstGeom>
+          <a:noFill/>
+        </p:spPr>
+        <p:txBody>
+          <a:bodyPr wrap="square" lIns="0" rIns="0" tIns="0" bIns="0" anchor="t">
+            <a:spAutoFit/>
+          </a:bodyPr>
+          <a:lstStyle/>
+          <a:p>
+            <a:pPr algn="l">
+              <a:lnSpc>
+                <a:spcPct val="100000"/>
+              </a:lnSpc>
+            </a:pPr>
+            <a:r>
+              <a:rPr sz="800" b="0">
+                <a:solidFill>
+                  <a:srgbClr val="1A1A1C"/>
                 </a:solidFill>
                 <a:latin typeface="微软雅黑"/>
                 <a:ea typeface="微软雅黑"/>
@@ -41991,8 +41990,8 @@
         </p:nvSpPr>
         <p:spPr>
           <a:xfrm>
-            <a:off x="7315200" y="1385316"/>
-            <a:ext cx="1341120" cy="61721"/>
+            <a:off x="7559040" y="1330452"/>
+            <a:ext cx="2194560" cy="44577"/>
           </a:xfrm>
           <a:prstGeom prst="roundRect">
             <a:avLst>
@@ -42037,8 +42036,8 @@
         </p:nvSpPr>
         <p:spPr>
           <a:xfrm>
-            <a:off x="7315200" y="1385316"/>
-            <a:ext cx="1341120" cy="61721"/>
+            <a:off x="7559040" y="1330452"/>
+            <a:ext cx="2194560" cy="44577"/>
           </a:xfrm>
           <a:prstGeom prst="roundRect">
             <a:avLst>
@@ -42083,8 +42082,8 @@
         </p:nvSpPr>
         <p:spPr>
           <a:xfrm>
-            <a:off x="8778240" y="1357884"/>
-            <a:ext cx="731520" cy="137160"/>
+            <a:off x="9875520" y="1303020"/>
+            <a:ext cx="853440" cy="96012"/>
           </a:xfrm>
           <a:prstGeom prst="rect">
             <a:avLst/>
@@ -42103,9 +42102,9 @@
               </a:lnSpc>
             </a:pPr>
             <a:r>
-              <a:rPr sz="850" b="0">
-                <a:solidFill>
-                  <a:srgbClr val="1A1A1C"/>
+              <a:rPr sz="780" b="0">
+                <a:solidFill>
+                  <a:srgbClr val="5B616B"/>
                 </a:solidFill>
                 <a:latin typeface="微软雅黑"/>
                 <a:ea typeface="微软雅黑"/>
@@ -42124,8 +42123,8 @@
         </p:nvSpPr>
         <p:spPr>
           <a:xfrm>
-            <a:off x="6217920" y="1508760"/>
-            <a:ext cx="1036320" cy="137160"/>
+            <a:off x="6339840" y="1440180"/>
+            <a:ext cx="1158240" cy="96012"/>
           </a:xfrm>
           <a:prstGeom prst="rect">
             <a:avLst/>
@@ -42144,9 +42143,9 @@
               </a:lnSpc>
             </a:pPr>
             <a:r>
-              <a:rPr sz="900" b="0">
-                <a:solidFill>
-                  <a:srgbClr val="5B616B"/>
+              <a:rPr sz="800" b="0">
+                <a:solidFill>
+                  <a:srgbClr val="1A1A1C"/>
                 </a:solidFill>
                 <a:latin typeface="微软雅黑"/>
                 <a:ea typeface="微软雅黑"/>
@@ -42165,8 +42164,8 @@
         </p:nvSpPr>
         <p:spPr>
           <a:xfrm>
-            <a:off x="7315200" y="1536192"/>
-            <a:ext cx="1341120" cy="61721"/>
+            <a:off x="7559040" y="1467612"/>
+            <a:ext cx="2194560" cy="44577"/>
           </a:xfrm>
           <a:prstGeom prst="roundRect">
             <a:avLst>
@@ -42211,8 +42210,8 @@
         </p:nvSpPr>
         <p:spPr>
           <a:xfrm>
-            <a:off x="7315200" y="1536192"/>
-            <a:ext cx="1023486" cy="61721"/>
+            <a:off x="7559040" y="1467612"/>
+            <a:ext cx="1674795" cy="44577"/>
           </a:xfrm>
           <a:prstGeom prst="roundRect">
             <a:avLst>
@@ -42220,7 +42219,7 @@
             </a:avLst>
           </a:prstGeom>
           <a:solidFill>
-            <a:srgbClr val="C97A80"/>
+            <a:srgbClr val="D98A8F"/>
           </a:solidFill>
           <a:ln>
             <a:noFill/>
@@ -42257,8 +42256,8 @@
         </p:nvSpPr>
         <p:spPr>
           <a:xfrm>
-            <a:off x="8778240" y="1508760"/>
-            <a:ext cx="731520" cy="137160"/>
+            <a:off x="9875520" y="1440180"/>
+            <a:ext cx="853440" cy="96012"/>
           </a:xfrm>
           <a:prstGeom prst="rect">
             <a:avLst/>
@@ -42277,9 +42276,9 @@
               </a:lnSpc>
             </a:pPr>
             <a:r>
-              <a:rPr sz="850" b="0">
-                <a:solidFill>
-                  <a:srgbClr val="1A1A1C"/>
+              <a:rPr sz="780" b="0">
+                <a:solidFill>
+                  <a:srgbClr val="5B616B"/>
                 </a:solidFill>
                 <a:latin typeface="微软雅黑"/>
                 <a:ea typeface="微软雅黑"/>
@@ -42298,8 +42297,8 @@
         </p:nvSpPr>
         <p:spPr>
           <a:xfrm>
-            <a:off x="6217920" y="1659636"/>
-            <a:ext cx="1036320" cy="137160"/>
+            <a:off x="6339840" y="1577340"/>
+            <a:ext cx="1158240" cy="96012"/>
           </a:xfrm>
           <a:prstGeom prst="rect">
             <a:avLst/>
@@ -42318,9 +42317,9 @@
               </a:lnSpc>
             </a:pPr>
             <a:r>
-              <a:rPr sz="900" b="0">
-                <a:solidFill>
-                  <a:srgbClr val="5B616B"/>
+              <a:rPr sz="800" b="0">
+                <a:solidFill>
+                  <a:srgbClr val="1A1A1C"/>
                 </a:solidFill>
                 <a:latin typeface="微软雅黑"/>
                 <a:ea typeface="微软雅黑"/>
@@ -42339,8 +42338,8 @@
         </p:nvSpPr>
         <p:spPr>
           <a:xfrm>
-            <a:off x="7315200" y="1687068"/>
-            <a:ext cx="1341120" cy="61721"/>
+            <a:off x="7559040" y="1604772"/>
+            <a:ext cx="2194560" cy="44577"/>
           </a:xfrm>
           <a:prstGeom prst="roundRect">
             <a:avLst>
@@ -42385,8 +42384,8 @@
         </p:nvSpPr>
         <p:spPr>
           <a:xfrm>
-            <a:off x="7315200" y="1687068"/>
-            <a:ext cx="988193" cy="61721"/>
+            <a:off x="7559040" y="1604772"/>
+            <a:ext cx="1617044" cy="44577"/>
           </a:xfrm>
           <a:prstGeom prst="roundRect">
             <a:avLst>
@@ -42394,7 +42393,7 @@
             </a:avLst>
           </a:prstGeom>
           <a:solidFill>
-            <a:srgbClr val="C97A80"/>
+            <a:srgbClr val="D98A8F"/>
           </a:solidFill>
           <a:ln>
             <a:noFill/>
@@ -42431,8 +42430,8 @@
         </p:nvSpPr>
         <p:spPr>
           <a:xfrm>
-            <a:off x="8778240" y="1659636"/>
-            <a:ext cx="731520" cy="137160"/>
+            <a:off x="9875520" y="1577340"/>
+            <a:ext cx="853440" cy="96012"/>
           </a:xfrm>
           <a:prstGeom prst="rect">
             <a:avLst/>
@@ -42451,9 +42450,9 @@
               </a:lnSpc>
             </a:pPr>
             <a:r>
-              <a:rPr sz="850" b="0">
-                <a:solidFill>
-                  <a:srgbClr val="1A1A1C"/>
+              <a:rPr sz="780" b="0">
+                <a:solidFill>
+                  <a:srgbClr val="5B616B"/>
                 </a:solidFill>
                 <a:latin typeface="微软雅黑"/>
                 <a:ea typeface="微软雅黑"/>
@@ -42472,8 +42471,8 @@
         </p:nvSpPr>
         <p:spPr>
           <a:xfrm>
-            <a:off x="6217920" y="1810512"/>
-            <a:ext cx="1036320" cy="137160"/>
+            <a:off x="6339840" y="1714500"/>
+            <a:ext cx="1158240" cy="96012"/>
           </a:xfrm>
           <a:prstGeom prst="rect">
             <a:avLst/>
@@ -42492,9 +42491,9 @@
               </a:lnSpc>
             </a:pPr>
             <a:r>
-              <a:rPr sz="900" b="0">
-                <a:solidFill>
-                  <a:srgbClr val="5B616B"/>
+              <a:rPr sz="800" b="0">
+                <a:solidFill>
+                  <a:srgbClr val="1A1A1C"/>
                 </a:solidFill>
                 <a:latin typeface="微软雅黑"/>
                 <a:ea typeface="微软雅黑"/>
@@ -42513,8 +42512,8 @@
         </p:nvSpPr>
         <p:spPr>
           <a:xfrm>
-            <a:off x="7315200" y="1837944"/>
-            <a:ext cx="1341120" cy="61721"/>
+            <a:off x="7559040" y="1741932"/>
+            <a:ext cx="2194560" cy="44577"/>
           </a:xfrm>
           <a:prstGeom prst="roundRect">
             <a:avLst>
@@ -42559,8 +42558,8 @@
         </p:nvSpPr>
         <p:spPr>
           <a:xfrm>
-            <a:off x="7315200" y="1837944"/>
-            <a:ext cx="935254" cy="61721"/>
+            <a:off x="7559040" y="1741932"/>
+            <a:ext cx="1530416" cy="44577"/>
           </a:xfrm>
           <a:prstGeom prst="roundRect">
             <a:avLst>
@@ -42568,7 +42567,7 @@
             </a:avLst>
           </a:prstGeom>
           <a:solidFill>
-            <a:srgbClr val="C97A80"/>
+            <a:srgbClr val="D98A8F"/>
           </a:solidFill>
           <a:ln>
             <a:noFill/>
@@ -42605,8 +42604,8 @@
         </p:nvSpPr>
         <p:spPr>
           <a:xfrm>
-            <a:off x="8778240" y="1810512"/>
-            <a:ext cx="731520" cy="137160"/>
+            <a:off x="9875520" y="1714500"/>
+            <a:ext cx="853440" cy="96012"/>
           </a:xfrm>
           <a:prstGeom prst="rect">
             <a:avLst/>
@@ -42625,9 +42624,9 @@
               </a:lnSpc>
             </a:pPr>
             <a:r>
-              <a:rPr sz="850" b="0">
-                <a:solidFill>
-                  <a:srgbClr val="1A1A1C"/>
+              <a:rPr sz="780" b="0">
+                <a:solidFill>
+                  <a:srgbClr val="5B616B"/>
                 </a:solidFill>
                 <a:latin typeface="微软雅黑"/>
                 <a:ea typeface="微软雅黑"/>
@@ -42646,8 +42645,8 @@
         </p:nvSpPr>
         <p:spPr>
           <a:xfrm>
-            <a:off x="6217920" y="1961388"/>
-            <a:ext cx="1036320" cy="137160"/>
+            <a:off x="6339840" y="1851660"/>
+            <a:ext cx="1158240" cy="96012"/>
           </a:xfrm>
           <a:prstGeom prst="rect">
             <a:avLst/>
@@ -42666,9 +42665,9 @@
               </a:lnSpc>
             </a:pPr>
             <a:r>
-              <a:rPr sz="900" b="0">
-                <a:solidFill>
-                  <a:srgbClr val="5B616B"/>
+              <a:rPr sz="800" b="0">
+                <a:solidFill>
+                  <a:srgbClr val="1A1A1C"/>
                 </a:solidFill>
                 <a:latin typeface="微软雅黑"/>
                 <a:ea typeface="微软雅黑"/>
@@ -42687,8 +42686,8 @@
         </p:nvSpPr>
         <p:spPr>
           <a:xfrm>
-            <a:off x="7315200" y="1988820"/>
-            <a:ext cx="1341120" cy="61721"/>
+            <a:off x="7559040" y="1879092"/>
+            <a:ext cx="2194560" cy="44577"/>
           </a:xfrm>
           <a:prstGeom prst="roundRect">
             <a:avLst>
@@ -42733,8 +42732,8 @@
         </p:nvSpPr>
         <p:spPr>
           <a:xfrm>
-            <a:off x="7315200" y="1988820"/>
-            <a:ext cx="829376" cy="61721"/>
+            <a:off x="7559040" y="1879092"/>
+            <a:ext cx="1357162" cy="44577"/>
           </a:xfrm>
           <a:prstGeom prst="roundRect">
             <a:avLst>
@@ -42742,7 +42741,7 @@
             </a:avLst>
           </a:prstGeom>
           <a:solidFill>
-            <a:srgbClr val="C97A80"/>
+            <a:srgbClr val="D98A8F"/>
           </a:solidFill>
           <a:ln>
             <a:noFill/>
@@ -42779,8 +42778,8 @@
         </p:nvSpPr>
         <p:spPr>
           <a:xfrm>
-            <a:off x="8778240" y="1961388"/>
-            <a:ext cx="731520" cy="137160"/>
+            <a:off x="9875520" y="1851660"/>
+            <a:ext cx="853440" cy="96012"/>
           </a:xfrm>
           <a:prstGeom prst="rect">
             <a:avLst/>
@@ -42799,9 +42798,9 @@
               </a:lnSpc>
             </a:pPr>
             <a:r>
-              <a:rPr sz="850" b="0">
-                <a:solidFill>
-                  <a:srgbClr val="1A1A1C"/>
+              <a:rPr sz="780" b="0">
+                <a:solidFill>
+                  <a:srgbClr val="5B616B"/>
                 </a:solidFill>
                 <a:latin typeface="微软雅黑"/>
                 <a:ea typeface="微软雅黑"/>
@@ -42820,8 +42819,8 @@
         </p:nvSpPr>
         <p:spPr>
           <a:xfrm>
-            <a:off x="6217920" y="2112264"/>
-            <a:ext cx="1036320" cy="137160"/>
+            <a:off x="6339840" y="1954529"/>
+            <a:ext cx="5364480" cy="96012"/>
           </a:xfrm>
           <a:prstGeom prst="rect">
             <a:avLst/>
@@ -42840,37 +42839,158 @@
               </a:lnSpc>
             </a:pPr>
             <a:r>
-              <a:rPr sz="900" b="0">
-                <a:solidFill>
-                  <a:srgbClr val="5B616B"/>
-                </a:solidFill>
-                <a:latin typeface="微软雅黑"/>
-                <a:ea typeface="微软雅黑"/>
-                <a:cs typeface="微软雅黑"/>
-              </a:rPr>
-              <a:t>设计多媒体</a:t>
-            </a:r>
-          </a:p>
-        </p:txBody>
-      </p:sp>
-      <p:sp>
-        <p:nvSpPr>
-          <p:cNvPr id="42" name="Rounded Rectangle 41"/>
+              <a:rPr sz="720" b="0">
+                <a:solidFill>
+                  <a:srgbClr val="8B8E94"/>
+                </a:solidFill>
+                <a:latin typeface="微软雅黑"/>
+                <a:ea typeface="微软雅黑"/>
+                <a:cs typeface="微软雅黑"/>
+              </a:rPr>
+              <a:t>其余 6 类 34.7%；Pay Skill 10.0% 为多标签。</a:t>
+            </a:r>
+          </a:p>
+        </p:txBody>
+      </p:sp>
+      <p:sp>
+        <p:nvSpPr>
+          <p:cNvPr id="42" name="TextBox 41"/>
+          <p:cNvSpPr txBox="1"/>
+          <p:nvPr/>
+        </p:nvSpPr>
+        <p:spPr>
+          <a:xfrm>
+            <a:off x="426720" y="2098548"/>
+            <a:ext cx="11338560" cy="123443"/>
+          </a:xfrm>
+          <a:prstGeom prst="rect">
+            <a:avLst/>
+          </a:prstGeom>
+          <a:noFill/>
+        </p:spPr>
+        <p:txBody>
+          <a:bodyPr wrap="square" lIns="0" rIns="0" tIns="0" bIns="0" anchor="t">
+            <a:spAutoFit/>
+          </a:bodyPr>
+          <a:lstStyle/>
+          <a:p>
+            <a:pPr algn="l">
+              <a:lnSpc>
+                <a:spcPct val="100000"/>
+              </a:lnSpc>
+            </a:pPr>
+            <a:r>
+              <a:rPr sz="1050" b="1">
+                <a:solidFill>
+                  <a:srgbClr val="1A1A1C"/>
+                </a:solidFill>
+                <a:latin typeface="微软雅黑"/>
+                <a:ea typeface="微软雅黑"/>
+                <a:cs typeface="微软雅黑"/>
+              </a:rPr>
+              <a:t>Top8 下载：免费 / Payskill / API Key（各 8 个）</a:t>
+            </a:r>
+          </a:p>
+        </p:txBody>
+      </p:sp>
+      <p:sp>
+        <p:nvSpPr>
+          <p:cNvPr id="43" name="TextBox 42"/>
+          <p:cNvSpPr txBox="1"/>
+          <p:nvPr/>
+        </p:nvSpPr>
+        <p:spPr>
+          <a:xfrm>
+            <a:off x="426720" y="2235708"/>
+            <a:ext cx="11338560" cy="82296"/>
+          </a:xfrm>
+          <a:prstGeom prst="rect">
+            <a:avLst/>
+          </a:prstGeom>
+          <a:noFill/>
+        </p:spPr>
+        <p:txBody>
+          <a:bodyPr wrap="square" lIns="0" rIns="0" tIns="0" bIns="0" anchor="t">
+            <a:spAutoFit/>
+          </a:bodyPr>
+          <a:lstStyle/>
+          <a:p>
+            <a:pPr algn="l">
+              <a:lnSpc>
+                <a:spcPct val="100000"/>
+              </a:lnSpc>
+            </a:pPr>
+            <a:r>
+              <a:rPr sz="720" b="0">
+                <a:solidFill>
+                  <a:srgbClr val="8B8E94"/>
+                </a:solidFill>
+                <a:latin typeface="微软雅黑"/>
+                <a:ea typeface="微软雅黑"/>
+                <a:cs typeface="微软雅黑"/>
+              </a:rPr>
+              <a:t>Top10000 内 · 免费 6,908 / Payskill 68 / API Key 3,030；Payskill 与 API Key 可重叠</a:t>
+            </a:r>
+          </a:p>
+        </p:txBody>
+      </p:sp>
+      <p:sp>
+        <p:nvSpPr>
+          <p:cNvPr id="44" name="TextBox 43"/>
+          <p:cNvSpPr txBox="1"/>
+          <p:nvPr/>
+        </p:nvSpPr>
+        <p:spPr>
+          <a:xfrm>
+            <a:off x="426720" y="2372868"/>
+            <a:ext cx="3535679" cy="96012"/>
+          </a:xfrm>
+          <a:prstGeom prst="rect">
+            <a:avLst/>
+          </a:prstGeom>
+          <a:noFill/>
+        </p:spPr>
+        <p:txBody>
+          <a:bodyPr wrap="square" lIns="0" rIns="0" tIns="0" bIns="0" anchor="t">
+            <a:spAutoFit/>
+          </a:bodyPr>
+          <a:lstStyle/>
+          <a:p>
+            <a:pPr algn="l">
+              <a:lnSpc>
+                <a:spcPct val="100000"/>
+              </a:lnSpc>
+            </a:pPr>
+            <a:r>
+              <a:rPr sz="919" b="1">
+                <a:solidFill>
+                  <a:srgbClr val="B5333B"/>
+                </a:solidFill>
+                <a:latin typeface="微软雅黑"/>
+                <a:ea typeface="微软雅黑"/>
+                <a:cs typeface="微软雅黑"/>
+              </a:rPr>
+              <a:t>免费 Top8</a:t>
+            </a:r>
+          </a:p>
+        </p:txBody>
+      </p:sp>
+      <p:sp>
+        <p:nvSpPr>
+          <p:cNvPr id="45" name="Rectangle 44"/>
           <p:cNvSpPr/>
           <p:nvPr/>
         </p:nvSpPr>
         <p:spPr>
           <a:xfrm>
-            <a:off x="7315200" y="2139696"/>
-            <a:ext cx="1341120" cy="61721"/>
-          </a:xfrm>
-          <a:prstGeom prst="roundRect">
-            <a:avLst>
-              <a:gd name="adj" fmla="val 40000"/>
-            </a:avLst>
+            <a:off x="426720" y="2468880"/>
+            <a:ext cx="3535679" cy="5486"/>
+          </a:xfrm>
+          <a:prstGeom prst="rect">
+            <a:avLst/>
           </a:prstGeom>
           <a:solidFill>
-            <a:srgbClr val="EDEFF2"/>
+            <a:srgbClr val="E2E4E7"/>
           </a:solidFill>
           <a:ln>
             <a:noFill/>
@@ -42901,22 +43021,1373 @@
       </p:sp>
       <p:sp>
         <p:nvSpPr>
-          <p:cNvPr id="43" name="Rounded Rectangle 42"/>
+          <p:cNvPr id="46" name="TextBox 45"/>
+          <p:cNvSpPr txBox="1"/>
+          <p:nvPr/>
+        </p:nvSpPr>
+        <p:spPr>
+          <a:xfrm>
+            <a:off x="426720" y="2510028"/>
+            <a:ext cx="170688" cy="82296"/>
+          </a:xfrm>
+          <a:prstGeom prst="rect">
+            <a:avLst/>
+          </a:prstGeom>
+          <a:noFill/>
+        </p:spPr>
+        <p:txBody>
+          <a:bodyPr wrap="square" lIns="0" rIns="0" tIns="0" bIns="0" anchor="t">
+            <a:spAutoFit/>
+          </a:bodyPr>
+          <a:lstStyle/>
+          <a:p>
+            <a:pPr algn="l">
+              <a:lnSpc>
+                <a:spcPct val="100000"/>
+              </a:lnSpc>
+            </a:pPr>
+            <a:r>
+              <a:rPr sz="800" b="1">
+                <a:solidFill>
+                  <a:srgbClr val="B5333B"/>
+                </a:solidFill>
+                <a:latin typeface="微软雅黑"/>
+                <a:ea typeface="微软雅黑"/>
+                <a:cs typeface="微软雅黑"/>
+              </a:rPr>
+              <a:t>1</a:t>
+            </a:r>
+          </a:p>
+        </p:txBody>
+      </p:sp>
+      <p:sp>
+        <p:nvSpPr>
+          <p:cNvPr id="47" name="TextBox 46"/>
+          <p:cNvSpPr txBox="1"/>
+          <p:nvPr/>
+        </p:nvSpPr>
+        <p:spPr>
+          <a:xfrm>
+            <a:off x="633984" y="2510028"/>
+            <a:ext cx="2743200" cy="82296"/>
+          </a:xfrm>
+          <a:prstGeom prst="rect">
+            <a:avLst/>
+          </a:prstGeom>
+          <a:noFill/>
+        </p:spPr>
+        <p:txBody>
+          <a:bodyPr wrap="square" lIns="0" rIns="0" tIns="0" bIns="0" anchor="t">
+            <a:spAutoFit/>
+          </a:bodyPr>
+          <a:lstStyle/>
+          <a:p>
+            <a:pPr algn="l">
+              <a:lnSpc>
+                <a:spcPct val="100000"/>
+              </a:lnSpc>
+            </a:pPr>
+            <a:r>
+              <a:rPr sz="900" b="1">
+                <a:solidFill>
+                  <a:srgbClr val="1A1A1C"/>
+                </a:solidFill>
+                <a:latin typeface="微软雅黑"/>
+                <a:ea typeface="微软雅黑"/>
+                <a:cs typeface="微软雅黑"/>
+              </a:rPr>
+              <a:t>编程大神.Skill</a:t>
+            </a:r>
+          </a:p>
+        </p:txBody>
+      </p:sp>
+      <p:sp>
+        <p:nvSpPr>
+          <p:cNvPr id="48" name="TextBox 47"/>
+          <p:cNvSpPr txBox="1"/>
+          <p:nvPr/>
+        </p:nvSpPr>
+        <p:spPr>
+          <a:xfrm>
+            <a:off x="3413760" y="2510028"/>
+            <a:ext cx="548640" cy="82296"/>
+          </a:xfrm>
+          <a:prstGeom prst="rect">
+            <a:avLst/>
+          </a:prstGeom>
+          <a:noFill/>
+        </p:spPr>
+        <p:txBody>
+          <a:bodyPr wrap="square" lIns="0" rIns="0" tIns="0" bIns="0" anchor="t">
+            <a:spAutoFit/>
+          </a:bodyPr>
+          <a:lstStyle/>
+          <a:p>
+            <a:pPr algn="r">
+              <a:lnSpc>
+                <a:spcPct val="100000"/>
+              </a:lnSpc>
+            </a:pPr>
+            <a:r>
+              <a:rPr sz="880" b="0">
+                <a:solidFill>
+                  <a:srgbClr val="5B616B"/>
+                </a:solidFill>
+                <a:latin typeface="微软雅黑"/>
+                <a:ea typeface="微软雅黑"/>
+                <a:cs typeface="微软雅黑"/>
+              </a:rPr>
+              <a:t>5,213,811</a:t>
+            </a:r>
+          </a:p>
+        </p:txBody>
+      </p:sp>
+      <p:sp>
+        <p:nvSpPr>
+          <p:cNvPr id="49" name="TextBox 48"/>
+          <p:cNvSpPr txBox="1"/>
+          <p:nvPr/>
+        </p:nvSpPr>
+        <p:spPr>
+          <a:xfrm>
+            <a:off x="633984" y="2640330"/>
+            <a:ext cx="3230880" cy="68580"/>
+          </a:xfrm>
+          <a:prstGeom prst="rect">
+            <a:avLst/>
+          </a:prstGeom>
+          <a:noFill/>
+        </p:spPr>
+        <p:txBody>
+          <a:bodyPr wrap="square" lIns="0" rIns="0" tIns="0" bIns="0" anchor="t">
+            <a:spAutoFit/>
+          </a:bodyPr>
+          <a:lstStyle/>
+          <a:p>
+            <a:pPr algn="l">
+              <a:lnSpc>
+                <a:spcPct val="100000"/>
+              </a:lnSpc>
+            </a:pPr>
+            <a:r>
+              <a:rPr sz="800" b="0">
+                <a:solidFill>
+                  <a:srgbClr val="5B616B"/>
+                </a:solidFill>
+                <a:latin typeface="微软雅黑"/>
+                <a:ea typeface="微软雅黑"/>
+                <a:cs typeface="微软雅黑"/>
+              </a:rPr>
+              <a:t>阿客实验室</a:t>
+            </a:r>
+          </a:p>
+        </p:txBody>
+      </p:sp>
+      <p:sp>
+        <p:nvSpPr>
+          <p:cNvPr id="50" name="TextBox 49"/>
+          <p:cNvSpPr txBox="1"/>
+          <p:nvPr/>
+        </p:nvSpPr>
+        <p:spPr>
+          <a:xfrm>
+            <a:off x="426720" y="2907792"/>
+            <a:ext cx="170688" cy="82296"/>
+          </a:xfrm>
+          <a:prstGeom prst="rect">
+            <a:avLst/>
+          </a:prstGeom>
+          <a:noFill/>
+        </p:spPr>
+        <p:txBody>
+          <a:bodyPr wrap="square" lIns="0" rIns="0" tIns="0" bIns="0" anchor="t">
+            <a:spAutoFit/>
+          </a:bodyPr>
+          <a:lstStyle/>
+          <a:p>
+            <a:pPr algn="l">
+              <a:lnSpc>
+                <a:spcPct val="100000"/>
+              </a:lnSpc>
+            </a:pPr>
+            <a:r>
+              <a:rPr sz="800" b="1">
+                <a:solidFill>
+                  <a:srgbClr val="B5333B"/>
+                </a:solidFill>
+                <a:latin typeface="微软雅黑"/>
+                <a:ea typeface="微软雅黑"/>
+                <a:cs typeface="微软雅黑"/>
+              </a:rPr>
+              <a:t>2</a:t>
+            </a:r>
+          </a:p>
+        </p:txBody>
+      </p:sp>
+      <p:sp>
+        <p:nvSpPr>
+          <p:cNvPr id="51" name="TextBox 50"/>
+          <p:cNvSpPr txBox="1"/>
+          <p:nvPr/>
+        </p:nvSpPr>
+        <p:spPr>
+          <a:xfrm>
+            <a:off x="633984" y="2907792"/>
+            <a:ext cx="2743200" cy="82296"/>
+          </a:xfrm>
+          <a:prstGeom prst="rect">
+            <a:avLst/>
+          </a:prstGeom>
+          <a:noFill/>
+        </p:spPr>
+        <p:txBody>
+          <a:bodyPr wrap="square" lIns="0" rIns="0" tIns="0" bIns="0" anchor="t">
+            <a:spAutoFit/>
+          </a:bodyPr>
+          <a:lstStyle/>
+          <a:p>
+            <a:pPr algn="l">
+              <a:lnSpc>
+                <a:spcPct val="100000"/>
+              </a:lnSpc>
+            </a:pPr>
+            <a:r>
+              <a:rPr sz="900" b="1">
+                <a:solidFill>
+                  <a:srgbClr val="1A1A1C"/>
+                </a:solidFill>
+                <a:latin typeface="微软雅黑"/>
+                <a:ea typeface="微软雅黑"/>
+                <a:cs typeface="微软雅黑"/>
+              </a:rPr>
+              <a:t>编程专家Pro.Skill</a:t>
+            </a:r>
+          </a:p>
+        </p:txBody>
+      </p:sp>
+      <p:sp>
+        <p:nvSpPr>
+          <p:cNvPr id="52" name="TextBox 51"/>
+          <p:cNvSpPr txBox="1"/>
+          <p:nvPr/>
+        </p:nvSpPr>
+        <p:spPr>
+          <a:xfrm>
+            <a:off x="3413760" y="2907792"/>
+            <a:ext cx="548640" cy="82296"/>
+          </a:xfrm>
+          <a:prstGeom prst="rect">
+            <a:avLst/>
+          </a:prstGeom>
+          <a:noFill/>
+        </p:spPr>
+        <p:txBody>
+          <a:bodyPr wrap="square" lIns="0" rIns="0" tIns="0" bIns="0" anchor="t">
+            <a:spAutoFit/>
+          </a:bodyPr>
+          <a:lstStyle/>
+          <a:p>
+            <a:pPr algn="r">
+              <a:lnSpc>
+                <a:spcPct val="100000"/>
+              </a:lnSpc>
+            </a:pPr>
+            <a:r>
+              <a:rPr sz="880" b="0">
+                <a:solidFill>
+                  <a:srgbClr val="5B616B"/>
+                </a:solidFill>
+                <a:latin typeface="微软雅黑"/>
+                <a:ea typeface="微软雅黑"/>
+                <a:cs typeface="微软雅黑"/>
+              </a:rPr>
+              <a:t>5,192,102</a:t>
+            </a:r>
+          </a:p>
+        </p:txBody>
+      </p:sp>
+      <p:sp>
+        <p:nvSpPr>
+          <p:cNvPr id="53" name="TextBox 52"/>
+          <p:cNvSpPr txBox="1"/>
+          <p:nvPr/>
+        </p:nvSpPr>
+        <p:spPr>
+          <a:xfrm>
+            <a:off x="633984" y="3038094"/>
+            <a:ext cx="3230880" cy="68580"/>
+          </a:xfrm>
+          <a:prstGeom prst="rect">
+            <a:avLst/>
+          </a:prstGeom>
+          <a:noFill/>
+        </p:spPr>
+        <p:txBody>
+          <a:bodyPr wrap="square" lIns="0" rIns="0" tIns="0" bIns="0" anchor="t">
+            <a:spAutoFit/>
+          </a:bodyPr>
+          <a:lstStyle/>
+          <a:p>
+            <a:pPr algn="l">
+              <a:lnSpc>
+                <a:spcPct val="100000"/>
+              </a:lnSpc>
+            </a:pPr>
+            <a:r>
+              <a:rPr sz="800" b="0">
+                <a:solidFill>
+                  <a:srgbClr val="5B616B"/>
+                </a:solidFill>
+                <a:latin typeface="微软雅黑"/>
+                <a:ea typeface="微软雅黑"/>
+                <a:cs typeface="微软雅黑"/>
+              </a:rPr>
+              <a:t>user_47d655f0</a:t>
+            </a:r>
+          </a:p>
+        </p:txBody>
+      </p:sp>
+      <p:sp>
+        <p:nvSpPr>
+          <p:cNvPr id="54" name="TextBox 53"/>
+          <p:cNvSpPr txBox="1"/>
+          <p:nvPr/>
+        </p:nvSpPr>
+        <p:spPr>
+          <a:xfrm>
+            <a:off x="426720" y="3305556"/>
+            <a:ext cx="170688" cy="82296"/>
+          </a:xfrm>
+          <a:prstGeom prst="rect">
+            <a:avLst/>
+          </a:prstGeom>
+          <a:noFill/>
+        </p:spPr>
+        <p:txBody>
+          <a:bodyPr wrap="square" lIns="0" rIns="0" tIns="0" bIns="0" anchor="t">
+            <a:spAutoFit/>
+          </a:bodyPr>
+          <a:lstStyle/>
+          <a:p>
+            <a:pPr algn="l">
+              <a:lnSpc>
+                <a:spcPct val="100000"/>
+              </a:lnSpc>
+            </a:pPr>
+            <a:r>
+              <a:rPr sz="800" b="1">
+                <a:solidFill>
+                  <a:srgbClr val="B5333B"/>
+                </a:solidFill>
+                <a:latin typeface="微软雅黑"/>
+                <a:ea typeface="微软雅黑"/>
+                <a:cs typeface="微软雅黑"/>
+              </a:rPr>
+              <a:t>3</a:t>
+            </a:r>
+          </a:p>
+        </p:txBody>
+      </p:sp>
+      <p:sp>
+        <p:nvSpPr>
+          <p:cNvPr id="55" name="TextBox 54"/>
+          <p:cNvSpPr txBox="1"/>
+          <p:nvPr/>
+        </p:nvSpPr>
+        <p:spPr>
+          <a:xfrm>
+            <a:off x="633984" y="3305556"/>
+            <a:ext cx="2743200" cy="82296"/>
+          </a:xfrm>
+          <a:prstGeom prst="rect">
+            <a:avLst/>
+          </a:prstGeom>
+          <a:noFill/>
+        </p:spPr>
+        <p:txBody>
+          <a:bodyPr wrap="square" lIns="0" rIns="0" tIns="0" bIns="0" anchor="t">
+            <a:spAutoFit/>
+          </a:bodyPr>
+          <a:lstStyle/>
+          <a:p>
+            <a:pPr algn="l">
+              <a:lnSpc>
+                <a:spcPct val="100000"/>
+              </a:lnSpc>
+            </a:pPr>
+            <a:r>
+              <a:rPr sz="900" b="1">
+                <a:solidFill>
+                  <a:srgbClr val="1A1A1C"/>
+                </a:solidFill>
+                <a:latin typeface="微软雅黑"/>
+                <a:ea typeface="微软雅黑"/>
+                <a:cs typeface="微软雅黑"/>
+              </a:rPr>
+              <a:t>编程专家.Skill</a:t>
+            </a:r>
+          </a:p>
+        </p:txBody>
+      </p:sp>
+      <p:sp>
+        <p:nvSpPr>
+          <p:cNvPr id="56" name="TextBox 55"/>
+          <p:cNvSpPr txBox="1"/>
+          <p:nvPr/>
+        </p:nvSpPr>
+        <p:spPr>
+          <a:xfrm>
+            <a:off x="3413760" y="3305556"/>
+            <a:ext cx="548640" cy="82296"/>
+          </a:xfrm>
+          <a:prstGeom prst="rect">
+            <a:avLst/>
+          </a:prstGeom>
+          <a:noFill/>
+        </p:spPr>
+        <p:txBody>
+          <a:bodyPr wrap="square" lIns="0" rIns="0" tIns="0" bIns="0" anchor="t">
+            <a:spAutoFit/>
+          </a:bodyPr>
+          <a:lstStyle/>
+          <a:p>
+            <a:pPr algn="r">
+              <a:lnSpc>
+                <a:spcPct val="100000"/>
+              </a:lnSpc>
+            </a:pPr>
+            <a:r>
+              <a:rPr sz="880" b="0">
+                <a:solidFill>
+                  <a:srgbClr val="5B616B"/>
+                </a:solidFill>
+                <a:latin typeface="微软雅黑"/>
+                <a:ea typeface="微软雅黑"/>
+                <a:cs typeface="微软雅黑"/>
+              </a:rPr>
+              <a:t>4,877,322</a:t>
+            </a:r>
+          </a:p>
+        </p:txBody>
+      </p:sp>
+      <p:sp>
+        <p:nvSpPr>
+          <p:cNvPr id="57" name="TextBox 56"/>
+          <p:cNvSpPr txBox="1"/>
+          <p:nvPr/>
+        </p:nvSpPr>
+        <p:spPr>
+          <a:xfrm>
+            <a:off x="633984" y="3435858"/>
+            <a:ext cx="3230880" cy="68580"/>
+          </a:xfrm>
+          <a:prstGeom prst="rect">
+            <a:avLst/>
+          </a:prstGeom>
+          <a:noFill/>
+        </p:spPr>
+        <p:txBody>
+          <a:bodyPr wrap="square" lIns="0" rIns="0" tIns="0" bIns="0" anchor="t">
+            <a:spAutoFit/>
+          </a:bodyPr>
+          <a:lstStyle/>
+          <a:p>
+            <a:pPr algn="l">
+              <a:lnSpc>
+                <a:spcPct val="100000"/>
+              </a:lnSpc>
+            </a:pPr>
+            <a:r>
+              <a:rPr sz="800" b="0">
+                <a:solidFill>
+                  <a:srgbClr val="5B616B"/>
+                </a:solidFill>
+                <a:latin typeface="微软雅黑"/>
+                <a:ea typeface="微软雅黑"/>
+                <a:cs typeface="微软雅黑"/>
+              </a:rPr>
+              <a:t>user_741dc82b</a:t>
+            </a:r>
+          </a:p>
+        </p:txBody>
+      </p:sp>
+      <p:sp>
+        <p:nvSpPr>
+          <p:cNvPr id="58" name="TextBox 57"/>
+          <p:cNvSpPr txBox="1"/>
+          <p:nvPr/>
+        </p:nvSpPr>
+        <p:spPr>
+          <a:xfrm>
+            <a:off x="426720" y="3703320"/>
+            <a:ext cx="170688" cy="82296"/>
+          </a:xfrm>
+          <a:prstGeom prst="rect">
+            <a:avLst/>
+          </a:prstGeom>
+          <a:noFill/>
+        </p:spPr>
+        <p:txBody>
+          <a:bodyPr wrap="square" lIns="0" rIns="0" tIns="0" bIns="0" anchor="t">
+            <a:spAutoFit/>
+          </a:bodyPr>
+          <a:lstStyle/>
+          <a:p>
+            <a:pPr algn="l">
+              <a:lnSpc>
+                <a:spcPct val="100000"/>
+              </a:lnSpc>
+            </a:pPr>
+            <a:r>
+              <a:rPr sz="800" b="1">
+                <a:solidFill>
+                  <a:srgbClr val="B5333B"/>
+                </a:solidFill>
+                <a:latin typeface="微软雅黑"/>
+                <a:ea typeface="微软雅黑"/>
+                <a:cs typeface="微软雅黑"/>
+              </a:rPr>
+              <a:t>4</a:t>
+            </a:r>
+          </a:p>
+        </p:txBody>
+      </p:sp>
+      <p:sp>
+        <p:nvSpPr>
+          <p:cNvPr id="59" name="TextBox 58"/>
+          <p:cNvSpPr txBox="1"/>
+          <p:nvPr/>
+        </p:nvSpPr>
+        <p:spPr>
+          <a:xfrm>
+            <a:off x="633984" y="3703320"/>
+            <a:ext cx="2743200" cy="82296"/>
+          </a:xfrm>
+          <a:prstGeom prst="rect">
+            <a:avLst/>
+          </a:prstGeom>
+          <a:noFill/>
+        </p:spPr>
+        <p:txBody>
+          <a:bodyPr wrap="square" lIns="0" rIns="0" tIns="0" bIns="0" anchor="t">
+            <a:spAutoFit/>
+          </a:bodyPr>
+          <a:lstStyle/>
+          <a:p>
+            <a:pPr algn="l">
+              <a:lnSpc>
+                <a:spcPct val="100000"/>
+              </a:lnSpc>
+            </a:pPr>
+            <a:r>
+              <a:rPr sz="900" b="1">
+                <a:solidFill>
+                  <a:srgbClr val="1A1A1C"/>
+                </a:solidFill>
+                <a:latin typeface="微软雅黑"/>
+                <a:ea typeface="微软雅黑"/>
+                <a:cs typeface="微软雅黑"/>
+              </a:rPr>
+              <a:t>搜索引擎</a:t>
+            </a:r>
+          </a:p>
+        </p:txBody>
+      </p:sp>
+      <p:sp>
+        <p:nvSpPr>
+          <p:cNvPr id="60" name="TextBox 59"/>
+          <p:cNvSpPr txBox="1"/>
+          <p:nvPr/>
+        </p:nvSpPr>
+        <p:spPr>
+          <a:xfrm>
+            <a:off x="3413760" y="3703320"/>
+            <a:ext cx="548640" cy="82296"/>
+          </a:xfrm>
+          <a:prstGeom prst="rect">
+            <a:avLst/>
+          </a:prstGeom>
+          <a:noFill/>
+        </p:spPr>
+        <p:txBody>
+          <a:bodyPr wrap="square" lIns="0" rIns="0" tIns="0" bIns="0" anchor="t">
+            <a:spAutoFit/>
+          </a:bodyPr>
+          <a:lstStyle/>
+          <a:p>
+            <a:pPr algn="r">
+              <a:lnSpc>
+                <a:spcPct val="100000"/>
+              </a:lnSpc>
+            </a:pPr>
+            <a:r>
+              <a:rPr sz="880" b="0">
+                <a:solidFill>
+                  <a:srgbClr val="5B616B"/>
+                </a:solidFill>
+                <a:latin typeface="微软雅黑"/>
+                <a:ea typeface="微软雅黑"/>
+                <a:cs typeface="微软雅黑"/>
+              </a:rPr>
+              <a:t>4,712,038</a:t>
+            </a:r>
+          </a:p>
+        </p:txBody>
+      </p:sp>
+      <p:sp>
+        <p:nvSpPr>
+          <p:cNvPr id="61" name="TextBox 60"/>
+          <p:cNvSpPr txBox="1"/>
+          <p:nvPr/>
+        </p:nvSpPr>
+        <p:spPr>
+          <a:xfrm>
+            <a:off x="633984" y="3833622"/>
+            <a:ext cx="3230880" cy="68580"/>
+          </a:xfrm>
+          <a:prstGeom prst="rect">
+            <a:avLst/>
+          </a:prstGeom>
+          <a:noFill/>
+        </p:spPr>
+        <p:txBody>
+          <a:bodyPr wrap="square" lIns="0" rIns="0" tIns="0" bIns="0" anchor="t">
+            <a:spAutoFit/>
+          </a:bodyPr>
+          <a:lstStyle/>
+          <a:p>
+            <a:pPr algn="l">
+              <a:lnSpc>
+                <a:spcPct val="100000"/>
+              </a:lnSpc>
+            </a:pPr>
+            <a:r>
+              <a:rPr sz="800" b="0">
+                <a:solidFill>
+                  <a:srgbClr val="5B616B"/>
+                </a:solidFill>
+                <a:latin typeface="微软雅黑"/>
+                <a:ea typeface="微软雅黑"/>
+                <a:cs typeface="微软雅黑"/>
+              </a:rPr>
+              <a:t>智创未来</a:t>
+            </a:r>
+          </a:p>
+        </p:txBody>
+      </p:sp>
+      <p:sp>
+        <p:nvSpPr>
+          <p:cNvPr id="62" name="TextBox 61"/>
+          <p:cNvSpPr txBox="1"/>
+          <p:nvPr/>
+        </p:nvSpPr>
+        <p:spPr>
+          <a:xfrm>
+            <a:off x="426720" y="4101084"/>
+            <a:ext cx="170688" cy="82296"/>
+          </a:xfrm>
+          <a:prstGeom prst="rect">
+            <a:avLst/>
+          </a:prstGeom>
+          <a:noFill/>
+        </p:spPr>
+        <p:txBody>
+          <a:bodyPr wrap="square" lIns="0" rIns="0" tIns="0" bIns="0" anchor="t">
+            <a:spAutoFit/>
+          </a:bodyPr>
+          <a:lstStyle/>
+          <a:p>
+            <a:pPr algn="l">
+              <a:lnSpc>
+                <a:spcPct val="100000"/>
+              </a:lnSpc>
+            </a:pPr>
+            <a:r>
+              <a:rPr sz="800" b="1">
+                <a:solidFill>
+                  <a:srgbClr val="B5333B"/>
+                </a:solidFill>
+                <a:latin typeface="微软雅黑"/>
+                <a:ea typeface="微软雅黑"/>
+                <a:cs typeface="微软雅黑"/>
+              </a:rPr>
+              <a:t>5</a:t>
+            </a:r>
+          </a:p>
+        </p:txBody>
+      </p:sp>
+      <p:sp>
+        <p:nvSpPr>
+          <p:cNvPr id="63" name="TextBox 62"/>
+          <p:cNvSpPr txBox="1"/>
+          <p:nvPr/>
+        </p:nvSpPr>
+        <p:spPr>
+          <a:xfrm>
+            <a:off x="633984" y="4101084"/>
+            <a:ext cx="2743200" cy="82296"/>
+          </a:xfrm>
+          <a:prstGeom prst="rect">
+            <a:avLst/>
+          </a:prstGeom>
+          <a:noFill/>
+        </p:spPr>
+        <p:txBody>
+          <a:bodyPr wrap="square" lIns="0" rIns="0" tIns="0" bIns="0" anchor="t">
+            <a:spAutoFit/>
+          </a:bodyPr>
+          <a:lstStyle/>
+          <a:p>
+            <a:pPr algn="l">
+              <a:lnSpc>
+                <a:spcPct val="100000"/>
+              </a:lnSpc>
+            </a:pPr>
+            <a:r>
+              <a:rPr sz="900" b="1">
+                <a:solidFill>
+                  <a:srgbClr val="1A1A1C"/>
+                </a:solidFill>
+                <a:latin typeface="微软雅黑"/>
+                <a:ea typeface="微软雅黑"/>
+                <a:cs typeface="微软雅黑"/>
+              </a:rPr>
+              <a:t>dev-expert</a:t>
+            </a:r>
+          </a:p>
+        </p:txBody>
+      </p:sp>
+      <p:sp>
+        <p:nvSpPr>
+          <p:cNvPr id="64" name="TextBox 63"/>
+          <p:cNvSpPr txBox="1"/>
+          <p:nvPr/>
+        </p:nvSpPr>
+        <p:spPr>
+          <a:xfrm>
+            <a:off x="3413760" y="4101084"/>
+            <a:ext cx="548640" cy="82296"/>
+          </a:xfrm>
+          <a:prstGeom prst="rect">
+            <a:avLst/>
+          </a:prstGeom>
+          <a:noFill/>
+        </p:spPr>
+        <p:txBody>
+          <a:bodyPr wrap="square" lIns="0" rIns="0" tIns="0" bIns="0" anchor="t">
+            <a:spAutoFit/>
+          </a:bodyPr>
+          <a:lstStyle/>
+          <a:p>
+            <a:pPr algn="r">
+              <a:lnSpc>
+                <a:spcPct val="100000"/>
+              </a:lnSpc>
+            </a:pPr>
+            <a:r>
+              <a:rPr sz="880" b="0">
+                <a:solidFill>
+                  <a:srgbClr val="5B616B"/>
+                </a:solidFill>
+                <a:latin typeface="微软雅黑"/>
+                <a:ea typeface="微软雅黑"/>
+                <a:cs typeface="微软雅黑"/>
+              </a:rPr>
+              <a:t>4,173,129</a:t>
+            </a:r>
+          </a:p>
+        </p:txBody>
+      </p:sp>
+      <p:sp>
+        <p:nvSpPr>
+          <p:cNvPr id="65" name="TextBox 64"/>
+          <p:cNvSpPr txBox="1"/>
+          <p:nvPr/>
+        </p:nvSpPr>
+        <p:spPr>
+          <a:xfrm>
+            <a:off x="633984" y="4231386"/>
+            <a:ext cx="3230880" cy="68580"/>
+          </a:xfrm>
+          <a:prstGeom prst="rect">
+            <a:avLst/>
+          </a:prstGeom>
+          <a:noFill/>
+        </p:spPr>
+        <p:txBody>
+          <a:bodyPr wrap="square" lIns="0" rIns="0" tIns="0" bIns="0" anchor="t">
+            <a:spAutoFit/>
+          </a:bodyPr>
+          <a:lstStyle/>
+          <a:p>
+            <a:pPr algn="l">
+              <a:lnSpc>
+                <a:spcPct val="100000"/>
+              </a:lnSpc>
+            </a:pPr>
+            <a:r>
+              <a:rPr sz="800" b="0">
+                <a:solidFill>
+                  <a:srgbClr val="5B616B"/>
+                </a:solidFill>
+                <a:latin typeface="微软雅黑"/>
+                <a:ea typeface="微软雅黑"/>
+                <a:cs typeface="微软雅黑"/>
+              </a:rPr>
+              <a:t>user_814dbe54</a:t>
+            </a:r>
+          </a:p>
+        </p:txBody>
+      </p:sp>
+      <p:sp>
+        <p:nvSpPr>
+          <p:cNvPr id="66" name="TextBox 65"/>
+          <p:cNvSpPr txBox="1"/>
+          <p:nvPr/>
+        </p:nvSpPr>
+        <p:spPr>
+          <a:xfrm>
+            <a:off x="426720" y="4498848"/>
+            <a:ext cx="170688" cy="82296"/>
+          </a:xfrm>
+          <a:prstGeom prst="rect">
+            <a:avLst/>
+          </a:prstGeom>
+          <a:noFill/>
+        </p:spPr>
+        <p:txBody>
+          <a:bodyPr wrap="square" lIns="0" rIns="0" tIns="0" bIns="0" anchor="t">
+            <a:spAutoFit/>
+          </a:bodyPr>
+          <a:lstStyle/>
+          <a:p>
+            <a:pPr algn="l">
+              <a:lnSpc>
+                <a:spcPct val="100000"/>
+              </a:lnSpc>
+            </a:pPr>
+            <a:r>
+              <a:rPr sz="800" b="1">
+                <a:solidFill>
+                  <a:srgbClr val="B5333B"/>
+                </a:solidFill>
+                <a:latin typeface="微软雅黑"/>
+                <a:ea typeface="微软雅黑"/>
+                <a:cs typeface="微软雅黑"/>
+              </a:rPr>
+              <a:t>6</a:t>
+            </a:r>
+          </a:p>
+        </p:txBody>
+      </p:sp>
+      <p:sp>
+        <p:nvSpPr>
+          <p:cNvPr id="67" name="TextBox 66"/>
+          <p:cNvSpPr txBox="1"/>
+          <p:nvPr/>
+        </p:nvSpPr>
+        <p:spPr>
+          <a:xfrm>
+            <a:off x="633984" y="4498848"/>
+            <a:ext cx="2743200" cy="82296"/>
+          </a:xfrm>
+          <a:prstGeom prst="rect">
+            <a:avLst/>
+          </a:prstGeom>
+          <a:noFill/>
+        </p:spPr>
+        <p:txBody>
+          <a:bodyPr wrap="square" lIns="0" rIns="0" tIns="0" bIns="0" anchor="t">
+            <a:spAutoFit/>
+          </a:bodyPr>
+          <a:lstStyle/>
+          <a:p>
+            <a:pPr algn="l">
+              <a:lnSpc>
+                <a:spcPct val="100000"/>
+              </a:lnSpc>
+            </a:pPr>
+            <a:r>
+              <a:rPr sz="900" b="1">
+                <a:solidFill>
+                  <a:srgbClr val="1A1A1C"/>
+                </a:solidFill>
+                <a:latin typeface="微软雅黑"/>
+                <a:ea typeface="微软雅黑"/>
+                <a:cs typeface="微软雅黑"/>
+              </a:rPr>
+              <a:t>育儿大师.Skill</a:t>
+            </a:r>
+          </a:p>
+        </p:txBody>
+      </p:sp>
+      <p:sp>
+        <p:nvSpPr>
+          <p:cNvPr id="68" name="TextBox 67"/>
+          <p:cNvSpPr txBox="1"/>
+          <p:nvPr/>
+        </p:nvSpPr>
+        <p:spPr>
+          <a:xfrm>
+            <a:off x="3413760" y="4498848"/>
+            <a:ext cx="548640" cy="82296"/>
+          </a:xfrm>
+          <a:prstGeom prst="rect">
+            <a:avLst/>
+          </a:prstGeom>
+          <a:noFill/>
+        </p:spPr>
+        <p:txBody>
+          <a:bodyPr wrap="square" lIns="0" rIns="0" tIns="0" bIns="0" anchor="t">
+            <a:spAutoFit/>
+          </a:bodyPr>
+          <a:lstStyle/>
+          <a:p>
+            <a:pPr algn="r">
+              <a:lnSpc>
+                <a:spcPct val="100000"/>
+              </a:lnSpc>
+            </a:pPr>
+            <a:r>
+              <a:rPr sz="880" b="0">
+                <a:solidFill>
+                  <a:srgbClr val="5B616B"/>
+                </a:solidFill>
+                <a:latin typeface="微软雅黑"/>
+                <a:ea typeface="微软雅黑"/>
+                <a:cs typeface="微软雅黑"/>
+              </a:rPr>
+              <a:t>2,508,248</a:t>
+            </a:r>
+          </a:p>
+        </p:txBody>
+      </p:sp>
+      <p:sp>
+        <p:nvSpPr>
+          <p:cNvPr id="69" name="TextBox 68"/>
+          <p:cNvSpPr txBox="1"/>
+          <p:nvPr/>
+        </p:nvSpPr>
+        <p:spPr>
+          <a:xfrm>
+            <a:off x="633984" y="4629150"/>
+            <a:ext cx="3230880" cy="68580"/>
+          </a:xfrm>
+          <a:prstGeom prst="rect">
+            <a:avLst/>
+          </a:prstGeom>
+          <a:noFill/>
+        </p:spPr>
+        <p:txBody>
+          <a:bodyPr wrap="square" lIns="0" rIns="0" tIns="0" bIns="0" anchor="t">
+            <a:spAutoFit/>
+          </a:bodyPr>
+          <a:lstStyle/>
+          <a:p>
+            <a:pPr algn="l">
+              <a:lnSpc>
+                <a:spcPct val="100000"/>
+              </a:lnSpc>
+            </a:pPr>
+            <a:r>
+              <a:rPr sz="800" b="0">
+                <a:solidFill>
+                  <a:srgbClr val="5B616B"/>
+                </a:solidFill>
+                <a:latin typeface="微软雅黑"/>
+                <a:ea typeface="微软雅黑"/>
+                <a:cs typeface="微软雅黑"/>
+              </a:rPr>
+              <a:t>user_741dc82b</a:t>
+            </a:r>
+          </a:p>
+        </p:txBody>
+      </p:sp>
+      <p:sp>
+        <p:nvSpPr>
+          <p:cNvPr id="70" name="TextBox 69"/>
+          <p:cNvSpPr txBox="1"/>
+          <p:nvPr/>
+        </p:nvSpPr>
+        <p:spPr>
+          <a:xfrm>
+            <a:off x="426720" y="4896612"/>
+            <a:ext cx="170688" cy="82296"/>
+          </a:xfrm>
+          <a:prstGeom prst="rect">
+            <a:avLst/>
+          </a:prstGeom>
+          <a:noFill/>
+        </p:spPr>
+        <p:txBody>
+          <a:bodyPr wrap="square" lIns="0" rIns="0" tIns="0" bIns="0" anchor="t">
+            <a:spAutoFit/>
+          </a:bodyPr>
+          <a:lstStyle/>
+          <a:p>
+            <a:pPr algn="l">
+              <a:lnSpc>
+                <a:spcPct val="100000"/>
+              </a:lnSpc>
+            </a:pPr>
+            <a:r>
+              <a:rPr sz="800" b="1">
+                <a:solidFill>
+                  <a:srgbClr val="B5333B"/>
+                </a:solidFill>
+                <a:latin typeface="微软雅黑"/>
+                <a:ea typeface="微软雅黑"/>
+                <a:cs typeface="微软雅黑"/>
+              </a:rPr>
+              <a:t>7</a:t>
+            </a:r>
+          </a:p>
+        </p:txBody>
+      </p:sp>
+      <p:sp>
+        <p:nvSpPr>
+          <p:cNvPr id="71" name="TextBox 70"/>
+          <p:cNvSpPr txBox="1"/>
+          <p:nvPr/>
+        </p:nvSpPr>
+        <p:spPr>
+          <a:xfrm>
+            <a:off x="633984" y="4896612"/>
+            <a:ext cx="2743200" cy="82296"/>
+          </a:xfrm>
+          <a:prstGeom prst="rect">
+            <a:avLst/>
+          </a:prstGeom>
+          <a:noFill/>
+        </p:spPr>
+        <p:txBody>
+          <a:bodyPr wrap="square" lIns="0" rIns="0" tIns="0" bIns="0" anchor="t">
+            <a:spAutoFit/>
+          </a:bodyPr>
+          <a:lstStyle/>
+          <a:p>
+            <a:pPr algn="l">
+              <a:lnSpc>
+                <a:spcPct val="100000"/>
+              </a:lnSpc>
+            </a:pPr>
+            <a:r>
+              <a:rPr sz="900" b="1">
+                <a:solidFill>
+                  <a:srgbClr val="1A1A1C"/>
+                </a:solidFill>
+                <a:latin typeface="微软雅黑"/>
+                <a:ea typeface="微软雅黑"/>
+                <a:cs typeface="微软雅黑"/>
+              </a:rPr>
+              <a:t>self-improving agent</a:t>
+            </a:r>
+          </a:p>
+        </p:txBody>
+      </p:sp>
+      <p:sp>
+        <p:nvSpPr>
+          <p:cNvPr id="72" name="TextBox 71"/>
+          <p:cNvSpPr txBox="1"/>
+          <p:nvPr/>
+        </p:nvSpPr>
+        <p:spPr>
+          <a:xfrm>
+            <a:off x="3413760" y="4896612"/>
+            <a:ext cx="548640" cy="82296"/>
+          </a:xfrm>
+          <a:prstGeom prst="rect">
+            <a:avLst/>
+          </a:prstGeom>
+          <a:noFill/>
+        </p:spPr>
+        <p:txBody>
+          <a:bodyPr wrap="square" lIns="0" rIns="0" tIns="0" bIns="0" anchor="t">
+            <a:spAutoFit/>
+          </a:bodyPr>
+          <a:lstStyle/>
+          <a:p>
+            <a:pPr algn="r">
+              <a:lnSpc>
+                <a:spcPct val="100000"/>
+              </a:lnSpc>
+            </a:pPr>
+            <a:r>
+              <a:rPr sz="880" b="0">
+                <a:solidFill>
+                  <a:srgbClr val="5B616B"/>
+                </a:solidFill>
+                <a:latin typeface="微软雅黑"/>
+                <a:ea typeface="微软雅黑"/>
+                <a:cs typeface="微软雅黑"/>
+              </a:rPr>
+              <a:t>1,452,722</a:t>
+            </a:r>
+          </a:p>
+        </p:txBody>
+      </p:sp>
+      <p:sp>
+        <p:nvSpPr>
+          <p:cNvPr id="73" name="TextBox 72"/>
+          <p:cNvSpPr txBox="1"/>
+          <p:nvPr/>
+        </p:nvSpPr>
+        <p:spPr>
+          <a:xfrm>
+            <a:off x="633984" y="5026914"/>
+            <a:ext cx="3230880" cy="68580"/>
+          </a:xfrm>
+          <a:prstGeom prst="rect">
+            <a:avLst/>
+          </a:prstGeom>
+          <a:noFill/>
+        </p:spPr>
+        <p:txBody>
+          <a:bodyPr wrap="square" lIns="0" rIns="0" tIns="0" bIns="0" anchor="t">
+            <a:spAutoFit/>
+          </a:bodyPr>
+          <a:lstStyle/>
+          <a:p>
+            <a:pPr algn="l">
+              <a:lnSpc>
+                <a:spcPct val="100000"/>
+              </a:lnSpc>
+            </a:pPr>
+            <a:r>
+              <a:rPr sz="800" b="0">
+                <a:solidFill>
+                  <a:srgbClr val="5B616B"/>
+                </a:solidFill>
+                <a:latin typeface="微软雅黑"/>
+                <a:ea typeface="微软雅黑"/>
+                <a:cs typeface="微软雅黑"/>
+              </a:rPr>
+              <a:t>pskoett</a:t>
+            </a:r>
+          </a:p>
+        </p:txBody>
+      </p:sp>
+      <p:sp>
+        <p:nvSpPr>
+          <p:cNvPr id="74" name="TextBox 73"/>
+          <p:cNvSpPr txBox="1"/>
+          <p:nvPr/>
+        </p:nvSpPr>
+        <p:spPr>
+          <a:xfrm>
+            <a:off x="426720" y="5294376"/>
+            <a:ext cx="170688" cy="82296"/>
+          </a:xfrm>
+          <a:prstGeom prst="rect">
+            <a:avLst/>
+          </a:prstGeom>
+          <a:noFill/>
+        </p:spPr>
+        <p:txBody>
+          <a:bodyPr wrap="square" lIns="0" rIns="0" tIns="0" bIns="0" anchor="t">
+            <a:spAutoFit/>
+          </a:bodyPr>
+          <a:lstStyle/>
+          <a:p>
+            <a:pPr algn="l">
+              <a:lnSpc>
+                <a:spcPct val="100000"/>
+              </a:lnSpc>
+            </a:pPr>
+            <a:r>
+              <a:rPr sz="800" b="1">
+                <a:solidFill>
+                  <a:srgbClr val="B5333B"/>
+                </a:solidFill>
+                <a:latin typeface="微软雅黑"/>
+                <a:ea typeface="微软雅黑"/>
+                <a:cs typeface="微软雅黑"/>
+              </a:rPr>
+              <a:t>8</a:t>
+            </a:r>
+          </a:p>
+        </p:txBody>
+      </p:sp>
+      <p:sp>
+        <p:nvSpPr>
+          <p:cNvPr id="75" name="TextBox 74"/>
+          <p:cNvSpPr txBox="1"/>
+          <p:nvPr/>
+        </p:nvSpPr>
+        <p:spPr>
+          <a:xfrm>
+            <a:off x="633984" y="5294376"/>
+            <a:ext cx="2743200" cy="82296"/>
+          </a:xfrm>
+          <a:prstGeom prst="rect">
+            <a:avLst/>
+          </a:prstGeom>
+          <a:noFill/>
+        </p:spPr>
+        <p:txBody>
+          <a:bodyPr wrap="square" lIns="0" rIns="0" tIns="0" bIns="0" anchor="t">
+            <a:spAutoFit/>
+          </a:bodyPr>
+          <a:lstStyle/>
+          <a:p>
+            <a:pPr algn="l">
+              <a:lnSpc>
+                <a:spcPct val="100000"/>
+              </a:lnSpc>
+            </a:pPr>
+            <a:r>
+              <a:rPr sz="900" b="1">
+                <a:solidFill>
+                  <a:srgbClr val="1A1A1C"/>
+                </a:solidFill>
+                <a:latin typeface="微软雅黑"/>
+                <a:ea typeface="微软雅黑"/>
+                <a:cs typeface="微软雅黑"/>
+              </a:rPr>
+              <a:t>防骗大师.Skill</a:t>
+            </a:r>
+          </a:p>
+        </p:txBody>
+      </p:sp>
+      <p:sp>
+        <p:nvSpPr>
+          <p:cNvPr id="76" name="TextBox 75"/>
+          <p:cNvSpPr txBox="1"/>
+          <p:nvPr/>
+        </p:nvSpPr>
+        <p:spPr>
+          <a:xfrm>
+            <a:off x="3413760" y="5294376"/>
+            <a:ext cx="548640" cy="82296"/>
+          </a:xfrm>
+          <a:prstGeom prst="rect">
+            <a:avLst/>
+          </a:prstGeom>
+          <a:noFill/>
+        </p:spPr>
+        <p:txBody>
+          <a:bodyPr wrap="square" lIns="0" rIns="0" tIns="0" bIns="0" anchor="t">
+            <a:spAutoFit/>
+          </a:bodyPr>
+          <a:lstStyle/>
+          <a:p>
+            <a:pPr algn="r">
+              <a:lnSpc>
+                <a:spcPct val="100000"/>
+              </a:lnSpc>
+            </a:pPr>
+            <a:r>
+              <a:rPr sz="880" b="0">
+                <a:solidFill>
+                  <a:srgbClr val="5B616B"/>
+                </a:solidFill>
+                <a:latin typeface="微软雅黑"/>
+                <a:ea typeface="微软雅黑"/>
+                <a:cs typeface="微软雅黑"/>
+              </a:rPr>
+              <a:t>1,341,004</a:t>
+            </a:r>
+          </a:p>
+        </p:txBody>
+      </p:sp>
+      <p:sp>
+        <p:nvSpPr>
+          <p:cNvPr id="77" name="TextBox 76"/>
+          <p:cNvSpPr txBox="1"/>
+          <p:nvPr/>
+        </p:nvSpPr>
+        <p:spPr>
+          <a:xfrm>
+            <a:off x="633984" y="5424678"/>
+            <a:ext cx="3230880" cy="68580"/>
+          </a:xfrm>
+          <a:prstGeom prst="rect">
+            <a:avLst/>
+          </a:prstGeom>
+          <a:noFill/>
+        </p:spPr>
+        <p:txBody>
+          <a:bodyPr wrap="square" lIns="0" rIns="0" tIns="0" bIns="0" anchor="t">
+            <a:spAutoFit/>
+          </a:bodyPr>
+          <a:lstStyle/>
+          <a:p>
+            <a:pPr algn="l">
+              <a:lnSpc>
+                <a:spcPct val="100000"/>
+              </a:lnSpc>
+            </a:pPr>
+            <a:r>
+              <a:rPr sz="800" b="0">
+                <a:solidFill>
+                  <a:srgbClr val="5B616B"/>
+                </a:solidFill>
+                <a:latin typeface="微软雅黑"/>
+                <a:ea typeface="微软雅黑"/>
+                <a:cs typeface="微软雅黑"/>
+              </a:rPr>
+              <a:t>user_741dc82b</a:t>
+            </a:r>
+          </a:p>
+        </p:txBody>
+      </p:sp>
+      <p:sp>
+        <p:nvSpPr>
+          <p:cNvPr id="78" name="TextBox 77"/>
+          <p:cNvSpPr txBox="1"/>
+          <p:nvPr/>
+        </p:nvSpPr>
+        <p:spPr>
+          <a:xfrm>
+            <a:off x="4328160" y="2372868"/>
+            <a:ext cx="3535679" cy="96012"/>
+          </a:xfrm>
+          <a:prstGeom prst="rect">
+            <a:avLst/>
+          </a:prstGeom>
+          <a:noFill/>
+        </p:spPr>
+        <p:txBody>
+          <a:bodyPr wrap="square" lIns="0" rIns="0" tIns="0" bIns="0" anchor="t">
+            <a:spAutoFit/>
+          </a:bodyPr>
+          <a:lstStyle/>
+          <a:p>
+            <a:pPr algn="l">
+              <a:lnSpc>
+                <a:spcPct val="100000"/>
+              </a:lnSpc>
+            </a:pPr>
+            <a:r>
+              <a:rPr sz="919" b="1">
+                <a:solidFill>
+                  <a:srgbClr val="D98A8F"/>
+                </a:solidFill>
+                <a:latin typeface="微软雅黑"/>
+                <a:ea typeface="微软雅黑"/>
+                <a:cs typeface="微软雅黑"/>
+              </a:rPr>
+              <a:t>Payskill Top8</a:t>
+            </a:r>
+          </a:p>
+        </p:txBody>
+      </p:sp>
+      <p:sp>
+        <p:nvSpPr>
+          <p:cNvPr id="79" name="Rectangle 78"/>
           <p:cNvSpPr/>
           <p:nvPr/>
         </p:nvSpPr>
         <p:spPr>
           <a:xfrm>
-            <a:off x="7315200" y="2139696"/>
-            <a:ext cx="652913" cy="61721"/>
-          </a:xfrm>
-          <a:prstGeom prst="roundRect">
-            <a:avLst>
-              <a:gd name="adj" fmla="val 40000"/>
-            </a:avLst>
+            <a:off x="4328160" y="2468880"/>
+            <a:ext cx="3535679" cy="5486"/>
+          </a:xfrm>
+          <a:prstGeom prst="rect">
+            <a:avLst/>
           </a:prstGeom>
           <a:solidFill>
-            <a:srgbClr val="C97A80"/>
+            <a:srgbClr val="E2E4E7"/>
           </a:solidFill>
           <a:ln>
             <a:noFill/>
@@ -42947,14 +44418,14 @@
       </p:sp>
       <p:sp>
         <p:nvSpPr>
-          <p:cNvPr id="44" name="TextBox 43"/>
-          <p:cNvSpPr txBox="1"/>
-          <p:nvPr/>
-        </p:nvSpPr>
-        <p:spPr>
-          <a:xfrm>
-            <a:off x="8778240" y="2112264"/>
-            <a:ext cx="731520" cy="137160"/>
+          <p:cNvPr id="80" name="TextBox 79"/>
+          <p:cNvSpPr txBox="1"/>
+          <p:nvPr/>
+        </p:nvSpPr>
+        <p:spPr>
+          <a:xfrm>
+            <a:off x="4328160" y="2510028"/>
+            <a:ext cx="170688" cy="82296"/>
           </a:xfrm>
           <a:prstGeom prst="rect">
             <a:avLst/>
@@ -42973,70 +44444,29 @@
               </a:lnSpc>
             </a:pPr>
             <a:r>
-              <a:rPr sz="850" b="0">
-                <a:solidFill>
-                  <a:srgbClr val="1A1A1C"/>
-                </a:solidFill>
-                <a:latin typeface="微软雅黑"/>
-                <a:ea typeface="微软雅黑"/>
-                <a:cs typeface="微软雅黑"/>
-              </a:rPr>
-              <a:t>7.4%</a:t>
-            </a:r>
-          </a:p>
-        </p:txBody>
-      </p:sp>
-      <p:sp>
-        <p:nvSpPr>
-          <p:cNvPr id="45" name="TextBox 44"/>
-          <p:cNvSpPr txBox="1"/>
-          <p:nvPr/>
-        </p:nvSpPr>
-        <p:spPr>
-          <a:xfrm>
-            <a:off x="6217920" y="2276856"/>
-            <a:ext cx="5364480" cy="240030"/>
-          </a:xfrm>
-          <a:prstGeom prst="rect">
-            <a:avLst/>
-          </a:prstGeom>
-          <a:noFill/>
-        </p:spPr>
-        <p:txBody>
-          <a:bodyPr wrap="square" lIns="0" rIns="0" tIns="0" bIns="0" anchor="t">
-            <a:spAutoFit/>
-          </a:bodyPr>
-          <a:lstStyle/>
-          <a:p>
-            <a:pPr algn="l">
-              <a:lnSpc>
-                <a:spcPct val="105000"/>
-              </a:lnSpc>
-            </a:pPr>
-            <a:r>
-              <a:rPr sz="850" b="0">
-                <a:solidFill>
-                  <a:srgbClr val="8B8E94"/>
-                </a:solidFill>
-                <a:latin typeface="微软雅黑"/>
-                <a:ea typeface="微软雅黑"/>
-                <a:cs typeface="微软雅黑"/>
-              </a:rPr>
-              <a:t>其余 6 类 34.7%；12 个内容分类覆盖全站；Pay Skill 10.0% 为多标签，另计。</a:t>
-            </a:r>
-          </a:p>
-        </p:txBody>
-      </p:sp>
-      <p:sp>
-        <p:nvSpPr>
-          <p:cNvPr id="46" name="TextBox 45"/>
-          <p:cNvSpPr txBox="1"/>
-          <p:nvPr/>
-        </p:nvSpPr>
-        <p:spPr>
-          <a:xfrm>
-            <a:off x="426720" y="2640330"/>
-            <a:ext cx="5364480" cy="164592"/>
+              <a:rPr sz="800" b="1">
+                <a:solidFill>
+                  <a:srgbClr val="B5333B"/>
+                </a:solidFill>
+                <a:latin typeface="微软雅黑"/>
+                <a:ea typeface="微软雅黑"/>
+                <a:cs typeface="微软雅黑"/>
+              </a:rPr>
+              <a:t>1</a:t>
+            </a:r>
+          </a:p>
+        </p:txBody>
+      </p:sp>
+      <p:sp>
+        <p:nvSpPr>
+          <p:cNvPr id="81" name="TextBox 80"/>
+          <p:cNvSpPr txBox="1"/>
+          <p:nvPr/>
+        </p:nvSpPr>
+        <p:spPr>
+          <a:xfrm>
+            <a:off x="4535424" y="2510028"/>
+            <a:ext cx="2743200" cy="82296"/>
           </a:xfrm>
           <a:prstGeom prst="rect">
             <a:avLst/>
@@ -43055,7 +44485,7 @@
               </a:lnSpc>
             </a:pPr>
             <a:r>
-              <a:rPr sz="1050" b="1">
+              <a:rPr sz="900" b="1">
                 <a:solidFill>
                   <a:srgbClr val="1A1A1C"/>
                 </a:solidFill>
@@ -43063,21 +44493,62 @@
                 <a:ea typeface="微软雅黑"/>
                 <a:cs typeface="微软雅黑"/>
               </a:rPr>
-              <a:t>消费集中度：Top10 21.6%，Top100 43.7%</a:t>
-            </a:r>
-          </a:p>
-        </p:txBody>
-      </p:sp>
-      <p:sp>
-        <p:nvSpPr>
-          <p:cNvPr id="47" name="TextBox 46"/>
-          <p:cNvSpPr txBox="1"/>
-          <p:nvPr/>
-        </p:nvSpPr>
-        <p:spPr>
-          <a:xfrm>
-            <a:off x="426720" y="2798064"/>
-            <a:ext cx="5364480" cy="137160"/>
+              <a:t>WPS全家桶·办公管家.Skill</a:t>
+            </a:r>
+          </a:p>
+        </p:txBody>
+      </p:sp>
+      <p:sp>
+        <p:nvSpPr>
+          <p:cNvPr id="82" name="TextBox 81"/>
+          <p:cNvSpPr txBox="1"/>
+          <p:nvPr/>
+        </p:nvSpPr>
+        <p:spPr>
+          <a:xfrm>
+            <a:off x="7315200" y="2510028"/>
+            <a:ext cx="548640" cy="82296"/>
+          </a:xfrm>
+          <a:prstGeom prst="rect">
+            <a:avLst/>
+          </a:prstGeom>
+          <a:noFill/>
+        </p:spPr>
+        <p:txBody>
+          <a:bodyPr wrap="square" lIns="0" rIns="0" tIns="0" bIns="0" anchor="t">
+            <a:spAutoFit/>
+          </a:bodyPr>
+          <a:lstStyle/>
+          <a:p>
+            <a:pPr algn="r">
+              <a:lnSpc>
+                <a:spcPct val="100000"/>
+              </a:lnSpc>
+            </a:pPr>
+            <a:r>
+              <a:rPr sz="880" b="0">
+                <a:solidFill>
+                  <a:srgbClr val="5B616B"/>
+                </a:solidFill>
+                <a:latin typeface="微软雅黑"/>
+                <a:ea typeface="微软雅黑"/>
+                <a:cs typeface="微软雅黑"/>
+              </a:rPr>
+              <a:t>190,264</a:t>
+            </a:r>
+          </a:p>
+        </p:txBody>
+      </p:sp>
+      <p:sp>
+        <p:nvSpPr>
+          <p:cNvPr id="83" name="TextBox 82"/>
+          <p:cNvSpPr txBox="1"/>
+          <p:nvPr/>
+        </p:nvSpPr>
+        <p:spPr>
+          <a:xfrm>
+            <a:off x="4535424" y="2640330"/>
+            <a:ext cx="3230880" cy="68580"/>
           </a:xfrm>
           <a:prstGeom prst="rect">
             <a:avLst/>
@@ -43096,29 +44567,29 @@
               </a:lnSpc>
             </a:pPr>
             <a:r>
-              <a:rPr sz="850" b="0">
-                <a:solidFill>
-                  <a:srgbClr val="8B8E94"/>
-                </a:solidFill>
-                <a:latin typeface="微软雅黑"/>
-                <a:ea typeface="微软雅黑"/>
-                <a:cs typeface="微软雅黑"/>
-              </a:rPr>
-              <a:t>Top10000 总下载 1.51 亿 · 中位 4,251</a:t>
-            </a:r>
-          </a:p>
-        </p:txBody>
-      </p:sp>
-      <p:sp>
-        <p:nvSpPr>
-          <p:cNvPr id="48" name="TextBox 47"/>
-          <p:cNvSpPr txBox="1"/>
-          <p:nvPr/>
-        </p:nvSpPr>
-        <p:spPr>
-          <a:xfrm>
-            <a:off x="426720" y="3017520"/>
-            <a:ext cx="1463040" cy="233172"/>
+              <a:rPr sz="800" b="0">
+                <a:solidFill>
+                  <a:srgbClr val="5B616B"/>
+                </a:solidFill>
+                <a:latin typeface="微软雅黑"/>
+                <a:ea typeface="微软雅黑"/>
+                <a:cs typeface="微软雅黑"/>
+              </a:rPr>
+              <a:t>user_185644ed</a:t>
+            </a:r>
+          </a:p>
+        </p:txBody>
+      </p:sp>
+      <p:sp>
+        <p:nvSpPr>
+          <p:cNvPr id="84" name="TextBox 83"/>
+          <p:cNvSpPr txBox="1"/>
+          <p:nvPr/>
+        </p:nvSpPr>
+        <p:spPr>
+          <a:xfrm>
+            <a:off x="4328160" y="2907792"/>
+            <a:ext cx="170688" cy="82296"/>
           </a:xfrm>
           <a:prstGeom prst="rect">
             <a:avLst/>
@@ -43137,7 +44608,7 @@
               </a:lnSpc>
             </a:pPr>
             <a:r>
-              <a:rPr sz="1600" b="1">
+              <a:rPr sz="800" b="1">
                 <a:solidFill>
                   <a:srgbClr val="B5333B"/>
                 </a:solidFill>
@@ -43145,21 +44616,21 @@
                 <a:ea typeface="微软雅黑"/>
                 <a:cs typeface="微软雅黑"/>
               </a:rPr>
-              <a:t>3.5%</a:t>
-            </a:r>
-          </a:p>
-        </p:txBody>
-      </p:sp>
-      <p:sp>
-        <p:nvSpPr>
-          <p:cNvPr id="49" name="TextBox 48"/>
-          <p:cNvSpPr txBox="1"/>
-          <p:nvPr/>
-        </p:nvSpPr>
-        <p:spPr>
-          <a:xfrm>
-            <a:off x="426720" y="3223260"/>
-            <a:ext cx="1828800" cy="137160"/>
+              <a:t>2</a:t>
+            </a:r>
+          </a:p>
+        </p:txBody>
+      </p:sp>
+      <p:sp>
+        <p:nvSpPr>
+          <p:cNvPr id="85" name="TextBox 84"/>
+          <p:cNvSpPr txBox="1"/>
+          <p:nvPr/>
+        </p:nvSpPr>
+        <p:spPr>
+          <a:xfrm>
+            <a:off x="4535424" y="2907792"/>
+            <a:ext cx="2743200" cy="82296"/>
           </a:xfrm>
           <a:prstGeom prst="rect">
             <a:avLst/>
@@ -43178,7 +44649,48 @@
               </a:lnSpc>
             </a:pPr>
             <a:r>
-              <a:rPr sz="850" b="0">
+              <a:rPr sz="900" b="1">
+                <a:solidFill>
+                  <a:srgbClr val="1A1A1C"/>
+                </a:solidFill>
+                <a:latin typeface="微软雅黑"/>
+                <a:ea typeface="微软雅黑"/>
+                <a:cs typeface="微软雅黑"/>
+              </a:rPr>
+              <a:t>招标文件解读【喜鹊标书】</a:t>
+            </a:r>
+          </a:p>
+        </p:txBody>
+      </p:sp>
+      <p:sp>
+        <p:nvSpPr>
+          <p:cNvPr id="86" name="TextBox 85"/>
+          <p:cNvSpPr txBox="1"/>
+          <p:nvPr/>
+        </p:nvSpPr>
+        <p:spPr>
+          <a:xfrm>
+            <a:off x="7315200" y="2907792"/>
+            <a:ext cx="548640" cy="82296"/>
+          </a:xfrm>
+          <a:prstGeom prst="rect">
+            <a:avLst/>
+          </a:prstGeom>
+          <a:noFill/>
+        </p:spPr>
+        <p:txBody>
+          <a:bodyPr wrap="square" lIns="0" rIns="0" tIns="0" bIns="0" anchor="t">
+            <a:spAutoFit/>
+          </a:bodyPr>
+          <a:lstStyle/>
+          <a:p>
+            <a:pPr algn="r">
+              <a:lnSpc>
+                <a:spcPct val="100000"/>
+              </a:lnSpc>
+            </a:pPr>
+            <a:r>
+              <a:rPr sz="880" b="0">
                 <a:solidFill>
                   <a:srgbClr val="5B616B"/>
                 </a:solidFill>
@@ -43186,21 +44698,21 @@
                 <a:ea typeface="微软雅黑"/>
                 <a:cs typeface="微软雅黑"/>
               </a:rPr>
-              <a:t>Top1 占比</a:t>
-            </a:r>
-          </a:p>
-        </p:txBody>
-      </p:sp>
-      <p:sp>
-        <p:nvSpPr>
-          <p:cNvPr id="50" name="TextBox 49"/>
-          <p:cNvSpPr txBox="1"/>
-          <p:nvPr/>
-        </p:nvSpPr>
-        <p:spPr>
-          <a:xfrm>
-            <a:off x="3108960" y="3017520"/>
-            <a:ext cx="1463040" cy="233172"/>
+              <a:t>169,094</a:t>
+            </a:r>
+          </a:p>
+        </p:txBody>
+      </p:sp>
+      <p:sp>
+        <p:nvSpPr>
+          <p:cNvPr id="87" name="TextBox 86"/>
+          <p:cNvSpPr txBox="1"/>
+          <p:nvPr/>
+        </p:nvSpPr>
+        <p:spPr>
+          <a:xfrm>
+            <a:off x="4535424" y="3038094"/>
+            <a:ext cx="3230880" cy="68580"/>
           </a:xfrm>
           <a:prstGeom prst="rect">
             <a:avLst/>
@@ -43219,29 +44731,29 @@
               </a:lnSpc>
             </a:pPr>
             <a:r>
-              <a:rPr sz="1600" b="1">
-                <a:solidFill>
-                  <a:srgbClr val="B5333B"/>
-                </a:solidFill>
-                <a:latin typeface="微软雅黑"/>
-                <a:ea typeface="微软雅黑"/>
-                <a:cs typeface="微软雅黑"/>
-              </a:rPr>
-              <a:t>21.6%</a:t>
-            </a:r>
-          </a:p>
-        </p:txBody>
-      </p:sp>
-      <p:sp>
-        <p:nvSpPr>
-          <p:cNvPr id="51" name="TextBox 50"/>
-          <p:cNvSpPr txBox="1"/>
-          <p:nvPr/>
-        </p:nvSpPr>
-        <p:spPr>
-          <a:xfrm>
-            <a:off x="3108960" y="3223260"/>
-            <a:ext cx="1828800" cy="137160"/>
+              <a:rPr sz="800" b="0">
+                <a:solidFill>
+                  <a:srgbClr val="5B616B"/>
+                </a:solidFill>
+                <a:latin typeface="微软雅黑"/>
+                <a:ea typeface="微软雅黑"/>
+                <a:cs typeface="微软雅黑"/>
+              </a:rPr>
+              <a:t>喜鹊AI</a:t>
+            </a:r>
+          </a:p>
+        </p:txBody>
+      </p:sp>
+      <p:sp>
+        <p:nvSpPr>
+          <p:cNvPr id="88" name="TextBox 87"/>
+          <p:cNvSpPr txBox="1"/>
+          <p:nvPr/>
+        </p:nvSpPr>
+        <p:spPr>
+          <a:xfrm>
+            <a:off x="4328160" y="3305556"/>
+            <a:ext cx="170688" cy="82296"/>
           </a:xfrm>
           <a:prstGeom prst="rect">
             <a:avLst/>
@@ -43260,29 +44772,29 @@
               </a:lnSpc>
             </a:pPr>
             <a:r>
-              <a:rPr sz="850" b="0">
-                <a:solidFill>
-                  <a:srgbClr val="5B616B"/>
-                </a:solidFill>
-                <a:latin typeface="微软雅黑"/>
-                <a:ea typeface="微软雅黑"/>
-                <a:cs typeface="微软雅黑"/>
-              </a:rPr>
-              <a:t>Top10 占比</a:t>
-            </a:r>
-          </a:p>
-        </p:txBody>
-      </p:sp>
-      <p:sp>
-        <p:nvSpPr>
-          <p:cNvPr id="52" name="TextBox 51"/>
-          <p:cNvSpPr txBox="1"/>
-          <p:nvPr/>
-        </p:nvSpPr>
-        <p:spPr>
-          <a:xfrm>
-            <a:off x="426720" y="3429000"/>
-            <a:ext cx="1463040" cy="233172"/>
+              <a:rPr sz="800" b="1">
+                <a:solidFill>
+                  <a:srgbClr val="B5333B"/>
+                </a:solidFill>
+                <a:latin typeface="微软雅黑"/>
+                <a:ea typeface="微软雅黑"/>
+                <a:cs typeface="微软雅黑"/>
+              </a:rPr>
+              <a:t>3</a:t>
+            </a:r>
+          </a:p>
+        </p:txBody>
+      </p:sp>
+      <p:sp>
+        <p:nvSpPr>
+          <p:cNvPr id="89" name="TextBox 88"/>
+          <p:cNvSpPr txBox="1"/>
+          <p:nvPr/>
+        </p:nvSpPr>
+        <p:spPr>
+          <a:xfrm>
+            <a:off x="4535424" y="3305556"/>
+            <a:ext cx="2743200" cy="82296"/>
           </a:xfrm>
           <a:prstGeom prst="rect">
             <a:avLst/>
@@ -43301,29 +44813,70 @@
               </a:lnSpc>
             </a:pPr>
             <a:r>
-              <a:rPr sz="1600" b="1">
-                <a:solidFill>
-                  <a:srgbClr val="B5333B"/>
-                </a:solidFill>
-                <a:latin typeface="微软雅黑"/>
-                <a:ea typeface="微软雅黑"/>
-                <a:cs typeface="微软雅黑"/>
-              </a:rPr>
-              <a:t>43.7%</a:t>
-            </a:r>
-          </a:p>
-        </p:txBody>
-      </p:sp>
-      <p:sp>
-        <p:nvSpPr>
-          <p:cNvPr id="53" name="TextBox 52"/>
-          <p:cNvSpPr txBox="1"/>
-          <p:nvPr/>
-        </p:nvSpPr>
-        <p:spPr>
-          <a:xfrm>
-            <a:off x="426720" y="3634740"/>
-            <a:ext cx="1828800" cy="137160"/>
+              <a:rPr sz="840" b="1">
+                <a:solidFill>
+                  <a:srgbClr val="1A1A1C"/>
+                </a:solidFill>
+                <a:latin typeface="微软雅黑"/>
+                <a:ea typeface="微软雅黑"/>
+                <a:cs typeface="微软雅黑"/>
+              </a:rPr>
+              <a:t>办公文档三件套（Word/Excel/PDF）</a:t>
+            </a:r>
+          </a:p>
+        </p:txBody>
+      </p:sp>
+      <p:sp>
+        <p:nvSpPr>
+          <p:cNvPr id="90" name="TextBox 89"/>
+          <p:cNvSpPr txBox="1"/>
+          <p:nvPr/>
+        </p:nvSpPr>
+        <p:spPr>
+          <a:xfrm>
+            <a:off x="7315200" y="3305556"/>
+            <a:ext cx="548640" cy="82296"/>
+          </a:xfrm>
+          <a:prstGeom prst="rect">
+            <a:avLst/>
+          </a:prstGeom>
+          <a:noFill/>
+        </p:spPr>
+        <p:txBody>
+          <a:bodyPr wrap="square" lIns="0" rIns="0" tIns="0" bIns="0" anchor="t">
+            <a:spAutoFit/>
+          </a:bodyPr>
+          <a:lstStyle/>
+          <a:p>
+            <a:pPr algn="r">
+              <a:lnSpc>
+                <a:spcPct val="100000"/>
+              </a:lnSpc>
+            </a:pPr>
+            <a:r>
+              <a:rPr sz="880" b="0">
+                <a:solidFill>
+                  <a:srgbClr val="5B616B"/>
+                </a:solidFill>
+                <a:latin typeface="微软雅黑"/>
+                <a:ea typeface="微软雅黑"/>
+                <a:cs typeface="微软雅黑"/>
+              </a:rPr>
+              <a:t>135,227</a:t>
+            </a:r>
+          </a:p>
+        </p:txBody>
+      </p:sp>
+      <p:sp>
+        <p:nvSpPr>
+          <p:cNvPr id="91" name="TextBox 90"/>
+          <p:cNvSpPr txBox="1"/>
+          <p:nvPr/>
+        </p:nvSpPr>
+        <p:spPr>
+          <a:xfrm>
+            <a:off x="4535424" y="3435858"/>
+            <a:ext cx="3230880" cy="68580"/>
           </a:xfrm>
           <a:prstGeom prst="rect">
             <a:avLst/>
@@ -43342,7 +44895,7 @@
               </a:lnSpc>
             </a:pPr>
             <a:r>
-              <a:rPr sz="850" b="0">
+              <a:rPr sz="800" b="0">
                 <a:solidFill>
                   <a:srgbClr val="5B616B"/>
                 </a:solidFill>
@@ -43350,21 +44903,21 @@
                 <a:ea typeface="微软雅黑"/>
                 <a:cs typeface="微软雅黑"/>
               </a:rPr>
-              <a:t>Top100 占比</a:t>
-            </a:r>
-          </a:p>
-        </p:txBody>
-      </p:sp>
-      <p:sp>
-        <p:nvSpPr>
-          <p:cNvPr id="54" name="TextBox 53"/>
-          <p:cNvSpPr txBox="1"/>
-          <p:nvPr/>
-        </p:nvSpPr>
-        <p:spPr>
-          <a:xfrm>
-            <a:off x="3108960" y="3429000"/>
-            <a:ext cx="1463040" cy="233172"/>
+              <a:t>user_69794d19</a:t>
+            </a:r>
+          </a:p>
+        </p:txBody>
+      </p:sp>
+      <p:sp>
+        <p:nvSpPr>
+          <p:cNvPr id="92" name="TextBox 91"/>
+          <p:cNvSpPr txBox="1"/>
+          <p:nvPr/>
+        </p:nvSpPr>
+        <p:spPr>
+          <a:xfrm>
+            <a:off x="4328160" y="3703320"/>
+            <a:ext cx="170688" cy="82296"/>
           </a:xfrm>
           <a:prstGeom prst="rect">
             <a:avLst/>
@@ -43383,7 +44936,7 @@
               </a:lnSpc>
             </a:pPr>
             <a:r>
-              <a:rPr sz="1600" b="1">
+              <a:rPr sz="800" b="1">
                 <a:solidFill>
                   <a:srgbClr val="B5333B"/>
                 </a:solidFill>
@@ -43391,21 +44944,21 @@
                 <a:ea typeface="微软雅黑"/>
                 <a:cs typeface="微软雅黑"/>
               </a:rPr>
-              <a:t>69.1%</a:t>
-            </a:r>
-          </a:p>
-        </p:txBody>
-      </p:sp>
-      <p:sp>
-        <p:nvSpPr>
-          <p:cNvPr id="55" name="TextBox 54"/>
-          <p:cNvSpPr txBox="1"/>
-          <p:nvPr/>
-        </p:nvSpPr>
-        <p:spPr>
-          <a:xfrm>
-            <a:off x="3108960" y="3634740"/>
-            <a:ext cx="1828800" cy="137160"/>
+              <a:t>4</a:t>
+            </a:r>
+          </a:p>
+        </p:txBody>
+      </p:sp>
+      <p:sp>
+        <p:nvSpPr>
+          <p:cNvPr id="93" name="TextBox 92"/>
+          <p:cNvSpPr txBox="1"/>
+          <p:nvPr/>
+        </p:nvSpPr>
+        <p:spPr>
+          <a:xfrm>
+            <a:off x="4535424" y="3703320"/>
+            <a:ext cx="2743200" cy="82296"/>
           </a:xfrm>
           <a:prstGeom prst="rect">
             <a:avLst/>
@@ -43424,29 +44977,29 @@
               </a:lnSpc>
             </a:pPr>
             <a:r>
-              <a:rPr sz="850" b="0">
-                <a:solidFill>
-                  <a:srgbClr val="5B616B"/>
-                </a:solidFill>
-                <a:latin typeface="微软雅黑"/>
-                <a:ea typeface="微软雅黑"/>
-                <a:cs typeface="微软雅黑"/>
-              </a:rPr>
-              <a:t>Top1000 占比</a:t>
-            </a:r>
-          </a:p>
-        </p:txBody>
-      </p:sp>
-      <p:sp>
-        <p:nvSpPr>
-          <p:cNvPr id="56" name="TextBox 55"/>
-          <p:cNvSpPr txBox="1"/>
-          <p:nvPr/>
-        </p:nvSpPr>
-        <p:spPr>
-          <a:xfrm>
-            <a:off x="426720" y="3874769"/>
-            <a:ext cx="5364480" cy="274320"/>
+              <a:rPr sz="900" b="1">
+                <a:solidFill>
+                  <a:srgbClr val="1A1A1C"/>
+                </a:solidFill>
+                <a:latin typeface="微软雅黑"/>
+                <a:ea typeface="微软雅黑"/>
+                <a:cs typeface="微软雅黑"/>
+              </a:rPr>
+              <a:t>知了标讯 · 全网招中标数据查询</a:t>
+            </a:r>
+          </a:p>
+        </p:txBody>
+      </p:sp>
+      <p:sp>
+        <p:nvSpPr>
+          <p:cNvPr id="94" name="TextBox 93"/>
+          <p:cNvSpPr txBox="1"/>
+          <p:nvPr/>
+        </p:nvSpPr>
+        <p:spPr>
+          <a:xfrm>
+            <a:off x="7315200" y="3703320"/>
+            <a:ext cx="548640" cy="82296"/>
           </a:xfrm>
           <a:prstGeom prst="rect">
             <a:avLst/>
@@ -43459,35 +45012,35 @@
           </a:bodyPr>
           <a:lstStyle/>
           <a:p>
-            <a:pPr algn="l">
+            <a:pPr algn="r">
               <a:lnSpc>
-                <a:spcPct val="105000"/>
+                <a:spcPct val="100000"/>
               </a:lnSpc>
             </a:pPr>
             <a:r>
-              <a:rPr sz="850" b="0">
-                <a:solidFill>
-                  <a:srgbClr val="8B8E94"/>
-                </a:solidFill>
-                <a:latin typeface="微软雅黑"/>
-                <a:ea typeface="微软雅黑"/>
-                <a:cs typeface="微软雅黑"/>
-              </a:rPr>
-              <a:t>Top10000 中 2,301 条 installs=0；下载含 CLI / 镜像，不等于使用。</a:t>
-            </a:r>
-          </a:p>
-        </p:txBody>
-      </p:sp>
-      <p:sp>
-        <p:nvSpPr>
-          <p:cNvPr id="57" name="TextBox 56"/>
-          <p:cNvSpPr txBox="1"/>
-          <p:nvPr/>
-        </p:nvSpPr>
-        <p:spPr>
-          <a:xfrm>
-            <a:off x="6217920" y="2640330"/>
-            <a:ext cx="5364480" cy="164592"/>
+              <a:rPr sz="880" b="0">
+                <a:solidFill>
+                  <a:srgbClr val="5B616B"/>
+                </a:solidFill>
+                <a:latin typeface="微软雅黑"/>
+                <a:ea typeface="微软雅黑"/>
+                <a:cs typeface="微软雅黑"/>
+              </a:rPr>
+              <a:t>82,636</a:t>
+            </a:r>
+          </a:p>
+        </p:txBody>
+      </p:sp>
+      <p:sp>
+        <p:nvSpPr>
+          <p:cNvPr id="95" name="TextBox 94"/>
+          <p:cNvSpPr txBox="1"/>
+          <p:nvPr/>
+        </p:nvSpPr>
+        <p:spPr>
+          <a:xfrm>
+            <a:off x="4535424" y="3833622"/>
+            <a:ext cx="3230880" cy="68580"/>
           </a:xfrm>
           <a:prstGeom prst="rect">
             <a:avLst/>
@@ -43506,29 +45059,29 @@
               </a:lnSpc>
             </a:pPr>
             <a:r>
-              <a:rPr sz="1050" b="1">
-                <a:solidFill>
-                  <a:srgbClr val="1A1A1C"/>
-                </a:solidFill>
-                <a:latin typeface="微软雅黑"/>
-                <a:ea typeface="微软雅黑"/>
-                <a:cs typeface="微软雅黑"/>
-              </a:rPr>
-              <a:t>谁被下载：企业 &gt; 个人 &gt; 镜像</a:t>
-            </a:r>
-          </a:p>
-        </p:txBody>
-      </p:sp>
-      <p:sp>
-        <p:nvSpPr>
-          <p:cNvPr id="58" name="TextBox 57"/>
-          <p:cNvSpPr txBox="1"/>
-          <p:nvPr/>
-        </p:nvSpPr>
-        <p:spPr>
-          <a:xfrm>
-            <a:off x="6217920" y="2798064"/>
-            <a:ext cx="5364480" cy="137160"/>
+              <a:rPr sz="800" b="0">
+                <a:solidFill>
+                  <a:srgbClr val="5B616B"/>
+                </a:solidFill>
+                <a:latin typeface="微软雅黑"/>
+                <a:ea typeface="微软雅黑"/>
+                <a:cs typeface="微软雅黑"/>
+              </a:rPr>
+              <a:t>知了标讯</a:t>
+            </a:r>
+          </a:p>
+        </p:txBody>
+      </p:sp>
+      <p:sp>
+        <p:nvSpPr>
+          <p:cNvPr id="96" name="TextBox 95"/>
+          <p:cNvSpPr txBox="1"/>
+          <p:nvPr/>
+        </p:nvSpPr>
+        <p:spPr>
+          <a:xfrm>
+            <a:off x="4328160" y="4101084"/>
+            <a:ext cx="170688" cy="82296"/>
           </a:xfrm>
           <a:prstGeom prst="rect">
             <a:avLst/>
@@ -43547,29 +45100,29 @@
               </a:lnSpc>
             </a:pPr>
             <a:r>
-              <a:rPr sz="850" b="0">
-                <a:solidFill>
-                  <a:srgbClr val="8B8E94"/>
-                </a:solidFill>
-                <a:latin typeface="微软雅黑"/>
-                <a:ea typeface="微软雅黑"/>
-                <a:cs typeface="微软雅黑"/>
-              </a:rPr>
-              <a:t>Top10000 · 单条中位下载</a:t>
-            </a:r>
-          </a:p>
-        </p:txBody>
-      </p:sp>
-      <p:sp>
-        <p:nvSpPr>
-          <p:cNvPr id="59" name="TextBox 58"/>
-          <p:cNvSpPr txBox="1"/>
-          <p:nvPr/>
-        </p:nvSpPr>
-        <p:spPr>
-          <a:xfrm>
-            <a:off x="6217920" y="3051810"/>
-            <a:ext cx="1158240" cy="137160"/>
+              <a:rPr sz="800" b="1">
+                <a:solidFill>
+                  <a:srgbClr val="B5333B"/>
+                </a:solidFill>
+                <a:latin typeface="微软雅黑"/>
+                <a:ea typeface="微软雅黑"/>
+                <a:cs typeface="微软雅黑"/>
+              </a:rPr>
+              <a:t>5</a:t>
+            </a:r>
+          </a:p>
+        </p:txBody>
+      </p:sp>
+      <p:sp>
+        <p:nvSpPr>
+          <p:cNvPr id="97" name="TextBox 96"/>
+          <p:cNvSpPr txBox="1"/>
+          <p:nvPr/>
+        </p:nvSpPr>
+        <p:spPr>
+          <a:xfrm>
+            <a:off x="4535424" y="4101084"/>
+            <a:ext cx="2743200" cy="82296"/>
           </a:xfrm>
           <a:prstGeom prst="rect">
             <a:avLst/>
@@ -43588,7 +45141,48 @@
               </a:lnSpc>
             </a:pPr>
             <a:r>
-              <a:rPr sz="950" b="0">
+              <a:rPr sz="900" b="1">
+                <a:solidFill>
+                  <a:srgbClr val="1A1A1C"/>
+                </a:solidFill>
+                <a:latin typeface="微软雅黑"/>
+                <a:ea typeface="微软雅黑"/>
+                <a:cs typeface="微软雅黑"/>
+              </a:rPr>
+              <a:t>标书审查【喜鹊标书】</a:t>
+            </a:r>
+          </a:p>
+        </p:txBody>
+      </p:sp>
+      <p:sp>
+        <p:nvSpPr>
+          <p:cNvPr id="98" name="TextBox 97"/>
+          <p:cNvSpPr txBox="1"/>
+          <p:nvPr/>
+        </p:nvSpPr>
+        <p:spPr>
+          <a:xfrm>
+            <a:off x="7315200" y="4101084"/>
+            <a:ext cx="548640" cy="82296"/>
+          </a:xfrm>
+          <a:prstGeom prst="rect">
+            <a:avLst/>
+          </a:prstGeom>
+          <a:noFill/>
+        </p:spPr>
+        <p:txBody>
+          <a:bodyPr wrap="square" lIns="0" rIns="0" tIns="0" bIns="0" anchor="t">
+            <a:spAutoFit/>
+          </a:bodyPr>
+          <a:lstStyle/>
+          <a:p>
+            <a:pPr algn="r">
+              <a:lnSpc>
+                <a:spcPct val="100000"/>
+              </a:lnSpc>
+            </a:pPr>
+            <a:r>
+              <a:rPr sz="880" b="0">
                 <a:solidFill>
                   <a:srgbClr val="5B616B"/>
                 </a:solidFill>
@@ -43596,29 +45190,601 @@
                 <a:ea typeface="微软雅黑"/>
                 <a:cs typeface="微软雅黑"/>
               </a:rPr>
-              <a:t>企业</a:t>
-            </a:r>
-          </a:p>
-        </p:txBody>
-      </p:sp>
-      <p:sp>
-        <p:nvSpPr>
-          <p:cNvPr id="60" name="Rounded Rectangle 59"/>
+              <a:t>80,948</a:t>
+            </a:r>
+          </a:p>
+        </p:txBody>
+      </p:sp>
+      <p:sp>
+        <p:nvSpPr>
+          <p:cNvPr id="99" name="TextBox 98"/>
+          <p:cNvSpPr txBox="1"/>
+          <p:nvPr/>
+        </p:nvSpPr>
+        <p:spPr>
+          <a:xfrm>
+            <a:off x="4535424" y="4231386"/>
+            <a:ext cx="3230880" cy="68580"/>
+          </a:xfrm>
+          <a:prstGeom prst="rect">
+            <a:avLst/>
+          </a:prstGeom>
+          <a:noFill/>
+        </p:spPr>
+        <p:txBody>
+          <a:bodyPr wrap="square" lIns="0" rIns="0" tIns="0" bIns="0" anchor="t">
+            <a:spAutoFit/>
+          </a:bodyPr>
+          <a:lstStyle/>
+          <a:p>
+            <a:pPr algn="l">
+              <a:lnSpc>
+                <a:spcPct val="100000"/>
+              </a:lnSpc>
+            </a:pPr>
+            <a:r>
+              <a:rPr sz="800" b="0">
+                <a:solidFill>
+                  <a:srgbClr val="5B616B"/>
+                </a:solidFill>
+                <a:latin typeface="微软雅黑"/>
+                <a:ea typeface="微软雅黑"/>
+                <a:cs typeface="微软雅黑"/>
+              </a:rPr>
+              <a:t>喜鹊AI</a:t>
+            </a:r>
+          </a:p>
+        </p:txBody>
+      </p:sp>
+      <p:sp>
+        <p:nvSpPr>
+          <p:cNvPr id="100" name="TextBox 99"/>
+          <p:cNvSpPr txBox="1"/>
+          <p:nvPr/>
+        </p:nvSpPr>
+        <p:spPr>
+          <a:xfrm>
+            <a:off x="4328160" y="4498848"/>
+            <a:ext cx="170688" cy="82296"/>
+          </a:xfrm>
+          <a:prstGeom prst="rect">
+            <a:avLst/>
+          </a:prstGeom>
+          <a:noFill/>
+        </p:spPr>
+        <p:txBody>
+          <a:bodyPr wrap="square" lIns="0" rIns="0" tIns="0" bIns="0" anchor="t">
+            <a:spAutoFit/>
+          </a:bodyPr>
+          <a:lstStyle/>
+          <a:p>
+            <a:pPr algn="l">
+              <a:lnSpc>
+                <a:spcPct val="100000"/>
+              </a:lnSpc>
+            </a:pPr>
+            <a:r>
+              <a:rPr sz="800" b="1">
+                <a:solidFill>
+                  <a:srgbClr val="B5333B"/>
+                </a:solidFill>
+                <a:latin typeface="微软雅黑"/>
+                <a:ea typeface="微软雅黑"/>
+                <a:cs typeface="微软雅黑"/>
+              </a:rPr>
+              <a:t>6</a:t>
+            </a:r>
+          </a:p>
+        </p:txBody>
+      </p:sp>
+      <p:sp>
+        <p:nvSpPr>
+          <p:cNvPr id="101" name="TextBox 100"/>
+          <p:cNvSpPr txBox="1"/>
+          <p:nvPr/>
+        </p:nvSpPr>
+        <p:spPr>
+          <a:xfrm>
+            <a:off x="4535424" y="4498848"/>
+            <a:ext cx="2743200" cy="82296"/>
+          </a:xfrm>
+          <a:prstGeom prst="rect">
+            <a:avLst/>
+          </a:prstGeom>
+          <a:noFill/>
+        </p:spPr>
+        <p:txBody>
+          <a:bodyPr wrap="square" lIns="0" rIns="0" tIns="0" bIns="0" anchor="t">
+            <a:spAutoFit/>
+          </a:bodyPr>
+          <a:lstStyle/>
+          <a:p>
+            <a:pPr algn="l">
+              <a:lnSpc>
+                <a:spcPct val="100000"/>
+              </a:lnSpc>
+            </a:pPr>
+            <a:r>
+              <a:rPr sz="900" b="1">
+                <a:solidFill>
+                  <a:srgbClr val="1A1A1C"/>
+                </a:solidFill>
+                <a:latin typeface="微软雅黑"/>
+                <a:ea typeface="微软雅黑"/>
+                <a:cs typeface="微软雅黑"/>
+              </a:rPr>
+              <a:t>浏览器自动化</a:t>
+            </a:r>
+          </a:p>
+        </p:txBody>
+      </p:sp>
+      <p:sp>
+        <p:nvSpPr>
+          <p:cNvPr id="102" name="TextBox 101"/>
+          <p:cNvSpPr txBox="1"/>
+          <p:nvPr/>
+        </p:nvSpPr>
+        <p:spPr>
+          <a:xfrm>
+            <a:off x="7315200" y="4498848"/>
+            <a:ext cx="548640" cy="82296"/>
+          </a:xfrm>
+          <a:prstGeom prst="rect">
+            <a:avLst/>
+          </a:prstGeom>
+          <a:noFill/>
+        </p:spPr>
+        <p:txBody>
+          <a:bodyPr wrap="square" lIns="0" rIns="0" tIns="0" bIns="0" anchor="t">
+            <a:spAutoFit/>
+          </a:bodyPr>
+          <a:lstStyle/>
+          <a:p>
+            <a:pPr algn="r">
+              <a:lnSpc>
+                <a:spcPct val="100000"/>
+              </a:lnSpc>
+            </a:pPr>
+            <a:r>
+              <a:rPr sz="880" b="0">
+                <a:solidFill>
+                  <a:srgbClr val="5B616B"/>
+                </a:solidFill>
+                <a:latin typeface="微软雅黑"/>
+                <a:ea typeface="微软雅黑"/>
+                <a:cs typeface="微软雅黑"/>
+              </a:rPr>
+              <a:t>66,947</a:t>
+            </a:r>
+          </a:p>
+        </p:txBody>
+      </p:sp>
+      <p:sp>
+        <p:nvSpPr>
+          <p:cNvPr id="103" name="TextBox 102"/>
+          <p:cNvSpPr txBox="1"/>
+          <p:nvPr/>
+        </p:nvSpPr>
+        <p:spPr>
+          <a:xfrm>
+            <a:off x="4535424" y="4629150"/>
+            <a:ext cx="3230880" cy="68580"/>
+          </a:xfrm>
+          <a:prstGeom prst="rect">
+            <a:avLst/>
+          </a:prstGeom>
+          <a:noFill/>
+        </p:spPr>
+        <p:txBody>
+          <a:bodyPr wrap="square" lIns="0" rIns="0" tIns="0" bIns="0" anchor="t">
+            <a:spAutoFit/>
+          </a:bodyPr>
+          <a:lstStyle/>
+          <a:p>
+            <a:pPr algn="l">
+              <a:lnSpc>
+                <a:spcPct val="100000"/>
+              </a:lnSpc>
+            </a:pPr>
+            <a:r>
+              <a:rPr sz="800" b="0">
+                <a:solidFill>
+                  <a:srgbClr val="5B616B"/>
+                </a:solidFill>
+                <a:latin typeface="微软雅黑"/>
+                <a:ea typeface="微软雅黑"/>
+                <a:cs typeface="微软雅黑"/>
+              </a:rPr>
+              <a:t>菏泽九有信息科技有限公司</a:t>
+            </a:r>
+          </a:p>
+        </p:txBody>
+      </p:sp>
+      <p:sp>
+        <p:nvSpPr>
+          <p:cNvPr id="104" name="TextBox 103"/>
+          <p:cNvSpPr txBox="1"/>
+          <p:nvPr/>
+        </p:nvSpPr>
+        <p:spPr>
+          <a:xfrm>
+            <a:off x="4328160" y="4896612"/>
+            <a:ext cx="170688" cy="82296"/>
+          </a:xfrm>
+          <a:prstGeom prst="rect">
+            <a:avLst/>
+          </a:prstGeom>
+          <a:noFill/>
+        </p:spPr>
+        <p:txBody>
+          <a:bodyPr wrap="square" lIns="0" rIns="0" tIns="0" bIns="0" anchor="t">
+            <a:spAutoFit/>
+          </a:bodyPr>
+          <a:lstStyle/>
+          <a:p>
+            <a:pPr algn="l">
+              <a:lnSpc>
+                <a:spcPct val="100000"/>
+              </a:lnSpc>
+            </a:pPr>
+            <a:r>
+              <a:rPr sz="800" b="1">
+                <a:solidFill>
+                  <a:srgbClr val="B5333B"/>
+                </a:solidFill>
+                <a:latin typeface="微软雅黑"/>
+                <a:ea typeface="微软雅黑"/>
+                <a:cs typeface="微软雅黑"/>
+              </a:rPr>
+              <a:t>7</a:t>
+            </a:r>
+          </a:p>
+        </p:txBody>
+      </p:sp>
+      <p:sp>
+        <p:nvSpPr>
+          <p:cNvPr id="105" name="TextBox 104"/>
+          <p:cNvSpPr txBox="1"/>
+          <p:nvPr/>
+        </p:nvSpPr>
+        <p:spPr>
+          <a:xfrm>
+            <a:off x="4535424" y="4896612"/>
+            <a:ext cx="2743200" cy="82296"/>
+          </a:xfrm>
+          <a:prstGeom prst="rect">
+            <a:avLst/>
+          </a:prstGeom>
+          <a:noFill/>
+        </p:spPr>
+        <p:txBody>
+          <a:bodyPr wrap="square" lIns="0" rIns="0" tIns="0" bIns="0" anchor="t">
+            <a:spAutoFit/>
+          </a:bodyPr>
+          <a:lstStyle/>
+          <a:p>
+            <a:pPr algn="l">
+              <a:lnSpc>
+                <a:spcPct val="100000"/>
+              </a:lnSpc>
+            </a:pPr>
+            <a:r>
+              <a:rPr sz="900" b="1">
+                <a:solidFill>
+                  <a:srgbClr val="1A1A1C"/>
+                </a:solidFill>
+                <a:latin typeface="微软雅黑"/>
+                <a:ea typeface="微软雅黑"/>
+                <a:cs typeface="微软雅黑"/>
+              </a:rPr>
+              <a:t>技能开发</a:t>
+            </a:r>
+          </a:p>
+        </p:txBody>
+      </p:sp>
+      <p:sp>
+        <p:nvSpPr>
+          <p:cNvPr id="106" name="TextBox 105"/>
+          <p:cNvSpPr txBox="1"/>
+          <p:nvPr/>
+        </p:nvSpPr>
+        <p:spPr>
+          <a:xfrm>
+            <a:off x="7315200" y="4896612"/>
+            <a:ext cx="548640" cy="82296"/>
+          </a:xfrm>
+          <a:prstGeom prst="rect">
+            <a:avLst/>
+          </a:prstGeom>
+          <a:noFill/>
+        </p:spPr>
+        <p:txBody>
+          <a:bodyPr wrap="square" lIns="0" rIns="0" tIns="0" bIns="0" anchor="t">
+            <a:spAutoFit/>
+          </a:bodyPr>
+          <a:lstStyle/>
+          <a:p>
+            <a:pPr algn="r">
+              <a:lnSpc>
+                <a:spcPct val="100000"/>
+              </a:lnSpc>
+            </a:pPr>
+            <a:r>
+              <a:rPr sz="880" b="0">
+                <a:solidFill>
+                  <a:srgbClr val="5B616B"/>
+                </a:solidFill>
+                <a:latin typeface="微软雅黑"/>
+                <a:ea typeface="微软雅黑"/>
+                <a:cs typeface="微软雅黑"/>
+              </a:rPr>
+              <a:t>61,444</a:t>
+            </a:r>
+          </a:p>
+        </p:txBody>
+      </p:sp>
+      <p:sp>
+        <p:nvSpPr>
+          <p:cNvPr id="107" name="TextBox 106"/>
+          <p:cNvSpPr txBox="1"/>
+          <p:nvPr/>
+        </p:nvSpPr>
+        <p:spPr>
+          <a:xfrm>
+            <a:off x="4535424" y="5026914"/>
+            <a:ext cx="3230880" cy="68580"/>
+          </a:xfrm>
+          <a:prstGeom prst="rect">
+            <a:avLst/>
+          </a:prstGeom>
+          <a:noFill/>
+        </p:spPr>
+        <p:txBody>
+          <a:bodyPr wrap="square" lIns="0" rIns="0" tIns="0" bIns="0" anchor="t">
+            <a:spAutoFit/>
+          </a:bodyPr>
+          <a:lstStyle/>
+          <a:p>
+            <a:pPr algn="l">
+              <a:lnSpc>
+                <a:spcPct val="100000"/>
+              </a:lnSpc>
+            </a:pPr>
+            <a:r>
+              <a:rPr sz="800" b="0">
+                <a:solidFill>
+                  <a:srgbClr val="5B616B"/>
+                </a:solidFill>
+                <a:latin typeface="微软雅黑"/>
+                <a:ea typeface="微软雅黑"/>
+                <a:cs typeface="微软雅黑"/>
+              </a:rPr>
+              <a:t>菏泽九有信息科技有限公司</a:t>
+            </a:r>
+          </a:p>
+        </p:txBody>
+      </p:sp>
+      <p:sp>
+        <p:nvSpPr>
+          <p:cNvPr id="108" name="TextBox 107"/>
+          <p:cNvSpPr txBox="1"/>
+          <p:nvPr/>
+        </p:nvSpPr>
+        <p:spPr>
+          <a:xfrm>
+            <a:off x="4328160" y="5294376"/>
+            <a:ext cx="170688" cy="82296"/>
+          </a:xfrm>
+          <a:prstGeom prst="rect">
+            <a:avLst/>
+          </a:prstGeom>
+          <a:noFill/>
+        </p:spPr>
+        <p:txBody>
+          <a:bodyPr wrap="square" lIns="0" rIns="0" tIns="0" bIns="0" anchor="t">
+            <a:spAutoFit/>
+          </a:bodyPr>
+          <a:lstStyle/>
+          <a:p>
+            <a:pPr algn="l">
+              <a:lnSpc>
+                <a:spcPct val="100000"/>
+              </a:lnSpc>
+            </a:pPr>
+            <a:r>
+              <a:rPr sz="800" b="1">
+                <a:solidFill>
+                  <a:srgbClr val="B5333B"/>
+                </a:solidFill>
+                <a:latin typeface="微软雅黑"/>
+                <a:ea typeface="微软雅黑"/>
+                <a:cs typeface="微软雅黑"/>
+              </a:rPr>
+              <a:t>8</a:t>
+            </a:r>
+          </a:p>
+        </p:txBody>
+      </p:sp>
+      <p:sp>
+        <p:nvSpPr>
+          <p:cNvPr id="109" name="TextBox 108"/>
+          <p:cNvSpPr txBox="1"/>
+          <p:nvPr/>
+        </p:nvSpPr>
+        <p:spPr>
+          <a:xfrm>
+            <a:off x="4535424" y="5294376"/>
+            <a:ext cx="2743200" cy="82296"/>
+          </a:xfrm>
+          <a:prstGeom prst="rect">
+            <a:avLst/>
+          </a:prstGeom>
+          <a:noFill/>
+        </p:spPr>
+        <p:txBody>
+          <a:bodyPr wrap="square" lIns="0" rIns="0" tIns="0" bIns="0" anchor="t">
+            <a:spAutoFit/>
+          </a:bodyPr>
+          <a:lstStyle/>
+          <a:p>
+            <a:pPr algn="l">
+              <a:lnSpc>
+                <a:spcPct val="100000"/>
+              </a:lnSpc>
+            </a:pPr>
+            <a:r>
+              <a:rPr sz="900" b="1">
+                <a:solidFill>
+                  <a:srgbClr val="1A1A1C"/>
+                </a:solidFill>
+                <a:latin typeface="微软雅黑"/>
+                <a:ea typeface="微软雅黑"/>
+                <a:cs typeface="微软雅黑"/>
+              </a:rPr>
+              <a:t>中文去 AI 味</a:t>
+            </a:r>
+          </a:p>
+        </p:txBody>
+      </p:sp>
+      <p:sp>
+        <p:nvSpPr>
+          <p:cNvPr id="110" name="TextBox 109"/>
+          <p:cNvSpPr txBox="1"/>
+          <p:nvPr/>
+        </p:nvSpPr>
+        <p:spPr>
+          <a:xfrm>
+            <a:off x="7315200" y="5294376"/>
+            <a:ext cx="548640" cy="82296"/>
+          </a:xfrm>
+          <a:prstGeom prst="rect">
+            <a:avLst/>
+          </a:prstGeom>
+          <a:noFill/>
+        </p:spPr>
+        <p:txBody>
+          <a:bodyPr wrap="square" lIns="0" rIns="0" tIns="0" bIns="0" anchor="t">
+            <a:spAutoFit/>
+          </a:bodyPr>
+          <a:lstStyle/>
+          <a:p>
+            <a:pPr algn="r">
+              <a:lnSpc>
+                <a:spcPct val="100000"/>
+              </a:lnSpc>
+            </a:pPr>
+            <a:r>
+              <a:rPr sz="880" b="0">
+                <a:solidFill>
+                  <a:srgbClr val="5B616B"/>
+                </a:solidFill>
+                <a:latin typeface="微软雅黑"/>
+                <a:ea typeface="微软雅黑"/>
+                <a:cs typeface="微软雅黑"/>
+              </a:rPr>
+              <a:t>53,582</a:t>
+            </a:r>
+          </a:p>
+        </p:txBody>
+      </p:sp>
+      <p:sp>
+        <p:nvSpPr>
+          <p:cNvPr id="111" name="TextBox 110"/>
+          <p:cNvSpPr txBox="1"/>
+          <p:nvPr/>
+        </p:nvSpPr>
+        <p:spPr>
+          <a:xfrm>
+            <a:off x="4535424" y="5424678"/>
+            <a:ext cx="3230880" cy="68580"/>
+          </a:xfrm>
+          <a:prstGeom prst="rect">
+            <a:avLst/>
+          </a:prstGeom>
+          <a:noFill/>
+        </p:spPr>
+        <p:txBody>
+          <a:bodyPr wrap="square" lIns="0" rIns="0" tIns="0" bIns="0" anchor="t">
+            <a:spAutoFit/>
+          </a:bodyPr>
+          <a:lstStyle/>
+          <a:p>
+            <a:pPr algn="l">
+              <a:lnSpc>
+                <a:spcPct val="100000"/>
+              </a:lnSpc>
+            </a:pPr>
+            <a:r>
+              <a:rPr sz="800" b="0">
+                <a:solidFill>
+                  <a:srgbClr val="5B616B"/>
+                </a:solidFill>
+                <a:latin typeface="微软雅黑"/>
+                <a:ea typeface="微软雅黑"/>
+                <a:cs typeface="微软雅黑"/>
+              </a:rPr>
+              <a:t>user_4e7171fa</a:t>
+            </a:r>
+          </a:p>
+        </p:txBody>
+      </p:sp>
+      <p:sp>
+        <p:nvSpPr>
+          <p:cNvPr id="112" name="TextBox 111"/>
+          <p:cNvSpPr txBox="1"/>
+          <p:nvPr/>
+        </p:nvSpPr>
+        <p:spPr>
+          <a:xfrm>
+            <a:off x="8229600" y="2372868"/>
+            <a:ext cx="3535679" cy="96012"/>
+          </a:xfrm>
+          <a:prstGeom prst="rect">
+            <a:avLst/>
+          </a:prstGeom>
+          <a:noFill/>
+        </p:spPr>
+        <p:txBody>
+          <a:bodyPr wrap="square" lIns="0" rIns="0" tIns="0" bIns="0" anchor="t">
+            <a:spAutoFit/>
+          </a:bodyPr>
+          <a:lstStyle/>
+          <a:p>
+            <a:pPr algn="l">
+              <a:lnSpc>
+                <a:spcPct val="100000"/>
+              </a:lnSpc>
+            </a:pPr>
+            <a:r>
+              <a:rPr sz="919" b="1">
+                <a:solidFill>
+                  <a:srgbClr val="6B7785"/>
+                </a:solidFill>
+                <a:latin typeface="微软雅黑"/>
+                <a:ea typeface="微软雅黑"/>
+                <a:cs typeface="微软雅黑"/>
+              </a:rPr>
+              <a:t>API Key Top8</a:t>
+            </a:r>
+          </a:p>
+        </p:txBody>
+      </p:sp>
+      <p:sp>
+        <p:nvSpPr>
+          <p:cNvPr id="113" name="Rectangle 112"/>
           <p:cNvSpPr/>
           <p:nvPr/>
         </p:nvSpPr>
         <p:spPr>
           <a:xfrm>
-            <a:off x="7498080" y="3079242"/>
-            <a:ext cx="1463040" cy="75438"/>
-          </a:xfrm>
-          <a:prstGeom prst="roundRect">
-            <a:avLst>
-              <a:gd name="adj" fmla="val 40000"/>
-            </a:avLst>
+            <a:off x="8229600" y="2468880"/>
+            <a:ext cx="3535679" cy="5486"/>
+          </a:xfrm>
+          <a:prstGeom prst="rect">
+            <a:avLst/>
           </a:prstGeom>
           <a:solidFill>
-            <a:srgbClr val="EDEFF2"/>
+            <a:srgbClr val="E2E4E7"/>
           </a:solidFill>
           <a:ln>
             <a:noFill/>
@@ -43649,60 +45815,14 @@
       </p:sp>
       <p:sp>
         <p:nvSpPr>
-          <p:cNvPr id="61" name="Rounded Rectangle 60"/>
-          <p:cNvSpPr/>
-          <p:nvPr/>
-        </p:nvSpPr>
-        <p:spPr>
-          <a:xfrm>
-            <a:off x="7498080" y="3079242"/>
-            <a:ext cx="1463040" cy="75438"/>
-          </a:xfrm>
-          <a:prstGeom prst="roundRect">
-            <a:avLst>
-              <a:gd name="adj" fmla="val 40000"/>
-            </a:avLst>
-          </a:prstGeom>
-          <a:solidFill>
-            <a:srgbClr val="B5333B"/>
-          </a:solidFill>
-          <a:ln>
-            <a:noFill/>
-          </a:ln>
-          <a:effectLst/>
-        </p:spPr>
-        <p:style>
-          <a:lnRef idx="1">
-            <a:schemeClr val="accent1"/>
-          </a:lnRef>
-          <a:fillRef idx="3">
-            <a:schemeClr val="accent1"/>
-          </a:fillRef>
-          <a:effectRef idx="2">
-            <a:schemeClr val="accent1"/>
-          </a:effectRef>
-          <a:fontRef idx="minor">
-            <a:schemeClr val="lt1"/>
-          </a:fontRef>
-        </p:style>
-        <p:txBody>
-          <a:bodyPr rtlCol="0" anchor="ctr"/>
-          <a:lstStyle/>
-          <a:p>
-            <a:pPr algn="ctr"/>
-          </a:p>
-        </p:txBody>
-      </p:sp>
-      <p:sp>
-        <p:nvSpPr>
-          <p:cNvPr id="62" name="TextBox 61"/>
-          <p:cNvSpPr txBox="1"/>
-          <p:nvPr/>
-        </p:nvSpPr>
-        <p:spPr>
-          <a:xfrm>
-            <a:off x="9083040" y="3051810"/>
-            <a:ext cx="2255520" cy="137160"/>
+          <p:cNvPr id="114" name="TextBox 113"/>
+          <p:cNvSpPr txBox="1"/>
+          <p:nvPr/>
+        </p:nvSpPr>
+        <p:spPr>
+          <a:xfrm>
+            <a:off x="8229600" y="2510028"/>
+            <a:ext cx="170688" cy="82296"/>
           </a:xfrm>
           <a:prstGeom prst="rect">
             <a:avLst/>
@@ -43721,29 +45841,29 @@
               </a:lnSpc>
             </a:pPr>
             <a:r>
-              <a:rPr sz="850" b="0">
-                <a:solidFill>
-                  <a:srgbClr val="1A1A1C"/>
-                </a:solidFill>
-                <a:latin typeface="微软雅黑"/>
-                <a:ea typeface="微软雅黑"/>
-                <a:cs typeface="微软雅黑"/>
-              </a:rPr>
-              <a:t>8,570 / 789 条</a:t>
-            </a:r>
-          </a:p>
-        </p:txBody>
-      </p:sp>
-      <p:sp>
-        <p:nvSpPr>
-          <p:cNvPr id="63" name="TextBox 62"/>
-          <p:cNvSpPr txBox="1"/>
-          <p:nvPr/>
-        </p:nvSpPr>
-        <p:spPr>
-          <a:xfrm>
-            <a:off x="6217920" y="3429000"/>
-            <a:ext cx="1158240" cy="137160"/>
+              <a:rPr sz="800" b="1">
+                <a:solidFill>
+                  <a:srgbClr val="B5333B"/>
+                </a:solidFill>
+                <a:latin typeface="微软雅黑"/>
+                <a:ea typeface="微软雅黑"/>
+                <a:cs typeface="微软雅黑"/>
+              </a:rPr>
+              <a:t>1</a:t>
+            </a:r>
+          </a:p>
+        </p:txBody>
+      </p:sp>
+      <p:sp>
+        <p:nvSpPr>
+          <p:cNvPr id="115" name="TextBox 114"/>
+          <p:cNvSpPr txBox="1"/>
+          <p:nvPr/>
+        </p:nvSpPr>
+        <p:spPr>
+          <a:xfrm>
+            <a:off x="8436864" y="2510028"/>
+            <a:ext cx="2743200" cy="82296"/>
           </a:xfrm>
           <a:prstGeom prst="rect">
             <a:avLst/>
@@ -43762,7 +45882,48 @@
               </a:lnSpc>
             </a:pPr>
             <a:r>
-              <a:rPr sz="950" b="0">
+              <a:rPr sz="900" b="1">
+                <a:solidFill>
+                  <a:srgbClr val="1A1A1C"/>
+                </a:solidFill>
+                <a:latin typeface="微软雅黑"/>
+                <a:ea typeface="微软雅黑"/>
+                <a:cs typeface="微软雅黑"/>
+              </a:rPr>
+              <a:t>腾讯文档 TENCENT DOCS</a:t>
+            </a:r>
+          </a:p>
+        </p:txBody>
+      </p:sp>
+      <p:sp>
+        <p:nvSpPr>
+          <p:cNvPr id="116" name="TextBox 115"/>
+          <p:cNvSpPr txBox="1"/>
+          <p:nvPr/>
+        </p:nvSpPr>
+        <p:spPr>
+          <a:xfrm>
+            <a:off x="11216640" y="2510028"/>
+            <a:ext cx="548640" cy="82296"/>
+          </a:xfrm>
+          <a:prstGeom prst="rect">
+            <a:avLst/>
+          </a:prstGeom>
+          <a:noFill/>
+        </p:spPr>
+        <p:txBody>
+          <a:bodyPr wrap="square" lIns="0" rIns="0" tIns="0" bIns="0" anchor="t">
+            <a:spAutoFit/>
+          </a:bodyPr>
+          <a:lstStyle/>
+          <a:p>
+            <a:pPr algn="r">
+              <a:lnSpc>
+                <a:spcPct val="100000"/>
+              </a:lnSpc>
+            </a:pPr>
+            <a:r>
+              <a:rPr sz="880" b="0">
                 <a:solidFill>
                   <a:srgbClr val="5B616B"/>
                 </a:solidFill>
@@ -43770,113 +45931,21 @@
                 <a:ea typeface="微软雅黑"/>
                 <a:cs typeface="微软雅黑"/>
               </a:rPr>
-              <a:t>个人 / 社区</a:t>
-            </a:r>
-          </a:p>
-        </p:txBody>
-      </p:sp>
-      <p:sp>
-        <p:nvSpPr>
-          <p:cNvPr id="64" name="Rounded Rectangle 63"/>
-          <p:cNvSpPr/>
-          <p:nvPr/>
-        </p:nvSpPr>
-        <p:spPr>
-          <a:xfrm>
-            <a:off x="7498080" y="3456432"/>
-            <a:ext cx="1463040" cy="75438"/>
-          </a:xfrm>
-          <a:prstGeom prst="roundRect">
-            <a:avLst>
-              <a:gd name="adj" fmla="val 40000"/>
-            </a:avLst>
-          </a:prstGeom>
-          <a:solidFill>
-            <a:srgbClr val="EDEFF2"/>
-          </a:solidFill>
-          <a:ln>
-            <a:noFill/>
-          </a:ln>
-          <a:effectLst/>
-        </p:spPr>
-        <p:style>
-          <a:lnRef idx="1">
-            <a:schemeClr val="accent1"/>
-          </a:lnRef>
-          <a:fillRef idx="3">
-            <a:schemeClr val="accent1"/>
-          </a:fillRef>
-          <a:effectRef idx="2">
-            <a:schemeClr val="accent1"/>
-          </a:effectRef>
-          <a:fontRef idx="minor">
-            <a:schemeClr val="lt1"/>
-          </a:fontRef>
-        </p:style>
-        <p:txBody>
-          <a:bodyPr rtlCol="0" anchor="ctr"/>
-          <a:lstStyle/>
-          <a:p>
-            <a:pPr algn="ctr"/>
-          </a:p>
-        </p:txBody>
-      </p:sp>
-      <p:sp>
-        <p:nvSpPr>
-          <p:cNvPr id="65" name="Rounded Rectangle 64"/>
-          <p:cNvSpPr/>
-          <p:nvPr/>
-        </p:nvSpPr>
-        <p:spPr>
-          <a:xfrm>
-            <a:off x="7498080" y="3456432"/>
-            <a:ext cx="960962" cy="75438"/>
-          </a:xfrm>
-          <a:prstGeom prst="roundRect">
-            <a:avLst>
-              <a:gd name="adj" fmla="val 40000"/>
-            </a:avLst>
-          </a:prstGeom>
-          <a:solidFill>
-            <a:srgbClr val="566472"/>
-          </a:solidFill>
-          <a:ln>
-            <a:noFill/>
-          </a:ln>
-          <a:effectLst/>
-        </p:spPr>
-        <p:style>
-          <a:lnRef idx="1">
-            <a:schemeClr val="accent1"/>
-          </a:lnRef>
-          <a:fillRef idx="3">
-            <a:schemeClr val="accent1"/>
-          </a:fillRef>
-          <a:effectRef idx="2">
-            <a:schemeClr val="accent1"/>
-          </a:effectRef>
-          <a:fontRef idx="minor">
-            <a:schemeClr val="lt1"/>
-          </a:fontRef>
-        </p:style>
-        <p:txBody>
-          <a:bodyPr rtlCol="0" anchor="ctr"/>
-          <a:lstStyle/>
-          <a:p>
-            <a:pPr algn="ctr"/>
-          </a:p>
-        </p:txBody>
-      </p:sp>
-      <p:sp>
-        <p:nvSpPr>
-          <p:cNvPr id="66" name="TextBox 65"/>
-          <p:cNvSpPr txBox="1"/>
-          <p:nvPr/>
-        </p:nvSpPr>
-        <p:spPr>
-          <a:xfrm>
-            <a:off x="9083040" y="3429000"/>
-            <a:ext cx="2255520" cy="137160"/>
+              <a:t>1,824,922</a:t>
+            </a:r>
+          </a:p>
+        </p:txBody>
+      </p:sp>
+      <p:sp>
+        <p:nvSpPr>
+          <p:cNvPr id="117" name="TextBox 116"/>
+          <p:cNvSpPr txBox="1"/>
+          <p:nvPr/>
+        </p:nvSpPr>
+        <p:spPr>
+          <a:xfrm>
+            <a:off x="8436864" y="2640330"/>
+            <a:ext cx="3230880" cy="68580"/>
           </a:xfrm>
           <a:prstGeom prst="rect">
             <a:avLst/>
@@ -43895,29 +45964,29 @@
               </a:lnSpc>
             </a:pPr>
             <a:r>
-              <a:rPr sz="850" b="0">
-                <a:solidFill>
-                  <a:srgbClr val="1A1A1C"/>
-                </a:solidFill>
-                <a:latin typeface="微软雅黑"/>
-                <a:ea typeface="微软雅黑"/>
-                <a:cs typeface="微软雅黑"/>
-              </a:rPr>
-              <a:t>5,629 / 1971 条</a:t>
-            </a:r>
-          </a:p>
-        </p:txBody>
-      </p:sp>
-      <p:sp>
-        <p:nvSpPr>
-          <p:cNvPr id="67" name="TextBox 66"/>
-          <p:cNvSpPr txBox="1"/>
-          <p:nvPr/>
-        </p:nvSpPr>
-        <p:spPr>
-          <a:xfrm>
-            <a:off x="6217920" y="3806190"/>
-            <a:ext cx="1158240" cy="137160"/>
+              <a:rPr sz="800" b="0">
+                <a:solidFill>
+                  <a:srgbClr val="5B616B"/>
+                </a:solidFill>
+                <a:latin typeface="微软雅黑"/>
+                <a:ea typeface="微软雅黑"/>
+                <a:cs typeface="微软雅黑"/>
+              </a:rPr>
+              <a:t>腾讯文档团队</a:t>
+            </a:r>
+          </a:p>
+        </p:txBody>
+      </p:sp>
+      <p:sp>
+        <p:nvSpPr>
+          <p:cNvPr id="118" name="TextBox 117"/>
+          <p:cNvSpPr txBox="1"/>
+          <p:nvPr/>
+        </p:nvSpPr>
+        <p:spPr>
+          <a:xfrm>
+            <a:off x="8229600" y="2907792"/>
+            <a:ext cx="170688" cy="82296"/>
           </a:xfrm>
           <a:prstGeom prst="rect">
             <a:avLst/>
@@ -43936,121 +46005,29 @@
               </a:lnSpc>
             </a:pPr>
             <a:r>
-              <a:rPr sz="950" b="0">
-                <a:solidFill>
-                  <a:srgbClr val="5B616B"/>
-                </a:solidFill>
-                <a:latin typeface="微软雅黑"/>
-                <a:ea typeface="微软雅黑"/>
-                <a:cs typeface="微软雅黑"/>
-              </a:rPr>
-              <a:t>镜像 ClawHub</a:t>
-            </a:r>
-          </a:p>
-        </p:txBody>
-      </p:sp>
-      <p:sp>
-        <p:nvSpPr>
-          <p:cNvPr id="68" name="Rounded Rectangle 67"/>
-          <p:cNvSpPr/>
-          <p:nvPr/>
-        </p:nvSpPr>
-        <p:spPr>
-          <a:xfrm>
-            <a:off x="7498080" y="3833622"/>
-            <a:ext cx="1463040" cy="75438"/>
-          </a:xfrm>
-          <a:prstGeom prst="roundRect">
-            <a:avLst>
-              <a:gd name="adj" fmla="val 40000"/>
-            </a:avLst>
-          </a:prstGeom>
-          <a:solidFill>
-            <a:srgbClr val="EDEFF2"/>
-          </a:solidFill>
-          <a:ln>
-            <a:noFill/>
-          </a:ln>
-          <a:effectLst/>
-        </p:spPr>
-        <p:style>
-          <a:lnRef idx="1">
-            <a:schemeClr val="accent1"/>
-          </a:lnRef>
-          <a:fillRef idx="3">
-            <a:schemeClr val="accent1"/>
-          </a:fillRef>
-          <a:effectRef idx="2">
-            <a:schemeClr val="accent1"/>
-          </a:effectRef>
-          <a:fontRef idx="minor">
-            <a:schemeClr val="lt1"/>
-          </a:fontRef>
-        </p:style>
-        <p:txBody>
-          <a:bodyPr rtlCol="0" anchor="ctr"/>
-          <a:lstStyle/>
-          <a:p>
-            <a:pPr algn="ctr"/>
-          </a:p>
-        </p:txBody>
-      </p:sp>
-      <p:sp>
-        <p:nvSpPr>
-          <p:cNvPr id="69" name="Rounded Rectangle 68"/>
-          <p:cNvSpPr/>
-          <p:nvPr/>
-        </p:nvSpPr>
-        <p:spPr>
-          <a:xfrm>
-            <a:off x="7498080" y="3833622"/>
-            <a:ext cx="653844" cy="75438"/>
-          </a:xfrm>
-          <a:prstGeom prst="roundRect">
-            <a:avLst>
-              <a:gd name="adj" fmla="val 40000"/>
-            </a:avLst>
-          </a:prstGeom>
-          <a:solidFill>
-            <a:srgbClr val="CFD4DA"/>
-          </a:solidFill>
-          <a:ln>
-            <a:noFill/>
-          </a:ln>
-          <a:effectLst/>
-        </p:spPr>
-        <p:style>
-          <a:lnRef idx="1">
-            <a:schemeClr val="accent1"/>
-          </a:lnRef>
-          <a:fillRef idx="3">
-            <a:schemeClr val="accent1"/>
-          </a:fillRef>
-          <a:effectRef idx="2">
-            <a:schemeClr val="accent1"/>
-          </a:effectRef>
-          <a:fontRef idx="minor">
-            <a:schemeClr val="lt1"/>
-          </a:fontRef>
-        </p:style>
-        <p:txBody>
-          <a:bodyPr rtlCol="0" anchor="ctr"/>
-          <a:lstStyle/>
-          <a:p>
-            <a:pPr algn="ctr"/>
-          </a:p>
-        </p:txBody>
-      </p:sp>
-      <p:sp>
-        <p:nvSpPr>
-          <p:cNvPr id="70" name="TextBox 69"/>
-          <p:cNvSpPr txBox="1"/>
-          <p:nvPr/>
-        </p:nvSpPr>
-        <p:spPr>
-          <a:xfrm>
-            <a:off x="9083040" y="3806190"/>
-            <a:ext cx="2255520" cy="137160"/>
+              <a:rPr sz="800" b="1">
+                <a:solidFill>
+                  <a:srgbClr val="B5333B"/>
+                </a:solidFill>
+                <a:latin typeface="微软雅黑"/>
+                <a:ea typeface="微软雅黑"/>
+                <a:cs typeface="微软雅黑"/>
+              </a:rPr>
+              <a:t>2</a:t>
+            </a:r>
+          </a:p>
+        </p:txBody>
+      </p:sp>
+      <p:sp>
+        <p:nvSpPr>
+          <p:cNvPr id="119" name="TextBox 118"/>
+          <p:cNvSpPr txBox="1"/>
+          <p:nvPr/>
+        </p:nvSpPr>
+        <p:spPr>
+          <a:xfrm>
+            <a:off x="8436864" y="2907792"/>
+            <a:ext cx="2743200" cy="82296"/>
           </a:xfrm>
           <a:prstGeom prst="rect">
             <a:avLst/>
@@ -44069,7 +46046,7 @@
               </a:lnSpc>
             </a:pPr>
             <a:r>
-              <a:rPr sz="850" b="0">
+              <a:rPr sz="900" b="1">
                 <a:solidFill>
                   <a:srgbClr val="1A1A1C"/>
                 </a:solidFill>
@@ -44077,21 +46054,21 @@
                 <a:ea typeface="微软雅黑"/>
                 <a:cs typeface="微软雅黑"/>
               </a:rPr>
-              <a:t>3,830 / 7240 条</a:t>
-            </a:r>
-          </a:p>
-        </p:txBody>
-      </p:sp>
-      <p:sp>
-        <p:nvSpPr>
-          <p:cNvPr id="71" name="TextBox 70"/>
-          <p:cNvSpPr txBox="1"/>
-          <p:nvPr/>
-        </p:nvSpPr>
-        <p:spPr>
-          <a:xfrm>
-            <a:off x="6217920" y="4046220"/>
-            <a:ext cx="5364480" cy="219456"/>
+              <a:t>全国电子印章互认平台</a:t>
+            </a:r>
+          </a:p>
+        </p:txBody>
+      </p:sp>
+      <p:sp>
+        <p:nvSpPr>
+          <p:cNvPr id="120" name="TextBox 119"/>
+          <p:cNvSpPr txBox="1"/>
+          <p:nvPr/>
+        </p:nvSpPr>
+        <p:spPr>
+          <a:xfrm>
+            <a:off x="11216640" y="2907792"/>
+            <a:ext cx="548640" cy="82296"/>
           </a:xfrm>
           <a:prstGeom prst="rect">
             <a:avLst/>
@@ -44104,35 +46081,35 @@
           </a:bodyPr>
           <a:lstStyle/>
           <a:p>
-            <a:pPr algn="l">
+            <a:pPr algn="r">
               <a:lnSpc>
-                <a:spcPct val="105000"/>
+                <a:spcPct val="100000"/>
               </a:lnSpc>
             </a:pPr>
             <a:r>
-              <a:rPr sz="850" b="0">
-                <a:solidFill>
-                  <a:srgbClr val="8B8E94"/>
-                </a:solidFill>
-                <a:latin typeface="微软雅黑"/>
-                <a:ea typeface="微软雅黑"/>
-                <a:cs typeface="微软雅黑"/>
-              </a:rPr>
-              <a:t>Top10000 整体中位 4,251；企业单条最高，个人高于镜像。</a:t>
-            </a:r>
-          </a:p>
-        </p:txBody>
-      </p:sp>
-      <p:sp>
-        <p:nvSpPr>
-          <p:cNvPr id="72" name="TextBox 71"/>
-          <p:cNvSpPr txBox="1"/>
-          <p:nvPr/>
-        </p:nvSpPr>
-        <p:spPr>
-          <a:xfrm>
-            <a:off x="426720" y="4320540"/>
-            <a:ext cx="11338560" cy="137160"/>
+              <a:rPr sz="880" b="0">
+                <a:solidFill>
+                  <a:srgbClr val="5B616B"/>
+                </a:solidFill>
+                <a:latin typeface="微软雅黑"/>
+                <a:ea typeface="微软雅黑"/>
+                <a:cs typeface="微软雅黑"/>
+              </a:rPr>
+              <a:t>1,033,084</a:t>
+            </a:r>
+          </a:p>
+        </p:txBody>
+      </p:sp>
+      <p:sp>
+        <p:nvSpPr>
+          <p:cNvPr id="121" name="TextBox 120"/>
+          <p:cNvSpPr txBox="1"/>
+          <p:nvPr/>
+        </p:nvSpPr>
+        <p:spPr>
+          <a:xfrm>
+            <a:off x="8436864" y="3038094"/>
+            <a:ext cx="3230880" cy="68580"/>
           </a:xfrm>
           <a:prstGeom prst="rect">
             <a:avLst/>
@@ -44151,29 +46128,29 @@
               </a:lnSpc>
             </a:pPr>
             <a:r>
-              <a:rPr sz="1050" b="1">
-                <a:solidFill>
-                  <a:srgbClr val="1A1A1C"/>
-                </a:solidFill>
-                <a:latin typeface="微软雅黑"/>
-                <a:ea typeface="微软雅黑"/>
-                <a:cs typeface="微软雅黑"/>
-              </a:rPr>
-              <a:t>Top6 下载：免费 / Payskill / API Key</a:t>
-            </a:r>
-          </a:p>
-        </p:txBody>
-      </p:sp>
-      <p:sp>
-        <p:nvSpPr>
-          <p:cNvPr id="73" name="TextBox 72"/>
-          <p:cNvSpPr txBox="1"/>
-          <p:nvPr/>
-        </p:nvSpPr>
-        <p:spPr>
-          <a:xfrm>
-            <a:off x="426720" y="4485132"/>
-            <a:ext cx="11338560" cy="89154"/>
+              <a:rPr sz="800" b="0">
+                <a:solidFill>
+                  <a:srgbClr val="5B616B"/>
+                </a:solidFill>
+                <a:latin typeface="微软雅黑"/>
+                <a:ea typeface="微软雅黑"/>
+                <a:cs typeface="微软雅黑"/>
+              </a:rPr>
+              <a:t>成都国信公链科技有限公司</a:t>
+            </a:r>
+          </a:p>
+        </p:txBody>
+      </p:sp>
+      <p:sp>
+        <p:nvSpPr>
+          <p:cNvPr id="122" name="TextBox 121"/>
+          <p:cNvSpPr txBox="1"/>
+          <p:nvPr/>
+        </p:nvSpPr>
+        <p:spPr>
+          <a:xfrm>
+            <a:off x="8229600" y="3305556"/>
+            <a:ext cx="170688" cy="82296"/>
           </a:xfrm>
           <a:prstGeom prst="rect">
             <a:avLst/>
@@ -44192,29 +46169,29 @@
               </a:lnSpc>
             </a:pPr>
             <a:r>
-              <a:rPr sz="720" b="0">
-                <a:solidFill>
-                  <a:srgbClr val="8B8E94"/>
-                </a:solidFill>
-                <a:latin typeface="微软雅黑"/>
-                <a:ea typeface="微软雅黑"/>
-                <a:cs typeface="微软雅黑"/>
-              </a:rPr>
-              <a:t>Top10000 内：免费 6,908 / Payskill 68 / API Key 3,030；Payskill 与 API Key 可重叠</a:t>
-            </a:r>
-          </a:p>
-        </p:txBody>
-      </p:sp>
-      <p:sp>
-        <p:nvSpPr>
-          <p:cNvPr id="74" name="TextBox 73"/>
-          <p:cNvSpPr txBox="1"/>
-          <p:nvPr/>
-        </p:nvSpPr>
-        <p:spPr>
-          <a:xfrm>
-            <a:off x="426720" y="4594860"/>
-            <a:ext cx="3535679" cy="96012"/>
+              <a:rPr sz="800" b="1">
+                <a:solidFill>
+                  <a:srgbClr val="B5333B"/>
+                </a:solidFill>
+                <a:latin typeface="微软雅黑"/>
+                <a:ea typeface="微软雅黑"/>
+                <a:cs typeface="微软雅黑"/>
+              </a:rPr>
+              <a:t>3</a:t>
+            </a:r>
+          </a:p>
+        </p:txBody>
+      </p:sp>
+      <p:sp>
+        <p:nvSpPr>
+          <p:cNvPr id="123" name="TextBox 122"/>
+          <p:cNvSpPr txBox="1"/>
+          <p:nvPr/>
+        </p:nvSpPr>
+        <p:spPr>
+          <a:xfrm>
+            <a:off x="8436864" y="3305556"/>
+            <a:ext cx="2743200" cy="82296"/>
           </a:xfrm>
           <a:prstGeom prst="rect">
             <a:avLst/>
@@ -44233,73 +46210,70 @@
               </a:lnSpc>
             </a:pPr>
             <a:r>
-              <a:rPr sz="860" b="1">
-                <a:solidFill>
-                  <a:srgbClr val="B5333B"/>
-                </a:solidFill>
-                <a:latin typeface="微软雅黑"/>
-                <a:ea typeface="微软雅黑"/>
-                <a:cs typeface="微软雅黑"/>
-              </a:rPr>
-              <a:t>免费 Top6</a:t>
-            </a:r>
-          </a:p>
-        </p:txBody>
-      </p:sp>
-      <p:sp>
-        <p:nvSpPr>
-          <p:cNvPr id="75" name="Rectangle 74"/>
-          <p:cNvSpPr/>
-          <p:nvPr/>
-        </p:nvSpPr>
-        <p:spPr>
-          <a:xfrm>
-            <a:off x="426720" y="4690872"/>
-            <a:ext cx="3535679" cy="5486"/>
-          </a:xfrm>
-          <a:prstGeom prst="rect">
-            <a:avLst/>
-          </a:prstGeom>
-          <a:solidFill>
-            <a:srgbClr val="E2E4E7"/>
-          </a:solidFill>
-          <a:ln>
-            <a:noFill/>
-          </a:ln>
-          <a:effectLst/>
-        </p:spPr>
-        <p:style>
-          <a:lnRef idx="1">
-            <a:schemeClr val="accent1"/>
-          </a:lnRef>
-          <a:fillRef idx="3">
-            <a:schemeClr val="accent1"/>
-          </a:fillRef>
-          <a:effectRef idx="2">
-            <a:schemeClr val="accent1"/>
-          </a:effectRef>
-          <a:fontRef idx="minor">
-            <a:schemeClr val="lt1"/>
-          </a:fontRef>
-        </p:style>
-        <p:txBody>
-          <a:bodyPr rtlCol="0" anchor="ctr"/>
-          <a:lstStyle/>
-          <a:p>
-            <a:pPr algn="ctr"/>
-          </a:p>
-        </p:txBody>
-      </p:sp>
-      <p:sp>
-        <p:nvSpPr>
-          <p:cNvPr id="76" name="TextBox 75"/>
-          <p:cNvSpPr txBox="1"/>
-          <p:nvPr/>
-        </p:nvSpPr>
-        <p:spPr>
-          <a:xfrm>
-            <a:off x="426720" y="4718304"/>
-            <a:ext cx="170688" cy="75438"/>
+              <a:rPr sz="900" b="1">
+                <a:solidFill>
+                  <a:srgbClr val="1A1A1C"/>
+                </a:solidFill>
+                <a:latin typeface="微软雅黑"/>
+                <a:ea typeface="微软雅黑"/>
+                <a:cs typeface="微软雅黑"/>
+              </a:rPr>
+              <a:t>Summarize</a:t>
+            </a:r>
+          </a:p>
+        </p:txBody>
+      </p:sp>
+      <p:sp>
+        <p:nvSpPr>
+          <p:cNvPr id="124" name="TextBox 123"/>
+          <p:cNvSpPr txBox="1"/>
+          <p:nvPr/>
+        </p:nvSpPr>
+        <p:spPr>
+          <a:xfrm>
+            <a:off x="11216640" y="3305556"/>
+            <a:ext cx="548640" cy="82296"/>
+          </a:xfrm>
+          <a:prstGeom prst="rect">
+            <a:avLst/>
+          </a:prstGeom>
+          <a:noFill/>
+        </p:spPr>
+        <p:txBody>
+          <a:bodyPr wrap="square" lIns="0" rIns="0" tIns="0" bIns="0" anchor="t">
+            <a:spAutoFit/>
+          </a:bodyPr>
+          <a:lstStyle/>
+          <a:p>
+            <a:pPr algn="r">
+              <a:lnSpc>
+                <a:spcPct val="100000"/>
+              </a:lnSpc>
+            </a:pPr>
+            <a:r>
+              <a:rPr sz="880" b="0">
+                <a:solidFill>
+                  <a:srgbClr val="5B616B"/>
+                </a:solidFill>
+                <a:latin typeface="微软雅黑"/>
+                <a:ea typeface="微软雅黑"/>
+                <a:cs typeface="微软雅黑"/>
+              </a:rPr>
+              <a:t>765,618</a:t>
+            </a:r>
+          </a:p>
+        </p:txBody>
+      </p:sp>
+      <p:sp>
+        <p:nvSpPr>
+          <p:cNvPr id="125" name="TextBox 124"/>
+          <p:cNvSpPr txBox="1"/>
+          <p:nvPr/>
+        </p:nvSpPr>
+        <p:spPr>
+          <a:xfrm>
+            <a:off x="8436864" y="3435858"/>
+            <a:ext cx="3230880" cy="68580"/>
           </a:xfrm>
           <a:prstGeom prst="rect">
             <a:avLst/>
@@ -44318,29 +46292,29 @@
               </a:lnSpc>
             </a:pPr>
             <a:r>
-              <a:rPr sz="740" b="1">
-                <a:solidFill>
-                  <a:srgbClr val="B5333B"/>
-                </a:solidFill>
-                <a:latin typeface="微软雅黑"/>
-                <a:ea typeface="微软雅黑"/>
-                <a:cs typeface="微软雅黑"/>
-              </a:rPr>
-              <a:t>1</a:t>
-            </a:r>
-          </a:p>
-        </p:txBody>
-      </p:sp>
-      <p:sp>
-        <p:nvSpPr>
-          <p:cNvPr id="77" name="TextBox 76"/>
-          <p:cNvSpPr txBox="1"/>
-          <p:nvPr/>
-        </p:nvSpPr>
-        <p:spPr>
-          <a:xfrm>
-            <a:off x="621792" y="4718304"/>
-            <a:ext cx="2621280" cy="75438"/>
+              <a:rPr sz="800" b="0">
+                <a:solidFill>
+                  <a:srgbClr val="5B616B"/>
+                </a:solidFill>
+                <a:latin typeface="微软雅黑"/>
+                <a:ea typeface="微软雅黑"/>
+                <a:cs typeface="微软雅黑"/>
+              </a:rPr>
+              <a:t>paudyyin</a:t>
+            </a:r>
+          </a:p>
+        </p:txBody>
+      </p:sp>
+      <p:sp>
+        <p:nvSpPr>
+          <p:cNvPr id="126" name="TextBox 125"/>
+          <p:cNvSpPr txBox="1"/>
+          <p:nvPr/>
+        </p:nvSpPr>
+        <p:spPr>
+          <a:xfrm>
+            <a:off x="8229600" y="3703320"/>
+            <a:ext cx="170688" cy="82296"/>
           </a:xfrm>
           <a:prstGeom prst="rect">
             <a:avLst/>
@@ -44359,7 +46333,48 @@
               </a:lnSpc>
             </a:pPr>
             <a:r>
-              <a:rPr sz="720" b="1">
+              <a:rPr sz="800" b="1">
+                <a:solidFill>
+                  <a:srgbClr val="B5333B"/>
+                </a:solidFill>
+                <a:latin typeface="微软雅黑"/>
+                <a:ea typeface="微软雅黑"/>
+                <a:cs typeface="微软雅黑"/>
+              </a:rPr>
+              <a:t>4</a:t>
+            </a:r>
+          </a:p>
+        </p:txBody>
+      </p:sp>
+      <p:sp>
+        <p:nvSpPr>
+          <p:cNvPr id="127" name="TextBox 126"/>
+          <p:cNvSpPr txBox="1"/>
+          <p:nvPr/>
+        </p:nvSpPr>
+        <p:spPr>
+          <a:xfrm>
+            <a:off x="8436864" y="3703320"/>
+            <a:ext cx="2743200" cy="82296"/>
+          </a:xfrm>
+          <a:prstGeom prst="rect">
+            <a:avLst/>
+          </a:prstGeom>
+          <a:noFill/>
+        </p:spPr>
+        <p:txBody>
+          <a:bodyPr wrap="square" lIns="0" rIns="0" tIns="0" bIns="0" anchor="t">
+            <a:spAutoFit/>
+          </a:bodyPr>
+          <a:lstStyle/>
+          <a:p>
+            <a:pPr algn="l">
+              <a:lnSpc>
+                <a:spcPct val="100000"/>
+              </a:lnSpc>
+            </a:pPr>
+            <a:r>
+              <a:rPr sz="840" b="1">
                 <a:solidFill>
                   <a:srgbClr val="1A1A1C"/>
                 </a:solidFill>
@@ -44367,21 +46382,21 @@
                 <a:ea typeface="微软雅黑"/>
                 <a:cs typeface="微软雅黑"/>
               </a:rPr>
-              <a:t>编程大神.Skill</a:t>
-            </a:r>
-          </a:p>
-        </p:txBody>
-      </p:sp>
-      <p:sp>
-        <p:nvSpPr>
-          <p:cNvPr id="78" name="TextBox 77"/>
-          <p:cNvSpPr txBox="1"/>
-          <p:nvPr/>
-        </p:nvSpPr>
-        <p:spPr>
-          <a:xfrm>
-            <a:off x="3328416" y="4718304"/>
-            <a:ext cx="609600" cy="75438"/>
+              <a:t>视频号爆款短视频拆解（付费版：全能）【零一数科·出品】</a:t>
+            </a:r>
+          </a:p>
+        </p:txBody>
+      </p:sp>
+      <p:sp>
+        <p:nvSpPr>
+          <p:cNvPr id="128" name="TextBox 127"/>
+          <p:cNvSpPr txBox="1"/>
+          <p:nvPr/>
+        </p:nvSpPr>
+        <p:spPr>
+          <a:xfrm>
+            <a:off x="11216640" y="3703320"/>
+            <a:ext cx="548640" cy="82296"/>
           </a:xfrm>
           <a:prstGeom prst="rect">
             <a:avLst/>
@@ -44400,7 +46415,7 @@
               </a:lnSpc>
             </a:pPr>
             <a:r>
-              <a:rPr sz="720" b="0">
+              <a:rPr sz="880" b="0">
                 <a:solidFill>
                   <a:srgbClr val="5B616B"/>
                 </a:solidFill>
@@ -44408,21 +46423,21 @@
                 <a:ea typeface="微软雅黑"/>
                 <a:cs typeface="微软雅黑"/>
               </a:rPr>
-              <a:t>5,213,811</a:t>
-            </a:r>
-          </a:p>
-        </p:txBody>
-      </p:sp>
-      <p:sp>
-        <p:nvSpPr>
-          <p:cNvPr id="79" name="TextBox 78"/>
-          <p:cNvSpPr txBox="1"/>
-          <p:nvPr/>
-        </p:nvSpPr>
-        <p:spPr>
-          <a:xfrm>
-            <a:off x="621792" y="4821174"/>
-            <a:ext cx="3291840" cy="61721"/>
+              <a:t>690,517</a:t>
+            </a:r>
+          </a:p>
+        </p:txBody>
+      </p:sp>
+      <p:sp>
+        <p:nvSpPr>
+          <p:cNvPr id="129" name="TextBox 128"/>
+          <p:cNvSpPr txBox="1"/>
+          <p:nvPr/>
+        </p:nvSpPr>
+        <p:spPr>
+          <a:xfrm>
+            <a:off x="8436864" y="3833622"/>
+            <a:ext cx="3230880" cy="68580"/>
           </a:xfrm>
           <a:prstGeom prst="rect">
             <a:avLst/>
@@ -44441,7 +46456,7 @@
               </a:lnSpc>
             </a:pPr>
             <a:r>
-              <a:rPr sz="620" b="0">
+              <a:rPr sz="800" b="0">
                 <a:solidFill>
                   <a:srgbClr val="5B616B"/>
                 </a:solidFill>
@@ -44449,21 +46464,21 @@
                 <a:ea typeface="微软雅黑"/>
                 <a:cs typeface="微软雅黑"/>
               </a:rPr>
-              <a:t>阿客实验室</a:t>
-            </a:r>
-          </a:p>
-        </p:txBody>
-      </p:sp>
-      <p:sp>
-        <p:nvSpPr>
-          <p:cNvPr id="80" name="TextBox 79"/>
-          <p:cNvSpPr txBox="1"/>
-          <p:nvPr/>
-        </p:nvSpPr>
-        <p:spPr>
-          <a:xfrm>
-            <a:off x="426720" y="4889754"/>
-            <a:ext cx="170688" cy="75438"/>
+              <a:t>零一数科</a:t>
+            </a:r>
+          </a:p>
+        </p:txBody>
+      </p:sp>
+      <p:sp>
+        <p:nvSpPr>
+          <p:cNvPr id="130" name="TextBox 129"/>
+          <p:cNvSpPr txBox="1"/>
+          <p:nvPr/>
+        </p:nvSpPr>
+        <p:spPr>
+          <a:xfrm>
+            <a:off x="8229600" y="4101084"/>
+            <a:ext cx="170688" cy="82296"/>
           </a:xfrm>
           <a:prstGeom prst="rect">
             <a:avLst/>
@@ -44482,7 +46497,7 @@
               </a:lnSpc>
             </a:pPr>
             <a:r>
-              <a:rPr sz="740" b="1">
+              <a:rPr sz="800" b="1">
                 <a:solidFill>
                   <a:srgbClr val="B5333B"/>
                 </a:solidFill>
@@ -44490,21 +46505,21 @@
                 <a:ea typeface="微软雅黑"/>
                 <a:cs typeface="微软雅黑"/>
               </a:rPr>
-              <a:t>2</a:t>
-            </a:r>
-          </a:p>
-        </p:txBody>
-      </p:sp>
-      <p:sp>
-        <p:nvSpPr>
-          <p:cNvPr id="81" name="TextBox 80"/>
-          <p:cNvSpPr txBox="1"/>
-          <p:nvPr/>
-        </p:nvSpPr>
-        <p:spPr>
-          <a:xfrm>
-            <a:off x="621792" y="4889754"/>
-            <a:ext cx="2621280" cy="75438"/>
+              <a:t>5</a:t>
+            </a:r>
+          </a:p>
+        </p:txBody>
+      </p:sp>
+      <p:sp>
+        <p:nvSpPr>
+          <p:cNvPr id="131" name="TextBox 130"/>
+          <p:cNvSpPr txBox="1"/>
+          <p:nvPr/>
+        </p:nvSpPr>
+        <p:spPr>
+          <a:xfrm>
+            <a:off x="8436864" y="4101084"/>
+            <a:ext cx="2743200" cy="82296"/>
           </a:xfrm>
           <a:prstGeom prst="rect">
             <a:avLst/>
@@ -44523,7 +46538,7 @@
               </a:lnSpc>
             </a:pPr>
             <a:r>
-              <a:rPr sz="720" b="1">
+              <a:rPr sz="900" b="1">
                 <a:solidFill>
                   <a:srgbClr val="1A1A1C"/>
                 </a:solidFill>
@@ -44531,21 +46546,21 @@
                 <a:ea typeface="微软雅黑"/>
                 <a:cs typeface="微软雅黑"/>
               </a:rPr>
-              <a:t>编程专家Pro.Skill</a:t>
-            </a:r>
-          </a:p>
-        </p:txBody>
-      </p:sp>
-      <p:sp>
-        <p:nvSpPr>
-          <p:cNvPr id="82" name="TextBox 81"/>
-          <p:cNvSpPr txBox="1"/>
-          <p:nvPr/>
-        </p:nvSpPr>
-        <p:spPr>
-          <a:xfrm>
-            <a:off x="3328416" y="4889754"/>
-            <a:ext cx="609600" cy="75438"/>
+              <a:t>钢联AI - 智能问数</a:t>
+            </a:r>
+          </a:p>
+        </p:txBody>
+      </p:sp>
+      <p:sp>
+        <p:nvSpPr>
+          <p:cNvPr id="132" name="TextBox 131"/>
+          <p:cNvSpPr txBox="1"/>
+          <p:nvPr/>
+        </p:nvSpPr>
+        <p:spPr>
+          <a:xfrm>
+            <a:off x="11216640" y="4101084"/>
+            <a:ext cx="548640" cy="82296"/>
           </a:xfrm>
           <a:prstGeom prst="rect">
             <a:avLst/>
@@ -44564,7 +46579,7 @@
               </a:lnSpc>
             </a:pPr>
             <a:r>
-              <a:rPr sz="720" b="0">
+              <a:rPr sz="880" b="0">
                 <a:solidFill>
                   <a:srgbClr val="5B616B"/>
                 </a:solidFill>
@@ -44572,21 +46587,21 @@
                 <a:ea typeface="微软雅黑"/>
                 <a:cs typeface="微软雅黑"/>
               </a:rPr>
-              <a:t>5,192,102</a:t>
-            </a:r>
-          </a:p>
-        </p:txBody>
-      </p:sp>
-      <p:sp>
-        <p:nvSpPr>
-          <p:cNvPr id="83" name="TextBox 82"/>
-          <p:cNvSpPr txBox="1"/>
-          <p:nvPr/>
-        </p:nvSpPr>
-        <p:spPr>
-          <a:xfrm>
-            <a:off x="621792" y="4992624"/>
-            <a:ext cx="3291840" cy="61721"/>
+              <a:t>667,903</a:t>
+            </a:r>
+          </a:p>
+        </p:txBody>
+      </p:sp>
+      <p:sp>
+        <p:nvSpPr>
+          <p:cNvPr id="133" name="TextBox 132"/>
+          <p:cNvSpPr txBox="1"/>
+          <p:nvPr/>
+        </p:nvSpPr>
+        <p:spPr>
+          <a:xfrm>
+            <a:off x="8436864" y="4231386"/>
+            <a:ext cx="3230880" cy="68580"/>
           </a:xfrm>
           <a:prstGeom prst="rect">
             <a:avLst/>
@@ -44605,7 +46620,7 @@
               </a:lnSpc>
             </a:pPr>
             <a:r>
-              <a:rPr sz="620" b="0">
+              <a:rPr sz="800" b="0">
                 <a:solidFill>
                   <a:srgbClr val="5B616B"/>
                 </a:solidFill>
@@ -44613,21 +46628,21 @@
                 <a:ea typeface="微软雅黑"/>
                 <a:cs typeface="微软雅黑"/>
               </a:rPr>
-              <a:t>user_47d655f0</a:t>
-            </a:r>
-          </a:p>
-        </p:txBody>
-      </p:sp>
-      <p:sp>
-        <p:nvSpPr>
-          <p:cNvPr id="84" name="TextBox 83"/>
-          <p:cNvSpPr txBox="1"/>
-          <p:nvPr/>
-        </p:nvSpPr>
-        <p:spPr>
-          <a:xfrm>
-            <a:off x="426720" y="5061204"/>
-            <a:ext cx="170688" cy="75438"/>
+              <a:t>上海钢联电子商务股份有限公司</a:t>
+            </a:r>
+          </a:p>
+        </p:txBody>
+      </p:sp>
+      <p:sp>
+        <p:nvSpPr>
+          <p:cNvPr id="134" name="TextBox 133"/>
+          <p:cNvSpPr txBox="1"/>
+          <p:nvPr/>
+        </p:nvSpPr>
+        <p:spPr>
+          <a:xfrm>
+            <a:off x="8229600" y="4498848"/>
+            <a:ext cx="170688" cy="82296"/>
           </a:xfrm>
           <a:prstGeom prst="rect">
             <a:avLst/>
@@ -44646,7 +46661,7 @@
               </a:lnSpc>
             </a:pPr>
             <a:r>
-              <a:rPr sz="740" b="1">
+              <a:rPr sz="800" b="1">
                 <a:solidFill>
                   <a:srgbClr val="B5333B"/>
                 </a:solidFill>
@@ -44654,21 +46669,21 @@
                 <a:ea typeface="微软雅黑"/>
                 <a:cs typeface="微软雅黑"/>
               </a:rPr>
-              <a:t>3</a:t>
-            </a:r>
-          </a:p>
-        </p:txBody>
-      </p:sp>
-      <p:sp>
-        <p:nvSpPr>
-          <p:cNvPr id="85" name="TextBox 84"/>
-          <p:cNvSpPr txBox="1"/>
-          <p:nvPr/>
-        </p:nvSpPr>
-        <p:spPr>
-          <a:xfrm>
-            <a:off x="621792" y="5061204"/>
-            <a:ext cx="2621280" cy="75438"/>
+              <a:t>6</a:t>
+            </a:r>
+          </a:p>
+        </p:txBody>
+      </p:sp>
+      <p:sp>
+        <p:nvSpPr>
+          <p:cNvPr id="135" name="TextBox 134"/>
+          <p:cNvSpPr txBox="1"/>
+          <p:nvPr/>
+        </p:nvSpPr>
+        <p:spPr>
+          <a:xfrm>
+            <a:off x="8436864" y="4498848"/>
+            <a:ext cx="2743200" cy="82296"/>
           </a:xfrm>
           <a:prstGeom prst="rect">
             <a:avLst/>
@@ -44687,7 +46702,7 @@
               </a:lnSpc>
             </a:pPr>
             <a:r>
-              <a:rPr sz="720" b="1">
+              <a:rPr sz="900" b="1">
                 <a:solidFill>
                   <a:srgbClr val="1A1A1C"/>
                 </a:solidFill>
@@ -44695,21 +46710,21 @@
                 <a:ea typeface="微软雅黑"/>
                 <a:cs typeface="微软雅黑"/>
               </a:rPr>
-              <a:t>编程专家.Skill</a:t>
-            </a:r>
-          </a:p>
-        </p:txBody>
-      </p:sp>
-      <p:sp>
-        <p:nvSpPr>
-          <p:cNvPr id="86" name="TextBox 85"/>
-          <p:cNvSpPr txBox="1"/>
-          <p:nvPr/>
-        </p:nvSpPr>
-        <p:spPr>
-          <a:xfrm>
-            <a:off x="3328416" y="5061204"/>
-            <a:ext cx="609600" cy="75438"/>
+              <a:t>ima-skills</a:t>
+            </a:r>
+          </a:p>
+        </p:txBody>
+      </p:sp>
+      <p:sp>
+        <p:nvSpPr>
+          <p:cNvPr id="136" name="TextBox 135"/>
+          <p:cNvSpPr txBox="1"/>
+          <p:nvPr/>
+        </p:nvSpPr>
+        <p:spPr>
+          <a:xfrm>
+            <a:off x="11216640" y="4498848"/>
+            <a:ext cx="548640" cy="82296"/>
           </a:xfrm>
           <a:prstGeom prst="rect">
             <a:avLst/>
@@ -44728,7 +46743,7 @@
               </a:lnSpc>
             </a:pPr>
             <a:r>
-              <a:rPr sz="720" b="0">
+              <a:rPr sz="880" b="0">
                 <a:solidFill>
                   <a:srgbClr val="5B616B"/>
                 </a:solidFill>
@@ -44736,21 +46751,21 @@
                 <a:ea typeface="微软雅黑"/>
                 <a:cs typeface="微软雅黑"/>
               </a:rPr>
-              <a:t>4,877,322</a:t>
-            </a:r>
-          </a:p>
-        </p:txBody>
-      </p:sp>
-      <p:sp>
-        <p:nvSpPr>
-          <p:cNvPr id="87" name="TextBox 86"/>
-          <p:cNvSpPr txBox="1"/>
-          <p:nvPr/>
-        </p:nvSpPr>
-        <p:spPr>
-          <a:xfrm>
-            <a:off x="621792" y="5164074"/>
-            <a:ext cx="3291840" cy="61721"/>
+              <a:t>663,062</a:t>
+            </a:r>
+          </a:p>
+        </p:txBody>
+      </p:sp>
+      <p:sp>
+        <p:nvSpPr>
+          <p:cNvPr id="137" name="TextBox 136"/>
+          <p:cNvSpPr txBox="1"/>
+          <p:nvPr/>
+        </p:nvSpPr>
+        <p:spPr>
+          <a:xfrm>
+            <a:off x="8436864" y="4629150"/>
+            <a:ext cx="3230880" cy="68580"/>
           </a:xfrm>
           <a:prstGeom prst="rect">
             <a:avLst/>
@@ -44769,7 +46784,7 @@
               </a:lnSpc>
             </a:pPr>
             <a:r>
-              <a:rPr sz="620" b="0">
+              <a:rPr sz="800" b="0">
                 <a:solidFill>
                   <a:srgbClr val="5B616B"/>
                 </a:solidFill>
@@ -44777,21 +46792,21 @@
                 <a:ea typeface="微软雅黑"/>
                 <a:cs typeface="微软雅黑"/>
               </a:rPr>
-              <a:t>user_741dc82b</a:t>
-            </a:r>
-          </a:p>
-        </p:txBody>
-      </p:sp>
-      <p:sp>
-        <p:nvSpPr>
-          <p:cNvPr id="88" name="TextBox 87"/>
-          <p:cNvSpPr txBox="1"/>
-          <p:nvPr/>
-        </p:nvSpPr>
-        <p:spPr>
-          <a:xfrm>
-            <a:off x="426720" y="5232653"/>
-            <a:ext cx="170688" cy="75438"/>
+              <a:t>tencent-ima</a:t>
+            </a:r>
+          </a:p>
+        </p:txBody>
+      </p:sp>
+      <p:sp>
+        <p:nvSpPr>
+          <p:cNvPr id="138" name="TextBox 137"/>
+          <p:cNvSpPr txBox="1"/>
+          <p:nvPr/>
+        </p:nvSpPr>
+        <p:spPr>
+          <a:xfrm>
+            <a:off x="8229600" y="4896612"/>
+            <a:ext cx="170688" cy="82296"/>
           </a:xfrm>
           <a:prstGeom prst="rect">
             <a:avLst/>
@@ -44810,7 +46825,7 @@
               </a:lnSpc>
             </a:pPr>
             <a:r>
-              <a:rPr sz="740" b="1">
+              <a:rPr sz="800" b="1">
                 <a:solidFill>
                   <a:srgbClr val="B5333B"/>
                 </a:solidFill>
@@ -44818,21 +46833,21 @@
                 <a:ea typeface="微软雅黑"/>
                 <a:cs typeface="微软雅黑"/>
               </a:rPr>
-              <a:t>4</a:t>
-            </a:r>
-          </a:p>
-        </p:txBody>
-      </p:sp>
-      <p:sp>
-        <p:nvSpPr>
-          <p:cNvPr id="89" name="TextBox 88"/>
-          <p:cNvSpPr txBox="1"/>
-          <p:nvPr/>
-        </p:nvSpPr>
-        <p:spPr>
-          <a:xfrm>
-            <a:off x="621792" y="5232653"/>
-            <a:ext cx="2621280" cy="75438"/>
+              <a:t>7</a:t>
+            </a:r>
+          </a:p>
+        </p:txBody>
+      </p:sp>
+      <p:sp>
+        <p:nvSpPr>
+          <p:cNvPr id="139" name="TextBox 138"/>
+          <p:cNvSpPr txBox="1"/>
+          <p:nvPr/>
+        </p:nvSpPr>
+        <p:spPr>
+          <a:xfrm>
+            <a:off x="8436864" y="4896612"/>
+            <a:ext cx="2743200" cy="82296"/>
           </a:xfrm>
           <a:prstGeom prst="rect">
             <a:avLst/>
@@ -44851,7 +46866,7 @@
               </a:lnSpc>
             </a:pPr>
             <a:r>
-              <a:rPr sz="720" b="1">
+              <a:rPr sz="900" b="1">
                 <a:solidFill>
                   <a:srgbClr val="1A1A1C"/>
                 </a:solidFill>
@@ -44859,21 +46874,21 @@
                 <a:ea typeface="微软雅黑"/>
                 <a:cs typeface="微软雅黑"/>
               </a:rPr>
-              <a:t>搜索引擎</a:t>
-            </a:r>
-          </a:p>
-        </p:txBody>
-      </p:sp>
-      <p:sp>
-        <p:nvSpPr>
-          <p:cNvPr id="90" name="TextBox 89"/>
-          <p:cNvSpPr txBox="1"/>
-          <p:nvPr/>
-        </p:nvSpPr>
-        <p:spPr>
-          <a:xfrm>
-            <a:off x="3328416" y="5232653"/>
-            <a:ext cx="609600" cy="75438"/>
+              <a:t>全能金融爬虫（新增MCP接入）</a:t>
+            </a:r>
+          </a:p>
+        </p:txBody>
+      </p:sp>
+      <p:sp>
+        <p:nvSpPr>
+          <p:cNvPr id="140" name="TextBox 139"/>
+          <p:cNvSpPr txBox="1"/>
+          <p:nvPr/>
+        </p:nvSpPr>
+        <p:spPr>
+          <a:xfrm>
+            <a:off x="11216640" y="4896612"/>
+            <a:ext cx="548640" cy="82296"/>
           </a:xfrm>
           <a:prstGeom prst="rect">
             <a:avLst/>
@@ -44892,7 +46907,7 @@
               </a:lnSpc>
             </a:pPr>
             <a:r>
-              <a:rPr sz="720" b="0">
+              <a:rPr sz="880" b="0">
                 <a:solidFill>
                   <a:srgbClr val="5B616B"/>
                 </a:solidFill>
@@ -44900,21 +46915,21 @@
                 <a:ea typeface="微软雅黑"/>
                 <a:cs typeface="微软雅黑"/>
               </a:rPr>
-              <a:t>4,712,038</a:t>
-            </a:r>
-          </a:p>
-        </p:txBody>
-      </p:sp>
-      <p:sp>
-        <p:nvSpPr>
-          <p:cNvPr id="91" name="TextBox 90"/>
-          <p:cNvSpPr txBox="1"/>
-          <p:nvPr/>
-        </p:nvSpPr>
-        <p:spPr>
-          <a:xfrm>
-            <a:off x="621792" y="5335523"/>
-            <a:ext cx="3291840" cy="61721"/>
+              <a:t>568,611</a:t>
+            </a:r>
+          </a:p>
+        </p:txBody>
+      </p:sp>
+      <p:sp>
+        <p:nvSpPr>
+          <p:cNvPr id="141" name="TextBox 140"/>
+          <p:cNvSpPr txBox="1"/>
+          <p:nvPr/>
+        </p:nvSpPr>
+        <p:spPr>
+          <a:xfrm>
+            <a:off x="8436864" y="5026914"/>
+            <a:ext cx="3230880" cy="68580"/>
           </a:xfrm>
           <a:prstGeom prst="rect">
             <a:avLst/>
@@ -44933,7 +46948,7 @@
               </a:lnSpc>
             </a:pPr>
             <a:r>
-              <a:rPr sz="620" b="0">
+              <a:rPr sz="800" b="0">
                 <a:solidFill>
                   <a:srgbClr val="5B616B"/>
                 </a:solidFill>
@@ -44941,21 +46956,21 @@
                 <a:ea typeface="微软雅黑"/>
                 <a:cs typeface="微软雅黑"/>
               </a:rPr>
-              <a:t>智创未来</a:t>
-            </a:r>
-          </a:p>
-        </p:txBody>
-      </p:sp>
-      <p:sp>
-        <p:nvSpPr>
-          <p:cNvPr id="92" name="TextBox 91"/>
-          <p:cNvSpPr txBox="1"/>
-          <p:nvPr/>
-        </p:nvSpPr>
-        <p:spPr>
-          <a:xfrm>
-            <a:off x="426720" y="5404103"/>
-            <a:ext cx="170688" cy="75438"/>
+              <a:t>user_9d5a2a39</a:t>
+            </a:r>
+          </a:p>
+        </p:txBody>
+      </p:sp>
+      <p:sp>
+        <p:nvSpPr>
+          <p:cNvPr id="142" name="TextBox 141"/>
+          <p:cNvSpPr txBox="1"/>
+          <p:nvPr/>
+        </p:nvSpPr>
+        <p:spPr>
+          <a:xfrm>
+            <a:off x="8229600" y="5294376"/>
+            <a:ext cx="170688" cy="82296"/>
           </a:xfrm>
           <a:prstGeom prst="rect">
             <a:avLst/>
@@ -44974,7 +46989,7 @@
               </a:lnSpc>
             </a:pPr>
             <a:r>
-              <a:rPr sz="740" b="1">
+              <a:rPr sz="800" b="1">
                 <a:solidFill>
                   <a:srgbClr val="B5333B"/>
                 </a:solidFill>
@@ -44982,21 +46997,21 @@
                 <a:ea typeface="微软雅黑"/>
                 <a:cs typeface="微软雅黑"/>
               </a:rPr>
-              <a:t>5</a:t>
-            </a:r>
-          </a:p>
-        </p:txBody>
-      </p:sp>
-      <p:sp>
-        <p:nvSpPr>
-          <p:cNvPr id="93" name="TextBox 92"/>
-          <p:cNvSpPr txBox="1"/>
-          <p:nvPr/>
-        </p:nvSpPr>
-        <p:spPr>
-          <a:xfrm>
-            <a:off x="621792" y="5404103"/>
-            <a:ext cx="2621280" cy="75438"/>
+              <a:t>8</a:t>
+            </a:r>
+          </a:p>
+        </p:txBody>
+      </p:sp>
+      <p:sp>
+        <p:nvSpPr>
+          <p:cNvPr id="143" name="TextBox 142"/>
+          <p:cNvSpPr txBox="1"/>
+          <p:nvPr/>
+        </p:nvSpPr>
+        <p:spPr>
+          <a:xfrm>
+            <a:off x="8436864" y="5294376"/>
+            <a:ext cx="2743200" cy="82296"/>
           </a:xfrm>
           <a:prstGeom prst="rect">
             <a:avLst/>
@@ -45015,7 +47030,7 @@
               </a:lnSpc>
             </a:pPr>
             <a:r>
-              <a:rPr sz="720" b="1">
+              <a:rPr sz="900" b="1">
                 <a:solidFill>
                   <a:srgbClr val="1A1A1C"/>
                 </a:solidFill>
@@ -45023,21 +47038,21 @@
                 <a:ea typeface="微软雅黑"/>
                 <a:cs typeface="微软雅黑"/>
               </a:rPr>
-              <a:t>dev-expert</a:t>
-            </a:r>
-          </a:p>
-        </p:txBody>
-      </p:sp>
-      <p:sp>
-        <p:nvSpPr>
-          <p:cNvPr id="94" name="TextBox 93"/>
-          <p:cNvSpPr txBox="1"/>
-          <p:nvPr/>
-        </p:nvSpPr>
-        <p:spPr>
-          <a:xfrm>
-            <a:off x="3328416" y="5404103"/>
-            <a:ext cx="609600" cy="75438"/>
+              <a:t>AdMapix</a:t>
+            </a:r>
+          </a:p>
+        </p:txBody>
+      </p:sp>
+      <p:sp>
+        <p:nvSpPr>
+          <p:cNvPr id="144" name="TextBox 143"/>
+          <p:cNvSpPr txBox="1"/>
+          <p:nvPr/>
+        </p:nvSpPr>
+        <p:spPr>
+          <a:xfrm>
+            <a:off x="11216640" y="5294376"/>
+            <a:ext cx="548640" cy="82296"/>
           </a:xfrm>
           <a:prstGeom prst="rect">
             <a:avLst/>
@@ -45056,7 +47071,7 @@
               </a:lnSpc>
             </a:pPr>
             <a:r>
-              <a:rPr sz="720" b="0">
+              <a:rPr sz="880" b="0">
                 <a:solidFill>
                   <a:srgbClr val="5B616B"/>
                 </a:solidFill>
@@ -45064,21 +47079,21 @@
                 <a:ea typeface="微软雅黑"/>
                 <a:cs typeface="微软雅黑"/>
               </a:rPr>
-              <a:t>4,173,129</a:t>
-            </a:r>
-          </a:p>
-        </p:txBody>
-      </p:sp>
-      <p:sp>
-        <p:nvSpPr>
-          <p:cNvPr id="95" name="TextBox 94"/>
-          <p:cNvSpPr txBox="1"/>
-          <p:nvPr/>
-        </p:nvSpPr>
-        <p:spPr>
-          <a:xfrm>
-            <a:off x="621792" y="5506974"/>
-            <a:ext cx="3291840" cy="61721"/>
+              <a:t>483,692</a:t>
+            </a:r>
+          </a:p>
+        </p:txBody>
+      </p:sp>
+      <p:sp>
+        <p:nvSpPr>
+          <p:cNvPr id="145" name="TextBox 144"/>
+          <p:cNvSpPr txBox="1"/>
+          <p:nvPr/>
+        </p:nvSpPr>
+        <p:spPr>
+          <a:xfrm>
+            <a:off x="8436864" y="5424678"/>
+            <a:ext cx="3230880" cy="68580"/>
           </a:xfrm>
           <a:prstGeom prst="rect">
             <a:avLst/>
@@ -45097,7 +47112,7 @@
               </a:lnSpc>
             </a:pPr>
             <a:r>
-              <a:rPr sz="620" b="0">
+              <a:rPr sz="800" b="0">
                 <a:solidFill>
                   <a:srgbClr val="5B616B"/>
                 </a:solidFill>
@@ -45105,21 +47120,21 @@
                 <a:ea typeface="微软雅黑"/>
                 <a:cs typeface="微软雅黑"/>
               </a:rPr>
-              <a:t>user_814dbe54</a:t>
-            </a:r>
-          </a:p>
-        </p:txBody>
-      </p:sp>
-      <p:sp>
-        <p:nvSpPr>
-          <p:cNvPr id="96" name="TextBox 95"/>
-          <p:cNvSpPr txBox="1"/>
-          <p:nvPr/>
-        </p:nvSpPr>
-        <p:spPr>
-          <a:xfrm>
-            <a:off x="426720" y="5575554"/>
-            <a:ext cx="170688" cy="75438"/>
+              <a:t>fly0pants</a:t>
+            </a:r>
+          </a:p>
+        </p:txBody>
+      </p:sp>
+      <p:sp>
+        <p:nvSpPr>
+          <p:cNvPr id="146" name="TextBox 145"/>
+          <p:cNvSpPr txBox="1"/>
+          <p:nvPr/>
+        </p:nvSpPr>
+        <p:spPr>
+          <a:xfrm>
+            <a:off x="426720" y="5911596"/>
+            <a:ext cx="11338560" cy="137160"/>
           </a:xfrm>
           <a:prstGeom prst="rect">
             <a:avLst/>
@@ -45138,89 +47153,7 @@
               </a:lnSpc>
             </a:pPr>
             <a:r>
-              <a:rPr sz="740" b="1">
-                <a:solidFill>
-                  <a:srgbClr val="B5333B"/>
-                </a:solidFill>
-                <a:latin typeface="微软雅黑"/>
-                <a:ea typeface="微软雅黑"/>
-                <a:cs typeface="微软雅黑"/>
-              </a:rPr>
-              <a:t>6</a:t>
-            </a:r>
-          </a:p>
-        </p:txBody>
-      </p:sp>
-      <p:sp>
-        <p:nvSpPr>
-          <p:cNvPr id="97" name="TextBox 96"/>
-          <p:cNvSpPr txBox="1"/>
-          <p:nvPr/>
-        </p:nvSpPr>
-        <p:spPr>
-          <a:xfrm>
-            <a:off x="621792" y="5575554"/>
-            <a:ext cx="2621280" cy="75438"/>
-          </a:xfrm>
-          <a:prstGeom prst="rect">
-            <a:avLst/>
-          </a:prstGeom>
-          <a:noFill/>
-        </p:spPr>
-        <p:txBody>
-          <a:bodyPr wrap="square" lIns="0" rIns="0" tIns="0" bIns="0" anchor="t">
-            <a:spAutoFit/>
-          </a:bodyPr>
-          <a:lstStyle/>
-          <a:p>
-            <a:pPr algn="l">
-              <a:lnSpc>
-                <a:spcPct val="100000"/>
-              </a:lnSpc>
-            </a:pPr>
-            <a:r>
-              <a:rPr sz="720" b="1">
-                <a:solidFill>
-                  <a:srgbClr val="1A1A1C"/>
-                </a:solidFill>
-                <a:latin typeface="微软雅黑"/>
-                <a:ea typeface="微软雅黑"/>
-                <a:cs typeface="微软雅黑"/>
-              </a:rPr>
-              <a:t>育儿大师.Skill</a:t>
-            </a:r>
-          </a:p>
-        </p:txBody>
-      </p:sp>
-      <p:sp>
-        <p:nvSpPr>
-          <p:cNvPr id="98" name="TextBox 97"/>
-          <p:cNvSpPr txBox="1"/>
-          <p:nvPr/>
-        </p:nvSpPr>
-        <p:spPr>
-          <a:xfrm>
-            <a:off x="3328416" y="5575554"/>
-            <a:ext cx="609600" cy="75438"/>
-          </a:xfrm>
-          <a:prstGeom prst="rect">
-            <a:avLst/>
-          </a:prstGeom>
-          <a:noFill/>
-        </p:spPr>
-        <p:txBody>
-          <a:bodyPr wrap="square" lIns="0" rIns="0" tIns="0" bIns="0" anchor="t">
-            <a:spAutoFit/>
-          </a:bodyPr>
-          <a:lstStyle/>
-          <a:p>
-            <a:pPr algn="r">
-              <a:lnSpc>
-                <a:spcPct val="100000"/>
-              </a:lnSpc>
-            </a:pPr>
-            <a:r>
-              <a:rPr sz="720" b="0">
+              <a:rPr sz="850" b="0">
                 <a:solidFill>
                   <a:srgbClr val="5B616B"/>
                 </a:solidFill>
@@ -45228,2227 +47161,7 @@
                 <a:ea typeface="微软雅黑"/>
                 <a:cs typeface="微软雅黑"/>
               </a:rPr>
-              <a:t>2,508,248</a:t>
-            </a:r>
-          </a:p>
-        </p:txBody>
-      </p:sp>
-      <p:sp>
-        <p:nvSpPr>
-          <p:cNvPr id="99" name="TextBox 98"/>
-          <p:cNvSpPr txBox="1"/>
-          <p:nvPr/>
-        </p:nvSpPr>
-        <p:spPr>
-          <a:xfrm>
-            <a:off x="621792" y="5678424"/>
-            <a:ext cx="3291840" cy="61721"/>
-          </a:xfrm>
-          <a:prstGeom prst="rect">
-            <a:avLst/>
-          </a:prstGeom>
-          <a:noFill/>
-        </p:spPr>
-        <p:txBody>
-          <a:bodyPr wrap="square" lIns="0" rIns="0" tIns="0" bIns="0" anchor="t">
-            <a:spAutoFit/>
-          </a:bodyPr>
-          <a:lstStyle/>
-          <a:p>
-            <a:pPr algn="l">
-              <a:lnSpc>
-                <a:spcPct val="100000"/>
-              </a:lnSpc>
-            </a:pPr>
-            <a:r>
-              <a:rPr sz="620" b="0">
-                <a:solidFill>
-                  <a:srgbClr val="5B616B"/>
-                </a:solidFill>
-                <a:latin typeface="微软雅黑"/>
-                <a:ea typeface="微软雅黑"/>
-                <a:cs typeface="微软雅黑"/>
-              </a:rPr>
-              <a:t>user_741dc82b</a:t>
-            </a:r>
-          </a:p>
-        </p:txBody>
-      </p:sp>
-      <p:sp>
-        <p:nvSpPr>
-          <p:cNvPr id="100" name="TextBox 99"/>
-          <p:cNvSpPr txBox="1"/>
-          <p:nvPr/>
-        </p:nvSpPr>
-        <p:spPr>
-          <a:xfrm>
-            <a:off x="4328160" y="4594860"/>
-            <a:ext cx="3535679" cy="96012"/>
-          </a:xfrm>
-          <a:prstGeom prst="rect">
-            <a:avLst/>
-          </a:prstGeom>
-          <a:noFill/>
-        </p:spPr>
-        <p:txBody>
-          <a:bodyPr wrap="square" lIns="0" rIns="0" tIns="0" bIns="0" anchor="t">
-            <a:spAutoFit/>
-          </a:bodyPr>
-          <a:lstStyle/>
-          <a:p>
-            <a:pPr algn="l">
-              <a:lnSpc>
-                <a:spcPct val="100000"/>
-              </a:lnSpc>
-            </a:pPr>
-            <a:r>
-              <a:rPr sz="860" b="1">
-                <a:solidFill>
-                  <a:srgbClr val="D98A8F"/>
-                </a:solidFill>
-                <a:latin typeface="微软雅黑"/>
-                <a:ea typeface="微软雅黑"/>
-                <a:cs typeface="微软雅黑"/>
-              </a:rPr>
-              <a:t>Payskill Top6</a:t>
-            </a:r>
-          </a:p>
-        </p:txBody>
-      </p:sp>
-      <p:sp>
-        <p:nvSpPr>
-          <p:cNvPr id="101" name="Rectangle 100"/>
-          <p:cNvSpPr/>
-          <p:nvPr/>
-        </p:nvSpPr>
-        <p:spPr>
-          <a:xfrm>
-            <a:off x="4328160" y="4690872"/>
-            <a:ext cx="3535679" cy="5486"/>
-          </a:xfrm>
-          <a:prstGeom prst="rect">
-            <a:avLst/>
-          </a:prstGeom>
-          <a:solidFill>
-            <a:srgbClr val="E2E4E7"/>
-          </a:solidFill>
-          <a:ln>
-            <a:noFill/>
-          </a:ln>
-          <a:effectLst/>
-        </p:spPr>
-        <p:style>
-          <a:lnRef idx="1">
-            <a:schemeClr val="accent1"/>
-          </a:lnRef>
-          <a:fillRef idx="3">
-            <a:schemeClr val="accent1"/>
-          </a:fillRef>
-          <a:effectRef idx="2">
-            <a:schemeClr val="accent1"/>
-          </a:effectRef>
-          <a:fontRef idx="minor">
-            <a:schemeClr val="lt1"/>
-          </a:fontRef>
-        </p:style>
-        <p:txBody>
-          <a:bodyPr rtlCol="0" anchor="ctr"/>
-          <a:lstStyle/>
-          <a:p>
-            <a:pPr algn="ctr"/>
-          </a:p>
-        </p:txBody>
-      </p:sp>
-      <p:sp>
-        <p:nvSpPr>
-          <p:cNvPr id="102" name="TextBox 101"/>
-          <p:cNvSpPr txBox="1"/>
-          <p:nvPr/>
-        </p:nvSpPr>
-        <p:spPr>
-          <a:xfrm>
-            <a:off x="4328160" y="4718304"/>
-            <a:ext cx="170688" cy="75438"/>
-          </a:xfrm>
-          <a:prstGeom prst="rect">
-            <a:avLst/>
-          </a:prstGeom>
-          <a:noFill/>
-        </p:spPr>
-        <p:txBody>
-          <a:bodyPr wrap="square" lIns="0" rIns="0" tIns="0" bIns="0" anchor="t">
-            <a:spAutoFit/>
-          </a:bodyPr>
-          <a:lstStyle/>
-          <a:p>
-            <a:pPr algn="l">
-              <a:lnSpc>
-                <a:spcPct val="100000"/>
-              </a:lnSpc>
-            </a:pPr>
-            <a:r>
-              <a:rPr sz="740" b="1">
-                <a:solidFill>
-                  <a:srgbClr val="B5333B"/>
-                </a:solidFill>
-                <a:latin typeface="微软雅黑"/>
-                <a:ea typeface="微软雅黑"/>
-                <a:cs typeface="微软雅黑"/>
-              </a:rPr>
-              <a:t>1</a:t>
-            </a:r>
-          </a:p>
-        </p:txBody>
-      </p:sp>
-      <p:sp>
-        <p:nvSpPr>
-          <p:cNvPr id="103" name="TextBox 102"/>
-          <p:cNvSpPr txBox="1"/>
-          <p:nvPr/>
-        </p:nvSpPr>
-        <p:spPr>
-          <a:xfrm>
-            <a:off x="4523232" y="4718304"/>
-            <a:ext cx="2621280" cy="75438"/>
-          </a:xfrm>
-          <a:prstGeom prst="rect">
-            <a:avLst/>
-          </a:prstGeom>
-          <a:noFill/>
-        </p:spPr>
-        <p:txBody>
-          <a:bodyPr wrap="square" lIns="0" rIns="0" tIns="0" bIns="0" anchor="t">
-            <a:spAutoFit/>
-          </a:bodyPr>
-          <a:lstStyle/>
-          <a:p>
-            <a:pPr algn="l">
-              <a:lnSpc>
-                <a:spcPct val="100000"/>
-              </a:lnSpc>
-            </a:pPr>
-            <a:r>
-              <a:rPr sz="720" b="1">
-                <a:solidFill>
-                  <a:srgbClr val="1A1A1C"/>
-                </a:solidFill>
-                <a:latin typeface="微软雅黑"/>
-                <a:ea typeface="微软雅黑"/>
-                <a:cs typeface="微软雅黑"/>
-              </a:rPr>
-              <a:t>WPS全家桶·办公管家.Skill</a:t>
-            </a:r>
-          </a:p>
-        </p:txBody>
-      </p:sp>
-      <p:sp>
-        <p:nvSpPr>
-          <p:cNvPr id="104" name="TextBox 103"/>
-          <p:cNvSpPr txBox="1"/>
-          <p:nvPr/>
-        </p:nvSpPr>
-        <p:spPr>
-          <a:xfrm>
-            <a:off x="7229856" y="4718304"/>
-            <a:ext cx="609600" cy="75438"/>
-          </a:xfrm>
-          <a:prstGeom prst="rect">
-            <a:avLst/>
-          </a:prstGeom>
-          <a:noFill/>
-        </p:spPr>
-        <p:txBody>
-          <a:bodyPr wrap="square" lIns="0" rIns="0" tIns="0" bIns="0" anchor="t">
-            <a:spAutoFit/>
-          </a:bodyPr>
-          <a:lstStyle/>
-          <a:p>
-            <a:pPr algn="r">
-              <a:lnSpc>
-                <a:spcPct val="100000"/>
-              </a:lnSpc>
-            </a:pPr>
-            <a:r>
-              <a:rPr sz="720" b="0">
-                <a:solidFill>
-                  <a:srgbClr val="5B616B"/>
-                </a:solidFill>
-                <a:latin typeface="微软雅黑"/>
-                <a:ea typeface="微软雅黑"/>
-                <a:cs typeface="微软雅黑"/>
-              </a:rPr>
-              <a:t>190,264</a:t>
-            </a:r>
-          </a:p>
-        </p:txBody>
-      </p:sp>
-      <p:sp>
-        <p:nvSpPr>
-          <p:cNvPr id="105" name="TextBox 104"/>
-          <p:cNvSpPr txBox="1"/>
-          <p:nvPr/>
-        </p:nvSpPr>
-        <p:spPr>
-          <a:xfrm>
-            <a:off x="4523232" y="4821174"/>
-            <a:ext cx="3291840" cy="61721"/>
-          </a:xfrm>
-          <a:prstGeom prst="rect">
-            <a:avLst/>
-          </a:prstGeom>
-          <a:noFill/>
-        </p:spPr>
-        <p:txBody>
-          <a:bodyPr wrap="square" lIns="0" rIns="0" tIns="0" bIns="0" anchor="t">
-            <a:spAutoFit/>
-          </a:bodyPr>
-          <a:lstStyle/>
-          <a:p>
-            <a:pPr algn="l">
-              <a:lnSpc>
-                <a:spcPct val="100000"/>
-              </a:lnSpc>
-            </a:pPr>
-            <a:r>
-              <a:rPr sz="620" b="0">
-                <a:solidFill>
-                  <a:srgbClr val="5B616B"/>
-                </a:solidFill>
-                <a:latin typeface="微软雅黑"/>
-                <a:ea typeface="微软雅黑"/>
-                <a:cs typeface="微软雅黑"/>
-              </a:rPr>
-              <a:t>user_185644ed</a:t>
-            </a:r>
-          </a:p>
-        </p:txBody>
-      </p:sp>
-      <p:sp>
-        <p:nvSpPr>
-          <p:cNvPr id="106" name="TextBox 105"/>
-          <p:cNvSpPr txBox="1"/>
-          <p:nvPr/>
-        </p:nvSpPr>
-        <p:spPr>
-          <a:xfrm>
-            <a:off x="4328160" y="4889754"/>
-            <a:ext cx="170688" cy="75438"/>
-          </a:xfrm>
-          <a:prstGeom prst="rect">
-            <a:avLst/>
-          </a:prstGeom>
-          <a:noFill/>
-        </p:spPr>
-        <p:txBody>
-          <a:bodyPr wrap="square" lIns="0" rIns="0" tIns="0" bIns="0" anchor="t">
-            <a:spAutoFit/>
-          </a:bodyPr>
-          <a:lstStyle/>
-          <a:p>
-            <a:pPr algn="l">
-              <a:lnSpc>
-                <a:spcPct val="100000"/>
-              </a:lnSpc>
-            </a:pPr>
-            <a:r>
-              <a:rPr sz="740" b="1">
-                <a:solidFill>
-                  <a:srgbClr val="B5333B"/>
-                </a:solidFill>
-                <a:latin typeface="微软雅黑"/>
-                <a:ea typeface="微软雅黑"/>
-                <a:cs typeface="微软雅黑"/>
-              </a:rPr>
-              <a:t>2</a:t>
-            </a:r>
-          </a:p>
-        </p:txBody>
-      </p:sp>
-      <p:sp>
-        <p:nvSpPr>
-          <p:cNvPr id="107" name="TextBox 106"/>
-          <p:cNvSpPr txBox="1"/>
-          <p:nvPr/>
-        </p:nvSpPr>
-        <p:spPr>
-          <a:xfrm>
-            <a:off x="4523232" y="4889754"/>
-            <a:ext cx="2621280" cy="75438"/>
-          </a:xfrm>
-          <a:prstGeom prst="rect">
-            <a:avLst/>
-          </a:prstGeom>
-          <a:noFill/>
-        </p:spPr>
-        <p:txBody>
-          <a:bodyPr wrap="square" lIns="0" rIns="0" tIns="0" bIns="0" anchor="t">
-            <a:spAutoFit/>
-          </a:bodyPr>
-          <a:lstStyle/>
-          <a:p>
-            <a:pPr algn="l">
-              <a:lnSpc>
-                <a:spcPct val="100000"/>
-              </a:lnSpc>
-            </a:pPr>
-            <a:r>
-              <a:rPr sz="720" b="1">
-                <a:solidFill>
-                  <a:srgbClr val="1A1A1C"/>
-                </a:solidFill>
-                <a:latin typeface="微软雅黑"/>
-                <a:ea typeface="微软雅黑"/>
-                <a:cs typeface="微软雅黑"/>
-              </a:rPr>
-              <a:t>招标文件解读【喜鹊标书】</a:t>
-            </a:r>
-          </a:p>
-        </p:txBody>
-      </p:sp>
-      <p:sp>
-        <p:nvSpPr>
-          <p:cNvPr id="108" name="TextBox 107"/>
-          <p:cNvSpPr txBox="1"/>
-          <p:nvPr/>
-        </p:nvSpPr>
-        <p:spPr>
-          <a:xfrm>
-            <a:off x="7229856" y="4889754"/>
-            <a:ext cx="609600" cy="75438"/>
-          </a:xfrm>
-          <a:prstGeom prst="rect">
-            <a:avLst/>
-          </a:prstGeom>
-          <a:noFill/>
-        </p:spPr>
-        <p:txBody>
-          <a:bodyPr wrap="square" lIns="0" rIns="0" tIns="0" bIns="0" anchor="t">
-            <a:spAutoFit/>
-          </a:bodyPr>
-          <a:lstStyle/>
-          <a:p>
-            <a:pPr algn="r">
-              <a:lnSpc>
-                <a:spcPct val="100000"/>
-              </a:lnSpc>
-            </a:pPr>
-            <a:r>
-              <a:rPr sz="720" b="0">
-                <a:solidFill>
-                  <a:srgbClr val="5B616B"/>
-                </a:solidFill>
-                <a:latin typeface="微软雅黑"/>
-                <a:ea typeface="微软雅黑"/>
-                <a:cs typeface="微软雅黑"/>
-              </a:rPr>
-              <a:t>169,094</a:t>
-            </a:r>
-          </a:p>
-        </p:txBody>
-      </p:sp>
-      <p:sp>
-        <p:nvSpPr>
-          <p:cNvPr id="109" name="TextBox 108"/>
-          <p:cNvSpPr txBox="1"/>
-          <p:nvPr/>
-        </p:nvSpPr>
-        <p:spPr>
-          <a:xfrm>
-            <a:off x="4523232" y="4992624"/>
-            <a:ext cx="3291840" cy="61721"/>
-          </a:xfrm>
-          <a:prstGeom prst="rect">
-            <a:avLst/>
-          </a:prstGeom>
-          <a:noFill/>
-        </p:spPr>
-        <p:txBody>
-          <a:bodyPr wrap="square" lIns="0" rIns="0" tIns="0" bIns="0" anchor="t">
-            <a:spAutoFit/>
-          </a:bodyPr>
-          <a:lstStyle/>
-          <a:p>
-            <a:pPr algn="l">
-              <a:lnSpc>
-                <a:spcPct val="100000"/>
-              </a:lnSpc>
-            </a:pPr>
-            <a:r>
-              <a:rPr sz="620" b="0">
-                <a:solidFill>
-                  <a:srgbClr val="5B616B"/>
-                </a:solidFill>
-                <a:latin typeface="微软雅黑"/>
-                <a:ea typeface="微软雅黑"/>
-                <a:cs typeface="微软雅黑"/>
-              </a:rPr>
-              <a:t>喜鹊AI</a:t>
-            </a:r>
-          </a:p>
-        </p:txBody>
-      </p:sp>
-      <p:sp>
-        <p:nvSpPr>
-          <p:cNvPr id="110" name="TextBox 109"/>
-          <p:cNvSpPr txBox="1"/>
-          <p:nvPr/>
-        </p:nvSpPr>
-        <p:spPr>
-          <a:xfrm>
-            <a:off x="4328160" y="5061204"/>
-            <a:ext cx="170688" cy="75438"/>
-          </a:xfrm>
-          <a:prstGeom prst="rect">
-            <a:avLst/>
-          </a:prstGeom>
-          <a:noFill/>
-        </p:spPr>
-        <p:txBody>
-          <a:bodyPr wrap="square" lIns="0" rIns="0" tIns="0" bIns="0" anchor="t">
-            <a:spAutoFit/>
-          </a:bodyPr>
-          <a:lstStyle/>
-          <a:p>
-            <a:pPr algn="l">
-              <a:lnSpc>
-                <a:spcPct val="100000"/>
-              </a:lnSpc>
-            </a:pPr>
-            <a:r>
-              <a:rPr sz="740" b="1">
-                <a:solidFill>
-                  <a:srgbClr val="B5333B"/>
-                </a:solidFill>
-                <a:latin typeface="微软雅黑"/>
-                <a:ea typeface="微软雅黑"/>
-                <a:cs typeface="微软雅黑"/>
-              </a:rPr>
-              <a:t>3</a:t>
-            </a:r>
-          </a:p>
-        </p:txBody>
-      </p:sp>
-      <p:sp>
-        <p:nvSpPr>
-          <p:cNvPr id="111" name="TextBox 110"/>
-          <p:cNvSpPr txBox="1"/>
-          <p:nvPr/>
-        </p:nvSpPr>
-        <p:spPr>
-          <a:xfrm>
-            <a:off x="4523232" y="5061204"/>
-            <a:ext cx="2621280" cy="75438"/>
-          </a:xfrm>
-          <a:prstGeom prst="rect">
-            <a:avLst/>
-          </a:prstGeom>
-          <a:noFill/>
-        </p:spPr>
-        <p:txBody>
-          <a:bodyPr wrap="square" lIns="0" rIns="0" tIns="0" bIns="0" anchor="t">
-            <a:spAutoFit/>
-          </a:bodyPr>
-          <a:lstStyle/>
-          <a:p>
-            <a:pPr algn="l">
-              <a:lnSpc>
-                <a:spcPct val="100000"/>
-              </a:lnSpc>
-            </a:pPr>
-            <a:r>
-              <a:rPr sz="720" b="1">
-                <a:solidFill>
-                  <a:srgbClr val="1A1A1C"/>
-                </a:solidFill>
-                <a:latin typeface="微软雅黑"/>
-                <a:ea typeface="微软雅黑"/>
-                <a:cs typeface="微软雅黑"/>
-              </a:rPr>
-              <a:t>办公文档三件套（Word/Excel/PDF）</a:t>
-            </a:r>
-          </a:p>
-        </p:txBody>
-      </p:sp>
-      <p:sp>
-        <p:nvSpPr>
-          <p:cNvPr id="112" name="TextBox 111"/>
-          <p:cNvSpPr txBox="1"/>
-          <p:nvPr/>
-        </p:nvSpPr>
-        <p:spPr>
-          <a:xfrm>
-            <a:off x="7229856" y="5061204"/>
-            <a:ext cx="609600" cy="75438"/>
-          </a:xfrm>
-          <a:prstGeom prst="rect">
-            <a:avLst/>
-          </a:prstGeom>
-          <a:noFill/>
-        </p:spPr>
-        <p:txBody>
-          <a:bodyPr wrap="square" lIns="0" rIns="0" tIns="0" bIns="0" anchor="t">
-            <a:spAutoFit/>
-          </a:bodyPr>
-          <a:lstStyle/>
-          <a:p>
-            <a:pPr algn="r">
-              <a:lnSpc>
-                <a:spcPct val="100000"/>
-              </a:lnSpc>
-            </a:pPr>
-            <a:r>
-              <a:rPr sz="720" b="0">
-                <a:solidFill>
-                  <a:srgbClr val="5B616B"/>
-                </a:solidFill>
-                <a:latin typeface="微软雅黑"/>
-                <a:ea typeface="微软雅黑"/>
-                <a:cs typeface="微软雅黑"/>
-              </a:rPr>
-              <a:t>135,227</a:t>
-            </a:r>
-          </a:p>
-        </p:txBody>
-      </p:sp>
-      <p:sp>
-        <p:nvSpPr>
-          <p:cNvPr id="113" name="TextBox 112"/>
-          <p:cNvSpPr txBox="1"/>
-          <p:nvPr/>
-        </p:nvSpPr>
-        <p:spPr>
-          <a:xfrm>
-            <a:off x="4523232" y="5164074"/>
-            <a:ext cx="3291840" cy="61721"/>
-          </a:xfrm>
-          <a:prstGeom prst="rect">
-            <a:avLst/>
-          </a:prstGeom>
-          <a:noFill/>
-        </p:spPr>
-        <p:txBody>
-          <a:bodyPr wrap="square" lIns="0" rIns="0" tIns="0" bIns="0" anchor="t">
-            <a:spAutoFit/>
-          </a:bodyPr>
-          <a:lstStyle/>
-          <a:p>
-            <a:pPr algn="l">
-              <a:lnSpc>
-                <a:spcPct val="100000"/>
-              </a:lnSpc>
-            </a:pPr>
-            <a:r>
-              <a:rPr sz="620" b="0">
-                <a:solidFill>
-                  <a:srgbClr val="5B616B"/>
-                </a:solidFill>
-                <a:latin typeface="微软雅黑"/>
-                <a:ea typeface="微软雅黑"/>
-                <a:cs typeface="微软雅黑"/>
-              </a:rPr>
-              <a:t>user_69794d19</a:t>
-            </a:r>
-          </a:p>
-        </p:txBody>
-      </p:sp>
-      <p:sp>
-        <p:nvSpPr>
-          <p:cNvPr id="114" name="TextBox 113"/>
-          <p:cNvSpPr txBox="1"/>
-          <p:nvPr/>
-        </p:nvSpPr>
-        <p:spPr>
-          <a:xfrm>
-            <a:off x="4328160" y="5232653"/>
-            <a:ext cx="170688" cy="75438"/>
-          </a:xfrm>
-          <a:prstGeom prst="rect">
-            <a:avLst/>
-          </a:prstGeom>
-          <a:noFill/>
-        </p:spPr>
-        <p:txBody>
-          <a:bodyPr wrap="square" lIns="0" rIns="0" tIns="0" bIns="0" anchor="t">
-            <a:spAutoFit/>
-          </a:bodyPr>
-          <a:lstStyle/>
-          <a:p>
-            <a:pPr algn="l">
-              <a:lnSpc>
-                <a:spcPct val="100000"/>
-              </a:lnSpc>
-            </a:pPr>
-            <a:r>
-              <a:rPr sz="740" b="1">
-                <a:solidFill>
-                  <a:srgbClr val="B5333B"/>
-                </a:solidFill>
-                <a:latin typeface="微软雅黑"/>
-                <a:ea typeface="微软雅黑"/>
-                <a:cs typeface="微软雅黑"/>
-              </a:rPr>
-              <a:t>4</a:t>
-            </a:r>
-          </a:p>
-        </p:txBody>
-      </p:sp>
-      <p:sp>
-        <p:nvSpPr>
-          <p:cNvPr id="115" name="TextBox 114"/>
-          <p:cNvSpPr txBox="1"/>
-          <p:nvPr/>
-        </p:nvSpPr>
-        <p:spPr>
-          <a:xfrm>
-            <a:off x="4523232" y="5232653"/>
-            <a:ext cx="2621280" cy="75438"/>
-          </a:xfrm>
-          <a:prstGeom prst="rect">
-            <a:avLst/>
-          </a:prstGeom>
-          <a:noFill/>
-        </p:spPr>
-        <p:txBody>
-          <a:bodyPr wrap="square" lIns="0" rIns="0" tIns="0" bIns="0" anchor="t">
-            <a:spAutoFit/>
-          </a:bodyPr>
-          <a:lstStyle/>
-          <a:p>
-            <a:pPr algn="l">
-              <a:lnSpc>
-                <a:spcPct val="100000"/>
-              </a:lnSpc>
-            </a:pPr>
-            <a:r>
-              <a:rPr sz="720" b="1">
-                <a:solidFill>
-                  <a:srgbClr val="1A1A1C"/>
-                </a:solidFill>
-                <a:latin typeface="微软雅黑"/>
-                <a:ea typeface="微软雅黑"/>
-                <a:cs typeface="微软雅黑"/>
-              </a:rPr>
-              <a:t>知了标讯 · 全网招中标数据查询</a:t>
-            </a:r>
-          </a:p>
-        </p:txBody>
-      </p:sp>
-      <p:sp>
-        <p:nvSpPr>
-          <p:cNvPr id="116" name="TextBox 115"/>
-          <p:cNvSpPr txBox="1"/>
-          <p:nvPr/>
-        </p:nvSpPr>
-        <p:spPr>
-          <a:xfrm>
-            <a:off x="7229856" y="5232653"/>
-            <a:ext cx="609600" cy="75438"/>
-          </a:xfrm>
-          <a:prstGeom prst="rect">
-            <a:avLst/>
-          </a:prstGeom>
-          <a:noFill/>
-        </p:spPr>
-        <p:txBody>
-          <a:bodyPr wrap="square" lIns="0" rIns="0" tIns="0" bIns="0" anchor="t">
-            <a:spAutoFit/>
-          </a:bodyPr>
-          <a:lstStyle/>
-          <a:p>
-            <a:pPr algn="r">
-              <a:lnSpc>
-                <a:spcPct val="100000"/>
-              </a:lnSpc>
-            </a:pPr>
-            <a:r>
-              <a:rPr sz="720" b="0">
-                <a:solidFill>
-                  <a:srgbClr val="5B616B"/>
-                </a:solidFill>
-                <a:latin typeface="微软雅黑"/>
-                <a:ea typeface="微软雅黑"/>
-                <a:cs typeface="微软雅黑"/>
-              </a:rPr>
-              <a:t>82,636</a:t>
-            </a:r>
-          </a:p>
-        </p:txBody>
-      </p:sp>
-      <p:sp>
-        <p:nvSpPr>
-          <p:cNvPr id="117" name="TextBox 116"/>
-          <p:cNvSpPr txBox="1"/>
-          <p:nvPr/>
-        </p:nvSpPr>
-        <p:spPr>
-          <a:xfrm>
-            <a:off x="4523232" y="5335523"/>
-            <a:ext cx="3291840" cy="61721"/>
-          </a:xfrm>
-          <a:prstGeom prst="rect">
-            <a:avLst/>
-          </a:prstGeom>
-          <a:noFill/>
-        </p:spPr>
-        <p:txBody>
-          <a:bodyPr wrap="square" lIns="0" rIns="0" tIns="0" bIns="0" anchor="t">
-            <a:spAutoFit/>
-          </a:bodyPr>
-          <a:lstStyle/>
-          <a:p>
-            <a:pPr algn="l">
-              <a:lnSpc>
-                <a:spcPct val="100000"/>
-              </a:lnSpc>
-            </a:pPr>
-            <a:r>
-              <a:rPr sz="620" b="0">
-                <a:solidFill>
-                  <a:srgbClr val="5B616B"/>
-                </a:solidFill>
-                <a:latin typeface="微软雅黑"/>
-                <a:ea typeface="微软雅黑"/>
-                <a:cs typeface="微软雅黑"/>
-              </a:rPr>
-              <a:t>知了标讯</a:t>
-            </a:r>
-          </a:p>
-        </p:txBody>
-      </p:sp>
-      <p:sp>
-        <p:nvSpPr>
-          <p:cNvPr id="118" name="TextBox 117"/>
-          <p:cNvSpPr txBox="1"/>
-          <p:nvPr/>
-        </p:nvSpPr>
-        <p:spPr>
-          <a:xfrm>
-            <a:off x="4328160" y="5404103"/>
-            <a:ext cx="170688" cy="75438"/>
-          </a:xfrm>
-          <a:prstGeom prst="rect">
-            <a:avLst/>
-          </a:prstGeom>
-          <a:noFill/>
-        </p:spPr>
-        <p:txBody>
-          <a:bodyPr wrap="square" lIns="0" rIns="0" tIns="0" bIns="0" anchor="t">
-            <a:spAutoFit/>
-          </a:bodyPr>
-          <a:lstStyle/>
-          <a:p>
-            <a:pPr algn="l">
-              <a:lnSpc>
-                <a:spcPct val="100000"/>
-              </a:lnSpc>
-            </a:pPr>
-            <a:r>
-              <a:rPr sz="740" b="1">
-                <a:solidFill>
-                  <a:srgbClr val="B5333B"/>
-                </a:solidFill>
-                <a:latin typeface="微软雅黑"/>
-                <a:ea typeface="微软雅黑"/>
-                <a:cs typeface="微软雅黑"/>
-              </a:rPr>
-              <a:t>5</a:t>
-            </a:r>
-          </a:p>
-        </p:txBody>
-      </p:sp>
-      <p:sp>
-        <p:nvSpPr>
-          <p:cNvPr id="119" name="TextBox 118"/>
-          <p:cNvSpPr txBox="1"/>
-          <p:nvPr/>
-        </p:nvSpPr>
-        <p:spPr>
-          <a:xfrm>
-            <a:off x="4523232" y="5404103"/>
-            <a:ext cx="2621280" cy="75438"/>
-          </a:xfrm>
-          <a:prstGeom prst="rect">
-            <a:avLst/>
-          </a:prstGeom>
-          <a:noFill/>
-        </p:spPr>
-        <p:txBody>
-          <a:bodyPr wrap="square" lIns="0" rIns="0" tIns="0" bIns="0" anchor="t">
-            <a:spAutoFit/>
-          </a:bodyPr>
-          <a:lstStyle/>
-          <a:p>
-            <a:pPr algn="l">
-              <a:lnSpc>
-                <a:spcPct val="100000"/>
-              </a:lnSpc>
-            </a:pPr>
-            <a:r>
-              <a:rPr sz="720" b="1">
-                <a:solidFill>
-                  <a:srgbClr val="1A1A1C"/>
-                </a:solidFill>
-                <a:latin typeface="微软雅黑"/>
-                <a:ea typeface="微软雅黑"/>
-                <a:cs typeface="微软雅黑"/>
-              </a:rPr>
-              <a:t>标书审查【喜鹊标书】</a:t>
-            </a:r>
-          </a:p>
-        </p:txBody>
-      </p:sp>
-      <p:sp>
-        <p:nvSpPr>
-          <p:cNvPr id="120" name="TextBox 119"/>
-          <p:cNvSpPr txBox="1"/>
-          <p:nvPr/>
-        </p:nvSpPr>
-        <p:spPr>
-          <a:xfrm>
-            <a:off x="7229856" y="5404103"/>
-            <a:ext cx="609600" cy="75438"/>
-          </a:xfrm>
-          <a:prstGeom prst="rect">
-            <a:avLst/>
-          </a:prstGeom>
-          <a:noFill/>
-        </p:spPr>
-        <p:txBody>
-          <a:bodyPr wrap="square" lIns="0" rIns="0" tIns="0" bIns="0" anchor="t">
-            <a:spAutoFit/>
-          </a:bodyPr>
-          <a:lstStyle/>
-          <a:p>
-            <a:pPr algn="r">
-              <a:lnSpc>
-                <a:spcPct val="100000"/>
-              </a:lnSpc>
-            </a:pPr>
-            <a:r>
-              <a:rPr sz="720" b="0">
-                <a:solidFill>
-                  <a:srgbClr val="5B616B"/>
-                </a:solidFill>
-                <a:latin typeface="微软雅黑"/>
-                <a:ea typeface="微软雅黑"/>
-                <a:cs typeface="微软雅黑"/>
-              </a:rPr>
-              <a:t>80,948</a:t>
-            </a:r>
-          </a:p>
-        </p:txBody>
-      </p:sp>
-      <p:sp>
-        <p:nvSpPr>
-          <p:cNvPr id="121" name="TextBox 120"/>
-          <p:cNvSpPr txBox="1"/>
-          <p:nvPr/>
-        </p:nvSpPr>
-        <p:spPr>
-          <a:xfrm>
-            <a:off x="4523232" y="5506974"/>
-            <a:ext cx="3291840" cy="61721"/>
-          </a:xfrm>
-          <a:prstGeom prst="rect">
-            <a:avLst/>
-          </a:prstGeom>
-          <a:noFill/>
-        </p:spPr>
-        <p:txBody>
-          <a:bodyPr wrap="square" lIns="0" rIns="0" tIns="0" bIns="0" anchor="t">
-            <a:spAutoFit/>
-          </a:bodyPr>
-          <a:lstStyle/>
-          <a:p>
-            <a:pPr algn="l">
-              <a:lnSpc>
-                <a:spcPct val="100000"/>
-              </a:lnSpc>
-            </a:pPr>
-            <a:r>
-              <a:rPr sz="620" b="0">
-                <a:solidFill>
-                  <a:srgbClr val="5B616B"/>
-                </a:solidFill>
-                <a:latin typeface="微软雅黑"/>
-                <a:ea typeface="微软雅黑"/>
-                <a:cs typeface="微软雅黑"/>
-              </a:rPr>
-              <a:t>喜鹊AI</a:t>
-            </a:r>
-          </a:p>
-        </p:txBody>
-      </p:sp>
-      <p:sp>
-        <p:nvSpPr>
-          <p:cNvPr id="122" name="TextBox 121"/>
-          <p:cNvSpPr txBox="1"/>
-          <p:nvPr/>
-        </p:nvSpPr>
-        <p:spPr>
-          <a:xfrm>
-            <a:off x="4328160" y="5575554"/>
-            <a:ext cx="170688" cy="75438"/>
-          </a:xfrm>
-          <a:prstGeom prst="rect">
-            <a:avLst/>
-          </a:prstGeom>
-          <a:noFill/>
-        </p:spPr>
-        <p:txBody>
-          <a:bodyPr wrap="square" lIns="0" rIns="0" tIns="0" bIns="0" anchor="t">
-            <a:spAutoFit/>
-          </a:bodyPr>
-          <a:lstStyle/>
-          <a:p>
-            <a:pPr algn="l">
-              <a:lnSpc>
-                <a:spcPct val="100000"/>
-              </a:lnSpc>
-            </a:pPr>
-            <a:r>
-              <a:rPr sz="740" b="1">
-                <a:solidFill>
-                  <a:srgbClr val="B5333B"/>
-                </a:solidFill>
-                <a:latin typeface="微软雅黑"/>
-                <a:ea typeface="微软雅黑"/>
-                <a:cs typeface="微软雅黑"/>
-              </a:rPr>
-              <a:t>6</a:t>
-            </a:r>
-          </a:p>
-        </p:txBody>
-      </p:sp>
-      <p:sp>
-        <p:nvSpPr>
-          <p:cNvPr id="123" name="TextBox 122"/>
-          <p:cNvSpPr txBox="1"/>
-          <p:nvPr/>
-        </p:nvSpPr>
-        <p:spPr>
-          <a:xfrm>
-            <a:off x="4523232" y="5575554"/>
-            <a:ext cx="2621280" cy="75438"/>
-          </a:xfrm>
-          <a:prstGeom prst="rect">
-            <a:avLst/>
-          </a:prstGeom>
-          <a:noFill/>
-        </p:spPr>
-        <p:txBody>
-          <a:bodyPr wrap="square" lIns="0" rIns="0" tIns="0" bIns="0" anchor="t">
-            <a:spAutoFit/>
-          </a:bodyPr>
-          <a:lstStyle/>
-          <a:p>
-            <a:pPr algn="l">
-              <a:lnSpc>
-                <a:spcPct val="100000"/>
-              </a:lnSpc>
-            </a:pPr>
-            <a:r>
-              <a:rPr sz="720" b="1">
-                <a:solidFill>
-                  <a:srgbClr val="1A1A1C"/>
-                </a:solidFill>
-                <a:latin typeface="微软雅黑"/>
-                <a:ea typeface="微软雅黑"/>
-                <a:cs typeface="微软雅黑"/>
-              </a:rPr>
-              <a:t>浏览器自动化</a:t>
-            </a:r>
-          </a:p>
-        </p:txBody>
-      </p:sp>
-      <p:sp>
-        <p:nvSpPr>
-          <p:cNvPr id="124" name="TextBox 123"/>
-          <p:cNvSpPr txBox="1"/>
-          <p:nvPr/>
-        </p:nvSpPr>
-        <p:spPr>
-          <a:xfrm>
-            <a:off x="7229856" y="5575554"/>
-            <a:ext cx="609600" cy="75438"/>
-          </a:xfrm>
-          <a:prstGeom prst="rect">
-            <a:avLst/>
-          </a:prstGeom>
-          <a:noFill/>
-        </p:spPr>
-        <p:txBody>
-          <a:bodyPr wrap="square" lIns="0" rIns="0" tIns="0" bIns="0" anchor="t">
-            <a:spAutoFit/>
-          </a:bodyPr>
-          <a:lstStyle/>
-          <a:p>
-            <a:pPr algn="r">
-              <a:lnSpc>
-                <a:spcPct val="100000"/>
-              </a:lnSpc>
-            </a:pPr>
-            <a:r>
-              <a:rPr sz="720" b="0">
-                <a:solidFill>
-                  <a:srgbClr val="5B616B"/>
-                </a:solidFill>
-                <a:latin typeface="微软雅黑"/>
-                <a:ea typeface="微软雅黑"/>
-                <a:cs typeface="微软雅黑"/>
-              </a:rPr>
-              <a:t>66,947</a:t>
-            </a:r>
-          </a:p>
-        </p:txBody>
-      </p:sp>
-      <p:sp>
-        <p:nvSpPr>
-          <p:cNvPr id="125" name="TextBox 124"/>
-          <p:cNvSpPr txBox="1"/>
-          <p:nvPr/>
-        </p:nvSpPr>
-        <p:spPr>
-          <a:xfrm>
-            <a:off x="4523232" y="5678424"/>
-            <a:ext cx="3291840" cy="61721"/>
-          </a:xfrm>
-          <a:prstGeom prst="rect">
-            <a:avLst/>
-          </a:prstGeom>
-          <a:noFill/>
-        </p:spPr>
-        <p:txBody>
-          <a:bodyPr wrap="square" lIns="0" rIns="0" tIns="0" bIns="0" anchor="t">
-            <a:spAutoFit/>
-          </a:bodyPr>
-          <a:lstStyle/>
-          <a:p>
-            <a:pPr algn="l">
-              <a:lnSpc>
-                <a:spcPct val="100000"/>
-              </a:lnSpc>
-            </a:pPr>
-            <a:r>
-              <a:rPr sz="620" b="0">
-                <a:solidFill>
-                  <a:srgbClr val="5B616B"/>
-                </a:solidFill>
-                <a:latin typeface="微软雅黑"/>
-                <a:ea typeface="微软雅黑"/>
-                <a:cs typeface="微软雅黑"/>
-              </a:rPr>
-              <a:t>菏泽九有信息科技有限公司</a:t>
-            </a:r>
-          </a:p>
-        </p:txBody>
-      </p:sp>
-      <p:sp>
-        <p:nvSpPr>
-          <p:cNvPr id="126" name="TextBox 125"/>
-          <p:cNvSpPr txBox="1"/>
-          <p:nvPr/>
-        </p:nvSpPr>
-        <p:spPr>
-          <a:xfrm>
-            <a:off x="8229600" y="4594860"/>
-            <a:ext cx="3535679" cy="96012"/>
-          </a:xfrm>
-          <a:prstGeom prst="rect">
-            <a:avLst/>
-          </a:prstGeom>
-          <a:noFill/>
-        </p:spPr>
-        <p:txBody>
-          <a:bodyPr wrap="square" lIns="0" rIns="0" tIns="0" bIns="0" anchor="t">
-            <a:spAutoFit/>
-          </a:bodyPr>
-          <a:lstStyle/>
-          <a:p>
-            <a:pPr algn="l">
-              <a:lnSpc>
-                <a:spcPct val="100000"/>
-              </a:lnSpc>
-            </a:pPr>
-            <a:r>
-              <a:rPr sz="860" b="1">
-                <a:solidFill>
-                  <a:srgbClr val="6B7785"/>
-                </a:solidFill>
-                <a:latin typeface="微软雅黑"/>
-                <a:ea typeface="微软雅黑"/>
-                <a:cs typeface="微软雅黑"/>
-              </a:rPr>
-              <a:t>API Key Top6</a:t>
-            </a:r>
-          </a:p>
-        </p:txBody>
-      </p:sp>
-      <p:sp>
-        <p:nvSpPr>
-          <p:cNvPr id="127" name="Rectangle 126"/>
-          <p:cNvSpPr/>
-          <p:nvPr/>
-        </p:nvSpPr>
-        <p:spPr>
-          <a:xfrm>
-            <a:off x="8229600" y="4690872"/>
-            <a:ext cx="3535679" cy="5486"/>
-          </a:xfrm>
-          <a:prstGeom prst="rect">
-            <a:avLst/>
-          </a:prstGeom>
-          <a:solidFill>
-            <a:srgbClr val="E2E4E7"/>
-          </a:solidFill>
-          <a:ln>
-            <a:noFill/>
-          </a:ln>
-          <a:effectLst/>
-        </p:spPr>
-        <p:style>
-          <a:lnRef idx="1">
-            <a:schemeClr val="accent1"/>
-          </a:lnRef>
-          <a:fillRef idx="3">
-            <a:schemeClr val="accent1"/>
-          </a:fillRef>
-          <a:effectRef idx="2">
-            <a:schemeClr val="accent1"/>
-          </a:effectRef>
-          <a:fontRef idx="minor">
-            <a:schemeClr val="lt1"/>
-          </a:fontRef>
-        </p:style>
-        <p:txBody>
-          <a:bodyPr rtlCol="0" anchor="ctr"/>
-          <a:lstStyle/>
-          <a:p>
-            <a:pPr algn="ctr"/>
-          </a:p>
-        </p:txBody>
-      </p:sp>
-      <p:sp>
-        <p:nvSpPr>
-          <p:cNvPr id="128" name="TextBox 127"/>
-          <p:cNvSpPr txBox="1"/>
-          <p:nvPr/>
-        </p:nvSpPr>
-        <p:spPr>
-          <a:xfrm>
-            <a:off x="8229600" y="4718304"/>
-            <a:ext cx="170688" cy="75438"/>
-          </a:xfrm>
-          <a:prstGeom prst="rect">
-            <a:avLst/>
-          </a:prstGeom>
-          <a:noFill/>
-        </p:spPr>
-        <p:txBody>
-          <a:bodyPr wrap="square" lIns="0" rIns="0" tIns="0" bIns="0" anchor="t">
-            <a:spAutoFit/>
-          </a:bodyPr>
-          <a:lstStyle/>
-          <a:p>
-            <a:pPr algn="l">
-              <a:lnSpc>
-                <a:spcPct val="100000"/>
-              </a:lnSpc>
-            </a:pPr>
-            <a:r>
-              <a:rPr sz="740" b="1">
-                <a:solidFill>
-                  <a:srgbClr val="B5333B"/>
-                </a:solidFill>
-                <a:latin typeface="微软雅黑"/>
-                <a:ea typeface="微软雅黑"/>
-                <a:cs typeface="微软雅黑"/>
-              </a:rPr>
-              <a:t>1</a:t>
-            </a:r>
-          </a:p>
-        </p:txBody>
-      </p:sp>
-      <p:sp>
-        <p:nvSpPr>
-          <p:cNvPr id="129" name="TextBox 128"/>
-          <p:cNvSpPr txBox="1"/>
-          <p:nvPr/>
-        </p:nvSpPr>
-        <p:spPr>
-          <a:xfrm>
-            <a:off x="8424672" y="4718304"/>
-            <a:ext cx="2621280" cy="75438"/>
-          </a:xfrm>
-          <a:prstGeom prst="rect">
-            <a:avLst/>
-          </a:prstGeom>
-          <a:noFill/>
-        </p:spPr>
-        <p:txBody>
-          <a:bodyPr wrap="square" lIns="0" rIns="0" tIns="0" bIns="0" anchor="t">
-            <a:spAutoFit/>
-          </a:bodyPr>
-          <a:lstStyle/>
-          <a:p>
-            <a:pPr algn="l">
-              <a:lnSpc>
-                <a:spcPct val="100000"/>
-              </a:lnSpc>
-            </a:pPr>
-            <a:r>
-              <a:rPr sz="720" b="1">
-                <a:solidFill>
-                  <a:srgbClr val="1A1A1C"/>
-                </a:solidFill>
-                <a:latin typeface="微软雅黑"/>
-                <a:ea typeface="微软雅黑"/>
-                <a:cs typeface="微软雅黑"/>
-              </a:rPr>
-              <a:t>腾讯文档 TENCENT DOCS</a:t>
-            </a:r>
-          </a:p>
-        </p:txBody>
-      </p:sp>
-      <p:sp>
-        <p:nvSpPr>
-          <p:cNvPr id="130" name="TextBox 129"/>
-          <p:cNvSpPr txBox="1"/>
-          <p:nvPr/>
-        </p:nvSpPr>
-        <p:spPr>
-          <a:xfrm>
-            <a:off x="11131296" y="4718304"/>
-            <a:ext cx="609600" cy="75438"/>
-          </a:xfrm>
-          <a:prstGeom prst="rect">
-            <a:avLst/>
-          </a:prstGeom>
-          <a:noFill/>
-        </p:spPr>
-        <p:txBody>
-          <a:bodyPr wrap="square" lIns="0" rIns="0" tIns="0" bIns="0" anchor="t">
-            <a:spAutoFit/>
-          </a:bodyPr>
-          <a:lstStyle/>
-          <a:p>
-            <a:pPr algn="r">
-              <a:lnSpc>
-                <a:spcPct val="100000"/>
-              </a:lnSpc>
-            </a:pPr>
-            <a:r>
-              <a:rPr sz="720" b="0">
-                <a:solidFill>
-                  <a:srgbClr val="5B616B"/>
-                </a:solidFill>
-                <a:latin typeface="微软雅黑"/>
-                <a:ea typeface="微软雅黑"/>
-                <a:cs typeface="微软雅黑"/>
-              </a:rPr>
-              <a:t>1,824,922</a:t>
-            </a:r>
-          </a:p>
-        </p:txBody>
-      </p:sp>
-      <p:sp>
-        <p:nvSpPr>
-          <p:cNvPr id="131" name="TextBox 130"/>
-          <p:cNvSpPr txBox="1"/>
-          <p:nvPr/>
-        </p:nvSpPr>
-        <p:spPr>
-          <a:xfrm>
-            <a:off x="8424672" y="4821174"/>
-            <a:ext cx="3291840" cy="61721"/>
-          </a:xfrm>
-          <a:prstGeom prst="rect">
-            <a:avLst/>
-          </a:prstGeom>
-          <a:noFill/>
-        </p:spPr>
-        <p:txBody>
-          <a:bodyPr wrap="square" lIns="0" rIns="0" tIns="0" bIns="0" anchor="t">
-            <a:spAutoFit/>
-          </a:bodyPr>
-          <a:lstStyle/>
-          <a:p>
-            <a:pPr algn="l">
-              <a:lnSpc>
-                <a:spcPct val="100000"/>
-              </a:lnSpc>
-            </a:pPr>
-            <a:r>
-              <a:rPr sz="620" b="0">
-                <a:solidFill>
-                  <a:srgbClr val="5B616B"/>
-                </a:solidFill>
-                <a:latin typeface="微软雅黑"/>
-                <a:ea typeface="微软雅黑"/>
-                <a:cs typeface="微软雅黑"/>
-              </a:rPr>
-              <a:t>腾讯文档团队</a:t>
-            </a:r>
-          </a:p>
-        </p:txBody>
-      </p:sp>
-      <p:sp>
-        <p:nvSpPr>
-          <p:cNvPr id="132" name="TextBox 131"/>
-          <p:cNvSpPr txBox="1"/>
-          <p:nvPr/>
-        </p:nvSpPr>
-        <p:spPr>
-          <a:xfrm>
-            <a:off x="8229600" y="4889754"/>
-            <a:ext cx="170688" cy="75438"/>
-          </a:xfrm>
-          <a:prstGeom prst="rect">
-            <a:avLst/>
-          </a:prstGeom>
-          <a:noFill/>
-        </p:spPr>
-        <p:txBody>
-          <a:bodyPr wrap="square" lIns="0" rIns="0" tIns="0" bIns="0" anchor="t">
-            <a:spAutoFit/>
-          </a:bodyPr>
-          <a:lstStyle/>
-          <a:p>
-            <a:pPr algn="l">
-              <a:lnSpc>
-                <a:spcPct val="100000"/>
-              </a:lnSpc>
-            </a:pPr>
-            <a:r>
-              <a:rPr sz="740" b="1">
-                <a:solidFill>
-                  <a:srgbClr val="B5333B"/>
-                </a:solidFill>
-                <a:latin typeface="微软雅黑"/>
-                <a:ea typeface="微软雅黑"/>
-                <a:cs typeface="微软雅黑"/>
-              </a:rPr>
-              <a:t>2</a:t>
-            </a:r>
-          </a:p>
-        </p:txBody>
-      </p:sp>
-      <p:sp>
-        <p:nvSpPr>
-          <p:cNvPr id="133" name="TextBox 132"/>
-          <p:cNvSpPr txBox="1"/>
-          <p:nvPr/>
-        </p:nvSpPr>
-        <p:spPr>
-          <a:xfrm>
-            <a:off x="8424672" y="4889754"/>
-            <a:ext cx="2621280" cy="75438"/>
-          </a:xfrm>
-          <a:prstGeom prst="rect">
-            <a:avLst/>
-          </a:prstGeom>
-          <a:noFill/>
-        </p:spPr>
-        <p:txBody>
-          <a:bodyPr wrap="square" lIns="0" rIns="0" tIns="0" bIns="0" anchor="t">
-            <a:spAutoFit/>
-          </a:bodyPr>
-          <a:lstStyle/>
-          <a:p>
-            <a:pPr algn="l">
-              <a:lnSpc>
-                <a:spcPct val="100000"/>
-              </a:lnSpc>
-            </a:pPr>
-            <a:r>
-              <a:rPr sz="720" b="1">
-                <a:solidFill>
-                  <a:srgbClr val="1A1A1C"/>
-                </a:solidFill>
-                <a:latin typeface="微软雅黑"/>
-                <a:ea typeface="微软雅黑"/>
-                <a:cs typeface="微软雅黑"/>
-              </a:rPr>
-              <a:t>全国电子印章互认平台</a:t>
-            </a:r>
-          </a:p>
-        </p:txBody>
-      </p:sp>
-      <p:sp>
-        <p:nvSpPr>
-          <p:cNvPr id="134" name="TextBox 133"/>
-          <p:cNvSpPr txBox="1"/>
-          <p:nvPr/>
-        </p:nvSpPr>
-        <p:spPr>
-          <a:xfrm>
-            <a:off x="11131296" y="4889754"/>
-            <a:ext cx="609600" cy="75438"/>
-          </a:xfrm>
-          <a:prstGeom prst="rect">
-            <a:avLst/>
-          </a:prstGeom>
-          <a:noFill/>
-        </p:spPr>
-        <p:txBody>
-          <a:bodyPr wrap="square" lIns="0" rIns="0" tIns="0" bIns="0" anchor="t">
-            <a:spAutoFit/>
-          </a:bodyPr>
-          <a:lstStyle/>
-          <a:p>
-            <a:pPr algn="r">
-              <a:lnSpc>
-                <a:spcPct val="100000"/>
-              </a:lnSpc>
-            </a:pPr>
-            <a:r>
-              <a:rPr sz="720" b="0">
-                <a:solidFill>
-                  <a:srgbClr val="5B616B"/>
-                </a:solidFill>
-                <a:latin typeface="微软雅黑"/>
-                <a:ea typeface="微软雅黑"/>
-                <a:cs typeface="微软雅黑"/>
-              </a:rPr>
-              <a:t>1,033,084</a:t>
-            </a:r>
-          </a:p>
-        </p:txBody>
-      </p:sp>
-      <p:sp>
-        <p:nvSpPr>
-          <p:cNvPr id="135" name="TextBox 134"/>
-          <p:cNvSpPr txBox="1"/>
-          <p:nvPr/>
-        </p:nvSpPr>
-        <p:spPr>
-          <a:xfrm>
-            <a:off x="8424672" y="4992624"/>
-            <a:ext cx="3291840" cy="61721"/>
-          </a:xfrm>
-          <a:prstGeom prst="rect">
-            <a:avLst/>
-          </a:prstGeom>
-          <a:noFill/>
-        </p:spPr>
-        <p:txBody>
-          <a:bodyPr wrap="square" lIns="0" rIns="0" tIns="0" bIns="0" anchor="t">
-            <a:spAutoFit/>
-          </a:bodyPr>
-          <a:lstStyle/>
-          <a:p>
-            <a:pPr algn="l">
-              <a:lnSpc>
-                <a:spcPct val="100000"/>
-              </a:lnSpc>
-            </a:pPr>
-            <a:r>
-              <a:rPr sz="620" b="0">
-                <a:solidFill>
-                  <a:srgbClr val="5B616B"/>
-                </a:solidFill>
-                <a:latin typeface="微软雅黑"/>
-                <a:ea typeface="微软雅黑"/>
-                <a:cs typeface="微软雅黑"/>
-              </a:rPr>
-              <a:t>成都国信公链科技有限公司</a:t>
-            </a:r>
-          </a:p>
-        </p:txBody>
-      </p:sp>
-      <p:sp>
-        <p:nvSpPr>
-          <p:cNvPr id="136" name="TextBox 135"/>
-          <p:cNvSpPr txBox="1"/>
-          <p:nvPr/>
-        </p:nvSpPr>
-        <p:spPr>
-          <a:xfrm>
-            <a:off x="8229600" y="5061204"/>
-            <a:ext cx="170688" cy="75438"/>
-          </a:xfrm>
-          <a:prstGeom prst="rect">
-            <a:avLst/>
-          </a:prstGeom>
-          <a:noFill/>
-        </p:spPr>
-        <p:txBody>
-          <a:bodyPr wrap="square" lIns="0" rIns="0" tIns="0" bIns="0" anchor="t">
-            <a:spAutoFit/>
-          </a:bodyPr>
-          <a:lstStyle/>
-          <a:p>
-            <a:pPr algn="l">
-              <a:lnSpc>
-                <a:spcPct val="100000"/>
-              </a:lnSpc>
-            </a:pPr>
-            <a:r>
-              <a:rPr sz="740" b="1">
-                <a:solidFill>
-                  <a:srgbClr val="B5333B"/>
-                </a:solidFill>
-                <a:latin typeface="微软雅黑"/>
-                <a:ea typeface="微软雅黑"/>
-                <a:cs typeface="微软雅黑"/>
-              </a:rPr>
-              <a:t>3</a:t>
-            </a:r>
-          </a:p>
-        </p:txBody>
-      </p:sp>
-      <p:sp>
-        <p:nvSpPr>
-          <p:cNvPr id="137" name="TextBox 136"/>
-          <p:cNvSpPr txBox="1"/>
-          <p:nvPr/>
-        </p:nvSpPr>
-        <p:spPr>
-          <a:xfrm>
-            <a:off x="8424672" y="5061204"/>
-            <a:ext cx="2621280" cy="75438"/>
-          </a:xfrm>
-          <a:prstGeom prst="rect">
-            <a:avLst/>
-          </a:prstGeom>
-          <a:noFill/>
-        </p:spPr>
-        <p:txBody>
-          <a:bodyPr wrap="square" lIns="0" rIns="0" tIns="0" bIns="0" anchor="t">
-            <a:spAutoFit/>
-          </a:bodyPr>
-          <a:lstStyle/>
-          <a:p>
-            <a:pPr algn="l">
-              <a:lnSpc>
-                <a:spcPct val="100000"/>
-              </a:lnSpc>
-            </a:pPr>
-            <a:r>
-              <a:rPr sz="720" b="1">
-                <a:solidFill>
-                  <a:srgbClr val="1A1A1C"/>
-                </a:solidFill>
-                <a:latin typeface="微软雅黑"/>
-                <a:ea typeface="微软雅黑"/>
-                <a:cs typeface="微软雅黑"/>
-              </a:rPr>
-              <a:t>Summarize</a:t>
-            </a:r>
-          </a:p>
-        </p:txBody>
-      </p:sp>
-      <p:sp>
-        <p:nvSpPr>
-          <p:cNvPr id="138" name="TextBox 137"/>
-          <p:cNvSpPr txBox="1"/>
-          <p:nvPr/>
-        </p:nvSpPr>
-        <p:spPr>
-          <a:xfrm>
-            <a:off x="11131296" y="5061204"/>
-            <a:ext cx="609600" cy="75438"/>
-          </a:xfrm>
-          <a:prstGeom prst="rect">
-            <a:avLst/>
-          </a:prstGeom>
-          <a:noFill/>
-        </p:spPr>
-        <p:txBody>
-          <a:bodyPr wrap="square" lIns="0" rIns="0" tIns="0" bIns="0" anchor="t">
-            <a:spAutoFit/>
-          </a:bodyPr>
-          <a:lstStyle/>
-          <a:p>
-            <a:pPr algn="r">
-              <a:lnSpc>
-                <a:spcPct val="100000"/>
-              </a:lnSpc>
-            </a:pPr>
-            <a:r>
-              <a:rPr sz="720" b="0">
-                <a:solidFill>
-                  <a:srgbClr val="5B616B"/>
-                </a:solidFill>
-                <a:latin typeface="微软雅黑"/>
-                <a:ea typeface="微软雅黑"/>
-                <a:cs typeface="微软雅黑"/>
-              </a:rPr>
-              <a:t>765,618</a:t>
-            </a:r>
-          </a:p>
-        </p:txBody>
-      </p:sp>
-      <p:sp>
-        <p:nvSpPr>
-          <p:cNvPr id="139" name="TextBox 138"/>
-          <p:cNvSpPr txBox="1"/>
-          <p:nvPr/>
-        </p:nvSpPr>
-        <p:spPr>
-          <a:xfrm>
-            <a:off x="8424672" y="5164074"/>
-            <a:ext cx="3291840" cy="61721"/>
-          </a:xfrm>
-          <a:prstGeom prst="rect">
-            <a:avLst/>
-          </a:prstGeom>
-          <a:noFill/>
-        </p:spPr>
-        <p:txBody>
-          <a:bodyPr wrap="square" lIns="0" rIns="0" tIns="0" bIns="0" anchor="t">
-            <a:spAutoFit/>
-          </a:bodyPr>
-          <a:lstStyle/>
-          <a:p>
-            <a:pPr algn="l">
-              <a:lnSpc>
-                <a:spcPct val="100000"/>
-              </a:lnSpc>
-            </a:pPr>
-            <a:r>
-              <a:rPr sz="620" b="0">
-                <a:solidFill>
-                  <a:srgbClr val="5B616B"/>
-                </a:solidFill>
-                <a:latin typeface="微软雅黑"/>
-                <a:ea typeface="微软雅黑"/>
-                <a:cs typeface="微软雅黑"/>
-              </a:rPr>
-              <a:t>paudyyin</a:t>
-            </a:r>
-          </a:p>
-        </p:txBody>
-      </p:sp>
-      <p:sp>
-        <p:nvSpPr>
-          <p:cNvPr id="140" name="TextBox 139"/>
-          <p:cNvSpPr txBox="1"/>
-          <p:nvPr/>
-        </p:nvSpPr>
-        <p:spPr>
-          <a:xfrm>
-            <a:off x="8229600" y="5232653"/>
-            <a:ext cx="170688" cy="75438"/>
-          </a:xfrm>
-          <a:prstGeom prst="rect">
-            <a:avLst/>
-          </a:prstGeom>
-          <a:noFill/>
-        </p:spPr>
-        <p:txBody>
-          <a:bodyPr wrap="square" lIns="0" rIns="0" tIns="0" bIns="0" anchor="t">
-            <a:spAutoFit/>
-          </a:bodyPr>
-          <a:lstStyle/>
-          <a:p>
-            <a:pPr algn="l">
-              <a:lnSpc>
-                <a:spcPct val="100000"/>
-              </a:lnSpc>
-            </a:pPr>
-            <a:r>
-              <a:rPr sz="740" b="1">
-                <a:solidFill>
-                  <a:srgbClr val="B5333B"/>
-                </a:solidFill>
-                <a:latin typeface="微软雅黑"/>
-                <a:ea typeface="微软雅黑"/>
-                <a:cs typeface="微软雅黑"/>
-              </a:rPr>
-              <a:t>4</a:t>
-            </a:r>
-          </a:p>
-        </p:txBody>
-      </p:sp>
-      <p:sp>
-        <p:nvSpPr>
-          <p:cNvPr id="141" name="TextBox 140"/>
-          <p:cNvSpPr txBox="1"/>
-          <p:nvPr/>
-        </p:nvSpPr>
-        <p:spPr>
-          <a:xfrm>
-            <a:off x="8424672" y="5232653"/>
-            <a:ext cx="2621280" cy="75438"/>
-          </a:xfrm>
-          <a:prstGeom prst="rect">
-            <a:avLst/>
-          </a:prstGeom>
-          <a:noFill/>
-        </p:spPr>
-        <p:txBody>
-          <a:bodyPr wrap="square" lIns="0" rIns="0" tIns="0" bIns="0" anchor="t">
-            <a:spAutoFit/>
-          </a:bodyPr>
-          <a:lstStyle/>
-          <a:p>
-            <a:pPr algn="l">
-              <a:lnSpc>
-                <a:spcPct val="100000"/>
-              </a:lnSpc>
-            </a:pPr>
-            <a:r>
-              <a:rPr sz="690" b="1">
-                <a:solidFill>
-                  <a:srgbClr val="1A1A1C"/>
-                </a:solidFill>
-                <a:latin typeface="微软雅黑"/>
-                <a:ea typeface="微软雅黑"/>
-                <a:cs typeface="微软雅黑"/>
-              </a:rPr>
-              <a:t>视频号爆款短视频拆解（付费版：全能）【零一数科·出品】</a:t>
-            </a:r>
-          </a:p>
-        </p:txBody>
-      </p:sp>
-      <p:sp>
-        <p:nvSpPr>
-          <p:cNvPr id="142" name="TextBox 141"/>
-          <p:cNvSpPr txBox="1"/>
-          <p:nvPr/>
-        </p:nvSpPr>
-        <p:spPr>
-          <a:xfrm>
-            <a:off x="11131296" y="5232653"/>
-            <a:ext cx="609600" cy="75438"/>
-          </a:xfrm>
-          <a:prstGeom prst="rect">
-            <a:avLst/>
-          </a:prstGeom>
-          <a:noFill/>
-        </p:spPr>
-        <p:txBody>
-          <a:bodyPr wrap="square" lIns="0" rIns="0" tIns="0" bIns="0" anchor="t">
-            <a:spAutoFit/>
-          </a:bodyPr>
-          <a:lstStyle/>
-          <a:p>
-            <a:pPr algn="r">
-              <a:lnSpc>
-                <a:spcPct val="100000"/>
-              </a:lnSpc>
-            </a:pPr>
-            <a:r>
-              <a:rPr sz="720" b="0">
-                <a:solidFill>
-                  <a:srgbClr val="5B616B"/>
-                </a:solidFill>
-                <a:latin typeface="微软雅黑"/>
-                <a:ea typeface="微软雅黑"/>
-                <a:cs typeface="微软雅黑"/>
-              </a:rPr>
-              <a:t>690,517</a:t>
-            </a:r>
-          </a:p>
-        </p:txBody>
-      </p:sp>
-      <p:sp>
-        <p:nvSpPr>
-          <p:cNvPr id="143" name="TextBox 142"/>
-          <p:cNvSpPr txBox="1"/>
-          <p:nvPr/>
-        </p:nvSpPr>
-        <p:spPr>
-          <a:xfrm>
-            <a:off x="8424672" y="5335523"/>
-            <a:ext cx="3291840" cy="61721"/>
-          </a:xfrm>
-          <a:prstGeom prst="rect">
-            <a:avLst/>
-          </a:prstGeom>
-          <a:noFill/>
-        </p:spPr>
-        <p:txBody>
-          <a:bodyPr wrap="square" lIns="0" rIns="0" tIns="0" bIns="0" anchor="t">
-            <a:spAutoFit/>
-          </a:bodyPr>
-          <a:lstStyle/>
-          <a:p>
-            <a:pPr algn="l">
-              <a:lnSpc>
-                <a:spcPct val="100000"/>
-              </a:lnSpc>
-            </a:pPr>
-            <a:r>
-              <a:rPr sz="620" b="0">
-                <a:solidFill>
-                  <a:srgbClr val="5B616B"/>
-                </a:solidFill>
-                <a:latin typeface="微软雅黑"/>
-                <a:ea typeface="微软雅黑"/>
-                <a:cs typeface="微软雅黑"/>
-              </a:rPr>
-              <a:t>零一数科</a:t>
-            </a:r>
-          </a:p>
-        </p:txBody>
-      </p:sp>
-      <p:sp>
-        <p:nvSpPr>
-          <p:cNvPr id="144" name="TextBox 143"/>
-          <p:cNvSpPr txBox="1"/>
-          <p:nvPr/>
-        </p:nvSpPr>
-        <p:spPr>
-          <a:xfrm>
-            <a:off x="8229600" y="5404103"/>
-            <a:ext cx="170688" cy="75438"/>
-          </a:xfrm>
-          <a:prstGeom prst="rect">
-            <a:avLst/>
-          </a:prstGeom>
-          <a:noFill/>
-        </p:spPr>
-        <p:txBody>
-          <a:bodyPr wrap="square" lIns="0" rIns="0" tIns="0" bIns="0" anchor="t">
-            <a:spAutoFit/>
-          </a:bodyPr>
-          <a:lstStyle/>
-          <a:p>
-            <a:pPr algn="l">
-              <a:lnSpc>
-                <a:spcPct val="100000"/>
-              </a:lnSpc>
-            </a:pPr>
-            <a:r>
-              <a:rPr sz="740" b="1">
-                <a:solidFill>
-                  <a:srgbClr val="B5333B"/>
-                </a:solidFill>
-                <a:latin typeface="微软雅黑"/>
-                <a:ea typeface="微软雅黑"/>
-                <a:cs typeface="微软雅黑"/>
-              </a:rPr>
-              <a:t>5</a:t>
-            </a:r>
-          </a:p>
-        </p:txBody>
-      </p:sp>
-      <p:sp>
-        <p:nvSpPr>
-          <p:cNvPr id="145" name="TextBox 144"/>
-          <p:cNvSpPr txBox="1"/>
-          <p:nvPr/>
-        </p:nvSpPr>
-        <p:spPr>
-          <a:xfrm>
-            <a:off x="8424672" y="5404103"/>
-            <a:ext cx="2621280" cy="75438"/>
-          </a:xfrm>
-          <a:prstGeom prst="rect">
-            <a:avLst/>
-          </a:prstGeom>
-          <a:noFill/>
-        </p:spPr>
-        <p:txBody>
-          <a:bodyPr wrap="square" lIns="0" rIns="0" tIns="0" bIns="0" anchor="t">
-            <a:spAutoFit/>
-          </a:bodyPr>
-          <a:lstStyle/>
-          <a:p>
-            <a:pPr algn="l">
-              <a:lnSpc>
-                <a:spcPct val="100000"/>
-              </a:lnSpc>
-            </a:pPr>
-            <a:r>
-              <a:rPr sz="720" b="1">
-                <a:solidFill>
-                  <a:srgbClr val="1A1A1C"/>
-                </a:solidFill>
-                <a:latin typeface="微软雅黑"/>
-                <a:ea typeface="微软雅黑"/>
-                <a:cs typeface="微软雅黑"/>
-              </a:rPr>
-              <a:t>钢联AI - 智能问数</a:t>
-            </a:r>
-          </a:p>
-        </p:txBody>
-      </p:sp>
-      <p:sp>
-        <p:nvSpPr>
-          <p:cNvPr id="146" name="TextBox 145"/>
-          <p:cNvSpPr txBox="1"/>
-          <p:nvPr/>
-        </p:nvSpPr>
-        <p:spPr>
-          <a:xfrm>
-            <a:off x="11131296" y="5404103"/>
-            <a:ext cx="609600" cy="75438"/>
-          </a:xfrm>
-          <a:prstGeom prst="rect">
-            <a:avLst/>
-          </a:prstGeom>
-          <a:noFill/>
-        </p:spPr>
-        <p:txBody>
-          <a:bodyPr wrap="square" lIns="0" rIns="0" tIns="0" bIns="0" anchor="t">
-            <a:spAutoFit/>
-          </a:bodyPr>
-          <a:lstStyle/>
-          <a:p>
-            <a:pPr algn="r">
-              <a:lnSpc>
-                <a:spcPct val="100000"/>
-              </a:lnSpc>
-            </a:pPr>
-            <a:r>
-              <a:rPr sz="720" b="0">
-                <a:solidFill>
-                  <a:srgbClr val="5B616B"/>
-                </a:solidFill>
-                <a:latin typeface="微软雅黑"/>
-                <a:ea typeface="微软雅黑"/>
-                <a:cs typeface="微软雅黑"/>
-              </a:rPr>
-              <a:t>667,903</a:t>
-            </a:r>
-          </a:p>
-        </p:txBody>
-      </p:sp>
-      <p:sp>
-        <p:nvSpPr>
-          <p:cNvPr id="147" name="TextBox 146"/>
-          <p:cNvSpPr txBox="1"/>
-          <p:nvPr/>
-        </p:nvSpPr>
-        <p:spPr>
-          <a:xfrm>
-            <a:off x="8424672" y="5506974"/>
-            <a:ext cx="3291840" cy="61721"/>
-          </a:xfrm>
-          <a:prstGeom prst="rect">
-            <a:avLst/>
-          </a:prstGeom>
-          <a:noFill/>
-        </p:spPr>
-        <p:txBody>
-          <a:bodyPr wrap="square" lIns="0" rIns="0" tIns="0" bIns="0" anchor="t">
-            <a:spAutoFit/>
-          </a:bodyPr>
-          <a:lstStyle/>
-          <a:p>
-            <a:pPr algn="l">
-              <a:lnSpc>
-                <a:spcPct val="100000"/>
-              </a:lnSpc>
-            </a:pPr>
-            <a:r>
-              <a:rPr sz="620" b="0">
-                <a:solidFill>
-                  <a:srgbClr val="5B616B"/>
-                </a:solidFill>
-                <a:latin typeface="微软雅黑"/>
-                <a:ea typeface="微软雅黑"/>
-                <a:cs typeface="微软雅黑"/>
-              </a:rPr>
-              <a:t>上海钢联电子商务股份有限公司</a:t>
-            </a:r>
-          </a:p>
-        </p:txBody>
-      </p:sp>
-      <p:sp>
-        <p:nvSpPr>
-          <p:cNvPr id="148" name="TextBox 147"/>
-          <p:cNvSpPr txBox="1"/>
-          <p:nvPr/>
-        </p:nvSpPr>
-        <p:spPr>
-          <a:xfrm>
-            <a:off x="8229600" y="5575554"/>
-            <a:ext cx="170688" cy="75438"/>
-          </a:xfrm>
-          <a:prstGeom prst="rect">
-            <a:avLst/>
-          </a:prstGeom>
-          <a:noFill/>
-        </p:spPr>
-        <p:txBody>
-          <a:bodyPr wrap="square" lIns="0" rIns="0" tIns="0" bIns="0" anchor="t">
-            <a:spAutoFit/>
-          </a:bodyPr>
-          <a:lstStyle/>
-          <a:p>
-            <a:pPr algn="l">
-              <a:lnSpc>
-                <a:spcPct val="100000"/>
-              </a:lnSpc>
-            </a:pPr>
-            <a:r>
-              <a:rPr sz="740" b="1">
-                <a:solidFill>
-                  <a:srgbClr val="B5333B"/>
-                </a:solidFill>
-                <a:latin typeface="微软雅黑"/>
-                <a:ea typeface="微软雅黑"/>
-                <a:cs typeface="微软雅黑"/>
-              </a:rPr>
-              <a:t>6</a:t>
-            </a:r>
-          </a:p>
-        </p:txBody>
-      </p:sp>
-      <p:sp>
-        <p:nvSpPr>
-          <p:cNvPr id="149" name="TextBox 148"/>
-          <p:cNvSpPr txBox="1"/>
-          <p:nvPr/>
-        </p:nvSpPr>
-        <p:spPr>
-          <a:xfrm>
-            <a:off x="8424672" y="5575554"/>
-            <a:ext cx="2621280" cy="75438"/>
-          </a:xfrm>
-          <a:prstGeom prst="rect">
-            <a:avLst/>
-          </a:prstGeom>
-          <a:noFill/>
-        </p:spPr>
-        <p:txBody>
-          <a:bodyPr wrap="square" lIns="0" rIns="0" tIns="0" bIns="0" anchor="t">
-            <a:spAutoFit/>
-          </a:bodyPr>
-          <a:lstStyle/>
-          <a:p>
-            <a:pPr algn="l">
-              <a:lnSpc>
-                <a:spcPct val="100000"/>
-              </a:lnSpc>
-            </a:pPr>
-            <a:r>
-              <a:rPr sz="720" b="1">
-                <a:solidFill>
-                  <a:srgbClr val="1A1A1C"/>
-                </a:solidFill>
-                <a:latin typeface="微软雅黑"/>
-                <a:ea typeface="微软雅黑"/>
-                <a:cs typeface="微软雅黑"/>
-              </a:rPr>
-              <a:t>ima-skills</a:t>
-            </a:r>
-          </a:p>
-        </p:txBody>
-      </p:sp>
-      <p:sp>
-        <p:nvSpPr>
-          <p:cNvPr id="150" name="TextBox 149"/>
-          <p:cNvSpPr txBox="1"/>
-          <p:nvPr/>
-        </p:nvSpPr>
-        <p:spPr>
-          <a:xfrm>
-            <a:off x="11131296" y="5575554"/>
-            <a:ext cx="609600" cy="75438"/>
-          </a:xfrm>
-          <a:prstGeom prst="rect">
-            <a:avLst/>
-          </a:prstGeom>
-          <a:noFill/>
-        </p:spPr>
-        <p:txBody>
-          <a:bodyPr wrap="square" lIns="0" rIns="0" tIns="0" bIns="0" anchor="t">
-            <a:spAutoFit/>
-          </a:bodyPr>
-          <a:lstStyle/>
-          <a:p>
-            <a:pPr algn="r">
-              <a:lnSpc>
-                <a:spcPct val="100000"/>
-              </a:lnSpc>
-            </a:pPr>
-            <a:r>
-              <a:rPr sz="720" b="0">
-                <a:solidFill>
-                  <a:srgbClr val="5B616B"/>
-                </a:solidFill>
-                <a:latin typeface="微软雅黑"/>
-                <a:ea typeface="微软雅黑"/>
-                <a:cs typeface="微软雅黑"/>
-              </a:rPr>
-              <a:t>663,062</a:t>
-            </a:r>
-          </a:p>
-        </p:txBody>
-      </p:sp>
-      <p:sp>
-        <p:nvSpPr>
-          <p:cNvPr id="151" name="TextBox 150"/>
-          <p:cNvSpPr txBox="1"/>
-          <p:nvPr/>
-        </p:nvSpPr>
-        <p:spPr>
-          <a:xfrm>
-            <a:off x="8424672" y="5678424"/>
-            <a:ext cx="3291840" cy="61721"/>
-          </a:xfrm>
-          <a:prstGeom prst="rect">
-            <a:avLst/>
-          </a:prstGeom>
-          <a:noFill/>
-        </p:spPr>
-        <p:txBody>
-          <a:bodyPr wrap="square" lIns="0" rIns="0" tIns="0" bIns="0" anchor="t">
-            <a:spAutoFit/>
-          </a:bodyPr>
-          <a:lstStyle/>
-          <a:p>
-            <a:pPr algn="l">
-              <a:lnSpc>
-                <a:spcPct val="100000"/>
-              </a:lnSpc>
-            </a:pPr>
-            <a:r>
-              <a:rPr sz="620" b="0">
-                <a:solidFill>
-                  <a:srgbClr val="5B616B"/>
-                </a:solidFill>
-                <a:latin typeface="微软雅黑"/>
-                <a:ea typeface="微软雅黑"/>
-                <a:cs typeface="微软雅黑"/>
-              </a:rPr>
-              <a:t>tencent-ima</a:t>
-            </a:r>
-          </a:p>
-        </p:txBody>
-      </p:sp>
-      <p:sp>
-        <p:nvSpPr>
-          <p:cNvPr id="152" name="TextBox 151"/>
-          <p:cNvSpPr txBox="1"/>
-          <p:nvPr/>
-        </p:nvSpPr>
-        <p:spPr>
-          <a:xfrm>
-            <a:off x="426720" y="5863590"/>
-            <a:ext cx="11338560" cy="178308"/>
-          </a:xfrm>
-          <a:prstGeom prst="rect">
-            <a:avLst/>
-          </a:prstGeom>
-          <a:noFill/>
-        </p:spPr>
-        <p:txBody>
-          <a:bodyPr wrap="square" lIns="0" rIns="0" tIns="0" bIns="0" anchor="t">
-            <a:spAutoFit/>
-          </a:bodyPr>
-          <a:lstStyle/>
-          <a:p>
-            <a:pPr algn="l">
-              <a:lnSpc>
-                <a:spcPct val="100000"/>
-              </a:lnSpc>
-            </a:pPr>
-            <a:r>
-              <a:rPr sz="950" b="0">
-                <a:solidFill>
-                  <a:srgbClr val="5B616B"/>
-                </a:solidFill>
-                <a:latin typeface="微软雅黑"/>
-                <a:ea typeface="微软雅黑"/>
-                <a:cs typeface="微软雅黑"/>
-              </a:rPr>
-              <a:t>免费拿走了头部下载；Payskill 是付费标签，API Key 是接入要求，两者可同时成立。</a:t>
+              <a:t>免费拿走头部下载；Payskill 与 API Key 的头部量级低一个数量级。</a:t>
             </a:r>
           </a:p>
         </p:txBody>

--- a/skill-final-v1.pptx
+++ b/skill-final-v1.pptx
@@ -5360,1281 +5360,6 @@
           </a:p>
         </p:txBody>
       </p:sp>
-      <p:sp>
-        <p:nvSpPr>
-          <p:cNvPr id="24" name="文字 24"/>
-          <p:cNvSpPr txBox="1"/>
-          <p:nvPr/>
-        </p:nvSpPr>
-        <p:spPr>
-          <a:xfrm>
-            <a:off x="457200" y="1954510"/>
-            <a:ext cx="2584450" cy="247650"/>
-          </a:xfrm>
-          <a:prstGeom prst="rect">
-            <a:avLst/>
-          </a:prstGeom>
-          <a:noFill/>
-          <a:ln>
-            <a:noFill/>
-          </a:ln>
-        </p:spPr>
-        <p:txBody>
-          <a:bodyPr wrap="none" anchor="t" lIns="0" tIns="0" rIns="0" bIns="0">
-            <a:noAutofit/>
-          </a:bodyPr>
-          <a:lstStyle/>
-          <a:p>
-            <a:pPr algn="l" marL="0" marR="0" indent="0">
-              <a:spcBef>
-                <a:spcPts val="0"/>
-              </a:spcBef>
-              <a:spcAft>
-                <a:spcPts val="0"/>
-              </a:spcAft>
-              <a:buNone/>
-              <a:defRPr sz="1200" b="1">
-                <a:latin typeface="微软雅黑"/>
-              </a:defRPr>
-            </a:pPr>
-            <a:r>
-              <a:rPr sz="1200" b="1" i="0" u="none" spc="-50">
-                <a:solidFill>
-                  <a:srgbClr val="1A1A1C">
-                    <a:alpha val="100000"/>
-                  </a:srgbClr>
-                </a:solidFill>
-                <a:latin typeface="微软雅黑"/>
-                <a:ea typeface="微软雅黑"/>
-                <a:cs typeface="微软雅黑"/>
-              </a:rPr>
-              <a:t xml:space="preserve">同一购买握手，取得不同商品权益</a:t>
-            </a:r>
-            <a:endParaRPr/>
-          </a:p>
-        </p:txBody>
-      </p:sp>
-      <p:sp>
-        <p:nvSpPr>
-          <p:cNvPr id="25" name="形状 25"/>
-          <p:cNvSpPr/>
-          <p:nvPr/>
-        </p:nvSpPr>
-        <p:spPr>
-          <a:xfrm>
-            <a:off x="457200" y="2341860"/>
-            <a:ext cx="1460500" cy="647700"/>
-          </a:xfrm>
-          <a:prstGeom prst="roundRect">
-            <a:avLst>
-              <a:gd name="adj" fmla="val 13725"/>
-            </a:avLst>
-          </a:prstGeom>
-          <a:solidFill>
-            <a:srgbClr val="FFFFFF">
-              <a:alpha val="100000"/>
-            </a:srgbClr>
-          </a:solidFill>
-          <a:ln w="6350">
-            <a:solidFill>
-              <a:srgbClr val="D9DDE2">
-                <a:alpha val="100000"/>
-              </a:srgbClr>
-            </a:solidFill>
-            <a:prstDash val="solid"/>
-          </a:ln>
-        </p:spPr>
-        <p:txBody>
-          <a:bodyPr/>
-          <a:p/>
-        </p:txBody>
-      </p:sp>
-      <p:sp>
-        <p:nvSpPr>
-          <p:cNvPr id="26" name="文字 26"/>
-          <p:cNvSpPr txBox="1"/>
-          <p:nvPr/>
-        </p:nvSpPr>
-        <p:spPr>
-          <a:xfrm>
-            <a:off x="647700" y="2456160"/>
-            <a:ext cx="1092101" cy="222250"/>
-          </a:xfrm>
-          <a:prstGeom prst="rect">
-            <a:avLst/>
-          </a:prstGeom>
-          <a:noFill/>
-          <a:ln>
-            <a:noFill/>
-          </a:ln>
-        </p:spPr>
-        <p:txBody>
-          <a:bodyPr wrap="none" anchor="t" lIns="0" tIns="0" rIns="0" bIns="0">
-            <a:noAutofit/>
-          </a:bodyPr>
-          <a:lstStyle/>
-          <a:p>
-            <a:pPr algn="l" marL="0" marR="0" indent="0">
-              <a:spcBef>
-                <a:spcPts val="0"/>
-              </a:spcBef>
-              <a:spcAft>
-                <a:spcPts val="0"/>
-              </a:spcAft>
-              <a:buNone/>
-              <a:defRPr sz="1000">
-                <a:latin typeface="微软雅黑"/>
-              </a:defRPr>
-            </a:pPr>
-            <a:r>
-              <a:rPr sz="1000" b="1" i="0" u="none" spc="-100">
-                <a:solidFill>
-                  <a:srgbClr val="1A1A1C">
-                    <a:alpha val="100000"/>
-                  </a:srgbClr>
-                </a:solidFill>
-                <a:latin typeface="微软雅黑"/>
-                <a:ea typeface="微软雅黑"/>
-                <a:cs typeface="微软雅黑"/>
-              </a:rPr>
-              <a:t xml:space="preserve">Agent 请求资源</a:t>
-            </a:r>
-            <a:endParaRPr/>
-          </a:p>
-        </p:txBody>
-      </p:sp>
-      <p:sp>
-        <p:nvSpPr>
-          <p:cNvPr id="27" name="文字 27"/>
-          <p:cNvSpPr txBox="1"/>
-          <p:nvPr/>
-        </p:nvSpPr>
-        <p:spPr>
-          <a:xfrm>
-            <a:off x="787400" y="2705001"/>
-            <a:ext cx="812800" cy="190500"/>
-          </a:xfrm>
-          <a:prstGeom prst="rect">
-            <a:avLst/>
-          </a:prstGeom>
-          <a:noFill/>
-          <a:ln>
-            <a:noFill/>
-          </a:ln>
-        </p:spPr>
-        <p:txBody>
-          <a:bodyPr wrap="none" anchor="t" lIns="0" tIns="0" rIns="0" bIns="0">
-            <a:noAutofit/>
-          </a:bodyPr>
-          <a:lstStyle/>
-          <a:p>
-            <a:pPr algn="l" marL="0" marR="0" indent="0">
-              <a:spcBef>
-                <a:spcPts val="0"/>
-              </a:spcBef>
-              <a:spcAft>
-                <a:spcPts val="0"/>
-              </a:spcAft>
-              <a:buNone/>
-              <a:defRPr sz="1000">
-                <a:latin typeface="微软雅黑"/>
-              </a:defRPr>
-            </a:pPr>
-            <a:r>
-              <a:rPr sz="1000" b="0" i="0" u="none" spc="-100">
-                <a:solidFill>
-                  <a:srgbClr val="585860">
-                    <a:alpha val="100000"/>
-                  </a:srgbClr>
-                </a:solidFill>
-                <a:latin typeface="微软雅黑"/>
-                <a:ea typeface="微软雅黑"/>
-                <a:cs typeface="微软雅黑"/>
-              </a:rPr>
-              <a:t xml:space="preserve">没有有效权益</a:t>
-            </a:r>
-            <a:endParaRPr/>
-          </a:p>
-        </p:txBody>
-      </p:sp>
-      <p:cxnSp>
-        <p:nvCxnSpPr>
-          <p:cNvPr id="28" name="Editable line 28"/>
-          <p:cNvCxnSpPr/>
-          <p:nvPr/>
-        </p:nvCxnSpPr>
-        <p:spPr>
-          <a:xfrm>
-            <a:off x="1920946" y="2673118"/>
-            <a:ext cx="574463" cy="0"/>
-          </a:xfrm>
-          <a:prstGeom prst="line">
-            <a:avLst/>
-          </a:prstGeom>
-          <a:ln w="8226" cap="flat">
-            <a:solidFill>
-              <a:srgbClr val="566472"/>
-            </a:solidFill>
-            <a:prstDash val="solid"/>
-          </a:ln>
-        </p:spPr>
-      </p:cxnSp>
-      <p:sp>
-        <p:nvSpPr>
-          <p:cNvPr id="29" name="文字 29"/>
-          <p:cNvSpPr/>
-          <p:nvPr/>
-        </p:nvSpPr>
-        <p:spPr>
-          <a:xfrm rot="5400000">
-            <a:off x="2413000" y="2633960"/>
-            <a:ext cx="88900" cy="88900"/>
-          </a:xfrm>
-          <a:prstGeom prst="triangle">
-            <a:avLst/>
-          </a:prstGeom>
-          <a:solidFill>
-            <a:srgbClr val="566472"/>
-          </a:solidFill>
-          <a:ln>
-            <a:noFill/>
-          </a:ln>
-        </p:spPr>
-        <p:txBody>
-          <a:bodyPr/>
-          <a:p/>
-        </p:txBody>
-      </p:sp>
-      <p:sp>
-        <p:nvSpPr>
-          <p:cNvPr id="30" name="形状 30"/>
-          <p:cNvSpPr/>
-          <p:nvPr/>
-        </p:nvSpPr>
-        <p:spPr>
-          <a:xfrm>
-            <a:off x="2501900" y="2341860"/>
-            <a:ext cx="1765300" cy="647700"/>
-          </a:xfrm>
-          <a:prstGeom prst="roundRect">
-            <a:avLst>
-              <a:gd name="adj" fmla="val 13725"/>
-            </a:avLst>
-          </a:prstGeom>
-          <a:solidFill>
-            <a:srgbClr val="FFFFFF">
-              <a:alpha val="100000"/>
-            </a:srgbClr>
-          </a:solidFill>
-          <a:ln w="6350">
-            <a:solidFill>
-              <a:srgbClr val="D9DDE2">
-                <a:alpha val="100000"/>
-              </a:srgbClr>
-            </a:solidFill>
-            <a:prstDash val="solid"/>
-          </a:ln>
-        </p:spPr>
-        <p:txBody>
-          <a:bodyPr/>
-          <a:p/>
-        </p:txBody>
-      </p:sp>
-      <p:sp>
-        <p:nvSpPr>
-          <p:cNvPr id="31" name="文字 31"/>
-          <p:cNvSpPr txBox="1"/>
-          <p:nvPr/>
-        </p:nvSpPr>
-        <p:spPr>
-          <a:xfrm>
-            <a:off x="2865338" y="2456160"/>
-            <a:ext cx="1051024" cy="222250"/>
-          </a:xfrm>
-          <a:prstGeom prst="rect">
-            <a:avLst/>
-          </a:prstGeom>
-          <a:noFill/>
-          <a:ln>
-            <a:noFill/>
-          </a:ln>
-        </p:spPr>
-        <p:txBody>
-          <a:bodyPr wrap="none" anchor="t" lIns="0" tIns="0" rIns="0" bIns="0">
-            <a:noAutofit/>
-          </a:bodyPr>
-          <a:lstStyle/>
-          <a:p>
-            <a:pPr algn="l" marL="0" marR="0" indent="0">
-              <a:spcBef>
-                <a:spcPts val="0"/>
-              </a:spcBef>
-              <a:spcAft>
-                <a:spcPts val="0"/>
-              </a:spcAft>
-              <a:buNone/>
-              <a:defRPr sz="1000">
-                <a:latin typeface="微软雅黑"/>
-              </a:defRPr>
-            </a:pPr>
-            <a:r>
-              <a:rPr sz="1000" b="1" i="0" u="none" spc="-100">
-                <a:solidFill>
-                  <a:srgbClr val="1A1A1C">
-                    <a:alpha val="100000"/>
-                  </a:srgbClr>
-                </a:solidFill>
-                <a:latin typeface="微软雅黑"/>
-                <a:ea typeface="微软雅黑"/>
-                <a:cs typeface="微软雅黑"/>
-              </a:rPr>
-              <a:t xml:space="preserve">402 + 付款要求</a:t>
-            </a:r>
-            <a:endParaRPr/>
-          </a:p>
-        </p:txBody>
-      </p:sp>
-      <p:sp>
-        <p:nvSpPr>
-          <p:cNvPr id="32" name="文字 32"/>
-          <p:cNvSpPr txBox="1"/>
-          <p:nvPr/>
-        </p:nvSpPr>
-        <p:spPr>
-          <a:xfrm>
-            <a:off x="2851150" y="2705001"/>
-            <a:ext cx="1079500" cy="190500"/>
-          </a:xfrm>
-          <a:prstGeom prst="rect">
-            <a:avLst/>
-          </a:prstGeom>
-          <a:noFill/>
-          <a:ln>
-            <a:noFill/>
-          </a:ln>
-        </p:spPr>
-        <p:txBody>
-          <a:bodyPr wrap="none" anchor="t" lIns="0" tIns="0" rIns="0" bIns="0">
-            <a:noAutofit/>
-          </a:bodyPr>
-          <a:lstStyle/>
-          <a:p>
-            <a:pPr algn="l" marL="0" marR="0" indent="0">
-              <a:spcBef>
-                <a:spcPts val="0"/>
-              </a:spcBef>
-              <a:spcAft>
-                <a:spcPts val="0"/>
-              </a:spcAft>
-              <a:buNone/>
-              <a:defRPr sz="1000">
-                <a:latin typeface="微软雅黑"/>
-              </a:defRPr>
-            </a:pPr>
-            <a:r>
-              <a:rPr sz="1000" b="0" i="0" u="none" spc="-100">
-                <a:solidFill>
-                  <a:srgbClr val="585860">
-                    <a:alpha val="100000"/>
-                  </a:srgbClr>
-                </a:solidFill>
-                <a:latin typeface="微软雅黑"/>
-                <a:ea typeface="微软雅黑"/>
-                <a:cs typeface="微软雅黑"/>
-              </a:rPr>
-              <a:t xml:space="preserve">保留原请求上下文</a:t>
-            </a:r>
-            <a:endParaRPr/>
-          </a:p>
-        </p:txBody>
-      </p:sp>
-      <p:cxnSp>
-        <p:nvCxnSpPr>
-          <p:cNvPr id="33" name="Editable line 33"/>
-          <p:cNvCxnSpPr/>
-          <p:nvPr/>
-        </p:nvCxnSpPr>
-        <p:spPr>
-          <a:xfrm>
-            <a:off x="4270447" y="2673118"/>
-            <a:ext cx="565006" cy="0"/>
-          </a:xfrm>
-          <a:prstGeom prst="line">
-            <a:avLst/>
-          </a:prstGeom>
-          <a:ln w="8226" cap="flat">
-            <a:solidFill>
-              <a:srgbClr val="566472"/>
-            </a:solidFill>
-            <a:prstDash val="solid"/>
-          </a:ln>
-        </p:spPr>
-      </p:cxnSp>
-      <p:sp>
-        <p:nvSpPr>
-          <p:cNvPr id="34" name="文字 34"/>
-          <p:cNvSpPr/>
-          <p:nvPr/>
-        </p:nvSpPr>
-        <p:spPr>
-          <a:xfrm rot="5400000">
-            <a:off x="4749800" y="2633960"/>
-            <a:ext cx="88900" cy="88900"/>
-          </a:xfrm>
-          <a:prstGeom prst="triangle">
-            <a:avLst/>
-          </a:prstGeom>
-          <a:solidFill>
-            <a:srgbClr val="566472"/>
-          </a:solidFill>
-          <a:ln>
-            <a:noFill/>
-          </a:ln>
-        </p:spPr>
-        <p:txBody>
-          <a:bodyPr/>
-          <a:p/>
-        </p:txBody>
-      </p:sp>
-      <p:sp>
-        <p:nvSpPr>
-          <p:cNvPr id="35" name="形状 35"/>
-          <p:cNvSpPr/>
-          <p:nvPr/>
-        </p:nvSpPr>
-        <p:spPr>
-          <a:xfrm>
-            <a:off x="4838700" y="2341860"/>
-            <a:ext cx="2603500" cy="647700"/>
-          </a:xfrm>
-          <a:prstGeom prst="roundRect">
-            <a:avLst>
-              <a:gd name="adj" fmla="val 13725"/>
-            </a:avLst>
-          </a:prstGeom>
-          <a:solidFill>
-            <a:srgbClr val="FFFFFF">
-              <a:alpha val="100000"/>
-            </a:srgbClr>
-          </a:solidFill>
-          <a:ln w="6350">
-            <a:solidFill>
-              <a:srgbClr val="D9DDE2">
-                <a:alpha val="100000"/>
-              </a:srgbClr>
-            </a:solidFill>
-            <a:prstDash val="solid"/>
-          </a:ln>
-        </p:spPr>
-        <p:txBody>
-          <a:bodyPr/>
-          <a:p/>
-        </p:txBody>
-      </p:sp>
-      <p:sp>
-        <p:nvSpPr>
-          <p:cNvPr id="36" name="文字 36"/>
-          <p:cNvSpPr txBox="1"/>
-          <p:nvPr/>
-        </p:nvSpPr>
-        <p:spPr>
-          <a:xfrm>
-            <a:off x="5302250" y="2456160"/>
-            <a:ext cx="1689100" cy="222250"/>
-          </a:xfrm>
-          <a:prstGeom prst="rect">
-            <a:avLst/>
-          </a:prstGeom>
-          <a:noFill/>
-          <a:ln>
-            <a:noFill/>
-          </a:ln>
-        </p:spPr>
-        <p:txBody>
-          <a:bodyPr wrap="none" anchor="t" lIns="0" tIns="0" rIns="0" bIns="0">
-            <a:noAutofit/>
-          </a:bodyPr>
-          <a:lstStyle/>
-          <a:p>
-            <a:pPr algn="l" marL="0" marR="0" indent="0">
-              <a:spcBef>
-                <a:spcPts val="0"/>
-              </a:spcBef>
-              <a:spcAft>
-                <a:spcPts val="0"/>
-              </a:spcAft>
-              <a:buNone/>
-              <a:defRPr sz="1000">
-                <a:latin typeface="微软雅黑"/>
-              </a:defRPr>
-            </a:pPr>
-            <a:r>
-              <a:rPr sz="1000" b="1" i="0" u="none" spc="-100">
-                <a:solidFill>
-                  <a:srgbClr val="1A1A1C">
-                    <a:alpha val="100000"/>
-                  </a:srgbClr>
-                </a:solidFill>
-                <a:latin typeface="微软雅黑"/>
-                <a:ea typeface="微软雅黑"/>
-                <a:cs typeface="微软雅黑"/>
-              </a:rPr>
-              <a:t xml:space="preserve">支付宝付款后恢复原请求</a:t>
-            </a:r>
-            <a:endParaRPr/>
-          </a:p>
-        </p:txBody>
-      </p:sp>
-      <p:sp>
-        <p:nvSpPr>
-          <p:cNvPr id="37" name="文字 37"/>
-          <p:cNvSpPr txBox="1"/>
-          <p:nvPr/>
-        </p:nvSpPr>
-        <p:spPr>
-          <a:xfrm>
-            <a:off x="5414863" y="2705001"/>
-            <a:ext cx="1463775" cy="190500"/>
-          </a:xfrm>
-          <a:prstGeom prst="rect">
-            <a:avLst/>
-          </a:prstGeom>
-          <a:noFill/>
-          <a:ln>
-            <a:noFill/>
-          </a:ln>
-        </p:spPr>
-        <p:txBody>
-          <a:bodyPr wrap="none" anchor="t" lIns="0" tIns="0" rIns="0" bIns="0">
-            <a:noAutofit/>
-          </a:bodyPr>
-          <a:lstStyle/>
-          <a:p>
-            <a:pPr algn="l" marL="0" marR="0" indent="0">
-              <a:spcBef>
-                <a:spcPts val="0"/>
-              </a:spcBef>
-              <a:spcAft>
-                <a:spcPts val="0"/>
-              </a:spcAft>
-              <a:buNone/>
-              <a:defRPr sz="1000">
-                <a:latin typeface="微软雅黑"/>
-              </a:defRPr>
-            </a:pPr>
-            <a:r>
-              <a:rPr sz="1000" b="0" i="0" u="none" spc="-100">
-                <a:solidFill>
-                  <a:srgbClr val="585860">
-                    <a:alpha val="100000"/>
-                  </a:srgbClr>
-                </a:solidFill>
-                <a:latin typeface="微软雅黑"/>
-                <a:ea typeface="微软雅黑"/>
-                <a:cs typeface="微软雅黑"/>
-              </a:rPr>
-              <a:t xml:space="preserve">SkillPay 验付并建立权益</a:t>
-            </a:r>
-            <a:endParaRPr/>
-          </a:p>
-        </p:txBody>
-      </p:sp>
-      <p:cxnSp>
-        <p:nvCxnSpPr>
-          <p:cNvPr id="38" name="Editable line 38"/>
-          <p:cNvCxnSpPr/>
-          <p:nvPr/>
-        </p:nvCxnSpPr>
-        <p:spPr>
-          <a:xfrm>
-            <a:off x="6147858" y="2992793"/>
-            <a:ext cx="0" cy="349135"/>
-          </a:xfrm>
-          <a:prstGeom prst="line">
-            <a:avLst/>
-          </a:prstGeom>
-          <a:ln w="8226" cap="flat">
-            <a:solidFill>
-              <a:srgbClr val="566472"/>
-            </a:solidFill>
-            <a:prstDash val="solid"/>
-          </a:ln>
-        </p:spPr>
-      </p:cxnSp>
-      <p:cxnSp>
-        <p:nvCxnSpPr>
-          <p:cNvPr id="39" name="Editable line 39"/>
-          <p:cNvCxnSpPr/>
-          <p:nvPr/>
-        </p:nvCxnSpPr>
-        <p:spPr>
-          <a:xfrm>
-            <a:off x="2143218" y="3352568"/>
-            <a:ext cx="3993963" cy="0"/>
-          </a:xfrm>
-          <a:prstGeom prst="line">
-            <a:avLst/>
-          </a:prstGeom>
-          <a:ln w="8218" cap="flat">
-            <a:solidFill>
-              <a:srgbClr val="566472"/>
-            </a:solidFill>
-            <a:prstDash val="solid"/>
-          </a:ln>
-        </p:spPr>
-      </p:cxnSp>
-      <p:cxnSp>
-        <p:nvCxnSpPr>
-          <p:cNvPr id="40" name="Editable line 40"/>
-          <p:cNvCxnSpPr/>
-          <p:nvPr/>
-        </p:nvCxnSpPr>
-        <p:spPr>
-          <a:xfrm>
-            <a:off x="2145242" y="3351510"/>
-            <a:ext cx="0" cy="231775"/>
-          </a:xfrm>
-          <a:prstGeom prst="line">
-            <a:avLst/>
-          </a:prstGeom>
-          <a:ln w="8209" cap="flat">
-            <a:solidFill>
-              <a:srgbClr val="566472"/>
-            </a:solidFill>
-            <a:prstDash val="solid"/>
-          </a:ln>
-        </p:spPr>
-      </p:cxnSp>
-      <p:sp>
-        <p:nvSpPr>
-          <p:cNvPr id="41" name="文字 41"/>
-          <p:cNvSpPr/>
-          <p:nvPr/>
-        </p:nvSpPr>
-        <p:spPr>
-          <a:xfrm rot="10800000">
-            <a:off x="2101850" y="3510260"/>
-            <a:ext cx="88900" cy="88900"/>
-          </a:xfrm>
-          <a:prstGeom prst="triangle">
-            <a:avLst/>
-          </a:prstGeom>
-          <a:solidFill>
-            <a:srgbClr val="566472"/>
-          </a:solidFill>
-          <a:ln>
-            <a:noFill/>
-          </a:ln>
-        </p:spPr>
-        <p:txBody>
-          <a:bodyPr/>
-          <a:p/>
-        </p:txBody>
-      </p:sp>
-      <p:cxnSp>
-        <p:nvCxnSpPr>
-          <p:cNvPr id="42" name="Editable line 42"/>
-          <p:cNvCxnSpPr/>
-          <p:nvPr/>
-        </p:nvCxnSpPr>
-        <p:spPr>
-          <a:xfrm>
-            <a:off x="5765800" y="3351510"/>
-            <a:ext cx="0" cy="231775"/>
-          </a:xfrm>
-          <a:prstGeom prst="line">
-            <a:avLst/>
-          </a:prstGeom>
-          <a:ln w="8218" cap="flat">
-            <a:solidFill>
-              <a:srgbClr val="566472"/>
-            </a:solidFill>
-            <a:prstDash val="solid"/>
-          </a:ln>
-        </p:spPr>
-      </p:cxnSp>
-      <p:sp>
-        <p:nvSpPr>
-          <p:cNvPr id="43" name="文字 43"/>
-          <p:cNvSpPr/>
-          <p:nvPr/>
-        </p:nvSpPr>
-        <p:spPr>
-          <a:xfrm rot="10800000">
-            <a:off x="5721350" y="3510260"/>
-            <a:ext cx="88900" cy="88900"/>
-          </a:xfrm>
-          <a:prstGeom prst="triangle">
-            <a:avLst/>
-          </a:prstGeom>
-          <a:solidFill>
-            <a:srgbClr val="566472"/>
-          </a:solidFill>
-          <a:ln>
-            <a:noFill/>
-          </a:ln>
-        </p:spPr>
-        <p:txBody>
-          <a:bodyPr/>
-          <a:p/>
-        </p:txBody>
-      </p:sp>
-      <p:sp>
-        <p:nvSpPr>
-          <p:cNvPr id="44" name="形状 44"/>
-          <p:cNvSpPr/>
-          <p:nvPr/>
-        </p:nvSpPr>
-        <p:spPr>
-          <a:xfrm>
-            <a:off x="457200" y="3586460"/>
-            <a:ext cx="3365500" cy="1365250"/>
-          </a:xfrm>
-          <a:prstGeom prst="roundRect">
-            <a:avLst>
-              <a:gd name="adj" fmla="val 6512"/>
-            </a:avLst>
-          </a:prstGeom>
-          <a:solidFill>
-            <a:srgbClr val="FFFFFF">
-              <a:alpha val="100000"/>
-            </a:srgbClr>
-          </a:solidFill>
-          <a:ln w="6350">
-            <a:solidFill>
-              <a:srgbClr val="D9DDE2">
-                <a:alpha val="100000"/>
-              </a:srgbClr>
-            </a:solidFill>
-            <a:prstDash val="solid"/>
-          </a:ln>
-        </p:spPr>
-        <p:txBody>
-          <a:bodyPr/>
-          <a:p/>
-        </p:txBody>
-      </p:sp>
-      <p:sp>
-        <p:nvSpPr>
-          <p:cNvPr id="45" name="文字 45"/>
-          <p:cNvSpPr txBox="1"/>
-          <p:nvPr/>
-        </p:nvSpPr>
-        <p:spPr>
-          <a:xfrm>
-            <a:off x="1377950" y="3700760"/>
-            <a:ext cx="1536700" cy="222250"/>
-          </a:xfrm>
-          <a:prstGeom prst="rect">
-            <a:avLst/>
-          </a:prstGeom>
-          <a:noFill/>
-          <a:ln>
-            <a:noFill/>
-          </a:ln>
-        </p:spPr>
-        <p:txBody>
-          <a:bodyPr wrap="none" anchor="t" lIns="0" tIns="0" rIns="0" bIns="0">
-            <a:noAutofit/>
-          </a:bodyPr>
-          <a:lstStyle/>
-          <a:p>
-            <a:pPr algn="l" marL="0" marR="0" indent="0">
-              <a:spcBef>
-                <a:spcPts val="0"/>
-              </a:spcBef>
-              <a:spcAft>
-                <a:spcPts val="0"/>
-              </a:spcAft>
-              <a:buNone/>
-              <a:defRPr sz="1000">
-                <a:latin typeface="微软雅黑"/>
-              </a:defRPr>
-            </a:pPr>
-            <a:r>
-              <a:rPr sz="1000" b="1" i="0" u="none" spc="-100">
-                <a:solidFill>
-                  <a:srgbClr val="1A1A1C">
-                    <a:alpha val="100000"/>
-                  </a:srgbClr>
-                </a:solidFill>
-                <a:latin typeface="微软雅黑"/>
-                <a:ea typeface="微软雅黑"/>
-                <a:cs typeface="微软雅黑"/>
-              </a:rPr>
-              <a:t xml:space="preserve">买断：交付完整源文件</a:t>
-            </a:r>
-            <a:endParaRPr/>
-          </a:p>
-        </p:txBody>
-      </p:sp>
-      <p:sp>
-        <p:nvSpPr>
-          <p:cNvPr id="46" name="文字 46"/>
-          <p:cNvSpPr txBox="1"/>
-          <p:nvPr/>
-        </p:nvSpPr>
-        <p:spPr>
-          <a:xfrm>
-            <a:off x="1382713" y="3949601"/>
-            <a:ext cx="1527175" cy="190500"/>
-          </a:xfrm>
-          <a:prstGeom prst="rect">
-            <a:avLst/>
-          </a:prstGeom>
-          <a:noFill/>
-          <a:ln>
-            <a:noFill/>
-          </a:ln>
-        </p:spPr>
-        <p:txBody>
-          <a:bodyPr wrap="none" anchor="t" lIns="0" tIns="0" rIns="0" bIns="0">
-            <a:noAutofit/>
-          </a:bodyPr>
-          <a:lstStyle/>
-          <a:p>
-            <a:pPr algn="l" marL="0" marR="0" indent="0">
-              <a:spcBef>
-                <a:spcPts val="0"/>
-              </a:spcBef>
-              <a:spcAft>
-                <a:spcPts val="0"/>
-              </a:spcAft>
-              <a:buNone/>
-              <a:defRPr sz="1000">
-                <a:latin typeface="微软雅黑"/>
-              </a:defRPr>
-            </a:pPr>
-            <a:r>
-              <a:rPr sz="1000" b="0" i="0" u="none" spc="-100">
-                <a:solidFill>
-                  <a:srgbClr val="585860">
-                    <a:alpha val="100000"/>
-                  </a:srgbClr>
-                </a:solidFill>
-                <a:latin typeface="微软雅黑"/>
-                <a:ea typeface="微软雅黑"/>
-                <a:cs typeface="微软雅黑"/>
-              </a:rPr>
-              <a:t xml:space="preserve">完整 Skill 进入本地 Agent</a:t>
-            </a:r>
-            <a:endParaRPr/>
-          </a:p>
-        </p:txBody>
-      </p:sp>
-      <p:sp>
-        <p:nvSpPr>
-          <p:cNvPr id="47" name="文字 47"/>
-          <p:cNvSpPr txBox="1"/>
-          <p:nvPr/>
-        </p:nvSpPr>
-        <p:spPr>
-          <a:xfrm>
-            <a:off x="1177230" y="4136231"/>
-            <a:ext cx="1938139" cy="190500"/>
-          </a:xfrm>
-          <a:prstGeom prst="rect">
-            <a:avLst/>
-          </a:prstGeom>
-          <a:noFill/>
-          <a:ln>
-            <a:noFill/>
-          </a:ln>
-        </p:spPr>
-        <p:txBody>
-          <a:bodyPr wrap="none" anchor="t" lIns="0" tIns="0" rIns="0" bIns="0">
-            <a:noAutofit/>
-          </a:bodyPr>
-          <a:lstStyle/>
-          <a:p>
-            <a:pPr algn="l" marL="0" marR="0" indent="0">
-              <a:spcBef>
-                <a:spcPts val="0"/>
-              </a:spcBef>
-              <a:spcAft>
-                <a:spcPts val="0"/>
-              </a:spcAft>
-              <a:buNone/>
-              <a:defRPr sz="1000">
-                <a:latin typeface="微软雅黑"/>
-              </a:defRPr>
-            </a:pPr>
-            <a:r>
-              <a:rPr sz="1000" b="0" i="0" u="none" spc="-100">
-                <a:solidFill>
-                  <a:srgbClr val="585860">
-                    <a:alpha val="100000"/>
-                  </a:srgbClr>
-                </a:solidFill>
-                <a:latin typeface="微软雅黑"/>
-                <a:ea typeface="微软雅黑"/>
-                <a:cs typeface="微软雅黑"/>
-              </a:rPr>
-              <a:t xml:space="preserve">一次购买可下载该 Skill 全部版本</a:t>
-            </a:r>
-            <a:endParaRPr/>
-          </a:p>
-        </p:txBody>
-      </p:sp>
-      <p:sp>
-        <p:nvSpPr>
-          <p:cNvPr id="48" name="文字 48"/>
-          <p:cNvSpPr txBox="1"/>
-          <p:nvPr/>
-        </p:nvSpPr>
-        <p:spPr>
-          <a:xfrm>
-            <a:off x="1273175" y="4322862"/>
-            <a:ext cx="1746250" cy="190500"/>
-          </a:xfrm>
-          <a:prstGeom prst="rect">
-            <a:avLst/>
-          </a:prstGeom>
-          <a:noFill/>
-          <a:ln>
-            <a:noFill/>
-          </a:ln>
-        </p:spPr>
-        <p:txBody>
-          <a:bodyPr wrap="none" anchor="t" lIns="0" tIns="0" rIns="0" bIns="0">
-            <a:noAutofit/>
-          </a:bodyPr>
-          <a:lstStyle/>
-          <a:p>
-            <a:pPr algn="l" marL="0" marR="0" indent="0">
-              <a:spcBef>
-                <a:spcPts val="0"/>
-              </a:spcBef>
-              <a:spcAft>
-                <a:spcPts val="0"/>
-              </a:spcAft>
-              <a:buNone/>
-              <a:defRPr sz="1000">
-                <a:latin typeface="微软雅黑"/>
-              </a:defRPr>
-            </a:pPr>
-            <a:r>
-              <a:rPr sz="1000" b="0" i="0" u="none" spc="-100">
-                <a:solidFill>
-                  <a:srgbClr val="585860">
-                    <a:alpha val="100000"/>
-                  </a:srgbClr>
-                </a:solidFill>
-                <a:latin typeface="微软雅黑"/>
-                <a:ea typeface="微软雅黑"/>
-                <a:cs typeface="微软雅黑"/>
-              </a:rPr>
-              <a:t xml:space="preserve">后续由本地读取、执行和保存</a:t>
-            </a:r>
-            <a:endParaRPr/>
-          </a:p>
-        </p:txBody>
-      </p:sp>
-      <p:sp>
-        <p:nvSpPr>
-          <p:cNvPr id="49" name="形状 49"/>
-          <p:cNvSpPr/>
-          <p:nvPr/>
-        </p:nvSpPr>
-        <p:spPr>
-          <a:xfrm>
-            <a:off x="4076700" y="3586460"/>
-            <a:ext cx="3365500" cy="1365250"/>
-          </a:xfrm>
-          <a:prstGeom prst="roundRect">
-            <a:avLst>
-              <a:gd name="adj" fmla="val 6512"/>
-            </a:avLst>
-          </a:prstGeom>
-          <a:solidFill>
-            <a:srgbClr val="FFFFFF">
-              <a:alpha val="100000"/>
-            </a:srgbClr>
-          </a:solidFill>
-          <a:ln w="6350">
-            <a:solidFill>
-              <a:srgbClr val="D9DDE2">
-                <a:alpha val="100000"/>
-              </a:srgbClr>
-            </a:solidFill>
-            <a:prstDash val="solid"/>
-          </a:ln>
-        </p:spPr>
-        <p:txBody>
-          <a:bodyPr/>
-          <a:p/>
-        </p:txBody>
-      </p:sp>
-      <p:sp>
-        <p:nvSpPr>
-          <p:cNvPr id="50" name="文字 50"/>
-          <p:cNvSpPr txBox="1"/>
-          <p:nvPr/>
-        </p:nvSpPr>
-        <p:spPr>
-          <a:xfrm>
-            <a:off x="4921250" y="3700760"/>
-            <a:ext cx="1689100" cy="222250"/>
-          </a:xfrm>
-          <a:prstGeom prst="rect">
-            <a:avLst/>
-          </a:prstGeom>
-          <a:noFill/>
-          <a:ln>
-            <a:noFill/>
-          </a:ln>
-        </p:spPr>
-        <p:txBody>
-          <a:bodyPr wrap="none" anchor="t" lIns="0" tIns="0" rIns="0" bIns="0">
-            <a:noAutofit/>
-          </a:bodyPr>
-          <a:lstStyle/>
-          <a:p>
-            <a:pPr algn="l" marL="0" marR="0" indent="0">
-              <a:spcBef>
-                <a:spcPts val="0"/>
-              </a:spcBef>
-              <a:spcAft>
-                <a:spcPts val="0"/>
-              </a:spcAft>
-              <a:buNone/>
-              <a:defRPr sz="1000">
-                <a:latin typeface="微软雅黑"/>
-              </a:defRPr>
-            </a:pPr>
-            <a:r>
-              <a:rPr sz="1000" b="1" i="0" u="none" spc="-100">
-                <a:solidFill>
-                  <a:srgbClr val="1A1A1C">
-                    <a:alpha val="100000"/>
-                  </a:srgbClr>
-                </a:solidFill>
-                <a:latin typeface="微软雅黑"/>
-                <a:ea typeface="微软雅黑"/>
-                <a:cs typeface="微软雅黑"/>
-              </a:rPr>
-              <a:t xml:space="preserve">订阅：交付期限内使用权</a:t>
-            </a:r>
-            <a:endParaRPr/>
-          </a:p>
-        </p:txBody>
-      </p:sp>
-      <p:sp>
-        <p:nvSpPr>
-          <p:cNvPr id="51" name="文字 51"/>
-          <p:cNvSpPr txBox="1"/>
-          <p:nvPr/>
-        </p:nvSpPr>
-        <p:spPr>
-          <a:xfrm>
-            <a:off x="5026025" y="3949601"/>
-            <a:ext cx="1479550" cy="190500"/>
-          </a:xfrm>
-          <a:prstGeom prst="rect">
-            <a:avLst/>
-          </a:prstGeom>
-          <a:noFill/>
-          <a:ln>
-            <a:noFill/>
-          </a:ln>
-        </p:spPr>
-        <p:txBody>
-          <a:bodyPr wrap="none" anchor="t" lIns="0" tIns="0" rIns="0" bIns="0">
-            <a:noAutofit/>
-          </a:bodyPr>
-          <a:lstStyle/>
-          <a:p>
-            <a:pPr algn="l" marL="0" marR="0" indent="0">
-              <a:spcBef>
-                <a:spcPts val="0"/>
-              </a:spcBef>
-              <a:spcAft>
-                <a:spcPts val="0"/>
-              </a:spcAft>
-              <a:buNone/>
-              <a:defRPr sz="1000">
-                <a:latin typeface="微软雅黑"/>
-              </a:defRPr>
-            </a:pPr>
-            <a:r>
-              <a:rPr sz="1000" b="0" i="0" u="none" spc="-100">
-                <a:solidFill>
-                  <a:srgbClr val="585860">
-                    <a:alpha val="100000"/>
-                  </a:srgbClr>
-                </a:solidFill>
-                <a:latin typeface="微软雅黑"/>
-                <a:ea typeface="微软雅黑"/>
-                <a:cs typeface="微软雅黑"/>
-              </a:rPr>
-              <a:t xml:space="preserve">本地保留入口与公开资源</a:t>
-            </a:r>
-            <a:endParaRPr/>
-          </a:p>
-        </p:txBody>
-      </p:sp>
-      <p:sp>
-        <p:nvSpPr>
-          <p:cNvPr id="52" name="文字 52"/>
-          <p:cNvSpPr txBox="1"/>
-          <p:nvPr/>
-        </p:nvSpPr>
-        <p:spPr>
-          <a:xfrm>
-            <a:off x="4759325" y="4136231"/>
-            <a:ext cx="2012950" cy="190500"/>
-          </a:xfrm>
-          <a:prstGeom prst="rect">
-            <a:avLst/>
-          </a:prstGeom>
-          <a:noFill/>
-          <a:ln>
-            <a:noFill/>
-          </a:ln>
-        </p:spPr>
-        <p:txBody>
-          <a:bodyPr wrap="none" anchor="t" lIns="0" tIns="0" rIns="0" bIns="0">
-            <a:noAutofit/>
-          </a:bodyPr>
-          <a:lstStyle/>
-          <a:p>
-            <a:pPr algn="l" marL="0" marR="0" indent="0">
-              <a:spcBef>
-                <a:spcPts val="0"/>
-              </a:spcBef>
-              <a:spcAft>
-                <a:spcPts val="0"/>
-              </a:spcAft>
-              <a:buNone/>
-              <a:defRPr sz="1000">
-                <a:latin typeface="微软雅黑"/>
-              </a:defRPr>
-            </a:pPr>
-            <a:r>
-              <a:rPr sz="1000" b="0" i="0" u="none" spc="-100">
-                <a:solidFill>
-                  <a:srgbClr val="585860">
-                    <a:alpha val="100000"/>
-                  </a:srgbClr>
-                </a:solidFill>
-                <a:latin typeface="微软雅黑"/>
-                <a:ea typeface="微软雅黑"/>
-                <a:cs typeface="微软雅黑"/>
-              </a:rPr>
-              <a:t xml:space="preserve">完整原文留云端，按任务提供指导</a:t>
-            </a:r>
-            <a:endParaRPr/>
-          </a:p>
-        </p:txBody>
-      </p:sp>
-      <p:sp>
-        <p:nvSpPr>
-          <p:cNvPr id="53" name="文字 53"/>
-          <p:cNvSpPr txBox="1"/>
-          <p:nvPr/>
-        </p:nvSpPr>
-        <p:spPr>
-          <a:xfrm>
-            <a:off x="4692650" y="4322862"/>
-            <a:ext cx="2146300" cy="190500"/>
-          </a:xfrm>
-          <a:prstGeom prst="rect">
-            <a:avLst/>
-          </a:prstGeom>
-          <a:noFill/>
-          <a:ln>
-            <a:noFill/>
-          </a:ln>
-        </p:spPr>
-        <p:txBody>
-          <a:bodyPr wrap="none" anchor="t" lIns="0" tIns="0" rIns="0" bIns="0">
-            <a:noAutofit/>
-          </a:bodyPr>
-          <a:lstStyle/>
-          <a:p>
-            <a:pPr algn="l" marL="0" marR="0" indent="0">
-              <a:spcBef>
-                <a:spcPts val="0"/>
-              </a:spcBef>
-              <a:spcAft>
-                <a:spcPts val="0"/>
-              </a:spcAft>
-              <a:buNone/>
-              <a:defRPr sz="1000">
-                <a:latin typeface="微软雅黑"/>
-              </a:defRPr>
-            </a:pPr>
-            <a:r>
-              <a:rPr sz="1000" b="0" i="0" u="none" spc="-100">
-                <a:solidFill>
-                  <a:srgbClr val="585860">
-                    <a:alpha val="100000"/>
-                  </a:srgbClr>
-                </a:solidFill>
-                <a:latin typeface="微软雅黑"/>
-                <a:ea typeface="微软雅黑"/>
-                <a:cs typeface="微软雅黑"/>
-              </a:rPr>
-              <a:t xml:space="preserve">当前不自动续费，到期重新取得权益</a:t>
-            </a:r>
-            <a:endParaRPr/>
-          </a:p>
-        </p:txBody>
-      </p:sp>
-      <p:sp>
-        <p:nvSpPr>
-          <p:cNvPr id="54" name="文字 54"/>
-          <p:cNvSpPr txBox="1"/>
-          <p:nvPr/>
-        </p:nvSpPr>
-        <p:spPr>
-          <a:xfrm>
-            <a:off x="457200" y="5104110"/>
-            <a:ext cx="3479800" cy="190500"/>
-          </a:xfrm>
-          <a:prstGeom prst="rect">
-            <a:avLst/>
-          </a:prstGeom>
-          <a:noFill/>
-          <a:ln>
-            <a:noFill/>
-          </a:ln>
-        </p:spPr>
-        <p:txBody>
-          <a:bodyPr wrap="none" anchor="t" lIns="0" tIns="0" rIns="0" bIns="0">
-            <a:noAutofit/>
-          </a:bodyPr>
-          <a:lstStyle/>
-          <a:p>
-            <a:pPr algn="l" marL="0" marR="0" indent="0">
-              <a:spcBef>
-                <a:spcPts val="0"/>
-              </a:spcBef>
-              <a:spcAft>
-                <a:spcPts val="0"/>
-              </a:spcAft>
-              <a:buNone/>
-              <a:defRPr sz="1000">
-                <a:latin typeface="微软雅黑"/>
-              </a:defRPr>
-            </a:pPr>
-            <a:r>
-              <a:rPr sz="1000" b="0" i="0" u="none" spc="-100">
-                <a:solidFill>
-                  <a:srgbClr val="B5333B">
-                    <a:alpha val="100000"/>
-                  </a:srgbClr>
-                </a:solidFill>
-                <a:latin typeface="微软雅黑"/>
-                <a:ea typeface="微软雅黑"/>
-                <a:cs typeface="微软雅黑"/>
-              </a:rPr>
-              <a:t xml:space="preserve">支付后按商品模式分叉，订阅并不等于每次任务重新扣款。</a:t>
-            </a:r>
-            <a:endParaRPr/>
-          </a:p>
-        </p:txBody>
-      </p:sp>
       <p:cxnSp>
         <p:nvCxnSpPr>
           <p:cNvPr id="55" name="Editable line 55"/>
@@ -7675,6 +6400,974 @@
           </a:prstGeom>
         </p:spPr>
       </p:pic>
+      <p:sp>
+        <p:nvSpPr>
+          <p:cNvPr id="77" name="TextBox 76"/>
+          <p:cNvSpPr txBox="1"/>
+          <p:nvPr/>
+        </p:nvSpPr>
+        <p:spPr>
+          <a:xfrm>
+            <a:off x="121919" y="1933955"/>
+            <a:ext cx="2316480" cy="150876"/>
+          </a:xfrm>
+          <a:prstGeom prst="rect">
+            <a:avLst/>
+          </a:prstGeom>
+          <a:noFill/>
+        </p:spPr>
+        <p:txBody>
+          <a:bodyPr wrap="square" lIns="0" rIns="0" tIns="0" bIns="0" anchor="t">
+            <a:spAutoFit/>
+          </a:bodyPr>
+          <a:lstStyle/>
+          <a:p>
+            <a:pPr algn="ctr">
+              <a:lnSpc>
+                <a:spcPct val="100000"/>
+              </a:lnSpc>
+            </a:pPr>
+            <a:r>
+              <a:rPr sz="1200" b="1">
+                <a:solidFill>
+                  <a:srgbClr val="1A1A1C"/>
+                </a:solidFill>
+                <a:latin typeface="微软雅黑"/>
+                <a:ea typeface="微软雅黑"/>
+                <a:cs typeface="微软雅黑"/>
+              </a:rPr>
+              <a:t>用户</a:t>
+            </a:r>
+          </a:p>
+        </p:txBody>
+      </p:sp>
+      <p:cxnSp>
+        <p:nvCxnSpPr>
+          <p:cNvPr id="78" name="Connector 77"/>
+          <p:cNvCxnSpPr/>
+          <p:nvPr/>
+        </p:nvCxnSpPr>
+        <p:spPr>
+          <a:xfrm>
+            <a:off x="1280160" y="2125980"/>
+            <a:ext cx="0" cy="2606040"/>
+          </a:xfrm>
+          <a:prstGeom prst="line">
+            <a:avLst/>
+          </a:prstGeom>
+          <a:ln w="10160">
+            <a:solidFill>
+              <a:srgbClr val="C4C8CD"/>
+            </a:solidFill>
+            <a:prstDash val="sysDot"/>
+          </a:ln>
+        </p:spPr>
+        <p:style>
+          <a:lnRef idx="2">
+            <a:schemeClr val="accent1"/>
+          </a:lnRef>
+          <a:fillRef idx="0">
+            <a:schemeClr val="accent1"/>
+          </a:fillRef>
+          <a:effectRef idx="1">
+            <a:schemeClr val="accent1"/>
+          </a:effectRef>
+          <a:fontRef idx="minor">
+            <a:schemeClr val="tx1"/>
+          </a:fontRef>
+        </p:style>
+      </p:cxnSp>
+      <p:sp>
+        <p:nvSpPr>
+          <p:cNvPr id="79" name="TextBox 78"/>
+          <p:cNvSpPr txBox="1"/>
+          <p:nvPr/>
+        </p:nvSpPr>
+        <p:spPr>
+          <a:xfrm>
+            <a:off x="1950720" y="1933955"/>
+            <a:ext cx="2316480" cy="150876"/>
+          </a:xfrm>
+          <a:prstGeom prst="rect">
+            <a:avLst/>
+          </a:prstGeom>
+          <a:noFill/>
+        </p:spPr>
+        <p:txBody>
+          <a:bodyPr wrap="square" lIns="0" rIns="0" tIns="0" bIns="0" anchor="t">
+            <a:spAutoFit/>
+          </a:bodyPr>
+          <a:lstStyle/>
+          <a:p>
+            <a:pPr algn="ctr">
+              <a:lnSpc>
+                <a:spcPct val="100000"/>
+              </a:lnSpc>
+            </a:pPr>
+            <a:r>
+              <a:rPr sz="1200" b="1">
+                <a:solidFill>
+                  <a:srgbClr val="1A1A1C"/>
+                </a:solidFill>
+                <a:latin typeface="微软雅黑"/>
+                <a:ea typeface="微软雅黑"/>
+                <a:cs typeface="微软雅黑"/>
+              </a:rPr>
+              <a:t>用户 Agent</a:t>
+            </a:r>
+          </a:p>
+        </p:txBody>
+      </p:sp>
+      <p:cxnSp>
+        <p:nvCxnSpPr>
+          <p:cNvPr id="80" name="Connector 79"/>
+          <p:cNvCxnSpPr/>
+          <p:nvPr/>
+        </p:nvCxnSpPr>
+        <p:spPr>
+          <a:xfrm>
+            <a:off x="3108960" y="2125980"/>
+            <a:ext cx="0" cy="2606040"/>
+          </a:xfrm>
+          <a:prstGeom prst="line">
+            <a:avLst/>
+          </a:prstGeom>
+          <a:ln w="10160">
+            <a:solidFill>
+              <a:srgbClr val="C4C8CD"/>
+            </a:solidFill>
+            <a:prstDash val="sysDot"/>
+          </a:ln>
+        </p:spPr>
+        <p:style>
+          <a:lnRef idx="2">
+            <a:schemeClr val="accent1"/>
+          </a:lnRef>
+          <a:fillRef idx="0">
+            <a:schemeClr val="accent1"/>
+          </a:fillRef>
+          <a:effectRef idx="1">
+            <a:schemeClr val="accent1"/>
+          </a:effectRef>
+          <a:fontRef idx="minor">
+            <a:schemeClr val="tx1"/>
+          </a:fontRef>
+        </p:style>
+      </p:cxnSp>
+      <p:sp>
+        <p:nvSpPr>
+          <p:cNvPr id="81" name="TextBox 80"/>
+          <p:cNvSpPr txBox="1"/>
+          <p:nvPr/>
+        </p:nvSpPr>
+        <p:spPr>
+          <a:xfrm>
+            <a:off x="3779520" y="1933955"/>
+            <a:ext cx="2316480" cy="150876"/>
+          </a:xfrm>
+          <a:prstGeom prst="rect">
+            <a:avLst/>
+          </a:prstGeom>
+          <a:noFill/>
+        </p:spPr>
+        <p:txBody>
+          <a:bodyPr wrap="square" lIns="0" rIns="0" tIns="0" bIns="0" anchor="t">
+            <a:spAutoFit/>
+          </a:bodyPr>
+          <a:lstStyle/>
+          <a:p>
+            <a:pPr algn="ctr">
+              <a:lnSpc>
+                <a:spcPct val="100000"/>
+              </a:lnSpc>
+            </a:pPr>
+            <a:r>
+              <a:rPr sz="1200" b="1">
+                <a:solidFill>
+                  <a:srgbClr val="1A1A1C"/>
+                </a:solidFill>
+                <a:latin typeface="微软雅黑"/>
+                <a:ea typeface="微软雅黑"/>
+                <a:cs typeface="微软雅黑"/>
+              </a:rPr>
+              <a:t>支付宝 SkillPay</a:t>
+            </a:r>
+          </a:p>
+        </p:txBody>
+      </p:sp>
+      <p:cxnSp>
+        <p:nvCxnSpPr>
+          <p:cNvPr id="82" name="Connector 81"/>
+          <p:cNvCxnSpPr/>
+          <p:nvPr/>
+        </p:nvCxnSpPr>
+        <p:spPr>
+          <a:xfrm>
+            <a:off x="4937760" y="2125980"/>
+            <a:ext cx="0" cy="2606040"/>
+          </a:xfrm>
+          <a:prstGeom prst="line">
+            <a:avLst/>
+          </a:prstGeom>
+          <a:ln w="10160">
+            <a:solidFill>
+              <a:srgbClr val="C4C8CD"/>
+            </a:solidFill>
+            <a:prstDash val="sysDot"/>
+          </a:ln>
+        </p:spPr>
+        <p:style>
+          <a:lnRef idx="2">
+            <a:schemeClr val="accent1"/>
+          </a:lnRef>
+          <a:fillRef idx="0">
+            <a:schemeClr val="accent1"/>
+          </a:fillRef>
+          <a:effectRef idx="1">
+            <a:schemeClr val="accent1"/>
+          </a:effectRef>
+          <a:fontRef idx="minor">
+            <a:schemeClr val="tx1"/>
+          </a:fontRef>
+        </p:style>
+      </p:cxnSp>
+      <p:sp>
+        <p:nvSpPr>
+          <p:cNvPr id="83" name="TextBox 82"/>
+          <p:cNvSpPr txBox="1"/>
+          <p:nvPr/>
+        </p:nvSpPr>
+        <p:spPr>
+          <a:xfrm>
+            <a:off x="5608320" y="1933955"/>
+            <a:ext cx="2316480" cy="150876"/>
+          </a:xfrm>
+          <a:prstGeom prst="rect">
+            <a:avLst/>
+          </a:prstGeom>
+          <a:noFill/>
+        </p:spPr>
+        <p:txBody>
+          <a:bodyPr wrap="square" lIns="0" rIns="0" tIns="0" bIns="0" anchor="t">
+            <a:spAutoFit/>
+          </a:bodyPr>
+          <a:lstStyle/>
+          <a:p>
+            <a:pPr algn="ctr">
+              <a:lnSpc>
+                <a:spcPct val="100000"/>
+              </a:lnSpc>
+            </a:pPr>
+            <a:r>
+              <a:rPr sz="1200" b="1">
+                <a:solidFill>
+                  <a:srgbClr val="1A1A1C"/>
+                </a:solidFill>
+                <a:latin typeface="微软雅黑"/>
+                <a:ea typeface="微软雅黑"/>
+                <a:cs typeface="微软雅黑"/>
+              </a:rPr>
+              <a:t>商品履约</a:t>
+            </a:r>
+          </a:p>
+        </p:txBody>
+      </p:sp>
+      <p:cxnSp>
+        <p:nvCxnSpPr>
+          <p:cNvPr id="84" name="Connector 83"/>
+          <p:cNvCxnSpPr/>
+          <p:nvPr/>
+        </p:nvCxnSpPr>
+        <p:spPr>
+          <a:xfrm>
+            <a:off x="6766560" y="2125980"/>
+            <a:ext cx="0" cy="2606040"/>
+          </a:xfrm>
+          <a:prstGeom prst="line">
+            <a:avLst/>
+          </a:prstGeom>
+          <a:ln w="10160">
+            <a:solidFill>
+              <a:srgbClr val="C4C8CD"/>
+            </a:solidFill>
+            <a:prstDash val="sysDot"/>
+          </a:ln>
+        </p:spPr>
+        <p:style>
+          <a:lnRef idx="2">
+            <a:schemeClr val="accent1"/>
+          </a:lnRef>
+          <a:fillRef idx="0">
+            <a:schemeClr val="accent1"/>
+          </a:fillRef>
+          <a:effectRef idx="1">
+            <a:schemeClr val="accent1"/>
+          </a:effectRef>
+          <a:fontRef idx="minor">
+            <a:schemeClr val="tx1"/>
+          </a:fontRef>
+        </p:style>
+      </p:cxnSp>
+      <p:cxnSp>
+        <p:nvCxnSpPr>
+          <p:cNvPr id="85" name="Connector 84"/>
+          <p:cNvCxnSpPr/>
+          <p:nvPr/>
+        </p:nvCxnSpPr>
+        <p:spPr>
+          <a:xfrm>
+            <a:off x="1280160" y="2434590"/>
+            <a:ext cx="1828800" cy="0"/>
+          </a:xfrm>
+          <a:prstGeom prst="line">
+            <a:avLst/>
+          </a:prstGeom>
+          <a:ln w="11430">
+            <a:solidFill>
+              <a:srgbClr val="5B616B"/>
+            </a:solidFill>
+            <a:tailEnd type="triangle" w="sm" len="sm"/>
+          </a:ln>
+        </p:spPr>
+        <p:style>
+          <a:lnRef idx="2">
+            <a:schemeClr val="accent1"/>
+          </a:lnRef>
+          <a:fillRef idx="0">
+            <a:schemeClr val="accent1"/>
+          </a:fillRef>
+          <a:effectRef idx="1">
+            <a:schemeClr val="accent1"/>
+          </a:effectRef>
+          <a:fontRef idx="minor">
+            <a:schemeClr val="tx1"/>
+          </a:fontRef>
+        </p:style>
+      </p:cxnSp>
+      <p:sp>
+        <p:nvSpPr>
+          <p:cNvPr id="86" name="TextBox 85"/>
+          <p:cNvSpPr txBox="1"/>
+          <p:nvPr/>
+        </p:nvSpPr>
+        <p:spPr>
+          <a:xfrm>
+            <a:off x="1341120" y="2228850"/>
+            <a:ext cx="1706880" cy="109728"/>
+          </a:xfrm>
+          <a:prstGeom prst="rect">
+            <a:avLst/>
+          </a:prstGeom>
+          <a:noFill/>
+        </p:spPr>
+        <p:txBody>
+          <a:bodyPr wrap="square" lIns="0" rIns="0" tIns="0" bIns="0" anchor="t">
+            <a:spAutoFit/>
+          </a:bodyPr>
+          <a:lstStyle/>
+          <a:p>
+            <a:pPr algn="ctr">
+              <a:lnSpc>
+                <a:spcPct val="100000"/>
+              </a:lnSpc>
+            </a:pPr>
+            <a:r>
+              <a:rPr sz="900" b="0">
+                <a:solidFill>
+                  <a:srgbClr val="5B616B"/>
+                </a:solidFill>
+                <a:latin typeface="微软雅黑"/>
+                <a:ea typeface="微软雅黑"/>
+                <a:cs typeface="微软雅黑"/>
+              </a:rPr>
+              <a:t>① 提出任务</a:t>
+            </a:r>
+          </a:p>
+        </p:txBody>
+      </p:sp>
+      <p:cxnSp>
+        <p:nvCxnSpPr>
+          <p:cNvPr id="87" name="Connector 86"/>
+          <p:cNvCxnSpPr/>
+          <p:nvPr/>
+        </p:nvCxnSpPr>
+        <p:spPr>
+          <a:xfrm>
+            <a:off x="3108960" y="2722626"/>
+            <a:ext cx="1828800" cy="0"/>
+          </a:xfrm>
+          <a:prstGeom prst="line">
+            <a:avLst/>
+          </a:prstGeom>
+          <a:ln w="11430">
+            <a:solidFill>
+              <a:srgbClr val="5B616B"/>
+            </a:solidFill>
+            <a:tailEnd type="triangle" w="sm" len="sm"/>
+          </a:ln>
+        </p:spPr>
+        <p:style>
+          <a:lnRef idx="2">
+            <a:schemeClr val="accent1"/>
+          </a:lnRef>
+          <a:fillRef idx="0">
+            <a:schemeClr val="accent1"/>
+          </a:fillRef>
+          <a:effectRef idx="1">
+            <a:schemeClr val="accent1"/>
+          </a:effectRef>
+          <a:fontRef idx="minor">
+            <a:schemeClr val="tx1"/>
+          </a:fontRef>
+        </p:style>
+      </p:cxnSp>
+      <p:sp>
+        <p:nvSpPr>
+          <p:cNvPr id="88" name="TextBox 87"/>
+          <p:cNvSpPr txBox="1"/>
+          <p:nvPr/>
+        </p:nvSpPr>
+        <p:spPr>
+          <a:xfrm>
+            <a:off x="3169920" y="2516886"/>
+            <a:ext cx="1706880" cy="109728"/>
+          </a:xfrm>
+          <a:prstGeom prst="rect">
+            <a:avLst/>
+          </a:prstGeom>
+          <a:noFill/>
+        </p:spPr>
+        <p:txBody>
+          <a:bodyPr wrap="square" lIns="0" rIns="0" tIns="0" bIns="0" anchor="t">
+            <a:spAutoFit/>
+          </a:bodyPr>
+          <a:lstStyle/>
+          <a:p>
+            <a:pPr algn="ctr">
+              <a:lnSpc>
+                <a:spcPct val="100000"/>
+              </a:lnSpc>
+            </a:pPr>
+            <a:r>
+              <a:rPr sz="900" b="0">
+                <a:solidFill>
+                  <a:srgbClr val="5B616B"/>
+                </a:solidFill>
+                <a:latin typeface="微软雅黑"/>
+                <a:ea typeface="微软雅黑"/>
+                <a:cs typeface="微软雅黑"/>
+              </a:rPr>
+              <a:t>② 请求调用</a:t>
+            </a:r>
+          </a:p>
+        </p:txBody>
+      </p:sp>
+      <p:cxnSp>
+        <p:nvCxnSpPr>
+          <p:cNvPr id="89" name="Connector 88"/>
+          <p:cNvCxnSpPr/>
+          <p:nvPr/>
+        </p:nvCxnSpPr>
+        <p:spPr>
+          <a:xfrm flipH="1">
+            <a:off x="3108960" y="3010662"/>
+            <a:ext cx="1828800" cy="0"/>
+          </a:xfrm>
+          <a:prstGeom prst="line">
+            <a:avLst/>
+          </a:prstGeom>
+          <a:ln w="11430">
+            <a:solidFill>
+              <a:srgbClr val="B5333B"/>
+            </a:solidFill>
+            <a:prstDash val="dash"/>
+            <a:tailEnd type="triangle" w="sm" len="sm"/>
+          </a:ln>
+        </p:spPr>
+        <p:style>
+          <a:lnRef idx="2">
+            <a:schemeClr val="accent1"/>
+          </a:lnRef>
+          <a:fillRef idx="0">
+            <a:schemeClr val="accent1"/>
+          </a:fillRef>
+          <a:effectRef idx="1">
+            <a:schemeClr val="accent1"/>
+          </a:effectRef>
+          <a:fontRef idx="minor">
+            <a:schemeClr val="tx1"/>
+          </a:fontRef>
+        </p:style>
+      </p:cxnSp>
+      <p:sp>
+        <p:nvSpPr>
+          <p:cNvPr id="90" name="TextBox 89"/>
+          <p:cNvSpPr txBox="1"/>
+          <p:nvPr/>
+        </p:nvSpPr>
+        <p:spPr>
+          <a:xfrm>
+            <a:off x="2865120" y="2804922"/>
+            <a:ext cx="2316480" cy="109728"/>
+          </a:xfrm>
+          <a:prstGeom prst="rect">
+            <a:avLst/>
+          </a:prstGeom>
+          <a:noFill/>
+        </p:spPr>
+        <p:txBody>
+          <a:bodyPr wrap="square" lIns="0" rIns="0" tIns="0" bIns="0" anchor="t">
+            <a:spAutoFit/>
+          </a:bodyPr>
+          <a:lstStyle/>
+          <a:p>
+            <a:pPr algn="ctr">
+              <a:lnSpc>
+                <a:spcPct val="100000"/>
+              </a:lnSpc>
+            </a:pPr>
+            <a:r>
+              <a:rPr sz="900" b="0">
+                <a:solidFill>
+                  <a:srgbClr val="B5333B"/>
+                </a:solidFill>
+                <a:latin typeface="微软雅黑"/>
+                <a:ea typeface="微软雅黑"/>
+                <a:cs typeface="微软雅黑"/>
+              </a:rPr>
+              <a:t>③ HTTP 402 + 支付要求</a:t>
+            </a:r>
+          </a:p>
+        </p:txBody>
+      </p:sp>
+      <p:cxnSp>
+        <p:nvCxnSpPr>
+          <p:cNvPr id="91" name="Connector 90"/>
+          <p:cNvCxnSpPr/>
+          <p:nvPr/>
+        </p:nvCxnSpPr>
+        <p:spPr>
+          <a:xfrm flipH="1">
+            <a:off x="1280160" y="3298698"/>
+            <a:ext cx="1828800" cy="0"/>
+          </a:xfrm>
+          <a:prstGeom prst="line">
+            <a:avLst/>
+          </a:prstGeom>
+          <a:ln w="11430">
+            <a:solidFill>
+              <a:srgbClr val="5B616B"/>
+            </a:solidFill>
+            <a:prstDash val="dash"/>
+            <a:tailEnd type="triangle" w="sm" len="sm"/>
+          </a:ln>
+        </p:spPr>
+        <p:style>
+          <a:lnRef idx="2">
+            <a:schemeClr val="accent1"/>
+          </a:lnRef>
+          <a:fillRef idx="0">
+            <a:schemeClr val="accent1"/>
+          </a:fillRef>
+          <a:effectRef idx="1">
+            <a:schemeClr val="accent1"/>
+          </a:effectRef>
+          <a:fontRef idx="minor">
+            <a:schemeClr val="tx1"/>
+          </a:fontRef>
+        </p:style>
+      </p:cxnSp>
+      <p:sp>
+        <p:nvSpPr>
+          <p:cNvPr id="92" name="TextBox 91"/>
+          <p:cNvSpPr txBox="1"/>
+          <p:nvPr/>
+        </p:nvSpPr>
+        <p:spPr>
+          <a:xfrm>
+            <a:off x="975360" y="3092958"/>
+            <a:ext cx="2438400" cy="109728"/>
+          </a:xfrm>
+          <a:prstGeom prst="rect">
+            <a:avLst/>
+          </a:prstGeom>
+          <a:noFill/>
+        </p:spPr>
+        <p:txBody>
+          <a:bodyPr wrap="square" lIns="0" rIns="0" tIns="0" bIns="0" anchor="t">
+            <a:spAutoFit/>
+          </a:bodyPr>
+          <a:lstStyle/>
+          <a:p>
+            <a:pPr algn="ctr">
+              <a:lnSpc>
+                <a:spcPct val="100000"/>
+              </a:lnSpc>
+            </a:pPr>
+            <a:r>
+              <a:rPr sz="900" b="0">
+                <a:solidFill>
+                  <a:srgbClr val="5B616B"/>
+                </a:solidFill>
+                <a:latin typeface="微软雅黑"/>
+                <a:ea typeface="微软雅黑"/>
+                <a:cs typeface="微软雅黑"/>
+              </a:rPr>
+              <a:t>④ 说明价格并请求确认</a:t>
+            </a:r>
+          </a:p>
+        </p:txBody>
+      </p:sp>
+      <p:cxnSp>
+        <p:nvCxnSpPr>
+          <p:cNvPr id="93" name="Connector 92"/>
+          <p:cNvCxnSpPr/>
+          <p:nvPr/>
+        </p:nvCxnSpPr>
+        <p:spPr>
+          <a:xfrm>
+            <a:off x="1280160" y="3586734"/>
+            <a:ext cx="1828800" cy="0"/>
+          </a:xfrm>
+          <a:prstGeom prst="line">
+            <a:avLst/>
+          </a:prstGeom>
+          <a:ln w="11430">
+            <a:solidFill>
+              <a:srgbClr val="B5333B"/>
+            </a:solidFill>
+            <a:tailEnd type="triangle" w="sm" len="sm"/>
+          </a:ln>
+        </p:spPr>
+        <p:style>
+          <a:lnRef idx="2">
+            <a:schemeClr val="accent1"/>
+          </a:lnRef>
+          <a:fillRef idx="0">
+            <a:schemeClr val="accent1"/>
+          </a:fillRef>
+          <a:effectRef idx="1">
+            <a:schemeClr val="accent1"/>
+          </a:effectRef>
+          <a:fontRef idx="minor">
+            <a:schemeClr val="tx1"/>
+          </a:fontRef>
+        </p:style>
+      </p:cxnSp>
+      <p:sp>
+        <p:nvSpPr>
+          <p:cNvPr id="94" name="TextBox 93"/>
+          <p:cNvSpPr txBox="1"/>
+          <p:nvPr/>
+        </p:nvSpPr>
+        <p:spPr>
+          <a:xfrm>
+            <a:off x="1341120" y="3380994"/>
+            <a:ext cx="1706880" cy="109728"/>
+          </a:xfrm>
+          <a:prstGeom prst="rect">
+            <a:avLst/>
+          </a:prstGeom>
+          <a:noFill/>
+        </p:spPr>
+        <p:txBody>
+          <a:bodyPr wrap="square" lIns="0" rIns="0" tIns="0" bIns="0" anchor="t">
+            <a:spAutoFit/>
+          </a:bodyPr>
+          <a:lstStyle/>
+          <a:p>
+            <a:pPr algn="ctr">
+              <a:lnSpc>
+                <a:spcPct val="100000"/>
+              </a:lnSpc>
+            </a:pPr>
+            <a:r>
+              <a:rPr sz="900" b="0">
+                <a:solidFill>
+                  <a:srgbClr val="B5333B"/>
+                </a:solidFill>
+                <a:latin typeface="微软雅黑"/>
+                <a:ea typeface="微软雅黑"/>
+                <a:cs typeface="微软雅黑"/>
+              </a:rPr>
+              <a:t>⑤ 确认支付</a:t>
+            </a:r>
+          </a:p>
+        </p:txBody>
+      </p:sp>
+      <p:cxnSp>
+        <p:nvCxnSpPr>
+          <p:cNvPr id="95" name="Connector 94"/>
+          <p:cNvCxnSpPr/>
+          <p:nvPr/>
+        </p:nvCxnSpPr>
+        <p:spPr>
+          <a:xfrm>
+            <a:off x="3108960" y="3874769"/>
+            <a:ext cx="1828800" cy="0"/>
+          </a:xfrm>
+          <a:prstGeom prst="line">
+            <a:avLst/>
+          </a:prstGeom>
+          <a:ln w="11430">
+            <a:solidFill>
+              <a:srgbClr val="B5333B"/>
+            </a:solidFill>
+            <a:tailEnd type="triangle" w="sm" len="sm"/>
+          </a:ln>
+        </p:spPr>
+        <p:style>
+          <a:lnRef idx="2">
+            <a:schemeClr val="accent1"/>
+          </a:lnRef>
+          <a:fillRef idx="0">
+            <a:schemeClr val="accent1"/>
+          </a:fillRef>
+          <a:effectRef idx="1">
+            <a:schemeClr val="accent1"/>
+          </a:effectRef>
+          <a:fontRef idx="minor">
+            <a:schemeClr val="tx1"/>
+          </a:fontRef>
+        </p:style>
+      </p:cxnSp>
+      <p:sp>
+        <p:nvSpPr>
+          <p:cNvPr id="96" name="TextBox 95"/>
+          <p:cNvSpPr txBox="1"/>
+          <p:nvPr/>
+        </p:nvSpPr>
+        <p:spPr>
+          <a:xfrm>
+            <a:off x="2865120" y="3669029"/>
+            <a:ext cx="2316480" cy="109728"/>
+          </a:xfrm>
+          <a:prstGeom prst="rect">
+            <a:avLst/>
+          </a:prstGeom>
+          <a:noFill/>
+        </p:spPr>
+        <p:txBody>
+          <a:bodyPr wrap="square" lIns="0" rIns="0" tIns="0" bIns="0" anchor="t">
+            <a:spAutoFit/>
+          </a:bodyPr>
+          <a:lstStyle/>
+          <a:p>
+            <a:pPr algn="ctr">
+              <a:lnSpc>
+                <a:spcPct val="100000"/>
+              </a:lnSpc>
+            </a:pPr>
+            <a:r>
+              <a:rPr sz="900" b="0">
+                <a:solidFill>
+                  <a:srgbClr val="B5333B"/>
+                </a:solidFill>
+                <a:latin typeface="微软雅黑"/>
+                <a:ea typeface="微软雅黑"/>
+                <a:cs typeface="微软雅黑"/>
+              </a:rPr>
+              <a:t>⑥ 携带支付结果重试</a:t>
+            </a:r>
+          </a:p>
+        </p:txBody>
+      </p:sp>
+      <p:cxnSp>
+        <p:nvCxnSpPr>
+          <p:cNvPr id="97" name="Connector 96"/>
+          <p:cNvCxnSpPr/>
+          <p:nvPr/>
+        </p:nvCxnSpPr>
+        <p:spPr>
+          <a:xfrm>
+            <a:off x="4937760" y="4162806"/>
+            <a:ext cx="1828800" cy="0"/>
+          </a:xfrm>
+          <a:prstGeom prst="line">
+            <a:avLst/>
+          </a:prstGeom>
+          <a:ln w="11430">
+            <a:solidFill>
+              <a:srgbClr val="B5333B"/>
+            </a:solidFill>
+            <a:tailEnd type="triangle" w="sm" len="sm"/>
+          </a:ln>
+        </p:spPr>
+        <p:style>
+          <a:lnRef idx="2">
+            <a:schemeClr val="accent1"/>
+          </a:lnRef>
+          <a:fillRef idx="0">
+            <a:schemeClr val="accent1"/>
+          </a:fillRef>
+          <a:effectRef idx="1">
+            <a:schemeClr val="accent1"/>
+          </a:effectRef>
+          <a:fontRef idx="minor">
+            <a:schemeClr val="tx1"/>
+          </a:fontRef>
+        </p:style>
+      </p:cxnSp>
+      <p:sp>
+        <p:nvSpPr>
+          <p:cNvPr id="98" name="TextBox 97"/>
+          <p:cNvSpPr txBox="1"/>
+          <p:nvPr/>
+        </p:nvSpPr>
+        <p:spPr>
+          <a:xfrm>
+            <a:off x="4328160" y="3957066"/>
+            <a:ext cx="3048000" cy="109728"/>
+          </a:xfrm>
+          <a:prstGeom prst="rect">
+            <a:avLst/>
+          </a:prstGeom>
+          <a:noFill/>
+        </p:spPr>
+        <p:txBody>
+          <a:bodyPr wrap="square" lIns="0" rIns="0" tIns="0" bIns="0" anchor="t">
+            <a:spAutoFit/>
+          </a:bodyPr>
+          <a:lstStyle/>
+          <a:p>
+            <a:pPr algn="ctr">
+              <a:lnSpc>
+                <a:spcPct val="100000"/>
+              </a:lnSpc>
+            </a:pPr>
+            <a:r>
+              <a:rPr sz="900" b="0">
+                <a:solidFill>
+                  <a:srgbClr val="B5333B"/>
+                </a:solidFill>
+                <a:latin typeface="微软雅黑"/>
+                <a:ea typeface="微软雅黑"/>
+                <a:cs typeface="微软雅黑"/>
+              </a:rPr>
+              <a:t>⑦ 一次性交付 / 创建订阅权益</a:t>
+            </a:r>
+          </a:p>
+        </p:txBody>
+      </p:sp>
+      <p:cxnSp>
+        <p:nvCxnSpPr>
+          <p:cNvPr id="99" name="Connector 98"/>
+          <p:cNvCxnSpPr/>
+          <p:nvPr/>
+        </p:nvCxnSpPr>
+        <p:spPr>
+          <a:xfrm flipH="1">
+            <a:off x="3108960" y="4450842"/>
+            <a:ext cx="3657600" cy="0"/>
+          </a:xfrm>
+          <a:prstGeom prst="line">
+            <a:avLst/>
+          </a:prstGeom>
+          <a:ln w="11430">
+            <a:solidFill>
+              <a:srgbClr val="5B616B"/>
+            </a:solidFill>
+            <a:prstDash val="dash"/>
+            <a:tailEnd type="triangle" w="sm" len="sm"/>
+          </a:ln>
+        </p:spPr>
+        <p:style>
+          <a:lnRef idx="2">
+            <a:schemeClr val="accent1"/>
+          </a:lnRef>
+          <a:fillRef idx="0">
+            <a:schemeClr val="accent1"/>
+          </a:fillRef>
+          <a:effectRef idx="1">
+            <a:schemeClr val="accent1"/>
+          </a:effectRef>
+          <a:fontRef idx="minor">
+            <a:schemeClr val="tx1"/>
+          </a:fontRef>
+        </p:style>
+      </p:cxnSp>
+      <p:sp>
+        <p:nvSpPr>
+          <p:cNvPr id="100" name="TextBox 99"/>
+          <p:cNvSpPr txBox="1"/>
+          <p:nvPr/>
+        </p:nvSpPr>
+        <p:spPr>
+          <a:xfrm>
+            <a:off x="2865120" y="4245102"/>
+            <a:ext cx="4145280" cy="109728"/>
+          </a:xfrm>
+          <a:prstGeom prst="rect">
+            <a:avLst/>
+          </a:prstGeom>
+          <a:noFill/>
+        </p:spPr>
+        <p:txBody>
+          <a:bodyPr wrap="square" lIns="0" rIns="0" tIns="0" bIns="0" anchor="t">
+            <a:spAutoFit/>
+          </a:bodyPr>
+          <a:lstStyle/>
+          <a:p>
+            <a:pPr algn="ctr">
+              <a:lnSpc>
+                <a:spcPct val="100000"/>
+              </a:lnSpc>
+            </a:pPr>
+            <a:r>
+              <a:rPr sz="900" b="0">
+                <a:solidFill>
+                  <a:srgbClr val="5B616B"/>
+                </a:solidFill>
+                <a:latin typeface="微软雅黑"/>
+                <a:ea typeface="微软雅黑"/>
+                <a:cs typeface="微软雅黑"/>
+              </a:rPr>
+              <a:t>⑧ 恢复安装或调用，继续原任务</a:t>
+            </a:r>
+          </a:p>
+        </p:txBody>
+      </p:sp>
+      <p:sp>
+        <p:nvSpPr>
+          <p:cNvPr id="101" name="TextBox 100"/>
+          <p:cNvSpPr txBox="1"/>
+          <p:nvPr/>
+        </p:nvSpPr>
+        <p:spPr>
+          <a:xfrm>
+            <a:off x="426720" y="4869180"/>
+            <a:ext cx="7193280" cy="116586"/>
+          </a:xfrm>
+          <a:prstGeom prst="rect">
+            <a:avLst/>
+          </a:prstGeom>
+          <a:noFill/>
+        </p:spPr>
+        <p:txBody>
+          <a:bodyPr wrap="square" lIns="0" rIns="0" tIns="0" bIns="0" anchor="t">
+            <a:spAutoFit/>
+          </a:bodyPr>
+          <a:lstStyle/>
+          <a:p>
+            <a:pPr algn="l">
+              <a:lnSpc>
+                <a:spcPct val="100000"/>
+              </a:lnSpc>
+            </a:pPr>
+            <a:r>
+              <a:rPr sz="819" b="0">
+                <a:solidFill>
+                  <a:srgbClr val="5B616B"/>
+                </a:solidFill>
+                <a:latin typeface="微软雅黑"/>
+                <a:ea typeface="微软雅黑"/>
+                <a:cs typeface="微软雅黑"/>
+              </a:rPr>
+              <a:t>交付分叉：买断=源文件；订阅=使用权；支付成功≠交付成功。</a:t>
+            </a:r>
+          </a:p>
+        </p:txBody>
+      </p:sp>
     </p:spTree>
   </p:cSld>
   <p:clrMapOvr>
